--- a/reports/sara-2026/Lowering_the_Barrier_to_Radio_Astronomy_SARA_2026.pptx
+++ b/reports/sara-2026/Lowering_the_Barrier_to_Radio_Astronomy_SARA_2026.pptx
@@ -18,9 +18,10 @@
     <p:sldId id="266" r:id="rId12"/>
     <p:sldId id="267" r:id="rId13"/>
     <p:sldId id="268" r:id="rId14"/>
+    <p:sldId id="269" r:id="rId15"/>
   </p:sldIdLst>
   <p:notesMasterIdLst>
-    <p:notesMasterId r:id="rId15"/>
+    <p:notesMasterId r:id="rId16"/>
   </p:notesMasterIdLst>
   <p:sldSz cx="12192000" cy="6858000"/>
   <p:notesSz cx="6858000" cy="12192000"/>
@@ -602,7 +603,7 @@
           <a:p>
             <a:r>
               <a:rPr lang="en-US" dirty="0"/>
-              <a:t>Crowd-pleaser story: the field box (Raspberry Pi 5, viewed over remote desktop) had 'broken' menus. Every symptom traced to one condition — headless operation yields a zero-by-zero screen. The fix shipped in v1.1.6 and the box was verified running it. Moral for any club running remote gear.</a:t>
+              <a:t>Two independent arguments. Physics: the dispersion curve is the fingerprint — RFI doesn't have one. Engineering: the same recordings re-analyzed on separately compiled PRESTO builds on two operating systems agree to three significant figures.</a:t>
             </a:r>
             <a:endParaRPr lang="en-US" dirty="0"/>
           </a:p>
@@ -690,7 +691,7 @@
           <a:p>
             <a:r>
               <a:rPr lang="en-US" dirty="0"/>
-              <a:t>Everything the field session asked for shipped within two days, and every machine — including the field box — converged on the release through the built-in updater. The line-endings epilogue is worth telling: the first Windows-built archive broke Unix launches; the field box exposed it within a day.</a:t>
+              <a:t>Crowd-pleaser story: the field box (Raspberry Pi 5, viewed over remote desktop) had 'broken' menus. Every symptom traced to one condition — headless operation yields a zero-by-zero screen. The fix shipped in v1.1.6 and the box was verified running it. Moral for any club running remote gear.</a:t>
             </a:r>
             <a:endParaRPr lang="en-US" dirty="0"/>
           </a:p>
@@ -778,7 +779,7 @@
           <a:p>
             <a:r>
               <a:rPr lang="en-US" dirty="0"/>
-              <a:t>The point of the whole effort: training starts now, on software a newcomer can learn in an afternoon instead of a season. Science follow-ups: longer B0950+08 integration, and repeated B0329+54 sessions toward timing.</a:t>
+              <a:t>Everything the field session asked for shipped within two days, and every machine — including the field box — converged on the release through the built-in updater. The line-endings epilogue is worth telling: the first Windows-built archive broke Unix launches; the field box exposed it within a day.</a:t>
             </a:r>
             <a:endParaRPr lang="en-US" dirty="0"/>
           </a:p>
@@ -866,7 +867,7 @@
           <a:p>
             <a:r>
               <a:rPr lang="en-US" dirty="0"/>
-              <a:t>Close on the mission, not the software: this was about opening real radio astronomy to more members. Thanks: Rich and Dan built the program this stands on; the field team; and the report notes the role of AI-assisted engineering across three platforms. Questions.</a:t>
+              <a:t>The point of the whole effort: training starts now, on software a newcomer can learn in an afternoon instead of a season. Science follow-ups: longer B0950+08 integration, and repeated B0329+54 sessions toward timing.</a:t>
             </a:r>
             <a:endParaRPr lang="en-US" dirty="0"/>
           </a:p>
@@ -890,6 +891,94 @@
             <a:fld id="{F7021451-1387-4CA6-816F-3879F97B5CBC}" type="slidenum">
               <a:rPr lang="en-US"/>
               <a:t>13</a:t>
+            </a:fld>
+            <a:endParaRPr lang="en-US"/>
+          </a:p>
+        </p:txBody>
+      </p:sp>
+    </p:spTree>
+    <p:extLst>
+      <p:ext uri="{BB962C8B-B14F-4D97-AF65-F5344CB8AC3E}">
+        <p14:creationId xmlns:p14="http://schemas.microsoft.com/office/powerpoint/2010/main" val="1024086991"/>
+      </p:ext>
+    </p:extLst>
+  </p:cSld>
+  <p:clrMapOvr>
+    <a:masterClrMapping/>
+  </p:clrMapOvr>
+</p:notes>
+</file>
+
+<file path=ppt/notesSlides/notesSlide14.xml><?xml version="1.0" encoding="utf-8"?>
+<p:notes xmlns:a="http://schemas.openxmlformats.org/drawingml/2006/main" xmlns:r="http://schemas.openxmlformats.org/officeDocument/2006/relationships" xmlns:p="http://schemas.openxmlformats.org/presentationml/2006/main">
+  <p:cSld>
+    <p:spTree>
+      <p:nvGrpSpPr>
+        <p:cNvPr id="1" name=""/>
+        <p:cNvGrpSpPr/>
+        <p:nvPr/>
+      </p:nvGrpSpPr>
+      <p:grpSpPr>
+        <a:xfrm>
+          <a:off x="0" y="0"/>
+          <a:ext cx="0" cy="0"/>
+          <a:chOff x="0" y="0"/>
+          <a:chExt cx="0" cy="0"/>
+        </a:xfrm>
+      </p:grpSpPr>
+      <p:sp>
+        <p:nvSpPr>
+          <p:cNvPr id="2" name="Slide Image Placeholder 1"/>
+          <p:cNvSpPr>
+            <a:spLocks noGrp="1" noRot="1" noChangeAspect="1"/>
+          </p:cNvSpPr>
+          <p:nvPr>
+            <p:ph type="sldImg"/>
+          </p:nvPr>
+        </p:nvSpPr>
+        <p:spPr/>
+      </p:sp>
+      <p:sp>
+        <p:nvSpPr>
+          <p:cNvPr id="3" name="Notes Placeholder 2"/>
+          <p:cNvSpPr>
+            <a:spLocks noGrp="1"/>
+          </p:cNvSpPr>
+          <p:nvPr>
+            <p:ph type="body" idx="1"/>
+          </p:nvPr>
+        </p:nvSpPr>
+        <p:spPr/>
+        <p:txBody>
+          <a:bodyPr/>
+          <a:lstStyle/>
+          <a:p>
+            <a:r>
+              <a:rPr lang="en-US" dirty="0"/>
+              <a:t>Close on the mission, not the software: this was about opening real radio astronomy to more members. Thanks: Rich and Dan built the program this stands on; the field team; and the report notes the role of AI-assisted engineering across three platforms. Questions.</a:t>
+            </a:r>
+            <a:endParaRPr lang="en-US" dirty="0"/>
+          </a:p>
+        </p:txBody>
+      </p:sp>
+      <p:sp>
+        <p:nvSpPr>
+          <p:cNvPr id="4" name="Slide Number Placeholder 3"/>
+          <p:cNvSpPr>
+            <a:spLocks noGrp="1"/>
+          </p:cNvSpPr>
+          <p:nvPr>
+            <p:ph type="sldNum" sz="quarter" idx="10"/>
+          </p:nvPr>
+        </p:nvSpPr>
+        <p:spPr/>
+        <p:txBody>
+          <a:bodyPr/>
+          <a:lstStyle/>
+          <a:p>
+            <a:fld id="{F7021451-1387-4CA6-816F-3879F97B5CBC}" type="slidenum">
+              <a:rPr lang="en-US"/>
+              <a:t>14</a:t>
             </a:fld>
             <a:endParaRPr lang="en-US"/>
           </a:p>
@@ -1042,7 +1131,7 @@
           <a:p>
             <a:r>
               <a:rPr lang="en-US" dirty="0"/>
-              <a:t>Credit where due: this toolchain produces first-rate, professional results, and Rich and Dan built DSES's pulsar program on it. The point is not that the tools are bad — it's that the barrier to entry kept hands-on observing limited to two people. Hundreds of pages of training material is a real number.</a:t>
+              <a:t>Credit where due: this toolchain produces first-rate, professional results, and Rich and Dan built DSES's pulsar program on it. The point is not that the tools are bad — it's that the barrier to entry kept hands-on observing limited to two people. Hundreds of pages of training material is a real number. The grayed row is the kicker: the professional world in common use runs even deeper — PSRCHIVE is a whole additional suite our two experts didn't even need.</a:t>
             </a:r>
             <a:endParaRPr lang="en-US" dirty="0"/>
           </a:p>
@@ -1130,7 +1219,7 @@
           <a:p>
             <a:r>
               <a:rPr lang="en-US" dirty="0"/>
-              <a:t>Everything the observer does on site — plan, survey, verify, record — in one package. The analysis side (PRESTO) stays the professional standard; the acquisition side no longer requires it to be assembled by hand. Distribution is from the Society's server with a built-in update checker.</a:t>
+              <a:t>Deliberate contrast with the previous slide: the wall of chips collapses to two. On site, the Spectrum Analyzer does everything the observer needs; at home (or in the field), PRESTO v6 plus TEMPO2 does the analysis. PRESTO v6 dropped the classic-TEMPO dependency — barycentering is in-process and polycos come from TEMPO2 — and both installations are captured as re-runnable build scripts in the Society's repository (WSL on Windows, macOS).</a:t>
             </a:r>
             <a:endParaRPr lang="en-US" dirty="0"/>
           </a:p>
@@ -1218,7 +1307,7 @@
           <a:p>
             <a:r>
               <a:rPr lang="en-US" dirty="0"/>
-              <a:t>The Society's first live pulsar session using its own software. Team of three; none are pulsar-processing experts in the sense of the previous slide. Everything on site ran through the Spectrum Analyzer on one laptop driving the B210 at the 60-foot dish.</a:t>
+              <a:t>Everything the observer does on site — plan, survey, verify, record — in one package. The analysis side (PRESTO) stays the professional standard; the acquisition side no longer requires it to be assembled by hand. Distribution is from the Society's server with a built-in update checker.</a:t>
             </a:r>
             <a:endParaRPr lang="en-US" dirty="0"/>
           </a:p>
@@ -1306,7 +1395,7 @@
           <a:p>
             <a:r>
               <a:rPr lang="en-US" dirty="0"/>
-              <a:t>Same geometry for both recordings: 20 MHz at 420 MHz, 256 channels, 204.8 microsecond sampling, 32-bit — written directly as SIGPROC filterbank, the format PRESTO consumes. Nearly 18 GB across the two targets.</a:t>
+              <a:t>The Society's first live pulsar session using its own software. Team of three; none are pulsar-processing experts in the sense of the previous slide. Everything on site ran through the Spectrum Analyzer on one laptop driving the B210 at the 60-foot dish.</a:t>
             </a:r>
             <a:endParaRPr lang="en-US" dirty="0"/>
           </a:p>
@@ -1394,7 +1483,7 @@
           <a:p>
             <a:r>
               <a:rPr lang="en-US" dirty="0"/>
-              <a:t>Walk the figure: profile top-left (double peak), phase-vs-time panel shows persistence, and the DM curve peaks near the catalog value. Fold types all agree: topocentric ~20.1 sigma, barycentric against the published ephemeris ~19.9 sigma, blind search 20.6 sigma at DM ≈ 25.</a:t>
+              <a:t>Same geometry for both recordings: 20 MHz at 420 MHz, 256 channels, 204.8 microsecond sampling, 32-bit — written directly as SIGPROC filterbank, the format PRESTO consumes. Nearly 18 GB across the two targets.</a:t>
             </a:r>
             <a:endParaRPr lang="en-US" dirty="0"/>
           </a:p>
@@ -1482,7 +1571,7 @@
           <a:p>
             <a:r>
               <a:rPr lang="en-US" dirty="0"/>
-              <a:t>Good teaching moment for the audience: low-DM pulsars at modest bandwidth can masquerade as RFI in a blind search. Topocentric fold ~9.7 sigma, barycentric ~9.8. Scintillation means apparent brightness varies as interstellar plasma focuses and defocuses the signal — longer integration next trip.</a:t>
+              <a:t>Walk the figure: profile top-left (double peak), phase-vs-time panel shows persistence, and the DM curve peaks near the catalog value. Fold types all agree: topocentric ~20.1 sigma, barycentric against the published ephemeris ~19.9 sigma, blind search 20.6 sigma at DM ≈ 25.</a:t>
             </a:r>
             <a:endParaRPr lang="en-US" dirty="0"/>
           </a:p>
@@ -1570,7 +1659,7 @@
           <a:p>
             <a:r>
               <a:rPr lang="en-US" dirty="0"/>
-              <a:t>Two independent arguments. Physics: the dispersion curve is the fingerprint — RFI doesn't have one. Engineering: the same recordings re-analyzed on separately compiled PRESTO builds on two operating systems agree to three significant figures.</a:t>
+              <a:t>Good teaching moment for the audience: low-DM pulsars at modest bandwidth can masquerade as RFI in a blind search. Topocentric fold ~9.7 sigma, barycentric ~9.8. Scintillation means apparent brightness varies as interstellar plasma focuses and defocuses the signal — longer integration next trip.</a:t>
             </a:r>
             <a:endParaRPr lang="en-US" dirty="0"/>
           </a:p>
@@ -2384,7 +2473,7 @@
                 <a:ea typeface="Calibri" pitchFamily="34" charset="-122"/>
                 <a:cs typeface="Calibri" pitchFamily="34" charset="-120"/>
               </a:rPr>
-              <a:t>FIELD ENGINEERING</a:t>
+              <a:t>VERIFICATION</a:t>
             </a:r>
             <a:endParaRPr lang="en-US" sz="1100" dirty="0"/>
           </a:p>
@@ -2423,7 +2512,7 @@
                 <a:ea typeface="Cambria" pitchFamily="34" charset="-122"/>
                 <a:cs typeface="Cambria" pitchFamily="34" charset="-120"/>
               </a:rPr>
-              <a:t>The case of the headless Raspberry Pi</a:t>
+              <a:t>Real — and independently reproducible</a:t>
             </a:r>
             <a:endParaRPr lang="en-US" sz="2900" dirty="0"/>
           </a:p>
@@ -2539,12 +2628,12 @@
         </p:nvSpPr>
         <p:spPr>
           <a:xfrm>
-            <a:off x="566928" y="1828800"/>
-            <a:ext cx="2670048" cy="2834640"/>
+            <a:off x="566928" y="1554480"/>
+            <a:ext cx="5394960" cy="3977640"/>
           </a:xfrm>
           <a:prstGeom prst="roundRect">
             <a:avLst>
-              <a:gd name="adj" fmla="val 2740"/>
+              <a:gd name="adj" fmla="val 1839"/>
             </a:avLst>
           </a:prstGeom>
           <a:solidFill>
@@ -2566,69 +2655,24 @@
         </p:nvSpPr>
         <p:spPr>
           <a:xfrm>
-            <a:off x="786384" y="2084832"/>
-            <a:ext cx="475488" cy="475488"/>
-          </a:xfrm>
-          <a:prstGeom prst="ellipse">
-            <a:avLst/>
-          </a:prstGeom>
-          <a:solidFill>
-            <a:srgbClr val="156082"/>
-          </a:solidFill>
-          <a:ln>
-            <a:solidFill>
-              <a:srgbClr val="156082"/>
-            </a:solidFill>
-          </a:ln>
-        </p:spPr>
-        <p:txBody>
-          <a:bodyPr wrap="square" lIns="0" tIns="0" rIns="0" bIns="0" rtlCol="0" anchor="ctr"/>
-          <a:lstStyle/>
-          <a:p>
-            <a:pPr algn="ctr" indent="0" marL="0">
-              <a:buNone/>
-            </a:pPr>
-            <a:r>
-              <a:rPr lang="en-US" sz="1800" b="1" dirty="0">
-                <a:solidFill>
-                  <a:srgbClr val="FFFFFF"/>
-                </a:solidFill>
-                <a:latin typeface="Calibri" pitchFamily="34" charset="0"/>
-                <a:ea typeface="Calibri" pitchFamily="34" charset="-122"/>
-                <a:cs typeface="Calibri" pitchFamily="34" charset="-120"/>
-              </a:rPr>
-              <a:t>1</a:t>
-            </a:r>
-            <a:endParaRPr lang="en-US" sz="1800" dirty="0"/>
-          </a:p>
-        </p:txBody>
-      </p:sp>
-      <p:sp>
-        <p:nvSpPr>
-          <p:cNvPr id="9" name="Text 6"/>
-          <p:cNvSpPr/>
-          <p:nvPr/>
-        </p:nvSpPr>
-        <p:spPr>
-          <a:xfrm>
-            <a:off x="786384" y="2743200"/>
-            <a:ext cx="2231136" cy="365760"/>
-          </a:xfrm>
-          <a:prstGeom prst="rect">
-            <a:avLst/>
-          </a:prstGeom>
-          <a:noFill/>
-          <a:ln/>
-        </p:spPr>
-        <p:txBody>
-          <a:bodyPr wrap="square" lIns="0" tIns="0" rIns="0" bIns="0" rtlCol="0" anchor="ctr"/>
-          <a:lstStyle/>
-          <a:p>
-            <a:pPr indent="0" marL="0">
-              <a:buNone/>
-            </a:pPr>
-            <a:r>
-              <a:rPr lang="en-US" sz="1500" b="1" dirty="0">
+            <a:off x="841248" y="1783080"/>
+            <a:ext cx="4846320" cy="365760"/>
+          </a:xfrm>
+          <a:prstGeom prst="rect">
+            <a:avLst/>
+          </a:prstGeom>
+          <a:noFill/>
+          <a:ln/>
+        </p:spPr>
+        <p:txBody>
+          <a:bodyPr wrap="square" lIns="0" tIns="0" rIns="0" bIns="0" rtlCol="0" anchor="ctr"/>
+          <a:lstStyle/>
+          <a:p>
+            <a:pPr indent="0" marL="0">
+              <a:buNone/>
+            </a:pPr>
+            <a:r>
+              <a:rPr lang="en-US" sz="1700" b="1" dirty="0">
                 <a:solidFill>
                   <a:srgbClr val="0A2F40"/>
                 </a:solidFill>
@@ -2636,22 +2680,22 @@
                 <a:ea typeface="Cambria" pitchFamily="34" charset="-122"/>
                 <a:cs typeface="Cambria" pitchFamily="34" charset="-120"/>
               </a:rPr>
-              <a:t>Symptoms</a:t>
-            </a:r>
-            <a:endParaRPr lang="en-US" sz="1500" dirty="0"/>
-          </a:p>
-        </p:txBody>
-      </p:sp>
-      <p:sp>
-        <p:nvSpPr>
-          <p:cNvPr id="10" name="Text 7"/>
-          <p:cNvSpPr/>
-          <p:nvPr/>
-        </p:nvSpPr>
-        <p:spPr>
-          <a:xfrm>
-            <a:off x="786384" y="3154680"/>
-            <a:ext cx="2231136" cy="1371600"/>
+              <a:t>Dispersion: the celestial fingerprint</a:t>
+            </a:r>
+            <a:endParaRPr lang="en-US" sz="1700" dirty="0"/>
+          </a:p>
+        </p:txBody>
+      </p:sp>
+      <p:sp>
+        <p:nvSpPr>
+          <p:cNvPr id="9" name="Text 6"/>
+          <p:cNvSpPr/>
+          <p:nvPr/>
+        </p:nvSpPr>
+        <p:spPr>
+          <a:xfrm>
+            <a:off x="841248" y="2286000"/>
+            <a:ext cx="4846320" cy="3017520"/>
           </a:xfrm>
           <a:prstGeom prst="rect">
             <a:avLst/>
@@ -2663,11 +2707,15 @@
           <a:bodyPr wrap="square" lIns="0" tIns="0" rIns="0" bIns="0" rtlCol="0" anchor="t"/>
           <a:lstStyle/>
           <a:p>
-            <a:pPr indent="0" marL="0">
-              <a:buNone/>
-            </a:pPr>
-            <a:r>
-              <a:rPr lang="en-US" sz="1150" dirty="0">
+            <a:pPr marL="342900" indent="-342900">
+              <a:spcAft>
+                <a:spcPts val="800"/>
+              </a:spcAft>
+              <a:buSzPct val="100000"/>
+              <a:buChar char="•"/>
+            </a:pPr>
+            <a:r>
+              <a:rPr lang="en-US" sz="1300" dirty="0">
                 <a:solidFill>
                   <a:srgbClr val="24343C"/>
                 </a:solidFill>
@@ -2675,26 +2723,86 @@
                 <a:ea typeface="Calibri" pitchFamily="34" charset="-122"/>
                 <a:cs typeface="Calibri" pitchFamily="34" charset="-120"/>
               </a:rPr>
-              <a:t>Dropdown menus dead, Help menu blank, window opens tiny in a corner — on the field box, mid-session</a:t>
-            </a:r>
-            <a:endParaRPr lang="en-US" sz="1150" dirty="0"/>
-          </a:p>
-        </p:txBody>
-      </p:sp>
-      <p:sp>
-        <p:nvSpPr>
-          <p:cNvPr id="11" name="Shape 8"/>
-          <p:cNvSpPr/>
-          <p:nvPr/>
-        </p:nvSpPr>
-        <p:spPr>
-          <a:xfrm>
-            <a:off x="3364992" y="1828800"/>
-            <a:ext cx="2670048" cy="2834640"/>
+              <a:t>Interstellar plasma delays lower frequencies — a sweep imposed by light-years of travel</a:t>
+            </a:r>
+            <a:endParaRPr lang="en-US" sz="1300" dirty="0"/>
+          </a:p>
+          <a:p>
+            <a:pPr marL="342900" indent="-342900">
+              <a:spcAft>
+                <a:spcPts val="800"/>
+              </a:spcAft>
+              <a:buSzPct val="100000"/>
+              <a:buChar char="•"/>
+            </a:pPr>
+            <a:r>
+              <a:rPr lang="en-US" sz="1300" dirty="0">
+                <a:solidFill>
+                  <a:srgbClr val="24343C"/>
+                </a:solidFill>
+                <a:latin typeface="Calibri" pitchFamily="34" charset="0"/>
+                <a:ea typeface="Calibri" pitchFamily="34" charset="-122"/>
+                <a:cs typeface="Calibri" pitchFamily="34" charset="-120"/>
+              </a:rPr>
+              <a:t>Detection strength peaks at the catalog dispersion measure and falls toward zero</a:t>
+            </a:r>
+            <a:endParaRPr lang="en-US" sz="1300" dirty="0"/>
+          </a:p>
+          <a:p>
+            <a:pPr marL="342900" indent="-342900">
+              <a:spcAft>
+                <a:spcPts val="800"/>
+              </a:spcAft>
+              <a:buSzPct val="100000"/>
+              <a:buChar char="•"/>
+            </a:pPr>
+            <a:r>
+              <a:rPr lang="en-US" sz="1300" dirty="0">
+                <a:solidFill>
+                  <a:srgbClr val="24343C"/>
+                </a:solidFill>
+                <a:latin typeface="Calibri" pitchFamily="34" charset="0"/>
+                <a:ea typeface="Calibri" pitchFamily="34" charset="-122"/>
+                <a:cs typeface="Calibri" pitchFamily="34" charset="-120"/>
+              </a:rPr>
+              <a:t>Terrestrial interference shows no dispersion at all</a:t>
+            </a:r>
+            <a:endParaRPr lang="en-US" sz="1300" dirty="0"/>
+          </a:p>
+          <a:p>
+            <a:pPr marL="342900" indent="-342900">
+              <a:buSzPct val="100000"/>
+              <a:buChar char="•"/>
+            </a:pPr>
+            <a:r>
+              <a:rPr lang="en-US" sz="1300" b="1" dirty="0">
+                <a:solidFill>
+                  <a:srgbClr val="156082"/>
+                </a:solidFill>
+                <a:latin typeface="Calibri" pitchFamily="34" charset="0"/>
+                <a:ea typeface="Calibri" pitchFamily="34" charset="-122"/>
+                <a:cs typeface="Calibri" pitchFamily="34" charset="-120"/>
+              </a:rPr>
+              <a:t>One curve separates a genuine pulsar from RFI</a:t>
+            </a:r>
+            <a:endParaRPr lang="en-US" sz="1300" dirty="0"/>
+          </a:p>
+        </p:txBody>
+      </p:sp>
+      <p:sp>
+        <p:nvSpPr>
+          <p:cNvPr id="10" name="Shape 7"/>
+          <p:cNvSpPr/>
+          <p:nvPr/>
+        </p:nvSpPr>
+        <p:spPr>
+          <a:xfrm>
+            <a:off x="6217920" y="1554480"/>
+            <a:ext cx="5394960" cy="3977640"/>
           </a:xfrm>
           <a:prstGeom prst="roundRect">
             <a:avLst>
-              <a:gd name="adj" fmla="val 2740"/>
+              <a:gd name="adj" fmla="val 1839"/>
             </a:avLst>
           </a:prstGeom>
           <a:solidFill>
@@ -2710,75 +2818,30 @@
       </p:sp>
       <p:sp>
         <p:nvSpPr>
-          <p:cNvPr id="12" name="Text 9"/>
-          <p:cNvSpPr/>
-          <p:nvPr/>
-        </p:nvSpPr>
-        <p:spPr>
-          <a:xfrm>
-            <a:off x="3584448" y="2084832"/>
-            <a:ext cx="475488" cy="475488"/>
-          </a:xfrm>
-          <a:prstGeom prst="ellipse">
-            <a:avLst/>
-          </a:prstGeom>
-          <a:solidFill>
-            <a:srgbClr val="156082"/>
-          </a:solidFill>
-          <a:ln>
-            <a:solidFill>
-              <a:srgbClr val="156082"/>
-            </a:solidFill>
-          </a:ln>
-        </p:spPr>
-        <p:txBody>
-          <a:bodyPr wrap="square" lIns="0" tIns="0" rIns="0" bIns="0" rtlCol="0" anchor="ctr"/>
-          <a:lstStyle/>
-          <a:p>
-            <a:pPr algn="ctr" indent="0" marL="0">
-              <a:buNone/>
-            </a:pPr>
-            <a:r>
-              <a:rPr lang="en-US" sz="1800" b="1" dirty="0">
-                <a:solidFill>
-                  <a:srgbClr val="FFFFFF"/>
-                </a:solidFill>
-                <a:latin typeface="Calibri" pitchFamily="34" charset="0"/>
-                <a:ea typeface="Calibri" pitchFamily="34" charset="-122"/>
-                <a:cs typeface="Calibri" pitchFamily="34" charset="-120"/>
-              </a:rPr>
-              <a:t>2</a:t>
-            </a:r>
-            <a:endParaRPr lang="en-US" sz="1800" dirty="0"/>
-          </a:p>
-        </p:txBody>
-      </p:sp>
-      <p:sp>
-        <p:nvSpPr>
-          <p:cNvPr id="13" name="Text 10"/>
-          <p:cNvSpPr/>
-          <p:nvPr/>
-        </p:nvSpPr>
-        <p:spPr>
-          <a:xfrm>
-            <a:off x="3584448" y="2743200"/>
-            <a:ext cx="2231136" cy="365760"/>
-          </a:xfrm>
-          <a:prstGeom prst="rect">
-            <a:avLst/>
-          </a:prstGeom>
-          <a:noFill/>
-          <a:ln/>
-        </p:spPr>
-        <p:txBody>
-          <a:bodyPr wrap="square" lIns="0" tIns="0" rIns="0" bIns="0" rtlCol="0" anchor="ctr"/>
-          <a:lstStyle/>
-          <a:p>
-            <a:pPr indent="0" marL="0">
-              <a:buNone/>
-            </a:pPr>
-            <a:r>
-              <a:rPr lang="en-US" sz="1500" b="1" dirty="0">
+          <p:cNvPr id="11" name="Text 8"/>
+          <p:cNvSpPr/>
+          <p:nvPr/>
+        </p:nvSpPr>
+        <p:spPr>
+          <a:xfrm>
+            <a:off x="6492240" y="1783080"/>
+            <a:ext cx="4846320" cy="365760"/>
+          </a:xfrm>
+          <a:prstGeom prst="rect">
+            <a:avLst/>
+          </a:prstGeom>
+          <a:noFill/>
+          <a:ln/>
+        </p:spPr>
+        <p:txBody>
+          <a:bodyPr wrap="square" lIns="0" tIns="0" rIns="0" bIns="0" rtlCol="0" anchor="ctr"/>
+          <a:lstStyle/>
+          <a:p>
+            <a:pPr indent="0" marL="0">
+              <a:buNone/>
+            </a:pPr>
+            <a:r>
+              <a:rPr lang="en-US" sz="1700" b="1" dirty="0">
                 <a:solidFill>
                   <a:srgbClr val="0A2F40"/>
                 </a:solidFill>
@@ -2786,22 +2849,22 @@
                 <a:ea typeface="Cambria" pitchFamily="34" charset="-122"/>
                 <a:cs typeface="Cambria" pitchFamily="34" charset="-120"/>
               </a:rPr>
-              <a:t>Diagnosis</a:t>
-            </a:r>
-            <a:endParaRPr lang="en-US" sz="1500" dirty="0"/>
-          </a:p>
-        </p:txBody>
-      </p:sp>
-      <p:sp>
-        <p:nvSpPr>
-          <p:cNvPr id="14" name="Text 11"/>
-          <p:cNvSpPr/>
-          <p:nvPr/>
-        </p:nvSpPr>
-        <p:spPr>
-          <a:xfrm>
-            <a:off x="3584448" y="3154680"/>
-            <a:ext cx="2231136" cy="1371600"/>
+              <a:t>Two platforms, two toolchains, one answer</a:t>
+            </a:r>
+            <a:endParaRPr lang="en-US" sz="1700" dirty="0"/>
+          </a:p>
+        </p:txBody>
+      </p:sp>
+      <p:sp>
+        <p:nvSpPr>
+          <p:cNvPr id="12" name="Text 9"/>
+          <p:cNvSpPr/>
+          <p:nvPr/>
+        </p:nvSpPr>
+        <p:spPr>
+          <a:xfrm>
+            <a:off x="6492240" y="2286000"/>
+            <a:ext cx="4846320" cy="1463040"/>
           </a:xfrm>
           <a:prstGeom prst="rect">
             <a:avLst/>
@@ -2813,11 +2876,15 @@
           <a:bodyPr wrap="square" lIns="0" tIns="0" rIns="0" bIns="0" rtlCol="0" anchor="t"/>
           <a:lstStyle/>
           <a:p>
-            <a:pPr indent="0" marL="0">
-              <a:buNone/>
-            </a:pPr>
-            <a:r>
-              <a:rPr lang="en-US" sz="1150" dirty="0">
+            <a:pPr marL="342900" indent="-342900">
+              <a:spcAft>
+                <a:spcPts val="800"/>
+              </a:spcAft>
+              <a:buSzPct val="100000"/>
+              <a:buChar char="•"/>
+            </a:pPr>
+            <a:r>
+              <a:rPr lang="en-US" sz="1300" dirty="0">
                 <a:solidFill>
                   <a:srgbClr val="24343C"/>
                 </a:solidFill>
@@ -2825,30 +2892,69 @@
                 <a:ea typeface="Calibri" pitchFamily="34" charset="-122"/>
                 <a:cs typeface="Calibri" pitchFamily="34" charset="-120"/>
               </a:rPr>
-              <a:t>Remote SSH into the site over Tailscale — while the trip continued</a:t>
-            </a:r>
-            <a:endParaRPr lang="en-US" sz="1150" dirty="0"/>
-          </a:p>
-        </p:txBody>
-      </p:sp>
-      <p:sp>
-        <p:nvSpPr>
-          <p:cNvPr id="15" name="Shape 12"/>
-          <p:cNvSpPr/>
-          <p:nvPr/>
-        </p:nvSpPr>
-        <p:spPr>
-          <a:xfrm>
-            <a:off x="6163056" y="1828800"/>
-            <a:ext cx="2670048" cy="2834640"/>
+              <a:t>macOS — PRESTO v5.0.2, re-run on v6.0.0</a:t>
+            </a:r>
+            <a:endParaRPr lang="en-US" sz="1300" dirty="0"/>
+          </a:p>
+          <a:p>
+            <a:pPr marL="342900" indent="-342900">
+              <a:spcAft>
+                <a:spcPts val="800"/>
+              </a:spcAft>
+              <a:buSzPct val="100000"/>
+              <a:buChar char="•"/>
+            </a:pPr>
+            <a:r>
+              <a:rPr lang="en-US" sz="1300" dirty="0">
+                <a:solidFill>
+                  <a:srgbClr val="24343C"/>
+                </a:solidFill>
+                <a:latin typeface="Calibri" pitchFamily="34" charset="0"/>
+                <a:ea typeface="Calibri" pitchFamily="34" charset="-122"/>
+                <a:cs typeface="Calibri" pitchFamily="34" charset="-120"/>
+              </a:rPr>
+              <a:t>Windows — PRESTO v6.0.0 under WSL (a new DSES capability)</a:t>
+            </a:r>
+            <a:endParaRPr lang="en-US" sz="1300" dirty="0"/>
+          </a:p>
+          <a:p>
+            <a:pPr marL="342900" indent="-342900">
+              <a:buSzPct val="100000"/>
+              <a:buChar char="•"/>
+            </a:pPr>
+            <a:r>
+              <a:rPr lang="en-US" sz="1300" dirty="0">
+                <a:solidFill>
+                  <a:srgbClr val="24343C"/>
+                </a:solidFill>
+                <a:latin typeface="Calibri" pitchFamily="34" charset="0"/>
+                <a:ea typeface="Calibri" pitchFamily="34" charset="-122"/>
+                <a:cs typeface="Calibri" pitchFamily="34" charset="-120"/>
+              </a:rPr>
+              <a:t>Identical fold commands, independently built stacks</a:t>
+            </a:r>
+            <a:endParaRPr lang="en-US" sz="1300" dirty="0"/>
+          </a:p>
+        </p:txBody>
+      </p:sp>
+      <p:sp>
+        <p:nvSpPr>
+          <p:cNvPr id="13" name="Shape 10"/>
+          <p:cNvSpPr/>
+          <p:nvPr/>
+        </p:nvSpPr>
+        <p:spPr>
+          <a:xfrm>
+            <a:off x="6492240" y="3977640"/>
+            <a:ext cx="4846320" cy="1234440"/>
           </a:xfrm>
           <a:prstGeom prst="roundRect">
             <a:avLst>
-              <a:gd name="adj" fmla="val 2740"/>
+              <a:gd name="adj" fmla="val 5926"/>
             </a:avLst>
           </a:prstGeom>
           <a:solidFill>
-            <a:srgbClr val="EFF4F7"/>
+            <a:srgbClr val="FFFFFF"/>
           </a:solidFill>
           <a:ln w="9525">
             <a:solidFill>
@@ -2860,98 +2966,110 @@
       </p:sp>
       <p:sp>
         <p:nvSpPr>
-          <p:cNvPr id="16" name="Text 13"/>
-          <p:cNvSpPr/>
-          <p:nvPr/>
-        </p:nvSpPr>
-        <p:spPr>
-          <a:xfrm>
-            <a:off x="6382512" y="2084832"/>
-            <a:ext cx="475488" cy="475488"/>
-          </a:xfrm>
-          <a:prstGeom prst="ellipse">
-            <a:avLst/>
-          </a:prstGeom>
-          <a:solidFill>
-            <a:srgbClr val="156082"/>
-          </a:solidFill>
-          <a:ln>
-            <a:solidFill>
-              <a:srgbClr val="156082"/>
-            </a:solidFill>
-          </a:ln>
-        </p:spPr>
-        <p:txBody>
-          <a:bodyPr wrap="square" lIns="0" tIns="0" rIns="0" bIns="0" rtlCol="0" anchor="ctr"/>
-          <a:lstStyle/>
-          <a:p>
-            <a:pPr algn="ctr" indent="0" marL="0">
-              <a:buNone/>
-            </a:pPr>
-            <a:r>
-              <a:rPr lang="en-US" sz="1800" b="1" dirty="0">
-                <a:solidFill>
-                  <a:srgbClr val="FFFFFF"/>
-                </a:solidFill>
-                <a:latin typeface="Calibri" pitchFamily="34" charset="0"/>
-                <a:ea typeface="Calibri" pitchFamily="34" charset="-122"/>
-                <a:cs typeface="Calibri" pitchFamily="34" charset="-120"/>
-              </a:rPr>
-              <a:t>3</a:t>
-            </a:r>
-            <a:endParaRPr lang="en-US" sz="1800" dirty="0"/>
-          </a:p>
-        </p:txBody>
-      </p:sp>
-      <p:sp>
-        <p:nvSpPr>
-          <p:cNvPr id="17" name="Text 14"/>
-          <p:cNvSpPr/>
-          <p:nvPr/>
-        </p:nvSpPr>
-        <p:spPr>
-          <a:xfrm>
-            <a:off x="6382512" y="2743200"/>
-            <a:ext cx="2231136" cy="365760"/>
-          </a:xfrm>
-          <a:prstGeom prst="rect">
-            <a:avLst/>
-          </a:prstGeom>
-          <a:noFill/>
-          <a:ln/>
-        </p:spPr>
-        <p:txBody>
-          <a:bodyPr wrap="square" lIns="0" tIns="0" rIns="0" bIns="0" rtlCol="0" anchor="ctr"/>
-          <a:lstStyle/>
-          <a:p>
-            <a:pPr indent="0" marL="0">
-              <a:buNone/>
-            </a:pPr>
-            <a:r>
-              <a:rPr lang="en-US" sz="1500" b="1" dirty="0">
-                <a:solidFill>
-                  <a:srgbClr val="0A2F40"/>
-                </a:solidFill>
-                <a:latin typeface="Cambria" pitchFamily="34" charset="0"/>
-                <a:ea typeface="Cambria" pitchFamily="34" charset="-122"/>
-                <a:cs typeface="Cambria" pitchFamily="34" charset="-120"/>
-              </a:rPr>
-              <a:t>Root cause</a:t>
-            </a:r>
-            <a:endParaRPr lang="en-US" sz="1500" dirty="0"/>
-          </a:p>
-        </p:txBody>
-      </p:sp>
-      <p:sp>
-        <p:nvSpPr>
-          <p:cNvPr id="18" name="Text 15"/>
-          <p:cNvSpPr/>
-          <p:nvPr/>
-        </p:nvSpPr>
-        <p:spPr>
-          <a:xfrm>
-            <a:off x="6382512" y="3154680"/>
-            <a:ext cx="2231136" cy="1371600"/>
+          <p:cNvPr id="14" name="Text 11"/>
+          <p:cNvSpPr/>
+          <p:nvPr/>
+        </p:nvSpPr>
+        <p:spPr>
+          <a:xfrm>
+            <a:off x="6720840" y="4069080"/>
+            <a:ext cx="4480560" cy="1051560"/>
+          </a:xfrm>
+          <a:prstGeom prst="rect">
+            <a:avLst/>
+          </a:prstGeom>
+          <a:noFill/>
+          <a:ln/>
+        </p:spPr>
+        <p:txBody>
+          <a:bodyPr wrap="square" lIns="0" tIns="0" rIns="0" bIns="0" rtlCol="0" anchor="ctr"/>
+          <a:lstStyle/>
+          <a:p>
+            <a:pPr indent="0" marL="0">
+              <a:buNone/>
+            </a:pPr>
+            <a:r>
+              <a:rPr lang="en-US" sz="1100" dirty="0">
+                <a:solidFill>
+                  <a:srgbClr val="6B7A82"/>
+                </a:solidFill>
+                <a:latin typeface="Calibri" pitchFamily="34" charset="0"/>
+                <a:ea typeface="Calibri" pitchFamily="34" charset="-122"/>
+                <a:cs typeface="Calibri" pitchFamily="34" charset="-120"/>
+              </a:rPr>
+              <a:t>B0329+54 probability-of-noise
+</a:t>
+            </a:r>
+            <a:pPr indent="0" marL="0">
+              <a:buNone/>
+            </a:pPr>
+            <a:r>
+              <a:rPr lang="en-US" sz="1900" b="1" dirty="0">
+                <a:solidFill>
+                  <a:srgbClr val="156082"/>
+                </a:solidFill>
+                <a:latin typeface="Calibri" pitchFamily="34" charset="0"/>
+                <a:ea typeface="Calibri" pitchFamily="34" charset="-122"/>
+                <a:cs typeface="Calibri" pitchFamily="34" charset="-120"/>
+              </a:rPr>
+              <a:t>4.49×10⁻⁹⁰</a:t>
+            </a:r>
+            <a:pPr indent="0" marL="0">
+              <a:buNone/>
+            </a:pPr>
+            <a:r>
+              <a:rPr lang="en-US" sz="1100" dirty="0">
+                <a:solidFill>
+                  <a:srgbClr val="24343C"/>
+                </a:solidFill>
+                <a:latin typeface="Calibri" pitchFamily="34" charset="0"/>
+                <a:ea typeface="Calibri" pitchFamily="34" charset="-122"/>
+                <a:cs typeface="Calibri" pitchFamily="34" charset="-120"/>
+              </a:rPr>
+              <a:t>  Windows      </a:t>
+            </a:r>
+            <a:pPr indent="0" marL="0">
+              <a:buNone/>
+            </a:pPr>
+            <a:r>
+              <a:rPr lang="en-US" sz="1900" b="1" dirty="0">
+                <a:solidFill>
+                  <a:srgbClr val="B86A18"/>
+                </a:solidFill>
+                <a:latin typeface="Calibri" pitchFamily="34" charset="0"/>
+                <a:ea typeface="Calibri" pitchFamily="34" charset="-122"/>
+                <a:cs typeface="Calibri" pitchFamily="34" charset="-120"/>
+              </a:rPr>
+              <a:t>4.5×10⁻⁹⁰</a:t>
+            </a:r>
+            <a:pPr indent="0" marL="0">
+              <a:buNone/>
+            </a:pPr>
+            <a:r>
+              <a:rPr lang="en-US" sz="1100" dirty="0">
+                <a:solidFill>
+                  <a:srgbClr val="24343C"/>
+                </a:solidFill>
+                <a:latin typeface="Calibri" pitchFamily="34" charset="0"/>
+                <a:ea typeface="Calibri" pitchFamily="34" charset="-122"/>
+                <a:cs typeface="Calibri" pitchFamily="34" charset="-120"/>
+              </a:rPr>
+              <a:t>  macOS</a:t>
+            </a:r>
+            <a:endParaRPr lang="en-US" sz="1100" dirty="0"/>
+          </a:p>
+        </p:txBody>
+      </p:sp>
+      <p:sp>
+        <p:nvSpPr>
+          <p:cNvPr id="15" name="Text 12"/>
+          <p:cNvSpPr/>
+          <p:nvPr/>
+        </p:nvSpPr>
+        <p:spPr>
+          <a:xfrm>
+            <a:off x="566928" y="5806440"/>
+            <a:ext cx="10972800" cy="548640"/>
           </a:xfrm>
           <a:prstGeom prst="rect">
             <a:avLst/>
@@ -2967,247 +3085,17 @@
               <a:buNone/>
             </a:pPr>
             <a:r>
-              <a:rPr lang="en-US" sz="1150" dirty="0">
-                <a:solidFill>
-                  <a:srgbClr val="24343C"/>
-                </a:solidFill>
-                <a:latin typeface="Calibri" pitchFamily="34" charset="0"/>
-                <a:ea typeface="Calibri" pitchFamily="34" charset="-122"/>
-                <a:cs typeface="Calibri" pitchFamily="34" charset="-120"/>
-              </a:rPr>
-              <a:t>No monitor attached: the graphics system reports a 0×0-pixel screen, collapsing every popup and confusing window placement</a:t>
-            </a:r>
-            <a:endParaRPr lang="en-US" sz="1150" dirty="0"/>
-          </a:p>
-        </p:txBody>
-      </p:sp>
-      <p:sp>
-        <p:nvSpPr>
-          <p:cNvPr id="19" name="Shape 16"/>
-          <p:cNvSpPr/>
-          <p:nvPr/>
-        </p:nvSpPr>
-        <p:spPr>
-          <a:xfrm>
-            <a:off x="8961120" y="1828800"/>
-            <a:ext cx="2670048" cy="2834640"/>
-          </a:xfrm>
-          <a:prstGeom prst="roundRect">
-            <a:avLst>
-              <a:gd name="adj" fmla="val 2740"/>
-            </a:avLst>
-          </a:prstGeom>
-          <a:solidFill>
-            <a:srgbClr val="EFF4F7"/>
-          </a:solidFill>
-          <a:ln w="9525">
-            <a:solidFill>
-              <a:srgbClr val="D7E3EA"/>
-            </a:solidFill>
-            <a:prstDash val="solid"/>
-          </a:ln>
-        </p:spPr>
-      </p:sp>
-      <p:sp>
-        <p:nvSpPr>
-          <p:cNvPr id="20" name="Text 17"/>
-          <p:cNvSpPr/>
-          <p:nvPr/>
-        </p:nvSpPr>
-        <p:spPr>
-          <a:xfrm>
-            <a:off x="9180576" y="2084832"/>
-            <a:ext cx="475488" cy="475488"/>
-          </a:xfrm>
-          <a:prstGeom prst="ellipse">
-            <a:avLst/>
-          </a:prstGeom>
-          <a:solidFill>
-            <a:srgbClr val="B86A18"/>
-          </a:solidFill>
-          <a:ln>
-            <a:solidFill>
-              <a:srgbClr val="B86A18"/>
-            </a:solidFill>
-          </a:ln>
-        </p:spPr>
-        <p:txBody>
-          <a:bodyPr wrap="square" lIns="0" tIns="0" rIns="0" bIns="0" rtlCol="0" anchor="ctr"/>
-          <a:lstStyle/>
-          <a:p>
-            <a:pPr algn="ctr" indent="0" marL="0">
-              <a:buNone/>
-            </a:pPr>
-            <a:r>
-              <a:rPr lang="en-US" sz="1800" b="1" dirty="0">
-                <a:solidFill>
-                  <a:srgbClr val="FFFFFF"/>
-                </a:solidFill>
-                <a:latin typeface="Calibri" pitchFamily="34" charset="0"/>
-                <a:ea typeface="Calibri" pitchFamily="34" charset="-122"/>
-                <a:cs typeface="Calibri" pitchFamily="34" charset="-120"/>
-              </a:rPr>
-              <a:t>4</a:t>
-            </a:r>
-            <a:endParaRPr lang="en-US" sz="1800" dirty="0"/>
-          </a:p>
-        </p:txBody>
-      </p:sp>
-      <p:sp>
-        <p:nvSpPr>
-          <p:cNvPr id="21" name="Text 18"/>
-          <p:cNvSpPr/>
-          <p:nvPr/>
-        </p:nvSpPr>
-        <p:spPr>
-          <a:xfrm>
-            <a:off x="9180576" y="2743200"/>
-            <a:ext cx="2231136" cy="365760"/>
-          </a:xfrm>
-          <a:prstGeom prst="rect">
-            <a:avLst/>
-          </a:prstGeom>
-          <a:noFill/>
-          <a:ln/>
-        </p:spPr>
-        <p:txBody>
-          <a:bodyPr wrap="square" lIns="0" tIns="0" rIns="0" bIns="0" rtlCol="0" anchor="ctr"/>
-          <a:lstStyle/>
-          <a:p>
-            <a:pPr indent="0" marL="0">
-              <a:buNone/>
-            </a:pPr>
-            <a:r>
-              <a:rPr lang="en-US" sz="1500" b="1" dirty="0">
-                <a:solidFill>
-                  <a:srgbClr val="0A2F40"/>
-                </a:solidFill>
-                <a:latin typeface="Cambria" pitchFamily="34" charset="0"/>
-                <a:ea typeface="Cambria" pitchFamily="34" charset="-122"/>
-                <a:cs typeface="Cambria" pitchFamily="34" charset="-120"/>
-              </a:rPr>
-              <a:t>Fix — in v1.1.6</a:t>
-            </a:r>
-            <a:endParaRPr lang="en-US" sz="1500" dirty="0"/>
-          </a:p>
-        </p:txBody>
-      </p:sp>
-      <p:sp>
-        <p:nvSpPr>
-          <p:cNvPr id="22" name="Text 19"/>
-          <p:cNvSpPr/>
-          <p:nvPr/>
-        </p:nvSpPr>
-        <p:spPr>
-          <a:xfrm>
-            <a:off x="9180576" y="3154680"/>
-            <a:ext cx="2231136" cy="1371600"/>
-          </a:xfrm>
-          <a:prstGeom prst="rect">
-            <a:avLst/>
-          </a:prstGeom>
-          <a:noFill/>
-          <a:ln/>
-        </p:spPr>
-        <p:txBody>
-          <a:bodyPr wrap="square" lIns="0" tIns="0" rIns="0" bIns="0" rtlCol="0" anchor="t"/>
-          <a:lstStyle/>
-          <a:p>
-            <a:pPr indent="0" marL="0">
-              <a:buNone/>
-            </a:pPr>
-            <a:r>
-              <a:rPr lang="en-US" sz="1150" dirty="0">
-                <a:solidFill>
-                  <a:srgbClr val="24343C"/>
-                </a:solidFill>
-                <a:latin typeface="Calibri" pitchFamily="34" charset="0"/>
-                <a:ea typeface="Calibri" pitchFamily="34" charset="-122"/>
-                <a:cs typeface="Calibri" pitchFamily="34" charset="-120"/>
-              </a:rPr>
-              <a:t>Launcher synthesizes a virtual monitor when none is connected; the app refuses to reposition windows against an empty screen</a:t>
-            </a:r>
-            <a:endParaRPr lang="en-US" sz="1150" dirty="0"/>
-          </a:p>
-        </p:txBody>
-      </p:sp>
-      <p:sp>
-        <p:nvSpPr>
-          <p:cNvPr id="23" name="Shape 20"/>
-          <p:cNvSpPr/>
-          <p:nvPr/>
-        </p:nvSpPr>
-        <p:spPr>
-          <a:xfrm>
-            <a:off x="566928" y="5074920"/>
-            <a:ext cx="11055096" cy="1005840"/>
-          </a:xfrm>
-          <a:prstGeom prst="roundRect">
-            <a:avLst>
-              <a:gd name="adj" fmla="val 7273"/>
-            </a:avLst>
-          </a:prstGeom>
-          <a:solidFill>
-            <a:srgbClr val="EFF4F7"/>
-          </a:solidFill>
-          <a:ln w="9525">
-            <a:solidFill>
-              <a:srgbClr val="D7E3EA"/>
-            </a:solidFill>
-            <a:prstDash val="solid"/>
-          </a:ln>
-        </p:spPr>
-      </p:sp>
-      <p:sp>
-        <p:nvSpPr>
-          <p:cNvPr id="24" name="Text 21"/>
-          <p:cNvSpPr/>
-          <p:nvPr/>
-        </p:nvSpPr>
-        <p:spPr>
-          <a:xfrm>
-            <a:off x="886968" y="5074920"/>
-            <a:ext cx="10424160" cy="1005840"/>
-          </a:xfrm>
-          <a:prstGeom prst="rect">
-            <a:avLst/>
-          </a:prstGeom>
-          <a:noFill/>
-          <a:ln/>
-        </p:spPr>
-        <p:txBody>
-          <a:bodyPr wrap="square" lIns="0" tIns="0" rIns="0" bIns="0" rtlCol="0" anchor="ctr"/>
-          <a:lstStyle/>
-          <a:p>
-            <a:pPr indent="0" marL="0">
-              <a:buNone/>
-            </a:pPr>
-            <a:r>
-              <a:rPr lang="en-US" sz="1450" b="1" dirty="0">
-                <a:solidFill>
-                  <a:srgbClr val="B86A18"/>
-                </a:solidFill>
-                <a:latin typeface="Calibri" pitchFamily="34" charset="0"/>
-                <a:ea typeface="Calibri" pitchFamily="34" charset="-122"/>
-                <a:cs typeface="Calibri" pitchFamily="34" charset="-120"/>
-              </a:rPr>
-              <a:t>Not an application bug.  </a:t>
-            </a:r>
-            <a:pPr indent="0" marL="0">
-              <a:buNone/>
-            </a:pPr>
-            <a:r>
-              <a:rPr lang="en-US" sz="1450" dirty="0">
-                <a:solidFill>
-                  <a:srgbClr val="0A2F40"/>
-                </a:solidFill>
-                <a:latin typeface="Calibri" pitchFamily="34" charset="0"/>
-                <a:ea typeface="Calibri" pitchFamily="34" charset="-122"/>
-                <a:cs typeface="Calibri" pitchFamily="34" charset="-120"/>
-              </a:rPr>
-              <a:t>A display-configuration condition that had silently affected every prior software version — found because real hardware was running at a real site.</a:t>
-            </a:r>
-            <a:endParaRPr lang="en-US" sz="1450" dirty="0"/>
+              <a:rPr lang="en-US" sz="1250" i="1" dirty="0">
+                <a:solidFill>
+                  <a:srgbClr val="6B7A82"/>
+                </a:solidFill>
+                <a:latin typeface="Calibri" pitchFamily="34" charset="0"/>
+                <a:ea typeface="Calibri" pitchFamily="34" charset="-122"/>
+                <a:cs typeface="Calibri" pitchFamily="34" charset="-120"/>
+              </a:rPr>
+              <a:t>Every fold now produces a standardized PDF diagnostic stored beside the recording — validation minutes after capture, on whichever machine is at hand.</a:t>
+            </a:r>
+            <a:endParaRPr lang="en-US" sz="1250" dirty="0"/>
           </a:p>
         </p:txBody>
       </p:sp>
@@ -3276,7 +3164,7 @@
                 <a:ea typeface="Calibri" pitchFamily="34" charset="-122"/>
                 <a:cs typeface="Calibri" pitchFamily="34" charset="-120"/>
               </a:rPr>
-              <a:t>SHIPPED</a:t>
+              <a:t>FIELD ENGINEERING</a:t>
             </a:r>
             <a:endParaRPr lang="en-US" sz="1100" dirty="0"/>
           </a:p>
@@ -3315,7 +3203,7 @@
                 <a:ea typeface="Cambria" pitchFamily="34" charset="-122"/>
                 <a:cs typeface="Cambria" pitchFamily="34" charset="-120"/>
               </a:rPr>
-              <a:t>Field wish-list → released in two days</a:t>
+              <a:t>The case of the headless Raspberry Pi</a:t>
             </a:r>
             <a:endParaRPr lang="en-US" sz="2900" dirty="0"/>
           </a:p>
@@ -3425,57 +3313,18 @@
       </p:sp>
       <p:sp>
         <p:nvSpPr>
-          <p:cNvPr id="7" name="Text 4"/>
-          <p:cNvSpPr/>
-          <p:nvPr/>
-        </p:nvSpPr>
-        <p:spPr>
-          <a:xfrm>
-            <a:off x="566928" y="1444752"/>
-            <a:ext cx="10515600" cy="365760"/>
-          </a:xfrm>
-          <a:prstGeom prst="rect">
-            <a:avLst/>
-          </a:prstGeom>
-          <a:noFill/>
-          <a:ln/>
-        </p:spPr>
-        <p:txBody>
-          <a:bodyPr wrap="square" lIns="0" tIns="0" rIns="0" bIns="0" rtlCol="0" anchor="ctr"/>
-          <a:lstStyle/>
-          <a:p>
-            <a:pPr indent="0" marL="0">
-              <a:buNone/>
-            </a:pPr>
-            <a:r>
-              <a:rPr lang="en-US" sz="1400" dirty="0">
-                <a:solidFill>
-                  <a:srgbClr val="24343C"/>
-                </a:solidFill>
-                <a:latin typeface="Calibri" pitchFamily="34" charset="0"/>
-                <a:ea typeface="Calibri" pitchFamily="34" charset="-122"/>
-                <a:cs typeface="Calibri" pitchFamily="34" charset="-120"/>
-              </a:rPr>
-              <a:t>Spectrum Analyzer v1.1.6 — cut and published July 12, one day after the observing session:</a:t>
-            </a:r>
-            <a:endParaRPr lang="en-US" sz="1400" dirty="0"/>
-          </a:p>
-        </p:txBody>
-      </p:sp>
-      <p:sp>
-        <p:nvSpPr>
-          <p:cNvPr id="8" name="Shape 5"/>
-          <p:cNvSpPr/>
-          <p:nvPr/>
-        </p:nvSpPr>
-        <p:spPr>
-          <a:xfrm>
-            <a:off x="566928" y="2011680"/>
-            <a:ext cx="3557016" cy="2651760"/>
+          <p:cNvPr id="7" name="Shape 4"/>
+          <p:cNvSpPr/>
+          <p:nvPr/>
+        </p:nvSpPr>
+        <p:spPr>
+          <a:xfrm>
+            <a:off x="566928" y="1828800"/>
+            <a:ext cx="2670048" cy="2834640"/>
           </a:xfrm>
           <a:prstGeom prst="roundRect">
             <a:avLst>
-              <a:gd name="adj" fmla="val 2759"/>
+              <a:gd name="adj" fmla="val 2740"/>
             </a:avLst>
           </a:prstGeom>
           <a:solidFill>
@@ -3491,40 +3340,85 @@
       </p:sp>
       <p:sp>
         <p:nvSpPr>
+          <p:cNvPr id="8" name="Text 5"/>
+          <p:cNvSpPr/>
+          <p:nvPr/>
+        </p:nvSpPr>
+        <p:spPr>
+          <a:xfrm>
+            <a:off x="786384" y="2084832"/>
+            <a:ext cx="475488" cy="475488"/>
+          </a:xfrm>
+          <a:prstGeom prst="ellipse">
+            <a:avLst/>
+          </a:prstGeom>
+          <a:solidFill>
+            <a:srgbClr val="156082"/>
+          </a:solidFill>
+          <a:ln>
+            <a:solidFill>
+              <a:srgbClr val="156082"/>
+            </a:solidFill>
+          </a:ln>
+        </p:spPr>
+        <p:txBody>
+          <a:bodyPr wrap="square" lIns="0" tIns="0" rIns="0" bIns="0" rtlCol="0" anchor="ctr"/>
+          <a:lstStyle/>
+          <a:p>
+            <a:pPr algn="ctr" indent="0" marL="0">
+              <a:buNone/>
+            </a:pPr>
+            <a:r>
+              <a:rPr lang="en-US" sz="1800" b="1" dirty="0">
+                <a:solidFill>
+                  <a:srgbClr val="FFFFFF"/>
+                </a:solidFill>
+                <a:latin typeface="Calibri" pitchFamily="34" charset="0"/>
+                <a:ea typeface="Calibri" pitchFamily="34" charset="-122"/>
+                <a:cs typeface="Calibri" pitchFamily="34" charset="-120"/>
+              </a:rPr>
+              <a:t>1</a:t>
+            </a:r>
+            <a:endParaRPr lang="en-US" sz="1800" dirty="0"/>
+          </a:p>
+        </p:txBody>
+      </p:sp>
+      <p:sp>
+        <p:nvSpPr>
           <p:cNvPr id="9" name="Text 6"/>
           <p:cNvSpPr/>
           <p:nvPr/>
         </p:nvSpPr>
         <p:spPr>
           <a:xfrm>
-            <a:off x="804672" y="2212848"/>
-            <a:ext cx="3081528" cy="384048"/>
-          </a:xfrm>
-          <a:prstGeom prst="rect">
-            <a:avLst/>
-          </a:prstGeom>
-          <a:noFill/>
-          <a:ln/>
-        </p:spPr>
-        <p:txBody>
-          <a:bodyPr wrap="square" lIns="0" tIns="0" rIns="0" bIns="0" rtlCol="0" anchor="ctr"/>
-          <a:lstStyle/>
-          <a:p>
-            <a:pPr indent="0" marL="0">
-              <a:buNone/>
-            </a:pPr>
-            <a:r>
-              <a:rPr lang="en-US" sz="1650" b="1" dirty="0">
-                <a:solidFill>
-                  <a:srgbClr val="156082"/>
+            <a:off x="786384" y="2743200"/>
+            <a:ext cx="2231136" cy="365760"/>
+          </a:xfrm>
+          <a:prstGeom prst="rect">
+            <a:avLst/>
+          </a:prstGeom>
+          <a:noFill/>
+          <a:ln/>
+        </p:spPr>
+        <p:txBody>
+          <a:bodyPr wrap="square" lIns="0" tIns="0" rIns="0" bIns="0" rtlCol="0" anchor="ctr"/>
+          <a:lstStyle/>
+          <a:p>
+            <a:pPr indent="0" marL="0">
+              <a:buNone/>
+            </a:pPr>
+            <a:r>
+              <a:rPr lang="en-US" sz="1500" b="1" dirty="0">
+                <a:solidFill>
+                  <a:srgbClr val="0A2F40"/>
                 </a:solidFill>
                 <a:latin typeface="Cambria" pitchFamily="34" charset="0"/>
                 <a:ea typeface="Cambria" pitchFamily="34" charset="-122"/>
                 <a:cs typeface="Cambria" pitchFamily="34" charset="-120"/>
               </a:rPr>
-              <a:t>Sweep mode</a:t>
-            </a:r>
-            <a:endParaRPr lang="en-US" sz="1650" dirty="0"/>
+              <a:t>Symptoms</a:t>
+            </a:r>
+            <a:endParaRPr lang="en-US" sz="1500" dirty="0"/>
           </a:p>
         </p:txBody>
       </p:sp>
@@ -3536,8 +3430,8 @@
         </p:nvSpPr>
         <p:spPr>
           <a:xfrm>
-            <a:off x="804672" y="2670048"/>
-            <a:ext cx="3081528" cy="1783080"/>
+            <a:off x="786384" y="3154680"/>
+            <a:ext cx="2231136" cy="1371600"/>
           </a:xfrm>
           <a:prstGeom prst="rect">
             <a:avLst/>
@@ -3553,7 +3447,7 @@
               <a:buNone/>
             </a:pPr>
             <a:r>
-              <a:rPr lang="en-US" sz="1200" dirty="0">
+              <a:rPr lang="en-US" sz="1150" dirty="0">
                 <a:solidFill>
                   <a:srgbClr val="24343C"/>
                 </a:solidFill>
@@ -3561,9 +3455,9 @@
                 <a:ea typeface="Calibri" pitchFamily="34" charset="-122"/>
                 <a:cs typeface="Calibri" pitchFamily="34" charset="-120"/>
               </a:rPr>
-              <a:t>Stepped wide-spectrum scan for RFI surveys beyond the radio’s instantaneous bandwidth — retunes across a range (e.g. 100–1000 MHz) and stitches one wide trace, with cross-pass max-hold.</a:t>
-            </a:r>
-            <a:endParaRPr lang="en-US" sz="1200" dirty="0"/>
+              <a:t>Dropdown menus dead, Help menu blank, window opens tiny in a corner — on the field box, mid-session</a:t>
+            </a:r>
+            <a:endParaRPr lang="en-US" sz="1150" dirty="0"/>
           </a:p>
         </p:txBody>
       </p:sp>
@@ -3575,12 +3469,12 @@
         </p:nvSpPr>
         <p:spPr>
           <a:xfrm>
-            <a:off x="4315968" y="2011680"/>
-            <a:ext cx="3557016" cy="2651760"/>
+            <a:off x="3364992" y="1828800"/>
+            <a:ext cx="2670048" cy="2834640"/>
           </a:xfrm>
           <a:prstGeom prst="roundRect">
             <a:avLst>
-              <a:gd name="adj" fmla="val 2759"/>
+              <a:gd name="adj" fmla="val 2740"/>
             </a:avLst>
           </a:prstGeom>
           <a:solidFill>
@@ -3602,47 +3496,92 @@
         </p:nvSpPr>
         <p:spPr>
           <a:xfrm>
-            <a:off x="4553712" y="2212848"/>
-            <a:ext cx="3081528" cy="384048"/>
-          </a:xfrm>
-          <a:prstGeom prst="rect">
-            <a:avLst/>
-          </a:prstGeom>
-          <a:noFill/>
-          <a:ln/>
-        </p:spPr>
-        <p:txBody>
-          <a:bodyPr wrap="square" lIns="0" tIns="0" rIns="0" bIns="0" rtlCol="0" anchor="ctr"/>
-          <a:lstStyle/>
-          <a:p>
-            <a:pPr indent="0" marL="0">
-              <a:buNone/>
-            </a:pPr>
-            <a:r>
-              <a:rPr lang="en-US" sz="1650" b="1" dirty="0">
-                <a:solidFill>
-                  <a:srgbClr val="156082"/>
+            <a:off x="3584448" y="2084832"/>
+            <a:ext cx="475488" cy="475488"/>
+          </a:xfrm>
+          <a:prstGeom prst="ellipse">
+            <a:avLst/>
+          </a:prstGeom>
+          <a:solidFill>
+            <a:srgbClr val="156082"/>
+          </a:solidFill>
+          <a:ln>
+            <a:solidFill>
+              <a:srgbClr val="156082"/>
+            </a:solidFill>
+          </a:ln>
+        </p:spPr>
+        <p:txBody>
+          <a:bodyPr wrap="square" lIns="0" tIns="0" rIns="0" bIns="0" rtlCol="0" anchor="ctr"/>
+          <a:lstStyle/>
+          <a:p>
+            <a:pPr algn="ctr" indent="0" marL="0">
+              <a:buNone/>
+            </a:pPr>
+            <a:r>
+              <a:rPr lang="en-US" sz="1800" b="1" dirty="0">
+                <a:solidFill>
+                  <a:srgbClr val="FFFFFF"/>
+                </a:solidFill>
+                <a:latin typeface="Calibri" pitchFamily="34" charset="0"/>
+                <a:ea typeface="Calibri" pitchFamily="34" charset="-122"/>
+                <a:cs typeface="Calibri" pitchFamily="34" charset="-120"/>
+              </a:rPr>
+              <a:t>2</a:t>
+            </a:r>
+            <a:endParaRPr lang="en-US" sz="1800" dirty="0"/>
+          </a:p>
+        </p:txBody>
+      </p:sp>
+      <p:sp>
+        <p:nvSpPr>
+          <p:cNvPr id="13" name="Text 10"/>
+          <p:cNvSpPr/>
+          <p:nvPr/>
+        </p:nvSpPr>
+        <p:spPr>
+          <a:xfrm>
+            <a:off x="3584448" y="2743200"/>
+            <a:ext cx="2231136" cy="365760"/>
+          </a:xfrm>
+          <a:prstGeom prst="rect">
+            <a:avLst/>
+          </a:prstGeom>
+          <a:noFill/>
+          <a:ln/>
+        </p:spPr>
+        <p:txBody>
+          <a:bodyPr wrap="square" lIns="0" tIns="0" rIns="0" bIns="0" rtlCol="0" anchor="ctr"/>
+          <a:lstStyle/>
+          <a:p>
+            <a:pPr indent="0" marL="0">
+              <a:buNone/>
+            </a:pPr>
+            <a:r>
+              <a:rPr lang="en-US" sz="1500" b="1" dirty="0">
+                <a:solidFill>
+                  <a:srgbClr val="0A2F40"/>
                 </a:solidFill>
                 <a:latin typeface="Cambria" pitchFamily="34" charset="0"/>
                 <a:ea typeface="Cambria" pitchFamily="34" charset="-122"/>
                 <a:cs typeface="Cambria" pitchFamily="34" charset="-120"/>
               </a:rPr>
-              <a:t>Recording, finished</a:t>
-            </a:r>
-            <a:endParaRPr lang="en-US" sz="1650" dirty="0"/>
-          </a:p>
-        </p:txBody>
-      </p:sp>
-      <p:sp>
-        <p:nvSpPr>
-          <p:cNvPr id="13" name="Text 10"/>
-          <p:cNvSpPr/>
-          <p:nvPr/>
-        </p:nvSpPr>
-        <p:spPr>
-          <a:xfrm>
-            <a:off x="4553712" y="2670048"/>
-            <a:ext cx="3081528" cy="1783080"/>
+              <a:t>Diagnosis</a:t>
+            </a:r>
+            <a:endParaRPr lang="en-US" sz="1500" dirty="0"/>
+          </a:p>
+        </p:txBody>
+      </p:sp>
+      <p:sp>
+        <p:nvSpPr>
+          <p:cNvPr id="14" name="Text 11"/>
+          <p:cNvSpPr/>
+          <p:nvPr/>
+        </p:nvSpPr>
+        <p:spPr>
+          <a:xfrm>
+            <a:off x="3584448" y="3154680"/>
+            <a:ext cx="2231136" cy="1371600"/>
           </a:xfrm>
           <a:prstGeom prst="rect">
             <a:avLst/>
@@ -3658,7 +3597,7 @@
               <a:buNone/>
             </a:pPr>
             <a:r>
-              <a:rPr lang="en-US" sz="1200" dirty="0">
+              <a:rPr lang="en-US" sz="1150" dirty="0">
                 <a:solidFill>
                   <a:srgbClr val="24343C"/>
                 </a:solidFill>
@@ -3666,26 +3605,26 @@
                 <a:ea typeface="Calibri" pitchFamily="34" charset="-122"/>
                 <a:cs typeface="Calibri" pitchFamily="34" charset="-120"/>
               </a:rPr>
-              <a:t>Source name stamped into the filename and the .fil header — with RA/Dec derived from the pulsar designation. Red REC indicator, elapsed time, timed auto-stop. July 11’s files had to be renamed and patched by hand; never again.</a:t>
-            </a:r>
-            <a:endParaRPr lang="en-US" sz="1200" dirty="0"/>
-          </a:p>
-        </p:txBody>
-      </p:sp>
-      <p:sp>
-        <p:nvSpPr>
-          <p:cNvPr id="14" name="Shape 11"/>
-          <p:cNvSpPr/>
-          <p:nvPr/>
-        </p:nvSpPr>
-        <p:spPr>
-          <a:xfrm>
-            <a:off x="8065008" y="2011680"/>
-            <a:ext cx="3557016" cy="2651760"/>
+              <a:t>Remote SSH into the site over Tailscale — while the trip continued</a:t>
+            </a:r>
+            <a:endParaRPr lang="en-US" sz="1150" dirty="0"/>
+          </a:p>
+        </p:txBody>
+      </p:sp>
+      <p:sp>
+        <p:nvSpPr>
+          <p:cNvPr id="15" name="Shape 12"/>
+          <p:cNvSpPr/>
+          <p:nvPr/>
+        </p:nvSpPr>
+        <p:spPr>
+          <a:xfrm>
+            <a:off x="6163056" y="1828800"/>
+            <a:ext cx="2670048" cy="2834640"/>
           </a:xfrm>
           <a:prstGeom prst="roundRect">
             <a:avLst>
-              <a:gd name="adj" fmla="val 2759"/>
+              <a:gd name="adj" fmla="val 2740"/>
             </a:avLst>
           </a:prstGeom>
           <a:solidFill>
@@ -3701,53 +3640,98 @@
       </p:sp>
       <p:sp>
         <p:nvSpPr>
-          <p:cNvPr id="15" name="Text 12"/>
-          <p:cNvSpPr/>
-          <p:nvPr/>
-        </p:nvSpPr>
-        <p:spPr>
-          <a:xfrm>
-            <a:off x="8302752" y="2212848"/>
-            <a:ext cx="3081528" cy="384048"/>
-          </a:xfrm>
-          <a:prstGeom prst="rect">
-            <a:avLst/>
-          </a:prstGeom>
-          <a:noFill/>
-          <a:ln/>
-        </p:spPr>
-        <p:txBody>
-          <a:bodyPr wrap="square" lIns="0" tIns="0" rIns="0" bIns="0" rtlCol="0" anchor="ctr"/>
-          <a:lstStyle/>
-          <a:p>
-            <a:pPr indent="0" marL="0">
-              <a:buNone/>
-            </a:pPr>
-            <a:r>
-              <a:rPr lang="en-US" sz="1650" b="1" dirty="0">
-                <a:solidFill>
-                  <a:srgbClr val="156082"/>
+          <p:cNvPr id="16" name="Text 13"/>
+          <p:cNvSpPr/>
+          <p:nvPr/>
+        </p:nvSpPr>
+        <p:spPr>
+          <a:xfrm>
+            <a:off x="6382512" y="2084832"/>
+            <a:ext cx="475488" cy="475488"/>
+          </a:xfrm>
+          <a:prstGeom prst="ellipse">
+            <a:avLst/>
+          </a:prstGeom>
+          <a:solidFill>
+            <a:srgbClr val="156082"/>
+          </a:solidFill>
+          <a:ln>
+            <a:solidFill>
+              <a:srgbClr val="156082"/>
+            </a:solidFill>
+          </a:ln>
+        </p:spPr>
+        <p:txBody>
+          <a:bodyPr wrap="square" lIns="0" tIns="0" rIns="0" bIns="0" rtlCol="0" anchor="ctr"/>
+          <a:lstStyle/>
+          <a:p>
+            <a:pPr algn="ctr" indent="0" marL="0">
+              <a:buNone/>
+            </a:pPr>
+            <a:r>
+              <a:rPr lang="en-US" sz="1800" b="1" dirty="0">
+                <a:solidFill>
+                  <a:srgbClr val="FFFFFF"/>
+                </a:solidFill>
+                <a:latin typeface="Calibri" pitchFamily="34" charset="0"/>
+                <a:ea typeface="Calibri" pitchFamily="34" charset="-122"/>
+                <a:cs typeface="Calibri" pitchFamily="34" charset="-120"/>
+              </a:rPr>
+              <a:t>3</a:t>
+            </a:r>
+            <a:endParaRPr lang="en-US" sz="1800" dirty="0"/>
+          </a:p>
+        </p:txBody>
+      </p:sp>
+      <p:sp>
+        <p:nvSpPr>
+          <p:cNvPr id="17" name="Text 14"/>
+          <p:cNvSpPr/>
+          <p:nvPr/>
+        </p:nvSpPr>
+        <p:spPr>
+          <a:xfrm>
+            <a:off x="6382512" y="2743200"/>
+            <a:ext cx="2231136" cy="365760"/>
+          </a:xfrm>
+          <a:prstGeom prst="rect">
+            <a:avLst/>
+          </a:prstGeom>
+          <a:noFill/>
+          <a:ln/>
+        </p:spPr>
+        <p:txBody>
+          <a:bodyPr wrap="square" lIns="0" tIns="0" rIns="0" bIns="0" rtlCol="0" anchor="ctr"/>
+          <a:lstStyle/>
+          <a:p>
+            <a:pPr indent="0" marL="0">
+              <a:buNone/>
+            </a:pPr>
+            <a:r>
+              <a:rPr lang="en-US" sz="1500" b="1" dirty="0">
+                <a:solidFill>
+                  <a:srgbClr val="0A2F40"/>
                 </a:solidFill>
                 <a:latin typeface="Cambria" pitchFamily="34" charset="0"/>
                 <a:ea typeface="Cambria" pitchFamily="34" charset="-122"/>
                 <a:cs typeface="Cambria" pitchFamily="34" charset="-120"/>
               </a:rPr>
-              <a:t>Headless fixes</a:t>
-            </a:r>
-            <a:endParaRPr lang="en-US" sz="1650" dirty="0"/>
-          </a:p>
-        </p:txBody>
-      </p:sp>
-      <p:sp>
-        <p:nvSpPr>
-          <p:cNvPr id="16" name="Text 13"/>
-          <p:cNvSpPr/>
-          <p:nvPr/>
-        </p:nvSpPr>
-        <p:spPr>
-          <a:xfrm>
-            <a:off x="8302752" y="2670048"/>
-            <a:ext cx="3081528" cy="1783080"/>
+              <a:t>Root cause</a:t>
+            </a:r>
+            <a:endParaRPr lang="en-US" sz="1500" dirty="0"/>
+          </a:p>
+        </p:txBody>
+      </p:sp>
+      <p:sp>
+        <p:nvSpPr>
+          <p:cNvPr id="18" name="Text 15"/>
+          <p:cNvSpPr/>
+          <p:nvPr/>
+        </p:nvSpPr>
+        <p:spPr>
+          <a:xfrm>
+            <a:off x="6382512" y="3154680"/>
+            <a:ext cx="2231136" cy="1371600"/>
           </a:xfrm>
           <a:prstGeom prst="rect">
             <a:avLst/>
@@ -3763,7 +3747,7 @@
               <a:buNone/>
             </a:pPr>
             <a:r>
-              <a:rPr lang="en-US" sz="1200" dirty="0">
+              <a:rPr lang="en-US" sz="1150" dirty="0">
                 <a:solidFill>
                   <a:srgbClr val="24343C"/>
                 </a:solidFill>
@@ -3771,30 +3755,30 @@
                 <a:ea typeface="Calibri" pitchFamily="34" charset="-122"/>
                 <a:cs typeface="Calibri" pitchFamily="34" charset="-120"/>
               </a:rPr>
-              <a:t>The virtual-monitor launcher and empty-screen safeguards from the previous slide, plus updated documentation and operating guide.</a:t>
-            </a:r>
-            <a:endParaRPr lang="en-US" sz="1200" dirty="0"/>
-          </a:p>
-        </p:txBody>
-      </p:sp>
-      <p:sp>
-        <p:nvSpPr>
-          <p:cNvPr id="17" name="Shape 14"/>
-          <p:cNvSpPr/>
-          <p:nvPr/>
-        </p:nvSpPr>
-        <p:spPr>
-          <a:xfrm>
-            <a:off x="566928" y="4937760"/>
-            <a:ext cx="11055096" cy="1234440"/>
+              <a:t>No monitor attached: the graphics system reports a 0×0-pixel screen, collapsing every popup and confusing window placement</a:t>
+            </a:r>
+            <a:endParaRPr lang="en-US" sz="1150" dirty="0"/>
+          </a:p>
+        </p:txBody>
+      </p:sp>
+      <p:sp>
+        <p:nvSpPr>
+          <p:cNvPr id="19" name="Shape 16"/>
+          <p:cNvSpPr/>
+          <p:nvPr/>
+        </p:nvSpPr>
+        <p:spPr>
+          <a:xfrm>
+            <a:off x="8961120" y="1828800"/>
+            <a:ext cx="2670048" cy="2834640"/>
           </a:xfrm>
           <a:prstGeom prst="roundRect">
             <a:avLst>
-              <a:gd name="adj" fmla="val 5926"/>
+              <a:gd name="adj" fmla="val 2740"/>
             </a:avLst>
           </a:prstGeom>
           <a:solidFill>
-            <a:srgbClr val="FFFFFF"/>
+            <a:srgbClr val="EFF4F7"/>
           </a:solidFill>
           <a:ln w="9525">
             <a:solidFill>
@@ -3806,30 +3790,180 @@
       </p:sp>
       <p:sp>
         <p:nvSpPr>
-          <p:cNvPr id="18" name="Text 15"/>
-          <p:cNvSpPr/>
-          <p:nvPr/>
-        </p:nvSpPr>
-        <p:spPr>
-          <a:xfrm>
-            <a:off x="841248" y="4937760"/>
-            <a:ext cx="10515600" cy="1234440"/>
-          </a:xfrm>
-          <a:prstGeom prst="rect">
-            <a:avLst/>
-          </a:prstGeom>
-          <a:noFill/>
-          <a:ln/>
-        </p:spPr>
-        <p:txBody>
-          <a:bodyPr wrap="square" lIns="0" tIns="0" rIns="0" bIns="0" rtlCol="0" anchor="ctr"/>
-          <a:lstStyle/>
-          <a:p>
-            <a:pPr indent="0" marL="0">
-              <a:buNone/>
-            </a:pPr>
-            <a:r>
-              <a:rPr lang="en-US" sz="1250" b="1" dirty="0">
+          <p:cNvPr id="20" name="Text 17"/>
+          <p:cNvSpPr/>
+          <p:nvPr/>
+        </p:nvSpPr>
+        <p:spPr>
+          <a:xfrm>
+            <a:off x="9180576" y="2084832"/>
+            <a:ext cx="475488" cy="475488"/>
+          </a:xfrm>
+          <a:prstGeom prst="ellipse">
+            <a:avLst/>
+          </a:prstGeom>
+          <a:solidFill>
+            <a:srgbClr val="B86A18"/>
+          </a:solidFill>
+          <a:ln>
+            <a:solidFill>
+              <a:srgbClr val="B86A18"/>
+            </a:solidFill>
+          </a:ln>
+        </p:spPr>
+        <p:txBody>
+          <a:bodyPr wrap="square" lIns="0" tIns="0" rIns="0" bIns="0" rtlCol="0" anchor="ctr"/>
+          <a:lstStyle/>
+          <a:p>
+            <a:pPr algn="ctr" indent="0" marL="0">
+              <a:buNone/>
+            </a:pPr>
+            <a:r>
+              <a:rPr lang="en-US" sz="1800" b="1" dirty="0">
+                <a:solidFill>
+                  <a:srgbClr val="FFFFFF"/>
+                </a:solidFill>
+                <a:latin typeface="Calibri" pitchFamily="34" charset="0"/>
+                <a:ea typeface="Calibri" pitchFamily="34" charset="-122"/>
+                <a:cs typeface="Calibri" pitchFamily="34" charset="-120"/>
+              </a:rPr>
+              <a:t>4</a:t>
+            </a:r>
+            <a:endParaRPr lang="en-US" sz="1800" dirty="0"/>
+          </a:p>
+        </p:txBody>
+      </p:sp>
+      <p:sp>
+        <p:nvSpPr>
+          <p:cNvPr id="21" name="Text 18"/>
+          <p:cNvSpPr/>
+          <p:nvPr/>
+        </p:nvSpPr>
+        <p:spPr>
+          <a:xfrm>
+            <a:off x="9180576" y="2743200"/>
+            <a:ext cx="2231136" cy="365760"/>
+          </a:xfrm>
+          <a:prstGeom prst="rect">
+            <a:avLst/>
+          </a:prstGeom>
+          <a:noFill/>
+          <a:ln/>
+        </p:spPr>
+        <p:txBody>
+          <a:bodyPr wrap="square" lIns="0" tIns="0" rIns="0" bIns="0" rtlCol="0" anchor="ctr"/>
+          <a:lstStyle/>
+          <a:p>
+            <a:pPr indent="0" marL="0">
+              <a:buNone/>
+            </a:pPr>
+            <a:r>
+              <a:rPr lang="en-US" sz="1500" b="1" dirty="0">
+                <a:solidFill>
+                  <a:srgbClr val="0A2F40"/>
+                </a:solidFill>
+                <a:latin typeface="Cambria" pitchFamily="34" charset="0"/>
+                <a:ea typeface="Cambria" pitchFamily="34" charset="-122"/>
+                <a:cs typeface="Cambria" pitchFamily="34" charset="-120"/>
+              </a:rPr>
+              <a:t>Fix — in v1.1.6</a:t>
+            </a:r>
+            <a:endParaRPr lang="en-US" sz="1500" dirty="0"/>
+          </a:p>
+        </p:txBody>
+      </p:sp>
+      <p:sp>
+        <p:nvSpPr>
+          <p:cNvPr id="22" name="Text 19"/>
+          <p:cNvSpPr/>
+          <p:nvPr/>
+        </p:nvSpPr>
+        <p:spPr>
+          <a:xfrm>
+            <a:off x="9180576" y="3154680"/>
+            <a:ext cx="2231136" cy="1371600"/>
+          </a:xfrm>
+          <a:prstGeom prst="rect">
+            <a:avLst/>
+          </a:prstGeom>
+          <a:noFill/>
+          <a:ln/>
+        </p:spPr>
+        <p:txBody>
+          <a:bodyPr wrap="square" lIns="0" tIns="0" rIns="0" bIns="0" rtlCol="0" anchor="t"/>
+          <a:lstStyle/>
+          <a:p>
+            <a:pPr indent="0" marL="0">
+              <a:buNone/>
+            </a:pPr>
+            <a:r>
+              <a:rPr lang="en-US" sz="1150" dirty="0">
+                <a:solidFill>
+                  <a:srgbClr val="24343C"/>
+                </a:solidFill>
+                <a:latin typeface="Calibri" pitchFamily="34" charset="0"/>
+                <a:ea typeface="Calibri" pitchFamily="34" charset="-122"/>
+                <a:cs typeface="Calibri" pitchFamily="34" charset="-120"/>
+              </a:rPr>
+              <a:t>Launcher synthesizes a virtual monitor when none is connected; the app refuses to reposition windows against an empty screen</a:t>
+            </a:r>
+            <a:endParaRPr lang="en-US" sz="1150" dirty="0"/>
+          </a:p>
+        </p:txBody>
+      </p:sp>
+      <p:sp>
+        <p:nvSpPr>
+          <p:cNvPr id="23" name="Shape 20"/>
+          <p:cNvSpPr/>
+          <p:nvPr/>
+        </p:nvSpPr>
+        <p:spPr>
+          <a:xfrm>
+            <a:off x="566928" y="5074920"/>
+            <a:ext cx="11055096" cy="1005840"/>
+          </a:xfrm>
+          <a:prstGeom prst="roundRect">
+            <a:avLst>
+              <a:gd name="adj" fmla="val 7273"/>
+            </a:avLst>
+          </a:prstGeom>
+          <a:solidFill>
+            <a:srgbClr val="EFF4F7"/>
+          </a:solidFill>
+          <a:ln w="9525">
+            <a:solidFill>
+              <a:srgbClr val="D7E3EA"/>
+            </a:solidFill>
+            <a:prstDash val="solid"/>
+          </a:ln>
+        </p:spPr>
+      </p:sp>
+      <p:sp>
+        <p:nvSpPr>
+          <p:cNvPr id="24" name="Text 21"/>
+          <p:cNvSpPr/>
+          <p:nvPr/>
+        </p:nvSpPr>
+        <p:spPr>
+          <a:xfrm>
+            <a:off x="886968" y="5074920"/>
+            <a:ext cx="10424160" cy="1005840"/>
+          </a:xfrm>
+          <a:prstGeom prst="rect">
+            <a:avLst/>
+          </a:prstGeom>
+          <a:noFill/>
+          <a:ln/>
+        </p:spPr>
+        <p:txBody>
+          <a:bodyPr wrap="square" lIns="0" tIns="0" rIns="0" bIns="0" rtlCol="0" anchor="ctr"/>
+          <a:lstStyle/>
+          <a:p>
+            <a:pPr indent="0" marL="0">
+              <a:buNone/>
+            </a:pPr>
+            <a:r>
+              <a:rPr lang="en-US" sz="1450" b="1" dirty="0">
                 <a:solidFill>
                   <a:srgbClr val="B86A18"/>
                 </a:solidFill>
@@ -3837,23 +3971,23 @@
                 <a:ea typeface="Calibri" pitchFamily="34" charset="-122"/>
                 <a:cs typeface="Calibri" pitchFamily="34" charset="-120"/>
               </a:rPr>
-              <a:t>Epilogue: </a:t>
-            </a:r>
-            <a:pPr indent="0" marL="0">
-              <a:buNone/>
-            </a:pPr>
-            <a:r>
-              <a:rPr lang="en-US" sz="1250" dirty="0">
-                <a:solidFill>
-                  <a:srgbClr val="24343C"/>
-                </a:solidFill>
-                <a:latin typeface="Calibri" pitchFamily="34" charset="0"/>
-                <a:ea typeface="Calibri" pitchFamily="34" charset="-122"/>
-                <a:cs typeface="Calibri" pitchFamily="34" charset="-120"/>
-              </a:rPr>
-              <a:t>one day after release, the field box caught a packaging defect desktop testing had missed — Windows line endings in the Unix launcher script. Rebuilt and republished within hours, with two independent build-pipeline safeguards added. Real installations in the field earn their keep.</a:t>
-            </a:r>
-            <a:endParaRPr lang="en-US" sz="1250" dirty="0"/>
+              <a:t>Not an application bug.  </a:t>
+            </a:r>
+            <a:pPr indent="0" marL="0">
+              <a:buNone/>
+            </a:pPr>
+            <a:r>
+              <a:rPr lang="en-US" sz="1450" dirty="0">
+                <a:solidFill>
+                  <a:srgbClr val="0A2F40"/>
+                </a:solidFill>
+                <a:latin typeface="Calibri" pitchFamily="34" charset="0"/>
+                <a:ea typeface="Calibri" pitchFamily="34" charset="-122"/>
+                <a:cs typeface="Calibri" pitchFamily="34" charset="-120"/>
+              </a:rPr>
+              <a:t>A display-configuration condition that had silently affected every prior software version — found because real hardware was running at a real site.</a:t>
+            </a:r>
+            <a:endParaRPr lang="en-US" sz="1450" dirty="0"/>
           </a:p>
         </p:txBody>
       </p:sp>
@@ -3922,7 +4056,7 @@
                 <a:ea typeface="Calibri" pitchFamily="34" charset="-122"/>
                 <a:cs typeface="Calibri" pitchFamily="34" charset="-120"/>
               </a:rPr>
-              <a:t>THE ROAD AHEAD</a:t>
+              <a:t>SHIPPED</a:t>
             </a:r>
             <a:endParaRPr lang="en-US" sz="1100" dirty="0"/>
           </a:p>
@@ -3961,7 +4095,7 @@
                 <a:ea typeface="Cambria" pitchFamily="34" charset="-122"/>
                 <a:cs typeface="Cambria" pitchFamily="34" charset="-120"/>
               </a:rPr>
-              <a:t>The barrier is now a slope</a:t>
+              <a:t>Field wish-list → released in two days</a:t>
             </a:r>
             <a:endParaRPr lang="en-US" sz="2900" dirty="0"/>
           </a:p>
@@ -4077,83 +4211,129 @@
         </p:nvSpPr>
         <p:spPr>
           <a:xfrm>
-            <a:off x="566928" y="1691640"/>
-            <a:ext cx="457200" cy="457200"/>
-          </a:xfrm>
-          <a:prstGeom prst="ellipse">
-            <a:avLst/>
+            <a:off x="566928" y="1444752"/>
+            <a:ext cx="10515600" cy="365760"/>
+          </a:xfrm>
+          <a:prstGeom prst="rect">
+            <a:avLst/>
+          </a:prstGeom>
+          <a:noFill/>
+          <a:ln/>
+        </p:spPr>
+        <p:txBody>
+          <a:bodyPr wrap="square" lIns="0" tIns="0" rIns="0" bIns="0" rtlCol="0" anchor="ctr"/>
+          <a:lstStyle/>
+          <a:p>
+            <a:pPr indent="0" marL="0">
+              <a:buNone/>
+            </a:pPr>
+            <a:r>
+              <a:rPr lang="en-US" sz="1400" dirty="0">
+                <a:solidFill>
+                  <a:srgbClr val="24343C"/>
+                </a:solidFill>
+                <a:latin typeface="Calibri" pitchFamily="34" charset="0"/>
+                <a:ea typeface="Calibri" pitchFamily="34" charset="-122"/>
+                <a:cs typeface="Calibri" pitchFamily="34" charset="-120"/>
+              </a:rPr>
+              <a:t>Spectrum Analyzer v1.1.6 — cut and published July 12, one day after the observing session:</a:t>
+            </a:r>
+            <a:endParaRPr lang="en-US" sz="1400" dirty="0"/>
+          </a:p>
+        </p:txBody>
+      </p:sp>
+      <p:sp>
+        <p:nvSpPr>
+          <p:cNvPr id="8" name="Shape 5"/>
+          <p:cNvSpPr/>
+          <p:nvPr/>
+        </p:nvSpPr>
+        <p:spPr>
+          <a:xfrm>
+            <a:off x="566928" y="2011680"/>
+            <a:ext cx="3557016" cy="2651760"/>
+          </a:xfrm>
+          <a:prstGeom prst="roundRect">
+            <a:avLst>
+              <a:gd name="adj" fmla="val 2759"/>
+            </a:avLst>
           </a:prstGeom>
           <a:solidFill>
-            <a:srgbClr val="B86A18"/>
+            <a:srgbClr val="EFF4F7"/>
           </a:solidFill>
-          <a:ln>
+          <a:ln w="9525">
             <a:solidFill>
-              <a:srgbClr val="B86A18"/>
+              <a:srgbClr val="D7E3EA"/>
             </a:solidFill>
+            <a:prstDash val="solid"/>
           </a:ln>
         </p:spPr>
-        <p:txBody>
-          <a:bodyPr wrap="square" lIns="0" tIns="0" rIns="0" bIns="0" rtlCol="0" anchor="ctr"/>
-          <a:lstStyle/>
-          <a:p>
-            <a:pPr algn="ctr" indent="0" marL="0">
-              <a:buNone/>
-            </a:pPr>
-            <a:r>
-              <a:rPr lang="en-US" sz="1800" b="1" dirty="0">
-                <a:solidFill>
-                  <a:srgbClr val="FFFFFF"/>
-                </a:solidFill>
-                <a:latin typeface="Calibri" pitchFamily="34" charset="0"/>
-                <a:ea typeface="Calibri" pitchFamily="34" charset="-122"/>
-                <a:cs typeface="Calibri" pitchFamily="34" charset="-120"/>
-              </a:rPr>
-              <a:t>1</a:t>
-            </a:r>
-            <a:endParaRPr lang="en-US" sz="1800" dirty="0"/>
-          </a:p>
-        </p:txBody>
-      </p:sp>
-      <p:sp>
-        <p:nvSpPr>
-          <p:cNvPr id="8" name="Text 5"/>
-          <p:cNvSpPr/>
-          <p:nvPr/>
-        </p:nvSpPr>
-        <p:spPr>
-          <a:xfrm>
-            <a:off x="1225296" y="1618488"/>
-            <a:ext cx="10241280" cy="603504"/>
-          </a:xfrm>
-          <a:prstGeom prst="rect">
-            <a:avLst/>
-          </a:prstGeom>
-          <a:noFill/>
-          <a:ln/>
-        </p:spPr>
-        <p:txBody>
-          <a:bodyPr wrap="square" lIns="0" tIns="0" rIns="0" bIns="0" rtlCol="0" anchor="ctr"/>
-          <a:lstStyle/>
-          <a:p>
-            <a:pPr indent="0" marL="0">
-              <a:buNone/>
-            </a:pPr>
-            <a:r>
-              <a:rPr lang="en-US" sz="1450" b="1" dirty="0">
-                <a:solidFill>
-                  <a:srgbClr val="0A2F40"/>
-                </a:solidFill>
-                <a:latin typeface="Calibri" pitchFamily="34" charset="0"/>
-                <a:ea typeface="Calibri" pitchFamily="34" charset="-122"/>
-                <a:cs typeface="Calibri" pitchFamily="34" charset="-120"/>
-              </a:rPr>
-              <a:t>Train the interest group  —  </a:t>
-            </a:r>
-            <a:pPr indent="0" marL="0">
-              <a:buNone/>
-            </a:pPr>
-            <a:r>
-              <a:rPr lang="en-US" sz="1450" dirty="0">
+      </p:sp>
+      <p:sp>
+        <p:nvSpPr>
+          <p:cNvPr id="9" name="Text 6"/>
+          <p:cNvSpPr/>
+          <p:nvPr/>
+        </p:nvSpPr>
+        <p:spPr>
+          <a:xfrm>
+            <a:off x="804672" y="2212848"/>
+            <a:ext cx="3081528" cy="384048"/>
+          </a:xfrm>
+          <a:prstGeom prst="rect">
+            <a:avLst/>
+          </a:prstGeom>
+          <a:noFill/>
+          <a:ln/>
+        </p:spPr>
+        <p:txBody>
+          <a:bodyPr wrap="square" lIns="0" tIns="0" rIns="0" bIns="0" rtlCol="0" anchor="ctr"/>
+          <a:lstStyle/>
+          <a:p>
+            <a:pPr indent="0" marL="0">
+              <a:buNone/>
+            </a:pPr>
+            <a:r>
+              <a:rPr lang="en-US" sz="1650" b="1" dirty="0">
+                <a:solidFill>
+                  <a:srgbClr val="156082"/>
+                </a:solidFill>
+                <a:latin typeface="Cambria" pitchFamily="34" charset="0"/>
+                <a:ea typeface="Cambria" pitchFamily="34" charset="-122"/>
+                <a:cs typeface="Cambria" pitchFamily="34" charset="-120"/>
+              </a:rPr>
+              <a:t>Sweep mode</a:t>
+            </a:r>
+            <a:endParaRPr lang="en-US" sz="1650" dirty="0"/>
+          </a:p>
+        </p:txBody>
+      </p:sp>
+      <p:sp>
+        <p:nvSpPr>
+          <p:cNvPr id="10" name="Text 7"/>
+          <p:cNvSpPr/>
+          <p:nvPr/>
+        </p:nvSpPr>
+        <p:spPr>
+          <a:xfrm>
+            <a:off x="804672" y="2670048"/>
+            <a:ext cx="3081528" cy="1783080"/>
+          </a:xfrm>
+          <a:prstGeom prst="rect">
+            <a:avLst/>
+          </a:prstGeom>
+          <a:noFill/>
+          <a:ln/>
+        </p:spPr>
+        <p:txBody>
+          <a:bodyPr wrap="square" lIns="0" tIns="0" rIns="0" bIns="0" rtlCol="0" anchor="t"/>
+          <a:lstStyle/>
+          <a:p>
+            <a:pPr indent="0" marL="0">
+              <a:buNone/>
+            </a:pPr>
+            <a:r>
+              <a:rPr lang="en-US" sz="1200" dirty="0">
                 <a:solidFill>
                   <a:srgbClr val="24343C"/>
                 </a:solidFill>
@@ -4161,97 +4341,104 @@
                 <a:ea typeface="Calibri" pitchFamily="34" charset="-122"/>
                 <a:cs typeface="Calibri" pitchFamily="34" charset="-120"/>
               </a:rPr>
-              <a:t>A roster of DSES members is signed up for radio astronomy — first observing sessions on a far gentler learning curve.</a:t>
-            </a:r>
-            <a:endParaRPr lang="en-US" sz="1450" dirty="0"/>
-          </a:p>
-        </p:txBody>
-      </p:sp>
-      <p:sp>
-        <p:nvSpPr>
-          <p:cNvPr id="9" name="Text 6"/>
-          <p:cNvSpPr/>
-          <p:nvPr/>
-        </p:nvSpPr>
-        <p:spPr>
-          <a:xfrm>
-            <a:off x="566928" y="2587752"/>
-            <a:ext cx="457200" cy="457200"/>
-          </a:xfrm>
-          <a:prstGeom prst="ellipse">
-            <a:avLst/>
+              <a:t>Stepped wide-spectrum scan for RFI surveys beyond the radio’s instantaneous bandwidth — retunes across a range (e.g. 100–1000 MHz) and stitches one wide trace, with cross-pass max-hold.</a:t>
+            </a:r>
+            <a:endParaRPr lang="en-US" sz="1200" dirty="0"/>
+          </a:p>
+        </p:txBody>
+      </p:sp>
+      <p:sp>
+        <p:nvSpPr>
+          <p:cNvPr id="11" name="Shape 8"/>
+          <p:cNvSpPr/>
+          <p:nvPr/>
+        </p:nvSpPr>
+        <p:spPr>
+          <a:xfrm>
+            <a:off x="4315968" y="2011680"/>
+            <a:ext cx="3557016" cy="2651760"/>
+          </a:xfrm>
+          <a:prstGeom prst="roundRect">
+            <a:avLst>
+              <a:gd name="adj" fmla="val 2759"/>
+            </a:avLst>
           </a:prstGeom>
           <a:solidFill>
-            <a:srgbClr val="156082"/>
+            <a:srgbClr val="EFF4F7"/>
           </a:solidFill>
-          <a:ln>
+          <a:ln w="9525">
             <a:solidFill>
-              <a:srgbClr val="156082"/>
+              <a:srgbClr val="D7E3EA"/>
             </a:solidFill>
+            <a:prstDash val="solid"/>
           </a:ln>
         </p:spPr>
-        <p:txBody>
-          <a:bodyPr wrap="square" lIns="0" tIns="0" rIns="0" bIns="0" rtlCol="0" anchor="ctr"/>
-          <a:lstStyle/>
-          <a:p>
-            <a:pPr algn="ctr" indent="0" marL="0">
-              <a:buNone/>
-            </a:pPr>
-            <a:r>
-              <a:rPr lang="en-US" sz="1800" b="1" dirty="0">
-                <a:solidFill>
-                  <a:srgbClr val="FFFFFF"/>
-                </a:solidFill>
-                <a:latin typeface="Calibri" pitchFamily="34" charset="0"/>
-                <a:ea typeface="Calibri" pitchFamily="34" charset="-122"/>
-                <a:cs typeface="Calibri" pitchFamily="34" charset="-120"/>
-              </a:rPr>
-              <a:t>2</a:t>
-            </a:r>
-            <a:endParaRPr lang="en-US" sz="1800" dirty="0"/>
-          </a:p>
-        </p:txBody>
-      </p:sp>
-      <p:sp>
-        <p:nvSpPr>
-          <p:cNvPr id="10" name="Text 7"/>
-          <p:cNvSpPr/>
-          <p:nvPr/>
-        </p:nvSpPr>
-        <p:spPr>
-          <a:xfrm>
-            <a:off x="1225296" y="2514600"/>
-            <a:ext cx="10241280" cy="603504"/>
-          </a:xfrm>
-          <a:prstGeom prst="rect">
-            <a:avLst/>
-          </a:prstGeom>
-          <a:noFill/>
-          <a:ln/>
-        </p:spPr>
-        <p:txBody>
-          <a:bodyPr wrap="square" lIns="0" tIns="0" rIns="0" bIns="0" rtlCol="0" anchor="ctr"/>
-          <a:lstStyle/>
-          <a:p>
-            <a:pPr indent="0" marL="0">
-              <a:buNone/>
-            </a:pPr>
-            <a:r>
-              <a:rPr lang="en-US" sz="1450" b="1" dirty="0">
-                <a:solidFill>
-                  <a:srgbClr val="0A2F40"/>
-                </a:solidFill>
-                <a:latin typeface="Calibri" pitchFamily="34" charset="0"/>
-                <a:ea typeface="Calibri" pitchFamily="34" charset="-122"/>
-                <a:cs typeface="Calibri" pitchFamily="34" charset="-120"/>
-              </a:rPr>
-              <a:t>Re-observe B0950+08  —  </a:t>
-            </a:r>
-            <a:pPr indent="0" marL="0">
-              <a:buNone/>
-            </a:pPr>
-            <a:r>
-              <a:rPr lang="en-US" sz="1450" dirty="0">
+      </p:sp>
+      <p:sp>
+        <p:nvSpPr>
+          <p:cNvPr id="12" name="Text 9"/>
+          <p:cNvSpPr/>
+          <p:nvPr/>
+        </p:nvSpPr>
+        <p:spPr>
+          <a:xfrm>
+            <a:off x="4553712" y="2212848"/>
+            <a:ext cx="3081528" cy="384048"/>
+          </a:xfrm>
+          <a:prstGeom prst="rect">
+            <a:avLst/>
+          </a:prstGeom>
+          <a:noFill/>
+          <a:ln/>
+        </p:spPr>
+        <p:txBody>
+          <a:bodyPr wrap="square" lIns="0" tIns="0" rIns="0" bIns="0" rtlCol="0" anchor="ctr"/>
+          <a:lstStyle/>
+          <a:p>
+            <a:pPr indent="0" marL="0">
+              <a:buNone/>
+            </a:pPr>
+            <a:r>
+              <a:rPr lang="en-US" sz="1650" b="1" dirty="0">
+                <a:solidFill>
+                  <a:srgbClr val="156082"/>
+                </a:solidFill>
+                <a:latin typeface="Cambria" pitchFamily="34" charset="0"/>
+                <a:ea typeface="Cambria" pitchFamily="34" charset="-122"/>
+                <a:cs typeface="Cambria" pitchFamily="34" charset="-120"/>
+              </a:rPr>
+              <a:t>Recording, finished</a:t>
+            </a:r>
+            <a:endParaRPr lang="en-US" sz="1650" dirty="0"/>
+          </a:p>
+        </p:txBody>
+      </p:sp>
+      <p:sp>
+        <p:nvSpPr>
+          <p:cNvPr id="13" name="Text 10"/>
+          <p:cNvSpPr/>
+          <p:nvPr/>
+        </p:nvSpPr>
+        <p:spPr>
+          <a:xfrm>
+            <a:off x="4553712" y="2670048"/>
+            <a:ext cx="3081528" cy="1783080"/>
+          </a:xfrm>
+          <a:prstGeom prst="rect">
+            <a:avLst/>
+          </a:prstGeom>
+          <a:noFill/>
+          <a:ln/>
+        </p:spPr>
+        <p:txBody>
+          <a:bodyPr wrap="square" lIns="0" tIns="0" rIns="0" bIns="0" rtlCol="0" anchor="t"/>
+          <a:lstStyle/>
+          <a:p>
+            <a:pPr indent="0" marL="0">
+              <a:buNone/>
+            </a:pPr>
+            <a:r>
+              <a:rPr lang="en-US" sz="1200" dirty="0">
                 <a:solidFill>
                   <a:srgbClr val="24343C"/>
                 </a:solidFill>
@@ -4259,97 +4446,104 @@
                 <a:ea typeface="Calibri" pitchFamily="34" charset="-122"/>
                 <a:cs typeface="Calibri" pitchFamily="34" charset="-120"/>
               </a:rPr>
-              <a:t>Longer integration to ride through scintillation.</a:t>
-            </a:r>
-            <a:endParaRPr lang="en-US" sz="1450" dirty="0"/>
-          </a:p>
-        </p:txBody>
-      </p:sp>
-      <p:sp>
-        <p:nvSpPr>
-          <p:cNvPr id="11" name="Text 8"/>
-          <p:cNvSpPr/>
-          <p:nvPr/>
-        </p:nvSpPr>
-        <p:spPr>
-          <a:xfrm>
-            <a:off x="566928" y="3483864"/>
-            <a:ext cx="457200" cy="457200"/>
-          </a:xfrm>
-          <a:prstGeom prst="ellipse">
-            <a:avLst/>
+              <a:t>Source name stamped into the filename and the .fil header — with RA/Dec derived from the pulsar designation. Red REC indicator, elapsed time, timed auto-stop. July 11’s files had to be renamed and patched by hand; never again.</a:t>
+            </a:r>
+            <a:endParaRPr lang="en-US" sz="1200" dirty="0"/>
+          </a:p>
+        </p:txBody>
+      </p:sp>
+      <p:sp>
+        <p:nvSpPr>
+          <p:cNvPr id="14" name="Shape 11"/>
+          <p:cNvSpPr/>
+          <p:nvPr/>
+        </p:nvSpPr>
+        <p:spPr>
+          <a:xfrm>
+            <a:off x="8065008" y="2011680"/>
+            <a:ext cx="3557016" cy="2651760"/>
+          </a:xfrm>
+          <a:prstGeom prst="roundRect">
+            <a:avLst>
+              <a:gd name="adj" fmla="val 2759"/>
+            </a:avLst>
           </a:prstGeom>
           <a:solidFill>
-            <a:srgbClr val="156082"/>
+            <a:srgbClr val="EFF4F7"/>
           </a:solidFill>
-          <a:ln>
+          <a:ln w="9525">
             <a:solidFill>
-              <a:srgbClr val="156082"/>
+              <a:srgbClr val="D7E3EA"/>
             </a:solidFill>
+            <a:prstDash val="solid"/>
           </a:ln>
         </p:spPr>
-        <p:txBody>
-          <a:bodyPr wrap="square" lIns="0" tIns="0" rIns="0" bIns="0" rtlCol="0" anchor="ctr"/>
-          <a:lstStyle/>
-          <a:p>
-            <a:pPr algn="ctr" indent="0" marL="0">
-              <a:buNone/>
-            </a:pPr>
-            <a:r>
-              <a:rPr lang="en-US" sz="1800" b="1" dirty="0">
-                <a:solidFill>
-                  <a:srgbClr val="FFFFFF"/>
-                </a:solidFill>
-                <a:latin typeface="Calibri" pitchFamily="34" charset="0"/>
-                <a:ea typeface="Calibri" pitchFamily="34" charset="-122"/>
-                <a:cs typeface="Calibri" pitchFamily="34" charset="-120"/>
-              </a:rPr>
-              <a:t>3</a:t>
-            </a:r>
-            <a:endParaRPr lang="en-US" sz="1800" dirty="0"/>
-          </a:p>
-        </p:txBody>
-      </p:sp>
-      <p:sp>
-        <p:nvSpPr>
-          <p:cNvPr id="12" name="Text 9"/>
-          <p:cNvSpPr/>
-          <p:nvPr/>
-        </p:nvSpPr>
-        <p:spPr>
-          <a:xfrm>
-            <a:off x="1225296" y="3410712"/>
-            <a:ext cx="10241280" cy="603504"/>
-          </a:xfrm>
-          <a:prstGeom prst="rect">
-            <a:avLst/>
-          </a:prstGeom>
-          <a:noFill/>
-          <a:ln/>
-        </p:spPr>
-        <p:txBody>
-          <a:bodyPr wrap="square" lIns="0" tIns="0" rIns="0" bIns="0" rtlCol="0" anchor="ctr"/>
-          <a:lstStyle/>
-          <a:p>
-            <a:pPr indent="0" marL="0">
-              <a:buNone/>
-            </a:pPr>
-            <a:r>
-              <a:rPr lang="en-US" sz="1450" b="1" dirty="0">
-                <a:solidFill>
-                  <a:srgbClr val="0A2F40"/>
-                </a:solidFill>
-                <a:latin typeface="Calibri" pitchFamily="34" charset="0"/>
-                <a:ea typeface="Calibri" pitchFamily="34" charset="-122"/>
-                <a:cs typeface="Calibri" pitchFamily="34" charset="-120"/>
-              </a:rPr>
-              <a:t>Toward timing-grade data  —  </a:t>
-            </a:r>
-            <a:pPr indent="0" marL="0">
-              <a:buNone/>
-            </a:pPr>
-            <a:r>
-              <a:rPr lang="en-US" sz="1450" dirty="0">
+      </p:sp>
+      <p:sp>
+        <p:nvSpPr>
+          <p:cNvPr id="15" name="Text 12"/>
+          <p:cNvSpPr/>
+          <p:nvPr/>
+        </p:nvSpPr>
+        <p:spPr>
+          <a:xfrm>
+            <a:off x="8302752" y="2212848"/>
+            <a:ext cx="3081528" cy="384048"/>
+          </a:xfrm>
+          <a:prstGeom prst="rect">
+            <a:avLst/>
+          </a:prstGeom>
+          <a:noFill/>
+          <a:ln/>
+        </p:spPr>
+        <p:txBody>
+          <a:bodyPr wrap="square" lIns="0" tIns="0" rIns="0" bIns="0" rtlCol="0" anchor="ctr"/>
+          <a:lstStyle/>
+          <a:p>
+            <a:pPr indent="0" marL="0">
+              <a:buNone/>
+            </a:pPr>
+            <a:r>
+              <a:rPr lang="en-US" sz="1650" b="1" dirty="0">
+                <a:solidFill>
+                  <a:srgbClr val="156082"/>
+                </a:solidFill>
+                <a:latin typeface="Cambria" pitchFamily="34" charset="0"/>
+                <a:ea typeface="Cambria" pitchFamily="34" charset="-122"/>
+                <a:cs typeface="Cambria" pitchFamily="34" charset="-120"/>
+              </a:rPr>
+              <a:t>Headless fixes</a:t>
+            </a:r>
+            <a:endParaRPr lang="en-US" sz="1650" dirty="0"/>
+          </a:p>
+        </p:txBody>
+      </p:sp>
+      <p:sp>
+        <p:nvSpPr>
+          <p:cNvPr id="16" name="Text 13"/>
+          <p:cNvSpPr/>
+          <p:nvPr/>
+        </p:nvSpPr>
+        <p:spPr>
+          <a:xfrm>
+            <a:off x="8302752" y="2670048"/>
+            <a:ext cx="3081528" cy="1783080"/>
+          </a:xfrm>
+          <a:prstGeom prst="rect">
+            <a:avLst/>
+          </a:prstGeom>
+          <a:noFill/>
+          <a:ln/>
+        </p:spPr>
+        <p:txBody>
+          <a:bodyPr wrap="square" lIns="0" tIns="0" rIns="0" bIns="0" rtlCol="0" anchor="t"/>
+          <a:lstStyle/>
+          <a:p>
+            <a:pPr indent="0" marL="0">
+              <a:buNone/>
+            </a:pPr>
+            <a:r>
+              <a:rPr lang="en-US" sz="1200" dirty="0">
                 <a:solidFill>
                   <a:srgbClr val="24343C"/>
                 </a:solidFill>
@@ -4357,97 +4551,79 @@
                 <a:ea typeface="Calibri" pitchFamily="34" charset="-122"/>
                 <a:cs typeface="Calibri" pitchFamily="34" charset="-120"/>
               </a:rPr>
-              <a:t>Repeat B0329+54 observations — pulse arrival times over a long baseline.</a:t>
-            </a:r>
-            <a:endParaRPr lang="en-US" sz="1450" dirty="0"/>
-          </a:p>
-        </p:txBody>
-      </p:sp>
-      <p:sp>
-        <p:nvSpPr>
-          <p:cNvPr id="13" name="Text 10"/>
-          <p:cNvSpPr/>
-          <p:nvPr/>
-        </p:nvSpPr>
-        <p:spPr>
-          <a:xfrm>
-            <a:off x="566928" y="4379976"/>
-            <a:ext cx="457200" cy="457200"/>
-          </a:xfrm>
-          <a:prstGeom prst="ellipse">
-            <a:avLst/>
+              <a:t>The virtual-monitor launcher and empty-screen safeguards from the previous slide, plus updated documentation and operating guide.</a:t>
+            </a:r>
+            <a:endParaRPr lang="en-US" sz="1200" dirty="0"/>
+          </a:p>
+        </p:txBody>
+      </p:sp>
+      <p:sp>
+        <p:nvSpPr>
+          <p:cNvPr id="17" name="Shape 14"/>
+          <p:cNvSpPr/>
+          <p:nvPr/>
+        </p:nvSpPr>
+        <p:spPr>
+          <a:xfrm>
+            <a:off x="566928" y="4937760"/>
+            <a:ext cx="11055096" cy="1234440"/>
+          </a:xfrm>
+          <a:prstGeom prst="roundRect">
+            <a:avLst>
+              <a:gd name="adj" fmla="val 5926"/>
+            </a:avLst>
           </a:prstGeom>
           <a:solidFill>
-            <a:srgbClr val="156082"/>
+            <a:srgbClr val="FFFFFF"/>
           </a:solidFill>
-          <a:ln>
+          <a:ln w="9525">
             <a:solidFill>
-              <a:srgbClr val="156082"/>
+              <a:srgbClr val="D7E3EA"/>
             </a:solidFill>
+            <a:prstDash val="solid"/>
           </a:ln>
         </p:spPr>
-        <p:txBody>
-          <a:bodyPr wrap="square" lIns="0" tIns="0" rIns="0" bIns="0" rtlCol="0" anchor="ctr"/>
-          <a:lstStyle/>
-          <a:p>
-            <a:pPr algn="ctr" indent="0" marL="0">
-              <a:buNone/>
-            </a:pPr>
-            <a:r>
-              <a:rPr lang="en-US" sz="1800" b="1" dirty="0">
-                <a:solidFill>
-                  <a:srgbClr val="FFFFFF"/>
-                </a:solidFill>
-                <a:latin typeface="Calibri" pitchFamily="34" charset="0"/>
-                <a:ea typeface="Calibri" pitchFamily="34" charset="-122"/>
-                <a:cs typeface="Calibri" pitchFamily="34" charset="-120"/>
-              </a:rPr>
-              <a:t>4</a:t>
-            </a:r>
-            <a:endParaRPr lang="en-US" sz="1800" dirty="0"/>
-          </a:p>
-        </p:txBody>
-      </p:sp>
-      <p:sp>
-        <p:nvSpPr>
-          <p:cNvPr id="14" name="Text 11"/>
-          <p:cNvSpPr/>
-          <p:nvPr/>
-        </p:nvSpPr>
-        <p:spPr>
-          <a:xfrm>
-            <a:off x="1225296" y="4306824"/>
-            <a:ext cx="10241280" cy="603504"/>
-          </a:xfrm>
-          <a:prstGeom prst="rect">
-            <a:avLst/>
-          </a:prstGeom>
-          <a:noFill/>
-          <a:ln/>
-        </p:spPr>
-        <p:txBody>
-          <a:bodyPr wrap="square" lIns="0" tIns="0" rIns="0" bIns="0" rtlCol="0" anchor="ctr"/>
-          <a:lstStyle/>
-          <a:p>
-            <a:pPr indent="0" marL="0">
-              <a:buNone/>
-            </a:pPr>
-            <a:r>
-              <a:rPr lang="en-US" sz="1450" b="1" dirty="0">
-                <a:solidFill>
-                  <a:srgbClr val="0A2F40"/>
-                </a:solidFill>
-                <a:latin typeface="Calibri" pitchFamily="34" charset="0"/>
-                <a:ea typeface="Calibri" pitchFamily="34" charset="-122"/>
-                <a:cs typeface="Calibri" pitchFamily="34" charset="-120"/>
-              </a:rPr>
-              <a:t>Publish  —  </a:t>
-            </a:r>
-            <a:pPr indent="0" marL="0">
-              <a:buNone/>
-            </a:pPr>
-            <a:r>
-              <a:rPr lang="en-US" sz="1450" dirty="0">
+      </p:sp>
+      <p:sp>
+        <p:nvSpPr>
+          <p:cNvPr id="18" name="Text 15"/>
+          <p:cNvSpPr/>
+          <p:nvPr/>
+        </p:nvSpPr>
+        <p:spPr>
+          <a:xfrm>
+            <a:off x="841248" y="4937760"/>
+            <a:ext cx="10515600" cy="1234440"/>
+          </a:xfrm>
+          <a:prstGeom prst="rect">
+            <a:avLst/>
+          </a:prstGeom>
+          <a:noFill/>
+          <a:ln/>
+        </p:spPr>
+        <p:txBody>
+          <a:bodyPr wrap="square" lIns="0" tIns="0" rIns="0" bIns="0" rtlCol="0" anchor="ctr"/>
+          <a:lstStyle/>
+          <a:p>
+            <a:pPr indent="0" marL="0">
+              <a:buNone/>
+            </a:pPr>
+            <a:r>
+              <a:rPr lang="en-US" sz="1250" b="1" dirty="0">
+                <a:solidFill>
+                  <a:srgbClr val="B86A18"/>
+                </a:solidFill>
+                <a:latin typeface="Calibri" pitchFamily="34" charset="0"/>
+                <a:ea typeface="Calibri" pitchFamily="34" charset="-122"/>
+                <a:cs typeface="Calibri" pitchFamily="34" charset="-120"/>
+              </a:rPr>
+              <a:t>Epilogue: </a:t>
+            </a:r>
+            <a:pPr indent="0" marL="0">
+              <a:buNone/>
+            </a:pPr>
+            <a:r>
+              <a:rPr lang="en-US" sz="1250" dirty="0">
                 <a:solidFill>
                   <a:srgbClr val="24343C"/>
                 </a:solidFill>
@@ -4455,107 +4631,9 @@
                 <a:ea typeface="Calibri" pitchFamily="34" charset="-122"/>
                 <a:cs typeface="Calibri" pitchFamily="34" charset="-120"/>
               </a:rPr>
-              <a:t>Full trip report on the DSES web site; this talk for SARA.</a:t>
-            </a:r>
-            <a:endParaRPr lang="en-US" sz="1450" dirty="0"/>
-          </a:p>
-        </p:txBody>
-      </p:sp>
-      <p:sp>
-        <p:nvSpPr>
-          <p:cNvPr id="15" name="Text 12"/>
-          <p:cNvSpPr/>
-          <p:nvPr/>
-        </p:nvSpPr>
-        <p:spPr>
-          <a:xfrm>
-            <a:off x="566928" y="5276088"/>
-            <a:ext cx="457200" cy="457200"/>
-          </a:xfrm>
-          <a:prstGeom prst="ellipse">
-            <a:avLst/>
-          </a:prstGeom>
-          <a:solidFill>
-            <a:srgbClr val="156082"/>
-          </a:solidFill>
-          <a:ln>
-            <a:solidFill>
-              <a:srgbClr val="156082"/>
-            </a:solidFill>
-          </a:ln>
-        </p:spPr>
-        <p:txBody>
-          <a:bodyPr wrap="square" lIns="0" tIns="0" rIns="0" bIns="0" rtlCol="0" anchor="ctr"/>
-          <a:lstStyle/>
-          <a:p>
-            <a:pPr algn="ctr" indent="0" marL="0">
-              <a:buNone/>
-            </a:pPr>
-            <a:r>
-              <a:rPr lang="en-US" sz="1800" b="1" dirty="0">
-                <a:solidFill>
-                  <a:srgbClr val="FFFFFF"/>
-                </a:solidFill>
-                <a:latin typeface="Calibri" pitchFamily="34" charset="0"/>
-                <a:ea typeface="Calibri" pitchFamily="34" charset="-122"/>
-                <a:cs typeface="Calibri" pitchFamily="34" charset="-120"/>
-              </a:rPr>
-              <a:t>5</a:t>
-            </a:r>
-            <a:endParaRPr lang="en-US" sz="1800" dirty="0"/>
-          </a:p>
-        </p:txBody>
-      </p:sp>
-      <p:sp>
-        <p:nvSpPr>
-          <p:cNvPr id="16" name="Text 13"/>
-          <p:cNvSpPr/>
-          <p:nvPr/>
-        </p:nvSpPr>
-        <p:spPr>
-          <a:xfrm>
-            <a:off x="1225296" y="5202936"/>
-            <a:ext cx="10241280" cy="603504"/>
-          </a:xfrm>
-          <a:prstGeom prst="rect">
-            <a:avLst/>
-          </a:prstGeom>
-          <a:noFill/>
-          <a:ln/>
-        </p:spPr>
-        <p:txBody>
-          <a:bodyPr wrap="square" lIns="0" tIns="0" rIns="0" bIns="0" rtlCol="0" anchor="ctr"/>
-          <a:lstStyle/>
-          <a:p>
-            <a:pPr indent="0" marL="0">
-              <a:buNone/>
-            </a:pPr>
-            <a:r>
-              <a:rPr lang="en-US" sz="1450" b="1" dirty="0">
-                <a:solidFill>
-                  <a:srgbClr val="0A2F40"/>
-                </a:solidFill>
-                <a:latin typeface="Calibri" pitchFamily="34" charset="0"/>
-                <a:ea typeface="Calibri" pitchFamily="34" charset="-122"/>
-                <a:cs typeface="Calibri" pitchFamily="34" charset="-120"/>
-              </a:rPr>
-              <a:t>Keep building  —  </a:t>
-            </a:r>
-            <a:pPr indent="0" marL="0">
-              <a:buNone/>
-            </a:pPr>
-            <a:r>
-              <a:rPr lang="en-US" sz="1450" dirty="0">
-                <a:solidFill>
-                  <a:srgbClr val="24343C"/>
-                </a:solidFill>
-                <a:latin typeface="Calibri" pitchFamily="34" charset="0"/>
-                <a:ea typeface="Calibri" pitchFamily="34" charset="-122"/>
-                <a:cs typeface="Calibri" pitchFamily="34" charset="-120"/>
-              </a:rPr>
-              <a:t>More Spectrum Analyzer features are planned — the report and operating guide are the baseline future releases will update.</a:t>
-            </a:r>
-            <a:endParaRPr lang="en-US" sz="1450" dirty="0"/>
+              <a:t>one day after release, the field box caught a packaging defect desktop testing had missed — Windows line endings in the Unix launcher script. Rebuilt and republished within hours, with two independent build-pipeline safeguards added. Real installations in the field earn their keep.</a:t>
+            </a:r>
+            <a:endParaRPr lang="en-US" sz="1250" dirty="0"/>
           </a:p>
         </p:txBody>
       </p:sp>
@@ -4570,6 +4648,708 @@
 <file path=ppt/slides/slide13.xml><?xml version="1.0" encoding="utf-8"?>
 <p:sld xmlns:a="http://schemas.openxmlformats.org/drawingml/2006/main" xmlns:r="http://schemas.openxmlformats.org/officeDocument/2006/relationships" xmlns:p="http://schemas.openxmlformats.org/presentationml/2006/main">
   <p:cSld name="Slide 13">
+    <p:bg>
+      <p:bgPr>
+        <a:solidFill>
+          <a:srgbClr val="FFFFFF"/>
+        </a:solidFill>
+      </p:bgPr>
+    </p:bg>
+    <p:spTree>
+      <p:nvGrpSpPr>
+        <p:cNvPr id="1" name=""/>
+        <p:cNvGrpSpPr/>
+        <p:nvPr/>
+      </p:nvGrpSpPr>
+      <p:grpSpPr>
+        <a:xfrm>
+          <a:off x="0" y="0"/>
+          <a:ext cx="0" cy="0"/>
+          <a:chOff x="0" y="0"/>
+          <a:chExt cx="0" cy="0"/>
+        </a:xfrm>
+      </p:grpSpPr>
+      <p:sp>
+        <p:nvSpPr>
+          <p:cNvPr id="2" name="Text 0"/>
+          <p:cNvSpPr/>
+          <p:nvPr/>
+        </p:nvSpPr>
+        <p:spPr>
+          <a:xfrm>
+            <a:off x="566928" y="347472"/>
+            <a:ext cx="8686800" cy="274320"/>
+          </a:xfrm>
+          <a:prstGeom prst="rect">
+            <a:avLst/>
+          </a:prstGeom>
+          <a:noFill/>
+          <a:ln/>
+        </p:spPr>
+        <p:txBody>
+          <a:bodyPr wrap="square" lIns="0" tIns="0" rIns="0" bIns="0" rtlCol="0" anchor="ctr"/>
+          <a:lstStyle/>
+          <a:p>
+            <a:pPr indent="0" marL="0">
+              <a:buNone/>
+            </a:pPr>
+            <a:r>
+              <a:rPr lang="en-US" sz="1100" b="1" spc="200" kern="0" dirty="0">
+                <a:solidFill>
+                  <a:srgbClr val="156082"/>
+                </a:solidFill>
+                <a:latin typeface="Calibri" pitchFamily="34" charset="0"/>
+                <a:ea typeface="Calibri" pitchFamily="34" charset="-122"/>
+                <a:cs typeface="Calibri" pitchFamily="34" charset="-120"/>
+              </a:rPr>
+              <a:t>THE ROAD AHEAD</a:t>
+            </a:r>
+            <a:endParaRPr lang="en-US" sz="1100" dirty="0"/>
+          </a:p>
+        </p:txBody>
+      </p:sp>
+      <p:sp>
+        <p:nvSpPr>
+          <p:cNvPr id="3" name="Text 1"/>
+          <p:cNvSpPr/>
+          <p:nvPr/>
+        </p:nvSpPr>
+        <p:spPr>
+          <a:xfrm>
+            <a:off x="566928" y="603504"/>
+            <a:ext cx="9509760" cy="685800"/>
+          </a:xfrm>
+          <a:prstGeom prst="rect">
+            <a:avLst/>
+          </a:prstGeom>
+          <a:noFill/>
+          <a:ln/>
+        </p:spPr>
+        <p:txBody>
+          <a:bodyPr wrap="square" lIns="0" tIns="0" rIns="0" bIns="0" rtlCol="0" anchor="ctr"/>
+          <a:lstStyle/>
+          <a:p>
+            <a:pPr indent="0" marL="0">
+              <a:buNone/>
+            </a:pPr>
+            <a:r>
+              <a:rPr lang="en-US" sz="2900" b="1" dirty="0">
+                <a:solidFill>
+                  <a:srgbClr val="0A2F40"/>
+                </a:solidFill>
+                <a:latin typeface="Cambria" pitchFamily="34" charset="0"/>
+                <a:ea typeface="Cambria" pitchFamily="34" charset="-122"/>
+                <a:cs typeface="Cambria" pitchFamily="34" charset="-120"/>
+              </a:rPr>
+              <a:t>The barrier is now a slope</a:t>
+            </a:r>
+            <a:endParaRPr lang="en-US" sz="2900" dirty="0"/>
+          </a:p>
+        </p:txBody>
+      </p:sp>
+      <p:pic>
+        <p:nvPicPr>
+          <p:cNvPr id="4" name="Image 0" descr="C:\Users\rick\Documents\DSES\Science\Spectrum_Analyzer_PY\reports\assets\DSES_Logo_Compact_Teal.png">    </p:cNvPr>
+          <p:cNvPicPr>
+            <a:picLocks noChangeAspect="1"/>
+          </p:cNvPicPr>
+          <p:nvPr/>
+        </p:nvPicPr>
+        <p:blipFill>
+          <a:blip r:embed="rId1"/>
+          <a:stretch>
+            <a:fillRect/>
+          </a:stretch>
+        </p:blipFill>
+        <p:spPr>
+          <a:xfrm>
+            <a:off x="10533888" y="384048"/>
+            <a:ext cx="1097280" cy="406908"/>
+          </a:xfrm>
+          <a:prstGeom prst="rect">
+            <a:avLst/>
+          </a:prstGeom>
+        </p:spPr>
+      </p:pic>
+      <p:sp>
+        <p:nvSpPr>
+          <p:cNvPr id="5" name="Text 2"/>
+          <p:cNvSpPr/>
+          <p:nvPr/>
+        </p:nvSpPr>
+        <p:spPr>
+          <a:xfrm>
+            <a:off x="566928" y="6473952"/>
+            <a:ext cx="5943600" cy="228600"/>
+          </a:xfrm>
+          <a:prstGeom prst="rect">
+            <a:avLst/>
+          </a:prstGeom>
+          <a:noFill/>
+          <a:ln/>
+        </p:spPr>
+        <p:txBody>
+          <a:bodyPr wrap="square" lIns="0" tIns="0" rIns="0" bIns="0" rtlCol="0" anchor="ctr"/>
+          <a:lstStyle/>
+          <a:p>
+            <a:pPr indent="0" marL="0">
+              <a:buNone/>
+            </a:pPr>
+            <a:r>
+              <a:rPr lang="en-US" sz="850" dirty="0">
+                <a:solidFill>
+                  <a:srgbClr val="6B7A82"/>
+                </a:solidFill>
+                <a:latin typeface="Calibri" pitchFamily="34" charset="0"/>
+                <a:ea typeface="Calibri" pitchFamily="34" charset="-122"/>
+                <a:cs typeface="Calibri" pitchFamily="34" charset="-120"/>
+              </a:rPr>
+              <a:t>Lowering the Barrier to Radio Astronomy  •  DSES  •  SARA 2026</a:t>
+            </a:r>
+            <a:endParaRPr lang="en-US" sz="850" dirty="0"/>
+          </a:p>
+        </p:txBody>
+      </p:sp>
+      <p:sp>
+        <p:nvSpPr>
+          <p:cNvPr id="6" name="Text 3"/>
+          <p:cNvSpPr/>
+          <p:nvPr/>
+        </p:nvSpPr>
+        <p:spPr>
+          <a:xfrm>
+            <a:off x="11475720" y="6473952"/>
+            <a:ext cx="457200" cy="228600"/>
+          </a:xfrm>
+          <a:prstGeom prst="rect">
+            <a:avLst/>
+          </a:prstGeom>
+          <a:noFill/>
+          <a:ln/>
+        </p:spPr>
+        <p:txBody>
+          <a:bodyPr wrap="square" lIns="0" tIns="0" rIns="0" bIns="0" rtlCol="0" anchor="ctr"/>
+          <a:lstStyle/>
+          <a:p>
+            <a:pPr algn="r" indent="0" marL="0">
+              <a:buNone/>
+            </a:pPr>
+            <a:r>
+              <a:rPr lang="en-US" sz="850" dirty="0">
+                <a:solidFill>
+                  <a:srgbClr val="6B7A82"/>
+                </a:solidFill>
+                <a:latin typeface="Calibri" pitchFamily="34" charset="0"/>
+                <a:ea typeface="Calibri" pitchFamily="34" charset="-122"/>
+                <a:cs typeface="Calibri" pitchFamily="34" charset="-120"/>
+              </a:rPr>
+              <a:t>13</a:t>
+            </a:r>
+            <a:endParaRPr lang="en-US" sz="850" dirty="0"/>
+          </a:p>
+        </p:txBody>
+      </p:sp>
+      <p:sp>
+        <p:nvSpPr>
+          <p:cNvPr id="7" name="Text 4"/>
+          <p:cNvSpPr/>
+          <p:nvPr/>
+        </p:nvSpPr>
+        <p:spPr>
+          <a:xfrm>
+            <a:off x="566928" y="1691640"/>
+            <a:ext cx="457200" cy="457200"/>
+          </a:xfrm>
+          <a:prstGeom prst="ellipse">
+            <a:avLst/>
+          </a:prstGeom>
+          <a:solidFill>
+            <a:srgbClr val="B86A18"/>
+          </a:solidFill>
+          <a:ln>
+            <a:solidFill>
+              <a:srgbClr val="B86A18"/>
+            </a:solidFill>
+          </a:ln>
+        </p:spPr>
+        <p:txBody>
+          <a:bodyPr wrap="square" lIns="0" tIns="0" rIns="0" bIns="0" rtlCol="0" anchor="ctr"/>
+          <a:lstStyle/>
+          <a:p>
+            <a:pPr algn="ctr" indent="0" marL="0">
+              <a:buNone/>
+            </a:pPr>
+            <a:r>
+              <a:rPr lang="en-US" sz="1800" b="1" dirty="0">
+                <a:solidFill>
+                  <a:srgbClr val="FFFFFF"/>
+                </a:solidFill>
+                <a:latin typeface="Calibri" pitchFamily="34" charset="0"/>
+                <a:ea typeface="Calibri" pitchFamily="34" charset="-122"/>
+                <a:cs typeface="Calibri" pitchFamily="34" charset="-120"/>
+              </a:rPr>
+              <a:t>1</a:t>
+            </a:r>
+            <a:endParaRPr lang="en-US" sz="1800" dirty="0"/>
+          </a:p>
+        </p:txBody>
+      </p:sp>
+      <p:sp>
+        <p:nvSpPr>
+          <p:cNvPr id="8" name="Text 5"/>
+          <p:cNvSpPr/>
+          <p:nvPr/>
+        </p:nvSpPr>
+        <p:spPr>
+          <a:xfrm>
+            <a:off x="1225296" y="1618488"/>
+            <a:ext cx="10241280" cy="603504"/>
+          </a:xfrm>
+          <a:prstGeom prst="rect">
+            <a:avLst/>
+          </a:prstGeom>
+          <a:noFill/>
+          <a:ln/>
+        </p:spPr>
+        <p:txBody>
+          <a:bodyPr wrap="square" lIns="0" tIns="0" rIns="0" bIns="0" rtlCol="0" anchor="ctr"/>
+          <a:lstStyle/>
+          <a:p>
+            <a:pPr indent="0" marL="0">
+              <a:buNone/>
+            </a:pPr>
+            <a:r>
+              <a:rPr lang="en-US" sz="1450" b="1" dirty="0">
+                <a:solidFill>
+                  <a:srgbClr val="0A2F40"/>
+                </a:solidFill>
+                <a:latin typeface="Calibri" pitchFamily="34" charset="0"/>
+                <a:ea typeface="Calibri" pitchFamily="34" charset="-122"/>
+                <a:cs typeface="Calibri" pitchFamily="34" charset="-120"/>
+              </a:rPr>
+              <a:t>Train the interest group  —  </a:t>
+            </a:r>
+            <a:pPr indent="0" marL="0">
+              <a:buNone/>
+            </a:pPr>
+            <a:r>
+              <a:rPr lang="en-US" sz="1450" dirty="0">
+                <a:solidFill>
+                  <a:srgbClr val="24343C"/>
+                </a:solidFill>
+                <a:latin typeface="Calibri" pitchFamily="34" charset="0"/>
+                <a:ea typeface="Calibri" pitchFamily="34" charset="-122"/>
+                <a:cs typeface="Calibri" pitchFamily="34" charset="-120"/>
+              </a:rPr>
+              <a:t>A roster of DSES members is signed up for radio astronomy — first observing sessions on a far gentler learning curve.</a:t>
+            </a:r>
+            <a:endParaRPr lang="en-US" sz="1450" dirty="0"/>
+          </a:p>
+        </p:txBody>
+      </p:sp>
+      <p:sp>
+        <p:nvSpPr>
+          <p:cNvPr id="9" name="Text 6"/>
+          <p:cNvSpPr/>
+          <p:nvPr/>
+        </p:nvSpPr>
+        <p:spPr>
+          <a:xfrm>
+            <a:off x="566928" y="2587752"/>
+            <a:ext cx="457200" cy="457200"/>
+          </a:xfrm>
+          <a:prstGeom prst="ellipse">
+            <a:avLst/>
+          </a:prstGeom>
+          <a:solidFill>
+            <a:srgbClr val="156082"/>
+          </a:solidFill>
+          <a:ln>
+            <a:solidFill>
+              <a:srgbClr val="156082"/>
+            </a:solidFill>
+          </a:ln>
+        </p:spPr>
+        <p:txBody>
+          <a:bodyPr wrap="square" lIns="0" tIns="0" rIns="0" bIns="0" rtlCol="0" anchor="ctr"/>
+          <a:lstStyle/>
+          <a:p>
+            <a:pPr algn="ctr" indent="0" marL="0">
+              <a:buNone/>
+            </a:pPr>
+            <a:r>
+              <a:rPr lang="en-US" sz="1800" b="1" dirty="0">
+                <a:solidFill>
+                  <a:srgbClr val="FFFFFF"/>
+                </a:solidFill>
+                <a:latin typeface="Calibri" pitchFamily="34" charset="0"/>
+                <a:ea typeface="Calibri" pitchFamily="34" charset="-122"/>
+                <a:cs typeface="Calibri" pitchFamily="34" charset="-120"/>
+              </a:rPr>
+              <a:t>2</a:t>
+            </a:r>
+            <a:endParaRPr lang="en-US" sz="1800" dirty="0"/>
+          </a:p>
+        </p:txBody>
+      </p:sp>
+      <p:sp>
+        <p:nvSpPr>
+          <p:cNvPr id="10" name="Text 7"/>
+          <p:cNvSpPr/>
+          <p:nvPr/>
+        </p:nvSpPr>
+        <p:spPr>
+          <a:xfrm>
+            <a:off x="1225296" y="2514600"/>
+            <a:ext cx="10241280" cy="603504"/>
+          </a:xfrm>
+          <a:prstGeom prst="rect">
+            <a:avLst/>
+          </a:prstGeom>
+          <a:noFill/>
+          <a:ln/>
+        </p:spPr>
+        <p:txBody>
+          <a:bodyPr wrap="square" lIns="0" tIns="0" rIns="0" bIns="0" rtlCol="0" anchor="ctr"/>
+          <a:lstStyle/>
+          <a:p>
+            <a:pPr indent="0" marL="0">
+              <a:buNone/>
+            </a:pPr>
+            <a:r>
+              <a:rPr lang="en-US" sz="1450" b="1" dirty="0">
+                <a:solidFill>
+                  <a:srgbClr val="0A2F40"/>
+                </a:solidFill>
+                <a:latin typeface="Calibri" pitchFamily="34" charset="0"/>
+                <a:ea typeface="Calibri" pitchFamily="34" charset="-122"/>
+                <a:cs typeface="Calibri" pitchFamily="34" charset="-120"/>
+              </a:rPr>
+              <a:t>Re-observe B0950+08  —  </a:t>
+            </a:r>
+            <a:pPr indent="0" marL="0">
+              <a:buNone/>
+            </a:pPr>
+            <a:r>
+              <a:rPr lang="en-US" sz="1450" dirty="0">
+                <a:solidFill>
+                  <a:srgbClr val="24343C"/>
+                </a:solidFill>
+                <a:latin typeface="Calibri" pitchFamily="34" charset="0"/>
+                <a:ea typeface="Calibri" pitchFamily="34" charset="-122"/>
+                <a:cs typeface="Calibri" pitchFamily="34" charset="-120"/>
+              </a:rPr>
+              <a:t>Longer integration to ride through scintillation.</a:t>
+            </a:r>
+            <a:endParaRPr lang="en-US" sz="1450" dirty="0"/>
+          </a:p>
+        </p:txBody>
+      </p:sp>
+      <p:sp>
+        <p:nvSpPr>
+          <p:cNvPr id="11" name="Text 8"/>
+          <p:cNvSpPr/>
+          <p:nvPr/>
+        </p:nvSpPr>
+        <p:spPr>
+          <a:xfrm>
+            <a:off x="566928" y="3483864"/>
+            <a:ext cx="457200" cy="457200"/>
+          </a:xfrm>
+          <a:prstGeom prst="ellipse">
+            <a:avLst/>
+          </a:prstGeom>
+          <a:solidFill>
+            <a:srgbClr val="156082"/>
+          </a:solidFill>
+          <a:ln>
+            <a:solidFill>
+              <a:srgbClr val="156082"/>
+            </a:solidFill>
+          </a:ln>
+        </p:spPr>
+        <p:txBody>
+          <a:bodyPr wrap="square" lIns="0" tIns="0" rIns="0" bIns="0" rtlCol="0" anchor="ctr"/>
+          <a:lstStyle/>
+          <a:p>
+            <a:pPr algn="ctr" indent="0" marL="0">
+              <a:buNone/>
+            </a:pPr>
+            <a:r>
+              <a:rPr lang="en-US" sz="1800" b="1" dirty="0">
+                <a:solidFill>
+                  <a:srgbClr val="FFFFFF"/>
+                </a:solidFill>
+                <a:latin typeface="Calibri" pitchFamily="34" charset="0"/>
+                <a:ea typeface="Calibri" pitchFamily="34" charset="-122"/>
+                <a:cs typeface="Calibri" pitchFamily="34" charset="-120"/>
+              </a:rPr>
+              <a:t>3</a:t>
+            </a:r>
+            <a:endParaRPr lang="en-US" sz="1800" dirty="0"/>
+          </a:p>
+        </p:txBody>
+      </p:sp>
+      <p:sp>
+        <p:nvSpPr>
+          <p:cNvPr id="12" name="Text 9"/>
+          <p:cNvSpPr/>
+          <p:nvPr/>
+        </p:nvSpPr>
+        <p:spPr>
+          <a:xfrm>
+            <a:off x="1225296" y="3410712"/>
+            <a:ext cx="10241280" cy="603504"/>
+          </a:xfrm>
+          <a:prstGeom prst="rect">
+            <a:avLst/>
+          </a:prstGeom>
+          <a:noFill/>
+          <a:ln/>
+        </p:spPr>
+        <p:txBody>
+          <a:bodyPr wrap="square" lIns="0" tIns="0" rIns="0" bIns="0" rtlCol="0" anchor="ctr"/>
+          <a:lstStyle/>
+          <a:p>
+            <a:pPr indent="0" marL="0">
+              <a:buNone/>
+            </a:pPr>
+            <a:r>
+              <a:rPr lang="en-US" sz="1450" b="1" dirty="0">
+                <a:solidFill>
+                  <a:srgbClr val="0A2F40"/>
+                </a:solidFill>
+                <a:latin typeface="Calibri" pitchFamily="34" charset="0"/>
+                <a:ea typeface="Calibri" pitchFamily="34" charset="-122"/>
+                <a:cs typeface="Calibri" pitchFamily="34" charset="-120"/>
+              </a:rPr>
+              <a:t>Toward timing-grade data  —  </a:t>
+            </a:r>
+            <a:pPr indent="0" marL="0">
+              <a:buNone/>
+            </a:pPr>
+            <a:r>
+              <a:rPr lang="en-US" sz="1450" dirty="0">
+                <a:solidFill>
+                  <a:srgbClr val="24343C"/>
+                </a:solidFill>
+                <a:latin typeface="Calibri" pitchFamily="34" charset="0"/>
+                <a:ea typeface="Calibri" pitchFamily="34" charset="-122"/>
+                <a:cs typeface="Calibri" pitchFamily="34" charset="-120"/>
+              </a:rPr>
+              <a:t>Repeat B0329+54 observations — pulse arrival times over a long baseline.</a:t>
+            </a:r>
+            <a:endParaRPr lang="en-US" sz="1450" dirty="0"/>
+          </a:p>
+        </p:txBody>
+      </p:sp>
+      <p:sp>
+        <p:nvSpPr>
+          <p:cNvPr id="13" name="Text 10"/>
+          <p:cNvSpPr/>
+          <p:nvPr/>
+        </p:nvSpPr>
+        <p:spPr>
+          <a:xfrm>
+            <a:off x="566928" y="4379976"/>
+            <a:ext cx="457200" cy="457200"/>
+          </a:xfrm>
+          <a:prstGeom prst="ellipse">
+            <a:avLst/>
+          </a:prstGeom>
+          <a:solidFill>
+            <a:srgbClr val="156082"/>
+          </a:solidFill>
+          <a:ln>
+            <a:solidFill>
+              <a:srgbClr val="156082"/>
+            </a:solidFill>
+          </a:ln>
+        </p:spPr>
+        <p:txBody>
+          <a:bodyPr wrap="square" lIns="0" tIns="0" rIns="0" bIns="0" rtlCol="0" anchor="ctr"/>
+          <a:lstStyle/>
+          <a:p>
+            <a:pPr algn="ctr" indent="0" marL="0">
+              <a:buNone/>
+            </a:pPr>
+            <a:r>
+              <a:rPr lang="en-US" sz="1800" b="1" dirty="0">
+                <a:solidFill>
+                  <a:srgbClr val="FFFFFF"/>
+                </a:solidFill>
+                <a:latin typeface="Calibri" pitchFamily="34" charset="0"/>
+                <a:ea typeface="Calibri" pitchFamily="34" charset="-122"/>
+                <a:cs typeface="Calibri" pitchFamily="34" charset="-120"/>
+              </a:rPr>
+              <a:t>4</a:t>
+            </a:r>
+            <a:endParaRPr lang="en-US" sz="1800" dirty="0"/>
+          </a:p>
+        </p:txBody>
+      </p:sp>
+      <p:sp>
+        <p:nvSpPr>
+          <p:cNvPr id="14" name="Text 11"/>
+          <p:cNvSpPr/>
+          <p:nvPr/>
+        </p:nvSpPr>
+        <p:spPr>
+          <a:xfrm>
+            <a:off x="1225296" y="4306824"/>
+            <a:ext cx="10241280" cy="603504"/>
+          </a:xfrm>
+          <a:prstGeom prst="rect">
+            <a:avLst/>
+          </a:prstGeom>
+          <a:noFill/>
+          <a:ln/>
+        </p:spPr>
+        <p:txBody>
+          <a:bodyPr wrap="square" lIns="0" tIns="0" rIns="0" bIns="0" rtlCol="0" anchor="ctr"/>
+          <a:lstStyle/>
+          <a:p>
+            <a:pPr indent="0" marL="0">
+              <a:buNone/>
+            </a:pPr>
+            <a:r>
+              <a:rPr lang="en-US" sz="1450" b="1" dirty="0">
+                <a:solidFill>
+                  <a:srgbClr val="0A2F40"/>
+                </a:solidFill>
+                <a:latin typeface="Calibri" pitchFamily="34" charset="0"/>
+                <a:ea typeface="Calibri" pitchFamily="34" charset="-122"/>
+                <a:cs typeface="Calibri" pitchFamily="34" charset="-120"/>
+              </a:rPr>
+              <a:t>Publish  —  </a:t>
+            </a:r>
+            <a:pPr indent="0" marL="0">
+              <a:buNone/>
+            </a:pPr>
+            <a:r>
+              <a:rPr lang="en-US" sz="1450" dirty="0">
+                <a:solidFill>
+                  <a:srgbClr val="24343C"/>
+                </a:solidFill>
+                <a:latin typeface="Calibri" pitchFamily="34" charset="0"/>
+                <a:ea typeface="Calibri" pitchFamily="34" charset="-122"/>
+                <a:cs typeface="Calibri" pitchFamily="34" charset="-120"/>
+              </a:rPr>
+              <a:t>Full trip report on the DSES web site; this talk for SARA.</a:t>
+            </a:r>
+            <a:endParaRPr lang="en-US" sz="1450" dirty="0"/>
+          </a:p>
+        </p:txBody>
+      </p:sp>
+      <p:sp>
+        <p:nvSpPr>
+          <p:cNvPr id="15" name="Text 12"/>
+          <p:cNvSpPr/>
+          <p:nvPr/>
+        </p:nvSpPr>
+        <p:spPr>
+          <a:xfrm>
+            <a:off x="566928" y="5276088"/>
+            <a:ext cx="457200" cy="457200"/>
+          </a:xfrm>
+          <a:prstGeom prst="ellipse">
+            <a:avLst/>
+          </a:prstGeom>
+          <a:solidFill>
+            <a:srgbClr val="156082"/>
+          </a:solidFill>
+          <a:ln>
+            <a:solidFill>
+              <a:srgbClr val="156082"/>
+            </a:solidFill>
+          </a:ln>
+        </p:spPr>
+        <p:txBody>
+          <a:bodyPr wrap="square" lIns="0" tIns="0" rIns="0" bIns="0" rtlCol="0" anchor="ctr"/>
+          <a:lstStyle/>
+          <a:p>
+            <a:pPr algn="ctr" indent="0" marL="0">
+              <a:buNone/>
+            </a:pPr>
+            <a:r>
+              <a:rPr lang="en-US" sz="1800" b="1" dirty="0">
+                <a:solidFill>
+                  <a:srgbClr val="FFFFFF"/>
+                </a:solidFill>
+                <a:latin typeface="Calibri" pitchFamily="34" charset="0"/>
+                <a:ea typeface="Calibri" pitchFamily="34" charset="-122"/>
+                <a:cs typeface="Calibri" pitchFamily="34" charset="-120"/>
+              </a:rPr>
+              <a:t>5</a:t>
+            </a:r>
+            <a:endParaRPr lang="en-US" sz="1800" dirty="0"/>
+          </a:p>
+        </p:txBody>
+      </p:sp>
+      <p:sp>
+        <p:nvSpPr>
+          <p:cNvPr id="16" name="Text 13"/>
+          <p:cNvSpPr/>
+          <p:nvPr/>
+        </p:nvSpPr>
+        <p:spPr>
+          <a:xfrm>
+            <a:off x="1225296" y="5202936"/>
+            <a:ext cx="10241280" cy="603504"/>
+          </a:xfrm>
+          <a:prstGeom prst="rect">
+            <a:avLst/>
+          </a:prstGeom>
+          <a:noFill/>
+          <a:ln/>
+        </p:spPr>
+        <p:txBody>
+          <a:bodyPr wrap="square" lIns="0" tIns="0" rIns="0" bIns="0" rtlCol="0" anchor="ctr"/>
+          <a:lstStyle/>
+          <a:p>
+            <a:pPr indent="0" marL="0">
+              <a:buNone/>
+            </a:pPr>
+            <a:r>
+              <a:rPr lang="en-US" sz="1450" b="1" dirty="0">
+                <a:solidFill>
+                  <a:srgbClr val="0A2F40"/>
+                </a:solidFill>
+                <a:latin typeface="Calibri" pitchFamily="34" charset="0"/>
+                <a:ea typeface="Calibri" pitchFamily="34" charset="-122"/>
+                <a:cs typeface="Calibri" pitchFamily="34" charset="-120"/>
+              </a:rPr>
+              <a:t>Keep building  —  </a:t>
+            </a:r>
+            <a:pPr indent="0" marL="0">
+              <a:buNone/>
+            </a:pPr>
+            <a:r>
+              <a:rPr lang="en-US" sz="1450" dirty="0">
+                <a:solidFill>
+                  <a:srgbClr val="24343C"/>
+                </a:solidFill>
+                <a:latin typeface="Calibri" pitchFamily="34" charset="0"/>
+                <a:ea typeface="Calibri" pitchFamily="34" charset="-122"/>
+                <a:cs typeface="Calibri" pitchFamily="34" charset="-120"/>
+              </a:rPr>
+              <a:t>More Spectrum Analyzer features are planned — the report and operating guide are the baseline future releases will update.</a:t>
+            </a:r>
+            <a:endParaRPr lang="en-US" sz="1450" dirty="0"/>
+          </a:p>
+        </p:txBody>
+      </p:sp>
+    </p:spTree>
+  </p:cSld>
+  <p:clrMapOvr>
+    <a:masterClrMapping/>
+  </p:clrMapOvr>
+</p:sld>
+</file>
+
+<file path=ppt/slides/slide14.xml><?xml version="1.0" encoding="utf-8"?>
+<p:sld xmlns:a="http://schemas.openxmlformats.org/drawingml/2006/main" xmlns:r="http://schemas.openxmlformats.org/officeDocument/2006/relationships" xmlns:p="http://schemas.openxmlformats.org/presentationml/2006/main">
+  <p:cSld name="Slide 14">
     <p:bg>
       <p:bgPr>
         <a:solidFill>
@@ -6209,11 +6989,11 @@
         <p:spPr>
           <a:xfrm>
             <a:off x="566928" y="2212848"/>
-            <a:ext cx="3886200" cy="1170432"/>
+            <a:ext cx="3886200" cy="1024128"/>
           </a:xfrm>
           <a:prstGeom prst="roundRect">
             <a:avLst>
-              <a:gd name="adj" fmla="val 6250"/>
+              <a:gd name="adj" fmla="val 7143"/>
             </a:avLst>
           </a:prstGeom>
           <a:solidFill>
@@ -6235,7 +7015,7 @@
         </p:nvSpPr>
         <p:spPr>
           <a:xfrm>
-            <a:off x="768096" y="2340864"/>
+            <a:off x="768096" y="2322576"/>
             <a:ext cx="3483864" cy="292608"/>
           </a:xfrm>
           <a:prstGeom prst="rect">
@@ -6260,7 +7040,7 @@
                 <a:ea typeface="Calibri" pitchFamily="34" charset="-122"/>
                 <a:cs typeface="Calibri" pitchFamily="34" charset="-120"/>
               </a:rPr>
-              <a:t>PRESTO + TEMPO</a:t>
+              <a:t>PRESTO v5 + TEMPO1 + TEMPO2</a:t>
             </a:r>
             <a:endParaRPr lang="en-US" sz="1350" dirty="0"/>
           </a:p>
@@ -6274,8 +7054,8 @@
         </p:nvSpPr>
         <p:spPr>
           <a:xfrm>
-            <a:off x="768096" y="2642616"/>
-            <a:ext cx="3483864" cy="676656"/>
+            <a:off x="768096" y="2615184"/>
+            <a:ext cx="3483864" cy="566928"/>
           </a:xfrm>
           <a:prstGeom prst="rect">
             <a:avLst/>
@@ -6314,11 +7094,11 @@
         <p:spPr>
           <a:xfrm>
             <a:off x="4654296" y="2212848"/>
-            <a:ext cx="3886200" cy="1170432"/>
+            <a:ext cx="3886200" cy="1024128"/>
           </a:xfrm>
           <a:prstGeom prst="roundRect">
             <a:avLst>
-              <a:gd name="adj" fmla="val 6250"/>
+              <a:gd name="adj" fmla="val 7143"/>
             </a:avLst>
           </a:prstGeom>
           <a:solidFill>
@@ -6340,7 +7120,7 @@
         </p:nvSpPr>
         <p:spPr>
           <a:xfrm>
-            <a:off x="4855464" y="2340864"/>
+            <a:off x="4855464" y="2322576"/>
             <a:ext cx="3483864" cy="292608"/>
           </a:xfrm>
           <a:prstGeom prst="rect">
@@ -6379,8 +7159,8 @@
         </p:nvSpPr>
         <p:spPr>
           <a:xfrm>
-            <a:off x="4855464" y="2642616"/>
-            <a:ext cx="3483864" cy="676656"/>
+            <a:off x="4855464" y="2615184"/>
+            <a:ext cx="3483864" cy="566928"/>
           </a:xfrm>
           <a:prstGeom prst="rect">
             <a:avLst/>
@@ -6418,12 +7198,12 @@
         </p:nvSpPr>
         <p:spPr>
           <a:xfrm>
-            <a:off x="566928" y="3584448"/>
-            <a:ext cx="3886200" cy="1170432"/>
+            <a:off x="566928" y="3392424"/>
+            <a:ext cx="3886200" cy="1024128"/>
           </a:xfrm>
           <a:prstGeom prst="roundRect">
             <a:avLst>
-              <a:gd name="adj" fmla="val 6250"/>
+              <a:gd name="adj" fmla="val 7143"/>
             </a:avLst>
           </a:prstGeom>
           <a:solidFill>
@@ -6445,7 +7225,7 @@
         </p:nvSpPr>
         <p:spPr>
           <a:xfrm>
-            <a:off x="768096" y="3712464"/>
+            <a:off x="768096" y="3502152"/>
             <a:ext cx="3483864" cy="292608"/>
           </a:xfrm>
           <a:prstGeom prst="rect">
@@ -6484,8 +7264,8 @@
         </p:nvSpPr>
         <p:spPr>
           <a:xfrm>
-            <a:off x="768096" y="4014216"/>
-            <a:ext cx="3483864" cy="676656"/>
+            <a:off x="768096" y="3794760"/>
+            <a:ext cx="3483864" cy="566928"/>
           </a:xfrm>
           <a:prstGeom prst="rect">
             <a:avLst/>
@@ -6523,12 +7303,12 @@
         </p:nvSpPr>
         <p:spPr>
           <a:xfrm>
-            <a:off x="4654296" y="3584448"/>
-            <a:ext cx="3886200" cy="1170432"/>
+            <a:off x="4654296" y="3392424"/>
+            <a:ext cx="3886200" cy="1024128"/>
           </a:xfrm>
           <a:prstGeom prst="roundRect">
             <a:avLst>
-              <a:gd name="adj" fmla="val 6250"/>
+              <a:gd name="adj" fmla="val 7143"/>
             </a:avLst>
           </a:prstGeom>
           <a:solidFill>
@@ -6550,7 +7330,7 @@
         </p:nvSpPr>
         <p:spPr>
           <a:xfrm>
-            <a:off x="4855464" y="3712464"/>
+            <a:off x="4855464" y="3502152"/>
             <a:ext cx="3483864" cy="292608"/>
           </a:xfrm>
           <a:prstGeom prst="rect">
@@ -6589,8 +7369,8 @@
         </p:nvSpPr>
         <p:spPr>
           <a:xfrm>
-            <a:off x="4855464" y="4014216"/>
-            <a:ext cx="3483864" cy="676656"/>
+            <a:off x="4855464" y="3794760"/>
+            <a:ext cx="3483864" cy="566928"/>
           </a:xfrm>
           <a:prstGeom prst="rect">
             <a:avLst/>
@@ -6628,12 +7408,12 @@
         </p:nvSpPr>
         <p:spPr>
           <a:xfrm>
-            <a:off x="566928" y="4956048"/>
-            <a:ext cx="3886200" cy="1170432"/>
+            <a:off x="566928" y="4572000"/>
+            <a:ext cx="3886200" cy="1024128"/>
           </a:xfrm>
           <a:prstGeom prst="roundRect">
             <a:avLst>
-              <a:gd name="adj" fmla="val 6250"/>
+              <a:gd name="adj" fmla="val 7143"/>
             </a:avLst>
           </a:prstGeom>
           <a:solidFill>
@@ -6655,7 +7435,7 @@
         </p:nvSpPr>
         <p:spPr>
           <a:xfrm>
-            <a:off x="768096" y="5084064"/>
+            <a:off x="768096" y="4681728"/>
             <a:ext cx="3483864" cy="292608"/>
           </a:xfrm>
           <a:prstGeom prst="rect">
@@ -6694,8 +7474,8 @@
         </p:nvSpPr>
         <p:spPr>
           <a:xfrm>
-            <a:off x="768096" y="5385816"/>
-            <a:ext cx="3483864" cy="676656"/>
+            <a:off x="768096" y="4974336"/>
+            <a:ext cx="3483864" cy="566928"/>
           </a:xfrm>
           <a:prstGeom prst="rect">
             <a:avLst/>
@@ -6733,12 +7513,12 @@
         </p:nvSpPr>
         <p:spPr>
           <a:xfrm>
-            <a:off x="4654296" y="4956048"/>
-            <a:ext cx="3886200" cy="1170432"/>
+            <a:off x="4654296" y="4572000"/>
+            <a:ext cx="3886200" cy="1024128"/>
           </a:xfrm>
           <a:prstGeom prst="roundRect">
             <a:avLst>
-              <a:gd name="adj" fmla="val 6250"/>
+              <a:gd name="adj" fmla="val 7143"/>
             </a:avLst>
           </a:prstGeom>
           <a:solidFill>
@@ -6760,7 +7540,7 @@
         </p:nvSpPr>
         <p:spPr>
           <a:xfrm>
-            <a:off x="4855464" y="5084064"/>
+            <a:off x="4855464" y="4681728"/>
             <a:ext cx="3483864" cy="292608"/>
           </a:xfrm>
           <a:prstGeom prst="rect">
@@ -6799,8 +7579,8 @@
         </p:nvSpPr>
         <p:spPr>
           <a:xfrm>
-            <a:off x="4855464" y="5385816"/>
-            <a:ext cx="3483864" cy="676656"/>
+            <a:off x="4855464" y="4974336"/>
+            <a:ext cx="3483864" cy="566928"/>
           </a:xfrm>
           <a:prstGeom prst="rect">
             <a:avLst/>
@@ -6833,6 +7613,86 @@
       <p:sp>
         <p:nvSpPr>
           <p:cNvPr id="26" name="Shape 23"/>
+          <p:cNvSpPr/>
+          <p:nvPr/>
+        </p:nvSpPr>
+        <p:spPr>
+          <a:xfrm>
+            <a:off x="566928" y="5760720"/>
+            <a:ext cx="7973568" cy="566928"/>
+          </a:xfrm>
+          <a:prstGeom prst="roundRect">
+            <a:avLst>
+              <a:gd name="adj" fmla="val 12903"/>
+            </a:avLst>
+          </a:prstGeom>
+          <a:solidFill>
+            <a:srgbClr val="F7FAFB"/>
+          </a:solidFill>
+          <a:ln w="9525">
+            <a:solidFill>
+              <a:srgbClr val="E5EDF1"/>
+            </a:solidFill>
+            <a:prstDash val="solid"/>
+          </a:ln>
+        </p:spPr>
+      </p:sp>
+      <p:sp>
+        <p:nvSpPr>
+          <p:cNvPr id="27" name="Text 24"/>
+          <p:cNvSpPr/>
+          <p:nvPr/>
+        </p:nvSpPr>
+        <p:spPr>
+          <a:xfrm>
+            <a:off x="768096" y="5760720"/>
+            <a:ext cx="7571232" cy="566928"/>
+          </a:xfrm>
+          <a:prstGeom prst="rect">
+            <a:avLst/>
+          </a:prstGeom>
+          <a:noFill/>
+          <a:ln/>
+        </p:spPr>
+        <p:txBody>
+          <a:bodyPr wrap="square" lIns="0" tIns="0" rIns="0" bIns="0" rtlCol="0" anchor="ctr"/>
+          <a:lstStyle/>
+          <a:p>
+            <a:pPr indent="0" marL="0">
+              <a:buNone/>
+            </a:pPr>
+            <a:r>
+              <a:rPr lang="en-US" sz="1150" b="1" dirty="0">
+                <a:solidFill>
+                  <a:srgbClr val="6B7A82"/>
+                </a:solidFill>
+                <a:latin typeface="Calibri" pitchFamily="34" charset="0"/>
+                <a:ea typeface="Calibri" pitchFamily="34" charset="-122"/>
+                <a:cs typeface="Calibri" pitchFamily="34" charset="-120"/>
+              </a:rPr>
+              <a:t>PSRCHIVE</a:t>
+            </a:r>
+            <a:pPr indent="0" marL="0">
+              <a:buNone/>
+            </a:pPr>
+            <a:r>
+              <a:rPr lang="en-US" sz="1150" dirty="0">
+                <a:solidFill>
+                  <a:srgbClr val="93A2AA"/>
+                </a:solidFill>
+                <a:latin typeface="Calibri" pitchFamily="34" charset="0"/>
+                <a:ea typeface="Calibri" pitchFamily="34" charset="-122"/>
+                <a:cs typeface="Calibri" pitchFamily="34" charset="-120"/>
+              </a:rPr>
+              <a:t>  —  the professional community’s archiving &amp; timing suite, in common use — beyond even our experts’ stack</a:t>
+            </a:r>
+            <a:endParaRPr lang="en-US" sz="1150" dirty="0"/>
+          </a:p>
+        </p:txBody>
+      </p:sp>
+      <p:sp>
+        <p:nvSpPr>
+          <p:cNvPr id="28" name="Shape 25"/>
           <p:cNvSpPr/>
           <p:nvPr/>
         </p:nvSpPr>
@@ -6859,7 +7719,7 @@
       </p:sp>
       <p:sp>
         <p:nvSpPr>
-          <p:cNvPr id="27" name="Text 24"/>
+          <p:cNvPr id="29" name="Text 26"/>
           <p:cNvSpPr/>
           <p:nvPr/>
         </p:nvSpPr>
@@ -6898,7 +7758,7 @@
       </p:sp>
       <p:sp>
         <p:nvSpPr>
-          <p:cNvPr id="28" name="Text 25"/>
+          <p:cNvPr id="30" name="Text 27"/>
           <p:cNvSpPr/>
           <p:nvPr/>
         </p:nvSpPr>
@@ -6937,7 +7797,7 @@
       </p:sp>
       <p:sp>
         <p:nvSpPr>
-          <p:cNvPr id="29" name="Shape 26"/>
+          <p:cNvPr id="31" name="Shape 28"/>
           <p:cNvSpPr/>
           <p:nvPr/>
         </p:nvSpPr>
@@ -6964,7 +7824,7 @@
       </p:sp>
       <p:sp>
         <p:nvSpPr>
-          <p:cNvPr id="30" name="Text 27"/>
+          <p:cNvPr id="32" name="Text 29"/>
           <p:cNvSpPr/>
           <p:nvPr/>
         </p:nvSpPr>
@@ -7003,7 +7863,7 @@
       </p:sp>
       <p:sp>
         <p:nvSpPr>
-          <p:cNvPr id="31" name="Text 28"/>
+          <p:cNvPr id="33" name="Text 30"/>
           <p:cNvSpPr/>
           <p:nvPr/>
         </p:nvSpPr>
@@ -7042,7 +7902,7 @@
       </p:sp>
       <p:sp>
         <p:nvSpPr>
-          <p:cNvPr id="32" name="Text 29"/>
+          <p:cNvPr id="34" name="Text 31"/>
           <p:cNvSpPr/>
           <p:nvPr/>
         </p:nvSpPr>
@@ -7183,7 +8043,7 @@
                 <a:ea typeface="Cambria" pitchFamily="34" charset="-122"/>
                 <a:cs typeface="Cambria" pitchFamily="34" charset="-120"/>
               </a:rPr>
-              <a:t>One instrument instead of a toolchain</a:t>
+              <a:t>The new stack — much simpler</a:t>
             </a:r>
             <a:endParaRPr lang="en-US" sz="2900" dirty="0"/>
           </a:p>
@@ -7300,23 +8160,128 @@
         <p:spPr>
           <a:xfrm>
             <a:off x="566928" y="1444752"/>
-            <a:ext cx="7406640" cy="868680"/>
-          </a:xfrm>
-          <a:prstGeom prst="rect">
-            <a:avLst/>
-          </a:prstGeom>
-          <a:noFill/>
-          <a:ln/>
-        </p:spPr>
-        <p:txBody>
-          <a:bodyPr wrap="square" lIns="0" tIns="0" rIns="0" bIns="0" rtlCol="0" anchor="ctr"/>
-          <a:lstStyle/>
-          <a:p>
-            <a:pPr indent="0" marL="0">
-              <a:buNone/>
-            </a:pPr>
-            <a:r>
-              <a:rPr lang="en-US" sz="1400" b="1" dirty="0">
+            <a:ext cx="7772400" cy="365760"/>
+          </a:xfrm>
+          <a:prstGeom prst="rect">
+            <a:avLst/>
+          </a:prstGeom>
+          <a:noFill/>
+          <a:ln/>
+        </p:spPr>
+        <p:txBody>
+          <a:bodyPr wrap="square" lIns="0" tIns="0" rIns="0" bIns="0" rtlCol="0" anchor="ctr"/>
+          <a:lstStyle/>
+          <a:p>
+            <a:pPr indent="0" marL="0">
+              <a:buNone/>
+            </a:pPr>
+            <a:r>
+              <a:rPr lang="en-US" sz="1400" dirty="0">
+                <a:solidFill>
+                  <a:srgbClr val="24343C"/>
+                </a:solidFill>
+                <a:latin typeface="Calibri" pitchFamily="34" charset="0"/>
+                <a:ea typeface="Calibri" pitchFamily="34" charset="-122"/>
+                <a:cs typeface="Calibri" pitchFamily="34" charset="-120"/>
+              </a:rPr>
+              <a:t>The same observation today takes two pieces:</a:t>
+            </a:r>
+            <a:endParaRPr lang="en-US" sz="1400" dirty="0"/>
+          </a:p>
+        </p:txBody>
+      </p:sp>
+      <p:sp>
+        <p:nvSpPr>
+          <p:cNvPr id="8" name="Text 5"/>
+          <p:cNvSpPr/>
+          <p:nvPr/>
+        </p:nvSpPr>
+        <p:spPr>
+          <a:xfrm>
+            <a:off x="566928" y="2496312"/>
+            <a:ext cx="3520440" cy="274320"/>
+          </a:xfrm>
+          <a:prstGeom prst="rect">
+            <a:avLst/>
+          </a:prstGeom>
+          <a:noFill/>
+          <a:ln/>
+        </p:spPr>
+        <p:txBody>
+          <a:bodyPr wrap="square" lIns="0" tIns="0" rIns="0" bIns="0" rtlCol="0" anchor="ctr"/>
+          <a:lstStyle/>
+          <a:p>
+            <a:pPr indent="0" marL="0">
+              <a:buNone/>
+            </a:pPr>
+            <a:r>
+              <a:rPr lang="en-US" sz="1000" b="1" spc="150" kern="0" dirty="0">
+                <a:solidFill>
+                  <a:srgbClr val="156082"/>
+                </a:solidFill>
+                <a:latin typeface="Calibri" pitchFamily="34" charset="0"/>
+                <a:ea typeface="Calibri" pitchFamily="34" charset="-122"/>
+                <a:cs typeface="Calibri" pitchFamily="34" charset="-120"/>
+              </a:rPr>
+              <a:t>ACQUISITION — ON SITE</a:t>
+            </a:r>
+            <a:endParaRPr lang="en-US" sz="1000" dirty="0"/>
+          </a:p>
+        </p:txBody>
+      </p:sp>
+      <p:sp>
+        <p:nvSpPr>
+          <p:cNvPr id="9" name="Shape 6"/>
+          <p:cNvSpPr/>
+          <p:nvPr/>
+        </p:nvSpPr>
+        <p:spPr>
+          <a:xfrm>
+            <a:off x="566928" y="2880360"/>
+            <a:ext cx="3520440" cy="1737360"/>
+          </a:xfrm>
+          <a:prstGeom prst="roundRect">
+            <a:avLst>
+              <a:gd name="adj" fmla="val 4211"/>
+            </a:avLst>
+          </a:prstGeom>
+          <a:solidFill>
+            <a:srgbClr val="EFF4F7"/>
+          </a:solidFill>
+          <a:ln w="9525">
+            <a:solidFill>
+              <a:srgbClr val="D7E3EA"/>
+            </a:solidFill>
+            <a:prstDash val="solid"/>
+          </a:ln>
+        </p:spPr>
+      </p:sp>
+      <p:sp>
+        <p:nvSpPr>
+          <p:cNvPr id="10" name="Text 7"/>
+          <p:cNvSpPr/>
+          <p:nvPr/>
+        </p:nvSpPr>
+        <p:spPr>
+          <a:xfrm>
+            <a:off x="768096" y="3026664"/>
+            <a:ext cx="3118104" cy="310896"/>
+          </a:xfrm>
+          <a:prstGeom prst="rect">
+            <a:avLst/>
+          </a:prstGeom>
+          <a:noFill/>
+          <a:ln/>
+        </p:spPr>
+        <p:txBody>
+          <a:bodyPr wrap="square" lIns="0" tIns="0" rIns="0" bIns="0" rtlCol="0" anchor="ctr"/>
+          <a:lstStyle/>
+          <a:p>
+            <a:pPr indent="0" marL="0">
+              <a:buNone/>
+            </a:pPr>
+            <a:r>
+              <a:rPr lang="en-US" sz="1450" b="1" dirty="0">
                 <a:solidFill>
                   <a:srgbClr val="0A2F40"/>
                 </a:solidFill>
@@ -7324,13 +8289,38 @@
                 <a:ea typeface="Calibri" pitchFamily="34" charset="-122"/>
                 <a:cs typeface="Calibri" pitchFamily="34" charset="-120"/>
               </a:rPr>
-              <a:t>The DSES Spectrum Analyzer</a:t>
-            </a:r>
-            <a:pPr indent="0" marL="0">
-              <a:buNone/>
-            </a:pPr>
-            <a:r>
-              <a:rPr lang="en-US" sz="1400" dirty="0">
+              <a:t>DSES Spectrum Analyzer</a:t>
+            </a:r>
+            <a:endParaRPr lang="en-US" sz="1450" dirty="0"/>
+          </a:p>
+        </p:txBody>
+      </p:sp>
+      <p:sp>
+        <p:nvSpPr>
+          <p:cNvPr id="11" name="Text 8"/>
+          <p:cNvSpPr/>
+          <p:nvPr/>
+        </p:nvSpPr>
+        <p:spPr>
+          <a:xfrm>
+            <a:off x="768096" y="3392424"/>
+            <a:ext cx="3118104" cy="1097280"/>
+          </a:xfrm>
+          <a:prstGeom prst="rect">
+            <a:avLst/>
+          </a:prstGeom>
+          <a:noFill/>
+          <a:ln/>
+        </p:spPr>
+        <p:txBody>
+          <a:bodyPr wrap="square" lIns="0" tIns="0" rIns="0" bIns="0" rtlCol="0" anchor="t"/>
+          <a:lstStyle/>
+          <a:p>
+            <a:pPr indent="0" marL="0">
+              <a:buNone/>
+            </a:pPr>
+            <a:r>
+              <a:rPr lang="en-US" sz="1150" dirty="0">
                 <a:solidFill>
                   <a:srgbClr val="24343C"/>
                 </a:solidFill>
@@ -7338,252 +8328,35 @@
                 <a:ea typeface="Calibri" pitchFamily="34" charset="-122"/>
                 <a:cs typeface="Calibri" pitchFamily="34" charset="-120"/>
               </a:rPr>
-              <a:t> — a cross-platform application written within the Society. Born as an RFI-survey instrument for the Haswell site, it has grown into a radio-astronomy data-acquisition system.</a:t>
-            </a:r>
-            <a:endParaRPr lang="en-US" sz="1400" dirty="0"/>
-          </a:p>
-        </p:txBody>
-      </p:sp>
-      <p:sp>
-        <p:nvSpPr>
-          <p:cNvPr id="8" name="Text 5"/>
-          <p:cNvSpPr/>
-          <p:nvPr/>
-        </p:nvSpPr>
-        <p:spPr>
-          <a:xfrm>
-            <a:off x="566928" y="2487168"/>
-            <a:ext cx="384048" cy="384048"/>
-          </a:xfrm>
-          <a:prstGeom prst="ellipse">
-            <a:avLst/>
-          </a:prstGeom>
-          <a:solidFill>
-            <a:srgbClr val="156082"/>
-          </a:solidFill>
-          <a:ln>
+              <a:t>plan, survey, verify, record — one application on one laptop (Windows / macOS / Linux)</a:t>
+            </a:r>
+            <a:endParaRPr lang="en-US" sz="1150" dirty="0"/>
+          </a:p>
+        </p:txBody>
+      </p:sp>
+      <p:sp>
+        <p:nvSpPr>
+          <p:cNvPr id="12" name="Shape 9"/>
+          <p:cNvSpPr/>
+          <p:nvPr/>
+        </p:nvSpPr>
+        <p:spPr>
+          <a:xfrm>
+            <a:off x="4251960" y="3749040"/>
+            <a:ext cx="594360" cy="0"/>
+          </a:xfrm>
+          <a:prstGeom prst="line">
+            <a:avLst/>
+          </a:prstGeom>
+          <a:noFill/>
+          <a:ln w="31750">
             <a:solidFill>
               <a:srgbClr val="156082"/>
             </a:solidFill>
+            <a:prstDash val="solid"/>
+            <a:tailEnd type="triangle"/>
           </a:ln>
         </p:spPr>
-        <p:txBody>
-          <a:bodyPr wrap="square" lIns="0" tIns="0" rIns="0" bIns="0" rtlCol="0" anchor="ctr"/>
-          <a:lstStyle/>
-          <a:p>
-            <a:pPr algn="ctr" indent="0" marL="0">
-              <a:buNone/>
-            </a:pPr>
-            <a:r>
-              <a:rPr lang="en-US" sz="1400" b="1" dirty="0">
-                <a:solidFill>
-                  <a:srgbClr val="FFFFFF"/>
-                </a:solidFill>
-                <a:latin typeface="Calibri" pitchFamily="34" charset="0"/>
-                <a:ea typeface="Calibri" pitchFamily="34" charset="-122"/>
-                <a:cs typeface="Calibri" pitchFamily="34" charset="-120"/>
-              </a:rPr>
-              <a:t>1</a:t>
-            </a:r>
-            <a:endParaRPr lang="en-US" sz="1400" dirty="0"/>
-          </a:p>
-        </p:txBody>
-      </p:sp>
-      <p:sp>
-        <p:nvSpPr>
-          <p:cNvPr id="9" name="Text 6"/>
-          <p:cNvSpPr/>
-          <p:nvPr/>
-        </p:nvSpPr>
-        <p:spPr>
-          <a:xfrm>
-            <a:off x="1133856" y="2441448"/>
-            <a:ext cx="6903720" cy="502920"/>
-          </a:xfrm>
-          <a:prstGeom prst="rect">
-            <a:avLst/>
-          </a:prstGeom>
-          <a:noFill/>
-          <a:ln/>
-        </p:spPr>
-        <p:txBody>
-          <a:bodyPr wrap="square" lIns="0" tIns="0" rIns="0" bIns="0" rtlCol="0" anchor="ctr"/>
-          <a:lstStyle/>
-          <a:p>
-            <a:pPr indent="0" marL="0">
-              <a:buNone/>
-            </a:pPr>
-            <a:r>
-              <a:rPr lang="en-US" sz="1350" b="1" dirty="0">
-                <a:solidFill>
-                  <a:srgbClr val="0A2F40"/>
-                </a:solidFill>
-                <a:latin typeface="Calibri" pitchFamily="34" charset="0"/>
-                <a:ea typeface="Calibri" pitchFamily="34" charset="-122"/>
-                <a:cs typeface="Calibri" pitchFamily="34" charset="-120"/>
-              </a:rPr>
-              <a:t>Plan  —  </a:t>
-            </a:r>
-            <a:pPr indent="0" marL="0">
-              <a:buNone/>
-            </a:pPr>
-            <a:r>
-              <a:rPr lang="en-US" sz="1350" dirty="0">
-                <a:solidFill>
-                  <a:srgbClr val="24343C"/>
-                </a:solidFill>
-                <a:latin typeface="Calibri" pitchFamily="34" charset="0"/>
-                <a:ea typeface="Calibri" pitchFamily="34" charset="-122"/>
-                <a:cs typeface="Calibri" pitchFamily="34" charset="-120"/>
-              </a:rPr>
-              <a:t>live altitude/azimuth for catalog pulsars, computed from the site</a:t>
-            </a:r>
-            <a:endParaRPr lang="en-US" sz="1350" dirty="0"/>
-          </a:p>
-        </p:txBody>
-      </p:sp>
-      <p:sp>
-        <p:nvSpPr>
-          <p:cNvPr id="10" name="Text 7"/>
-          <p:cNvSpPr/>
-          <p:nvPr/>
-        </p:nvSpPr>
-        <p:spPr>
-          <a:xfrm>
-            <a:off x="566928" y="3236976"/>
-            <a:ext cx="384048" cy="384048"/>
-          </a:xfrm>
-          <a:prstGeom prst="ellipse">
-            <a:avLst/>
-          </a:prstGeom>
-          <a:solidFill>
-            <a:srgbClr val="156082"/>
-          </a:solidFill>
-          <a:ln>
-            <a:solidFill>
-              <a:srgbClr val="156082"/>
-            </a:solidFill>
-          </a:ln>
-        </p:spPr>
-        <p:txBody>
-          <a:bodyPr wrap="square" lIns="0" tIns="0" rIns="0" bIns="0" rtlCol="0" anchor="ctr"/>
-          <a:lstStyle/>
-          <a:p>
-            <a:pPr algn="ctr" indent="0" marL="0">
-              <a:buNone/>
-            </a:pPr>
-            <a:r>
-              <a:rPr lang="en-US" sz="1400" b="1" dirty="0">
-                <a:solidFill>
-                  <a:srgbClr val="FFFFFF"/>
-                </a:solidFill>
-                <a:latin typeface="Calibri" pitchFamily="34" charset="0"/>
-                <a:ea typeface="Calibri" pitchFamily="34" charset="-122"/>
-                <a:cs typeface="Calibri" pitchFamily="34" charset="-120"/>
-              </a:rPr>
-              <a:t>2</a:t>
-            </a:r>
-            <a:endParaRPr lang="en-US" sz="1400" dirty="0"/>
-          </a:p>
-        </p:txBody>
-      </p:sp>
-      <p:sp>
-        <p:nvSpPr>
-          <p:cNvPr id="11" name="Text 8"/>
-          <p:cNvSpPr/>
-          <p:nvPr/>
-        </p:nvSpPr>
-        <p:spPr>
-          <a:xfrm>
-            <a:off x="1133856" y="3191256"/>
-            <a:ext cx="6903720" cy="502920"/>
-          </a:xfrm>
-          <a:prstGeom prst="rect">
-            <a:avLst/>
-          </a:prstGeom>
-          <a:noFill/>
-          <a:ln/>
-        </p:spPr>
-        <p:txBody>
-          <a:bodyPr wrap="square" lIns="0" tIns="0" rIns="0" bIns="0" rtlCol="0" anchor="ctr"/>
-          <a:lstStyle/>
-          <a:p>
-            <a:pPr indent="0" marL="0">
-              <a:buNone/>
-            </a:pPr>
-            <a:r>
-              <a:rPr lang="en-US" sz="1350" b="1" dirty="0">
-                <a:solidFill>
-                  <a:srgbClr val="0A2F40"/>
-                </a:solidFill>
-                <a:latin typeface="Calibri" pitchFamily="34" charset="0"/>
-                <a:ea typeface="Calibri" pitchFamily="34" charset="-122"/>
-                <a:cs typeface="Calibri" pitchFamily="34" charset="-120"/>
-              </a:rPr>
-              <a:t>Survey  —  </a:t>
-            </a:r>
-            <a:pPr indent="0" marL="0">
-              <a:buNone/>
-            </a:pPr>
-            <a:r>
-              <a:rPr lang="en-US" sz="1350" dirty="0">
-                <a:solidFill>
-                  <a:srgbClr val="24343C"/>
-                </a:solidFill>
-                <a:latin typeface="Calibri" pitchFamily="34" charset="0"/>
-                <a:ea typeface="Calibri" pitchFamily="34" charset="-122"/>
-                <a:cs typeface="Calibri" pitchFamily="34" charset="-120"/>
-              </a:rPr>
-              <a:t>real-time spectrum and waterfall; wide-band Sweep mode for RFI surveys</a:t>
-            </a:r>
-            <a:endParaRPr lang="en-US" sz="1350" dirty="0"/>
-          </a:p>
-        </p:txBody>
-      </p:sp>
-      <p:sp>
-        <p:nvSpPr>
-          <p:cNvPr id="12" name="Text 9"/>
-          <p:cNvSpPr/>
-          <p:nvPr/>
-        </p:nvSpPr>
-        <p:spPr>
-          <a:xfrm>
-            <a:off x="566928" y="3986784"/>
-            <a:ext cx="384048" cy="384048"/>
-          </a:xfrm>
-          <a:prstGeom prst="ellipse">
-            <a:avLst/>
-          </a:prstGeom>
-          <a:solidFill>
-            <a:srgbClr val="156082"/>
-          </a:solidFill>
-          <a:ln>
-            <a:solidFill>
-              <a:srgbClr val="156082"/>
-            </a:solidFill>
-          </a:ln>
-        </p:spPr>
-        <p:txBody>
-          <a:bodyPr wrap="square" lIns="0" tIns="0" rIns="0" bIns="0" rtlCol="0" anchor="ctr"/>
-          <a:lstStyle/>
-          <a:p>
-            <a:pPr algn="ctr" indent="0" marL="0">
-              <a:buNone/>
-            </a:pPr>
-            <a:r>
-              <a:rPr lang="en-US" sz="1400" b="1" dirty="0">
-                <a:solidFill>
-                  <a:srgbClr val="FFFFFF"/>
-                </a:solidFill>
-                <a:latin typeface="Calibri" pitchFamily="34" charset="0"/>
-                <a:ea typeface="Calibri" pitchFamily="34" charset="-122"/>
-                <a:cs typeface="Calibri" pitchFamily="34" charset="-120"/>
-              </a:rPr>
-              <a:t>3</a:t>
-            </a:r>
-            <a:endParaRPr lang="en-US" sz="1400" dirty="0"/>
-          </a:p>
-        </p:txBody>
       </p:sp>
       <p:sp>
         <p:nvSpPr>
@@ -7593,308 +8366,259 @@
         </p:nvSpPr>
         <p:spPr>
           <a:xfrm>
-            <a:off x="1133856" y="3941064"/>
-            <a:ext cx="6903720" cy="502920"/>
-          </a:xfrm>
-          <a:prstGeom prst="rect">
-            <a:avLst/>
-          </a:prstGeom>
-          <a:noFill/>
-          <a:ln/>
-        </p:spPr>
-        <p:txBody>
-          <a:bodyPr wrap="square" lIns="0" tIns="0" rIns="0" bIns="0" rtlCol="0" anchor="ctr"/>
-          <a:lstStyle/>
-          <a:p>
-            <a:pPr indent="0" marL="0">
-              <a:buNone/>
-            </a:pPr>
-            <a:r>
-              <a:rPr lang="en-US" sz="1350" b="1" dirty="0">
-                <a:solidFill>
-                  <a:srgbClr val="0A2F40"/>
-                </a:solidFill>
-                <a:latin typeface="Calibri" pitchFamily="34" charset="0"/>
-                <a:ea typeface="Calibri" pitchFamily="34" charset="-122"/>
-                <a:cs typeface="Calibri" pitchFamily="34" charset="-120"/>
-              </a:rPr>
-              <a:t>Verify  —  </a:t>
-            </a:r>
-            <a:pPr indent="0" marL="0">
-              <a:buNone/>
-            </a:pPr>
-            <a:r>
-              <a:rPr lang="en-US" sz="1350" dirty="0">
-                <a:solidFill>
-                  <a:srgbClr val="24343C"/>
-                </a:solidFill>
-                <a:latin typeface="Calibri" pitchFamily="34" charset="0"/>
-                <a:ea typeface="Calibri" pitchFamily="34" charset="-122"/>
-                <a:cs typeface="Calibri" pitchFamily="34" charset="-120"/>
-              </a:rPr>
-              <a:t>confirm the RF path is alive and clean before committing to a recording</a:t>
-            </a:r>
-            <a:endParaRPr lang="en-US" sz="1350" dirty="0"/>
-          </a:p>
-        </p:txBody>
-      </p:sp>
-      <p:sp>
-        <p:nvSpPr>
-          <p:cNvPr id="14" name="Text 11"/>
-          <p:cNvSpPr/>
-          <p:nvPr/>
-        </p:nvSpPr>
-        <p:spPr>
-          <a:xfrm>
-            <a:off x="566928" y="4736592"/>
-            <a:ext cx="384048" cy="384048"/>
-          </a:xfrm>
-          <a:prstGeom prst="ellipse">
-            <a:avLst/>
-          </a:prstGeom>
-          <a:solidFill>
-            <a:srgbClr val="156082"/>
-          </a:solidFill>
-          <a:ln>
-            <a:solidFill>
-              <a:srgbClr val="156082"/>
-            </a:solidFill>
-          </a:ln>
-        </p:spPr>
-        <p:txBody>
-          <a:bodyPr wrap="square" lIns="0" tIns="0" rIns="0" bIns="0" rtlCol="0" anchor="ctr"/>
-          <a:lstStyle/>
-          <a:p>
-            <a:pPr algn="ctr" indent="0" marL="0">
-              <a:buNone/>
-            </a:pPr>
-            <a:r>
-              <a:rPr lang="en-US" sz="1400" b="1" dirty="0">
-                <a:solidFill>
-                  <a:srgbClr val="FFFFFF"/>
-                </a:solidFill>
-                <a:latin typeface="Calibri" pitchFamily="34" charset="0"/>
-                <a:ea typeface="Calibri" pitchFamily="34" charset="-122"/>
-                <a:cs typeface="Calibri" pitchFamily="34" charset="-120"/>
-              </a:rPr>
-              <a:t>4</a:t>
-            </a:r>
-            <a:endParaRPr lang="en-US" sz="1400" dirty="0"/>
-          </a:p>
-        </p:txBody>
-      </p:sp>
-      <p:sp>
-        <p:nvSpPr>
-          <p:cNvPr id="15" name="Text 12"/>
-          <p:cNvSpPr/>
-          <p:nvPr/>
-        </p:nvSpPr>
-        <p:spPr>
-          <a:xfrm>
-            <a:off x="1133856" y="4690872"/>
-            <a:ext cx="6903720" cy="502920"/>
-          </a:xfrm>
-          <a:prstGeom prst="rect">
-            <a:avLst/>
-          </a:prstGeom>
-          <a:noFill/>
-          <a:ln/>
-        </p:spPr>
-        <p:txBody>
-          <a:bodyPr wrap="square" lIns="0" tIns="0" rIns="0" bIns="0" rtlCol="0" anchor="ctr"/>
-          <a:lstStyle/>
-          <a:p>
-            <a:pPr indent="0" marL="0">
-              <a:buNone/>
-            </a:pPr>
-            <a:r>
-              <a:rPr lang="en-US" sz="1350" b="1" dirty="0">
-                <a:solidFill>
-                  <a:srgbClr val="0A2F40"/>
-                </a:solidFill>
-                <a:latin typeface="Calibri" pitchFamily="34" charset="0"/>
-                <a:ea typeface="Calibri" pitchFamily="34" charset="-122"/>
-                <a:cs typeface="Calibri" pitchFamily="34" charset="-120"/>
-              </a:rPr>
-              <a:t>Record  —  </a:t>
-            </a:r>
-            <a:pPr indent="0" marL="0">
-              <a:buNone/>
-            </a:pPr>
-            <a:r>
-              <a:rPr lang="en-US" sz="1350" dirty="0">
-                <a:solidFill>
-                  <a:srgbClr val="24343C"/>
-                </a:solidFill>
-                <a:latin typeface="Calibri" pitchFamily="34" charset="0"/>
-                <a:ea typeface="Calibri" pitchFamily="34" charset="-122"/>
-                <a:cs typeface="Calibri" pitchFamily="34" charset="-120"/>
-              </a:rPr>
-              <a:t>industry-standard SIGPROC .fil files — source name and RA/Dec stamped in the header</a:t>
-            </a:r>
-            <a:endParaRPr lang="en-US" sz="1350" dirty="0"/>
-          </a:p>
-        </p:txBody>
-      </p:sp>
-      <p:sp>
-        <p:nvSpPr>
-          <p:cNvPr id="16" name="Text 13"/>
-          <p:cNvSpPr/>
-          <p:nvPr/>
-        </p:nvSpPr>
-        <p:spPr>
-          <a:xfrm>
-            <a:off x="566928" y="5486400"/>
-            <a:ext cx="384048" cy="384048"/>
-          </a:xfrm>
-          <a:prstGeom prst="ellipse">
-            <a:avLst/>
-          </a:prstGeom>
-          <a:solidFill>
-            <a:srgbClr val="156082"/>
-          </a:solidFill>
-          <a:ln>
-            <a:solidFill>
-              <a:srgbClr val="156082"/>
-            </a:solidFill>
-          </a:ln>
-        </p:spPr>
-        <p:txBody>
-          <a:bodyPr wrap="square" lIns="0" tIns="0" rIns="0" bIns="0" rtlCol="0" anchor="ctr"/>
-          <a:lstStyle/>
-          <a:p>
-            <a:pPr algn="ctr" indent="0" marL="0">
-              <a:buNone/>
-            </a:pPr>
-            <a:r>
-              <a:rPr lang="en-US" sz="1400" b="1" dirty="0">
-                <a:solidFill>
-                  <a:srgbClr val="FFFFFF"/>
-                </a:solidFill>
-                <a:latin typeface="Calibri" pitchFamily="34" charset="0"/>
-                <a:ea typeface="Calibri" pitchFamily="34" charset="-122"/>
-                <a:cs typeface="Calibri" pitchFamily="34" charset="-120"/>
-              </a:rPr>
-              <a:t>5</a:t>
-            </a:r>
-            <a:endParaRPr lang="en-US" sz="1400" dirty="0"/>
-          </a:p>
-        </p:txBody>
-      </p:sp>
-      <p:sp>
-        <p:nvSpPr>
-          <p:cNvPr id="17" name="Text 14"/>
-          <p:cNvSpPr/>
-          <p:nvPr/>
-        </p:nvSpPr>
-        <p:spPr>
-          <a:xfrm>
-            <a:off x="1133856" y="5440680"/>
-            <a:ext cx="6903720" cy="502920"/>
-          </a:xfrm>
-          <a:prstGeom prst="rect">
-            <a:avLst/>
-          </a:prstGeom>
-          <a:noFill/>
-          <a:ln/>
-        </p:spPr>
-        <p:txBody>
-          <a:bodyPr wrap="square" lIns="0" tIns="0" rIns="0" bIns="0" rtlCol="0" anchor="ctr"/>
-          <a:lstStyle/>
-          <a:p>
-            <a:pPr indent="0" marL="0">
-              <a:buNone/>
-            </a:pPr>
-            <a:r>
-              <a:rPr lang="en-US" sz="1350" b="1" dirty="0">
-                <a:solidFill>
-                  <a:srgbClr val="0A2F40"/>
-                </a:solidFill>
-                <a:latin typeface="Calibri" pitchFamily="34" charset="0"/>
-                <a:ea typeface="Calibri" pitchFamily="34" charset="-122"/>
-                <a:cs typeface="Calibri" pitchFamily="34" charset="-120"/>
-              </a:rPr>
-              <a:t>Update  —  </a:t>
-            </a:r>
-            <a:pPr indent="0" marL="0">
-              <a:buNone/>
-            </a:pPr>
-            <a:r>
-              <a:rPr lang="en-US" sz="1350" dirty="0">
-                <a:solidFill>
-                  <a:srgbClr val="24343C"/>
-                </a:solidFill>
-                <a:latin typeface="Calibri" pitchFamily="34" charset="0"/>
-                <a:ea typeface="Calibri" pitchFamily="34" charset="-122"/>
-                <a:cs typeface="Calibri" pitchFamily="34" charset="-120"/>
-              </a:rPr>
-              <a:t>built-in updater keeps observatory and member machines on the released baseline</a:t>
-            </a:r>
-            <a:endParaRPr lang="en-US" sz="1350" dirty="0"/>
-          </a:p>
-        </p:txBody>
-      </p:sp>
-      <p:sp>
-        <p:nvSpPr>
-          <p:cNvPr id="18" name="Shape 15"/>
-          <p:cNvSpPr/>
-          <p:nvPr/>
-        </p:nvSpPr>
-        <p:spPr>
-          <a:xfrm>
-            <a:off x="8549640" y="1481328"/>
-            <a:ext cx="3063240" cy="3977640"/>
+            <a:off x="5010912" y="2496312"/>
+            <a:ext cx="3520440" cy="274320"/>
+          </a:xfrm>
+          <a:prstGeom prst="rect">
+            <a:avLst/>
+          </a:prstGeom>
+          <a:noFill/>
+          <a:ln/>
+        </p:spPr>
+        <p:txBody>
+          <a:bodyPr wrap="square" lIns="0" tIns="0" rIns="0" bIns="0" rtlCol="0" anchor="ctr"/>
+          <a:lstStyle/>
+          <a:p>
+            <a:pPr indent="0" marL="0">
+              <a:buNone/>
+            </a:pPr>
+            <a:r>
+              <a:rPr lang="en-US" sz="1000" b="1" spc="150" kern="0" dirty="0">
+                <a:solidFill>
+                  <a:srgbClr val="156082"/>
+                </a:solidFill>
+                <a:latin typeface="Calibri" pitchFamily="34" charset="0"/>
+                <a:ea typeface="Calibri" pitchFamily="34" charset="-122"/>
+                <a:cs typeface="Calibri" pitchFamily="34" charset="-120"/>
+              </a:rPr>
+              <a:t>ANALYSIS — ANY MACHINE</a:t>
+            </a:r>
+            <a:endParaRPr lang="en-US" sz="1000" dirty="0"/>
+          </a:p>
+        </p:txBody>
+      </p:sp>
+      <p:sp>
+        <p:nvSpPr>
+          <p:cNvPr id="14" name="Shape 11"/>
+          <p:cNvSpPr/>
+          <p:nvPr/>
+        </p:nvSpPr>
+        <p:spPr>
+          <a:xfrm>
+            <a:off x="5010912" y="2880360"/>
+            <a:ext cx="3520440" cy="1737360"/>
           </a:xfrm>
           <a:prstGeom prst="roundRect">
             <a:avLst>
-              <a:gd name="adj" fmla="val 2388"/>
+              <a:gd name="adj" fmla="val 4211"/>
             </a:avLst>
           </a:prstGeom>
           <a:solidFill>
-            <a:srgbClr val="0A2F40"/>
+            <a:srgbClr val="EFF4F7"/>
           </a:solidFill>
           <a:ln w="9525">
             <a:solidFill>
-              <a:srgbClr val="0A2F40"/>
+              <a:srgbClr val="D7E3EA"/>
             </a:solidFill>
             <a:prstDash val="solid"/>
           </a:ln>
         </p:spPr>
       </p:sp>
-      <p:pic>
-        <p:nvPicPr>
-          <p:cNvPr id="19" name="Image 1" descr="C:\Users\rick\Documents\DSES\Science\Spectrum_Analyzer_PY\icons\dses_sa.png">    </p:cNvPr>
-          <p:cNvPicPr>
-            <a:picLocks noChangeAspect="1"/>
-          </p:cNvPicPr>
-          <p:nvPr/>
-        </p:nvPicPr>
-        <p:blipFill>
-          <a:blip r:embed="rId2"/>
-          <a:stretch>
-            <a:fillRect/>
-          </a:stretch>
-        </p:blipFill>
-        <p:spPr>
-          <a:xfrm>
-            <a:off x="9441180" y="1828800"/>
-            <a:ext cx="1280160" cy="1280160"/>
-          </a:xfrm>
-          <a:prstGeom prst="ellipse">
-            <a:avLst/>
-          </a:prstGeom>
-        </p:spPr>
-      </p:pic>
-      <p:sp>
-        <p:nvSpPr>
-          <p:cNvPr id="20" name="Text 16"/>
-          <p:cNvSpPr/>
-          <p:nvPr/>
-        </p:nvSpPr>
-        <p:spPr>
-          <a:xfrm>
-            <a:off x="8732520" y="3291840"/>
-            <a:ext cx="2697480" cy="502920"/>
+      <p:sp>
+        <p:nvSpPr>
+          <p:cNvPr id="15" name="Text 12"/>
+          <p:cNvSpPr/>
+          <p:nvPr/>
+        </p:nvSpPr>
+        <p:spPr>
+          <a:xfrm>
+            <a:off x="5212080" y="3026664"/>
+            <a:ext cx="3118104" cy="310896"/>
+          </a:xfrm>
+          <a:prstGeom prst="rect">
+            <a:avLst/>
+          </a:prstGeom>
+          <a:noFill/>
+          <a:ln/>
+        </p:spPr>
+        <p:txBody>
+          <a:bodyPr wrap="square" lIns="0" tIns="0" rIns="0" bIns="0" rtlCol="0" anchor="ctr"/>
+          <a:lstStyle/>
+          <a:p>
+            <a:pPr indent="0" marL="0">
+              <a:buNone/>
+            </a:pPr>
+            <a:r>
+              <a:rPr lang="en-US" sz="1450" b="1" dirty="0">
+                <a:solidFill>
+                  <a:srgbClr val="0A2F40"/>
+                </a:solidFill>
+                <a:latin typeface="Calibri" pitchFamily="34" charset="0"/>
+                <a:ea typeface="Calibri" pitchFamily="34" charset="-122"/>
+                <a:cs typeface="Calibri" pitchFamily="34" charset="-120"/>
+              </a:rPr>
+              <a:t>PRESTO v6.0.0 + TEMPO2</a:t>
+            </a:r>
+            <a:endParaRPr lang="en-US" sz="1450" dirty="0"/>
+          </a:p>
+        </p:txBody>
+      </p:sp>
+      <p:sp>
+        <p:nvSpPr>
+          <p:cNvPr id="16" name="Text 13"/>
+          <p:cNvSpPr/>
+          <p:nvPr/>
+        </p:nvSpPr>
+        <p:spPr>
+          <a:xfrm>
+            <a:off x="5212080" y="3392424"/>
+            <a:ext cx="3118104" cy="1097280"/>
+          </a:xfrm>
+          <a:prstGeom prst="rect">
+            <a:avLst/>
+          </a:prstGeom>
+          <a:noFill/>
+          <a:ln/>
+        </p:spPr>
+        <p:txBody>
+          <a:bodyPr wrap="square" lIns="0" tIns="0" rIns="0" bIns="0" rtlCol="0" anchor="t"/>
+          <a:lstStyle/>
+          <a:p>
+            <a:pPr indent="0" marL="0">
+              <a:buNone/>
+            </a:pPr>
+            <a:r>
+              <a:rPr lang="en-US" sz="1150" dirty="0">
+                <a:solidFill>
+                  <a:srgbClr val="24343C"/>
+                </a:solidFill>
+                <a:latin typeface="Calibri" pitchFamily="34" charset="0"/>
+                <a:ea typeface="Calibri" pitchFamily="34" charset="-122"/>
+                <a:cs typeface="Calibri" pitchFamily="34" charset="-120"/>
+              </a:rPr>
+              <a:t>the professional analysis suite, installed by one DSES build script — v6 barycenters in-process, so classic TEMPO is no longer needed</a:t>
+            </a:r>
+            <a:endParaRPr lang="en-US" sz="1150" dirty="0"/>
+          </a:p>
+        </p:txBody>
+      </p:sp>
+      <p:sp>
+        <p:nvSpPr>
+          <p:cNvPr id="17" name="Shape 14"/>
+          <p:cNvSpPr/>
+          <p:nvPr/>
+        </p:nvSpPr>
+        <p:spPr>
+          <a:xfrm>
+            <a:off x="566928" y="5760720"/>
+            <a:ext cx="7964424" cy="566928"/>
+          </a:xfrm>
+          <a:prstGeom prst="roundRect">
+            <a:avLst>
+              <a:gd name="adj" fmla="val 12903"/>
+            </a:avLst>
+          </a:prstGeom>
+          <a:solidFill>
+            <a:srgbClr val="F7FAFB"/>
+          </a:solidFill>
+          <a:ln w="9525">
+            <a:solidFill>
+              <a:srgbClr val="E5EDF1"/>
+            </a:solidFill>
+            <a:prstDash val="solid"/>
+          </a:ln>
+        </p:spPr>
+      </p:sp>
+      <p:sp>
+        <p:nvSpPr>
+          <p:cNvPr id="18" name="Text 15"/>
+          <p:cNvSpPr/>
+          <p:nvPr/>
+        </p:nvSpPr>
+        <p:spPr>
+          <a:xfrm>
+            <a:off x="768096" y="5760720"/>
+            <a:ext cx="7562088" cy="566928"/>
+          </a:xfrm>
+          <a:prstGeom prst="rect">
+            <a:avLst/>
+          </a:prstGeom>
+          <a:noFill/>
+          <a:ln/>
+        </p:spPr>
+        <p:txBody>
+          <a:bodyPr wrap="square" lIns="0" tIns="0" rIns="0" bIns="0" rtlCol="0" anchor="ctr"/>
+          <a:lstStyle/>
+          <a:p>
+            <a:pPr indent="0" marL="0">
+              <a:buNone/>
+            </a:pPr>
+            <a:r>
+              <a:rPr lang="en-US" sz="1150" b="1" dirty="0">
+                <a:solidFill>
+                  <a:srgbClr val="6B7A82"/>
+                </a:solidFill>
+                <a:latin typeface="Calibri" pitchFamily="34" charset="0"/>
+                <a:ea typeface="Calibri" pitchFamily="34" charset="-122"/>
+                <a:cs typeface="Calibri" pitchFamily="34" charset="-120"/>
+              </a:rPr>
+              <a:t>That’s the whole list</a:t>
+            </a:r>
+            <a:pPr indent="0" marL="0">
+              <a:buNone/>
+            </a:pPr>
+            <a:r>
+              <a:rPr lang="en-US" sz="1150" dirty="0">
+                <a:solidFill>
+                  <a:srgbClr val="93A2AA"/>
+                </a:solidFill>
+                <a:latin typeface="Calibri" pitchFamily="34" charset="0"/>
+                <a:ea typeface="Calibri" pitchFamily="34" charset="-122"/>
+                <a:cs typeface="Calibri" pitchFamily="34" charset="-120"/>
+              </a:rPr>
+              <a:t>  —  no Wine, no custom flowgraphs, no hand-edited configuration files</a:t>
+            </a:r>
+            <a:endParaRPr lang="en-US" sz="1150" dirty="0"/>
+          </a:p>
+        </p:txBody>
+      </p:sp>
+      <p:sp>
+        <p:nvSpPr>
+          <p:cNvPr id="19" name="Shape 16"/>
+          <p:cNvSpPr/>
+          <p:nvPr/>
+        </p:nvSpPr>
+        <p:spPr>
+          <a:xfrm>
+            <a:off x="8778240" y="2212848"/>
+            <a:ext cx="2834640" cy="1481328"/>
+          </a:xfrm>
+          <a:prstGeom prst="roundRect">
+            <a:avLst>
+              <a:gd name="adj" fmla="val 4938"/>
+            </a:avLst>
+          </a:prstGeom>
+          <a:solidFill>
+            <a:srgbClr val="EFF4F7"/>
+          </a:solidFill>
+          <a:ln w="9525">
+            <a:solidFill>
+              <a:srgbClr val="D7E3EA"/>
+            </a:solidFill>
+            <a:prstDash val="solid"/>
+          </a:ln>
+        </p:spPr>
+      </p:sp>
+      <p:sp>
+        <p:nvSpPr>
+          <p:cNvPr id="20" name="Text 17"/>
+          <p:cNvSpPr/>
+          <p:nvPr/>
+        </p:nvSpPr>
+        <p:spPr>
+          <a:xfrm>
+            <a:off x="8915400" y="2322576"/>
+            <a:ext cx="2560320" cy="777240"/>
           </a:xfrm>
           <a:prstGeom prst="rect">
             <a:avLst/>
@@ -7910,39 +8634,39 @@
               <a:buNone/>
             </a:pPr>
             <a:r>
-              <a:rPr lang="en-US" sz="1500" b="1" dirty="0">
-                <a:solidFill>
-                  <a:srgbClr val="FFFFFF"/>
+              <a:rPr lang="en-US" sz="3400" b="1" dirty="0">
+                <a:solidFill>
+                  <a:srgbClr val="156082"/>
                 </a:solidFill>
                 <a:latin typeface="Cambria" pitchFamily="34" charset="0"/>
                 <a:ea typeface="Cambria" pitchFamily="34" charset="-122"/>
                 <a:cs typeface="Cambria" pitchFamily="34" charset="-120"/>
               </a:rPr>
-              <a:t>DSES Spectrum Analyzer</a:t>
-            </a:r>
-            <a:endParaRPr lang="en-US" sz="1500" dirty="0"/>
-          </a:p>
-        </p:txBody>
-      </p:sp>
-      <p:sp>
-        <p:nvSpPr>
-          <p:cNvPr id="21" name="Text 17"/>
-          <p:cNvSpPr/>
-          <p:nvPr/>
-        </p:nvSpPr>
-        <p:spPr>
-          <a:xfrm>
-            <a:off x="8732520" y="3822192"/>
-            <a:ext cx="2697480" cy="548640"/>
-          </a:xfrm>
-          <a:prstGeom prst="rect">
-            <a:avLst/>
-          </a:prstGeom>
-          <a:noFill/>
-          <a:ln/>
-        </p:spPr>
-        <p:txBody>
-          <a:bodyPr wrap="square" lIns="0" tIns="0" rIns="0" bIns="0" rtlCol="0" anchor="ctr"/>
+              <a:t>2</a:t>
+            </a:r>
+            <a:endParaRPr lang="en-US" sz="3400" dirty="0"/>
+          </a:p>
+        </p:txBody>
+      </p:sp>
+      <p:sp>
+        <p:nvSpPr>
+          <p:cNvPr id="21" name="Text 18"/>
+          <p:cNvSpPr/>
+          <p:nvPr/>
+        </p:nvSpPr>
+        <p:spPr>
+          <a:xfrm>
+            <a:off x="8915400" y="3081528"/>
+            <a:ext cx="2560320" cy="530352"/>
+          </a:xfrm>
+          <a:prstGeom prst="rect">
+            <a:avLst/>
+          </a:prstGeom>
+          <a:noFill/>
+          <a:ln/>
+        </p:spPr>
+        <p:txBody>
+          <a:bodyPr wrap="square" lIns="0" tIns="0" rIns="0" bIns="0" rtlCol="0" anchor="t"/>
           <a:lstStyle/>
           <a:p>
             <a:pPr algn="ctr" indent="0" marL="0">
@@ -7951,30 +8675,118 @@
             <a:r>
               <a:rPr lang="en-US" sz="1150" dirty="0">
                 <a:solidFill>
-                  <a:srgbClr val="B8D2DE"/>
-                </a:solidFill>
-                <a:latin typeface="Calibri" pitchFamily="34" charset="0"/>
-                <a:ea typeface="Calibri" pitchFamily="34" charset="-122"/>
-                <a:cs typeface="Calibri" pitchFamily="34" charset="-120"/>
-              </a:rPr>
-              <a:t>drives the Ettus USRP B210</a:t>
+                  <a:srgbClr val="24343C"/>
+                </a:solidFill>
+                <a:latin typeface="Calibri" pitchFamily="34" charset="0"/>
+                <a:ea typeface="Calibri" pitchFamily="34" charset="-122"/>
+                <a:cs typeface="Calibri" pitchFamily="34" charset="-120"/>
+              </a:rPr>
+              <a:t>pieces in the whole chain — acquisition and analysis</a:t>
             </a:r>
             <a:endParaRPr lang="en-US" sz="1150" dirty="0"/>
           </a:p>
+        </p:txBody>
+      </p:sp>
+      <p:sp>
+        <p:nvSpPr>
+          <p:cNvPr id="22" name="Shape 19"/>
+          <p:cNvSpPr/>
+          <p:nvPr/>
+        </p:nvSpPr>
+        <p:spPr>
+          <a:xfrm>
+            <a:off x="8778240" y="3950208"/>
+            <a:ext cx="2834640" cy="1481328"/>
+          </a:xfrm>
+          <a:prstGeom prst="roundRect">
+            <a:avLst>
+              <a:gd name="adj" fmla="val 4938"/>
+            </a:avLst>
+          </a:prstGeom>
+          <a:solidFill>
+            <a:srgbClr val="EFF4F7"/>
+          </a:solidFill>
+          <a:ln w="9525">
+            <a:solidFill>
+              <a:srgbClr val="D7E3EA"/>
+            </a:solidFill>
+            <a:prstDash val="solid"/>
+          </a:ln>
+        </p:spPr>
+      </p:sp>
+      <p:sp>
+        <p:nvSpPr>
+          <p:cNvPr id="23" name="Text 20"/>
+          <p:cNvSpPr/>
+          <p:nvPr/>
+        </p:nvSpPr>
+        <p:spPr>
+          <a:xfrm>
+            <a:off x="8915400" y="4059936"/>
+            <a:ext cx="2560320" cy="777240"/>
+          </a:xfrm>
+          <a:prstGeom prst="rect">
+            <a:avLst/>
+          </a:prstGeom>
+          <a:noFill/>
+          <a:ln/>
+        </p:spPr>
+        <p:txBody>
+          <a:bodyPr wrap="square" lIns="0" tIns="0" rIns="0" bIns="0" rtlCol="0" anchor="ctr"/>
+          <a:lstStyle/>
           <a:p>
             <a:pPr algn="ctr" indent="0" marL="0">
               <a:buNone/>
             </a:pPr>
             <a:r>
+              <a:rPr lang="en-US" sz="3400" b="1" dirty="0">
+                <a:solidFill>
+                  <a:srgbClr val="B86A18"/>
+                </a:solidFill>
+                <a:latin typeface="Cambria" pitchFamily="34" charset="0"/>
+                <a:ea typeface="Cambria" pitchFamily="34" charset="-122"/>
+                <a:cs typeface="Cambria" pitchFamily="34" charset="-120"/>
+              </a:rPr>
+              <a:t>1</a:t>
+            </a:r>
+            <a:endParaRPr lang="en-US" sz="3400" dirty="0"/>
+          </a:p>
+        </p:txBody>
+      </p:sp>
+      <p:sp>
+        <p:nvSpPr>
+          <p:cNvPr id="24" name="Text 21"/>
+          <p:cNvSpPr/>
+          <p:nvPr/>
+        </p:nvSpPr>
+        <p:spPr>
+          <a:xfrm>
+            <a:off x="8915400" y="4818888"/>
+            <a:ext cx="2560320" cy="530352"/>
+          </a:xfrm>
+          <a:prstGeom prst="rect">
+            <a:avLst/>
+          </a:prstGeom>
+          <a:noFill/>
+          <a:ln/>
+        </p:spPr>
+        <p:txBody>
+          <a:bodyPr wrap="square" lIns="0" tIns="0" rIns="0" bIns="0" rtlCol="0" anchor="t"/>
+          <a:lstStyle/>
+          <a:p>
+            <a:pPr algn="ctr" indent="0" marL="0">
+              <a:buNone/>
+            </a:pPr>
+            <a:r>
               <a:rPr lang="en-US" sz="1150" dirty="0">
                 <a:solidFill>
-                  <a:srgbClr val="B8D2DE"/>
-                </a:solidFill>
-                <a:latin typeface="Calibri" pitchFamily="34" charset="0"/>
-                <a:ea typeface="Calibri" pitchFamily="34" charset="-122"/>
-                <a:cs typeface="Calibri" pitchFamily="34" charset="-120"/>
-              </a:rPr>
-              <a:t>and other SDRs</a:t>
+                  <a:srgbClr val="24343C"/>
+                </a:solidFill>
+                <a:latin typeface="Calibri" pitchFamily="34" charset="0"/>
+                <a:ea typeface="Calibri" pitchFamily="34" charset="-122"/>
+                <a:cs typeface="Calibri" pitchFamily="34" charset="-120"/>
+              </a:rPr>
+              <a:t>build script installs the analysis stack, per platform</a:t>
             </a:r>
             <a:endParaRPr lang="en-US" sz="1150" dirty="0"/>
           </a:p>
@@ -7982,53 +8794,14 @@
       </p:sp>
       <p:sp>
         <p:nvSpPr>
-          <p:cNvPr id="22" name="Text 18"/>
-          <p:cNvSpPr/>
-          <p:nvPr/>
-        </p:nvSpPr>
-        <p:spPr>
-          <a:xfrm>
-            <a:off x="8732520" y="4956048"/>
-            <a:ext cx="2697480" cy="274320"/>
-          </a:xfrm>
-          <a:prstGeom prst="rect">
-            <a:avLst/>
-          </a:prstGeom>
-          <a:noFill/>
-          <a:ln/>
-        </p:spPr>
-        <p:txBody>
-          <a:bodyPr wrap="square" lIns="0" tIns="0" rIns="0" bIns="0" rtlCol="0" anchor="ctr"/>
-          <a:lstStyle/>
-          <a:p>
-            <a:pPr algn="ctr" indent="0" marL="0">
-              <a:buNone/>
-            </a:pPr>
-            <a:r>
-              <a:rPr lang="en-US" sz="1050" dirty="0">
-                <a:solidFill>
-                  <a:srgbClr val="D99C55"/>
-                </a:solidFill>
-                <a:latin typeface="Calibri" pitchFamily="34" charset="0"/>
-                <a:ea typeface="Calibri" pitchFamily="34" charset="-122"/>
-                <a:cs typeface="Calibri" pitchFamily="34" charset="-120"/>
-              </a:rPr>
-              <a:t>v1.1.6 — released July 12, 2026</a:t>
-            </a:r>
-            <a:endParaRPr lang="en-US" sz="1050" dirty="0"/>
-          </a:p>
-        </p:txBody>
-      </p:sp>
-      <p:sp>
-        <p:nvSpPr>
-          <p:cNvPr id="23" name="Text 19"/>
-          <p:cNvSpPr/>
-          <p:nvPr/>
-        </p:nvSpPr>
-        <p:spPr>
-          <a:xfrm>
-            <a:off x="8549640" y="5687568"/>
-            <a:ext cx="3063240" cy="548640"/>
+          <p:cNvPr id="25" name="Text 22"/>
+          <p:cNvSpPr/>
+          <p:nvPr/>
+        </p:nvSpPr>
+        <p:spPr>
+          <a:xfrm>
+            <a:off x="8778240" y="5596128"/>
+            <a:ext cx="2834640" cy="640080"/>
           </a:xfrm>
           <a:prstGeom prst="rect">
             <a:avLst/>
@@ -8040,11 +8813,11 @@
           <a:bodyPr wrap="square" lIns="0" tIns="0" rIns="0" bIns="0" rtlCol="0" anchor="t"/>
           <a:lstStyle/>
           <a:p>
-            <a:pPr algn="ctr" indent="0" marL="0">
-              <a:buNone/>
-            </a:pPr>
-            <a:r>
-              <a:rPr lang="en-US" sz="1100" dirty="0">
+            <a:pPr indent="0" marL="0">
+              <a:buNone/>
+            </a:pPr>
+            <a:r>
+              <a:rPr lang="en-US" sz="1150" i="1" dirty="0">
                 <a:solidFill>
                   <a:srgbClr val="6B7A82"/>
                 </a:solidFill>
@@ -8052,9 +8825,9 @@
                 <a:ea typeface="Calibri" pitchFamily="34" charset="-122"/>
                 <a:cs typeface="Calibri" pitchFamily="34" charset="-120"/>
               </a:rPr>
-              <a:t>Windows  •  macOS  •  Linux (incl. Raspberry Pi 5 field box)</a:t>
-            </a:r>
-            <a:endParaRPr lang="en-US" sz="1100" dirty="0"/>
+              <a:t>Same professional-quality results — on a far gentler learning curve.</a:t>
+            </a:r>
+            <a:endParaRPr lang="en-US" sz="1150" dirty="0"/>
           </a:p>
         </p:txBody>
       </p:sp>
@@ -8123,7 +8896,7 @@
                 <a:ea typeface="Calibri" pitchFamily="34" charset="-122"/>
                 <a:cs typeface="Calibri" pitchFamily="34" charset="-120"/>
               </a:rPr>
-              <a:t>THE EXPERIMENT — JULY 11, 2026</a:t>
+              <a:t>THE INSTRUMENT</a:t>
             </a:r>
             <a:endParaRPr lang="en-US" sz="1100" dirty="0"/>
           </a:p>
@@ -8162,7 +8935,7 @@
                 <a:ea typeface="Cambria" pitchFamily="34" charset="-122"/>
                 <a:cs typeface="Cambria" pitchFamily="34" charset="-120"/>
               </a:rPr>
-              <a:t>Put non-experts in front of the dish</a:t>
+              <a:t>One instrument instead of a toolchain</a:t>
             </a:r>
             <a:endParaRPr lang="en-US" sz="2900" dirty="0"/>
           </a:p>
@@ -8272,30 +9045,56 @@
       </p:sp>
       <p:sp>
         <p:nvSpPr>
-          <p:cNvPr id="7" name="Shape 4"/>
-          <p:cNvSpPr/>
-          <p:nvPr/>
-        </p:nvSpPr>
-        <p:spPr>
-          <a:xfrm>
-            <a:off x="566928" y="1481328"/>
-            <a:ext cx="11055096" cy="1371600"/>
-          </a:xfrm>
-          <a:prstGeom prst="roundRect">
-            <a:avLst>
-              <a:gd name="adj" fmla="val 5333"/>
-            </a:avLst>
-          </a:prstGeom>
-          <a:solidFill>
-            <a:srgbClr val="EFF4F7"/>
-          </a:solidFill>
-          <a:ln w="9525">
-            <a:solidFill>
-              <a:srgbClr val="D7E3EA"/>
-            </a:solidFill>
-            <a:prstDash val="solid"/>
-          </a:ln>
-        </p:spPr>
+          <p:cNvPr id="7" name="Text 4"/>
+          <p:cNvSpPr/>
+          <p:nvPr/>
+        </p:nvSpPr>
+        <p:spPr>
+          <a:xfrm>
+            <a:off x="566928" y="1444752"/>
+            <a:ext cx="7406640" cy="868680"/>
+          </a:xfrm>
+          <a:prstGeom prst="rect">
+            <a:avLst/>
+          </a:prstGeom>
+          <a:noFill/>
+          <a:ln/>
+        </p:spPr>
+        <p:txBody>
+          <a:bodyPr wrap="square" lIns="0" tIns="0" rIns="0" bIns="0" rtlCol="0" anchor="ctr"/>
+          <a:lstStyle/>
+          <a:p>
+            <a:pPr indent="0" marL="0">
+              <a:buNone/>
+            </a:pPr>
+            <a:r>
+              <a:rPr lang="en-US" sz="1400" b="1" dirty="0">
+                <a:solidFill>
+                  <a:srgbClr val="0A2F40"/>
+                </a:solidFill>
+                <a:latin typeface="Calibri" pitchFamily="34" charset="0"/>
+                <a:ea typeface="Calibri" pitchFamily="34" charset="-122"/>
+                <a:cs typeface="Calibri" pitchFamily="34" charset="-120"/>
+              </a:rPr>
+              <a:t>The DSES Spectrum Analyzer</a:t>
+            </a:r>
+            <a:pPr indent="0" marL="0">
+              <a:buNone/>
+            </a:pPr>
+            <a:r>
+              <a:rPr lang="en-US" sz="1400" dirty="0">
+                <a:solidFill>
+                  <a:srgbClr val="24343C"/>
+                </a:solidFill>
+                <a:latin typeface="Calibri" pitchFamily="34" charset="0"/>
+                <a:ea typeface="Calibri" pitchFamily="34" charset="-122"/>
+                <a:cs typeface="Calibri" pitchFamily="34" charset="-120"/>
+              </a:rPr>
+              <a:t> — a cross-platform application written within the Society. Born as an RFI-survey instrument for the Haswell site, it has grown into a radio-astronomy data-acquisition system.</a:t>
+            </a:r>
+            <a:endParaRPr lang="en-US" sz="1400" dirty="0"/>
+          </a:p>
+        </p:txBody>
       </p:sp>
       <p:sp>
         <p:nvSpPr>
@@ -8305,88 +9104,8 @@
         </p:nvSpPr>
         <p:spPr>
           <a:xfrm>
-            <a:off x="886968" y="1481328"/>
-            <a:ext cx="10424160" cy="1371600"/>
-          </a:xfrm>
-          <a:prstGeom prst="rect">
-            <a:avLst/>
-          </a:prstGeom>
-          <a:noFill/>
-          <a:ln/>
-        </p:spPr>
-        <p:txBody>
-          <a:bodyPr wrap="square" lIns="0" tIns="0" rIns="0" bIns="0" rtlCol="0" anchor="ctr"/>
-          <a:lstStyle/>
-          <a:p>
-            <a:pPr indent="0" marL="0">
-              <a:buNone/>
-            </a:pPr>
-            <a:r>
-              <a:rPr lang="en-US" sz="1800" b="1" i="1" dirty="0">
-                <a:solidFill>
-                  <a:srgbClr val="156082"/>
-                </a:solidFill>
-                <a:latin typeface="Cambria" pitchFamily="34" charset="0"/>
-                <a:ea typeface="Cambria" pitchFamily="34" charset="-122"/>
-                <a:cs typeface="Cambria" pitchFamily="34" charset="-120"/>
-              </a:rPr>
-              <a:t>The question:  </a:t>
-            </a:r>
-            <a:pPr indent="0" marL="0">
-              <a:buNone/>
-            </a:pPr>
-            <a:r>
-              <a:rPr lang="en-US" sz="1800" i="1" dirty="0">
-                <a:solidFill>
-                  <a:srgbClr val="0A2F40"/>
-                </a:solidFill>
-                <a:latin typeface="Cambria" pitchFamily="34" charset="0"/>
-                <a:ea typeface="Cambria" pitchFamily="34" charset="-122"/>
-                <a:cs typeface="Cambria" pitchFamily="34" charset="-120"/>
-              </a:rPr>
-              <a:t>can members who are not pulsar-processing experts plan an observation, capture pulsar data, and process it into professional-quality reports?</a:t>
-            </a:r>
-            <a:endParaRPr lang="en-US" sz="1800" dirty="0"/>
-          </a:p>
-        </p:txBody>
-      </p:sp>
-      <p:sp>
-        <p:nvSpPr>
-          <p:cNvPr id="9" name="Shape 6"/>
-          <p:cNvSpPr/>
-          <p:nvPr/>
-        </p:nvSpPr>
-        <p:spPr>
-          <a:xfrm>
-            <a:off x="566928" y="3246120"/>
-            <a:ext cx="3557016" cy="1417320"/>
-          </a:xfrm>
-          <a:prstGeom prst="roundRect">
-            <a:avLst>
-              <a:gd name="adj" fmla="val 5161"/>
-            </a:avLst>
-          </a:prstGeom>
-          <a:solidFill>
-            <a:srgbClr val="EFF4F7"/>
-          </a:solidFill>
-          <a:ln w="9525">
-            <a:solidFill>
-              <a:srgbClr val="D7E3EA"/>
-            </a:solidFill>
-            <a:prstDash val="solid"/>
-          </a:ln>
-        </p:spPr>
-      </p:sp>
-      <p:sp>
-        <p:nvSpPr>
-          <p:cNvPr id="10" name="Text 7"/>
-          <p:cNvSpPr/>
-          <p:nvPr/>
-        </p:nvSpPr>
-        <p:spPr>
-          <a:xfrm>
-            <a:off x="822960" y="3611880"/>
-            <a:ext cx="685800" cy="685800"/>
+            <a:off x="566928" y="2487168"/>
+            <a:ext cx="384048" cy="384048"/>
           </a:xfrm>
           <a:prstGeom prst="ellipse">
             <a:avLst/>
@@ -8408,7 +9127,7 @@
               <a:buNone/>
             </a:pPr>
             <a:r>
-              <a:rPr lang="en-US" sz="1600" b="1" dirty="0">
+              <a:rPr lang="en-US" sz="1400" b="1" dirty="0">
                 <a:solidFill>
                   <a:srgbClr val="FFFFFF"/>
                 </a:solidFill>
@@ -8416,38 +9135,38 @@
                 <a:ea typeface="Calibri" pitchFamily="34" charset="-122"/>
                 <a:cs typeface="Calibri" pitchFamily="34" charset="-120"/>
               </a:rPr>
-              <a:t>RU</a:t>
-            </a:r>
-            <a:endParaRPr lang="en-US" sz="1600" dirty="0"/>
-          </a:p>
-        </p:txBody>
-      </p:sp>
-      <p:sp>
-        <p:nvSpPr>
-          <p:cNvPr id="11" name="Text 8"/>
-          <p:cNvSpPr/>
-          <p:nvPr/>
-        </p:nvSpPr>
-        <p:spPr>
-          <a:xfrm>
-            <a:off x="1664208" y="3593592"/>
-            <a:ext cx="2276856" cy="365760"/>
-          </a:xfrm>
-          <a:prstGeom prst="rect">
-            <a:avLst/>
-          </a:prstGeom>
-          <a:noFill/>
-          <a:ln/>
-        </p:spPr>
-        <p:txBody>
-          <a:bodyPr wrap="square" lIns="0" tIns="0" rIns="0" bIns="0" rtlCol="0" anchor="ctr"/>
-          <a:lstStyle/>
-          <a:p>
-            <a:pPr indent="0" marL="0">
-              <a:buNone/>
-            </a:pPr>
-            <a:r>
-              <a:rPr lang="en-US" sz="1450" b="1" dirty="0">
+              <a:t>1</a:t>
+            </a:r>
+            <a:endParaRPr lang="en-US" sz="1400" dirty="0"/>
+          </a:p>
+        </p:txBody>
+      </p:sp>
+      <p:sp>
+        <p:nvSpPr>
+          <p:cNvPr id="9" name="Text 6"/>
+          <p:cNvSpPr/>
+          <p:nvPr/>
+        </p:nvSpPr>
+        <p:spPr>
+          <a:xfrm>
+            <a:off x="1133856" y="2441448"/>
+            <a:ext cx="6903720" cy="502920"/>
+          </a:xfrm>
+          <a:prstGeom prst="rect">
+            <a:avLst/>
+          </a:prstGeom>
+          <a:noFill/>
+          <a:ln/>
+        </p:spPr>
+        <p:txBody>
+          <a:bodyPr wrap="square" lIns="0" tIns="0" rIns="0" bIns="0" rtlCol="0" anchor="ctr"/>
+          <a:lstStyle/>
+          <a:p>
+            <a:pPr indent="0" marL="0">
+              <a:buNone/>
+            </a:pPr>
+            <a:r>
+              <a:rPr lang="en-US" sz="1350" b="1" dirty="0">
                 <a:solidFill>
                   <a:srgbClr val="0A2F40"/>
                 </a:solidFill>
@@ -8455,88 +9174,36 @@
                 <a:ea typeface="Calibri" pitchFamily="34" charset="-122"/>
                 <a:cs typeface="Calibri" pitchFamily="34" charset="-120"/>
               </a:rPr>
-              <a:t>Ray Uberecken</a:t>
-            </a:r>
-            <a:endParaRPr lang="en-US" sz="1450" dirty="0"/>
-          </a:p>
-        </p:txBody>
-      </p:sp>
-      <p:sp>
-        <p:nvSpPr>
-          <p:cNvPr id="12" name="Text 9"/>
-          <p:cNvSpPr/>
-          <p:nvPr/>
-        </p:nvSpPr>
-        <p:spPr>
-          <a:xfrm>
-            <a:off x="1664208" y="3959352"/>
-            <a:ext cx="2276856" cy="320040"/>
-          </a:xfrm>
-          <a:prstGeom prst="rect">
-            <a:avLst/>
-          </a:prstGeom>
-          <a:noFill/>
-          <a:ln/>
-        </p:spPr>
-        <p:txBody>
-          <a:bodyPr wrap="square" lIns="0" tIns="0" rIns="0" bIns="0" rtlCol="0" anchor="ctr"/>
-          <a:lstStyle/>
-          <a:p>
-            <a:pPr indent="0" marL="0">
-              <a:buNone/>
-            </a:pPr>
-            <a:r>
-              <a:rPr lang="en-US" sz="1250" dirty="0">
-                <a:solidFill>
-                  <a:srgbClr val="B86A18"/>
-                </a:solidFill>
-                <a:latin typeface="Calibri" pitchFamily="34" charset="0"/>
-                <a:ea typeface="Calibri" pitchFamily="34" charset="-122"/>
-                <a:cs typeface="Calibri" pitchFamily="34" charset="-120"/>
-              </a:rPr>
-              <a:t>AA0L</a:t>
-            </a:r>
-            <a:endParaRPr lang="en-US" sz="1250" dirty="0"/>
-          </a:p>
-        </p:txBody>
-      </p:sp>
-      <p:sp>
-        <p:nvSpPr>
-          <p:cNvPr id="13" name="Shape 10"/>
-          <p:cNvSpPr/>
-          <p:nvPr/>
-        </p:nvSpPr>
-        <p:spPr>
-          <a:xfrm>
-            <a:off x="4315968" y="3246120"/>
-            <a:ext cx="3557016" cy="1417320"/>
-          </a:xfrm>
-          <a:prstGeom prst="roundRect">
-            <a:avLst>
-              <a:gd name="adj" fmla="val 5161"/>
-            </a:avLst>
-          </a:prstGeom>
-          <a:solidFill>
-            <a:srgbClr val="EFF4F7"/>
-          </a:solidFill>
-          <a:ln w="9525">
-            <a:solidFill>
-              <a:srgbClr val="D7E3EA"/>
-            </a:solidFill>
-            <a:prstDash val="solid"/>
-          </a:ln>
-        </p:spPr>
-      </p:sp>
-      <p:sp>
-        <p:nvSpPr>
-          <p:cNvPr id="14" name="Text 11"/>
-          <p:cNvSpPr/>
-          <p:nvPr/>
-        </p:nvSpPr>
-        <p:spPr>
-          <a:xfrm>
-            <a:off x="4572000" y="3611880"/>
-            <a:ext cx="685800" cy="685800"/>
+              <a:t>Plan  —  </a:t>
+            </a:r>
+            <a:pPr indent="0" marL="0">
+              <a:buNone/>
+            </a:pPr>
+            <a:r>
+              <a:rPr lang="en-US" sz="1350" dirty="0">
+                <a:solidFill>
+                  <a:srgbClr val="24343C"/>
+                </a:solidFill>
+                <a:latin typeface="Calibri" pitchFamily="34" charset="0"/>
+                <a:ea typeface="Calibri" pitchFamily="34" charset="-122"/>
+                <a:cs typeface="Calibri" pitchFamily="34" charset="-120"/>
+              </a:rPr>
+              <a:t>live altitude/azimuth for catalog pulsars, computed from the site</a:t>
+            </a:r>
+            <a:endParaRPr lang="en-US" sz="1350" dirty="0"/>
+          </a:p>
+        </p:txBody>
+      </p:sp>
+      <p:sp>
+        <p:nvSpPr>
+          <p:cNvPr id="10" name="Text 7"/>
+          <p:cNvSpPr/>
+          <p:nvPr/>
+        </p:nvSpPr>
+        <p:spPr>
+          <a:xfrm>
+            <a:off x="566928" y="3236976"/>
+            <a:ext cx="384048" cy="384048"/>
           </a:xfrm>
           <a:prstGeom prst="ellipse">
             <a:avLst/>
@@ -8558,7 +9225,7 @@
               <a:buNone/>
             </a:pPr>
             <a:r>
-              <a:rPr lang="en-US" sz="1600" b="1" dirty="0">
+              <a:rPr lang="en-US" sz="1400" b="1" dirty="0">
                 <a:solidFill>
                   <a:srgbClr val="FFFFFF"/>
                 </a:solidFill>
@@ -8566,38 +9233,38 @@
                 <a:ea typeface="Calibri" pitchFamily="34" charset="-122"/>
                 <a:cs typeface="Calibri" pitchFamily="34" charset="-120"/>
               </a:rPr>
-              <a:t>AH</a:t>
-            </a:r>
-            <a:endParaRPr lang="en-US" sz="1600" dirty="0"/>
-          </a:p>
-        </p:txBody>
-      </p:sp>
-      <p:sp>
-        <p:nvSpPr>
-          <p:cNvPr id="15" name="Text 12"/>
-          <p:cNvSpPr/>
-          <p:nvPr/>
-        </p:nvSpPr>
-        <p:spPr>
-          <a:xfrm>
-            <a:off x="5413248" y="3593592"/>
-            <a:ext cx="2276856" cy="365760"/>
-          </a:xfrm>
-          <a:prstGeom prst="rect">
-            <a:avLst/>
-          </a:prstGeom>
-          <a:noFill/>
-          <a:ln/>
-        </p:spPr>
-        <p:txBody>
-          <a:bodyPr wrap="square" lIns="0" tIns="0" rIns="0" bIns="0" rtlCol="0" anchor="ctr"/>
-          <a:lstStyle/>
-          <a:p>
-            <a:pPr indent="0" marL="0">
-              <a:buNone/>
-            </a:pPr>
-            <a:r>
-              <a:rPr lang="en-US" sz="1450" b="1" dirty="0">
+              <a:t>2</a:t>
+            </a:r>
+            <a:endParaRPr lang="en-US" sz="1400" dirty="0"/>
+          </a:p>
+        </p:txBody>
+      </p:sp>
+      <p:sp>
+        <p:nvSpPr>
+          <p:cNvPr id="11" name="Text 8"/>
+          <p:cNvSpPr/>
+          <p:nvPr/>
+        </p:nvSpPr>
+        <p:spPr>
+          <a:xfrm>
+            <a:off x="1133856" y="3191256"/>
+            <a:ext cx="6903720" cy="502920"/>
+          </a:xfrm>
+          <a:prstGeom prst="rect">
+            <a:avLst/>
+          </a:prstGeom>
+          <a:noFill/>
+          <a:ln/>
+        </p:spPr>
+        <p:txBody>
+          <a:bodyPr wrap="square" lIns="0" tIns="0" rIns="0" bIns="0" rtlCol="0" anchor="ctr"/>
+          <a:lstStyle/>
+          <a:p>
+            <a:pPr indent="0" marL="0">
+              <a:buNone/>
+            </a:pPr>
+            <a:r>
+              <a:rPr lang="en-US" sz="1350" b="1" dirty="0">
                 <a:solidFill>
                   <a:srgbClr val="0A2F40"/>
                 </a:solidFill>
@@ -8605,88 +9272,36 @@
                 <a:ea typeface="Calibri" pitchFamily="34" charset="-122"/>
                 <a:cs typeface="Calibri" pitchFamily="34" charset="-120"/>
               </a:rPr>
-              <a:t>Anne Haney</a:t>
-            </a:r>
-            <a:endParaRPr lang="en-US" sz="1450" dirty="0"/>
-          </a:p>
-        </p:txBody>
-      </p:sp>
-      <p:sp>
-        <p:nvSpPr>
-          <p:cNvPr id="16" name="Text 13"/>
-          <p:cNvSpPr/>
-          <p:nvPr/>
-        </p:nvSpPr>
-        <p:spPr>
-          <a:xfrm>
-            <a:off x="5413248" y="3959352"/>
-            <a:ext cx="2276856" cy="320040"/>
-          </a:xfrm>
-          <a:prstGeom prst="rect">
-            <a:avLst/>
-          </a:prstGeom>
-          <a:noFill/>
-          <a:ln/>
-        </p:spPr>
-        <p:txBody>
-          <a:bodyPr wrap="square" lIns="0" tIns="0" rIns="0" bIns="0" rtlCol="0" anchor="ctr"/>
-          <a:lstStyle/>
-          <a:p>
-            <a:pPr indent="0" marL="0">
-              <a:buNone/>
-            </a:pPr>
-            <a:r>
-              <a:rPr lang="en-US" sz="1250" dirty="0">
-                <a:solidFill>
-                  <a:srgbClr val="B86A18"/>
-                </a:solidFill>
-                <a:latin typeface="Calibri" pitchFamily="34" charset="0"/>
-                <a:ea typeface="Calibri" pitchFamily="34" charset="-122"/>
-                <a:cs typeface="Calibri" pitchFamily="34" charset="-120"/>
-              </a:rPr>
-              <a:t>W0ZDW</a:t>
-            </a:r>
-            <a:endParaRPr lang="en-US" sz="1250" dirty="0"/>
-          </a:p>
-        </p:txBody>
-      </p:sp>
-      <p:sp>
-        <p:nvSpPr>
-          <p:cNvPr id="17" name="Shape 14"/>
-          <p:cNvSpPr/>
-          <p:nvPr/>
-        </p:nvSpPr>
-        <p:spPr>
-          <a:xfrm>
-            <a:off x="8065008" y="3246120"/>
-            <a:ext cx="3557016" cy="1417320"/>
-          </a:xfrm>
-          <a:prstGeom prst="roundRect">
-            <a:avLst>
-              <a:gd name="adj" fmla="val 5161"/>
-            </a:avLst>
-          </a:prstGeom>
-          <a:solidFill>
-            <a:srgbClr val="EFF4F7"/>
-          </a:solidFill>
-          <a:ln w="9525">
-            <a:solidFill>
-              <a:srgbClr val="D7E3EA"/>
-            </a:solidFill>
-            <a:prstDash val="solid"/>
-          </a:ln>
-        </p:spPr>
-      </p:sp>
-      <p:sp>
-        <p:nvSpPr>
-          <p:cNvPr id="18" name="Text 15"/>
-          <p:cNvSpPr/>
-          <p:nvPr/>
-        </p:nvSpPr>
-        <p:spPr>
-          <a:xfrm>
-            <a:off x="8321040" y="3611880"/>
-            <a:ext cx="685800" cy="685800"/>
+              <a:t>Survey  —  </a:t>
+            </a:r>
+            <a:pPr indent="0" marL="0">
+              <a:buNone/>
+            </a:pPr>
+            <a:r>
+              <a:rPr lang="en-US" sz="1350" dirty="0">
+                <a:solidFill>
+                  <a:srgbClr val="24343C"/>
+                </a:solidFill>
+                <a:latin typeface="Calibri" pitchFamily="34" charset="0"/>
+                <a:ea typeface="Calibri" pitchFamily="34" charset="-122"/>
+                <a:cs typeface="Calibri" pitchFamily="34" charset="-120"/>
+              </a:rPr>
+              <a:t>real-time spectrum and waterfall; wide-band Sweep mode for RFI surveys</a:t>
+            </a:r>
+            <a:endParaRPr lang="en-US" sz="1350" dirty="0"/>
+          </a:p>
+        </p:txBody>
+      </p:sp>
+      <p:sp>
+        <p:nvSpPr>
+          <p:cNvPr id="12" name="Text 9"/>
+          <p:cNvSpPr/>
+          <p:nvPr/>
+        </p:nvSpPr>
+        <p:spPr>
+          <a:xfrm>
+            <a:off x="566928" y="3986784"/>
+            <a:ext cx="384048" cy="384048"/>
           </a:xfrm>
           <a:prstGeom prst="ellipse">
             <a:avLst/>
@@ -8708,7 +9323,7 @@
               <a:buNone/>
             </a:pPr>
             <a:r>
-              <a:rPr lang="en-US" sz="1600" b="1" dirty="0">
+              <a:rPr lang="en-US" sz="1400" b="1" dirty="0">
                 <a:solidFill>
                   <a:srgbClr val="FFFFFF"/>
                 </a:solidFill>
@@ -8716,38 +9331,38 @@
                 <a:ea typeface="Calibri" pitchFamily="34" charset="-122"/>
                 <a:cs typeface="Calibri" pitchFamily="34" charset="-120"/>
               </a:rPr>
-              <a:t>RH</a:t>
-            </a:r>
-            <a:endParaRPr lang="en-US" sz="1600" dirty="0"/>
-          </a:p>
-        </p:txBody>
-      </p:sp>
-      <p:sp>
-        <p:nvSpPr>
-          <p:cNvPr id="19" name="Text 16"/>
-          <p:cNvSpPr/>
-          <p:nvPr/>
-        </p:nvSpPr>
-        <p:spPr>
-          <a:xfrm>
-            <a:off x="9162288" y="3593592"/>
-            <a:ext cx="2276856" cy="365760"/>
-          </a:xfrm>
-          <a:prstGeom prst="rect">
-            <a:avLst/>
-          </a:prstGeom>
-          <a:noFill/>
-          <a:ln/>
-        </p:spPr>
-        <p:txBody>
-          <a:bodyPr wrap="square" lIns="0" tIns="0" rIns="0" bIns="0" rtlCol="0" anchor="ctr"/>
-          <a:lstStyle/>
-          <a:p>
-            <a:pPr indent="0" marL="0">
-              <a:buNone/>
-            </a:pPr>
-            <a:r>
-              <a:rPr lang="en-US" sz="1450" b="1" dirty="0">
+              <a:t>3</a:t>
+            </a:r>
+            <a:endParaRPr lang="en-US" sz="1400" dirty="0"/>
+          </a:p>
+        </p:txBody>
+      </p:sp>
+      <p:sp>
+        <p:nvSpPr>
+          <p:cNvPr id="13" name="Text 10"/>
+          <p:cNvSpPr/>
+          <p:nvPr/>
+        </p:nvSpPr>
+        <p:spPr>
+          <a:xfrm>
+            <a:off x="1133856" y="3941064"/>
+            <a:ext cx="6903720" cy="502920"/>
+          </a:xfrm>
+          <a:prstGeom prst="rect">
+            <a:avLst/>
+          </a:prstGeom>
+          <a:noFill/>
+          <a:ln/>
+        </p:spPr>
+        <p:txBody>
+          <a:bodyPr wrap="square" lIns="0" tIns="0" rIns="0" bIns="0" rtlCol="0" anchor="ctr"/>
+          <a:lstStyle/>
+          <a:p>
+            <a:pPr indent="0" marL="0">
+              <a:buNone/>
+            </a:pPr>
+            <a:r>
+              <a:rPr lang="en-US" sz="1350" b="1" dirty="0">
                 <a:solidFill>
                   <a:srgbClr val="0A2F40"/>
                 </a:solidFill>
@@ -8755,127 +9370,417 @@
                 <a:ea typeface="Calibri" pitchFamily="34" charset="-122"/>
                 <a:cs typeface="Calibri" pitchFamily="34" charset="-120"/>
               </a:rPr>
-              <a:t>Richard Hambly</a:t>
-            </a:r>
-            <a:endParaRPr lang="en-US" sz="1450" dirty="0"/>
-          </a:p>
-        </p:txBody>
-      </p:sp>
-      <p:sp>
-        <p:nvSpPr>
-          <p:cNvPr id="20" name="Text 17"/>
-          <p:cNvSpPr/>
-          <p:nvPr/>
-        </p:nvSpPr>
-        <p:spPr>
-          <a:xfrm>
-            <a:off x="9162288" y="3959352"/>
-            <a:ext cx="2276856" cy="320040"/>
-          </a:xfrm>
-          <a:prstGeom prst="rect">
-            <a:avLst/>
-          </a:prstGeom>
-          <a:noFill/>
-          <a:ln/>
-        </p:spPr>
-        <p:txBody>
-          <a:bodyPr wrap="square" lIns="0" tIns="0" rIns="0" bIns="0" rtlCol="0" anchor="ctr"/>
-          <a:lstStyle/>
-          <a:p>
-            <a:pPr indent="0" marL="0">
-              <a:buNone/>
-            </a:pPr>
-            <a:r>
-              <a:rPr lang="en-US" sz="1250" dirty="0">
-                <a:solidFill>
-                  <a:srgbClr val="B86A18"/>
-                </a:solidFill>
-                <a:latin typeface="Calibri" pitchFamily="34" charset="0"/>
-                <a:ea typeface="Calibri" pitchFamily="34" charset="-122"/>
-                <a:cs typeface="Calibri" pitchFamily="34" charset="-120"/>
-              </a:rPr>
-              <a:t>K0GD</a:t>
-            </a:r>
-            <a:endParaRPr lang="en-US" sz="1250" dirty="0"/>
-          </a:p>
-        </p:txBody>
-      </p:sp>
-      <p:sp>
-        <p:nvSpPr>
-          <p:cNvPr id="21" name="Shape 18"/>
-          <p:cNvSpPr/>
-          <p:nvPr/>
-        </p:nvSpPr>
-        <p:spPr>
-          <a:xfrm>
-            <a:off x="566928" y="4937760"/>
-            <a:ext cx="3557016" cy="1188720"/>
+              <a:t>Verify  —  </a:t>
+            </a:r>
+            <a:pPr indent="0" marL="0">
+              <a:buNone/>
+            </a:pPr>
+            <a:r>
+              <a:rPr lang="en-US" sz="1350" dirty="0">
+                <a:solidFill>
+                  <a:srgbClr val="24343C"/>
+                </a:solidFill>
+                <a:latin typeface="Calibri" pitchFamily="34" charset="0"/>
+                <a:ea typeface="Calibri" pitchFamily="34" charset="-122"/>
+                <a:cs typeface="Calibri" pitchFamily="34" charset="-120"/>
+              </a:rPr>
+              <a:t>confirm the RF path is alive and clean before committing to a recording</a:t>
+            </a:r>
+            <a:endParaRPr lang="en-US" sz="1350" dirty="0"/>
+          </a:p>
+        </p:txBody>
+      </p:sp>
+      <p:sp>
+        <p:nvSpPr>
+          <p:cNvPr id="14" name="Text 11"/>
+          <p:cNvSpPr/>
+          <p:nvPr/>
+        </p:nvSpPr>
+        <p:spPr>
+          <a:xfrm>
+            <a:off x="566928" y="4736592"/>
+            <a:ext cx="384048" cy="384048"/>
+          </a:xfrm>
+          <a:prstGeom prst="ellipse">
+            <a:avLst/>
+          </a:prstGeom>
+          <a:solidFill>
+            <a:srgbClr val="156082"/>
+          </a:solidFill>
+          <a:ln>
+            <a:solidFill>
+              <a:srgbClr val="156082"/>
+            </a:solidFill>
+          </a:ln>
+        </p:spPr>
+        <p:txBody>
+          <a:bodyPr wrap="square" lIns="0" tIns="0" rIns="0" bIns="0" rtlCol="0" anchor="ctr"/>
+          <a:lstStyle/>
+          <a:p>
+            <a:pPr algn="ctr" indent="0" marL="0">
+              <a:buNone/>
+            </a:pPr>
+            <a:r>
+              <a:rPr lang="en-US" sz="1400" b="1" dirty="0">
+                <a:solidFill>
+                  <a:srgbClr val="FFFFFF"/>
+                </a:solidFill>
+                <a:latin typeface="Calibri" pitchFamily="34" charset="0"/>
+                <a:ea typeface="Calibri" pitchFamily="34" charset="-122"/>
+                <a:cs typeface="Calibri" pitchFamily="34" charset="-120"/>
+              </a:rPr>
+              <a:t>4</a:t>
+            </a:r>
+            <a:endParaRPr lang="en-US" sz="1400" dirty="0"/>
+          </a:p>
+        </p:txBody>
+      </p:sp>
+      <p:sp>
+        <p:nvSpPr>
+          <p:cNvPr id="15" name="Text 12"/>
+          <p:cNvSpPr/>
+          <p:nvPr/>
+        </p:nvSpPr>
+        <p:spPr>
+          <a:xfrm>
+            <a:off x="1133856" y="4690872"/>
+            <a:ext cx="6903720" cy="502920"/>
+          </a:xfrm>
+          <a:prstGeom prst="rect">
+            <a:avLst/>
+          </a:prstGeom>
+          <a:noFill/>
+          <a:ln/>
+        </p:spPr>
+        <p:txBody>
+          <a:bodyPr wrap="square" lIns="0" tIns="0" rIns="0" bIns="0" rtlCol="0" anchor="ctr"/>
+          <a:lstStyle/>
+          <a:p>
+            <a:pPr indent="0" marL="0">
+              <a:buNone/>
+            </a:pPr>
+            <a:r>
+              <a:rPr lang="en-US" sz="1350" b="1" dirty="0">
+                <a:solidFill>
+                  <a:srgbClr val="0A2F40"/>
+                </a:solidFill>
+                <a:latin typeface="Calibri" pitchFamily="34" charset="0"/>
+                <a:ea typeface="Calibri" pitchFamily="34" charset="-122"/>
+                <a:cs typeface="Calibri" pitchFamily="34" charset="-120"/>
+              </a:rPr>
+              <a:t>Record  —  </a:t>
+            </a:r>
+            <a:pPr indent="0" marL="0">
+              <a:buNone/>
+            </a:pPr>
+            <a:r>
+              <a:rPr lang="en-US" sz="1350" dirty="0">
+                <a:solidFill>
+                  <a:srgbClr val="24343C"/>
+                </a:solidFill>
+                <a:latin typeface="Calibri" pitchFamily="34" charset="0"/>
+                <a:ea typeface="Calibri" pitchFamily="34" charset="-122"/>
+                <a:cs typeface="Calibri" pitchFamily="34" charset="-120"/>
+              </a:rPr>
+              <a:t>industry-standard SIGPROC .fil files — source name and RA/Dec stamped in the header</a:t>
+            </a:r>
+            <a:endParaRPr lang="en-US" sz="1350" dirty="0"/>
+          </a:p>
+        </p:txBody>
+      </p:sp>
+      <p:sp>
+        <p:nvSpPr>
+          <p:cNvPr id="16" name="Text 13"/>
+          <p:cNvSpPr/>
+          <p:nvPr/>
+        </p:nvSpPr>
+        <p:spPr>
+          <a:xfrm>
+            <a:off x="566928" y="5486400"/>
+            <a:ext cx="384048" cy="384048"/>
+          </a:xfrm>
+          <a:prstGeom prst="ellipse">
+            <a:avLst/>
+          </a:prstGeom>
+          <a:solidFill>
+            <a:srgbClr val="156082"/>
+          </a:solidFill>
+          <a:ln>
+            <a:solidFill>
+              <a:srgbClr val="156082"/>
+            </a:solidFill>
+          </a:ln>
+        </p:spPr>
+        <p:txBody>
+          <a:bodyPr wrap="square" lIns="0" tIns="0" rIns="0" bIns="0" rtlCol="0" anchor="ctr"/>
+          <a:lstStyle/>
+          <a:p>
+            <a:pPr algn="ctr" indent="0" marL="0">
+              <a:buNone/>
+            </a:pPr>
+            <a:r>
+              <a:rPr lang="en-US" sz="1400" b="1" dirty="0">
+                <a:solidFill>
+                  <a:srgbClr val="FFFFFF"/>
+                </a:solidFill>
+                <a:latin typeface="Calibri" pitchFamily="34" charset="0"/>
+                <a:ea typeface="Calibri" pitchFamily="34" charset="-122"/>
+                <a:cs typeface="Calibri" pitchFamily="34" charset="-120"/>
+              </a:rPr>
+              <a:t>5</a:t>
+            </a:r>
+            <a:endParaRPr lang="en-US" sz="1400" dirty="0"/>
+          </a:p>
+        </p:txBody>
+      </p:sp>
+      <p:sp>
+        <p:nvSpPr>
+          <p:cNvPr id="17" name="Text 14"/>
+          <p:cNvSpPr/>
+          <p:nvPr/>
+        </p:nvSpPr>
+        <p:spPr>
+          <a:xfrm>
+            <a:off x="1133856" y="5440680"/>
+            <a:ext cx="6903720" cy="502920"/>
+          </a:xfrm>
+          <a:prstGeom prst="rect">
+            <a:avLst/>
+          </a:prstGeom>
+          <a:noFill/>
+          <a:ln/>
+        </p:spPr>
+        <p:txBody>
+          <a:bodyPr wrap="square" lIns="0" tIns="0" rIns="0" bIns="0" rtlCol="0" anchor="ctr"/>
+          <a:lstStyle/>
+          <a:p>
+            <a:pPr indent="0" marL="0">
+              <a:buNone/>
+            </a:pPr>
+            <a:r>
+              <a:rPr lang="en-US" sz="1350" b="1" dirty="0">
+                <a:solidFill>
+                  <a:srgbClr val="0A2F40"/>
+                </a:solidFill>
+                <a:latin typeface="Calibri" pitchFamily="34" charset="0"/>
+                <a:ea typeface="Calibri" pitchFamily="34" charset="-122"/>
+                <a:cs typeface="Calibri" pitchFamily="34" charset="-120"/>
+              </a:rPr>
+              <a:t>Update  —  </a:t>
+            </a:r>
+            <a:pPr indent="0" marL="0">
+              <a:buNone/>
+            </a:pPr>
+            <a:r>
+              <a:rPr lang="en-US" sz="1350" dirty="0">
+                <a:solidFill>
+                  <a:srgbClr val="24343C"/>
+                </a:solidFill>
+                <a:latin typeface="Calibri" pitchFamily="34" charset="0"/>
+                <a:ea typeface="Calibri" pitchFamily="34" charset="-122"/>
+                <a:cs typeface="Calibri" pitchFamily="34" charset="-120"/>
+              </a:rPr>
+              <a:t>built-in updater keeps observatory and member machines on the released baseline</a:t>
+            </a:r>
+            <a:endParaRPr lang="en-US" sz="1350" dirty="0"/>
+          </a:p>
+        </p:txBody>
+      </p:sp>
+      <p:sp>
+        <p:nvSpPr>
+          <p:cNvPr id="18" name="Shape 15"/>
+          <p:cNvSpPr/>
+          <p:nvPr/>
+        </p:nvSpPr>
+        <p:spPr>
+          <a:xfrm>
+            <a:off x="8549640" y="1481328"/>
+            <a:ext cx="3063240" cy="3977640"/>
           </a:xfrm>
           <a:prstGeom prst="roundRect">
             <a:avLst>
-              <a:gd name="adj" fmla="val 6154"/>
+              <a:gd name="adj" fmla="val 2388"/>
             </a:avLst>
           </a:prstGeom>
           <a:solidFill>
-            <a:srgbClr val="FFFFFF"/>
+            <a:srgbClr val="0A2F40"/>
           </a:solidFill>
           <a:ln w="9525">
             <a:solidFill>
-              <a:srgbClr val="D7E3EA"/>
+              <a:srgbClr val="0A2F40"/>
             </a:solidFill>
             <a:prstDash val="solid"/>
           </a:ln>
         </p:spPr>
       </p:sp>
-      <p:sp>
-        <p:nvSpPr>
-          <p:cNvPr id="22" name="Text 19"/>
-          <p:cNvSpPr/>
-          <p:nvPr/>
-        </p:nvSpPr>
-        <p:spPr>
-          <a:xfrm>
-            <a:off x="795528" y="5102352"/>
-            <a:ext cx="3099816" cy="365760"/>
-          </a:xfrm>
-          <a:prstGeom prst="rect">
-            <a:avLst/>
-          </a:prstGeom>
-          <a:noFill/>
-          <a:ln/>
-        </p:spPr>
-        <p:txBody>
-          <a:bodyPr wrap="square" lIns="0" tIns="0" rIns="0" bIns="0" rtlCol="0" anchor="ctr"/>
-          <a:lstStyle/>
-          <a:p>
-            <a:pPr indent="0" marL="0">
-              <a:buNone/>
-            </a:pPr>
-            <a:r>
-              <a:rPr lang="en-US" sz="1550" b="1" dirty="0">
-                <a:solidFill>
-                  <a:srgbClr val="156082"/>
+      <p:pic>
+        <p:nvPicPr>
+          <p:cNvPr id="19" name="Image 1" descr="C:\Users\rick\Documents\DSES\Science\Spectrum_Analyzer_PY\icons\dses_sa.png">    </p:cNvPr>
+          <p:cNvPicPr>
+            <a:picLocks noChangeAspect="1"/>
+          </p:cNvPicPr>
+          <p:nvPr/>
+        </p:nvPicPr>
+        <p:blipFill>
+          <a:blip r:embed="rId2"/>
+          <a:stretch>
+            <a:fillRect/>
+          </a:stretch>
+        </p:blipFill>
+        <p:spPr>
+          <a:xfrm>
+            <a:off x="9441180" y="1828800"/>
+            <a:ext cx="1280160" cy="1280160"/>
+          </a:xfrm>
+          <a:prstGeom prst="ellipse">
+            <a:avLst/>
+          </a:prstGeom>
+        </p:spPr>
+      </p:pic>
+      <p:sp>
+        <p:nvSpPr>
+          <p:cNvPr id="20" name="Text 16"/>
+          <p:cNvSpPr/>
+          <p:nvPr/>
+        </p:nvSpPr>
+        <p:spPr>
+          <a:xfrm>
+            <a:off x="8732520" y="3291840"/>
+            <a:ext cx="2697480" cy="502920"/>
+          </a:xfrm>
+          <a:prstGeom prst="rect">
+            <a:avLst/>
+          </a:prstGeom>
+          <a:noFill/>
+          <a:ln/>
+        </p:spPr>
+        <p:txBody>
+          <a:bodyPr wrap="square" lIns="0" tIns="0" rIns="0" bIns="0" rtlCol="0" anchor="ctr"/>
+          <a:lstStyle/>
+          <a:p>
+            <a:pPr algn="ctr" indent="0" marL="0">
+              <a:buNone/>
+            </a:pPr>
+            <a:r>
+              <a:rPr lang="en-US" sz="1500" b="1" dirty="0">
+                <a:solidFill>
+                  <a:srgbClr val="FFFFFF"/>
                 </a:solidFill>
                 <a:latin typeface="Cambria" pitchFamily="34" charset="0"/>
                 <a:ea typeface="Cambria" pitchFamily="34" charset="-122"/>
                 <a:cs typeface="Cambria" pitchFamily="34" charset="-120"/>
               </a:rPr>
-              <a:t>60-ft dish</a:t>
-            </a:r>
-            <a:endParaRPr lang="en-US" sz="1550" dirty="0"/>
-          </a:p>
-        </p:txBody>
-      </p:sp>
-      <p:sp>
-        <p:nvSpPr>
-          <p:cNvPr id="23" name="Text 20"/>
-          <p:cNvSpPr/>
-          <p:nvPr/>
-        </p:nvSpPr>
-        <p:spPr>
-          <a:xfrm>
-            <a:off x="795528" y="5468112"/>
-            <a:ext cx="3099816" cy="502920"/>
+              <a:t>DSES Spectrum Analyzer</a:t>
+            </a:r>
+            <a:endParaRPr lang="en-US" sz="1500" dirty="0"/>
+          </a:p>
+        </p:txBody>
+      </p:sp>
+      <p:sp>
+        <p:nvSpPr>
+          <p:cNvPr id="21" name="Text 17"/>
+          <p:cNvSpPr/>
+          <p:nvPr/>
+        </p:nvSpPr>
+        <p:spPr>
+          <a:xfrm>
+            <a:off x="8732520" y="3822192"/>
+            <a:ext cx="2697480" cy="548640"/>
+          </a:xfrm>
+          <a:prstGeom prst="rect">
+            <a:avLst/>
+          </a:prstGeom>
+          <a:noFill/>
+          <a:ln/>
+        </p:spPr>
+        <p:txBody>
+          <a:bodyPr wrap="square" lIns="0" tIns="0" rIns="0" bIns="0" rtlCol="0" anchor="ctr"/>
+          <a:lstStyle/>
+          <a:p>
+            <a:pPr algn="ctr" indent="0" marL="0">
+              <a:buNone/>
+            </a:pPr>
+            <a:r>
+              <a:rPr lang="en-US" sz="1150" dirty="0">
+                <a:solidFill>
+                  <a:srgbClr val="B8D2DE"/>
+                </a:solidFill>
+                <a:latin typeface="Calibri" pitchFamily="34" charset="0"/>
+                <a:ea typeface="Calibri" pitchFamily="34" charset="-122"/>
+                <a:cs typeface="Calibri" pitchFamily="34" charset="-120"/>
+              </a:rPr>
+              <a:t>drives the Ettus USRP B210</a:t>
+            </a:r>
+            <a:endParaRPr lang="en-US" sz="1150" dirty="0"/>
+          </a:p>
+          <a:p>
+            <a:pPr algn="ctr" indent="0" marL="0">
+              <a:buNone/>
+            </a:pPr>
+            <a:r>
+              <a:rPr lang="en-US" sz="1150" dirty="0">
+                <a:solidFill>
+                  <a:srgbClr val="B8D2DE"/>
+                </a:solidFill>
+                <a:latin typeface="Calibri" pitchFamily="34" charset="0"/>
+                <a:ea typeface="Calibri" pitchFamily="34" charset="-122"/>
+                <a:cs typeface="Calibri" pitchFamily="34" charset="-120"/>
+              </a:rPr>
+              <a:t>and other SDRs</a:t>
+            </a:r>
+            <a:endParaRPr lang="en-US" sz="1150" dirty="0"/>
+          </a:p>
+        </p:txBody>
+      </p:sp>
+      <p:sp>
+        <p:nvSpPr>
+          <p:cNvPr id="22" name="Text 18"/>
+          <p:cNvSpPr/>
+          <p:nvPr/>
+        </p:nvSpPr>
+        <p:spPr>
+          <a:xfrm>
+            <a:off x="8732520" y="4956048"/>
+            <a:ext cx="2697480" cy="274320"/>
+          </a:xfrm>
+          <a:prstGeom prst="rect">
+            <a:avLst/>
+          </a:prstGeom>
+          <a:noFill/>
+          <a:ln/>
+        </p:spPr>
+        <p:txBody>
+          <a:bodyPr wrap="square" lIns="0" tIns="0" rIns="0" bIns="0" rtlCol="0" anchor="ctr"/>
+          <a:lstStyle/>
+          <a:p>
+            <a:pPr algn="ctr" indent="0" marL="0">
+              <a:buNone/>
+            </a:pPr>
+            <a:r>
+              <a:rPr lang="en-US" sz="1050" dirty="0">
+                <a:solidFill>
+                  <a:srgbClr val="D99C55"/>
+                </a:solidFill>
+                <a:latin typeface="Calibri" pitchFamily="34" charset="0"/>
+                <a:ea typeface="Calibri" pitchFamily="34" charset="-122"/>
+                <a:cs typeface="Calibri" pitchFamily="34" charset="-120"/>
+              </a:rPr>
+              <a:t>v1.1.6 — released July 12, 2026</a:t>
+            </a:r>
+            <a:endParaRPr lang="en-US" sz="1050" dirty="0"/>
+          </a:p>
+        </p:txBody>
+      </p:sp>
+      <p:sp>
+        <p:nvSpPr>
+          <p:cNvPr id="23" name="Text 19"/>
+          <p:cNvSpPr/>
+          <p:nvPr/>
+        </p:nvSpPr>
+        <p:spPr>
+          <a:xfrm>
+            <a:off x="8549640" y="5687568"/>
+            <a:ext cx="3063240" cy="548640"/>
           </a:xfrm>
           <a:prstGeom prst="rect">
             <a:avLst/>
@@ -8887,231 +9792,21 @@
           <a:bodyPr wrap="square" lIns="0" tIns="0" rIns="0" bIns="0" rtlCol="0" anchor="t"/>
           <a:lstStyle/>
           <a:p>
-            <a:pPr indent="0" marL="0">
-              <a:buNone/>
-            </a:pPr>
-            <a:r>
-              <a:rPr lang="en-US" sz="1150" dirty="0">
-                <a:solidFill>
-                  <a:srgbClr val="24343C"/>
-                </a:solidFill>
-                <a:latin typeface="Calibri" pitchFamily="34" charset="0"/>
-                <a:ea typeface="Calibri" pitchFamily="34" charset="-122"/>
-                <a:cs typeface="Calibri" pitchFamily="34" charset="-120"/>
-              </a:rPr>
-              <a:t>DSES site, Haswell, Colorado</a:t>
-            </a:r>
-            <a:endParaRPr lang="en-US" sz="1150" dirty="0"/>
-          </a:p>
-        </p:txBody>
-      </p:sp>
-      <p:sp>
-        <p:nvSpPr>
-          <p:cNvPr id="24" name="Shape 21"/>
-          <p:cNvSpPr/>
-          <p:nvPr/>
-        </p:nvSpPr>
-        <p:spPr>
-          <a:xfrm>
-            <a:off x="4315968" y="4937760"/>
-            <a:ext cx="3557016" cy="1188720"/>
-          </a:xfrm>
-          <a:prstGeom prst="roundRect">
-            <a:avLst>
-              <a:gd name="adj" fmla="val 6154"/>
-            </a:avLst>
-          </a:prstGeom>
-          <a:solidFill>
-            <a:srgbClr val="FFFFFF"/>
-          </a:solidFill>
-          <a:ln w="9525">
-            <a:solidFill>
-              <a:srgbClr val="D7E3EA"/>
-            </a:solidFill>
-            <a:prstDash val="solid"/>
-          </a:ln>
-        </p:spPr>
-      </p:sp>
-      <p:sp>
-        <p:nvSpPr>
-          <p:cNvPr id="25" name="Text 22"/>
-          <p:cNvSpPr/>
-          <p:nvPr/>
-        </p:nvSpPr>
-        <p:spPr>
-          <a:xfrm>
-            <a:off x="4544568" y="5102352"/>
-            <a:ext cx="3099816" cy="365760"/>
-          </a:xfrm>
-          <a:prstGeom prst="rect">
-            <a:avLst/>
-          </a:prstGeom>
-          <a:noFill/>
-          <a:ln/>
-        </p:spPr>
-        <p:txBody>
-          <a:bodyPr wrap="square" lIns="0" tIns="0" rIns="0" bIns="0" rtlCol="0" anchor="ctr"/>
-          <a:lstStyle/>
-          <a:p>
-            <a:pPr indent="0" marL="0">
-              <a:buNone/>
-            </a:pPr>
-            <a:r>
-              <a:rPr lang="en-US" sz="1550" b="1" dirty="0">
-                <a:solidFill>
-                  <a:srgbClr val="156082"/>
-                </a:solidFill>
-                <a:latin typeface="Cambria" pitchFamily="34" charset="0"/>
-                <a:ea typeface="Cambria" pitchFamily="34" charset="-122"/>
-                <a:cs typeface="Cambria" pitchFamily="34" charset="-120"/>
-              </a:rPr>
-              <a:t>Ettus USRP B210</a:t>
-            </a:r>
-            <a:endParaRPr lang="en-US" sz="1550" dirty="0"/>
-          </a:p>
-        </p:txBody>
-      </p:sp>
-      <p:sp>
-        <p:nvSpPr>
-          <p:cNvPr id="26" name="Text 23"/>
-          <p:cNvSpPr/>
-          <p:nvPr/>
-        </p:nvSpPr>
-        <p:spPr>
-          <a:xfrm>
-            <a:off x="4544568" y="5468112"/>
-            <a:ext cx="3099816" cy="502920"/>
-          </a:xfrm>
-          <a:prstGeom prst="rect">
-            <a:avLst/>
-          </a:prstGeom>
-          <a:noFill/>
-          <a:ln/>
-        </p:spPr>
-        <p:txBody>
-          <a:bodyPr wrap="square" lIns="0" tIns="0" rIns="0" bIns="0" rtlCol="0" anchor="t"/>
-          <a:lstStyle/>
-          <a:p>
-            <a:pPr indent="0" marL="0">
-              <a:buNone/>
-            </a:pPr>
-            <a:r>
-              <a:rPr lang="en-US" sz="1150" dirty="0">
-                <a:solidFill>
-                  <a:srgbClr val="24343C"/>
-                </a:solidFill>
-                <a:latin typeface="Calibri" pitchFamily="34" charset="0"/>
-                <a:ea typeface="Calibri" pitchFamily="34" charset="-122"/>
-                <a:cs typeface="Calibri" pitchFamily="34" charset="-120"/>
-              </a:rPr>
-              <a:t>software-defined radio at the feed</a:t>
-            </a:r>
-            <a:endParaRPr lang="en-US" sz="1150" dirty="0"/>
-          </a:p>
-        </p:txBody>
-      </p:sp>
-      <p:sp>
-        <p:nvSpPr>
-          <p:cNvPr id="27" name="Shape 24"/>
-          <p:cNvSpPr/>
-          <p:nvPr/>
-        </p:nvSpPr>
-        <p:spPr>
-          <a:xfrm>
-            <a:off x="8065008" y="4937760"/>
-            <a:ext cx="3557016" cy="1188720"/>
-          </a:xfrm>
-          <a:prstGeom prst="roundRect">
-            <a:avLst>
-              <a:gd name="adj" fmla="val 6154"/>
-            </a:avLst>
-          </a:prstGeom>
-          <a:solidFill>
-            <a:srgbClr val="FFFFFF"/>
-          </a:solidFill>
-          <a:ln w="9525">
-            <a:solidFill>
-              <a:srgbClr val="D7E3EA"/>
-            </a:solidFill>
-            <a:prstDash val="solid"/>
-          </a:ln>
-        </p:spPr>
-      </p:sp>
-      <p:sp>
-        <p:nvSpPr>
-          <p:cNvPr id="28" name="Text 25"/>
-          <p:cNvSpPr/>
-          <p:nvPr/>
-        </p:nvSpPr>
-        <p:spPr>
-          <a:xfrm>
-            <a:off x="8293608" y="5102352"/>
-            <a:ext cx="3099816" cy="365760"/>
-          </a:xfrm>
-          <a:prstGeom prst="rect">
-            <a:avLst/>
-          </a:prstGeom>
-          <a:noFill/>
-          <a:ln/>
-        </p:spPr>
-        <p:txBody>
-          <a:bodyPr wrap="square" lIns="0" tIns="0" rIns="0" bIns="0" rtlCol="0" anchor="ctr"/>
-          <a:lstStyle/>
-          <a:p>
-            <a:pPr indent="0" marL="0">
-              <a:buNone/>
-            </a:pPr>
-            <a:r>
-              <a:rPr lang="en-US" sz="1550" b="1" dirty="0">
-                <a:solidFill>
-                  <a:srgbClr val="156082"/>
-                </a:solidFill>
-                <a:latin typeface="Cambria" pitchFamily="34" charset="0"/>
-                <a:ea typeface="Cambria" pitchFamily="34" charset="-122"/>
-                <a:cs typeface="Cambria" pitchFamily="34" charset="-120"/>
-              </a:rPr>
-              <a:t>Spectrum Analyzer</a:t>
-            </a:r>
-            <a:endParaRPr lang="en-US" sz="1550" dirty="0"/>
-          </a:p>
-        </p:txBody>
-      </p:sp>
-      <p:sp>
-        <p:nvSpPr>
-          <p:cNvPr id="29" name="Text 26"/>
-          <p:cNvSpPr/>
-          <p:nvPr/>
-        </p:nvSpPr>
-        <p:spPr>
-          <a:xfrm>
-            <a:off x="8293608" y="5468112"/>
-            <a:ext cx="3099816" cy="502920"/>
-          </a:xfrm>
-          <a:prstGeom prst="rect">
-            <a:avLst/>
-          </a:prstGeom>
-          <a:noFill/>
-          <a:ln/>
-        </p:spPr>
-        <p:txBody>
-          <a:bodyPr wrap="square" lIns="0" tIns="0" rIns="0" bIns="0" rtlCol="0" anchor="t"/>
-          <a:lstStyle/>
-          <a:p>
-            <a:pPr indent="0" marL="0">
-              <a:buNone/>
-            </a:pPr>
-            <a:r>
-              <a:rPr lang="en-US" sz="1150" dirty="0">
-                <a:solidFill>
-                  <a:srgbClr val="24343C"/>
-                </a:solidFill>
-                <a:latin typeface="Calibri" pitchFamily="34" charset="0"/>
-                <a:ea typeface="Calibri" pitchFamily="34" charset="-122"/>
-                <a:cs typeface="Calibri" pitchFamily="34" charset="-120"/>
-              </a:rPr>
-              <a:t>one laptop — planning, RF checks, recording</a:t>
-            </a:r>
-            <a:endParaRPr lang="en-US" sz="1150" dirty="0"/>
+            <a:pPr algn="ctr" indent="0" marL="0">
+              <a:buNone/>
+            </a:pPr>
+            <a:r>
+              <a:rPr lang="en-US" sz="1100" dirty="0">
+                <a:solidFill>
+                  <a:srgbClr val="6B7A82"/>
+                </a:solidFill>
+                <a:latin typeface="Calibri" pitchFamily="34" charset="0"/>
+                <a:ea typeface="Calibri" pitchFamily="34" charset="-122"/>
+                <a:cs typeface="Calibri" pitchFamily="34" charset="-120"/>
+              </a:rPr>
+              <a:t>Windows  •  macOS  •  Linux (incl. Raspberry Pi 5 field box)</a:t>
+            </a:r>
+            <a:endParaRPr lang="en-US" sz="1100" dirty="0"/>
           </a:p>
         </p:txBody>
       </p:sp>
@@ -9180,7 +9875,7 @@
                 <a:ea typeface="Calibri" pitchFamily="34" charset="-122"/>
                 <a:cs typeface="Calibri" pitchFamily="34" charset="-120"/>
               </a:rPr>
-              <a:t>THE DATA</a:t>
+              <a:t>THE EXPERIMENT — JULY 11, 2026</a:t>
             </a:r>
             <a:endParaRPr lang="en-US" sz="1100" dirty="0"/>
           </a:p>
@@ -9219,7 +9914,7 @@
                 <a:ea typeface="Cambria" pitchFamily="34" charset="-122"/>
                 <a:cs typeface="Cambria" pitchFamily="34" charset="-120"/>
               </a:rPr>
-              <a:t>Two pulsars recorded live to filterbank</a:t>
+              <a:t>Put non-experts in front of the dish</a:t>
             </a:r>
             <a:endParaRPr lang="en-US" sz="2900" dirty="0"/>
           </a:p>
@@ -9335,12 +10030,12 @@
         </p:nvSpPr>
         <p:spPr>
           <a:xfrm>
-            <a:off x="566928" y="1517904"/>
-            <a:ext cx="2670048" cy="1481328"/>
+            <a:off x="566928" y="1481328"/>
+            <a:ext cx="11055096" cy="1371600"/>
           </a:xfrm>
           <a:prstGeom prst="roundRect">
             <a:avLst>
-              <a:gd name="adj" fmla="val 4938"/>
+              <a:gd name="adj" fmla="val 5333"/>
             </a:avLst>
           </a:prstGeom>
           <a:solidFill>
@@ -9362,90 +10057,65 @@
         </p:nvSpPr>
         <p:spPr>
           <a:xfrm>
-            <a:off x="704088" y="1627632"/>
-            <a:ext cx="2395728" cy="777240"/>
-          </a:xfrm>
-          <a:prstGeom prst="rect">
-            <a:avLst/>
-          </a:prstGeom>
-          <a:noFill/>
-          <a:ln/>
-        </p:spPr>
-        <p:txBody>
-          <a:bodyPr wrap="square" lIns="0" tIns="0" rIns="0" bIns="0" rtlCol="0" anchor="ctr"/>
-          <a:lstStyle/>
-          <a:p>
-            <a:pPr algn="ctr" indent="0" marL="0">
-              <a:buNone/>
-            </a:pPr>
-            <a:r>
-              <a:rPr lang="en-US" sz="3400" b="1" dirty="0">
-                <a:solidFill>
-                  <a:srgbClr val="B86A18"/>
+            <a:off x="886968" y="1481328"/>
+            <a:ext cx="10424160" cy="1371600"/>
+          </a:xfrm>
+          <a:prstGeom prst="rect">
+            <a:avLst/>
+          </a:prstGeom>
+          <a:noFill/>
+          <a:ln/>
+        </p:spPr>
+        <p:txBody>
+          <a:bodyPr wrap="square" lIns="0" tIns="0" rIns="0" bIns="0" rtlCol="0" anchor="ctr"/>
+          <a:lstStyle/>
+          <a:p>
+            <a:pPr indent="0" marL="0">
+              <a:buNone/>
+            </a:pPr>
+            <a:r>
+              <a:rPr lang="en-US" sz="1800" b="1" i="1" dirty="0">
+                <a:solidFill>
+                  <a:srgbClr val="156082"/>
                 </a:solidFill>
                 <a:latin typeface="Cambria" pitchFamily="34" charset="0"/>
                 <a:ea typeface="Cambria" pitchFamily="34" charset="-122"/>
                 <a:cs typeface="Cambria" pitchFamily="34" charset="-120"/>
               </a:rPr>
-              <a:t>20 MHz</a:t>
-            </a:r>
-            <a:endParaRPr lang="en-US" sz="3400" dirty="0"/>
-          </a:p>
-        </p:txBody>
-      </p:sp>
-      <p:sp>
-        <p:nvSpPr>
-          <p:cNvPr id="9" name="Text 6"/>
-          <p:cNvSpPr/>
-          <p:nvPr/>
-        </p:nvSpPr>
-        <p:spPr>
-          <a:xfrm>
-            <a:off x="704088" y="2386584"/>
-            <a:ext cx="2395728" cy="530352"/>
-          </a:xfrm>
-          <a:prstGeom prst="rect">
-            <a:avLst/>
-          </a:prstGeom>
-          <a:noFill/>
-          <a:ln/>
-        </p:spPr>
-        <p:txBody>
-          <a:bodyPr wrap="square" lIns="0" tIns="0" rIns="0" bIns="0" rtlCol="0" anchor="t"/>
-          <a:lstStyle/>
-          <a:p>
-            <a:pPr algn="ctr" indent="0" marL="0">
-              <a:buNone/>
-            </a:pPr>
-            <a:r>
-              <a:rPr lang="en-US" sz="1150" dirty="0">
-                <a:solidFill>
-                  <a:srgbClr val="24343C"/>
-                </a:solidFill>
-                <a:latin typeface="Calibri" pitchFamily="34" charset="0"/>
-                <a:ea typeface="Calibri" pitchFamily="34" charset="-122"/>
-                <a:cs typeface="Calibri" pitchFamily="34" charset="-120"/>
-              </a:rPr>
-              <a:t>bandwidth, centered on 420 MHz</a:t>
-            </a:r>
-            <a:endParaRPr lang="en-US" sz="1150" dirty="0"/>
-          </a:p>
-        </p:txBody>
-      </p:sp>
-      <p:sp>
-        <p:nvSpPr>
-          <p:cNvPr id="10" name="Shape 7"/>
-          <p:cNvSpPr/>
-          <p:nvPr/>
-        </p:nvSpPr>
-        <p:spPr>
-          <a:xfrm>
-            <a:off x="3364992" y="1517904"/>
-            <a:ext cx="2670048" cy="1481328"/>
+              <a:t>The question:  </a:t>
+            </a:r>
+            <a:pPr indent="0" marL="0">
+              <a:buNone/>
+            </a:pPr>
+            <a:r>
+              <a:rPr lang="en-US" sz="1800" i="1" dirty="0">
+                <a:solidFill>
+                  <a:srgbClr val="0A2F40"/>
+                </a:solidFill>
+                <a:latin typeface="Cambria" pitchFamily="34" charset="0"/>
+                <a:ea typeface="Cambria" pitchFamily="34" charset="-122"/>
+                <a:cs typeface="Cambria" pitchFamily="34" charset="-120"/>
+              </a:rPr>
+              <a:t>can members who are not pulsar-processing experts plan an observation, capture pulsar data, and process it into professional-quality reports?</a:t>
+            </a:r>
+            <a:endParaRPr lang="en-US" sz="1800" dirty="0"/>
+          </a:p>
+        </p:txBody>
+      </p:sp>
+      <p:sp>
+        <p:nvSpPr>
+          <p:cNvPr id="9" name="Shape 6"/>
+          <p:cNvSpPr/>
+          <p:nvPr/>
+        </p:nvSpPr>
+        <p:spPr>
+          <a:xfrm>
+            <a:off x="566928" y="3246120"/>
+            <a:ext cx="3557016" cy="1417320"/>
           </a:xfrm>
           <a:prstGeom prst="roundRect">
             <a:avLst>
-              <a:gd name="adj" fmla="val 4938"/>
+              <a:gd name="adj" fmla="val 5161"/>
             </a:avLst>
           </a:prstGeom>
           <a:solidFill>
@@ -9461,40 +10131,85 @@
       </p:sp>
       <p:sp>
         <p:nvSpPr>
+          <p:cNvPr id="10" name="Text 7"/>
+          <p:cNvSpPr/>
+          <p:nvPr/>
+        </p:nvSpPr>
+        <p:spPr>
+          <a:xfrm>
+            <a:off x="822960" y="3611880"/>
+            <a:ext cx="685800" cy="685800"/>
+          </a:xfrm>
+          <a:prstGeom prst="ellipse">
+            <a:avLst/>
+          </a:prstGeom>
+          <a:solidFill>
+            <a:srgbClr val="156082"/>
+          </a:solidFill>
+          <a:ln>
+            <a:solidFill>
+              <a:srgbClr val="156082"/>
+            </a:solidFill>
+          </a:ln>
+        </p:spPr>
+        <p:txBody>
+          <a:bodyPr wrap="square" lIns="0" tIns="0" rIns="0" bIns="0" rtlCol="0" anchor="ctr"/>
+          <a:lstStyle/>
+          <a:p>
+            <a:pPr algn="ctr" indent="0" marL="0">
+              <a:buNone/>
+            </a:pPr>
+            <a:r>
+              <a:rPr lang="en-US" sz="1600" b="1" dirty="0">
+                <a:solidFill>
+                  <a:srgbClr val="FFFFFF"/>
+                </a:solidFill>
+                <a:latin typeface="Calibri" pitchFamily="34" charset="0"/>
+                <a:ea typeface="Calibri" pitchFamily="34" charset="-122"/>
+                <a:cs typeface="Calibri" pitchFamily="34" charset="-120"/>
+              </a:rPr>
+              <a:t>RU</a:t>
+            </a:r>
+            <a:endParaRPr lang="en-US" sz="1600" dirty="0"/>
+          </a:p>
+        </p:txBody>
+      </p:sp>
+      <p:sp>
+        <p:nvSpPr>
           <p:cNvPr id="11" name="Text 8"/>
           <p:cNvSpPr/>
           <p:nvPr/>
         </p:nvSpPr>
         <p:spPr>
           <a:xfrm>
-            <a:off x="3502152" y="1627632"/>
-            <a:ext cx="2395728" cy="777240"/>
-          </a:xfrm>
-          <a:prstGeom prst="rect">
-            <a:avLst/>
-          </a:prstGeom>
-          <a:noFill/>
-          <a:ln/>
-        </p:spPr>
-        <p:txBody>
-          <a:bodyPr wrap="square" lIns="0" tIns="0" rIns="0" bIns="0" rtlCol="0" anchor="ctr"/>
-          <a:lstStyle/>
-          <a:p>
-            <a:pPr algn="ctr" indent="0" marL="0">
-              <a:buNone/>
-            </a:pPr>
-            <a:r>
-              <a:rPr lang="en-US" sz="3400" b="1" dirty="0">
-                <a:solidFill>
-                  <a:srgbClr val="156082"/>
-                </a:solidFill>
-                <a:latin typeface="Cambria" pitchFamily="34" charset="0"/>
-                <a:ea typeface="Cambria" pitchFamily="34" charset="-122"/>
-                <a:cs typeface="Cambria" pitchFamily="34" charset="-120"/>
-              </a:rPr>
-              <a:t>256</a:t>
-            </a:r>
-            <a:endParaRPr lang="en-US" sz="3400" dirty="0"/>
+            <a:off x="1664208" y="3593592"/>
+            <a:ext cx="2276856" cy="365760"/>
+          </a:xfrm>
+          <a:prstGeom prst="rect">
+            <a:avLst/>
+          </a:prstGeom>
+          <a:noFill/>
+          <a:ln/>
+        </p:spPr>
+        <p:txBody>
+          <a:bodyPr wrap="square" lIns="0" tIns="0" rIns="0" bIns="0" rtlCol="0" anchor="ctr"/>
+          <a:lstStyle/>
+          <a:p>
+            <a:pPr indent="0" marL="0">
+              <a:buNone/>
+            </a:pPr>
+            <a:r>
+              <a:rPr lang="en-US" sz="1450" b="1" dirty="0">
+                <a:solidFill>
+                  <a:srgbClr val="0A2F40"/>
+                </a:solidFill>
+                <a:latin typeface="Calibri" pitchFamily="34" charset="0"/>
+                <a:ea typeface="Calibri" pitchFamily="34" charset="-122"/>
+                <a:cs typeface="Calibri" pitchFamily="34" charset="-120"/>
+              </a:rPr>
+              <a:t>Ray Uberecken</a:t>
+            </a:r>
+            <a:endParaRPr lang="en-US" sz="1450" dirty="0"/>
           </a:p>
         </p:txBody>
       </p:sp>
@@ -9506,34 +10221,34 @@
         </p:nvSpPr>
         <p:spPr>
           <a:xfrm>
-            <a:off x="3502152" y="2386584"/>
-            <a:ext cx="2395728" cy="530352"/>
-          </a:xfrm>
-          <a:prstGeom prst="rect">
-            <a:avLst/>
-          </a:prstGeom>
-          <a:noFill/>
-          <a:ln/>
-        </p:spPr>
-        <p:txBody>
-          <a:bodyPr wrap="square" lIns="0" tIns="0" rIns="0" bIns="0" rtlCol="0" anchor="t"/>
-          <a:lstStyle/>
-          <a:p>
-            <a:pPr algn="ctr" indent="0" marL="0">
-              <a:buNone/>
-            </a:pPr>
-            <a:r>
-              <a:rPr lang="en-US" sz="1150" dirty="0">
-                <a:solidFill>
-                  <a:srgbClr val="24343C"/>
-                </a:solidFill>
-                <a:latin typeface="Calibri" pitchFamily="34" charset="0"/>
-                <a:ea typeface="Calibri" pitchFamily="34" charset="-122"/>
-                <a:cs typeface="Calibri" pitchFamily="34" charset="-120"/>
-              </a:rPr>
-              <a:t>frequency channels</a:t>
-            </a:r>
-            <a:endParaRPr lang="en-US" sz="1150" dirty="0"/>
+            <a:off x="1664208" y="3959352"/>
+            <a:ext cx="2276856" cy="320040"/>
+          </a:xfrm>
+          <a:prstGeom prst="rect">
+            <a:avLst/>
+          </a:prstGeom>
+          <a:noFill/>
+          <a:ln/>
+        </p:spPr>
+        <p:txBody>
+          <a:bodyPr wrap="square" lIns="0" tIns="0" rIns="0" bIns="0" rtlCol="0" anchor="ctr"/>
+          <a:lstStyle/>
+          <a:p>
+            <a:pPr indent="0" marL="0">
+              <a:buNone/>
+            </a:pPr>
+            <a:r>
+              <a:rPr lang="en-US" sz="1250" dirty="0">
+                <a:solidFill>
+                  <a:srgbClr val="B86A18"/>
+                </a:solidFill>
+                <a:latin typeface="Calibri" pitchFamily="34" charset="0"/>
+                <a:ea typeface="Calibri" pitchFamily="34" charset="-122"/>
+                <a:cs typeface="Calibri" pitchFamily="34" charset="-120"/>
+              </a:rPr>
+              <a:t>AA0L</a:t>
+            </a:r>
+            <a:endParaRPr lang="en-US" sz="1250" dirty="0"/>
           </a:p>
         </p:txBody>
       </p:sp>
@@ -9545,12 +10260,12 @@
         </p:nvSpPr>
         <p:spPr>
           <a:xfrm>
-            <a:off x="6163056" y="1517904"/>
-            <a:ext cx="2670048" cy="1481328"/>
+            <a:off x="4315968" y="3246120"/>
+            <a:ext cx="3557016" cy="1417320"/>
           </a:xfrm>
           <a:prstGeom prst="roundRect">
             <a:avLst>
-              <a:gd name="adj" fmla="val 4938"/>
+              <a:gd name="adj" fmla="val 5161"/>
             </a:avLst>
           </a:prstGeom>
           <a:solidFill>
@@ -9572,14 +10287,20 @@
         </p:nvSpPr>
         <p:spPr>
           <a:xfrm>
-            <a:off x="6300216" y="1627632"/>
-            <a:ext cx="2395728" cy="777240"/>
-          </a:xfrm>
-          <a:prstGeom prst="rect">
-            <a:avLst/>
-          </a:prstGeom>
-          <a:noFill/>
-          <a:ln/>
+            <a:off x="4572000" y="3611880"/>
+            <a:ext cx="685800" cy="685800"/>
+          </a:xfrm>
+          <a:prstGeom prst="ellipse">
+            <a:avLst/>
+          </a:prstGeom>
+          <a:solidFill>
+            <a:srgbClr val="156082"/>
+          </a:solidFill>
+          <a:ln>
+            <a:solidFill>
+              <a:srgbClr val="156082"/>
+            </a:solidFill>
+          </a:ln>
         </p:spPr>
         <p:txBody>
           <a:bodyPr wrap="square" lIns="0" tIns="0" rIns="0" bIns="0" rtlCol="0" anchor="ctr"/>
@@ -9589,17 +10310,17 @@
               <a:buNone/>
             </a:pPr>
             <a:r>
-              <a:rPr lang="en-US" sz="3400" b="1" dirty="0">
-                <a:solidFill>
-                  <a:srgbClr val="156082"/>
-                </a:solidFill>
-                <a:latin typeface="Cambria" pitchFamily="34" charset="0"/>
-                <a:ea typeface="Cambria" pitchFamily="34" charset="-122"/>
-                <a:cs typeface="Cambria" pitchFamily="34" charset="-120"/>
-              </a:rPr>
-              <a:t>204.8 µs</a:t>
-            </a:r>
-            <a:endParaRPr lang="en-US" sz="3400" dirty="0"/>
+              <a:rPr lang="en-US" sz="1600" b="1" dirty="0">
+                <a:solidFill>
+                  <a:srgbClr val="FFFFFF"/>
+                </a:solidFill>
+                <a:latin typeface="Calibri" pitchFamily="34" charset="0"/>
+                <a:ea typeface="Calibri" pitchFamily="34" charset="-122"/>
+                <a:cs typeface="Calibri" pitchFamily="34" charset="-120"/>
+              </a:rPr>
+              <a:t>AH</a:t>
+            </a:r>
+            <a:endParaRPr lang="en-US" sz="1600" dirty="0"/>
           </a:p>
         </p:txBody>
       </p:sp>
@@ -9611,51 +10332,90 @@
         </p:nvSpPr>
         <p:spPr>
           <a:xfrm>
-            <a:off x="6300216" y="2386584"/>
-            <a:ext cx="2395728" cy="530352"/>
-          </a:xfrm>
-          <a:prstGeom prst="rect">
-            <a:avLst/>
-          </a:prstGeom>
-          <a:noFill/>
-          <a:ln/>
-        </p:spPr>
-        <p:txBody>
-          <a:bodyPr wrap="square" lIns="0" tIns="0" rIns="0" bIns="0" rtlCol="0" anchor="t"/>
-          <a:lstStyle/>
-          <a:p>
-            <a:pPr algn="ctr" indent="0" marL="0">
-              <a:buNone/>
-            </a:pPr>
-            <a:r>
-              <a:rPr lang="en-US" sz="1150" dirty="0">
-                <a:solidFill>
-                  <a:srgbClr val="24343C"/>
-                </a:solidFill>
-                <a:latin typeface="Calibri" pitchFamily="34" charset="0"/>
-                <a:ea typeface="Calibri" pitchFamily="34" charset="-122"/>
-                <a:cs typeface="Calibri" pitchFamily="34" charset="-120"/>
-              </a:rPr>
-              <a:t>time resolution</a:t>
-            </a:r>
-            <a:endParaRPr lang="en-US" sz="1150" dirty="0"/>
-          </a:p>
-        </p:txBody>
-      </p:sp>
-      <p:sp>
-        <p:nvSpPr>
-          <p:cNvPr id="16" name="Shape 13"/>
-          <p:cNvSpPr/>
-          <p:nvPr/>
-        </p:nvSpPr>
-        <p:spPr>
-          <a:xfrm>
-            <a:off x="8961120" y="1517904"/>
-            <a:ext cx="2670048" cy="1481328"/>
+            <a:off x="5413248" y="3593592"/>
+            <a:ext cx="2276856" cy="365760"/>
+          </a:xfrm>
+          <a:prstGeom prst="rect">
+            <a:avLst/>
+          </a:prstGeom>
+          <a:noFill/>
+          <a:ln/>
+        </p:spPr>
+        <p:txBody>
+          <a:bodyPr wrap="square" lIns="0" tIns="0" rIns="0" bIns="0" rtlCol="0" anchor="ctr"/>
+          <a:lstStyle/>
+          <a:p>
+            <a:pPr indent="0" marL="0">
+              <a:buNone/>
+            </a:pPr>
+            <a:r>
+              <a:rPr lang="en-US" sz="1450" b="1" dirty="0">
+                <a:solidFill>
+                  <a:srgbClr val="0A2F40"/>
+                </a:solidFill>
+                <a:latin typeface="Calibri" pitchFamily="34" charset="0"/>
+                <a:ea typeface="Calibri" pitchFamily="34" charset="-122"/>
+                <a:cs typeface="Calibri" pitchFamily="34" charset="-120"/>
+              </a:rPr>
+              <a:t>Anne Haney</a:t>
+            </a:r>
+            <a:endParaRPr lang="en-US" sz="1450" dirty="0"/>
+          </a:p>
+        </p:txBody>
+      </p:sp>
+      <p:sp>
+        <p:nvSpPr>
+          <p:cNvPr id="16" name="Text 13"/>
+          <p:cNvSpPr/>
+          <p:nvPr/>
+        </p:nvSpPr>
+        <p:spPr>
+          <a:xfrm>
+            <a:off x="5413248" y="3959352"/>
+            <a:ext cx="2276856" cy="320040"/>
+          </a:xfrm>
+          <a:prstGeom prst="rect">
+            <a:avLst/>
+          </a:prstGeom>
+          <a:noFill/>
+          <a:ln/>
+        </p:spPr>
+        <p:txBody>
+          <a:bodyPr wrap="square" lIns="0" tIns="0" rIns="0" bIns="0" rtlCol="0" anchor="ctr"/>
+          <a:lstStyle/>
+          <a:p>
+            <a:pPr indent="0" marL="0">
+              <a:buNone/>
+            </a:pPr>
+            <a:r>
+              <a:rPr lang="en-US" sz="1250" dirty="0">
+                <a:solidFill>
+                  <a:srgbClr val="B86A18"/>
+                </a:solidFill>
+                <a:latin typeface="Calibri" pitchFamily="34" charset="0"/>
+                <a:ea typeface="Calibri" pitchFamily="34" charset="-122"/>
+                <a:cs typeface="Calibri" pitchFamily="34" charset="-120"/>
+              </a:rPr>
+              <a:t>W0ZDW</a:t>
+            </a:r>
+            <a:endParaRPr lang="en-US" sz="1250" dirty="0"/>
+          </a:p>
+        </p:txBody>
+      </p:sp>
+      <p:sp>
+        <p:nvSpPr>
+          <p:cNvPr id="17" name="Shape 14"/>
+          <p:cNvSpPr/>
+          <p:nvPr/>
+        </p:nvSpPr>
+        <p:spPr>
+          <a:xfrm>
+            <a:off x="8065008" y="3246120"/>
+            <a:ext cx="3557016" cy="1417320"/>
           </a:xfrm>
           <a:prstGeom prst="roundRect">
             <a:avLst>
-              <a:gd name="adj" fmla="val 4938"/>
+              <a:gd name="adj" fmla="val 5161"/>
             </a:avLst>
           </a:prstGeom>
           <a:solidFill>
@@ -9671,20 +10431,26 @@
       </p:sp>
       <p:sp>
         <p:nvSpPr>
-          <p:cNvPr id="17" name="Text 14"/>
-          <p:cNvSpPr/>
-          <p:nvPr/>
-        </p:nvSpPr>
-        <p:spPr>
-          <a:xfrm>
-            <a:off x="9098280" y="1627632"/>
-            <a:ext cx="2395728" cy="777240"/>
-          </a:xfrm>
-          <a:prstGeom prst="rect">
-            <a:avLst/>
-          </a:prstGeom>
-          <a:noFill/>
-          <a:ln/>
+          <p:cNvPr id="18" name="Text 15"/>
+          <p:cNvSpPr/>
+          <p:nvPr/>
+        </p:nvSpPr>
+        <p:spPr>
+          <a:xfrm>
+            <a:off x="8321040" y="3611880"/>
+            <a:ext cx="685800" cy="685800"/>
+          </a:xfrm>
+          <a:prstGeom prst="ellipse">
+            <a:avLst/>
+          </a:prstGeom>
+          <a:solidFill>
+            <a:srgbClr val="156082"/>
+          </a:solidFill>
+          <a:ln>
+            <a:solidFill>
+              <a:srgbClr val="156082"/>
+            </a:solidFill>
+          </a:ln>
         </p:spPr>
         <p:txBody>
           <a:bodyPr wrap="square" lIns="0" tIns="0" rIns="0" bIns="0" rtlCol="0" anchor="ctr"/>
@@ -9694,7 +10460,151 @@
               <a:buNone/>
             </a:pPr>
             <a:r>
-              <a:rPr lang="en-US" sz="3400" b="1" dirty="0">
+              <a:rPr lang="en-US" sz="1600" b="1" dirty="0">
+                <a:solidFill>
+                  <a:srgbClr val="FFFFFF"/>
+                </a:solidFill>
+                <a:latin typeface="Calibri" pitchFamily="34" charset="0"/>
+                <a:ea typeface="Calibri" pitchFamily="34" charset="-122"/>
+                <a:cs typeface="Calibri" pitchFamily="34" charset="-120"/>
+              </a:rPr>
+              <a:t>RH</a:t>
+            </a:r>
+            <a:endParaRPr lang="en-US" sz="1600" dirty="0"/>
+          </a:p>
+        </p:txBody>
+      </p:sp>
+      <p:sp>
+        <p:nvSpPr>
+          <p:cNvPr id="19" name="Text 16"/>
+          <p:cNvSpPr/>
+          <p:nvPr/>
+        </p:nvSpPr>
+        <p:spPr>
+          <a:xfrm>
+            <a:off x="9162288" y="3593592"/>
+            <a:ext cx="2276856" cy="365760"/>
+          </a:xfrm>
+          <a:prstGeom prst="rect">
+            <a:avLst/>
+          </a:prstGeom>
+          <a:noFill/>
+          <a:ln/>
+        </p:spPr>
+        <p:txBody>
+          <a:bodyPr wrap="square" lIns="0" tIns="0" rIns="0" bIns="0" rtlCol="0" anchor="ctr"/>
+          <a:lstStyle/>
+          <a:p>
+            <a:pPr indent="0" marL="0">
+              <a:buNone/>
+            </a:pPr>
+            <a:r>
+              <a:rPr lang="en-US" sz="1450" b="1" dirty="0">
+                <a:solidFill>
+                  <a:srgbClr val="0A2F40"/>
+                </a:solidFill>
+                <a:latin typeface="Calibri" pitchFamily="34" charset="0"/>
+                <a:ea typeface="Calibri" pitchFamily="34" charset="-122"/>
+                <a:cs typeface="Calibri" pitchFamily="34" charset="-120"/>
+              </a:rPr>
+              <a:t>Richard Hambly</a:t>
+            </a:r>
+            <a:endParaRPr lang="en-US" sz="1450" dirty="0"/>
+          </a:p>
+        </p:txBody>
+      </p:sp>
+      <p:sp>
+        <p:nvSpPr>
+          <p:cNvPr id="20" name="Text 17"/>
+          <p:cNvSpPr/>
+          <p:nvPr/>
+        </p:nvSpPr>
+        <p:spPr>
+          <a:xfrm>
+            <a:off x="9162288" y="3959352"/>
+            <a:ext cx="2276856" cy="320040"/>
+          </a:xfrm>
+          <a:prstGeom prst="rect">
+            <a:avLst/>
+          </a:prstGeom>
+          <a:noFill/>
+          <a:ln/>
+        </p:spPr>
+        <p:txBody>
+          <a:bodyPr wrap="square" lIns="0" tIns="0" rIns="0" bIns="0" rtlCol="0" anchor="ctr"/>
+          <a:lstStyle/>
+          <a:p>
+            <a:pPr indent="0" marL="0">
+              <a:buNone/>
+            </a:pPr>
+            <a:r>
+              <a:rPr lang="en-US" sz="1250" dirty="0">
+                <a:solidFill>
+                  <a:srgbClr val="B86A18"/>
+                </a:solidFill>
+                <a:latin typeface="Calibri" pitchFamily="34" charset="0"/>
+                <a:ea typeface="Calibri" pitchFamily="34" charset="-122"/>
+                <a:cs typeface="Calibri" pitchFamily="34" charset="-120"/>
+              </a:rPr>
+              <a:t>K0GD</a:t>
+            </a:r>
+            <a:endParaRPr lang="en-US" sz="1250" dirty="0"/>
+          </a:p>
+        </p:txBody>
+      </p:sp>
+      <p:sp>
+        <p:nvSpPr>
+          <p:cNvPr id="21" name="Shape 18"/>
+          <p:cNvSpPr/>
+          <p:nvPr/>
+        </p:nvSpPr>
+        <p:spPr>
+          <a:xfrm>
+            <a:off x="566928" y="4937760"/>
+            <a:ext cx="3557016" cy="1188720"/>
+          </a:xfrm>
+          <a:prstGeom prst="roundRect">
+            <a:avLst>
+              <a:gd name="adj" fmla="val 6154"/>
+            </a:avLst>
+          </a:prstGeom>
+          <a:solidFill>
+            <a:srgbClr val="FFFFFF"/>
+          </a:solidFill>
+          <a:ln w="9525">
+            <a:solidFill>
+              <a:srgbClr val="D7E3EA"/>
+            </a:solidFill>
+            <a:prstDash val="solid"/>
+          </a:ln>
+        </p:spPr>
+      </p:sp>
+      <p:sp>
+        <p:nvSpPr>
+          <p:cNvPr id="22" name="Text 19"/>
+          <p:cNvSpPr/>
+          <p:nvPr/>
+        </p:nvSpPr>
+        <p:spPr>
+          <a:xfrm>
+            <a:off x="795528" y="5102352"/>
+            <a:ext cx="3099816" cy="365760"/>
+          </a:xfrm>
+          <a:prstGeom prst="rect">
+            <a:avLst/>
+          </a:prstGeom>
+          <a:noFill/>
+          <a:ln/>
+        </p:spPr>
+        <p:txBody>
+          <a:bodyPr wrap="square" lIns="0" tIns="0" rIns="0" bIns="0" rtlCol="0" anchor="ctr"/>
+          <a:lstStyle/>
+          <a:p>
+            <a:pPr indent="0" marL="0">
+              <a:buNone/>
+            </a:pPr>
+            <a:r>
+              <a:rPr lang="en-US" sz="1550" b="1" dirty="0">
                 <a:solidFill>
                   <a:srgbClr val="156082"/>
                 </a:solidFill>
@@ -9702,6 +10612,848 @@
                 <a:ea typeface="Cambria" pitchFamily="34" charset="-122"/>
                 <a:cs typeface="Cambria" pitchFamily="34" charset="-120"/>
               </a:rPr>
+              <a:t>60-ft dish</a:t>
+            </a:r>
+            <a:endParaRPr lang="en-US" sz="1550" dirty="0"/>
+          </a:p>
+        </p:txBody>
+      </p:sp>
+      <p:sp>
+        <p:nvSpPr>
+          <p:cNvPr id="23" name="Text 20"/>
+          <p:cNvSpPr/>
+          <p:nvPr/>
+        </p:nvSpPr>
+        <p:spPr>
+          <a:xfrm>
+            <a:off x="795528" y="5468112"/>
+            <a:ext cx="3099816" cy="502920"/>
+          </a:xfrm>
+          <a:prstGeom prst="rect">
+            <a:avLst/>
+          </a:prstGeom>
+          <a:noFill/>
+          <a:ln/>
+        </p:spPr>
+        <p:txBody>
+          <a:bodyPr wrap="square" lIns="0" tIns="0" rIns="0" bIns="0" rtlCol="0" anchor="t"/>
+          <a:lstStyle/>
+          <a:p>
+            <a:pPr indent="0" marL="0">
+              <a:buNone/>
+            </a:pPr>
+            <a:r>
+              <a:rPr lang="en-US" sz="1150" dirty="0">
+                <a:solidFill>
+                  <a:srgbClr val="24343C"/>
+                </a:solidFill>
+                <a:latin typeface="Calibri" pitchFamily="34" charset="0"/>
+                <a:ea typeface="Calibri" pitchFamily="34" charset="-122"/>
+                <a:cs typeface="Calibri" pitchFamily="34" charset="-120"/>
+              </a:rPr>
+              <a:t>DSES site, Haswell, Colorado</a:t>
+            </a:r>
+            <a:endParaRPr lang="en-US" sz="1150" dirty="0"/>
+          </a:p>
+        </p:txBody>
+      </p:sp>
+      <p:sp>
+        <p:nvSpPr>
+          <p:cNvPr id="24" name="Shape 21"/>
+          <p:cNvSpPr/>
+          <p:nvPr/>
+        </p:nvSpPr>
+        <p:spPr>
+          <a:xfrm>
+            <a:off x="4315968" y="4937760"/>
+            <a:ext cx="3557016" cy="1188720"/>
+          </a:xfrm>
+          <a:prstGeom prst="roundRect">
+            <a:avLst>
+              <a:gd name="adj" fmla="val 6154"/>
+            </a:avLst>
+          </a:prstGeom>
+          <a:solidFill>
+            <a:srgbClr val="FFFFFF"/>
+          </a:solidFill>
+          <a:ln w="9525">
+            <a:solidFill>
+              <a:srgbClr val="D7E3EA"/>
+            </a:solidFill>
+            <a:prstDash val="solid"/>
+          </a:ln>
+        </p:spPr>
+      </p:sp>
+      <p:sp>
+        <p:nvSpPr>
+          <p:cNvPr id="25" name="Text 22"/>
+          <p:cNvSpPr/>
+          <p:nvPr/>
+        </p:nvSpPr>
+        <p:spPr>
+          <a:xfrm>
+            <a:off x="4544568" y="5102352"/>
+            <a:ext cx="3099816" cy="365760"/>
+          </a:xfrm>
+          <a:prstGeom prst="rect">
+            <a:avLst/>
+          </a:prstGeom>
+          <a:noFill/>
+          <a:ln/>
+        </p:spPr>
+        <p:txBody>
+          <a:bodyPr wrap="square" lIns="0" tIns="0" rIns="0" bIns="0" rtlCol="0" anchor="ctr"/>
+          <a:lstStyle/>
+          <a:p>
+            <a:pPr indent="0" marL="0">
+              <a:buNone/>
+            </a:pPr>
+            <a:r>
+              <a:rPr lang="en-US" sz="1550" b="1" dirty="0">
+                <a:solidFill>
+                  <a:srgbClr val="156082"/>
+                </a:solidFill>
+                <a:latin typeface="Cambria" pitchFamily="34" charset="0"/>
+                <a:ea typeface="Cambria" pitchFamily="34" charset="-122"/>
+                <a:cs typeface="Cambria" pitchFamily="34" charset="-120"/>
+              </a:rPr>
+              <a:t>Ettus USRP B210</a:t>
+            </a:r>
+            <a:endParaRPr lang="en-US" sz="1550" dirty="0"/>
+          </a:p>
+        </p:txBody>
+      </p:sp>
+      <p:sp>
+        <p:nvSpPr>
+          <p:cNvPr id="26" name="Text 23"/>
+          <p:cNvSpPr/>
+          <p:nvPr/>
+        </p:nvSpPr>
+        <p:spPr>
+          <a:xfrm>
+            <a:off x="4544568" y="5468112"/>
+            <a:ext cx="3099816" cy="502920"/>
+          </a:xfrm>
+          <a:prstGeom prst="rect">
+            <a:avLst/>
+          </a:prstGeom>
+          <a:noFill/>
+          <a:ln/>
+        </p:spPr>
+        <p:txBody>
+          <a:bodyPr wrap="square" lIns="0" tIns="0" rIns="0" bIns="0" rtlCol="0" anchor="t"/>
+          <a:lstStyle/>
+          <a:p>
+            <a:pPr indent="0" marL="0">
+              <a:buNone/>
+            </a:pPr>
+            <a:r>
+              <a:rPr lang="en-US" sz="1150" dirty="0">
+                <a:solidFill>
+                  <a:srgbClr val="24343C"/>
+                </a:solidFill>
+                <a:latin typeface="Calibri" pitchFamily="34" charset="0"/>
+                <a:ea typeface="Calibri" pitchFamily="34" charset="-122"/>
+                <a:cs typeface="Calibri" pitchFamily="34" charset="-120"/>
+              </a:rPr>
+              <a:t>software-defined radio receiver</a:t>
+            </a:r>
+            <a:endParaRPr lang="en-US" sz="1150" dirty="0"/>
+          </a:p>
+        </p:txBody>
+      </p:sp>
+      <p:sp>
+        <p:nvSpPr>
+          <p:cNvPr id="27" name="Shape 24"/>
+          <p:cNvSpPr/>
+          <p:nvPr/>
+        </p:nvSpPr>
+        <p:spPr>
+          <a:xfrm>
+            <a:off x="8065008" y="4937760"/>
+            <a:ext cx="3557016" cy="1188720"/>
+          </a:xfrm>
+          <a:prstGeom prst="roundRect">
+            <a:avLst>
+              <a:gd name="adj" fmla="val 6154"/>
+            </a:avLst>
+          </a:prstGeom>
+          <a:solidFill>
+            <a:srgbClr val="FFFFFF"/>
+          </a:solidFill>
+          <a:ln w="9525">
+            <a:solidFill>
+              <a:srgbClr val="D7E3EA"/>
+            </a:solidFill>
+            <a:prstDash val="solid"/>
+          </a:ln>
+        </p:spPr>
+      </p:sp>
+      <p:sp>
+        <p:nvSpPr>
+          <p:cNvPr id="28" name="Text 25"/>
+          <p:cNvSpPr/>
+          <p:nvPr/>
+        </p:nvSpPr>
+        <p:spPr>
+          <a:xfrm>
+            <a:off x="8293608" y="5102352"/>
+            <a:ext cx="3099816" cy="365760"/>
+          </a:xfrm>
+          <a:prstGeom prst="rect">
+            <a:avLst/>
+          </a:prstGeom>
+          <a:noFill/>
+          <a:ln/>
+        </p:spPr>
+        <p:txBody>
+          <a:bodyPr wrap="square" lIns="0" tIns="0" rIns="0" bIns="0" rtlCol="0" anchor="ctr"/>
+          <a:lstStyle/>
+          <a:p>
+            <a:pPr indent="0" marL="0">
+              <a:buNone/>
+            </a:pPr>
+            <a:r>
+              <a:rPr lang="en-US" sz="1550" b="1" dirty="0">
+                <a:solidFill>
+                  <a:srgbClr val="156082"/>
+                </a:solidFill>
+                <a:latin typeface="Cambria" pitchFamily="34" charset="0"/>
+                <a:ea typeface="Cambria" pitchFamily="34" charset="-122"/>
+                <a:cs typeface="Cambria" pitchFamily="34" charset="-120"/>
+              </a:rPr>
+              <a:t>Spectrum Analyzer</a:t>
+            </a:r>
+            <a:endParaRPr lang="en-US" sz="1550" dirty="0"/>
+          </a:p>
+        </p:txBody>
+      </p:sp>
+      <p:sp>
+        <p:nvSpPr>
+          <p:cNvPr id="29" name="Text 26"/>
+          <p:cNvSpPr/>
+          <p:nvPr/>
+        </p:nvSpPr>
+        <p:spPr>
+          <a:xfrm>
+            <a:off x="8293608" y="5468112"/>
+            <a:ext cx="3099816" cy="502920"/>
+          </a:xfrm>
+          <a:prstGeom prst="rect">
+            <a:avLst/>
+          </a:prstGeom>
+          <a:noFill/>
+          <a:ln/>
+        </p:spPr>
+        <p:txBody>
+          <a:bodyPr wrap="square" lIns="0" tIns="0" rIns="0" bIns="0" rtlCol="0" anchor="t"/>
+          <a:lstStyle/>
+          <a:p>
+            <a:pPr indent="0" marL="0">
+              <a:buNone/>
+            </a:pPr>
+            <a:r>
+              <a:rPr lang="en-US" sz="1150" dirty="0">
+                <a:solidFill>
+                  <a:srgbClr val="24343C"/>
+                </a:solidFill>
+                <a:latin typeface="Calibri" pitchFamily="34" charset="0"/>
+                <a:ea typeface="Calibri" pitchFamily="34" charset="-122"/>
+                <a:cs typeface="Calibri" pitchFamily="34" charset="-120"/>
+              </a:rPr>
+              <a:t>one laptop — planning, RF checks, recording</a:t>
+            </a:r>
+            <a:endParaRPr lang="en-US" sz="1150" dirty="0"/>
+          </a:p>
+        </p:txBody>
+      </p:sp>
+    </p:spTree>
+  </p:cSld>
+  <p:clrMapOvr>
+    <a:masterClrMapping/>
+  </p:clrMapOvr>
+</p:sld>
+</file>
+
+<file path=ppt/slides/slide7.xml><?xml version="1.0" encoding="utf-8"?>
+<p:sld xmlns:a="http://schemas.openxmlformats.org/drawingml/2006/main" xmlns:r="http://schemas.openxmlformats.org/officeDocument/2006/relationships" xmlns:p="http://schemas.openxmlformats.org/presentationml/2006/main">
+  <p:cSld name="Slide 7">
+    <p:bg>
+      <p:bgPr>
+        <a:solidFill>
+          <a:srgbClr val="FFFFFF"/>
+        </a:solidFill>
+      </p:bgPr>
+    </p:bg>
+    <p:spTree>
+      <p:nvGrpSpPr>
+        <p:cNvPr id="1" name=""/>
+        <p:cNvGrpSpPr/>
+        <p:nvPr/>
+      </p:nvGrpSpPr>
+      <p:grpSpPr>
+        <a:xfrm>
+          <a:off x="0" y="0"/>
+          <a:ext cx="0" cy="0"/>
+          <a:chOff x="0" y="0"/>
+          <a:chExt cx="0" cy="0"/>
+        </a:xfrm>
+      </p:grpSpPr>
+      <p:sp>
+        <p:nvSpPr>
+          <p:cNvPr id="2" name="Text 0"/>
+          <p:cNvSpPr/>
+          <p:nvPr/>
+        </p:nvSpPr>
+        <p:spPr>
+          <a:xfrm>
+            <a:off x="566928" y="347472"/>
+            <a:ext cx="8686800" cy="274320"/>
+          </a:xfrm>
+          <a:prstGeom prst="rect">
+            <a:avLst/>
+          </a:prstGeom>
+          <a:noFill/>
+          <a:ln/>
+        </p:spPr>
+        <p:txBody>
+          <a:bodyPr wrap="square" lIns="0" tIns="0" rIns="0" bIns="0" rtlCol="0" anchor="ctr"/>
+          <a:lstStyle/>
+          <a:p>
+            <a:pPr indent="0" marL="0">
+              <a:buNone/>
+            </a:pPr>
+            <a:r>
+              <a:rPr lang="en-US" sz="1100" b="1" spc="200" kern="0" dirty="0">
+                <a:solidFill>
+                  <a:srgbClr val="156082"/>
+                </a:solidFill>
+                <a:latin typeface="Calibri" pitchFamily="34" charset="0"/>
+                <a:ea typeface="Calibri" pitchFamily="34" charset="-122"/>
+                <a:cs typeface="Calibri" pitchFamily="34" charset="-120"/>
+              </a:rPr>
+              <a:t>THE DATA</a:t>
+            </a:r>
+            <a:endParaRPr lang="en-US" sz="1100" dirty="0"/>
+          </a:p>
+        </p:txBody>
+      </p:sp>
+      <p:sp>
+        <p:nvSpPr>
+          <p:cNvPr id="3" name="Text 1"/>
+          <p:cNvSpPr/>
+          <p:nvPr/>
+        </p:nvSpPr>
+        <p:spPr>
+          <a:xfrm>
+            <a:off x="566928" y="603504"/>
+            <a:ext cx="9509760" cy="685800"/>
+          </a:xfrm>
+          <a:prstGeom prst="rect">
+            <a:avLst/>
+          </a:prstGeom>
+          <a:noFill/>
+          <a:ln/>
+        </p:spPr>
+        <p:txBody>
+          <a:bodyPr wrap="square" lIns="0" tIns="0" rIns="0" bIns="0" rtlCol="0" anchor="ctr"/>
+          <a:lstStyle/>
+          <a:p>
+            <a:pPr indent="0" marL="0">
+              <a:buNone/>
+            </a:pPr>
+            <a:r>
+              <a:rPr lang="en-US" sz="2900" b="1" dirty="0">
+                <a:solidFill>
+                  <a:srgbClr val="0A2F40"/>
+                </a:solidFill>
+                <a:latin typeface="Cambria" pitchFamily="34" charset="0"/>
+                <a:ea typeface="Cambria" pitchFamily="34" charset="-122"/>
+                <a:cs typeface="Cambria" pitchFamily="34" charset="-120"/>
+              </a:rPr>
+              <a:t>Two pulsars recorded live to filterbank</a:t>
+            </a:r>
+            <a:endParaRPr lang="en-US" sz="2900" dirty="0"/>
+          </a:p>
+        </p:txBody>
+      </p:sp>
+      <p:pic>
+        <p:nvPicPr>
+          <p:cNvPr id="4" name="Image 0" descr="C:\Users\rick\Documents\DSES\Science\Spectrum_Analyzer_PY\reports\assets\DSES_Logo_Compact_Teal.png">    </p:cNvPr>
+          <p:cNvPicPr>
+            <a:picLocks noChangeAspect="1"/>
+          </p:cNvPicPr>
+          <p:nvPr/>
+        </p:nvPicPr>
+        <p:blipFill>
+          <a:blip r:embed="rId1"/>
+          <a:stretch>
+            <a:fillRect/>
+          </a:stretch>
+        </p:blipFill>
+        <p:spPr>
+          <a:xfrm>
+            <a:off x="10533888" y="384048"/>
+            <a:ext cx="1097280" cy="406908"/>
+          </a:xfrm>
+          <a:prstGeom prst="rect">
+            <a:avLst/>
+          </a:prstGeom>
+        </p:spPr>
+      </p:pic>
+      <p:sp>
+        <p:nvSpPr>
+          <p:cNvPr id="5" name="Text 2"/>
+          <p:cNvSpPr/>
+          <p:nvPr/>
+        </p:nvSpPr>
+        <p:spPr>
+          <a:xfrm>
+            <a:off x="566928" y="6473952"/>
+            <a:ext cx="5943600" cy="228600"/>
+          </a:xfrm>
+          <a:prstGeom prst="rect">
+            <a:avLst/>
+          </a:prstGeom>
+          <a:noFill/>
+          <a:ln/>
+        </p:spPr>
+        <p:txBody>
+          <a:bodyPr wrap="square" lIns="0" tIns="0" rIns="0" bIns="0" rtlCol="0" anchor="ctr"/>
+          <a:lstStyle/>
+          <a:p>
+            <a:pPr indent="0" marL="0">
+              <a:buNone/>
+            </a:pPr>
+            <a:r>
+              <a:rPr lang="en-US" sz="850" dirty="0">
+                <a:solidFill>
+                  <a:srgbClr val="6B7A82"/>
+                </a:solidFill>
+                <a:latin typeface="Calibri" pitchFamily="34" charset="0"/>
+                <a:ea typeface="Calibri" pitchFamily="34" charset="-122"/>
+                <a:cs typeface="Calibri" pitchFamily="34" charset="-120"/>
+              </a:rPr>
+              <a:t>Lowering the Barrier to Radio Astronomy  •  DSES  •  SARA 2026</a:t>
+            </a:r>
+            <a:endParaRPr lang="en-US" sz="850" dirty="0"/>
+          </a:p>
+        </p:txBody>
+      </p:sp>
+      <p:sp>
+        <p:nvSpPr>
+          <p:cNvPr id="6" name="Text 3"/>
+          <p:cNvSpPr/>
+          <p:nvPr/>
+        </p:nvSpPr>
+        <p:spPr>
+          <a:xfrm>
+            <a:off x="11475720" y="6473952"/>
+            <a:ext cx="457200" cy="228600"/>
+          </a:xfrm>
+          <a:prstGeom prst="rect">
+            <a:avLst/>
+          </a:prstGeom>
+          <a:noFill/>
+          <a:ln/>
+        </p:spPr>
+        <p:txBody>
+          <a:bodyPr wrap="square" lIns="0" tIns="0" rIns="0" bIns="0" rtlCol="0" anchor="ctr"/>
+          <a:lstStyle/>
+          <a:p>
+            <a:pPr algn="r" indent="0" marL="0">
+              <a:buNone/>
+            </a:pPr>
+            <a:r>
+              <a:rPr lang="en-US" sz="850" dirty="0">
+                <a:solidFill>
+                  <a:srgbClr val="6B7A82"/>
+                </a:solidFill>
+                <a:latin typeface="Calibri" pitchFamily="34" charset="0"/>
+                <a:ea typeface="Calibri" pitchFamily="34" charset="-122"/>
+                <a:cs typeface="Calibri" pitchFamily="34" charset="-120"/>
+              </a:rPr>
+              <a:t>7</a:t>
+            </a:r>
+            <a:endParaRPr lang="en-US" sz="850" dirty="0"/>
+          </a:p>
+        </p:txBody>
+      </p:sp>
+      <p:sp>
+        <p:nvSpPr>
+          <p:cNvPr id="7" name="Shape 4"/>
+          <p:cNvSpPr/>
+          <p:nvPr/>
+        </p:nvSpPr>
+        <p:spPr>
+          <a:xfrm>
+            <a:off x="566928" y="1517904"/>
+            <a:ext cx="2670048" cy="1481328"/>
+          </a:xfrm>
+          <a:prstGeom prst="roundRect">
+            <a:avLst>
+              <a:gd name="adj" fmla="val 4938"/>
+            </a:avLst>
+          </a:prstGeom>
+          <a:solidFill>
+            <a:srgbClr val="EFF4F7"/>
+          </a:solidFill>
+          <a:ln w="9525">
+            <a:solidFill>
+              <a:srgbClr val="D7E3EA"/>
+            </a:solidFill>
+            <a:prstDash val="solid"/>
+          </a:ln>
+        </p:spPr>
+      </p:sp>
+      <p:sp>
+        <p:nvSpPr>
+          <p:cNvPr id="8" name="Text 5"/>
+          <p:cNvSpPr/>
+          <p:nvPr/>
+        </p:nvSpPr>
+        <p:spPr>
+          <a:xfrm>
+            <a:off x="704088" y="1627632"/>
+            <a:ext cx="2395728" cy="777240"/>
+          </a:xfrm>
+          <a:prstGeom prst="rect">
+            <a:avLst/>
+          </a:prstGeom>
+          <a:noFill/>
+          <a:ln/>
+        </p:spPr>
+        <p:txBody>
+          <a:bodyPr wrap="square" lIns="0" tIns="0" rIns="0" bIns="0" rtlCol="0" anchor="ctr"/>
+          <a:lstStyle/>
+          <a:p>
+            <a:pPr algn="ctr" indent="0" marL="0">
+              <a:buNone/>
+            </a:pPr>
+            <a:r>
+              <a:rPr lang="en-US" sz="3400" b="1" dirty="0">
+                <a:solidFill>
+                  <a:srgbClr val="B86A18"/>
+                </a:solidFill>
+                <a:latin typeface="Cambria" pitchFamily="34" charset="0"/>
+                <a:ea typeface="Cambria" pitchFamily="34" charset="-122"/>
+                <a:cs typeface="Cambria" pitchFamily="34" charset="-120"/>
+              </a:rPr>
+              <a:t>20 MHz</a:t>
+            </a:r>
+            <a:endParaRPr lang="en-US" sz="3400" dirty="0"/>
+          </a:p>
+        </p:txBody>
+      </p:sp>
+      <p:sp>
+        <p:nvSpPr>
+          <p:cNvPr id="9" name="Text 6"/>
+          <p:cNvSpPr/>
+          <p:nvPr/>
+        </p:nvSpPr>
+        <p:spPr>
+          <a:xfrm>
+            <a:off x="704088" y="2386584"/>
+            <a:ext cx="2395728" cy="530352"/>
+          </a:xfrm>
+          <a:prstGeom prst="rect">
+            <a:avLst/>
+          </a:prstGeom>
+          <a:noFill/>
+          <a:ln/>
+        </p:spPr>
+        <p:txBody>
+          <a:bodyPr wrap="square" lIns="0" tIns="0" rIns="0" bIns="0" rtlCol="0" anchor="t"/>
+          <a:lstStyle/>
+          <a:p>
+            <a:pPr algn="ctr" indent="0" marL="0">
+              <a:buNone/>
+            </a:pPr>
+            <a:r>
+              <a:rPr lang="en-US" sz="1150" dirty="0">
+                <a:solidFill>
+                  <a:srgbClr val="24343C"/>
+                </a:solidFill>
+                <a:latin typeface="Calibri" pitchFamily="34" charset="0"/>
+                <a:ea typeface="Calibri" pitchFamily="34" charset="-122"/>
+                <a:cs typeface="Calibri" pitchFamily="34" charset="-120"/>
+              </a:rPr>
+              <a:t>bandwidth, centered on 420 MHz</a:t>
+            </a:r>
+            <a:endParaRPr lang="en-US" sz="1150" dirty="0"/>
+          </a:p>
+        </p:txBody>
+      </p:sp>
+      <p:sp>
+        <p:nvSpPr>
+          <p:cNvPr id="10" name="Shape 7"/>
+          <p:cNvSpPr/>
+          <p:nvPr/>
+        </p:nvSpPr>
+        <p:spPr>
+          <a:xfrm>
+            <a:off x="3364992" y="1517904"/>
+            <a:ext cx="2670048" cy="1481328"/>
+          </a:xfrm>
+          <a:prstGeom prst="roundRect">
+            <a:avLst>
+              <a:gd name="adj" fmla="val 4938"/>
+            </a:avLst>
+          </a:prstGeom>
+          <a:solidFill>
+            <a:srgbClr val="EFF4F7"/>
+          </a:solidFill>
+          <a:ln w="9525">
+            <a:solidFill>
+              <a:srgbClr val="D7E3EA"/>
+            </a:solidFill>
+            <a:prstDash val="solid"/>
+          </a:ln>
+        </p:spPr>
+      </p:sp>
+      <p:sp>
+        <p:nvSpPr>
+          <p:cNvPr id="11" name="Text 8"/>
+          <p:cNvSpPr/>
+          <p:nvPr/>
+        </p:nvSpPr>
+        <p:spPr>
+          <a:xfrm>
+            <a:off x="3502152" y="1627632"/>
+            <a:ext cx="2395728" cy="777240"/>
+          </a:xfrm>
+          <a:prstGeom prst="rect">
+            <a:avLst/>
+          </a:prstGeom>
+          <a:noFill/>
+          <a:ln/>
+        </p:spPr>
+        <p:txBody>
+          <a:bodyPr wrap="square" lIns="0" tIns="0" rIns="0" bIns="0" rtlCol="0" anchor="ctr"/>
+          <a:lstStyle/>
+          <a:p>
+            <a:pPr algn="ctr" indent="0" marL="0">
+              <a:buNone/>
+            </a:pPr>
+            <a:r>
+              <a:rPr lang="en-US" sz="3400" b="1" dirty="0">
+                <a:solidFill>
+                  <a:srgbClr val="156082"/>
+                </a:solidFill>
+                <a:latin typeface="Cambria" pitchFamily="34" charset="0"/>
+                <a:ea typeface="Cambria" pitchFamily="34" charset="-122"/>
+                <a:cs typeface="Cambria" pitchFamily="34" charset="-120"/>
+              </a:rPr>
+              <a:t>256</a:t>
+            </a:r>
+            <a:endParaRPr lang="en-US" sz="3400" dirty="0"/>
+          </a:p>
+        </p:txBody>
+      </p:sp>
+      <p:sp>
+        <p:nvSpPr>
+          <p:cNvPr id="12" name="Text 9"/>
+          <p:cNvSpPr/>
+          <p:nvPr/>
+        </p:nvSpPr>
+        <p:spPr>
+          <a:xfrm>
+            <a:off x="3502152" y="2386584"/>
+            <a:ext cx="2395728" cy="530352"/>
+          </a:xfrm>
+          <a:prstGeom prst="rect">
+            <a:avLst/>
+          </a:prstGeom>
+          <a:noFill/>
+          <a:ln/>
+        </p:spPr>
+        <p:txBody>
+          <a:bodyPr wrap="square" lIns="0" tIns="0" rIns="0" bIns="0" rtlCol="0" anchor="t"/>
+          <a:lstStyle/>
+          <a:p>
+            <a:pPr algn="ctr" indent="0" marL="0">
+              <a:buNone/>
+            </a:pPr>
+            <a:r>
+              <a:rPr lang="en-US" sz="1150" dirty="0">
+                <a:solidFill>
+                  <a:srgbClr val="24343C"/>
+                </a:solidFill>
+                <a:latin typeface="Calibri" pitchFamily="34" charset="0"/>
+                <a:ea typeface="Calibri" pitchFamily="34" charset="-122"/>
+                <a:cs typeface="Calibri" pitchFamily="34" charset="-120"/>
+              </a:rPr>
+              <a:t>frequency channels</a:t>
+            </a:r>
+            <a:endParaRPr lang="en-US" sz="1150" dirty="0"/>
+          </a:p>
+        </p:txBody>
+      </p:sp>
+      <p:sp>
+        <p:nvSpPr>
+          <p:cNvPr id="13" name="Shape 10"/>
+          <p:cNvSpPr/>
+          <p:nvPr/>
+        </p:nvSpPr>
+        <p:spPr>
+          <a:xfrm>
+            <a:off x="6163056" y="1517904"/>
+            <a:ext cx="2670048" cy="1481328"/>
+          </a:xfrm>
+          <a:prstGeom prst="roundRect">
+            <a:avLst>
+              <a:gd name="adj" fmla="val 4938"/>
+            </a:avLst>
+          </a:prstGeom>
+          <a:solidFill>
+            <a:srgbClr val="EFF4F7"/>
+          </a:solidFill>
+          <a:ln w="9525">
+            <a:solidFill>
+              <a:srgbClr val="D7E3EA"/>
+            </a:solidFill>
+            <a:prstDash val="solid"/>
+          </a:ln>
+        </p:spPr>
+      </p:sp>
+      <p:sp>
+        <p:nvSpPr>
+          <p:cNvPr id="14" name="Text 11"/>
+          <p:cNvSpPr/>
+          <p:nvPr/>
+        </p:nvSpPr>
+        <p:spPr>
+          <a:xfrm>
+            <a:off x="6300216" y="1627632"/>
+            <a:ext cx="2395728" cy="777240"/>
+          </a:xfrm>
+          <a:prstGeom prst="rect">
+            <a:avLst/>
+          </a:prstGeom>
+          <a:noFill/>
+          <a:ln/>
+        </p:spPr>
+        <p:txBody>
+          <a:bodyPr wrap="square" lIns="0" tIns="0" rIns="0" bIns="0" rtlCol="0" anchor="ctr"/>
+          <a:lstStyle/>
+          <a:p>
+            <a:pPr algn="ctr" indent="0" marL="0">
+              <a:buNone/>
+            </a:pPr>
+            <a:r>
+              <a:rPr lang="en-US" sz="3400" b="1" dirty="0">
+                <a:solidFill>
+                  <a:srgbClr val="156082"/>
+                </a:solidFill>
+                <a:latin typeface="Cambria" pitchFamily="34" charset="0"/>
+                <a:ea typeface="Cambria" pitchFamily="34" charset="-122"/>
+                <a:cs typeface="Cambria" pitchFamily="34" charset="-120"/>
+              </a:rPr>
+              <a:t>204.8 µs</a:t>
+            </a:r>
+            <a:endParaRPr lang="en-US" sz="3400" dirty="0"/>
+          </a:p>
+        </p:txBody>
+      </p:sp>
+      <p:sp>
+        <p:nvSpPr>
+          <p:cNvPr id="15" name="Text 12"/>
+          <p:cNvSpPr/>
+          <p:nvPr/>
+        </p:nvSpPr>
+        <p:spPr>
+          <a:xfrm>
+            <a:off x="6300216" y="2386584"/>
+            <a:ext cx="2395728" cy="530352"/>
+          </a:xfrm>
+          <a:prstGeom prst="rect">
+            <a:avLst/>
+          </a:prstGeom>
+          <a:noFill/>
+          <a:ln/>
+        </p:spPr>
+        <p:txBody>
+          <a:bodyPr wrap="square" lIns="0" tIns="0" rIns="0" bIns="0" rtlCol="0" anchor="t"/>
+          <a:lstStyle/>
+          <a:p>
+            <a:pPr algn="ctr" indent="0" marL="0">
+              <a:buNone/>
+            </a:pPr>
+            <a:r>
+              <a:rPr lang="en-US" sz="1150" dirty="0">
+                <a:solidFill>
+                  <a:srgbClr val="24343C"/>
+                </a:solidFill>
+                <a:latin typeface="Calibri" pitchFamily="34" charset="0"/>
+                <a:ea typeface="Calibri" pitchFamily="34" charset="-122"/>
+                <a:cs typeface="Calibri" pitchFamily="34" charset="-120"/>
+              </a:rPr>
+              <a:t>time resolution</a:t>
+            </a:r>
+            <a:endParaRPr lang="en-US" sz="1150" dirty="0"/>
+          </a:p>
+        </p:txBody>
+      </p:sp>
+      <p:sp>
+        <p:nvSpPr>
+          <p:cNvPr id="16" name="Shape 13"/>
+          <p:cNvSpPr/>
+          <p:nvPr/>
+        </p:nvSpPr>
+        <p:spPr>
+          <a:xfrm>
+            <a:off x="8961120" y="1517904"/>
+            <a:ext cx="2670048" cy="1481328"/>
+          </a:xfrm>
+          <a:prstGeom prst="roundRect">
+            <a:avLst>
+              <a:gd name="adj" fmla="val 4938"/>
+            </a:avLst>
+          </a:prstGeom>
+          <a:solidFill>
+            <a:srgbClr val="EFF4F7"/>
+          </a:solidFill>
+          <a:ln w="9525">
+            <a:solidFill>
+              <a:srgbClr val="D7E3EA"/>
+            </a:solidFill>
+            <a:prstDash val="solid"/>
+          </a:ln>
+        </p:spPr>
+      </p:sp>
+      <p:sp>
+        <p:nvSpPr>
+          <p:cNvPr id="17" name="Text 14"/>
+          <p:cNvSpPr/>
+          <p:nvPr/>
+        </p:nvSpPr>
+        <p:spPr>
+          <a:xfrm>
+            <a:off x="9098280" y="1627632"/>
+            <a:ext cx="2395728" cy="777240"/>
+          </a:xfrm>
+          <a:prstGeom prst="rect">
+            <a:avLst/>
+          </a:prstGeom>
+          <a:noFill/>
+          <a:ln/>
+        </p:spPr>
+        <p:txBody>
+          <a:bodyPr wrap="square" lIns="0" tIns="0" rIns="0" bIns="0" rtlCol="0" anchor="ctr"/>
+          <a:lstStyle/>
+          <a:p>
+            <a:pPr algn="ctr" indent="0" marL="0">
+              <a:buNone/>
+            </a:pPr>
+            <a:r>
+              <a:rPr lang="en-US" sz="3400" b="1" dirty="0">
+                <a:solidFill>
+                  <a:srgbClr val="156082"/>
+                </a:solidFill>
+                <a:latin typeface="Cambria" pitchFamily="34" charset="0"/>
+                <a:ea typeface="Cambria" pitchFamily="34" charset="-122"/>
+                <a:cs typeface="Cambria" pitchFamily="34" charset="-120"/>
+              </a:rPr>
               <a:t>32-bit</a:t>
             </a:r>
             <a:endParaRPr lang="en-US" sz="3400" dirty="0"/>
@@ -9749,7 +11501,7 @@
       </p:sp>
       <p:graphicFrame>
         <p:nvGraphicFramePr>
-          <p:cNvPr id="7" name="Table 0"/>
+          <p:cNvPr id="8" name="Table 0"/>
           <p:cNvGraphicFramePr>
             <a:graphicFrameLocks noGrp="1"/>
           </p:cNvGraphicFramePr>
@@ -10853,494 +12605,6 @@
 </p:sld>
 </file>
 
-<file path=ppt/slides/slide7.xml><?xml version="1.0" encoding="utf-8"?>
-<p:sld xmlns:a="http://schemas.openxmlformats.org/drawingml/2006/main" xmlns:r="http://schemas.openxmlformats.org/officeDocument/2006/relationships" xmlns:p="http://schemas.openxmlformats.org/presentationml/2006/main">
-  <p:cSld name="Slide 7">
-    <p:bg>
-      <p:bgPr>
-        <a:solidFill>
-          <a:srgbClr val="FFFFFF"/>
-        </a:solidFill>
-      </p:bgPr>
-    </p:bg>
-    <p:spTree>
-      <p:nvGrpSpPr>
-        <p:cNvPr id="1" name=""/>
-        <p:cNvGrpSpPr/>
-        <p:nvPr/>
-      </p:nvGrpSpPr>
-      <p:grpSpPr>
-        <a:xfrm>
-          <a:off x="0" y="0"/>
-          <a:ext cx="0" cy="0"/>
-          <a:chOff x="0" y="0"/>
-          <a:chExt cx="0" cy="0"/>
-        </a:xfrm>
-      </p:grpSpPr>
-      <p:sp>
-        <p:nvSpPr>
-          <p:cNvPr id="2" name="Text 0"/>
-          <p:cNvSpPr/>
-          <p:nvPr/>
-        </p:nvSpPr>
-        <p:spPr>
-          <a:xfrm>
-            <a:off x="566928" y="347472"/>
-            <a:ext cx="8686800" cy="274320"/>
-          </a:xfrm>
-          <a:prstGeom prst="rect">
-            <a:avLst/>
-          </a:prstGeom>
-          <a:noFill/>
-          <a:ln/>
-        </p:spPr>
-        <p:txBody>
-          <a:bodyPr wrap="square" lIns="0" tIns="0" rIns="0" bIns="0" rtlCol="0" anchor="ctr"/>
-          <a:lstStyle/>
-          <a:p>
-            <a:pPr indent="0" marL="0">
-              <a:buNone/>
-            </a:pPr>
-            <a:r>
-              <a:rPr lang="en-US" sz="1100" b="1" spc="200" kern="0" dirty="0">
-                <a:solidFill>
-                  <a:srgbClr val="156082"/>
-                </a:solidFill>
-                <a:latin typeface="Calibri" pitchFamily="34" charset="0"/>
-                <a:ea typeface="Calibri" pitchFamily="34" charset="-122"/>
-                <a:cs typeface="Calibri" pitchFamily="34" charset="-120"/>
-              </a:rPr>
-              <a:t>RESULTS</a:t>
-            </a:r>
-            <a:endParaRPr lang="en-US" sz="1100" dirty="0"/>
-          </a:p>
-        </p:txBody>
-      </p:sp>
-      <p:sp>
-        <p:nvSpPr>
-          <p:cNvPr id="3" name="Text 1"/>
-          <p:cNvSpPr/>
-          <p:nvPr/>
-        </p:nvSpPr>
-        <p:spPr>
-          <a:xfrm>
-            <a:off x="566928" y="603504"/>
-            <a:ext cx="9509760" cy="685800"/>
-          </a:xfrm>
-          <a:prstGeom prst="rect">
-            <a:avLst/>
-          </a:prstGeom>
-          <a:noFill/>
-          <a:ln/>
-        </p:spPr>
-        <p:txBody>
-          <a:bodyPr wrap="square" lIns="0" tIns="0" rIns="0" bIns="0" rtlCol="0" anchor="ctr"/>
-          <a:lstStyle/>
-          <a:p>
-            <a:pPr indent="0" marL="0">
-              <a:buNone/>
-            </a:pPr>
-            <a:r>
-              <a:rPr lang="en-US" sz="2900" b="1" dirty="0">
-                <a:solidFill>
-                  <a:srgbClr val="0A2F40"/>
-                </a:solidFill>
-                <a:latin typeface="Cambria" pitchFamily="34" charset="0"/>
-                <a:ea typeface="Cambria" pitchFamily="34" charset="-122"/>
-                <a:cs typeface="Cambria" pitchFamily="34" charset="-120"/>
-              </a:rPr>
-              <a:t>B0329+54 — a textbook detection</a:t>
-            </a:r>
-            <a:endParaRPr lang="en-US" sz="2900" dirty="0"/>
-          </a:p>
-        </p:txBody>
-      </p:sp>
-      <p:pic>
-        <p:nvPicPr>
-          <p:cNvPr id="4" name="Image 0" descr="C:\Users\rick\Documents\DSES\Science\Spectrum_Analyzer_PY\reports\assets\DSES_Logo_Compact_Teal.png">    </p:cNvPr>
-          <p:cNvPicPr>
-            <a:picLocks noChangeAspect="1"/>
-          </p:cNvPicPr>
-          <p:nvPr/>
-        </p:nvPicPr>
-        <p:blipFill>
-          <a:blip r:embed="rId1"/>
-          <a:stretch>
-            <a:fillRect/>
-          </a:stretch>
-        </p:blipFill>
-        <p:spPr>
-          <a:xfrm>
-            <a:off x="10533888" y="384048"/>
-            <a:ext cx="1097280" cy="406908"/>
-          </a:xfrm>
-          <a:prstGeom prst="rect">
-            <a:avLst/>
-          </a:prstGeom>
-        </p:spPr>
-      </p:pic>
-      <p:sp>
-        <p:nvSpPr>
-          <p:cNvPr id="5" name="Text 2"/>
-          <p:cNvSpPr/>
-          <p:nvPr/>
-        </p:nvSpPr>
-        <p:spPr>
-          <a:xfrm>
-            <a:off x="566928" y="6473952"/>
-            <a:ext cx="5943600" cy="228600"/>
-          </a:xfrm>
-          <a:prstGeom prst="rect">
-            <a:avLst/>
-          </a:prstGeom>
-          <a:noFill/>
-          <a:ln/>
-        </p:spPr>
-        <p:txBody>
-          <a:bodyPr wrap="square" lIns="0" tIns="0" rIns="0" bIns="0" rtlCol="0" anchor="ctr"/>
-          <a:lstStyle/>
-          <a:p>
-            <a:pPr indent="0" marL="0">
-              <a:buNone/>
-            </a:pPr>
-            <a:r>
-              <a:rPr lang="en-US" sz="850" dirty="0">
-                <a:solidFill>
-                  <a:srgbClr val="6B7A82"/>
-                </a:solidFill>
-                <a:latin typeface="Calibri" pitchFamily="34" charset="0"/>
-                <a:ea typeface="Calibri" pitchFamily="34" charset="-122"/>
-                <a:cs typeface="Calibri" pitchFamily="34" charset="-120"/>
-              </a:rPr>
-              <a:t>Lowering the Barrier to Radio Astronomy  •  DSES  •  SARA 2026</a:t>
-            </a:r>
-            <a:endParaRPr lang="en-US" sz="850" dirty="0"/>
-          </a:p>
-        </p:txBody>
-      </p:sp>
-      <p:sp>
-        <p:nvSpPr>
-          <p:cNvPr id="6" name="Text 3"/>
-          <p:cNvSpPr/>
-          <p:nvPr/>
-        </p:nvSpPr>
-        <p:spPr>
-          <a:xfrm>
-            <a:off x="11475720" y="6473952"/>
-            <a:ext cx="457200" cy="228600"/>
-          </a:xfrm>
-          <a:prstGeom prst="rect">
-            <a:avLst/>
-          </a:prstGeom>
-          <a:noFill/>
-          <a:ln/>
-        </p:spPr>
-        <p:txBody>
-          <a:bodyPr wrap="square" lIns="0" tIns="0" rIns="0" bIns="0" rtlCol="0" anchor="ctr"/>
-          <a:lstStyle/>
-          <a:p>
-            <a:pPr algn="r" indent="0" marL="0">
-              <a:buNone/>
-            </a:pPr>
-            <a:r>
-              <a:rPr lang="en-US" sz="850" dirty="0">
-                <a:solidFill>
-                  <a:srgbClr val="6B7A82"/>
-                </a:solidFill>
-                <a:latin typeface="Calibri" pitchFamily="34" charset="0"/>
-                <a:ea typeface="Calibri" pitchFamily="34" charset="-122"/>
-                <a:cs typeface="Calibri" pitchFamily="34" charset="-120"/>
-              </a:rPr>
-              <a:t>7</a:t>
-            </a:r>
-            <a:endParaRPr lang="en-US" sz="850" dirty="0"/>
-          </a:p>
-        </p:txBody>
-      </p:sp>
-      <p:sp>
-        <p:nvSpPr>
-          <p:cNvPr id="7" name="Shape 4"/>
-          <p:cNvSpPr/>
-          <p:nvPr/>
-        </p:nvSpPr>
-        <p:spPr>
-          <a:xfrm>
-            <a:off x="5568696" y="1572768"/>
-            <a:ext cx="6163056" cy="4389772"/>
-          </a:xfrm>
-          <a:prstGeom prst="rect">
-            <a:avLst/>
-          </a:prstGeom>
-          <a:solidFill>
-            <a:srgbClr val="FFFFFF"/>
-          </a:solidFill>
-          <a:ln w="12700">
-            <a:solidFill>
-              <a:srgbClr val="D7E3EA"/>
-            </a:solidFill>
-            <a:prstDash val="solid"/>
-          </a:ln>
-          <a:effectLst>
-            <a:outerShdw sx="100000" sy="100000" kx="0" ky="0" algn="bl" rotWithShape="0" blurRad="76200" dist="25400" dir="5400000">
-              <a:srgbClr val="9AACB5">
-                <a:alpha val="35000"/>
-              </a:srgbClr>
-            </a:outerShdw>
-          </a:effectLst>
-        </p:spPr>
-      </p:sp>
-      <p:pic>
-        <p:nvPicPr>
-          <p:cNvPr id="8" name="Image 1" descr="C:\Users\rick\Documents\DSES\Science\Spectrum_Analyzer_PY\reports\haswell-2026-07\figures\B0329+54_prepfold.png">    </p:cNvPr>
-          <p:cNvPicPr>
-            <a:picLocks noChangeAspect="1"/>
-          </p:cNvPicPr>
-          <p:nvPr/>
-        </p:nvPicPr>
-        <p:blipFill>
-          <a:blip r:embed="rId2"/>
-          <a:stretch>
-            <a:fillRect/>
-          </a:stretch>
-        </p:blipFill>
-        <p:spPr>
-          <a:xfrm>
-            <a:off x="5623560" y="1627632"/>
-            <a:ext cx="6053328" cy="4280044"/>
-          </a:xfrm>
-          <a:prstGeom prst="rect">
-            <a:avLst/>
-          </a:prstGeom>
-        </p:spPr>
-      </p:pic>
-      <p:sp>
-        <p:nvSpPr>
-          <p:cNvPr id="9" name="Text 5"/>
-          <p:cNvSpPr/>
-          <p:nvPr/>
-        </p:nvSpPr>
-        <p:spPr>
-          <a:xfrm>
-            <a:off x="5623560" y="5989320"/>
-            <a:ext cx="6053328" cy="274320"/>
-          </a:xfrm>
-          <a:prstGeom prst="rect">
-            <a:avLst/>
-          </a:prstGeom>
-          <a:noFill/>
-          <a:ln/>
-        </p:spPr>
-        <p:txBody>
-          <a:bodyPr wrap="square" lIns="0" tIns="0" rIns="0" bIns="0" rtlCol="0" anchor="ctr"/>
-          <a:lstStyle/>
-          <a:p>
-            <a:pPr algn="ctr" indent="0" marL="0">
-              <a:buNone/>
-            </a:pPr>
-            <a:r>
-              <a:rPr lang="en-US" sz="1050" i="1" dirty="0">
-                <a:solidFill>
-                  <a:srgbClr val="6B7A82"/>
-                </a:solidFill>
-                <a:latin typeface="Calibri" pitchFamily="34" charset="0"/>
-                <a:ea typeface="Calibri" pitchFamily="34" charset="-122"/>
-                <a:cs typeface="Calibri" pitchFamily="34" charset="-120"/>
-              </a:rPr>
-              <a:t>PRESTO prepfold diagnostic — 36.6-minute observation</a:t>
-            </a:r>
-            <a:endParaRPr lang="en-US" sz="1050" dirty="0"/>
-          </a:p>
-        </p:txBody>
-      </p:sp>
-      <p:sp>
-        <p:nvSpPr>
-          <p:cNvPr id="10" name="Text 6"/>
-          <p:cNvSpPr/>
-          <p:nvPr/>
-        </p:nvSpPr>
-        <p:spPr>
-          <a:xfrm>
-            <a:off x="566928" y="1691640"/>
-            <a:ext cx="4480560" cy="914400"/>
-          </a:xfrm>
-          <a:prstGeom prst="rect">
-            <a:avLst/>
-          </a:prstGeom>
-          <a:noFill/>
-          <a:ln/>
-        </p:spPr>
-        <p:txBody>
-          <a:bodyPr wrap="square" lIns="0" tIns="0" rIns="0" bIns="0" rtlCol="0" anchor="ctr"/>
-          <a:lstStyle/>
-          <a:p>
-            <a:pPr indent="0" marL="0">
-              <a:buNone/>
-            </a:pPr>
-            <a:r>
-              <a:rPr lang="en-US" sz="6000" b="1" dirty="0">
-                <a:solidFill>
-                  <a:srgbClr val="156082"/>
-                </a:solidFill>
-                <a:latin typeface="Cambria" pitchFamily="34" charset="0"/>
-                <a:ea typeface="Cambria" pitchFamily="34" charset="-122"/>
-                <a:cs typeface="Cambria" pitchFamily="34" charset="-120"/>
-              </a:rPr>
-              <a:t>20.6 σ</a:t>
-            </a:r>
-            <a:endParaRPr lang="en-US" sz="6000" dirty="0"/>
-          </a:p>
-        </p:txBody>
-      </p:sp>
-      <p:sp>
-        <p:nvSpPr>
-          <p:cNvPr id="11" name="Text 7"/>
-          <p:cNvSpPr/>
-          <p:nvPr/>
-        </p:nvSpPr>
-        <p:spPr>
-          <a:xfrm>
-            <a:off x="566928" y="2697480"/>
-            <a:ext cx="4480560" cy="320040"/>
-          </a:xfrm>
-          <a:prstGeom prst="rect">
-            <a:avLst/>
-          </a:prstGeom>
-          <a:noFill/>
-          <a:ln/>
-        </p:spPr>
-        <p:txBody>
-          <a:bodyPr wrap="square" lIns="0" tIns="0" rIns="0" bIns="0" rtlCol="0" anchor="ctr"/>
-          <a:lstStyle/>
-          <a:p>
-            <a:pPr indent="0" marL="0">
-              <a:buNone/>
-            </a:pPr>
-            <a:r>
-              <a:rPr lang="en-US" sz="1300" b="1" dirty="0">
-                <a:solidFill>
-                  <a:srgbClr val="B86A18"/>
-                </a:solidFill>
-                <a:latin typeface="Calibri" pitchFamily="34" charset="0"/>
-                <a:ea typeface="Calibri" pitchFamily="34" charset="-122"/>
-                <a:cs typeface="Calibri" pitchFamily="34" charset="-120"/>
-              </a:rPr>
-              <a:t>probability the signal is noise: &lt; 5×10⁻⁹⁰</a:t>
-            </a:r>
-            <a:endParaRPr lang="en-US" sz="1300" dirty="0"/>
-          </a:p>
-        </p:txBody>
-      </p:sp>
-      <p:sp>
-        <p:nvSpPr>
-          <p:cNvPr id="12" name="Text 8"/>
-          <p:cNvSpPr/>
-          <p:nvPr/>
-        </p:nvSpPr>
-        <p:spPr>
-          <a:xfrm>
-            <a:off x="566928" y="3246120"/>
-            <a:ext cx="4663440" cy="2834640"/>
-          </a:xfrm>
-          <a:prstGeom prst="rect">
-            <a:avLst/>
-          </a:prstGeom>
-          <a:noFill/>
-          <a:ln/>
-        </p:spPr>
-        <p:txBody>
-          <a:bodyPr wrap="square" lIns="0" tIns="0" rIns="0" bIns="0" rtlCol="0" anchor="t"/>
-          <a:lstStyle/>
-          <a:p>
-            <a:pPr marL="342900" indent="-342900">
-              <a:spcAft>
-                <a:spcPts val="1000"/>
-              </a:spcAft>
-              <a:buSzPct val="100000"/>
-              <a:buChar char="•"/>
-            </a:pPr>
-            <a:r>
-              <a:rPr lang="en-US" sz="1350" dirty="0">
-                <a:solidFill>
-                  <a:srgbClr val="24343C"/>
-                </a:solidFill>
-                <a:latin typeface="Calibri" pitchFamily="34" charset="0"/>
-                <a:ea typeface="Calibri" pitchFamily="34" charset="-122"/>
-                <a:cs typeface="Calibri" pitchFamily="34" charset="-120"/>
-              </a:rPr>
-              <a:t>The characteristic double-peaked pulse profile, at the catalog period of 714.5 ms</a:t>
-            </a:r>
-            <a:endParaRPr lang="en-US" sz="1350" dirty="0"/>
-          </a:p>
-          <a:p>
-            <a:pPr marL="342900" indent="-342900">
-              <a:spcAft>
-                <a:spcPts val="1000"/>
-              </a:spcAft>
-              <a:buSzPct val="100000"/>
-              <a:buChar char="•"/>
-            </a:pPr>
-            <a:r>
-              <a:rPr lang="en-US" sz="1350" dirty="0">
-                <a:solidFill>
-                  <a:srgbClr val="24343C"/>
-                </a:solidFill>
-                <a:latin typeface="Calibri" pitchFamily="34" charset="0"/>
-                <a:ea typeface="Calibri" pitchFamily="34" charset="-122"/>
-                <a:cs typeface="Calibri" pitchFamily="34" charset="-120"/>
-              </a:rPr>
-              <a:t>Signal persists across the entire 36-minute observation</a:t>
-            </a:r>
-            <a:endParaRPr lang="en-US" sz="1350" dirty="0"/>
-          </a:p>
-          <a:p>
-            <a:pPr marL="342900" indent="-342900">
-              <a:spcAft>
-                <a:spcPts val="1000"/>
-              </a:spcAft>
-              <a:buSzPct val="100000"/>
-              <a:buChar char="•"/>
-            </a:pPr>
-            <a:r>
-              <a:rPr lang="en-US" sz="1350" dirty="0">
-                <a:solidFill>
-                  <a:srgbClr val="24343C"/>
-                </a:solidFill>
-                <a:latin typeface="Calibri" pitchFamily="34" charset="0"/>
-                <a:ea typeface="Calibri" pitchFamily="34" charset="-122"/>
-                <a:cs typeface="Calibri" pitchFamily="34" charset="-120"/>
-              </a:rPr>
-              <a:t>Detection peaks at dispersion measure ≈ 25 — catalog value 26.8 — and falls off toward zero</a:t>
-            </a:r>
-            <a:endParaRPr lang="en-US" sz="1350" dirty="0"/>
-          </a:p>
-          <a:p>
-            <a:pPr marL="342900" indent="-342900">
-              <a:buSzPct val="100000"/>
-              <a:buChar char="•"/>
-            </a:pPr>
-            <a:r>
-              <a:rPr lang="en-US" sz="1350" dirty="0">
-                <a:solidFill>
-                  <a:srgbClr val="24343C"/>
-                </a:solidFill>
-                <a:latin typeface="Calibri" pitchFamily="34" charset="0"/>
-                <a:ea typeface="Calibri" pitchFamily="34" charset="-122"/>
-                <a:cs typeface="Calibri" pitchFamily="34" charset="-120"/>
-              </a:rPr>
-              <a:t>Blind search (period, period-derivative, and DM all searched) converges on the same answer</a:t>
-            </a:r>
-            <a:endParaRPr lang="en-US" sz="1350" dirty="0"/>
-          </a:p>
-        </p:txBody>
-      </p:sp>
-    </p:spTree>
-  </p:cSld>
-  <p:clrMapOvr>
-    <a:masterClrMapping/>
-  </p:clrMapOvr>
-</p:sld>
-</file>
-
 <file path=ppt/slides/slide8.xml><?xml version="1.0" encoding="utf-8"?>
 <p:sld xmlns:a="http://schemas.openxmlformats.org/drawingml/2006/main" xmlns:r="http://schemas.openxmlformats.org/officeDocument/2006/relationships" xmlns:p="http://schemas.openxmlformats.org/presentationml/2006/main">
   <p:cSld name="Slide 8">
@@ -11437,7 +12701,7 @@
                 <a:ea typeface="Cambria" pitchFamily="34" charset="-122"/>
                 <a:cs typeface="Cambria" pitchFamily="34" charset="-120"/>
               </a:rPr>
-              <a:t>B0950+08 — detected, with a lesson inside</a:t>
+              <a:t>B0329+54 — a textbook detection</a:t>
             </a:r>
             <a:endParaRPr lang="en-US" sz="2900" dirty="0"/>
           </a:p>
@@ -11554,7 +12818,7 @@
         <p:spPr>
           <a:xfrm>
             <a:off x="5568696" y="1572768"/>
-            <a:ext cx="6163056" cy="4388103"/>
+            <a:ext cx="6163056" cy="4389772"/>
           </a:xfrm>
           <a:prstGeom prst="rect">
             <a:avLst/>
@@ -11579,7 +12843,7 @@
       </p:sp>
       <p:pic>
         <p:nvPicPr>
-          <p:cNvPr id="8" name="Image 1" descr="C:\Users\rick\Documents\DSES\Science\Spectrum_Analyzer_PY\reports\haswell-2026-07\figures\B0950+08_prepfold.png">    </p:cNvPr>
+          <p:cNvPr id="8" name="Image 1" descr="C:\Users\rick\Documents\DSES\Science\Spectrum_Analyzer_PY\reports\haswell-2026-07\figures\B0329+54_prepfold.png">    </p:cNvPr>
           <p:cNvPicPr>
             <a:picLocks noChangeAspect="1"/>
           </p:cNvPicPr>
@@ -11594,7 +12858,7 @@
         <p:spPr>
           <a:xfrm>
             <a:off x="5623560" y="1627632"/>
-            <a:ext cx="6053328" cy="4278375"/>
+            <a:ext cx="6053328" cy="4280044"/>
           </a:xfrm>
           <a:prstGeom prst="rect">
             <a:avLst/>
@@ -11634,7 +12898,7 @@
                 <a:ea typeface="Calibri" pitchFamily="34" charset="-122"/>
                 <a:cs typeface="Calibri" pitchFamily="34" charset="-120"/>
               </a:rPr>
-              <a:t>Fold at the known 253 ms period — 22.2-minute observation</a:t>
+              <a:t>PRESTO prepfold diagnostic — 36.6-minute observation</a:t>
             </a:r>
             <a:endParaRPr lang="en-US" sz="1050" dirty="0"/>
           </a:p>
@@ -11673,7 +12937,7 @@
                 <a:ea typeface="Cambria" pitchFamily="34" charset="-122"/>
                 <a:cs typeface="Cambria" pitchFamily="34" charset="-120"/>
               </a:rPr>
-              <a:t>~9.7 σ</a:t>
+              <a:t>20.6 σ</a:t>
             </a:r>
             <a:endParaRPr lang="en-US" sz="6000" dirty="0"/>
           </a:p>
@@ -11712,7 +12976,7 @@
                 <a:ea typeface="Calibri" pitchFamily="34" charset="-122"/>
                 <a:cs typeface="Calibri" pitchFamily="34" charset="-120"/>
               </a:rPr>
-              <a:t>probability the signal is noise: &lt; 2×10⁻²²</a:t>
+              <a:t>probability the signal is noise: &lt; 5×10⁻⁹⁰</a:t>
             </a:r>
             <a:endParaRPr lang="en-US" sz="1300" dirty="0"/>
           </a:p>
@@ -11727,7 +12991,7 @@
         <p:spPr>
           <a:xfrm>
             <a:off x="566928" y="3246120"/>
-            <a:ext cx="4663440" cy="2926080"/>
+            <a:ext cx="4663440" cy="2834640"/>
           </a:xfrm>
           <a:prstGeom prst="rect">
             <a:avLst/>
@@ -11747,7 +13011,7 @@
               <a:buChar char="•"/>
             </a:pPr>
             <a:r>
-              <a:rPr lang="en-US" sz="1300" dirty="0">
+              <a:rPr lang="en-US" sz="1350" dirty="0">
                 <a:solidFill>
                   <a:srgbClr val="24343C"/>
                 </a:solidFill>
@@ -11755,9 +13019,9 @@
                 <a:ea typeface="Calibri" pitchFamily="34" charset="-122"/>
                 <a:cs typeface="Calibri" pitchFamily="34" charset="-120"/>
               </a:rPr>
-              <a:t>Clear peak at the pulsar’s 253 ms period when folded at the known ephemeris</a:t>
-            </a:r>
-            <a:endParaRPr lang="en-US" sz="1300" dirty="0"/>
+              <a:t>The characteristic double-peaked pulse profile, at the catalog period of 714.5 ms</a:t>
+            </a:r>
+            <a:endParaRPr lang="en-US" sz="1350" dirty="0"/>
           </a:p>
           <a:p>
             <a:pPr marL="342900" indent="-342900">
@@ -11768,7 +13032,7 @@
               <a:buChar char="•"/>
             </a:pPr>
             <a:r>
-              <a:rPr lang="en-US" sz="1300" dirty="0">
+              <a:rPr lang="en-US" sz="1350" dirty="0">
                 <a:solidFill>
                   <a:srgbClr val="24343C"/>
                 </a:solidFill>
@@ -11776,9 +13040,9 @@
                 <a:ea typeface="Calibri" pitchFamily="34" charset="-122"/>
                 <a:cs typeface="Calibri" pitchFamily="34" charset="-120"/>
               </a:rPr>
-              <a:t>The lesson: with only 20 MHz at 420 MHz, its tiny dispersion measure (2.97) is indistinguishable from zero — a blind search “slides” to DM 0 and superficially resembles interference</a:t>
-            </a:r>
-            <a:endParaRPr lang="en-US" sz="1300" dirty="0"/>
+              <a:t>Signal persists across the entire 36-minute observation</a:t>
+            </a:r>
+            <a:endParaRPr lang="en-US" sz="1350" dirty="0"/>
           </a:p>
           <a:p>
             <a:pPr marL="342900" indent="-342900">
@@ -11789,7 +13053,7 @@
               <a:buChar char="•"/>
             </a:pPr>
             <a:r>
-              <a:rPr lang="en-US" sz="1300" dirty="0">
+              <a:rPr lang="en-US" sz="1350" dirty="0">
                 <a:solidFill>
                   <a:srgbClr val="24343C"/>
                 </a:solidFill>
@@ -11797,9 +13061,9 @@
                 <a:ea typeface="Calibri" pitchFamily="34" charset="-122"/>
                 <a:cs typeface="Calibri" pitchFamily="34" charset="-120"/>
               </a:rPr>
-              <a:t>Folding at the known period settles it: the periodicity is unmistakably the pulsar</a:t>
-            </a:r>
-            <a:endParaRPr lang="en-US" sz="1300" dirty="0"/>
+              <a:t>Detection peaks at dispersion measure ≈ 25 — catalog value 26.8 — and falls off toward zero</a:t>
+            </a:r>
+            <a:endParaRPr lang="en-US" sz="1350" dirty="0"/>
           </a:p>
           <a:p>
             <a:pPr marL="342900" indent="-342900">
@@ -11807,7 +13071,7 @@
               <a:buChar char="•"/>
             </a:pPr>
             <a:r>
-              <a:rPr lang="en-US" sz="1300" dirty="0">
+              <a:rPr lang="en-US" sz="1350" dirty="0">
                 <a:solidFill>
                   <a:srgbClr val="24343C"/>
                 </a:solidFill>
@@ -11815,9 +13079,9 @@
                 <a:ea typeface="Calibri" pitchFamily="34" charset="-122"/>
                 <a:cs typeface="Calibri" pitchFamily="34" charset="-120"/>
               </a:rPr>
-              <a:t>A strong scintillator — a longer follow-up observation is planned</a:t>
-            </a:r>
-            <a:endParaRPr lang="en-US" sz="1300" dirty="0"/>
+              <a:t>Blind search (period, period-derivative, and DM all searched) converges on the same answer</a:t>
+            </a:r>
+            <a:endParaRPr lang="en-US" sz="1350" dirty="0"/>
           </a:p>
         </p:txBody>
       </p:sp>
@@ -11886,7 +13150,7 @@
                 <a:ea typeface="Calibri" pitchFamily="34" charset="-122"/>
                 <a:cs typeface="Calibri" pitchFamily="34" charset="-120"/>
               </a:rPr>
-              <a:t>VERIFICATION</a:t>
+              <a:t>RESULTS</a:t>
             </a:r>
             <a:endParaRPr lang="en-US" sz="1100" dirty="0"/>
           </a:p>
@@ -11925,7 +13189,7 @@
                 <a:ea typeface="Cambria" pitchFamily="34" charset="-122"/>
                 <a:cs typeface="Cambria" pitchFamily="34" charset="-120"/>
               </a:rPr>
-              <a:t>Real — and independently reproducible</a:t>
+              <a:t>B0950+08 — detected, with a lesson inside</a:t>
             </a:r>
             <a:endParaRPr lang="en-US" sz="2900" dirty="0"/>
           </a:p>
@@ -12041,74 +13305,181 @@
         </p:nvSpPr>
         <p:spPr>
           <a:xfrm>
-            <a:off x="566928" y="1554480"/>
-            <a:ext cx="5394960" cy="3977640"/>
-          </a:xfrm>
-          <a:prstGeom prst="roundRect">
-            <a:avLst>
-              <a:gd name="adj" fmla="val 1839"/>
-            </a:avLst>
+            <a:off x="5568696" y="1572768"/>
+            <a:ext cx="6163056" cy="4388103"/>
+          </a:xfrm>
+          <a:prstGeom prst="rect">
+            <a:avLst/>
           </a:prstGeom>
           <a:solidFill>
-            <a:srgbClr val="EFF4F7"/>
+            <a:srgbClr val="FFFFFF"/>
           </a:solidFill>
-          <a:ln w="9525">
+          <a:ln w="12700">
             <a:solidFill>
               <a:srgbClr val="D7E3EA"/>
             </a:solidFill>
             <a:prstDash val="solid"/>
           </a:ln>
-        </p:spPr>
-      </p:sp>
-      <p:sp>
-        <p:nvSpPr>
-          <p:cNvPr id="8" name="Text 5"/>
-          <p:cNvSpPr/>
-          <p:nvPr/>
-        </p:nvSpPr>
-        <p:spPr>
-          <a:xfrm>
-            <a:off x="841248" y="1783080"/>
-            <a:ext cx="4846320" cy="365760"/>
-          </a:xfrm>
-          <a:prstGeom prst="rect">
-            <a:avLst/>
-          </a:prstGeom>
-          <a:noFill/>
-          <a:ln/>
-        </p:spPr>
-        <p:txBody>
-          <a:bodyPr wrap="square" lIns="0" tIns="0" rIns="0" bIns="0" rtlCol="0" anchor="ctr"/>
-          <a:lstStyle/>
-          <a:p>
-            <a:pPr indent="0" marL="0">
-              <a:buNone/>
-            </a:pPr>
-            <a:r>
-              <a:rPr lang="en-US" sz="1700" b="1" dirty="0">
-                <a:solidFill>
-                  <a:srgbClr val="0A2F40"/>
+          <a:effectLst>
+            <a:outerShdw sx="100000" sy="100000" kx="0" ky="0" algn="bl" rotWithShape="0" blurRad="76200" dist="25400" dir="5400000">
+              <a:srgbClr val="9AACB5">
+                <a:alpha val="35000"/>
+              </a:srgbClr>
+            </a:outerShdw>
+          </a:effectLst>
+        </p:spPr>
+      </p:sp>
+      <p:pic>
+        <p:nvPicPr>
+          <p:cNvPr id="8" name="Image 1" descr="C:\Users\rick\Documents\DSES\Science\Spectrum_Analyzer_PY\reports\haswell-2026-07\figures\B0950+08_prepfold.png">    </p:cNvPr>
+          <p:cNvPicPr>
+            <a:picLocks noChangeAspect="1"/>
+          </p:cNvPicPr>
+          <p:nvPr/>
+        </p:nvPicPr>
+        <p:blipFill>
+          <a:blip r:embed="rId2"/>
+          <a:stretch>
+            <a:fillRect/>
+          </a:stretch>
+        </p:blipFill>
+        <p:spPr>
+          <a:xfrm>
+            <a:off x="5623560" y="1627632"/>
+            <a:ext cx="6053328" cy="4278375"/>
+          </a:xfrm>
+          <a:prstGeom prst="rect">
+            <a:avLst/>
+          </a:prstGeom>
+        </p:spPr>
+      </p:pic>
+      <p:sp>
+        <p:nvSpPr>
+          <p:cNvPr id="9" name="Text 5"/>
+          <p:cNvSpPr/>
+          <p:nvPr/>
+        </p:nvSpPr>
+        <p:spPr>
+          <a:xfrm>
+            <a:off x="5623560" y="5989320"/>
+            <a:ext cx="6053328" cy="274320"/>
+          </a:xfrm>
+          <a:prstGeom prst="rect">
+            <a:avLst/>
+          </a:prstGeom>
+          <a:noFill/>
+          <a:ln/>
+        </p:spPr>
+        <p:txBody>
+          <a:bodyPr wrap="square" lIns="0" tIns="0" rIns="0" bIns="0" rtlCol="0" anchor="ctr"/>
+          <a:lstStyle/>
+          <a:p>
+            <a:pPr algn="ctr" indent="0" marL="0">
+              <a:buNone/>
+            </a:pPr>
+            <a:r>
+              <a:rPr lang="en-US" sz="1050" i="1" dirty="0">
+                <a:solidFill>
+                  <a:srgbClr val="6B7A82"/>
+                </a:solidFill>
+                <a:latin typeface="Calibri" pitchFamily="34" charset="0"/>
+                <a:ea typeface="Calibri" pitchFamily="34" charset="-122"/>
+                <a:cs typeface="Calibri" pitchFamily="34" charset="-120"/>
+              </a:rPr>
+              <a:t>Fold at the known 253 ms period — 22.2-minute observation</a:t>
+            </a:r>
+            <a:endParaRPr lang="en-US" sz="1050" dirty="0"/>
+          </a:p>
+        </p:txBody>
+      </p:sp>
+      <p:sp>
+        <p:nvSpPr>
+          <p:cNvPr id="10" name="Text 6"/>
+          <p:cNvSpPr/>
+          <p:nvPr/>
+        </p:nvSpPr>
+        <p:spPr>
+          <a:xfrm>
+            <a:off x="566928" y="1691640"/>
+            <a:ext cx="4480560" cy="914400"/>
+          </a:xfrm>
+          <a:prstGeom prst="rect">
+            <a:avLst/>
+          </a:prstGeom>
+          <a:noFill/>
+          <a:ln/>
+        </p:spPr>
+        <p:txBody>
+          <a:bodyPr wrap="square" lIns="0" tIns="0" rIns="0" bIns="0" rtlCol="0" anchor="ctr"/>
+          <a:lstStyle/>
+          <a:p>
+            <a:pPr indent="0" marL="0">
+              <a:buNone/>
+            </a:pPr>
+            <a:r>
+              <a:rPr lang="en-US" sz="6000" b="1" dirty="0">
+                <a:solidFill>
+                  <a:srgbClr val="156082"/>
                 </a:solidFill>
                 <a:latin typeface="Cambria" pitchFamily="34" charset="0"/>
                 <a:ea typeface="Cambria" pitchFamily="34" charset="-122"/>
                 <a:cs typeface="Cambria" pitchFamily="34" charset="-120"/>
               </a:rPr>
-              <a:t>Dispersion: the celestial fingerprint</a:t>
-            </a:r>
-            <a:endParaRPr lang="en-US" sz="1700" dirty="0"/>
-          </a:p>
-        </p:txBody>
-      </p:sp>
-      <p:sp>
-        <p:nvSpPr>
-          <p:cNvPr id="9" name="Text 6"/>
-          <p:cNvSpPr/>
-          <p:nvPr/>
-        </p:nvSpPr>
-        <p:spPr>
-          <a:xfrm>
-            <a:off x="841248" y="2286000"/>
-            <a:ext cx="4846320" cy="3017520"/>
+              <a:t>~9.7 σ</a:t>
+            </a:r>
+            <a:endParaRPr lang="en-US" sz="6000" dirty="0"/>
+          </a:p>
+        </p:txBody>
+      </p:sp>
+      <p:sp>
+        <p:nvSpPr>
+          <p:cNvPr id="11" name="Text 7"/>
+          <p:cNvSpPr/>
+          <p:nvPr/>
+        </p:nvSpPr>
+        <p:spPr>
+          <a:xfrm>
+            <a:off x="566928" y="2697480"/>
+            <a:ext cx="4480560" cy="320040"/>
+          </a:xfrm>
+          <a:prstGeom prst="rect">
+            <a:avLst/>
+          </a:prstGeom>
+          <a:noFill/>
+          <a:ln/>
+        </p:spPr>
+        <p:txBody>
+          <a:bodyPr wrap="square" lIns="0" tIns="0" rIns="0" bIns="0" rtlCol="0" anchor="ctr"/>
+          <a:lstStyle/>
+          <a:p>
+            <a:pPr indent="0" marL="0">
+              <a:buNone/>
+            </a:pPr>
+            <a:r>
+              <a:rPr lang="en-US" sz="1300" b="1" dirty="0">
+                <a:solidFill>
+                  <a:srgbClr val="B86A18"/>
+                </a:solidFill>
+                <a:latin typeface="Calibri" pitchFamily="34" charset="0"/>
+                <a:ea typeface="Calibri" pitchFamily="34" charset="-122"/>
+                <a:cs typeface="Calibri" pitchFamily="34" charset="-120"/>
+              </a:rPr>
+              <a:t>probability the signal is noise: &lt; 2×10⁻²²</a:t>
+            </a:r>
+            <a:endParaRPr lang="en-US" sz="1300" dirty="0"/>
+          </a:p>
+        </p:txBody>
+      </p:sp>
+      <p:sp>
+        <p:nvSpPr>
+          <p:cNvPr id="12" name="Text 8"/>
+          <p:cNvSpPr/>
+          <p:nvPr/>
+        </p:nvSpPr>
+        <p:spPr>
+          <a:xfrm>
+            <a:off x="566928" y="3246120"/>
+            <a:ext cx="4663440" cy="2926080"/>
           </a:xfrm>
           <a:prstGeom prst="rect">
             <a:avLst/>
@@ -12122,7 +13493,7 @@
           <a:p>
             <a:pPr marL="342900" indent="-342900">
               <a:spcAft>
-                <a:spcPts val="800"/>
+                <a:spcPts val="1000"/>
               </a:spcAft>
               <a:buSzPct val="100000"/>
               <a:buChar char="•"/>
@@ -12136,14 +13507,14 @@
                 <a:ea typeface="Calibri" pitchFamily="34" charset="-122"/>
                 <a:cs typeface="Calibri" pitchFamily="34" charset="-120"/>
               </a:rPr>
-              <a:t>Interstellar plasma delays lower frequencies — a sweep imposed by light-years of travel</a:t>
+              <a:t>Clear peak at the pulsar’s 253 ms period when folded at the known ephemeris</a:t>
             </a:r>
             <a:endParaRPr lang="en-US" sz="1300" dirty="0"/>
           </a:p>
           <a:p>
             <a:pPr marL="342900" indent="-342900">
               <a:spcAft>
-                <a:spcPts val="800"/>
+                <a:spcPts val="1000"/>
               </a:spcAft>
               <a:buSzPct val="100000"/>
               <a:buChar char="•"/>
@@ -12157,14 +13528,14 @@
                 <a:ea typeface="Calibri" pitchFamily="34" charset="-122"/>
                 <a:cs typeface="Calibri" pitchFamily="34" charset="-120"/>
               </a:rPr>
-              <a:t>Detection strength peaks at the catalog dispersion measure and falls toward zero</a:t>
+              <a:t>The lesson: with only 20 MHz at 420 MHz, its tiny dispersion measure (2.97) is indistinguishable from zero — a blind search “slides” to DM 0 and superficially resembles interference</a:t>
             </a:r>
             <a:endParaRPr lang="en-US" sz="1300" dirty="0"/>
           </a:p>
           <a:p>
             <a:pPr marL="342900" indent="-342900">
               <a:spcAft>
-                <a:spcPts val="800"/>
+                <a:spcPts val="1000"/>
               </a:spcAft>
               <a:buSzPct val="100000"/>
               <a:buChar char="•"/>
@@ -12178,7 +13549,7 @@
                 <a:ea typeface="Calibri" pitchFamily="34" charset="-122"/>
                 <a:cs typeface="Calibri" pitchFamily="34" charset="-120"/>
               </a:rPr>
-              <a:t>Terrestrial interference shows no dispersion at all</a:t>
+              <a:t>Folding at the known period settles it: the periodicity is unmistakably the pulsar</a:t>
             </a:r>
             <a:endParaRPr lang="en-US" sz="1300" dirty="0"/>
           </a:p>
@@ -12188,327 +13559,17 @@
               <a:buChar char="•"/>
             </a:pPr>
             <a:r>
-              <a:rPr lang="en-US" sz="1300" b="1" dirty="0">
-                <a:solidFill>
-                  <a:srgbClr val="156082"/>
-                </a:solidFill>
-                <a:latin typeface="Calibri" pitchFamily="34" charset="0"/>
-                <a:ea typeface="Calibri" pitchFamily="34" charset="-122"/>
-                <a:cs typeface="Calibri" pitchFamily="34" charset="-120"/>
-              </a:rPr>
-              <a:t>One curve separates a genuine pulsar from RFI</a:t>
+              <a:rPr lang="en-US" sz="1300" dirty="0">
+                <a:solidFill>
+                  <a:srgbClr val="24343C"/>
+                </a:solidFill>
+                <a:latin typeface="Calibri" pitchFamily="34" charset="0"/>
+                <a:ea typeface="Calibri" pitchFamily="34" charset="-122"/>
+                <a:cs typeface="Calibri" pitchFamily="34" charset="-120"/>
+              </a:rPr>
+              <a:t>A strong scintillator — a longer follow-up observation is planned</a:t>
             </a:r>
             <a:endParaRPr lang="en-US" sz="1300" dirty="0"/>
-          </a:p>
-        </p:txBody>
-      </p:sp>
-      <p:sp>
-        <p:nvSpPr>
-          <p:cNvPr id="10" name="Shape 7"/>
-          <p:cNvSpPr/>
-          <p:nvPr/>
-        </p:nvSpPr>
-        <p:spPr>
-          <a:xfrm>
-            <a:off x="6217920" y="1554480"/>
-            <a:ext cx="5394960" cy="3977640"/>
-          </a:xfrm>
-          <a:prstGeom prst="roundRect">
-            <a:avLst>
-              <a:gd name="adj" fmla="val 1839"/>
-            </a:avLst>
-          </a:prstGeom>
-          <a:solidFill>
-            <a:srgbClr val="EFF4F7"/>
-          </a:solidFill>
-          <a:ln w="9525">
-            <a:solidFill>
-              <a:srgbClr val="D7E3EA"/>
-            </a:solidFill>
-            <a:prstDash val="solid"/>
-          </a:ln>
-        </p:spPr>
-      </p:sp>
-      <p:sp>
-        <p:nvSpPr>
-          <p:cNvPr id="11" name="Text 8"/>
-          <p:cNvSpPr/>
-          <p:nvPr/>
-        </p:nvSpPr>
-        <p:spPr>
-          <a:xfrm>
-            <a:off x="6492240" y="1783080"/>
-            <a:ext cx="4846320" cy="365760"/>
-          </a:xfrm>
-          <a:prstGeom prst="rect">
-            <a:avLst/>
-          </a:prstGeom>
-          <a:noFill/>
-          <a:ln/>
-        </p:spPr>
-        <p:txBody>
-          <a:bodyPr wrap="square" lIns="0" tIns="0" rIns="0" bIns="0" rtlCol="0" anchor="ctr"/>
-          <a:lstStyle/>
-          <a:p>
-            <a:pPr indent="0" marL="0">
-              <a:buNone/>
-            </a:pPr>
-            <a:r>
-              <a:rPr lang="en-US" sz="1700" b="1" dirty="0">
-                <a:solidFill>
-                  <a:srgbClr val="0A2F40"/>
-                </a:solidFill>
-                <a:latin typeface="Cambria" pitchFamily="34" charset="0"/>
-                <a:ea typeface="Cambria" pitchFamily="34" charset="-122"/>
-                <a:cs typeface="Cambria" pitchFamily="34" charset="-120"/>
-              </a:rPr>
-              <a:t>Two platforms, two toolchains, one answer</a:t>
-            </a:r>
-            <a:endParaRPr lang="en-US" sz="1700" dirty="0"/>
-          </a:p>
-        </p:txBody>
-      </p:sp>
-      <p:sp>
-        <p:nvSpPr>
-          <p:cNvPr id="12" name="Text 9"/>
-          <p:cNvSpPr/>
-          <p:nvPr/>
-        </p:nvSpPr>
-        <p:spPr>
-          <a:xfrm>
-            <a:off x="6492240" y="2286000"/>
-            <a:ext cx="4846320" cy="1463040"/>
-          </a:xfrm>
-          <a:prstGeom prst="rect">
-            <a:avLst/>
-          </a:prstGeom>
-          <a:noFill/>
-          <a:ln/>
-        </p:spPr>
-        <p:txBody>
-          <a:bodyPr wrap="square" lIns="0" tIns="0" rIns="0" bIns="0" rtlCol="0" anchor="t"/>
-          <a:lstStyle/>
-          <a:p>
-            <a:pPr marL="342900" indent="-342900">
-              <a:spcAft>
-                <a:spcPts val="800"/>
-              </a:spcAft>
-              <a:buSzPct val="100000"/>
-              <a:buChar char="•"/>
-            </a:pPr>
-            <a:r>
-              <a:rPr lang="en-US" sz="1300" dirty="0">
-                <a:solidFill>
-                  <a:srgbClr val="24343C"/>
-                </a:solidFill>
-                <a:latin typeface="Calibri" pitchFamily="34" charset="0"/>
-                <a:ea typeface="Calibri" pitchFamily="34" charset="-122"/>
-                <a:cs typeface="Calibri" pitchFamily="34" charset="-120"/>
-              </a:rPr>
-              <a:t>macOS — PRESTO v5.0.2, re-run on v6.0.0</a:t>
-            </a:r>
-            <a:endParaRPr lang="en-US" sz="1300" dirty="0"/>
-          </a:p>
-          <a:p>
-            <a:pPr marL="342900" indent="-342900">
-              <a:spcAft>
-                <a:spcPts val="800"/>
-              </a:spcAft>
-              <a:buSzPct val="100000"/>
-              <a:buChar char="•"/>
-            </a:pPr>
-            <a:r>
-              <a:rPr lang="en-US" sz="1300" dirty="0">
-                <a:solidFill>
-                  <a:srgbClr val="24343C"/>
-                </a:solidFill>
-                <a:latin typeface="Calibri" pitchFamily="34" charset="0"/>
-                <a:ea typeface="Calibri" pitchFamily="34" charset="-122"/>
-                <a:cs typeface="Calibri" pitchFamily="34" charset="-120"/>
-              </a:rPr>
-              <a:t>Windows — PRESTO v6.0.0 under WSL (a new DSES capability)</a:t>
-            </a:r>
-            <a:endParaRPr lang="en-US" sz="1300" dirty="0"/>
-          </a:p>
-          <a:p>
-            <a:pPr marL="342900" indent="-342900">
-              <a:buSzPct val="100000"/>
-              <a:buChar char="•"/>
-            </a:pPr>
-            <a:r>
-              <a:rPr lang="en-US" sz="1300" dirty="0">
-                <a:solidFill>
-                  <a:srgbClr val="24343C"/>
-                </a:solidFill>
-                <a:latin typeface="Calibri" pitchFamily="34" charset="0"/>
-                <a:ea typeface="Calibri" pitchFamily="34" charset="-122"/>
-                <a:cs typeface="Calibri" pitchFamily="34" charset="-120"/>
-              </a:rPr>
-              <a:t>Identical fold commands, independently built stacks</a:t>
-            </a:r>
-            <a:endParaRPr lang="en-US" sz="1300" dirty="0"/>
-          </a:p>
-        </p:txBody>
-      </p:sp>
-      <p:sp>
-        <p:nvSpPr>
-          <p:cNvPr id="13" name="Shape 10"/>
-          <p:cNvSpPr/>
-          <p:nvPr/>
-        </p:nvSpPr>
-        <p:spPr>
-          <a:xfrm>
-            <a:off x="6492240" y="3977640"/>
-            <a:ext cx="4846320" cy="1234440"/>
-          </a:xfrm>
-          <a:prstGeom prst="roundRect">
-            <a:avLst>
-              <a:gd name="adj" fmla="val 5926"/>
-            </a:avLst>
-          </a:prstGeom>
-          <a:solidFill>
-            <a:srgbClr val="FFFFFF"/>
-          </a:solidFill>
-          <a:ln w="9525">
-            <a:solidFill>
-              <a:srgbClr val="D7E3EA"/>
-            </a:solidFill>
-            <a:prstDash val="solid"/>
-          </a:ln>
-        </p:spPr>
-      </p:sp>
-      <p:sp>
-        <p:nvSpPr>
-          <p:cNvPr id="14" name="Text 11"/>
-          <p:cNvSpPr/>
-          <p:nvPr/>
-        </p:nvSpPr>
-        <p:spPr>
-          <a:xfrm>
-            <a:off x="6720840" y="4069080"/>
-            <a:ext cx="4480560" cy="1051560"/>
-          </a:xfrm>
-          <a:prstGeom prst="rect">
-            <a:avLst/>
-          </a:prstGeom>
-          <a:noFill/>
-          <a:ln/>
-        </p:spPr>
-        <p:txBody>
-          <a:bodyPr wrap="square" lIns="0" tIns="0" rIns="0" bIns="0" rtlCol="0" anchor="ctr"/>
-          <a:lstStyle/>
-          <a:p>
-            <a:pPr indent="0" marL="0">
-              <a:buNone/>
-            </a:pPr>
-            <a:r>
-              <a:rPr lang="en-US" sz="1100" dirty="0">
-                <a:solidFill>
-                  <a:srgbClr val="6B7A82"/>
-                </a:solidFill>
-                <a:latin typeface="Calibri" pitchFamily="34" charset="0"/>
-                <a:ea typeface="Calibri" pitchFamily="34" charset="-122"/>
-                <a:cs typeface="Calibri" pitchFamily="34" charset="-120"/>
-              </a:rPr>
-              <a:t>B0329+54 probability-of-noise
-</a:t>
-            </a:r>
-            <a:pPr indent="0" marL="0">
-              <a:buNone/>
-            </a:pPr>
-            <a:r>
-              <a:rPr lang="en-US" sz="1900" b="1" dirty="0">
-                <a:solidFill>
-                  <a:srgbClr val="156082"/>
-                </a:solidFill>
-                <a:latin typeface="Calibri" pitchFamily="34" charset="0"/>
-                <a:ea typeface="Calibri" pitchFamily="34" charset="-122"/>
-                <a:cs typeface="Calibri" pitchFamily="34" charset="-120"/>
-              </a:rPr>
-              <a:t>4.49×10⁻⁹⁰</a:t>
-            </a:r>
-            <a:pPr indent="0" marL="0">
-              <a:buNone/>
-            </a:pPr>
-            <a:r>
-              <a:rPr lang="en-US" sz="1100" dirty="0">
-                <a:solidFill>
-                  <a:srgbClr val="24343C"/>
-                </a:solidFill>
-                <a:latin typeface="Calibri" pitchFamily="34" charset="0"/>
-                <a:ea typeface="Calibri" pitchFamily="34" charset="-122"/>
-                <a:cs typeface="Calibri" pitchFamily="34" charset="-120"/>
-              </a:rPr>
-              <a:t>  Windows      </a:t>
-            </a:r>
-            <a:pPr indent="0" marL="0">
-              <a:buNone/>
-            </a:pPr>
-            <a:r>
-              <a:rPr lang="en-US" sz="1900" b="1" dirty="0">
-                <a:solidFill>
-                  <a:srgbClr val="B86A18"/>
-                </a:solidFill>
-                <a:latin typeface="Calibri" pitchFamily="34" charset="0"/>
-                <a:ea typeface="Calibri" pitchFamily="34" charset="-122"/>
-                <a:cs typeface="Calibri" pitchFamily="34" charset="-120"/>
-              </a:rPr>
-              <a:t>4.5×10⁻⁹⁰</a:t>
-            </a:r>
-            <a:pPr indent="0" marL="0">
-              <a:buNone/>
-            </a:pPr>
-            <a:r>
-              <a:rPr lang="en-US" sz="1100" dirty="0">
-                <a:solidFill>
-                  <a:srgbClr val="24343C"/>
-                </a:solidFill>
-                <a:latin typeface="Calibri" pitchFamily="34" charset="0"/>
-                <a:ea typeface="Calibri" pitchFamily="34" charset="-122"/>
-                <a:cs typeface="Calibri" pitchFamily="34" charset="-120"/>
-              </a:rPr>
-              <a:t>  macOS</a:t>
-            </a:r>
-            <a:endParaRPr lang="en-US" sz="1100" dirty="0"/>
-          </a:p>
-        </p:txBody>
-      </p:sp>
-      <p:sp>
-        <p:nvSpPr>
-          <p:cNvPr id="15" name="Text 12"/>
-          <p:cNvSpPr/>
-          <p:nvPr/>
-        </p:nvSpPr>
-        <p:spPr>
-          <a:xfrm>
-            <a:off x="566928" y="5806440"/>
-            <a:ext cx="10972800" cy="548640"/>
-          </a:xfrm>
-          <a:prstGeom prst="rect">
-            <a:avLst/>
-          </a:prstGeom>
-          <a:noFill/>
-          <a:ln/>
-        </p:spPr>
-        <p:txBody>
-          <a:bodyPr wrap="square" lIns="0" tIns="0" rIns="0" bIns="0" rtlCol="0" anchor="t"/>
-          <a:lstStyle/>
-          <a:p>
-            <a:pPr indent="0" marL="0">
-              <a:buNone/>
-            </a:pPr>
-            <a:r>
-              <a:rPr lang="en-US" sz="1250" i="1" dirty="0">
-                <a:solidFill>
-                  <a:srgbClr val="6B7A82"/>
-                </a:solidFill>
-                <a:latin typeface="Calibri" pitchFamily="34" charset="0"/>
-                <a:ea typeface="Calibri" pitchFamily="34" charset="-122"/>
-                <a:cs typeface="Calibri" pitchFamily="34" charset="-120"/>
-              </a:rPr>
-              <a:t>Every fold now produces a standardized PDF diagnostic stored beside the recording — validation minutes after capture, on whichever machine is at hand.</a:t>
-            </a:r>
-            <a:endParaRPr lang="en-US" sz="1250" dirty="0"/>
           </a:p>
         </p:txBody>
       </p:sp>

--- a/reports/sara-2026/Lowering_the_Barrier_to_Radio_Astronomy_SARA_2026.pptx
+++ b/reports/sara-2026/Lowering_the_Barrier_to_Radio_Astronomy_SARA_2026.pptx
@@ -1131,7 +1131,7 @@
           <a:p>
             <a:r>
               <a:rPr lang="en-US" dirty="0"/>
-              <a:t>Credit where due: this toolchain produces first-rate, professional results, and Rich and Dan built DSES's pulsar program on it. The point is not that the tools are bad — it's that the barrier to entry kept hands-on observing limited to two people. Hundreds of pages of training material is a real number. The grayed row is the kicker: the professional world in common use runs even deeper — PSRCHIVE is a whole additional suite our two experts didn't even need.</a:t>
+              <a:t>Credit where due: this toolchain produces first-rate, professional results, and Rich and Dan built DSES's pulsar program on it. The point is not that the tools are bad — it's that the barrier to entry kept hands-on observing limited to two people. Hundreds of pages of training material is a real number — this tool list is straight from the DSES pulsar training guide's system-configuration table. The grayed row is the kicker: the professional world in common use runs even deeper — PSRCHIVE is a whole additional suite our two experts didn't even need.</a:t>
             </a:r>
             <a:endParaRPr lang="en-US" dirty="0"/>
           </a:p>
@@ -6988,12 +6988,12 @@
         </p:nvSpPr>
         <p:spPr>
           <a:xfrm>
-            <a:off x="566928" y="2212848"/>
-            <a:ext cx="3886200" cy="1024128"/>
+            <a:off x="566928" y="2103120"/>
+            <a:ext cx="2548128" cy="1078992"/>
           </a:xfrm>
           <a:prstGeom prst="roundRect">
             <a:avLst>
-              <a:gd name="adj" fmla="val 7143"/>
+              <a:gd name="adj" fmla="val 6780"/>
             </a:avLst>
           </a:prstGeom>
           <a:solidFill>
@@ -7015,24 +7015,24 @@
         </p:nvSpPr>
         <p:spPr>
           <a:xfrm>
-            <a:off x="768096" y="2322576"/>
-            <a:ext cx="3483864" cy="292608"/>
-          </a:xfrm>
-          <a:prstGeom prst="rect">
-            <a:avLst/>
-          </a:prstGeom>
-          <a:noFill/>
-          <a:ln/>
-        </p:spPr>
-        <p:txBody>
-          <a:bodyPr wrap="square" lIns="0" tIns="0" rIns="0" bIns="0" rtlCol="0" anchor="ctr"/>
-          <a:lstStyle/>
-          <a:p>
-            <a:pPr indent="0" marL="0">
-              <a:buNone/>
-            </a:pPr>
-            <a:r>
-              <a:rPr lang="en-US" sz="1350" b="1" dirty="0">
+            <a:off x="731520" y="2194560"/>
+            <a:ext cx="2218944" cy="274320"/>
+          </a:xfrm>
+          <a:prstGeom prst="rect">
+            <a:avLst/>
+          </a:prstGeom>
+          <a:noFill/>
+          <a:ln/>
+        </p:spPr>
+        <p:txBody>
+          <a:bodyPr wrap="square" lIns="0" tIns="0" rIns="0" bIns="0" rtlCol="0" anchor="ctr"/>
+          <a:lstStyle/>
+          <a:p>
+            <a:pPr indent="0" marL="0">
+              <a:buNone/>
+            </a:pPr>
+            <a:r>
+              <a:rPr lang="en-US" sz="1150" b="1" dirty="0">
                 <a:solidFill>
                   <a:srgbClr val="0A2F40"/>
                 </a:solidFill>
@@ -7042,7 +7042,7 @@
               </a:rPr>
               <a:t>PRESTO v5 + TEMPO1 + TEMPO2</a:t>
             </a:r>
-            <a:endParaRPr lang="en-US" sz="1350" dirty="0"/>
+            <a:endParaRPr lang="en-US" sz="1150" dirty="0"/>
           </a:p>
         </p:txBody>
       </p:sp>
@@ -7054,8 +7054,8 @@
         </p:nvSpPr>
         <p:spPr>
           <a:xfrm>
-            <a:off x="768096" y="2615184"/>
-            <a:ext cx="3483864" cy="566928"/>
+            <a:off x="731520" y="2487168"/>
+            <a:ext cx="2218944" cy="640080"/>
           </a:xfrm>
           <a:prstGeom prst="rect">
             <a:avLst/>
@@ -7071,7 +7071,7 @@
               <a:buNone/>
             </a:pPr>
             <a:r>
-              <a:rPr lang="en-US" sz="1150" dirty="0">
+              <a:rPr lang="en-US" sz="1000" dirty="0">
                 <a:solidFill>
                   <a:srgbClr val="24343C"/>
                 </a:solidFill>
@@ -7079,9 +7079,9 @@
                 <a:ea typeface="Calibri" pitchFamily="34" charset="-122"/>
                 <a:cs typeface="Calibri" pitchFamily="34" charset="-120"/>
               </a:rPr>
-              <a:t>built from source; hand-edited observatory coordinate and clock files</a:t>
-            </a:r>
-            <a:endParaRPr lang="en-US" sz="1150" dirty="0"/>
+              <a:t>built from source; hand-edited observatory and clock files</a:t>
+            </a:r>
+            <a:endParaRPr lang="en-US" sz="1000" dirty="0"/>
           </a:p>
         </p:txBody>
       </p:sp>
@@ -7093,12 +7093,12 @@
         </p:nvSpPr>
         <p:spPr>
           <a:xfrm>
-            <a:off x="4654296" y="2212848"/>
-            <a:ext cx="3886200" cy="1024128"/>
+            <a:off x="3279648" y="2103120"/>
+            <a:ext cx="2548128" cy="1078992"/>
           </a:xfrm>
           <a:prstGeom prst="roundRect">
             <a:avLst>
-              <a:gd name="adj" fmla="val 7143"/>
+              <a:gd name="adj" fmla="val 6780"/>
             </a:avLst>
           </a:prstGeom>
           <a:solidFill>
@@ -7120,24 +7120,24 @@
         </p:nvSpPr>
         <p:spPr>
           <a:xfrm>
-            <a:off x="4855464" y="2322576"/>
-            <a:ext cx="3483864" cy="292608"/>
-          </a:xfrm>
-          <a:prstGeom prst="rect">
-            <a:avLst/>
-          </a:prstGeom>
-          <a:noFill/>
-          <a:ln/>
-        </p:spPr>
-        <p:txBody>
-          <a:bodyPr wrap="square" lIns="0" tIns="0" rIns="0" bIns="0" rtlCol="0" anchor="ctr"/>
-          <a:lstStyle/>
-          <a:p>
-            <a:pPr indent="0" marL="0">
-              <a:buNone/>
-            </a:pPr>
-            <a:r>
-              <a:rPr lang="en-US" sz="1350" b="1" dirty="0">
+            <a:off x="3444240" y="2194560"/>
+            <a:ext cx="2218944" cy="274320"/>
+          </a:xfrm>
+          <a:prstGeom prst="rect">
+            <a:avLst/>
+          </a:prstGeom>
+          <a:noFill/>
+          <a:ln/>
+        </p:spPr>
+        <p:txBody>
+          <a:bodyPr wrap="square" lIns="0" tIns="0" rIns="0" bIns="0" rtlCol="0" anchor="ctr"/>
+          <a:lstStyle/>
+          <a:p>
+            <a:pPr indent="0" marL="0">
+              <a:buNone/>
+            </a:pPr>
+            <a:r>
+              <a:rPr lang="en-US" sz="1150" b="1" dirty="0">
                 <a:solidFill>
                   <a:srgbClr val="0A2F40"/>
                 </a:solidFill>
@@ -7145,9 +7145,9 @@
                 <a:ea typeface="Calibri" pitchFamily="34" charset="-122"/>
                 <a:cs typeface="Calibri" pitchFamily="34" charset="-120"/>
               </a:rPr>
-              <a:t>GNU Radio</a:t>
-            </a:r>
-            <a:endParaRPr lang="en-US" sz="1350" dirty="0"/>
+              <a:t>RIPTIDE</a:t>
+            </a:r>
+            <a:endParaRPr lang="en-US" sz="1150" dirty="0"/>
           </a:p>
         </p:txBody>
       </p:sp>
@@ -7159,8 +7159,8 @@
         </p:nvSpPr>
         <p:spPr>
           <a:xfrm>
-            <a:off x="4855464" y="2615184"/>
-            <a:ext cx="3483864" cy="566928"/>
+            <a:off x="3444240" y="2487168"/>
+            <a:ext cx="2218944" cy="640080"/>
           </a:xfrm>
           <a:prstGeom prst="rect">
             <a:avLst/>
@@ -7176,7 +7176,7 @@
               <a:buNone/>
             </a:pPr>
             <a:r>
-              <a:rPr lang="en-US" sz="1150" dirty="0">
+              <a:rPr lang="en-US" sz="1000" dirty="0">
                 <a:solidFill>
                   <a:srgbClr val="24343C"/>
                 </a:solidFill>
@@ -7184,9 +7184,9 @@
                 <a:ea typeface="Calibri" pitchFamily="34" charset="-122"/>
                 <a:cs typeface="Calibri" pitchFamily="34" charset="-120"/>
               </a:rPr>
-              <a:t>custom filterbank flowgraphs driving the B210</a:t>
-            </a:r>
-            <a:endParaRPr lang="en-US" sz="1150" dirty="0"/>
+              <a:t>a second, independent pulsar-search code (fast-folding)</a:t>
+            </a:r>
+            <a:endParaRPr lang="en-US" sz="1000" dirty="0"/>
           </a:p>
         </p:txBody>
       </p:sp>
@@ -7198,12 +7198,12 @@
         </p:nvSpPr>
         <p:spPr>
           <a:xfrm>
-            <a:off x="566928" y="3392424"/>
-            <a:ext cx="3886200" cy="1024128"/>
+            <a:off x="5992368" y="2103120"/>
+            <a:ext cx="2548128" cy="1078992"/>
           </a:xfrm>
           <a:prstGeom prst="roundRect">
             <a:avLst>
-              <a:gd name="adj" fmla="val 7143"/>
+              <a:gd name="adj" fmla="val 6780"/>
             </a:avLst>
           </a:prstGeom>
           <a:solidFill>
@@ -7225,24 +7225,24 @@
         </p:nvSpPr>
         <p:spPr>
           <a:xfrm>
-            <a:off x="768096" y="3502152"/>
-            <a:ext cx="3483864" cy="292608"/>
-          </a:xfrm>
-          <a:prstGeom prst="rect">
-            <a:avLst/>
-          </a:prstGeom>
-          <a:noFill/>
-          <a:ln/>
-        </p:spPr>
-        <p:txBody>
-          <a:bodyPr wrap="square" lIns="0" tIns="0" rIns="0" bIns="0" rtlCol="0" anchor="ctr"/>
-          <a:lstStyle/>
-          <a:p>
-            <a:pPr indent="0" marL="0">
-              <a:buNone/>
-            </a:pPr>
-            <a:r>
-              <a:rPr lang="en-US" sz="1350" b="1" dirty="0">
+            <a:off x="6156960" y="2194560"/>
+            <a:ext cx="2218944" cy="274320"/>
+          </a:xfrm>
+          <a:prstGeom prst="rect">
+            <a:avLst/>
+          </a:prstGeom>
+          <a:noFill/>
+          <a:ln/>
+        </p:spPr>
+        <p:txBody>
+          <a:bodyPr wrap="square" lIns="0" tIns="0" rIns="0" bIns="0" rtlCol="0" anchor="ctr"/>
+          <a:lstStyle/>
+          <a:p>
+            <a:pPr indent="0" marL="0">
+              <a:buNone/>
+            </a:pPr>
+            <a:r>
+              <a:rPr lang="en-US" sz="1150" b="1" dirty="0">
                 <a:solidFill>
                   <a:srgbClr val="0A2F40"/>
                 </a:solidFill>
@@ -7250,9 +7250,9 @@
                 <a:ea typeface="Calibri" pitchFamily="34" charset="-122"/>
                 <a:cs typeface="Calibri" pitchFamily="34" charset="-120"/>
               </a:rPr>
-              <a:t>SIGPROC</a:t>
-            </a:r>
-            <a:endParaRPr lang="en-US" sz="1350" dirty="0"/>
+              <a:t>GNU Radio</a:t>
+            </a:r>
+            <a:endParaRPr lang="en-US" sz="1150" dirty="0"/>
           </a:p>
         </p:txBody>
       </p:sp>
@@ -7264,8 +7264,8 @@
         </p:nvSpPr>
         <p:spPr>
           <a:xfrm>
-            <a:off x="768096" y="3794760"/>
-            <a:ext cx="3483864" cy="566928"/>
+            <a:off x="6156960" y="2487168"/>
+            <a:ext cx="2218944" cy="640080"/>
           </a:xfrm>
           <a:prstGeom prst="rect">
             <a:avLst/>
@@ -7281,7 +7281,7 @@
               <a:buNone/>
             </a:pPr>
             <a:r>
-              <a:rPr lang="en-US" sz="1150" dirty="0">
+              <a:rPr lang="en-US" sz="1000" dirty="0">
                 <a:solidFill>
                   <a:srgbClr val="24343C"/>
                 </a:solidFill>
@@ -7289,9 +7289,9 @@
                 <a:ea typeface="Calibri" pitchFamily="34" charset="-122"/>
                 <a:cs typeface="Calibri" pitchFamily="34" charset="-120"/>
               </a:rPr>
-              <a:t>filterbank-format utilities</a:t>
-            </a:r>
-            <a:endParaRPr lang="en-US" sz="1150" dirty="0"/>
+              <a:t>custom filterbank flowgraphs driving the B210</a:t>
+            </a:r>
+            <a:endParaRPr lang="en-US" sz="1000" dirty="0"/>
           </a:p>
         </p:txBody>
       </p:sp>
@@ -7303,12 +7303,12 @@
         </p:nvSpPr>
         <p:spPr>
           <a:xfrm>
-            <a:off x="4654296" y="3392424"/>
-            <a:ext cx="3886200" cy="1024128"/>
+            <a:off x="566928" y="3328416"/>
+            <a:ext cx="2548128" cy="1078992"/>
           </a:xfrm>
           <a:prstGeom prst="roundRect">
             <a:avLst>
-              <a:gd name="adj" fmla="val 7143"/>
+              <a:gd name="adj" fmla="val 6780"/>
             </a:avLst>
           </a:prstGeom>
           <a:solidFill>
@@ -7330,24 +7330,24 @@
         </p:nvSpPr>
         <p:spPr>
           <a:xfrm>
-            <a:off x="4855464" y="3502152"/>
-            <a:ext cx="3483864" cy="292608"/>
-          </a:xfrm>
-          <a:prstGeom prst="rect">
-            <a:avLst/>
-          </a:prstGeom>
-          <a:noFill/>
-          <a:ln/>
-        </p:spPr>
-        <p:txBody>
-          <a:bodyPr wrap="square" lIns="0" tIns="0" rIns="0" bIns="0" rtlCol="0" anchor="ctr"/>
-          <a:lstStyle/>
-          <a:p>
-            <a:pPr indent="0" marL="0">
-              <a:buNone/>
-            </a:pPr>
-            <a:r>
-              <a:rPr lang="en-US" sz="1350" b="1" dirty="0">
+            <a:off x="731520" y="3419856"/>
+            <a:ext cx="2218944" cy="274320"/>
+          </a:xfrm>
+          <a:prstGeom prst="rect">
+            <a:avLst/>
+          </a:prstGeom>
+          <a:noFill/>
+          <a:ln/>
+        </p:spPr>
+        <p:txBody>
+          <a:bodyPr wrap="square" lIns="0" tIns="0" rIns="0" bIns="0" rtlCol="0" anchor="ctr"/>
+          <a:lstStyle/>
+          <a:p>
+            <a:pPr indent="0" marL="0">
+              <a:buNone/>
+            </a:pPr>
+            <a:r>
+              <a:rPr lang="en-US" sz="1150" b="1" dirty="0">
                 <a:solidFill>
                   <a:srgbClr val="0A2F40"/>
                 </a:solidFill>
@@ -7355,9 +7355,9 @@
                 <a:ea typeface="Calibri" pitchFamily="34" charset="-122"/>
                 <a:cs typeface="Calibri" pitchFamily="34" charset="-120"/>
               </a:rPr>
-              <a:t>blimpy / watutil</a:t>
-            </a:r>
-            <a:endParaRPr lang="en-US" sz="1350" dirty="0"/>
+              <a:t>SIGPROC</a:t>
+            </a:r>
+            <a:endParaRPr lang="en-US" sz="1150" dirty="0"/>
           </a:p>
         </p:txBody>
       </p:sp>
@@ -7369,8 +7369,8 @@
         </p:nvSpPr>
         <p:spPr>
           <a:xfrm>
-            <a:off x="4855464" y="3794760"/>
-            <a:ext cx="3483864" cy="566928"/>
+            <a:off x="731520" y="3712464"/>
+            <a:ext cx="2218944" cy="640080"/>
           </a:xfrm>
           <a:prstGeom prst="rect">
             <a:avLst/>
@@ -7386,7 +7386,7 @@
               <a:buNone/>
             </a:pPr>
             <a:r>
-              <a:rPr lang="en-US" sz="1150" dirty="0">
+              <a:rPr lang="en-US" sz="1000" dirty="0">
                 <a:solidFill>
                   <a:srgbClr val="24343C"/>
                 </a:solidFill>
@@ -7394,9 +7394,9 @@
                 <a:ea typeface="Calibri" pitchFamily="34" charset="-122"/>
                 <a:cs typeface="Calibri" pitchFamily="34" charset="-120"/>
               </a:rPr>
-              <a:t>Breakthrough Listen tools for RFI and saturation checks</a:t>
-            </a:r>
-            <a:endParaRPr lang="en-US" sz="1150" dirty="0"/>
+              <a:t>filterbank-format utilities</a:t>
+            </a:r>
+            <a:endParaRPr lang="en-US" sz="1000" dirty="0"/>
           </a:p>
         </p:txBody>
       </p:sp>
@@ -7408,12 +7408,12 @@
         </p:nvSpPr>
         <p:spPr>
           <a:xfrm>
-            <a:off x="566928" y="4572000"/>
-            <a:ext cx="3886200" cy="1024128"/>
+            <a:off x="3279648" y="3328416"/>
+            <a:ext cx="2548128" cy="1078992"/>
           </a:xfrm>
           <a:prstGeom prst="roundRect">
             <a:avLst>
-              <a:gd name="adj" fmla="val 7143"/>
+              <a:gd name="adj" fmla="val 6780"/>
             </a:avLst>
           </a:prstGeom>
           <a:solidFill>
@@ -7435,24 +7435,24 @@
         </p:nvSpPr>
         <p:spPr>
           <a:xfrm>
-            <a:off x="768096" y="4681728"/>
-            <a:ext cx="3483864" cy="292608"/>
-          </a:xfrm>
-          <a:prstGeom prst="rect">
-            <a:avLst/>
-          </a:prstGeom>
-          <a:noFill/>
-          <a:ln/>
-        </p:spPr>
-        <p:txBody>
-          <a:bodyPr wrap="square" lIns="0" tIns="0" rIns="0" bIns="0" rtlCol="0" anchor="ctr"/>
-          <a:lstStyle/>
-          <a:p>
-            <a:pPr indent="0" marL="0">
-              <a:buNone/>
-            </a:pPr>
-            <a:r>
-              <a:rPr lang="en-US" sz="1350" b="1" dirty="0">
+            <a:off x="3444240" y="3419856"/>
+            <a:ext cx="2218944" cy="274320"/>
+          </a:xfrm>
+          <a:prstGeom prst="rect">
+            <a:avLst/>
+          </a:prstGeom>
+          <a:noFill/>
+          <a:ln/>
+        </p:spPr>
+        <p:txBody>
+          <a:bodyPr wrap="square" lIns="0" tIns="0" rIns="0" bIns="0" rtlCol="0" anchor="ctr"/>
+          <a:lstStyle/>
+          <a:p>
+            <a:pPr indent="0" marL="0">
+              <a:buNone/>
+            </a:pPr>
+            <a:r>
+              <a:rPr lang="en-US" sz="1150" b="1" dirty="0">
                 <a:solidFill>
                   <a:srgbClr val="0A2F40"/>
                 </a:solidFill>
@@ -7460,9 +7460,9 @@
                 <a:ea typeface="Calibri" pitchFamily="34" charset="-122"/>
                 <a:cs typeface="Calibri" pitchFamily="34" charset="-120"/>
               </a:rPr>
-              <a:t>Murmur + Best Profile Analyzer</a:t>
-            </a:r>
-            <a:endParaRPr lang="en-US" sz="1350" dirty="0"/>
+              <a:t>blimpy / watutil</a:t>
+            </a:r>
+            <a:endParaRPr lang="en-US" sz="1150" dirty="0"/>
           </a:p>
         </p:txBody>
       </p:sp>
@@ -7474,8 +7474,8 @@
         </p:nvSpPr>
         <p:spPr>
           <a:xfrm>
-            <a:off x="768096" y="4974336"/>
-            <a:ext cx="3483864" cy="566928"/>
+            <a:off x="3444240" y="3712464"/>
+            <a:ext cx="2218944" cy="640080"/>
           </a:xfrm>
           <a:prstGeom prst="rect">
             <a:avLst/>
@@ -7491,7 +7491,7 @@
               <a:buNone/>
             </a:pPr>
             <a:r>
-              <a:rPr lang="en-US" sz="1150" dirty="0">
+              <a:rPr lang="en-US" sz="1000" dirty="0">
                 <a:solidFill>
                   <a:srgbClr val="24343C"/>
                 </a:solidFill>
@@ -7499,9 +7499,9 @@
                 <a:ea typeface="Calibri" pitchFamily="34" charset="-122"/>
                 <a:cs typeface="Calibri" pitchFamily="34" charset="-120"/>
               </a:rPr>
-              <a:t>I0NAA planning and analysis tools — run under Wine</a:t>
-            </a:r>
-            <a:endParaRPr lang="en-US" sz="1150" dirty="0"/>
+              <a:t>Breakthrough Listen RFI and saturation checks</a:t>
+            </a:r>
+            <a:endParaRPr lang="en-US" sz="1000" dirty="0"/>
           </a:p>
         </p:txBody>
       </p:sp>
@@ -7513,12 +7513,12 @@
         </p:nvSpPr>
         <p:spPr>
           <a:xfrm>
-            <a:off x="4654296" y="4572000"/>
-            <a:ext cx="3886200" cy="1024128"/>
+            <a:off x="5992368" y="3328416"/>
+            <a:ext cx="2548128" cy="1078992"/>
           </a:xfrm>
           <a:prstGeom prst="roundRect">
             <a:avLst>
-              <a:gd name="adj" fmla="val 7143"/>
+              <a:gd name="adj" fmla="val 6780"/>
             </a:avLst>
           </a:prstGeom>
           <a:solidFill>
@@ -7540,24 +7540,24 @@
         </p:nvSpPr>
         <p:spPr>
           <a:xfrm>
-            <a:off x="4855464" y="4681728"/>
-            <a:ext cx="3483864" cy="292608"/>
-          </a:xfrm>
-          <a:prstGeom prst="rect">
-            <a:avLst/>
-          </a:prstGeom>
-          <a:noFill/>
-          <a:ln/>
-        </p:spPr>
-        <p:txBody>
-          <a:bodyPr wrap="square" lIns="0" tIns="0" rIns="0" bIns="0" rtlCol="0" anchor="ctr"/>
-          <a:lstStyle/>
-          <a:p>
-            <a:pPr indent="0" marL="0">
-              <a:buNone/>
-            </a:pPr>
-            <a:r>
-              <a:rPr lang="en-US" sz="1350" b="1" dirty="0">
+            <a:off x="6156960" y="3419856"/>
+            <a:ext cx="2218944" cy="274320"/>
+          </a:xfrm>
+          <a:prstGeom prst="rect">
+            <a:avLst/>
+          </a:prstGeom>
+          <a:noFill/>
+          <a:ln/>
+        </p:spPr>
+        <p:txBody>
+          <a:bodyPr wrap="square" lIns="0" tIns="0" rIns="0" bIns="0" rtlCol="0" anchor="ctr"/>
+          <a:lstStyle/>
+          <a:p>
+            <a:pPr indent="0" marL="0">
+              <a:buNone/>
+            </a:pPr>
+            <a:r>
+              <a:rPr lang="en-US" sz="1150" b="1" dirty="0">
                 <a:solidFill>
                   <a:srgbClr val="0A2F40"/>
                 </a:solidFill>
@@ -7565,9 +7565,9 @@
                 <a:ea typeface="Calibri" pitchFamily="34" charset="-122"/>
                 <a:cs typeface="Calibri" pitchFamily="34" charset="-120"/>
               </a:rPr>
-              <a:t>Stellarium + experience</a:t>
-            </a:r>
-            <a:endParaRPr lang="en-US" sz="1350" dirty="0"/>
+              <a:t>PINT</a:t>
+            </a:r>
+            <a:endParaRPr lang="en-US" sz="1150" dirty="0"/>
           </a:p>
         </p:txBody>
       </p:sp>
@@ -7579,8 +7579,8 @@
         </p:nvSpPr>
         <p:spPr>
           <a:xfrm>
-            <a:off x="4855464" y="4974336"/>
-            <a:ext cx="3483864" cy="566928"/>
+            <a:off x="6156960" y="3712464"/>
+            <a:ext cx="2218944" cy="640080"/>
           </a:xfrm>
           <a:prstGeom prst="rect">
             <a:avLst/>
@@ -7596,7 +7596,7 @@
               <a:buNone/>
             </a:pPr>
             <a:r>
-              <a:rPr lang="en-US" sz="1150" dirty="0">
+              <a:rPr lang="en-US" sz="1000" dirty="0">
                 <a:solidFill>
                   <a:srgbClr val="24343C"/>
                 </a:solidFill>
@@ -7604,9 +7604,9 @@
                 <a:ea typeface="Calibri" pitchFamily="34" charset="-122"/>
                 <a:cs typeface="Calibri" pitchFamily="34" charset="-120"/>
               </a:rPr>
-              <a:t>above all, knowing how the pieces fit together</a:t>
-            </a:r>
-            <a:endParaRPr lang="en-US" sz="1150" dirty="0"/>
+              <a:t>high-precision pulsar timing in Python</a:t>
+            </a:r>
+            <a:endParaRPr lang="en-US" sz="1000" dirty="0"/>
           </a:p>
         </p:txBody>
       </p:sp>
@@ -7618,12 +7618,327 @@
         </p:nvSpPr>
         <p:spPr>
           <a:xfrm>
-            <a:off x="566928" y="5760720"/>
-            <a:ext cx="7973568" cy="566928"/>
+            <a:off x="566928" y="4553712"/>
+            <a:ext cx="2548128" cy="1078992"/>
           </a:xfrm>
           <a:prstGeom prst="roundRect">
             <a:avLst>
-              <a:gd name="adj" fmla="val 12903"/>
+              <a:gd name="adj" fmla="val 6780"/>
+            </a:avLst>
+          </a:prstGeom>
+          <a:solidFill>
+            <a:srgbClr val="EFF4F7"/>
+          </a:solidFill>
+          <a:ln w="9525">
+            <a:solidFill>
+              <a:srgbClr val="D7E3EA"/>
+            </a:solidFill>
+            <a:prstDash val="solid"/>
+          </a:ln>
+        </p:spPr>
+      </p:sp>
+      <p:sp>
+        <p:nvSpPr>
+          <p:cNvPr id="27" name="Text 24"/>
+          <p:cNvSpPr/>
+          <p:nvPr/>
+        </p:nvSpPr>
+        <p:spPr>
+          <a:xfrm>
+            <a:off x="731520" y="4645152"/>
+            <a:ext cx="2218944" cy="274320"/>
+          </a:xfrm>
+          <a:prstGeom prst="rect">
+            <a:avLst/>
+          </a:prstGeom>
+          <a:noFill/>
+          <a:ln/>
+        </p:spPr>
+        <p:txBody>
+          <a:bodyPr wrap="square" lIns="0" tIns="0" rIns="0" bIns="0" rtlCol="0" anchor="ctr"/>
+          <a:lstStyle/>
+          <a:p>
+            <a:pPr indent="0" marL="0">
+              <a:buNone/>
+            </a:pPr>
+            <a:r>
+              <a:rPr lang="en-US" sz="1150" b="1" dirty="0">
+                <a:solidFill>
+                  <a:srgbClr val="0A2F40"/>
+                </a:solidFill>
+                <a:latin typeface="Calibri" pitchFamily="34" charset="0"/>
+                <a:ea typeface="Calibri" pitchFamily="34" charset="-122"/>
+                <a:cs typeface="Calibri" pitchFamily="34" charset="-120"/>
+              </a:rPr>
+              <a:t>ATNF pulsar catalogue</a:t>
+            </a:r>
+            <a:endParaRPr lang="en-US" sz="1150" dirty="0"/>
+          </a:p>
+        </p:txBody>
+      </p:sp>
+      <p:sp>
+        <p:nvSpPr>
+          <p:cNvPr id="28" name="Text 25"/>
+          <p:cNvSpPr/>
+          <p:nvPr/>
+        </p:nvSpPr>
+        <p:spPr>
+          <a:xfrm>
+            <a:off x="731520" y="4937760"/>
+            <a:ext cx="2218944" cy="640080"/>
+          </a:xfrm>
+          <a:prstGeom prst="rect">
+            <a:avLst/>
+          </a:prstGeom>
+          <a:noFill/>
+          <a:ln/>
+        </p:spPr>
+        <p:txBody>
+          <a:bodyPr wrap="square" lIns="0" tIns="0" rIns="0" bIns="0" rtlCol="0" anchor="t"/>
+          <a:lstStyle/>
+          <a:p>
+            <a:pPr indent="0" marL="0">
+              <a:buNone/>
+            </a:pPr>
+            <a:r>
+              <a:rPr lang="en-US" sz="1000" dirty="0">
+                <a:solidFill>
+                  <a:srgbClr val="24343C"/>
+                </a:solidFill>
+                <a:latin typeface="Calibri" pitchFamily="34" charset="0"/>
+                <a:ea typeface="Calibri" pitchFamily="34" charset="-122"/>
+                <a:cs typeface="Calibri" pitchFamily="34" charset="-120"/>
+              </a:rPr>
+              <a:t>ephemeris data (.par) for every fold</a:t>
+            </a:r>
+            <a:endParaRPr lang="en-US" sz="1000" dirty="0"/>
+          </a:p>
+        </p:txBody>
+      </p:sp>
+      <p:sp>
+        <p:nvSpPr>
+          <p:cNvPr id="29" name="Shape 26"/>
+          <p:cNvSpPr/>
+          <p:nvPr/>
+        </p:nvSpPr>
+        <p:spPr>
+          <a:xfrm>
+            <a:off x="3279648" y="4553712"/>
+            <a:ext cx="2548128" cy="1078992"/>
+          </a:xfrm>
+          <a:prstGeom prst="roundRect">
+            <a:avLst>
+              <a:gd name="adj" fmla="val 6780"/>
+            </a:avLst>
+          </a:prstGeom>
+          <a:solidFill>
+            <a:srgbClr val="EFF4F7"/>
+          </a:solidFill>
+          <a:ln w="9525">
+            <a:solidFill>
+              <a:srgbClr val="D7E3EA"/>
+            </a:solidFill>
+            <a:prstDash val="solid"/>
+          </a:ln>
+        </p:spPr>
+      </p:sp>
+      <p:sp>
+        <p:nvSpPr>
+          <p:cNvPr id="30" name="Text 27"/>
+          <p:cNvSpPr/>
+          <p:nvPr/>
+        </p:nvSpPr>
+        <p:spPr>
+          <a:xfrm>
+            <a:off x="3444240" y="4645152"/>
+            <a:ext cx="2218944" cy="274320"/>
+          </a:xfrm>
+          <a:prstGeom prst="rect">
+            <a:avLst/>
+          </a:prstGeom>
+          <a:noFill/>
+          <a:ln/>
+        </p:spPr>
+        <p:txBody>
+          <a:bodyPr wrap="square" lIns="0" tIns="0" rIns="0" bIns="0" rtlCol="0" anchor="ctr"/>
+          <a:lstStyle/>
+          <a:p>
+            <a:pPr indent="0" marL="0">
+              <a:buNone/>
+            </a:pPr>
+            <a:r>
+              <a:rPr lang="en-US" sz="1150" b="1" dirty="0">
+                <a:solidFill>
+                  <a:srgbClr val="0A2F40"/>
+                </a:solidFill>
+                <a:latin typeface="Calibri" pitchFamily="34" charset="0"/>
+                <a:ea typeface="Calibri" pitchFamily="34" charset="-122"/>
+                <a:cs typeface="Calibri" pitchFamily="34" charset="-120"/>
+              </a:rPr>
+              <a:t>Murmur + Best Profile Analyzer</a:t>
+            </a:r>
+            <a:endParaRPr lang="en-US" sz="1150" dirty="0"/>
+          </a:p>
+        </p:txBody>
+      </p:sp>
+      <p:sp>
+        <p:nvSpPr>
+          <p:cNvPr id="31" name="Text 28"/>
+          <p:cNvSpPr/>
+          <p:nvPr/>
+        </p:nvSpPr>
+        <p:spPr>
+          <a:xfrm>
+            <a:off x="3444240" y="4937760"/>
+            <a:ext cx="2218944" cy="640080"/>
+          </a:xfrm>
+          <a:prstGeom prst="rect">
+            <a:avLst/>
+          </a:prstGeom>
+          <a:noFill/>
+          <a:ln/>
+        </p:spPr>
+        <p:txBody>
+          <a:bodyPr wrap="square" lIns="0" tIns="0" rIns="0" bIns="0" rtlCol="0" anchor="t"/>
+          <a:lstStyle/>
+          <a:p>
+            <a:pPr indent="0" marL="0">
+              <a:buNone/>
+            </a:pPr>
+            <a:r>
+              <a:rPr lang="en-US" sz="1000" dirty="0">
+                <a:solidFill>
+                  <a:srgbClr val="24343C"/>
+                </a:solidFill>
+                <a:latin typeface="Calibri" pitchFamily="34" charset="0"/>
+                <a:ea typeface="Calibri" pitchFamily="34" charset="-122"/>
+                <a:cs typeface="Calibri" pitchFamily="34" charset="-120"/>
+              </a:rPr>
+              <a:t>I0NAA planning/analysis tools — run under Wine</a:t>
+            </a:r>
+            <a:endParaRPr lang="en-US" sz="1000" dirty="0"/>
+          </a:p>
+        </p:txBody>
+      </p:sp>
+      <p:sp>
+        <p:nvSpPr>
+          <p:cNvPr id="32" name="Shape 29"/>
+          <p:cNvSpPr/>
+          <p:nvPr/>
+        </p:nvSpPr>
+        <p:spPr>
+          <a:xfrm>
+            <a:off x="5992368" y="4553712"/>
+            <a:ext cx="2548128" cy="1078992"/>
+          </a:xfrm>
+          <a:prstGeom prst="roundRect">
+            <a:avLst>
+              <a:gd name="adj" fmla="val 6780"/>
+            </a:avLst>
+          </a:prstGeom>
+          <a:solidFill>
+            <a:srgbClr val="EFF4F7"/>
+          </a:solidFill>
+          <a:ln w="9525">
+            <a:solidFill>
+              <a:srgbClr val="D7E3EA"/>
+            </a:solidFill>
+            <a:prstDash val="solid"/>
+          </a:ln>
+        </p:spPr>
+      </p:sp>
+      <p:sp>
+        <p:nvSpPr>
+          <p:cNvPr id="33" name="Text 30"/>
+          <p:cNvSpPr/>
+          <p:nvPr/>
+        </p:nvSpPr>
+        <p:spPr>
+          <a:xfrm>
+            <a:off x="6156960" y="4645152"/>
+            <a:ext cx="2218944" cy="274320"/>
+          </a:xfrm>
+          <a:prstGeom prst="rect">
+            <a:avLst/>
+          </a:prstGeom>
+          <a:noFill/>
+          <a:ln/>
+        </p:spPr>
+        <p:txBody>
+          <a:bodyPr wrap="square" lIns="0" tIns="0" rIns="0" bIns="0" rtlCol="0" anchor="ctr"/>
+          <a:lstStyle/>
+          <a:p>
+            <a:pPr indent="0" marL="0">
+              <a:buNone/>
+            </a:pPr>
+            <a:r>
+              <a:rPr lang="en-US" sz="1150" b="1" dirty="0">
+                <a:solidFill>
+                  <a:srgbClr val="0A2F40"/>
+                </a:solidFill>
+                <a:latin typeface="Calibri" pitchFamily="34" charset="0"/>
+                <a:ea typeface="Calibri" pitchFamily="34" charset="-122"/>
+                <a:cs typeface="Calibri" pitchFamily="34" charset="-120"/>
+              </a:rPr>
+              <a:t>Stellarium + experience</a:t>
+            </a:r>
+            <a:endParaRPr lang="en-US" sz="1150" dirty="0"/>
+          </a:p>
+        </p:txBody>
+      </p:sp>
+      <p:sp>
+        <p:nvSpPr>
+          <p:cNvPr id="34" name="Text 31"/>
+          <p:cNvSpPr/>
+          <p:nvPr/>
+        </p:nvSpPr>
+        <p:spPr>
+          <a:xfrm>
+            <a:off x="6156960" y="4937760"/>
+            <a:ext cx="2218944" cy="640080"/>
+          </a:xfrm>
+          <a:prstGeom prst="rect">
+            <a:avLst/>
+          </a:prstGeom>
+          <a:noFill/>
+          <a:ln/>
+        </p:spPr>
+        <p:txBody>
+          <a:bodyPr wrap="square" lIns="0" tIns="0" rIns="0" bIns="0" rtlCol="0" anchor="t"/>
+          <a:lstStyle/>
+          <a:p>
+            <a:pPr indent="0" marL="0">
+              <a:buNone/>
+            </a:pPr>
+            <a:r>
+              <a:rPr lang="en-US" sz="1000" dirty="0">
+                <a:solidFill>
+                  <a:srgbClr val="24343C"/>
+                </a:solidFill>
+                <a:latin typeface="Calibri" pitchFamily="34" charset="0"/>
+                <a:ea typeface="Calibri" pitchFamily="34" charset="-122"/>
+                <a:cs typeface="Calibri" pitchFamily="34" charset="-120"/>
+              </a:rPr>
+              <a:t>above all, knowing how the pieces fit together</a:t>
+            </a:r>
+            <a:endParaRPr lang="en-US" sz="1000" dirty="0"/>
+          </a:p>
+        </p:txBody>
+      </p:sp>
+      <p:sp>
+        <p:nvSpPr>
+          <p:cNvPr id="35" name="Shape 32"/>
+          <p:cNvSpPr/>
+          <p:nvPr/>
+        </p:nvSpPr>
+        <p:spPr>
+          <a:xfrm>
+            <a:off x="566928" y="5815584"/>
+            <a:ext cx="7973568" cy="512064"/>
+          </a:xfrm>
+          <a:prstGeom prst="roundRect">
+            <a:avLst>
+              <a:gd name="adj" fmla="val 14286"/>
             </a:avLst>
           </a:prstGeom>
           <a:solidFill>
@@ -7639,30 +7954,30 @@
       </p:sp>
       <p:sp>
         <p:nvSpPr>
-          <p:cNvPr id="27" name="Text 24"/>
-          <p:cNvSpPr/>
-          <p:nvPr/>
-        </p:nvSpPr>
-        <p:spPr>
-          <a:xfrm>
-            <a:off x="768096" y="5760720"/>
-            <a:ext cx="7571232" cy="566928"/>
-          </a:xfrm>
-          <a:prstGeom prst="rect">
-            <a:avLst/>
-          </a:prstGeom>
-          <a:noFill/>
-          <a:ln/>
-        </p:spPr>
-        <p:txBody>
-          <a:bodyPr wrap="square" lIns="0" tIns="0" rIns="0" bIns="0" rtlCol="0" anchor="ctr"/>
-          <a:lstStyle/>
-          <a:p>
-            <a:pPr indent="0" marL="0">
-              <a:buNone/>
-            </a:pPr>
-            <a:r>
-              <a:rPr lang="en-US" sz="1150" b="1" dirty="0">
+          <p:cNvPr id="36" name="Text 33"/>
+          <p:cNvSpPr/>
+          <p:nvPr/>
+        </p:nvSpPr>
+        <p:spPr>
+          <a:xfrm>
+            <a:off x="768096" y="5815584"/>
+            <a:ext cx="7571232" cy="512064"/>
+          </a:xfrm>
+          <a:prstGeom prst="rect">
+            <a:avLst/>
+          </a:prstGeom>
+          <a:noFill/>
+          <a:ln/>
+        </p:spPr>
+        <p:txBody>
+          <a:bodyPr wrap="square" lIns="0" tIns="0" rIns="0" bIns="0" rtlCol="0" anchor="ctr"/>
+          <a:lstStyle/>
+          <a:p>
+            <a:pPr indent="0" marL="0">
+              <a:buNone/>
+            </a:pPr>
+            <a:r>
+              <a:rPr lang="en-US" sz="1100" b="1" dirty="0">
                 <a:solidFill>
                   <a:srgbClr val="6B7A82"/>
                 </a:solidFill>
@@ -7676,7 +7991,7 @@
               <a:buNone/>
             </a:pPr>
             <a:r>
-              <a:rPr lang="en-US" sz="1150" dirty="0">
+              <a:rPr lang="en-US" sz="1100" dirty="0">
                 <a:solidFill>
                   <a:srgbClr val="93A2AA"/>
                 </a:solidFill>
@@ -7686,13 +8001,13 @@
               </a:rPr>
               <a:t>  —  the professional community’s archiving &amp; timing suite, in common use — beyond even our experts’ stack</a:t>
             </a:r>
-            <a:endParaRPr lang="en-US" sz="1150" dirty="0"/>
-          </a:p>
-        </p:txBody>
-      </p:sp>
-      <p:sp>
-        <p:nvSpPr>
-          <p:cNvPr id="28" name="Shape 25"/>
+            <a:endParaRPr lang="en-US" sz="1100" dirty="0"/>
+          </a:p>
+        </p:txBody>
+      </p:sp>
+      <p:sp>
+        <p:nvSpPr>
+          <p:cNvPr id="37" name="Shape 34"/>
           <p:cNvSpPr/>
           <p:nvPr/>
         </p:nvSpPr>
@@ -7719,7 +8034,7 @@
       </p:sp>
       <p:sp>
         <p:nvSpPr>
-          <p:cNvPr id="29" name="Text 26"/>
+          <p:cNvPr id="38" name="Text 35"/>
           <p:cNvSpPr/>
           <p:nvPr/>
         </p:nvSpPr>
@@ -7758,7 +8073,7 @@
       </p:sp>
       <p:sp>
         <p:nvSpPr>
-          <p:cNvPr id="30" name="Text 27"/>
+          <p:cNvPr id="39" name="Text 36"/>
           <p:cNvSpPr/>
           <p:nvPr/>
         </p:nvSpPr>
@@ -7797,7 +8112,7 @@
       </p:sp>
       <p:sp>
         <p:nvSpPr>
-          <p:cNvPr id="31" name="Shape 28"/>
+          <p:cNvPr id="40" name="Shape 37"/>
           <p:cNvSpPr/>
           <p:nvPr/>
         </p:nvSpPr>
@@ -7824,7 +8139,7 @@
       </p:sp>
       <p:sp>
         <p:nvSpPr>
-          <p:cNvPr id="32" name="Text 29"/>
+          <p:cNvPr id="41" name="Text 38"/>
           <p:cNvSpPr/>
           <p:nvPr/>
         </p:nvSpPr>
@@ -7863,7 +8178,7 @@
       </p:sp>
       <p:sp>
         <p:nvSpPr>
-          <p:cNvPr id="33" name="Text 30"/>
+          <p:cNvPr id="42" name="Text 39"/>
           <p:cNvSpPr/>
           <p:nvPr/>
         </p:nvSpPr>
@@ -7902,7 +8217,7 @@
       </p:sp>
       <p:sp>
         <p:nvSpPr>
-          <p:cNvPr id="34" name="Text 31"/>
+          <p:cNvPr id="43" name="Text 40"/>
           <p:cNvSpPr/>
           <p:nvPr/>
         </p:nvSpPr>

--- a/reports/sara-2026/Lowering_the_Barrier_to_Radio_Astronomy_SARA_2026.pptx
+++ b/reports/sara-2026/Lowering_the_Barrier_to_Radio_Astronomy_SARA_2026.pptx
@@ -19,9 +19,11 @@
     <p:sldId id="267" r:id="rId13"/>
     <p:sldId id="268" r:id="rId14"/>
     <p:sldId id="269" r:id="rId15"/>
+    <p:sldId id="270" r:id="rId16"/>
+    <p:sldId id="271" r:id="rId17"/>
   </p:sldIdLst>
   <p:notesMasterIdLst>
-    <p:notesMasterId r:id="rId16"/>
+    <p:notesMasterId r:id="rId18"/>
   </p:notesMasterIdLst>
   <p:sldSz cx="12192000" cy="6858000"/>
   <p:notesSz cx="6858000" cy="12192000"/>
@@ -603,7 +605,7 @@
           <a:p>
             <a:r>
               <a:rPr lang="en-US" dirty="0"/>
-              <a:t>Two independent arguments. Physics: the dispersion curve is the fingerprint — RFI doesn't have one. Engineering: the same recordings re-analyzed on separately compiled PRESTO builds on two operating systems agree to three significant figures.</a:t>
+              <a:t>Honesty is the credibility of the whole talk: the 2026-07-17 re-analysis applied the full B0329+54 cleanup — the significance stays ~9 sigma (noise-limited, not artifact-limited), but the best-fit parameters walk onto the catalog values for the first time. A predictive split-half coherence test came out consistent (~2 sigma) but not decisive — at 9 sigma total, subdividing runs out of signal. Processing gains are exhausted; the re-observation plan is on the roadmap: record after the timebase fix ships, 90+ minutes, multiple sessions for scintillation.</a:t>
             </a:r>
             <a:endParaRPr lang="en-US" dirty="0"/>
           </a:p>
@@ -691,7 +693,7 @@
           <a:p>
             <a:r>
               <a:rPr lang="en-US" dirty="0"/>
-              <a:t>Crowd-pleaser story: the field box (Raspberry Pi 5, viewed over remote desktop) had 'broken' menus. Every symptom traced to one condition — headless operation yields a zero-by-zero screen. The fix shipped in v1.1.6 and the box was verified running it. Moral for any club running remote gear.</a:t>
+              <a:t>Two independent arguments. Physics: the dispersion curve is the fingerprint — RFI doesn't have one. Engineering: the same recordings re-analyzed on separately compiled PRESTO builds on two operating systems agree to three significant figures.</a:t>
             </a:r>
             <a:endParaRPr lang="en-US" dirty="0"/>
           </a:p>
@@ -779,7 +781,7 @@
           <a:p>
             <a:r>
               <a:rPr lang="en-US" dirty="0"/>
-              <a:t>Everything the field session asked for shipped within two days, and every machine — including the field box — converged on the release through the built-in updater. The line-endings epilogue is worth telling: the first Windows-built archive broke Unix launches; the field box exposed it within a day.</a:t>
+              <a:t>Crowd-pleaser story: the field box (Raspberry Pi 5, viewed over remote desktop) had 'broken' menus. Every symptom traced to one condition — headless operation yields a zero-by-zero screen. The fix shipped in v1.1.6 and the box was verified running it. Moral for any club running remote gear.</a:t>
             </a:r>
             <a:endParaRPr lang="en-US" dirty="0"/>
           </a:p>
@@ -867,7 +869,7 @@
           <a:p>
             <a:r>
               <a:rPr lang="en-US" dirty="0"/>
-              <a:t>The point of the whole effort: training starts now, on software a newcomer can learn in an afternoon instead of a season. Science follow-ups: longer B0950+08 integration, and repeated B0329+54 sessions toward timing.</a:t>
+              <a:t>Everything the field session asked for shipped within two days, and every machine — including the field box — converged on the release through the built-in updater. The line-endings epilogue is worth telling: the first Windows-built archive broke Unix launches; the field box exposed it within a day.</a:t>
             </a:r>
             <a:endParaRPr lang="en-US" dirty="0"/>
           </a:p>
@@ -955,7 +957,7 @@
           <a:p>
             <a:r>
               <a:rPr lang="en-US" dirty="0"/>
-              <a:t>Close on the mission, not the software: this was about opening real radio astronomy to more members. Thanks: Rich and Dan built the program this stands on; the field team; and the report notes the role of AI-assisted engineering across three platforms. Questions.</a:t>
+              <a:t>The noise-floor scatter dropped ~34x (≈ sqrt of the averaging depth); max hold is now a true per-block peak detector, so a 51-microsecond burst reads at full amplitude instead of -27 dB. One release note worth mentioning: the default average is now linear power, so the displayed floor reads about +2.5 dB versus older versions — the old dB-domain average was biased low; the new number is the honest one. Verified live on the B210 at 1422 MHz with three weak narrowband test signals.</a:t>
             </a:r>
             <a:endParaRPr lang="en-US" dirty="0"/>
           </a:p>
@@ -979,6 +981,182 @@
             <a:fld id="{F7021451-1387-4CA6-816F-3879F97B5CBC}" type="slidenum">
               <a:rPr lang="en-US"/>
               <a:t>14</a:t>
+            </a:fld>
+            <a:endParaRPr lang="en-US"/>
+          </a:p>
+        </p:txBody>
+      </p:sp>
+    </p:spTree>
+    <p:extLst>
+      <p:ext uri="{BB962C8B-B14F-4D97-AF65-F5344CB8AC3E}">
+        <p14:creationId xmlns:p14="http://schemas.microsoft.com/office/powerpoint/2010/main" val="1024086991"/>
+      </p:ext>
+    </p:extLst>
+  </p:cSld>
+  <p:clrMapOvr>
+    <a:masterClrMapping/>
+  </p:clrMapOvr>
+</p:notes>
+</file>
+
+<file path=ppt/notesSlides/notesSlide15.xml><?xml version="1.0" encoding="utf-8"?>
+<p:notes xmlns:a="http://schemas.openxmlformats.org/drawingml/2006/main" xmlns:r="http://schemas.openxmlformats.org/officeDocument/2006/relationships" xmlns:p="http://schemas.openxmlformats.org/presentationml/2006/main">
+  <p:cSld>
+    <p:spTree>
+      <p:nvGrpSpPr>
+        <p:cNvPr id="1" name=""/>
+        <p:cNvGrpSpPr/>
+        <p:nvPr/>
+      </p:nvGrpSpPr>
+      <p:grpSpPr>
+        <a:xfrm>
+          <a:off x="0" y="0"/>
+          <a:ext cx="0" cy="0"/>
+          <a:chOff x="0" y="0"/>
+          <a:chExt cx="0" cy="0"/>
+        </a:xfrm>
+      </p:grpSpPr>
+      <p:sp>
+        <p:nvSpPr>
+          <p:cNvPr id="2" name="Slide Image Placeholder 1"/>
+          <p:cNvSpPr>
+            <a:spLocks noGrp="1" noRot="1" noChangeAspect="1"/>
+          </p:cNvSpPr>
+          <p:nvPr>
+            <p:ph type="sldImg"/>
+          </p:nvPr>
+        </p:nvSpPr>
+        <p:spPr/>
+      </p:sp>
+      <p:sp>
+        <p:nvSpPr>
+          <p:cNvPr id="3" name="Notes Placeholder 2"/>
+          <p:cNvSpPr>
+            <a:spLocks noGrp="1"/>
+          </p:cNvSpPr>
+          <p:nvPr>
+            <p:ph type="body" idx="1"/>
+          </p:nvPr>
+        </p:nvSpPr>
+        <p:spPr/>
+        <p:txBody>
+          <a:bodyPr/>
+          <a:lstStyle/>
+          <a:p>
+            <a:r>
+              <a:rPr lang="en-US" dirty="0"/>
+              <a:t>This is not a wish list — every item is specified in the repository's shared ROADMAP.md with design notes. The queue turns the remaining expertise into software: the planner replaces the Murmur/Stellarium planning step, one-click post-processing replaces the hand-run PRESTO pipeline for the common case, and timebase integrity fixes the defect peer review found. Science queue alongside: the B0950+08 campaign, and repeated B0329+54 sessions toward timing-grade data.</a:t>
+            </a:r>
+            <a:endParaRPr lang="en-US" dirty="0"/>
+          </a:p>
+        </p:txBody>
+      </p:sp>
+      <p:sp>
+        <p:nvSpPr>
+          <p:cNvPr id="4" name="Slide Number Placeholder 3"/>
+          <p:cNvSpPr>
+            <a:spLocks noGrp="1"/>
+          </p:cNvSpPr>
+          <p:nvPr>
+            <p:ph type="sldNum" sz="quarter" idx="10"/>
+          </p:nvPr>
+        </p:nvSpPr>
+        <p:spPr/>
+        <p:txBody>
+          <a:bodyPr/>
+          <a:lstStyle/>
+          <a:p>
+            <a:fld id="{F7021451-1387-4CA6-816F-3879F97B5CBC}" type="slidenum">
+              <a:rPr lang="en-US"/>
+              <a:t>15</a:t>
+            </a:fld>
+            <a:endParaRPr lang="en-US"/>
+          </a:p>
+        </p:txBody>
+      </p:sp>
+    </p:spTree>
+    <p:extLst>
+      <p:ext uri="{BB962C8B-B14F-4D97-AF65-F5344CB8AC3E}">
+        <p14:creationId xmlns:p14="http://schemas.microsoft.com/office/powerpoint/2010/main" val="1024086991"/>
+      </p:ext>
+    </p:extLst>
+  </p:cSld>
+  <p:clrMapOvr>
+    <a:masterClrMapping/>
+  </p:clrMapOvr>
+</p:notes>
+</file>
+
+<file path=ppt/notesSlides/notesSlide16.xml><?xml version="1.0" encoding="utf-8"?>
+<p:notes xmlns:a="http://schemas.openxmlformats.org/drawingml/2006/main" xmlns:r="http://schemas.openxmlformats.org/officeDocument/2006/relationships" xmlns:p="http://schemas.openxmlformats.org/presentationml/2006/main">
+  <p:cSld>
+    <p:spTree>
+      <p:nvGrpSpPr>
+        <p:cNvPr id="1" name=""/>
+        <p:cNvGrpSpPr/>
+        <p:nvPr/>
+      </p:nvGrpSpPr>
+      <p:grpSpPr>
+        <a:xfrm>
+          <a:off x="0" y="0"/>
+          <a:ext cx="0" cy="0"/>
+          <a:chOff x="0" y="0"/>
+          <a:chExt cx="0" cy="0"/>
+        </a:xfrm>
+      </p:grpSpPr>
+      <p:sp>
+        <p:nvSpPr>
+          <p:cNvPr id="2" name="Slide Image Placeholder 1"/>
+          <p:cNvSpPr>
+            <a:spLocks noGrp="1" noRot="1" noChangeAspect="1"/>
+          </p:cNvSpPr>
+          <p:nvPr>
+            <p:ph type="sldImg"/>
+          </p:nvPr>
+        </p:nvSpPr>
+        <p:spPr/>
+      </p:sp>
+      <p:sp>
+        <p:nvSpPr>
+          <p:cNvPr id="3" name="Notes Placeholder 2"/>
+          <p:cNvSpPr>
+            <a:spLocks noGrp="1"/>
+          </p:cNvSpPr>
+          <p:nvPr>
+            <p:ph type="body" idx="1"/>
+          </p:nvPr>
+        </p:nvSpPr>
+        <p:spPr/>
+        <p:txBody>
+          <a:bodyPr/>
+          <a:lstStyle/>
+          <a:p>
+            <a:r>
+              <a:rPr lang="en-US" dirty="0"/>
+              <a:t>Close on the mission, not the software: this was about opening real radio astronomy to more members. Thanks: Rich and Dan built the program this stands on; the field team; and the report notes the role of AI-assisted engineering across three platforms. Questions.</a:t>
+            </a:r>
+            <a:endParaRPr lang="en-US" dirty="0"/>
+          </a:p>
+        </p:txBody>
+      </p:sp>
+      <p:sp>
+        <p:nvSpPr>
+          <p:cNvPr id="4" name="Slide Number Placeholder 3"/>
+          <p:cNvSpPr>
+            <a:spLocks noGrp="1"/>
+          </p:cNvSpPr>
+          <p:nvPr>
+            <p:ph type="sldNum" sz="quarter" idx="10"/>
+          </p:nvPr>
+        </p:nvSpPr>
+        <p:spPr/>
+        <p:txBody>
+          <a:bodyPr/>
+          <a:lstStyle/>
+          <a:p>
+            <a:fld id="{F7021451-1387-4CA6-816F-3879F97B5CBC}" type="slidenum">
+              <a:rPr lang="en-US"/>
+              <a:t>16</a:t>
             </a:fld>
             <a:endParaRPr lang="en-US"/>
           </a:p>
@@ -1571,7 +1749,7 @@
           <a:p>
             <a:r>
               <a:rPr lang="en-US" dirty="0"/>
-              <a:t>Walk the figure: profile top-left (double peak), phase-vs-time panel shows persistence, and the DM curve peaks near the catalog value. Fold types all agree: topocentric ~20.1 sigma, barycentric against the published ephemeris ~19.9 sigma, blind search 20.6 sigma at DM ≈ 25.</a:t>
+              <a:t>Walk the figure: single clean pulse top-left, single vertical track in phase-vs-time, DM curve peaking near catalog. The number's history: ~19.9-20.6 sigma across the original fold types as reported in the field; RFI mask + zap took it to 22.4; bridging a 0.558-second dropped-sample gap recovered full coherence at 28.0 sigma with DM back at 25.3. Chi-squared_red 16.75.</a:t>
             </a:r>
             <a:endParaRPr lang="en-US" dirty="0"/>
           </a:p>
@@ -1659,7 +1837,7 @@
           <a:p>
             <a:r>
               <a:rPr lang="en-US" dirty="0"/>
-              <a:t>Good teaching moment for the audience: low-DM pulsars at modest bandwidth can masquerade as RFI in a blind search. Topocentric fold ~9.7 sigma, barycentric ~9.8. Scintillation means apparent brightness varies as interstellar plasma focuses and defocuses the signal — longer integration next trip.</a:t>
+              <a:t>The drift function was mapped directly: 22 consecutive 100-second fixed-period folds, each window's phase measured by cross-correlation — a smooth accelerating drip plus one discrete +0.219-rotation step at t ≈ 550 s. The pad is 0.025% of the data, a copy of the preceding real noise — no synthetic signal; it only restores the time axis. The 5.6-sigma jump is the coherence recovered when the two segments finally add in phase. Caveat: the padded file is for detection and profile work, not absolute timing. Full analysis in the refined fold PDFs beside the recordings.</a:t>
             </a:r>
             <a:endParaRPr lang="en-US" dirty="0"/>
           </a:p>
@@ -2473,7 +2651,7 @@
                 <a:ea typeface="Calibri" pitchFamily="34" charset="-122"/>
                 <a:cs typeface="Calibri" pitchFamily="34" charset="-120"/>
               </a:rPr>
-              <a:t>VERIFICATION</a:t>
+              <a:t>RESULTS</a:t>
             </a:r>
             <a:endParaRPr lang="en-US" sz="1100" dirty="0"/>
           </a:p>
@@ -2512,7 +2690,7 @@
                 <a:ea typeface="Cambria" pitchFamily="34" charset="-122"/>
                 <a:cs typeface="Cambria" pitchFamily="34" charset="-120"/>
               </a:rPr>
-              <a:t>Real — and independently reproducible</a:t>
+              <a:t>B0950+08 — a strong candidate, honestly framed</a:t>
             </a:r>
             <a:endParaRPr lang="en-US" sz="2900" dirty="0"/>
           </a:p>
@@ -2628,74 +2806,181 @@
         </p:nvSpPr>
         <p:spPr>
           <a:xfrm>
-            <a:off x="566928" y="1554480"/>
-            <a:ext cx="5394960" cy="3977640"/>
-          </a:xfrm>
-          <a:prstGeom prst="roundRect">
-            <a:avLst>
-              <a:gd name="adj" fmla="val 1839"/>
-            </a:avLst>
+            <a:off x="5568696" y="1572768"/>
+            <a:ext cx="6163056" cy="4388103"/>
+          </a:xfrm>
+          <a:prstGeom prst="rect">
+            <a:avLst/>
           </a:prstGeom>
           <a:solidFill>
-            <a:srgbClr val="EFF4F7"/>
+            <a:srgbClr val="FFFFFF"/>
           </a:solidFill>
-          <a:ln w="9525">
+          <a:ln w="12700">
             <a:solidFill>
               <a:srgbClr val="D7E3EA"/>
             </a:solidFill>
             <a:prstDash val="solid"/>
           </a:ln>
-        </p:spPr>
-      </p:sp>
-      <p:sp>
-        <p:nvSpPr>
-          <p:cNvPr id="8" name="Text 5"/>
-          <p:cNvSpPr/>
-          <p:nvPr/>
-        </p:nvSpPr>
-        <p:spPr>
-          <a:xfrm>
-            <a:off x="841248" y="1783080"/>
-            <a:ext cx="4846320" cy="365760"/>
-          </a:xfrm>
-          <a:prstGeom prst="rect">
-            <a:avLst/>
-          </a:prstGeom>
-          <a:noFill/>
-          <a:ln/>
-        </p:spPr>
-        <p:txBody>
-          <a:bodyPr wrap="square" lIns="0" tIns="0" rIns="0" bIns="0" rtlCol="0" anchor="ctr"/>
-          <a:lstStyle/>
-          <a:p>
-            <a:pPr indent="0" marL="0">
-              <a:buNone/>
-            </a:pPr>
-            <a:r>
-              <a:rPr lang="en-US" sz="1700" b="1" dirty="0">
-                <a:solidFill>
-                  <a:srgbClr val="0A2F40"/>
+          <a:effectLst>
+            <a:outerShdw sx="100000" sy="100000" kx="0" ky="0" algn="bl" rotWithShape="0" blurRad="76200" dist="25400" dir="5400000">
+              <a:srgbClr val="9AACB5">
+                <a:alpha val="35000"/>
+              </a:srgbClr>
+            </a:outerShdw>
+          </a:effectLst>
+        </p:spPr>
+      </p:sp>
+      <p:pic>
+        <p:nvPicPr>
+          <p:cNvPr id="8" name="Image 1" descr="C:\Users\rick\Documents\DSES\Science\Spectrum_Analyzer_PY\reports\haswell-2026-07\figures\B0950+08_prepfold.png">    </p:cNvPr>
+          <p:cNvPicPr>
+            <a:picLocks noChangeAspect="1"/>
+          </p:cNvPicPr>
+          <p:nvPr/>
+        </p:nvPicPr>
+        <p:blipFill>
+          <a:blip r:embed="rId2"/>
+          <a:stretch>
+            <a:fillRect/>
+          </a:stretch>
+        </p:blipFill>
+        <p:spPr>
+          <a:xfrm>
+            <a:off x="5623560" y="1627632"/>
+            <a:ext cx="6053328" cy="4278375"/>
+          </a:xfrm>
+          <a:prstGeom prst="rect">
+            <a:avLst/>
+          </a:prstGeom>
+        </p:spPr>
+      </p:pic>
+      <p:sp>
+        <p:nvSpPr>
+          <p:cNvPr id="9" name="Text 5"/>
+          <p:cNvSpPr/>
+          <p:nvPr/>
+        </p:nvSpPr>
+        <p:spPr>
+          <a:xfrm>
+            <a:off x="5623560" y="5989320"/>
+            <a:ext cx="6053328" cy="274320"/>
+          </a:xfrm>
+          <a:prstGeom prst="rect">
+            <a:avLst/>
+          </a:prstGeom>
+          <a:noFill/>
+          <a:ln/>
+        </p:spPr>
+        <p:txBody>
+          <a:bodyPr wrap="square" lIns="0" tIns="0" rIns="0" bIns="0" rtlCol="0" anchor="ctr"/>
+          <a:lstStyle/>
+          <a:p>
+            <a:pPr algn="ctr" indent="0" marL="0">
+              <a:buNone/>
+            </a:pPr>
+            <a:r>
+              <a:rPr lang="en-US" sz="1050" i="1" dirty="0">
+                <a:solidFill>
+                  <a:srgbClr val="6B7A82"/>
+                </a:solidFill>
+                <a:latin typeface="Calibri" pitchFamily="34" charset="0"/>
+                <a:ea typeface="Calibri" pitchFamily="34" charset="-122"/>
+                <a:cs typeface="Calibri" pitchFamily="34" charset="-120"/>
+              </a:rPr>
+              <a:t>Fold at the known 253 ms period — 22.2-minute observation</a:t>
+            </a:r>
+            <a:endParaRPr lang="en-US" sz="1050" dirty="0"/>
+          </a:p>
+        </p:txBody>
+      </p:sp>
+      <p:sp>
+        <p:nvSpPr>
+          <p:cNvPr id="10" name="Text 6"/>
+          <p:cNvSpPr/>
+          <p:nvPr/>
+        </p:nvSpPr>
+        <p:spPr>
+          <a:xfrm>
+            <a:off x="566928" y="1691640"/>
+            <a:ext cx="4480560" cy="914400"/>
+          </a:xfrm>
+          <a:prstGeom prst="rect">
+            <a:avLst/>
+          </a:prstGeom>
+          <a:noFill/>
+          <a:ln/>
+        </p:spPr>
+        <p:txBody>
+          <a:bodyPr wrap="square" lIns="0" tIns="0" rIns="0" bIns="0" rtlCol="0" anchor="ctr"/>
+          <a:lstStyle/>
+          <a:p>
+            <a:pPr indent="0" marL="0">
+              <a:buNone/>
+            </a:pPr>
+            <a:r>
+              <a:rPr lang="en-US" sz="6000" b="1" dirty="0">
+                <a:solidFill>
+                  <a:srgbClr val="156082"/>
                 </a:solidFill>
                 <a:latin typeface="Cambria" pitchFamily="34" charset="0"/>
                 <a:ea typeface="Cambria" pitchFamily="34" charset="-122"/>
                 <a:cs typeface="Cambria" pitchFamily="34" charset="-120"/>
               </a:rPr>
-              <a:t>Dispersion: the celestial fingerprint</a:t>
-            </a:r>
-            <a:endParaRPr lang="en-US" sz="1700" dirty="0"/>
-          </a:p>
-        </p:txBody>
-      </p:sp>
-      <p:sp>
-        <p:nvSpPr>
-          <p:cNvPr id="9" name="Text 6"/>
-          <p:cNvSpPr/>
-          <p:nvPr/>
-        </p:nvSpPr>
-        <p:spPr>
-          <a:xfrm>
-            <a:off x="841248" y="2286000"/>
-            <a:ext cx="4846320" cy="3017520"/>
+              <a:t>~9 σ</a:t>
+            </a:r>
+            <a:endParaRPr lang="en-US" sz="6000" dirty="0"/>
+          </a:p>
+        </p:txBody>
+      </p:sp>
+      <p:sp>
+        <p:nvSpPr>
+          <p:cNvPr id="11" name="Text 7"/>
+          <p:cNvSpPr/>
+          <p:nvPr/>
+        </p:nvSpPr>
+        <p:spPr>
+          <a:xfrm>
+            <a:off x="566928" y="2697480"/>
+            <a:ext cx="4480560" cy="320040"/>
+          </a:xfrm>
+          <a:prstGeom prst="rect">
+            <a:avLst/>
+          </a:prstGeom>
+          <a:noFill/>
+          <a:ln/>
+        </p:spPr>
+        <p:txBody>
+          <a:bodyPr wrap="square" lIns="0" tIns="0" rIns="0" bIns="0" rtlCol="0" anchor="ctr"/>
+          <a:lstStyle/>
+          <a:p>
+            <a:pPr indent="0" marL="0">
+              <a:buNone/>
+            </a:pPr>
+            <a:r>
+              <a:rPr lang="en-US" sz="1300" b="1" dirty="0">
+                <a:solidFill>
+                  <a:srgbClr val="B86A18"/>
+                </a:solidFill>
+                <a:latin typeface="Calibri" pitchFamily="34" charset="0"/>
+                <a:ea typeface="Calibri" pitchFamily="34" charset="-122"/>
+                <a:cs typeface="Calibri" pitchFamily="34" charset="-120"/>
+              </a:rPr>
+              <a:t>after cleanup, the best fit lands on the catalog values</a:t>
+            </a:r>
+            <a:endParaRPr lang="en-US" sz="1300" dirty="0"/>
+          </a:p>
+        </p:txBody>
+      </p:sp>
+      <p:sp>
+        <p:nvSpPr>
+          <p:cNvPr id="12" name="Text 8"/>
+          <p:cNvSpPr/>
+          <p:nvPr/>
+        </p:nvSpPr>
+        <p:spPr>
+          <a:xfrm>
+            <a:off x="566928" y="3246120"/>
+            <a:ext cx="4663440" cy="2926080"/>
           </a:xfrm>
           <a:prstGeom prst="rect">
             <a:avLst/>
@@ -2709,13 +2994,13 @@
           <a:p>
             <a:pPr marL="342900" indent="-342900">
               <a:spcAft>
-                <a:spcPts val="800"/>
+                <a:spcPts val="900"/>
               </a:spcAft>
               <a:buSzPct val="100000"/>
               <a:buChar char="•"/>
             </a:pPr>
             <a:r>
-              <a:rPr lang="en-US" sz="1300" dirty="0">
+              <a:rPr lang="en-US" sz="1250" dirty="0">
                 <a:solidFill>
                   <a:srgbClr val="24343C"/>
                 </a:solidFill>
@@ -2723,20 +3008,20 @@
                 <a:ea typeface="Calibri" pitchFamily="34" charset="-122"/>
                 <a:cs typeface="Calibri" pitchFamily="34" charset="-120"/>
               </a:rPr>
-              <a:t>Interstellar plasma delays lower frequencies — a sweep imposed by light-years of travel</a:t>
-            </a:r>
-            <a:endParaRPr lang="en-US" sz="1300" dirty="0"/>
+              <a:t>Clear peak at the pulsar’s 253 ms period when folded at the known ephemeris (~9.7 σ as recorded)</a:t>
+            </a:r>
+            <a:endParaRPr lang="en-US" sz="1250" dirty="0"/>
           </a:p>
           <a:p>
             <a:pPr marL="342900" indent="-342900">
               <a:spcAft>
-                <a:spcPts val="800"/>
+                <a:spcPts val="900"/>
               </a:spcAft>
               <a:buSzPct val="100000"/>
               <a:buChar char="•"/>
             </a:pPr>
             <a:r>
-              <a:rPr lang="en-US" sz="1300" dirty="0">
+              <a:rPr lang="en-US" sz="1250" dirty="0">
                 <a:solidFill>
                   <a:srgbClr val="24343C"/>
                 </a:solidFill>
@@ -2744,20 +3029,20 @@
                 <a:ea typeface="Calibri" pitchFamily="34" charset="-122"/>
                 <a:cs typeface="Calibri" pitchFamily="34" charset="-120"/>
               </a:rPr>
-              <a:t>Detection strength peaks at the catalog dispersion measure and falls toward zero</a:t>
-            </a:r>
-            <a:endParaRPr lang="en-US" sz="1300" dirty="0"/>
+              <a:t>With RFI masked and the timebase repaired, the search converges on P = 253.05 ms and DM ≈ 2.9 — the catalog values — exactly how a real detection behaves</a:t>
+            </a:r>
+            <a:endParaRPr lang="en-US" sz="1250" dirty="0"/>
           </a:p>
           <a:p>
             <a:pPr marL="342900" indent="-342900">
               <a:spcAft>
-                <a:spcPts val="800"/>
+                <a:spcPts val="900"/>
               </a:spcAft>
               <a:buSzPct val="100000"/>
               <a:buChar char="•"/>
             </a:pPr>
             <a:r>
-              <a:rPr lang="en-US" sz="1300" dirty="0">
+              <a:rPr lang="en-US" sz="1250" dirty="0">
                 <a:solidFill>
                   <a:srgbClr val="24343C"/>
                 </a:solidFill>
@@ -2765,9 +3050,9 @@
                 <a:ea typeface="Calibri" pitchFamily="34" charset="-122"/>
                 <a:cs typeface="Calibri" pitchFamily="34" charset="-120"/>
               </a:rPr>
-              <a:t>Terrestrial interference shows no dispersion at all</a:t>
-            </a:r>
-            <a:endParaRPr lang="en-US" sz="1300" dirty="0"/>
+              <a:t>But it is noise-limited: at 20 MHz bandwidth DM 2.97 is indistinguishable from zero, and ~9 σ leaves no room for decisive sub-tests — a strong candidate, not yet a publishable detection</a:t>
+            </a:r>
+            <a:endParaRPr lang="en-US" sz="1250" dirty="0"/>
           </a:p>
           <a:p>
             <a:pPr marL="342900" indent="-342900">
@@ -2775,116 +3060,7 @@
               <a:buChar char="•"/>
             </a:pPr>
             <a:r>
-              <a:rPr lang="en-US" sz="1300" b="1" dirty="0">
-                <a:solidFill>
-                  <a:srgbClr val="156082"/>
-                </a:solidFill>
-                <a:latin typeface="Calibri" pitchFamily="34" charset="0"/>
-                <a:ea typeface="Calibri" pitchFamily="34" charset="-122"/>
-                <a:cs typeface="Calibri" pitchFamily="34" charset="-120"/>
-              </a:rPr>
-              <a:t>One curve separates a genuine pulsar from RFI</a:t>
-            </a:r>
-            <a:endParaRPr lang="en-US" sz="1300" dirty="0"/>
-          </a:p>
-        </p:txBody>
-      </p:sp>
-      <p:sp>
-        <p:nvSpPr>
-          <p:cNvPr id="10" name="Shape 7"/>
-          <p:cNvSpPr/>
-          <p:nvPr/>
-        </p:nvSpPr>
-        <p:spPr>
-          <a:xfrm>
-            <a:off x="6217920" y="1554480"/>
-            <a:ext cx="5394960" cy="3977640"/>
-          </a:xfrm>
-          <a:prstGeom prst="roundRect">
-            <a:avLst>
-              <a:gd name="adj" fmla="val 1839"/>
-            </a:avLst>
-          </a:prstGeom>
-          <a:solidFill>
-            <a:srgbClr val="EFF4F7"/>
-          </a:solidFill>
-          <a:ln w="9525">
-            <a:solidFill>
-              <a:srgbClr val="D7E3EA"/>
-            </a:solidFill>
-            <a:prstDash val="solid"/>
-          </a:ln>
-        </p:spPr>
-      </p:sp>
-      <p:sp>
-        <p:nvSpPr>
-          <p:cNvPr id="11" name="Text 8"/>
-          <p:cNvSpPr/>
-          <p:nvPr/>
-        </p:nvSpPr>
-        <p:spPr>
-          <a:xfrm>
-            <a:off x="6492240" y="1783080"/>
-            <a:ext cx="4846320" cy="365760"/>
-          </a:xfrm>
-          <a:prstGeom prst="rect">
-            <a:avLst/>
-          </a:prstGeom>
-          <a:noFill/>
-          <a:ln/>
-        </p:spPr>
-        <p:txBody>
-          <a:bodyPr wrap="square" lIns="0" tIns="0" rIns="0" bIns="0" rtlCol="0" anchor="ctr"/>
-          <a:lstStyle/>
-          <a:p>
-            <a:pPr indent="0" marL="0">
-              <a:buNone/>
-            </a:pPr>
-            <a:r>
-              <a:rPr lang="en-US" sz="1700" b="1" dirty="0">
-                <a:solidFill>
-                  <a:srgbClr val="0A2F40"/>
-                </a:solidFill>
-                <a:latin typeface="Cambria" pitchFamily="34" charset="0"/>
-                <a:ea typeface="Cambria" pitchFamily="34" charset="-122"/>
-                <a:cs typeface="Cambria" pitchFamily="34" charset="-120"/>
-              </a:rPr>
-              <a:t>Two platforms, two toolchains, one answer</a:t>
-            </a:r>
-            <a:endParaRPr lang="en-US" sz="1700" dirty="0"/>
-          </a:p>
-        </p:txBody>
-      </p:sp>
-      <p:sp>
-        <p:nvSpPr>
-          <p:cNvPr id="12" name="Text 9"/>
-          <p:cNvSpPr/>
-          <p:nvPr/>
-        </p:nvSpPr>
-        <p:spPr>
-          <a:xfrm>
-            <a:off x="6492240" y="2286000"/>
-            <a:ext cx="4846320" cy="1463040"/>
-          </a:xfrm>
-          <a:prstGeom prst="rect">
-            <a:avLst/>
-          </a:prstGeom>
-          <a:noFill/>
-          <a:ln/>
-        </p:spPr>
-        <p:txBody>
-          <a:bodyPr wrap="square" lIns="0" tIns="0" rIns="0" bIns="0" rtlCol="0" anchor="t"/>
-          <a:lstStyle/>
-          <a:p>
-            <a:pPr marL="342900" indent="-342900">
-              <a:spcAft>
-                <a:spcPts val="800"/>
-              </a:spcAft>
-              <a:buSzPct val="100000"/>
-              <a:buChar char="•"/>
-            </a:pPr>
-            <a:r>
-              <a:rPr lang="en-US" sz="1300" dirty="0">
+              <a:rPr lang="en-US" sz="1250" dirty="0">
                 <a:solidFill>
                   <a:srgbClr val="24343C"/>
                 </a:solidFill>
@@ -2892,208 +3068,7 @@
                 <a:ea typeface="Calibri" pitchFamily="34" charset="-122"/>
                 <a:cs typeface="Calibri" pitchFamily="34" charset="-120"/>
               </a:rPr>
-              <a:t>macOS — PRESTO v5.0.2, re-run on v6.0.0</a:t>
-            </a:r>
-            <a:endParaRPr lang="en-US" sz="1300" dirty="0"/>
-          </a:p>
-          <a:p>
-            <a:pPr marL="342900" indent="-342900">
-              <a:spcAft>
-                <a:spcPts val="800"/>
-              </a:spcAft>
-              <a:buSzPct val="100000"/>
-              <a:buChar char="•"/>
-            </a:pPr>
-            <a:r>
-              <a:rPr lang="en-US" sz="1300" dirty="0">
-                <a:solidFill>
-                  <a:srgbClr val="24343C"/>
-                </a:solidFill>
-                <a:latin typeface="Calibri" pitchFamily="34" charset="0"/>
-                <a:ea typeface="Calibri" pitchFamily="34" charset="-122"/>
-                <a:cs typeface="Calibri" pitchFamily="34" charset="-120"/>
-              </a:rPr>
-              <a:t>Windows — PRESTO v6.0.0 under WSL (a new DSES capability)</a:t>
-            </a:r>
-            <a:endParaRPr lang="en-US" sz="1300" dirty="0"/>
-          </a:p>
-          <a:p>
-            <a:pPr marL="342900" indent="-342900">
-              <a:buSzPct val="100000"/>
-              <a:buChar char="•"/>
-            </a:pPr>
-            <a:r>
-              <a:rPr lang="en-US" sz="1300" dirty="0">
-                <a:solidFill>
-                  <a:srgbClr val="24343C"/>
-                </a:solidFill>
-                <a:latin typeface="Calibri" pitchFamily="34" charset="0"/>
-                <a:ea typeface="Calibri" pitchFamily="34" charset="-122"/>
-                <a:cs typeface="Calibri" pitchFamily="34" charset="-120"/>
-              </a:rPr>
-              <a:t>Identical fold commands, independently built stacks</a:t>
-            </a:r>
-            <a:endParaRPr lang="en-US" sz="1300" dirty="0"/>
-          </a:p>
-        </p:txBody>
-      </p:sp>
-      <p:sp>
-        <p:nvSpPr>
-          <p:cNvPr id="13" name="Shape 10"/>
-          <p:cNvSpPr/>
-          <p:nvPr/>
-        </p:nvSpPr>
-        <p:spPr>
-          <a:xfrm>
-            <a:off x="6492240" y="3977640"/>
-            <a:ext cx="4846320" cy="1234440"/>
-          </a:xfrm>
-          <a:prstGeom prst="roundRect">
-            <a:avLst>
-              <a:gd name="adj" fmla="val 5926"/>
-            </a:avLst>
-          </a:prstGeom>
-          <a:solidFill>
-            <a:srgbClr val="FFFFFF"/>
-          </a:solidFill>
-          <a:ln w="9525">
-            <a:solidFill>
-              <a:srgbClr val="D7E3EA"/>
-            </a:solidFill>
-            <a:prstDash val="solid"/>
-          </a:ln>
-        </p:spPr>
-      </p:sp>
-      <p:sp>
-        <p:nvSpPr>
-          <p:cNvPr id="14" name="Text 11"/>
-          <p:cNvSpPr/>
-          <p:nvPr/>
-        </p:nvSpPr>
-        <p:spPr>
-          <a:xfrm>
-            <a:off x="6720840" y="4069080"/>
-            <a:ext cx="4480560" cy="1051560"/>
-          </a:xfrm>
-          <a:prstGeom prst="rect">
-            <a:avLst/>
-          </a:prstGeom>
-          <a:noFill/>
-          <a:ln/>
-        </p:spPr>
-        <p:txBody>
-          <a:bodyPr wrap="square" lIns="0" tIns="0" rIns="0" bIns="0" rtlCol="0" anchor="ctr"/>
-          <a:lstStyle/>
-          <a:p>
-            <a:pPr indent="0" marL="0">
-              <a:buNone/>
-            </a:pPr>
-            <a:r>
-              <a:rPr lang="en-US" sz="1100" dirty="0">
-                <a:solidFill>
-                  <a:srgbClr val="6B7A82"/>
-                </a:solidFill>
-                <a:latin typeface="Calibri" pitchFamily="34" charset="0"/>
-                <a:ea typeface="Calibri" pitchFamily="34" charset="-122"/>
-                <a:cs typeface="Calibri" pitchFamily="34" charset="-120"/>
-              </a:rPr>
-              <a:t>B0329+54 probability-of-noise
-</a:t>
-            </a:r>
-            <a:pPr indent="0" marL="0">
-              <a:buNone/>
-            </a:pPr>
-            <a:r>
-              <a:rPr lang="en-US" sz="1900" b="1" dirty="0">
-                <a:solidFill>
-                  <a:srgbClr val="156082"/>
-                </a:solidFill>
-                <a:latin typeface="Calibri" pitchFamily="34" charset="0"/>
-                <a:ea typeface="Calibri" pitchFamily="34" charset="-122"/>
-                <a:cs typeface="Calibri" pitchFamily="34" charset="-120"/>
-              </a:rPr>
-              <a:t>4.49×10⁻⁹⁰</a:t>
-            </a:r>
-            <a:pPr indent="0" marL="0">
-              <a:buNone/>
-            </a:pPr>
-            <a:r>
-              <a:rPr lang="en-US" sz="1100" dirty="0">
-                <a:solidFill>
-                  <a:srgbClr val="24343C"/>
-                </a:solidFill>
-                <a:latin typeface="Calibri" pitchFamily="34" charset="0"/>
-                <a:ea typeface="Calibri" pitchFamily="34" charset="-122"/>
-                <a:cs typeface="Calibri" pitchFamily="34" charset="-120"/>
-              </a:rPr>
-              <a:t>  Windows      </a:t>
-            </a:r>
-            <a:pPr indent="0" marL="0">
-              <a:buNone/>
-            </a:pPr>
-            <a:r>
-              <a:rPr lang="en-US" sz="1900" b="1" dirty="0">
-                <a:solidFill>
-                  <a:srgbClr val="B86A18"/>
-                </a:solidFill>
-                <a:latin typeface="Calibri" pitchFamily="34" charset="0"/>
-                <a:ea typeface="Calibri" pitchFamily="34" charset="-122"/>
-                <a:cs typeface="Calibri" pitchFamily="34" charset="-120"/>
-              </a:rPr>
-              <a:t>4.5×10⁻⁹⁰</a:t>
-            </a:r>
-            <a:pPr indent="0" marL="0">
-              <a:buNone/>
-            </a:pPr>
-            <a:r>
-              <a:rPr lang="en-US" sz="1100" dirty="0">
-                <a:solidFill>
-                  <a:srgbClr val="24343C"/>
-                </a:solidFill>
-                <a:latin typeface="Calibri" pitchFamily="34" charset="0"/>
-                <a:ea typeface="Calibri" pitchFamily="34" charset="-122"/>
-                <a:cs typeface="Calibri" pitchFamily="34" charset="-120"/>
-              </a:rPr>
-              <a:t>  macOS</a:t>
-            </a:r>
-            <a:endParaRPr lang="en-US" sz="1100" dirty="0"/>
-          </a:p>
-        </p:txBody>
-      </p:sp>
-      <p:sp>
-        <p:nvSpPr>
-          <p:cNvPr id="15" name="Text 12"/>
-          <p:cNvSpPr/>
-          <p:nvPr/>
-        </p:nvSpPr>
-        <p:spPr>
-          <a:xfrm>
-            <a:off x="566928" y="5806440"/>
-            <a:ext cx="10972800" cy="548640"/>
-          </a:xfrm>
-          <a:prstGeom prst="rect">
-            <a:avLst/>
-          </a:prstGeom>
-          <a:noFill/>
-          <a:ln/>
-        </p:spPr>
-        <p:txBody>
-          <a:bodyPr wrap="square" lIns="0" tIns="0" rIns="0" bIns="0" rtlCol="0" anchor="t"/>
-          <a:lstStyle/>
-          <a:p>
-            <a:pPr indent="0" marL="0">
-              <a:buNone/>
-            </a:pPr>
-            <a:r>
-              <a:rPr lang="en-US" sz="1250" i="1" dirty="0">
-                <a:solidFill>
-                  <a:srgbClr val="6B7A82"/>
-                </a:solidFill>
-                <a:latin typeface="Calibri" pitchFamily="34" charset="0"/>
-                <a:ea typeface="Calibri" pitchFamily="34" charset="-122"/>
-                <a:cs typeface="Calibri" pitchFamily="34" charset="-120"/>
-              </a:rPr>
-              <a:t>Every fold now produces a standardized PDF diagnostic stored beside the recording — validation minutes after capture, on whichever machine is at hand.</a:t>
+              <a:t>The remaining gains are observational: a 90-minute track (≈20 σ), several sessions to catch scintillation maxima, wider bandwidth</a:t>
             </a:r>
             <a:endParaRPr lang="en-US" sz="1250" dirty="0"/>
           </a:p>
@@ -3164,7 +3139,7 @@
                 <a:ea typeface="Calibri" pitchFamily="34" charset="-122"/>
                 <a:cs typeface="Calibri" pitchFamily="34" charset="-120"/>
               </a:rPr>
-              <a:t>FIELD ENGINEERING</a:t>
+              <a:t>VERIFICATION</a:t>
             </a:r>
             <a:endParaRPr lang="en-US" sz="1100" dirty="0"/>
           </a:p>
@@ -3203,7 +3178,7 @@
                 <a:ea typeface="Cambria" pitchFamily="34" charset="-122"/>
                 <a:cs typeface="Cambria" pitchFamily="34" charset="-120"/>
               </a:rPr>
-              <a:t>The case of the headless Raspberry Pi</a:t>
+              <a:t>Real — and independently reproducible</a:t>
             </a:r>
             <a:endParaRPr lang="en-US" sz="2900" dirty="0"/>
           </a:p>
@@ -3319,12 +3294,12 @@
         </p:nvSpPr>
         <p:spPr>
           <a:xfrm>
-            <a:off x="566928" y="1828800"/>
-            <a:ext cx="2670048" cy="2834640"/>
+            <a:off x="566928" y="1554480"/>
+            <a:ext cx="5394960" cy="3977640"/>
           </a:xfrm>
           <a:prstGeom prst="roundRect">
             <a:avLst>
-              <a:gd name="adj" fmla="val 2740"/>
+              <a:gd name="adj" fmla="val 1839"/>
             </a:avLst>
           </a:prstGeom>
           <a:solidFill>
@@ -3346,69 +3321,24 @@
         </p:nvSpPr>
         <p:spPr>
           <a:xfrm>
-            <a:off x="786384" y="2084832"/>
-            <a:ext cx="475488" cy="475488"/>
-          </a:xfrm>
-          <a:prstGeom prst="ellipse">
-            <a:avLst/>
-          </a:prstGeom>
-          <a:solidFill>
-            <a:srgbClr val="156082"/>
-          </a:solidFill>
-          <a:ln>
-            <a:solidFill>
-              <a:srgbClr val="156082"/>
-            </a:solidFill>
-          </a:ln>
-        </p:spPr>
-        <p:txBody>
-          <a:bodyPr wrap="square" lIns="0" tIns="0" rIns="0" bIns="0" rtlCol="0" anchor="ctr"/>
-          <a:lstStyle/>
-          <a:p>
-            <a:pPr algn="ctr" indent="0" marL="0">
-              <a:buNone/>
-            </a:pPr>
-            <a:r>
-              <a:rPr lang="en-US" sz="1800" b="1" dirty="0">
-                <a:solidFill>
-                  <a:srgbClr val="FFFFFF"/>
-                </a:solidFill>
-                <a:latin typeface="Calibri" pitchFamily="34" charset="0"/>
-                <a:ea typeface="Calibri" pitchFamily="34" charset="-122"/>
-                <a:cs typeface="Calibri" pitchFamily="34" charset="-120"/>
-              </a:rPr>
-              <a:t>1</a:t>
-            </a:r>
-            <a:endParaRPr lang="en-US" sz="1800" dirty="0"/>
-          </a:p>
-        </p:txBody>
-      </p:sp>
-      <p:sp>
-        <p:nvSpPr>
-          <p:cNvPr id="9" name="Text 6"/>
-          <p:cNvSpPr/>
-          <p:nvPr/>
-        </p:nvSpPr>
-        <p:spPr>
-          <a:xfrm>
-            <a:off x="786384" y="2743200"/>
-            <a:ext cx="2231136" cy="365760"/>
-          </a:xfrm>
-          <a:prstGeom prst="rect">
-            <a:avLst/>
-          </a:prstGeom>
-          <a:noFill/>
-          <a:ln/>
-        </p:spPr>
-        <p:txBody>
-          <a:bodyPr wrap="square" lIns="0" tIns="0" rIns="0" bIns="0" rtlCol="0" anchor="ctr"/>
-          <a:lstStyle/>
-          <a:p>
-            <a:pPr indent="0" marL="0">
-              <a:buNone/>
-            </a:pPr>
-            <a:r>
-              <a:rPr lang="en-US" sz="1500" b="1" dirty="0">
+            <a:off x="841248" y="1783080"/>
+            <a:ext cx="4846320" cy="365760"/>
+          </a:xfrm>
+          <a:prstGeom prst="rect">
+            <a:avLst/>
+          </a:prstGeom>
+          <a:noFill/>
+          <a:ln/>
+        </p:spPr>
+        <p:txBody>
+          <a:bodyPr wrap="square" lIns="0" tIns="0" rIns="0" bIns="0" rtlCol="0" anchor="ctr"/>
+          <a:lstStyle/>
+          <a:p>
+            <a:pPr indent="0" marL="0">
+              <a:buNone/>
+            </a:pPr>
+            <a:r>
+              <a:rPr lang="en-US" sz="1700" b="1" dirty="0">
                 <a:solidFill>
                   <a:srgbClr val="0A2F40"/>
                 </a:solidFill>
@@ -3416,22 +3346,22 @@
                 <a:ea typeface="Cambria" pitchFamily="34" charset="-122"/>
                 <a:cs typeface="Cambria" pitchFamily="34" charset="-120"/>
               </a:rPr>
-              <a:t>Symptoms</a:t>
-            </a:r>
-            <a:endParaRPr lang="en-US" sz="1500" dirty="0"/>
-          </a:p>
-        </p:txBody>
-      </p:sp>
-      <p:sp>
-        <p:nvSpPr>
-          <p:cNvPr id="10" name="Text 7"/>
-          <p:cNvSpPr/>
-          <p:nvPr/>
-        </p:nvSpPr>
-        <p:spPr>
-          <a:xfrm>
-            <a:off x="786384" y="3154680"/>
-            <a:ext cx="2231136" cy="1371600"/>
+              <a:t>Dispersion: the celestial fingerprint</a:t>
+            </a:r>
+            <a:endParaRPr lang="en-US" sz="1700" dirty="0"/>
+          </a:p>
+        </p:txBody>
+      </p:sp>
+      <p:sp>
+        <p:nvSpPr>
+          <p:cNvPr id="9" name="Text 6"/>
+          <p:cNvSpPr/>
+          <p:nvPr/>
+        </p:nvSpPr>
+        <p:spPr>
+          <a:xfrm>
+            <a:off x="841248" y="2286000"/>
+            <a:ext cx="4846320" cy="3017520"/>
           </a:xfrm>
           <a:prstGeom prst="rect">
             <a:avLst/>
@@ -3443,11 +3373,15 @@
           <a:bodyPr wrap="square" lIns="0" tIns="0" rIns="0" bIns="0" rtlCol="0" anchor="t"/>
           <a:lstStyle/>
           <a:p>
-            <a:pPr indent="0" marL="0">
-              <a:buNone/>
-            </a:pPr>
-            <a:r>
-              <a:rPr lang="en-US" sz="1150" dirty="0">
+            <a:pPr marL="342900" indent="-342900">
+              <a:spcAft>
+                <a:spcPts val="800"/>
+              </a:spcAft>
+              <a:buSzPct val="100000"/>
+              <a:buChar char="•"/>
+            </a:pPr>
+            <a:r>
+              <a:rPr lang="en-US" sz="1300" dirty="0">
                 <a:solidFill>
                   <a:srgbClr val="24343C"/>
                 </a:solidFill>
@@ -3455,26 +3389,86 @@
                 <a:ea typeface="Calibri" pitchFamily="34" charset="-122"/>
                 <a:cs typeface="Calibri" pitchFamily="34" charset="-120"/>
               </a:rPr>
-              <a:t>Dropdown menus dead, Help menu blank, window opens tiny in a corner — on the field box, mid-session</a:t>
-            </a:r>
-            <a:endParaRPr lang="en-US" sz="1150" dirty="0"/>
-          </a:p>
-        </p:txBody>
-      </p:sp>
-      <p:sp>
-        <p:nvSpPr>
-          <p:cNvPr id="11" name="Shape 8"/>
-          <p:cNvSpPr/>
-          <p:nvPr/>
-        </p:nvSpPr>
-        <p:spPr>
-          <a:xfrm>
-            <a:off x="3364992" y="1828800"/>
-            <a:ext cx="2670048" cy="2834640"/>
+              <a:t>Interstellar plasma delays lower frequencies — a sweep imposed by light-years of travel</a:t>
+            </a:r>
+            <a:endParaRPr lang="en-US" sz="1300" dirty="0"/>
+          </a:p>
+          <a:p>
+            <a:pPr marL="342900" indent="-342900">
+              <a:spcAft>
+                <a:spcPts val="800"/>
+              </a:spcAft>
+              <a:buSzPct val="100000"/>
+              <a:buChar char="•"/>
+            </a:pPr>
+            <a:r>
+              <a:rPr lang="en-US" sz="1300" dirty="0">
+                <a:solidFill>
+                  <a:srgbClr val="24343C"/>
+                </a:solidFill>
+                <a:latin typeface="Calibri" pitchFamily="34" charset="0"/>
+                <a:ea typeface="Calibri" pitchFamily="34" charset="-122"/>
+                <a:cs typeface="Calibri" pitchFamily="34" charset="-120"/>
+              </a:rPr>
+              <a:t>Detection strength peaks at the catalog dispersion measure and falls toward zero</a:t>
+            </a:r>
+            <a:endParaRPr lang="en-US" sz="1300" dirty="0"/>
+          </a:p>
+          <a:p>
+            <a:pPr marL="342900" indent="-342900">
+              <a:spcAft>
+                <a:spcPts val="800"/>
+              </a:spcAft>
+              <a:buSzPct val="100000"/>
+              <a:buChar char="•"/>
+            </a:pPr>
+            <a:r>
+              <a:rPr lang="en-US" sz="1300" dirty="0">
+                <a:solidFill>
+                  <a:srgbClr val="24343C"/>
+                </a:solidFill>
+                <a:latin typeface="Calibri" pitchFamily="34" charset="0"/>
+                <a:ea typeface="Calibri" pitchFamily="34" charset="-122"/>
+                <a:cs typeface="Calibri" pitchFamily="34" charset="-120"/>
+              </a:rPr>
+              <a:t>Terrestrial interference shows no dispersion at all</a:t>
+            </a:r>
+            <a:endParaRPr lang="en-US" sz="1300" dirty="0"/>
+          </a:p>
+          <a:p>
+            <a:pPr marL="342900" indent="-342900">
+              <a:buSzPct val="100000"/>
+              <a:buChar char="•"/>
+            </a:pPr>
+            <a:r>
+              <a:rPr lang="en-US" sz="1300" b="1" dirty="0">
+                <a:solidFill>
+                  <a:srgbClr val="156082"/>
+                </a:solidFill>
+                <a:latin typeface="Calibri" pitchFamily="34" charset="0"/>
+                <a:ea typeface="Calibri" pitchFamily="34" charset="-122"/>
+                <a:cs typeface="Calibri" pitchFamily="34" charset="-120"/>
+              </a:rPr>
+              <a:t>One curve separates a genuine pulsar from RFI</a:t>
+            </a:r>
+            <a:endParaRPr lang="en-US" sz="1300" dirty="0"/>
+          </a:p>
+        </p:txBody>
+      </p:sp>
+      <p:sp>
+        <p:nvSpPr>
+          <p:cNvPr id="10" name="Shape 7"/>
+          <p:cNvSpPr/>
+          <p:nvPr/>
+        </p:nvSpPr>
+        <p:spPr>
+          <a:xfrm>
+            <a:off x="6217920" y="1554480"/>
+            <a:ext cx="5394960" cy="3977640"/>
           </a:xfrm>
           <a:prstGeom prst="roundRect">
             <a:avLst>
-              <a:gd name="adj" fmla="val 2740"/>
+              <a:gd name="adj" fmla="val 1839"/>
             </a:avLst>
           </a:prstGeom>
           <a:solidFill>
@@ -3490,75 +3484,30 @@
       </p:sp>
       <p:sp>
         <p:nvSpPr>
-          <p:cNvPr id="12" name="Text 9"/>
-          <p:cNvSpPr/>
-          <p:nvPr/>
-        </p:nvSpPr>
-        <p:spPr>
-          <a:xfrm>
-            <a:off x="3584448" y="2084832"/>
-            <a:ext cx="475488" cy="475488"/>
-          </a:xfrm>
-          <a:prstGeom prst="ellipse">
-            <a:avLst/>
-          </a:prstGeom>
-          <a:solidFill>
-            <a:srgbClr val="156082"/>
-          </a:solidFill>
-          <a:ln>
-            <a:solidFill>
-              <a:srgbClr val="156082"/>
-            </a:solidFill>
-          </a:ln>
-        </p:spPr>
-        <p:txBody>
-          <a:bodyPr wrap="square" lIns="0" tIns="0" rIns="0" bIns="0" rtlCol="0" anchor="ctr"/>
-          <a:lstStyle/>
-          <a:p>
-            <a:pPr algn="ctr" indent="0" marL="0">
-              <a:buNone/>
-            </a:pPr>
-            <a:r>
-              <a:rPr lang="en-US" sz="1800" b="1" dirty="0">
-                <a:solidFill>
-                  <a:srgbClr val="FFFFFF"/>
-                </a:solidFill>
-                <a:latin typeface="Calibri" pitchFamily="34" charset="0"/>
-                <a:ea typeface="Calibri" pitchFamily="34" charset="-122"/>
-                <a:cs typeface="Calibri" pitchFamily="34" charset="-120"/>
-              </a:rPr>
-              <a:t>2</a:t>
-            </a:r>
-            <a:endParaRPr lang="en-US" sz="1800" dirty="0"/>
-          </a:p>
-        </p:txBody>
-      </p:sp>
-      <p:sp>
-        <p:nvSpPr>
-          <p:cNvPr id="13" name="Text 10"/>
-          <p:cNvSpPr/>
-          <p:nvPr/>
-        </p:nvSpPr>
-        <p:spPr>
-          <a:xfrm>
-            <a:off x="3584448" y="2743200"/>
-            <a:ext cx="2231136" cy="365760"/>
-          </a:xfrm>
-          <a:prstGeom prst="rect">
-            <a:avLst/>
-          </a:prstGeom>
-          <a:noFill/>
-          <a:ln/>
-        </p:spPr>
-        <p:txBody>
-          <a:bodyPr wrap="square" lIns="0" tIns="0" rIns="0" bIns="0" rtlCol="0" anchor="ctr"/>
-          <a:lstStyle/>
-          <a:p>
-            <a:pPr indent="0" marL="0">
-              <a:buNone/>
-            </a:pPr>
-            <a:r>
-              <a:rPr lang="en-US" sz="1500" b="1" dirty="0">
+          <p:cNvPr id="11" name="Text 8"/>
+          <p:cNvSpPr/>
+          <p:nvPr/>
+        </p:nvSpPr>
+        <p:spPr>
+          <a:xfrm>
+            <a:off x="6492240" y="1783080"/>
+            <a:ext cx="4846320" cy="365760"/>
+          </a:xfrm>
+          <a:prstGeom prst="rect">
+            <a:avLst/>
+          </a:prstGeom>
+          <a:noFill/>
+          <a:ln/>
+        </p:spPr>
+        <p:txBody>
+          <a:bodyPr wrap="square" lIns="0" tIns="0" rIns="0" bIns="0" rtlCol="0" anchor="ctr"/>
+          <a:lstStyle/>
+          <a:p>
+            <a:pPr indent="0" marL="0">
+              <a:buNone/>
+            </a:pPr>
+            <a:r>
+              <a:rPr lang="en-US" sz="1700" b="1" dirty="0">
                 <a:solidFill>
                   <a:srgbClr val="0A2F40"/>
                 </a:solidFill>
@@ -3566,22 +3515,22 @@
                 <a:ea typeface="Cambria" pitchFamily="34" charset="-122"/>
                 <a:cs typeface="Cambria" pitchFamily="34" charset="-120"/>
               </a:rPr>
-              <a:t>Diagnosis</a:t>
-            </a:r>
-            <a:endParaRPr lang="en-US" sz="1500" dirty="0"/>
-          </a:p>
-        </p:txBody>
-      </p:sp>
-      <p:sp>
-        <p:nvSpPr>
-          <p:cNvPr id="14" name="Text 11"/>
-          <p:cNvSpPr/>
-          <p:nvPr/>
-        </p:nvSpPr>
-        <p:spPr>
-          <a:xfrm>
-            <a:off x="3584448" y="3154680"/>
-            <a:ext cx="2231136" cy="1371600"/>
+              <a:t>Two platforms, two toolchains, one answer</a:t>
+            </a:r>
+            <a:endParaRPr lang="en-US" sz="1700" dirty="0"/>
+          </a:p>
+        </p:txBody>
+      </p:sp>
+      <p:sp>
+        <p:nvSpPr>
+          <p:cNvPr id="12" name="Text 9"/>
+          <p:cNvSpPr/>
+          <p:nvPr/>
+        </p:nvSpPr>
+        <p:spPr>
+          <a:xfrm>
+            <a:off x="6492240" y="2286000"/>
+            <a:ext cx="4846320" cy="1463040"/>
           </a:xfrm>
           <a:prstGeom prst="rect">
             <a:avLst/>
@@ -3593,11 +3542,15 @@
           <a:bodyPr wrap="square" lIns="0" tIns="0" rIns="0" bIns="0" rtlCol="0" anchor="t"/>
           <a:lstStyle/>
           <a:p>
-            <a:pPr indent="0" marL="0">
-              <a:buNone/>
-            </a:pPr>
-            <a:r>
-              <a:rPr lang="en-US" sz="1150" dirty="0">
+            <a:pPr marL="342900" indent="-342900">
+              <a:spcAft>
+                <a:spcPts val="800"/>
+              </a:spcAft>
+              <a:buSzPct val="100000"/>
+              <a:buChar char="•"/>
+            </a:pPr>
+            <a:r>
+              <a:rPr lang="en-US" sz="1300" dirty="0">
                 <a:solidFill>
                   <a:srgbClr val="24343C"/>
                 </a:solidFill>
@@ -3605,30 +3558,69 @@
                 <a:ea typeface="Calibri" pitchFamily="34" charset="-122"/>
                 <a:cs typeface="Calibri" pitchFamily="34" charset="-120"/>
               </a:rPr>
-              <a:t>Remote SSH into the site over Tailscale — while the trip continued</a:t>
-            </a:r>
-            <a:endParaRPr lang="en-US" sz="1150" dirty="0"/>
-          </a:p>
-        </p:txBody>
-      </p:sp>
-      <p:sp>
-        <p:nvSpPr>
-          <p:cNvPr id="15" name="Shape 12"/>
-          <p:cNvSpPr/>
-          <p:nvPr/>
-        </p:nvSpPr>
-        <p:spPr>
-          <a:xfrm>
-            <a:off x="6163056" y="1828800"/>
-            <a:ext cx="2670048" cy="2834640"/>
+              <a:t>macOS — PRESTO v5.0.2, re-run on v6.0.0</a:t>
+            </a:r>
+            <a:endParaRPr lang="en-US" sz="1300" dirty="0"/>
+          </a:p>
+          <a:p>
+            <a:pPr marL="342900" indent="-342900">
+              <a:spcAft>
+                <a:spcPts val="800"/>
+              </a:spcAft>
+              <a:buSzPct val="100000"/>
+              <a:buChar char="•"/>
+            </a:pPr>
+            <a:r>
+              <a:rPr lang="en-US" sz="1300" dirty="0">
+                <a:solidFill>
+                  <a:srgbClr val="24343C"/>
+                </a:solidFill>
+                <a:latin typeface="Calibri" pitchFamily="34" charset="0"/>
+                <a:ea typeface="Calibri" pitchFamily="34" charset="-122"/>
+                <a:cs typeface="Calibri" pitchFamily="34" charset="-120"/>
+              </a:rPr>
+              <a:t>Windows — PRESTO v6.0.0 under WSL (a new DSES capability)</a:t>
+            </a:r>
+            <a:endParaRPr lang="en-US" sz="1300" dirty="0"/>
+          </a:p>
+          <a:p>
+            <a:pPr marL="342900" indent="-342900">
+              <a:buSzPct val="100000"/>
+              <a:buChar char="•"/>
+            </a:pPr>
+            <a:r>
+              <a:rPr lang="en-US" sz="1300" dirty="0">
+                <a:solidFill>
+                  <a:srgbClr val="24343C"/>
+                </a:solidFill>
+                <a:latin typeface="Calibri" pitchFamily="34" charset="0"/>
+                <a:ea typeface="Calibri" pitchFamily="34" charset="-122"/>
+                <a:cs typeface="Calibri" pitchFamily="34" charset="-120"/>
+              </a:rPr>
+              <a:t>Identical fold commands, independently built stacks</a:t>
+            </a:r>
+            <a:endParaRPr lang="en-US" sz="1300" dirty="0"/>
+          </a:p>
+        </p:txBody>
+      </p:sp>
+      <p:sp>
+        <p:nvSpPr>
+          <p:cNvPr id="13" name="Shape 10"/>
+          <p:cNvSpPr/>
+          <p:nvPr/>
+        </p:nvSpPr>
+        <p:spPr>
+          <a:xfrm>
+            <a:off x="6492240" y="3977640"/>
+            <a:ext cx="4846320" cy="1234440"/>
           </a:xfrm>
           <a:prstGeom prst="roundRect">
             <a:avLst>
-              <a:gd name="adj" fmla="val 2740"/>
+              <a:gd name="adj" fmla="val 5926"/>
             </a:avLst>
           </a:prstGeom>
           <a:solidFill>
-            <a:srgbClr val="EFF4F7"/>
+            <a:srgbClr val="FFFFFF"/>
           </a:solidFill>
           <a:ln w="9525">
             <a:solidFill>
@@ -3640,98 +3632,110 @@
       </p:sp>
       <p:sp>
         <p:nvSpPr>
-          <p:cNvPr id="16" name="Text 13"/>
-          <p:cNvSpPr/>
-          <p:nvPr/>
-        </p:nvSpPr>
-        <p:spPr>
-          <a:xfrm>
-            <a:off x="6382512" y="2084832"/>
-            <a:ext cx="475488" cy="475488"/>
-          </a:xfrm>
-          <a:prstGeom prst="ellipse">
-            <a:avLst/>
-          </a:prstGeom>
-          <a:solidFill>
-            <a:srgbClr val="156082"/>
-          </a:solidFill>
-          <a:ln>
-            <a:solidFill>
-              <a:srgbClr val="156082"/>
-            </a:solidFill>
-          </a:ln>
-        </p:spPr>
-        <p:txBody>
-          <a:bodyPr wrap="square" lIns="0" tIns="0" rIns="0" bIns="0" rtlCol="0" anchor="ctr"/>
-          <a:lstStyle/>
-          <a:p>
-            <a:pPr algn="ctr" indent="0" marL="0">
-              <a:buNone/>
-            </a:pPr>
-            <a:r>
-              <a:rPr lang="en-US" sz="1800" b="1" dirty="0">
-                <a:solidFill>
-                  <a:srgbClr val="FFFFFF"/>
-                </a:solidFill>
-                <a:latin typeface="Calibri" pitchFamily="34" charset="0"/>
-                <a:ea typeface="Calibri" pitchFamily="34" charset="-122"/>
-                <a:cs typeface="Calibri" pitchFamily="34" charset="-120"/>
-              </a:rPr>
-              <a:t>3</a:t>
-            </a:r>
-            <a:endParaRPr lang="en-US" sz="1800" dirty="0"/>
-          </a:p>
-        </p:txBody>
-      </p:sp>
-      <p:sp>
-        <p:nvSpPr>
-          <p:cNvPr id="17" name="Text 14"/>
-          <p:cNvSpPr/>
-          <p:nvPr/>
-        </p:nvSpPr>
-        <p:spPr>
-          <a:xfrm>
-            <a:off x="6382512" y="2743200"/>
-            <a:ext cx="2231136" cy="365760"/>
-          </a:xfrm>
-          <a:prstGeom prst="rect">
-            <a:avLst/>
-          </a:prstGeom>
-          <a:noFill/>
-          <a:ln/>
-        </p:spPr>
-        <p:txBody>
-          <a:bodyPr wrap="square" lIns="0" tIns="0" rIns="0" bIns="0" rtlCol="0" anchor="ctr"/>
-          <a:lstStyle/>
-          <a:p>
-            <a:pPr indent="0" marL="0">
-              <a:buNone/>
-            </a:pPr>
-            <a:r>
-              <a:rPr lang="en-US" sz="1500" b="1" dirty="0">
-                <a:solidFill>
-                  <a:srgbClr val="0A2F40"/>
-                </a:solidFill>
-                <a:latin typeface="Cambria" pitchFamily="34" charset="0"/>
-                <a:ea typeface="Cambria" pitchFamily="34" charset="-122"/>
-                <a:cs typeface="Cambria" pitchFamily="34" charset="-120"/>
-              </a:rPr>
-              <a:t>Root cause</a:t>
-            </a:r>
-            <a:endParaRPr lang="en-US" sz="1500" dirty="0"/>
-          </a:p>
-        </p:txBody>
-      </p:sp>
-      <p:sp>
-        <p:nvSpPr>
-          <p:cNvPr id="18" name="Text 15"/>
-          <p:cNvSpPr/>
-          <p:nvPr/>
-        </p:nvSpPr>
-        <p:spPr>
-          <a:xfrm>
-            <a:off x="6382512" y="3154680"/>
-            <a:ext cx="2231136" cy="1371600"/>
+          <p:cNvPr id="14" name="Text 11"/>
+          <p:cNvSpPr/>
+          <p:nvPr/>
+        </p:nvSpPr>
+        <p:spPr>
+          <a:xfrm>
+            <a:off x="6720840" y="4069080"/>
+            <a:ext cx="4480560" cy="1051560"/>
+          </a:xfrm>
+          <a:prstGeom prst="rect">
+            <a:avLst/>
+          </a:prstGeom>
+          <a:noFill/>
+          <a:ln/>
+        </p:spPr>
+        <p:txBody>
+          <a:bodyPr wrap="square" lIns="0" tIns="0" rIns="0" bIns="0" rtlCol="0" anchor="ctr"/>
+          <a:lstStyle/>
+          <a:p>
+            <a:pPr indent="0" marL="0">
+              <a:buNone/>
+            </a:pPr>
+            <a:r>
+              <a:rPr lang="en-US" sz="1100" dirty="0">
+                <a:solidFill>
+                  <a:srgbClr val="6B7A82"/>
+                </a:solidFill>
+                <a:latin typeface="Calibri" pitchFamily="34" charset="0"/>
+                <a:ea typeface="Calibri" pitchFamily="34" charset="-122"/>
+                <a:cs typeface="Calibri" pitchFamily="34" charset="-120"/>
+              </a:rPr>
+              <a:t>B0329+54 probability-of-noise
+</a:t>
+            </a:r>
+            <a:pPr indent="0" marL="0">
+              <a:buNone/>
+            </a:pPr>
+            <a:r>
+              <a:rPr lang="en-US" sz="1900" b="1" dirty="0">
+                <a:solidFill>
+                  <a:srgbClr val="156082"/>
+                </a:solidFill>
+                <a:latin typeface="Calibri" pitchFamily="34" charset="0"/>
+                <a:ea typeface="Calibri" pitchFamily="34" charset="-122"/>
+                <a:cs typeface="Calibri" pitchFamily="34" charset="-120"/>
+              </a:rPr>
+              <a:t>4.49×10⁻⁹⁰</a:t>
+            </a:r>
+            <a:pPr indent="0" marL="0">
+              <a:buNone/>
+            </a:pPr>
+            <a:r>
+              <a:rPr lang="en-US" sz="1100" dirty="0">
+                <a:solidFill>
+                  <a:srgbClr val="24343C"/>
+                </a:solidFill>
+                <a:latin typeface="Calibri" pitchFamily="34" charset="0"/>
+                <a:ea typeface="Calibri" pitchFamily="34" charset="-122"/>
+                <a:cs typeface="Calibri" pitchFamily="34" charset="-120"/>
+              </a:rPr>
+              <a:t>  Windows      </a:t>
+            </a:r>
+            <a:pPr indent="0" marL="0">
+              <a:buNone/>
+            </a:pPr>
+            <a:r>
+              <a:rPr lang="en-US" sz="1900" b="1" dirty="0">
+                <a:solidFill>
+                  <a:srgbClr val="B86A18"/>
+                </a:solidFill>
+                <a:latin typeface="Calibri" pitchFamily="34" charset="0"/>
+                <a:ea typeface="Calibri" pitchFamily="34" charset="-122"/>
+                <a:cs typeface="Calibri" pitchFamily="34" charset="-120"/>
+              </a:rPr>
+              <a:t>4.5×10⁻⁹⁰</a:t>
+            </a:r>
+            <a:pPr indent="0" marL="0">
+              <a:buNone/>
+            </a:pPr>
+            <a:r>
+              <a:rPr lang="en-US" sz="1100" dirty="0">
+                <a:solidFill>
+                  <a:srgbClr val="24343C"/>
+                </a:solidFill>
+                <a:latin typeface="Calibri" pitchFamily="34" charset="0"/>
+                <a:ea typeface="Calibri" pitchFamily="34" charset="-122"/>
+                <a:cs typeface="Calibri" pitchFamily="34" charset="-120"/>
+              </a:rPr>
+              <a:t>  macOS</a:t>
+            </a:r>
+            <a:endParaRPr lang="en-US" sz="1100" dirty="0"/>
+          </a:p>
+        </p:txBody>
+      </p:sp>
+      <p:sp>
+        <p:nvSpPr>
+          <p:cNvPr id="15" name="Text 12"/>
+          <p:cNvSpPr/>
+          <p:nvPr/>
+        </p:nvSpPr>
+        <p:spPr>
+          <a:xfrm>
+            <a:off x="566928" y="5806440"/>
+            <a:ext cx="10972800" cy="548640"/>
           </a:xfrm>
           <a:prstGeom prst="rect">
             <a:avLst/>
@@ -3747,247 +3751,17 @@
               <a:buNone/>
             </a:pPr>
             <a:r>
-              <a:rPr lang="en-US" sz="1150" dirty="0">
-                <a:solidFill>
-                  <a:srgbClr val="24343C"/>
-                </a:solidFill>
-                <a:latin typeface="Calibri" pitchFamily="34" charset="0"/>
-                <a:ea typeface="Calibri" pitchFamily="34" charset="-122"/>
-                <a:cs typeface="Calibri" pitchFamily="34" charset="-120"/>
-              </a:rPr>
-              <a:t>No monitor attached: the graphics system reports a 0×0-pixel screen, collapsing every popup and confusing window placement</a:t>
-            </a:r>
-            <a:endParaRPr lang="en-US" sz="1150" dirty="0"/>
-          </a:p>
-        </p:txBody>
-      </p:sp>
-      <p:sp>
-        <p:nvSpPr>
-          <p:cNvPr id="19" name="Shape 16"/>
-          <p:cNvSpPr/>
-          <p:nvPr/>
-        </p:nvSpPr>
-        <p:spPr>
-          <a:xfrm>
-            <a:off x="8961120" y="1828800"/>
-            <a:ext cx="2670048" cy="2834640"/>
-          </a:xfrm>
-          <a:prstGeom prst="roundRect">
-            <a:avLst>
-              <a:gd name="adj" fmla="val 2740"/>
-            </a:avLst>
-          </a:prstGeom>
-          <a:solidFill>
-            <a:srgbClr val="EFF4F7"/>
-          </a:solidFill>
-          <a:ln w="9525">
-            <a:solidFill>
-              <a:srgbClr val="D7E3EA"/>
-            </a:solidFill>
-            <a:prstDash val="solid"/>
-          </a:ln>
-        </p:spPr>
-      </p:sp>
-      <p:sp>
-        <p:nvSpPr>
-          <p:cNvPr id="20" name="Text 17"/>
-          <p:cNvSpPr/>
-          <p:nvPr/>
-        </p:nvSpPr>
-        <p:spPr>
-          <a:xfrm>
-            <a:off x="9180576" y="2084832"/>
-            <a:ext cx="475488" cy="475488"/>
-          </a:xfrm>
-          <a:prstGeom prst="ellipse">
-            <a:avLst/>
-          </a:prstGeom>
-          <a:solidFill>
-            <a:srgbClr val="B86A18"/>
-          </a:solidFill>
-          <a:ln>
-            <a:solidFill>
-              <a:srgbClr val="B86A18"/>
-            </a:solidFill>
-          </a:ln>
-        </p:spPr>
-        <p:txBody>
-          <a:bodyPr wrap="square" lIns="0" tIns="0" rIns="0" bIns="0" rtlCol="0" anchor="ctr"/>
-          <a:lstStyle/>
-          <a:p>
-            <a:pPr algn="ctr" indent="0" marL="0">
-              <a:buNone/>
-            </a:pPr>
-            <a:r>
-              <a:rPr lang="en-US" sz="1800" b="1" dirty="0">
-                <a:solidFill>
-                  <a:srgbClr val="FFFFFF"/>
-                </a:solidFill>
-                <a:latin typeface="Calibri" pitchFamily="34" charset="0"/>
-                <a:ea typeface="Calibri" pitchFamily="34" charset="-122"/>
-                <a:cs typeface="Calibri" pitchFamily="34" charset="-120"/>
-              </a:rPr>
-              <a:t>4</a:t>
-            </a:r>
-            <a:endParaRPr lang="en-US" sz="1800" dirty="0"/>
-          </a:p>
-        </p:txBody>
-      </p:sp>
-      <p:sp>
-        <p:nvSpPr>
-          <p:cNvPr id="21" name="Text 18"/>
-          <p:cNvSpPr/>
-          <p:nvPr/>
-        </p:nvSpPr>
-        <p:spPr>
-          <a:xfrm>
-            <a:off x="9180576" y="2743200"/>
-            <a:ext cx="2231136" cy="365760"/>
-          </a:xfrm>
-          <a:prstGeom prst="rect">
-            <a:avLst/>
-          </a:prstGeom>
-          <a:noFill/>
-          <a:ln/>
-        </p:spPr>
-        <p:txBody>
-          <a:bodyPr wrap="square" lIns="0" tIns="0" rIns="0" bIns="0" rtlCol="0" anchor="ctr"/>
-          <a:lstStyle/>
-          <a:p>
-            <a:pPr indent="0" marL="0">
-              <a:buNone/>
-            </a:pPr>
-            <a:r>
-              <a:rPr lang="en-US" sz="1500" b="1" dirty="0">
-                <a:solidFill>
-                  <a:srgbClr val="0A2F40"/>
-                </a:solidFill>
-                <a:latin typeface="Cambria" pitchFamily="34" charset="0"/>
-                <a:ea typeface="Cambria" pitchFamily="34" charset="-122"/>
-                <a:cs typeface="Cambria" pitchFamily="34" charset="-120"/>
-              </a:rPr>
-              <a:t>Fix — in v1.1.6</a:t>
-            </a:r>
-            <a:endParaRPr lang="en-US" sz="1500" dirty="0"/>
-          </a:p>
-        </p:txBody>
-      </p:sp>
-      <p:sp>
-        <p:nvSpPr>
-          <p:cNvPr id="22" name="Text 19"/>
-          <p:cNvSpPr/>
-          <p:nvPr/>
-        </p:nvSpPr>
-        <p:spPr>
-          <a:xfrm>
-            <a:off x="9180576" y="3154680"/>
-            <a:ext cx="2231136" cy="1371600"/>
-          </a:xfrm>
-          <a:prstGeom prst="rect">
-            <a:avLst/>
-          </a:prstGeom>
-          <a:noFill/>
-          <a:ln/>
-        </p:spPr>
-        <p:txBody>
-          <a:bodyPr wrap="square" lIns="0" tIns="0" rIns="0" bIns="0" rtlCol="0" anchor="t"/>
-          <a:lstStyle/>
-          <a:p>
-            <a:pPr indent="0" marL="0">
-              <a:buNone/>
-            </a:pPr>
-            <a:r>
-              <a:rPr lang="en-US" sz="1150" dirty="0">
-                <a:solidFill>
-                  <a:srgbClr val="24343C"/>
-                </a:solidFill>
-                <a:latin typeface="Calibri" pitchFamily="34" charset="0"/>
-                <a:ea typeface="Calibri" pitchFamily="34" charset="-122"/>
-                <a:cs typeface="Calibri" pitchFamily="34" charset="-120"/>
-              </a:rPr>
-              <a:t>Launcher synthesizes a virtual monitor when none is connected; the app refuses to reposition windows against an empty screen</a:t>
-            </a:r>
-            <a:endParaRPr lang="en-US" sz="1150" dirty="0"/>
-          </a:p>
-        </p:txBody>
-      </p:sp>
-      <p:sp>
-        <p:nvSpPr>
-          <p:cNvPr id="23" name="Shape 20"/>
-          <p:cNvSpPr/>
-          <p:nvPr/>
-        </p:nvSpPr>
-        <p:spPr>
-          <a:xfrm>
-            <a:off x="566928" y="5074920"/>
-            <a:ext cx="11055096" cy="1005840"/>
-          </a:xfrm>
-          <a:prstGeom prst="roundRect">
-            <a:avLst>
-              <a:gd name="adj" fmla="val 7273"/>
-            </a:avLst>
-          </a:prstGeom>
-          <a:solidFill>
-            <a:srgbClr val="EFF4F7"/>
-          </a:solidFill>
-          <a:ln w="9525">
-            <a:solidFill>
-              <a:srgbClr val="D7E3EA"/>
-            </a:solidFill>
-            <a:prstDash val="solid"/>
-          </a:ln>
-        </p:spPr>
-      </p:sp>
-      <p:sp>
-        <p:nvSpPr>
-          <p:cNvPr id="24" name="Text 21"/>
-          <p:cNvSpPr/>
-          <p:nvPr/>
-        </p:nvSpPr>
-        <p:spPr>
-          <a:xfrm>
-            <a:off x="886968" y="5074920"/>
-            <a:ext cx="10424160" cy="1005840"/>
-          </a:xfrm>
-          <a:prstGeom prst="rect">
-            <a:avLst/>
-          </a:prstGeom>
-          <a:noFill/>
-          <a:ln/>
-        </p:spPr>
-        <p:txBody>
-          <a:bodyPr wrap="square" lIns="0" tIns="0" rIns="0" bIns="0" rtlCol="0" anchor="ctr"/>
-          <a:lstStyle/>
-          <a:p>
-            <a:pPr indent="0" marL="0">
-              <a:buNone/>
-            </a:pPr>
-            <a:r>
-              <a:rPr lang="en-US" sz="1450" b="1" dirty="0">
-                <a:solidFill>
-                  <a:srgbClr val="B86A18"/>
-                </a:solidFill>
-                <a:latin typeface="Calibri" pitchFamily="34" charset="0"/>
-                <a:ea typeface="Calibri" pitchFamily="34" charset="-122"/>
-                <a:cs typeface="Calibri" pitchFamily="34" charset="-120"/>
-              </a:rPr>
-              <a:t>Not an application bug.  </a:t>
-            </a:r>
-            <a:pPr indent="0" marL="0">
-              <a:buNone/>
-            </a:pPr>
-            <a:r>
-              <a:rPr lang="en-US" sz="1450" dirty="0">
-                <a:solidFill>
-                  <a:srgbClr val="0A2F40"/>
-                </a:solidFill>
-                <a:latin typeface="Calibri" pitchFamily="34" charset="0"/>
-                <a:ea typeface="Calibri" pitchFamily="34" charset="-122"/>
-                <a:cs typeface="Calibri" pitchFamily="34" charset="-120"/>
-              </a:rPr>
-              <a:t>A display-configuration condition that had silently affected every prior software version — found because real hardware was running at a real site.</a:t>
-            </a:r>
-            <a:endParaRPr lang="en-US" sz="1450" dirty="0"/>
+              <a:rPr lang="en-US" sz="1250" i="1" dirty="0">
+                <a:solidFill>
+                  <a:srgbClr val="6B7A82"/>
+                </a:solidFill>
+                <a:latin typeface="Calibri" pitchFamily="34" charset="0"/>
+                <a:ea typeface="Calibri" pitchFamily="34" charset="-122"/>
+                <a:cs typeface="Calibri" pitchFamily="34" charset="-120"/>
+              </a:rPr>
+              <a:t>Every fold now produces a standardized PDF diagnostic stored beside the recording — validation minutes after capture, on whichever machine is at hand.</a:t>
+            </a:r>
+            <a:endParaRPr lang="en-US" sz="1250" dirty="0"/>
           </a:p>
         </p:txBody>
       </p:sp>
@@ -4056,7 +3830,7 @@
                 <a:ea typeface="Calibri" pitchFamily="34" charset="-122"/>
                 <a:cs typeface="Calibri" pitchFamily="34" charset="-120"/>
               </a:rPr>
-              <a:t>SHIPPED</a:t>
+              <a:t>FIELD ENGINEERING</a:t>
             </a:r>
             <a:endParaRPr lang="en-US" sz="1100" dirty="0"/>
           </a:p>
@@ -4095,7 +3869,7 @@
                 <a:ea typeface="Cambria" pitchFamily="34" charset="-122"/>
                 <a:cs typeface="Cambria" pitchFamily="34" charset="-120"/>
               </a:rPr>
-              <a:t>Field wish-list → released in two days</a:t>
+              <a:t>The case of the headless Raspberry Pi</a:t>
             </a:r>
             <a:endParaRPr lang="en-US" sz="2900" dirty="0"/>
           </a:p>
@@ -4205,57 +3979,18 @@
       </p:sp>
       <p:sp>
         <p:nvSpPr>
-          <p:cNvPr id="7" name="Text 4"/>
-          <p:cNvSpPr/>
-          <p:nvPr/>
-        </p:nvSpPr>
-        <p:spPr>
-          <a:xfrm>
-            <a:off x="566928" y="1444752"/>
-            <a:ext cx="10515600" cy="365760"/>
-          </a:xfrm>
-          <a:prstGeom prst="rect">
-            <a:avLst/>
-          </a:prstGeom>
-          <a:noFill/>
-          <a:ln/>
-        </p:spPr>
-        <p:txBody>
-          <a:bodyPr wrap="square" lIns="0" tIns="0" rIns="0" bIns="0" rtlCol="0" anchor="ctr"/>
-          <a:lstStyle/>
-          <a:p>
-            <a:pPr indent="0" marL="0">
-              <a:buNone/>
-            </a:pPr>
-            <a:r>
-              <a:rPr lang="en-US" sz="1400" dirty="0">
-                <a:solidFill>
-                  <a:srgbClr val="24343C"/>
-                </a:solidFill>
-                <a:latin typeface="Calibri" pitchFamily="34" charset="0"/>
-                <a:ea typeface="Calibri" pitchFamily="34" charset="-122"/>
-                <a:cs typeface="Calibri" pitchFamily="34" charset="-120"/>
-              </a:rPr>
-              <a:t>Spectrum Analyzer v1.1.6 — cut and published July 12, one day after the observing session:</a:t>
-            </a:r>
-            <a:endParaRPr lang="en-US" sz="1400" dirty="0"/>
-          </a:p>
-        </p:txBody>
-      </p:sp>
-      <p:sp>
-        <p:nvSpPr>
-          <p:cNvPr id="8" name="Shape 5"/>
-          <p:cNvSpPr/>
-          <p:nvPr/>
-        </p:nvSpPr>
-        <p:spPr>
-          <a:xfrm>
-            <a:off x="566928" y="2011680"/>
-            <a:ext cx="3557016" cy="2651760"/>
+          <p:cNvPr id="7" name="Shape 4"/>
+          <p:cNvSpPr/>
+          <p:nvPr/>
+        </p:nvSpPr>
+        <p:spPr>
+          <a:xfrm>
+            <a:off x="566928" y="1828800"/>
+            <a:ext cx="2670048" cy="2834640"/>
           </a:xfrm>
           <a:prstGeom prst="roundRect">
             <a:avLst>
-              <a:gd name="adj" fmla="val 2759"/>
+              <a:gd name="adj" fmla="val 2740"/>
             </a:avLst>
           </a:prstGeom>
           <a:solidFill>
@@ -4271,40 +4006,85 @@
       </p:sp>
       <p:sp>
         <p:nvSpPr>
+          <p:cNvPr id="8" name="Text 5"/>
+          <p:cNvSpPr/>
+          <p:nvPr/>
+        </p:nvSpPr>
+        <p:spPr>
+          <a:xfrm>
+            <a:off x="786384" y="2084832"/>
+            <a:ext cx="475488" cy="475488"/>
+          </a:xfrm>
+          <a:prstGeom prst="ellipse">
+            <a:avLst/>
+          </a:prstGeom>
+          <a:solidFill>
+            <a:srgbClr val="156082"/>
+          </a:solidFill>
+          <a:ln>
+            <a:solidFill>
+              <a:srgbClr val="156082"/>
+            </a:solidFill>
+          </a:ln>
+        </p:spPr>
+        <p:txBody>
+          <a:bodyPr wrap="square" lIns="0" tIns="0" rIns="0" bIns="0" rtlCol="0" anchor="ctr"/>
+          <a:lstStyle/>
+          <a:p>
+            <a:pPr algn="ctr" indent="0" marL="0">
+              <a:buNone/>
+            </a:pPr>
+            <a:r>
+              <a:rPr lang="en-US" sz="1800" b="1" dirty="0">
+                <a:solidFill>
+                  <a:srgbClr val="FFFFFF"/>
+                </a:solidFill>
+                <a:latin typeface="Calibri" pitchFamily="34" charset="0"/>
+                <a:ea typeface="Calibri" pitchFamily="34" charset="-122"/>
+                <a:cs typeface="Calibri" pitchFamily="34" charset="-120"/>
+              </a:rPr>
+              <a:t>1</a:t>
+            </a:r>
+            <a:endParaRPr lang="en-US" sz="1800" dirty="0"/>
+          </a:p>
+        </p:txBody>
+      </p:sp>
+      <p:sp>
+        <p:nvSpPr>
           <p:cNvPr id="9" name="Text 6"/>
           <p:cNvSpPr/>
           <p:nvPr/>
         </p:nvSpPr>
         <p:spPr>
           <a:xfrm>
-            <a:off x="804672" y="2212848"/>
-            <a:ext cx="3081528" cy="384048"/>
-          </a:xfrm>
-          <a:prstGeom prst="rect">
-            <a:avLst/>
-          </a:prstGeom>
-          <a:noFill/>
-          <a:ln/>
-        </p:spPr>
-        <p:txBody>
-          <a:bodyPr wrap="square" lIns="0" tIns="0" rIns="0" bIns="0" rtlCol="0" anchor="ctr"/>
-          <a:lstStyle/>
-          <a:p>
-            <a:pPr indent="0" marL="0">
-              <a:buNone/>
-            </a:pPr>
-            <a:r>
-              <a:rPr lang="en-US" sz="1650" b="1" dirty="0">
-                <a:solidFill>
-                  <a:srgbClr val="156082"/>
+            <a:off x="786384" y="2743200"/>
+            <a:ext cx="2231136" cy="365760"/>
+          </a:xfrm>
+          <a:prstGeom prst="rect">
+            <a:avLst/>
+          </a:prstGeom>
+          <a:noFill/>
+          <a:ln/>
+        </p:spPr>
+        <p:txBody>
+          <a:bodyPr wrap="square" lIns="0" tIns="0" rIns="0" bIns="0" rtlCol="0" anchor="ctr"/>
+          <a:lstStyle/>
+          <a:p>
+            <a:pPr indent="0" marL="0">
+              <a:buNone/>
+            </a:pPr>
+            <a:r>
+              <a:rPr lang="en-US" sz="1500" b="1" dirty="0">
+                <a:solidFill>
+                  <a:srgbClr val="0A2F40"/>
                 </a:solidFill>
                 <a:latin typeface="Cambria" pitchFamily="34" charset="0"/>
                 <a:ea typeface="Cambria" pitchFamily="34" charset="-122"/>
                 <a:cs typeface="Cambria" pitchFamily="34" charset="-120"/>
               </a:rPr>
-              <a:t>Sweep mode</a:t>
-            </a:r>
-            <a:endParaRPr lang="en-US" sz="1650" dirty="0"/>
+              <a:t>Symptoms</a:t>
+            </a:r>
+            <a:endParaRPr lang="en-US" sz="1500" dirty="0"/>
           </a:p>
         </p:txBody>
       </p:sp>
@@ -4316,8 +4096,8 @@
         </p:nvSpPr>
         <p:spPr>
           <a:xfrm>
-            <a:off x="804672" y="2670048"/>
-            <a:ext cx="3081528" cy="1783080"/>
+            <a:off x="786384" y="3154680"/>
+            <a:ext cx="2231136" cy="1371600"/>
           </a:xfrm>
           <a:prstGeom prst="rect">
             <a:avLst/>
@@ -4333,7 +4113,7 @@
               <a:buNone/>
             </a:pPr>
             <a:r>
-              <a:rPr lang="en-US" sz="1200" dirty="0">
+              <a:rPr lang="en-US" sz="1150" dirty="0">
                 <a:solidFill>
                   <a:srgbClr val="24343C"/>
                 </a:solidFill>
@@ -4341,9 +4121,9 @@
                 <a:ea typeface="Calibri" pitchFamily="34" charset="-122"/>
                 <a:cs typeface="Calibri" pitchFamily="34" charset="-120"/>
               </a:rPr>
-              <a:t>Stepped wide-spectrum scan for RFI surveys beyond the radio’s instantaneous bandwidth — retunes across a range (e.g. 100–1000 MHz) and stitches one wide trace, with cross-pass max-hold.</a:t>
-            </a:r>
-            <a:endParaRPr lang="en-US" sz="1200" dirty="0"/>
+              <a:t>Dropdown menus dead, Help menu blank, window opens tiny in a corner — on the field box, mid-session</a:t>
+            </a:r>
+            <a:endParaRPr lang="en-US" sz="1150" dirty="0"/>
           </a:p>
         </p:txBody>
       </p:sp>
@@ -4355,12 +4135,12 @@
         </p:nvSpPr>
         <p:spPr>
           <a:xfrm>
-            <a:off x="4315968" y="2011680"/>
-            <a:ext cx="3557016" cy="2651760"/>
+            <a:off x="3364992" y="1828800"/>
+            <a:ext cx="2670048" cy="2834640"/>
           </a:xfrm>
           <a:prstGeom prst="roundRect">
             <a:avLst>
-              <a:gd name="adj" fmla="val 2759"/>
+              <a:gd name="adj" fmla="val 2740"/>
             </a:avLst>
           </a:prstGeom>
           <a:solidFill>
@@ -4382,47 +4162,92 @@
         </p:nvSpPr>
         <p:spPr>
           <a:xfrm>
-            <a:off x="4553712" y="2212848"/>
-            <a:ext cx="3081528" cy="384048"/>
-          </a:xfrm>
-          <a:prstGeom prst="rect">
-            <a:avLst/>
-          </a:prstGeom>
-          <a:noFill/>
-          <a:ln/>
-        </p:spPr>
-        <p:txBody>
-          <a:bodyPr wrap="square" lIns="0" tIns="0" rIns="0" bIns="0" rtlCol="0" anchor="ctr"/>
-          <a:lstStyle/>
-          <a:p>
-            <a:pPr indent="0" marL="0">
-              <a:buNone/>
-            </a:pPr>
-            <a:r>
-              <a:rPr lang="en-US" sz="1650" b="1" dirty="0">
-                <a:solidFill>
-                  <a:srgbClr val="156082"/>
+            <a:off x="3584448" y="2084832"/>
+            <a:ext cx="475488" cy="475488"/>
+          </a:xfrm>
+          <a:prstGeom prst="ellipse">
+            <a:avLst/>
+          </a:prstGeom>
+          <a:solidFill>
+            <a:srgbClr val="156082"/>
+          </a:solidFill>
+          <a:ln>
+            <a:solidFill>
+              <a:srgbClr val="156082"/>
+            </a:solidFill>
+          </a:ln>
+        </p:spPr>
+        <p:txBody>
+          <a:bodyPr wrap="square" lIns="0" tIns="0" rIns="0" bIns="0" rtlCol="0" anchor="ctr"/>
+          <a:lstStyle/>
+          <a:p>
+            <a:pPr algn="ctr" indent="0" marL="0">
+              <a:buNone/>
+            </a:pPr>
+            <a:r>
+              <a:rPr lang="en-US" sz="1800" b="1" dirty="0">
+                <a:solidFill>
+                  <a:srgbClr val="FFFFFF"/>
+                </a:solidFill>
+                <a:latin typeface="Calibri" pitchFamily="34" charset="0"/>
+                <a:ea typeface="Calibri" pitchFamily="34" charset="-122"/>
+                <a:cs typeface="Calibri" pitchFamily="34" charset="-120"/>
+              </a:rPr>
+              <a:t>2</a:t>
+            </a:r>
+            <a:endParaRPr lang="en-US" sz="1800" dirty="0"/>
+          </a:p>
+        </p:txBody>
+      </p:sp>
+      <p:sp>
+        <p:nvSpPr>
+          <p:cNvPr id="13" name="Text 10"/>
+          <p:cNvSpPr/>
+          <p:nvPr/>
+        </p:nvSpPr>
+        <p:spPr>
+          <a:xfrm>
+            <a:off x="3584448" y="2743200"/>
+            <a:ext cx="2231136" cy="365760"/>
+          </a:xfrm>
+          <a:prstGeom prst="rect">
+            <a:avLst/>
+          </a:prstGeom>
+          <a:noFill/>
+          <a:ln/>
+        </p:spPr>
+        <p:txBody>
+          <a:bodyPr wrap="square" lIns="0" tIns="0" rIns="0" bIns="0" rtlCol="0" anchor="ctr"/>
+          <a:lstStyle/>
+          <a:p>
+            <a:pPr indent="0" marL="0">
+              <a:buNone/>
+            </a:pPr>
+            <a:r>
+              <a:rPr lang="en-US" sz="1500" b="1" dirty="0">
+                <a:solidFill>
+                  <a:srgbClr val="0A2F40"/>
                 </a:solidFill>
                 <a:latin typeface="Cambria" pitchFamily="34" charset="0"/>
                 <a:ea typeface="Cambria" pitchFamily="34" charset="-122"/>
                 <a:cs typeface="Cambria" pitchFamily="34" charset="-120"/>
               </a:rPr>
-              <a:t>Recording, finished</a:t>
-            </a:r>
-            <a:endParaRPr lang="en-US" sz="1650" dirty="0"/>
-          </a:p>
-        </p:txBody>
-      </p:sp>
-      <p:sp>
-        <p:nvSpPr>
-          <p:cNvPr id="13" name="Text 10"/>
-          <p:cNvSpPr/>
-          <p:nvPr/>
-        </p:nvSpPr>
-        <p:spPr>
-          <a:xfrm>
-            <a:off x="4553712" y="2670048"/>
-            <a:ext cx="3081528" cy="1783080"/>
+              <a:t>Diagnosis</a:t>
+            </a:r>
+            <a:endParaRPr lang="en-US" sz="1500" dirty="0"/>
+          </a:p>
+        </p:txBody>
+      </p:sp>
+      <p:sp>
+        <p:nvSpPr>
+          <p:cNvPr id="14" name="Text 11"/>
+          <p:cNvSpPr/>
+          <p:nvPr/>
+        </p:nvSpPr>
+        <p:spPr>
+          <a:xfrm>
+            <a:off x="3584448" y="3154680"/>
+            <a:ext cx="2231136" cy="1371600"/>
           </a:xfrm>
           <a:prstGeom prst="rect">
             <a:avLst/>
@@ -4438,7 +4263,7 @@
               <a:buNone/>
             </a:pPr>
             <a:r>
-              <a:rPr lang="en-US" sz="1200" dirty="0">
+              <a:rPr lang="en-US" sz="1150" dirty="0">
                 <a:solidFill>
                   <a:srgbClr val="24343C"/>
                 </a:solidFill>
@@ -4446,26 +4271,26 @@
                 <a:ea typeface="Calibri" pitchFamily="34" charset="-122"/>
                 <a:cs typeface="Calibri" pitchFamily="34" charset="-120"/>
               </a:rPr>
-              <a:t>Source name stamped into the filename and the .fil header — with RA/Dec derived from the pulsar designation. Red REC indicator, elapsed time, timed auto-stop. July 11’s files had to be renamed and patched by hand; never again.</a:t>
-            </a:r>
-            <a:endParaRPr lang="en-US" sz="1200" dirty="0"/>
-          </a:p>
-        </p:txBody>
-      </p:sp>
-      <p:sp>
-        <p:nvSpPr>
-          <p:cNvPr id="14" name="Shape 11"/>
-          <p:cNvSpPr/>
-          <p:nvPr/>
-        </p:nvSpPr>
-        <p:spPr>
-          <a:xfrm>
-            <a:off x="8065008" y="2011680"/>
-            <a:ext cx="3557016" cy="2651760"/>
+              <a:t>Remote SSH into the site over Tailscale — while the trip continued</a:t>
+            </a:r>
+            <a:endParaRPr lang="en-US" sz="1150" dirty="0"/>
+          </a:p>
+        </p:txBody>
+      </p:sp>
+      <p:sp>
+        <p:nvSpPr>
+          <p:cNvPr id="15" name="Shape 12"/>
+          <p:cNvSpPr/>
+          <p:nvPr/>
+        </p:nvSpPr>
+        <p:spPr>
+          <a:xfrm>
+            <a:off x="6163056" y="1828800"/>
+            <a:ext cx="2670048" cy="2834640"/>
           </a:xfrm>
           <a:prstGeom prst="roundRect">
             <a:avLst>
-              <a:gd name="adj" fmla="val 2759"/>
+              <a:gd name="adj" fmla="val 2740"/>
             </a:avLst>
           </a:prstGeom>
           <a:solidFill>
@@ -4481,53 +4306,98 @@
       </p:sp>
       <p:sp>
         <p:nvSpPr>
-          <p:cNvPr id="15" name="Text 12"/>
-          <p:cNvSpPr/>
-          <p:nvPr/>
-        </p:nvSpPr>
-        <p:spPr>
-          <a:xfrm>
-            <a:off x="8302752" y="2212848"/>
-            <a:ext cx="3081528" cy="384048"/>
-          </a:xfrm>
-          <a:prstGeom prst="rect">
-            <a:avLst/>
-          </a:prstGeom>
-          <a:noFill/>
-          <a:ln/>
-        </p:spPr>
-        <p:txBody>
-          <a:bodyPr wrap="square" lIns="0" tIns="0" rIns="0" bIns="0" rtlCol="0" anchor="ctr"/>
-          <a:lstStyle/>
-          <a:p>
-            <a:pPr indent="0" marL="0">
-              <a:buNone/>
-            </a:pPr>
-            <a:r>
-              <a:rPr lang="en-US" sz="1650" b="1" dirty="0">
-                <a:solidFill>
-                  <a:srgbClr val="156082"/>
+          <p:cNvPr id="16" name="Text 13"/>
+          <p:cNvSpPr/>
+          <p:nvPr/>
+        </p:nvSpPr>
+        <p:spPr>
+          <a:xfrm>
+            <a:off x="6382512" y="2084832"/>
+            <a:ext cx="475488" cy="475488"/>
+          </a:xfrm>
+          <a:prstGeom prst="ellipse">
+            <a:avLst/>
+          </a:prstGeom>
+          <a:solidFill>
+            <a:srgbClr val="156082"/>
+          </a:solidFill>
+          <a:ln>
+            <a:solidFill>
+              <a:srgbClr val="156082"/>
+            </a:solidFill>
+          </a:ln>
+        </p:spPr>
+        <p:txBody>
+          <a:bodyPr wrap="square" lIns="0" tIns="0" rIns="0" bIns="0" rtlCol="0" anchor="ctr"/>
+          <a:lstStyle/>
+          <a:p>
+            <a:pPr algn="ctr" indent="0" marL="0">
+              <a:buNone/>
+            </a:pPr>
+            <a:r>
+              <a:rPr lang="en-US" sz="1800" b="1" dirty="0">
+                <a:solidFill>
+                  <a:srgbClr val="FFFFFF"/>
+                </a:solidFill>
+                <a:latin typeface="Calibri" pitchFamily="34" charset="0"/>
+                <a:ea typeface="Calibri" pitchFamily="34" charset="-122"/>
+                <a:cs typeface="Calibri" pitchFamily="34" charset="-120"/>
+              </a:rPr>
+              <a:t>3</a:t>
+            </a:r>
+            <a:endParaRPr lang="en-US" sz="1800" dirty="0"/>
+          </a:p>
+        </p:txBody>
+      </p:sp>
+      <p:sp>
+        <p:nvSpPr>
+          <p:cNvPr id="17" name="Text 14"/>
+          <p:cNvSpPr/>
+          <p:nvPr/>
+        </p:nvSpPr>
+        <p:spPr>
+          <a:xfrm>
+            <a:off x="6382512" y="2743200"/>
+            <a:ext cx="2231136" cy="365760"/>
+          </a:xfrm>
+          <a:prstGeom prst="rect">
+            <a:avLst/>
+          </a:prstGeom>
+          <a:noFill/>
+          <a:ln/>
+        </p:spPr>
+        <p:txBody>
+          <a:bodyPr wrap="square" lIns="0" tIns="0" rIns="0" bIns="0" rtlCol="0" anchor="ctr"/>
+          <a:lstStyle/>
+          <a:p>
+            <a:pPr indent="0" marL="0">
+              <a:buNone/>
+            </a:pPr>
+            <a:r>
+              <a:rPr lang="en-US" sz="1500" b="1" dirty="0">
+                <a:solidFill>
+                  <a:srgbClr val="0A2F40"/>
                 </a:solidFill>
                 <a:latin typeface="Cambria" pitchFamily="34" charset="0"/>
                 <a:ea typeface="Cambria" pitchFamily="34" charset="-122"/>
                 <a:cs typeface="Cambria" pitchFamily="34" charset="-120"/>
               </a:rPr>
-              <a:t>Headless fixes</a:t>
-            </a:r>
-            <a:endParaRPr lang="en-US" sz="1650" dirty="0"/>
-          </a:p>
-        </p:txBody>
-      </p:sp>
-      <p:sp>
-        <p:nvSpPr>
-          <p:cNvPr id="16" name="Text 13"/>
-          <p:cNvSpPr/>
-          <p:nvPr/>
-        </p:nvSpPr>
-        <p:spPr>
-          <a:xfrm>
-            <a:off x="8302752" y="2670048"/>
-            <a:ext cx="3081528" cy="1783080"/>
+              <a:t>Root cause</a:t>
+            </a:r>
+            <a:endParaRPr lang="en-US" sz="1500" dirty="0"/>
+          </a:p>
+        </p:txBody>
+      </p:sp>
+      <p:sp>
+        <p:nvSpPr>
+          <p:cNvPr id="18" name="Text 15"/>
+          <p:cNvSpPr/>
+          <p:nvPr/>
+        </p:nvSpPr>
+        <p:spPr>
+          <a:xfrm>
+            <a:off x="6382512" y="3154680"/>
+            <a:ext cx="2231136" cy="1371600"/>
           </a:xfrm>
           <a:prstGeom prst="rect">
             <a:avLst/>
@@ -4543,7 +4413,7 @@
               <a:buNone/>
             </a:pPr>
             <a:r>
-              <a:rPr lang="en-US" sz="1200" dirty="0">
+              <a:rPr lang="en-US" sz="1150" dirty="0">
                 <a:solidFill>
                   <a:srgbClr val="24343C"/>
                 </a:solidFill>
@@ -4551,30 +4421,30 @@
                 <a:ea typeface="Calibri" pitchFamily="34" charset="-122"/>
                 <a:cs typeface="Calibri" pitchFamily="34" charset="-120"/>
               </a:rPr>
-              <a:t>The virtual-monitor launcher and empty-screen safeguards from the previous slide, plus updated documentation and operating guide.</a:t>
-            </a:r>
-            <a:endParaRPr lang="en-US" sz="1200" dirty="0"/>
-          </a:p>
-        </p:txBody>
-      </p:sp>
-      <p:sp>
-        <p:nvSpPr>
-          <p:cNvPr id="17" name="Shape 14"/>
-          <p:cNvSpPr/>
-          <p:nvPr/>
-        </p:nvSpPr>
-        <p:spPr>
-          <a:xfrm>
-            <a:off x="566928" y="4937760"/>
-            <a:ext cx="11055096" cy="1234440"/>
+              <a:t>No monitor attached: the graphics system reports a 0×0-pixel screen, collapsing every popup and confusing window placement</a:t>
+            </a:r>
+            <a:endParaRPr lang="en-US" sz="1150" dirty="0"/>
+          </a:p>
+        </p:txBody>
+      </p:sp>
+      <p:sp>
+        <p:nvSpPr>
+          <p:cNvPr id="19" name="Shape 16"/>
+          <p:cNvSpPr/>
+          <p:nvPr/>
+        </p:nvSpPr>
+        <p:spPr>
+          <a:xfrm>
+            <a:off x="8961120" y="1828800"/>
+            <a:ext cx="2670048" cy="2834640"/>
           </a:xfrm>
           <a:prstGeom prst="roundRect">
             <a:avLst>
-              <a:gd name="adj" fmla="val 5926"/>
+              <a:gd name="adj" fmla="val 2740"/>
             </a:avLst>
           </a:prstGeom>
           <a:solidFill>
-            <a:srgbClr val="FFFFFF"/>
+            <a:srgbClr val="EFF4F7"/>
           </a:solidFill>
           <a:ln w="9525">
             <a:solidFill>
@@ -4586,30 +4456,180 @@
       </p:sp>
       <p:sp>
         <p:nvSpPr>
-          <p:cNvPr id="18" name="Text 15"/>
-          <p:cNvSpPr/>
-          <p:nvPr/>
-        </p:nvSpPr>
-        <p:spPr>
-          <a:xfrm>
-            <a:off x="841248" y="4937760"/>
-            <a:ext cx="10515600" cy="1234440"/>
-          </a:xfrm>
-          <a:prstGeom prst="rect">
-            <a:avLst/>
-          </a:prstGeom>
-          <a:noFill/>
-          <a:ln/>
-        </p:spPr>
-        <p:txBody>
-          <a:bodyPr wrap="square" lIns="0" tIns="0" rIns="0" bIns="0" rtlCol="0" anchor="ctr"/>
-          <a:lstStyle/>
-          <a:p>
-            <a:pPr indent="0" marL="0">
-              <a:buNone/>
-            </a:pPr>
-            <a:r>
-              <a:rPr lang="en-US" sz="1250" b="1" dirty="0">
+          <p:cNvPr id="20" name="Text 17"/>
+          <p:cNvSpPr/>
+          <p:nvPr/>
+        </p:nvSpPr>
+        <p:spPr>
+          <a:xfrm>
+            <a:off x="9180576" y="2084832"/>
+            <a:ext cx="475488" cy="475488"/>
+          </a:xfrm>
+          <a:prstGeom prst="ellipse">
+            <a:avLst/>
+          </a:prstGeom>
+          <a:solidFill>
+            <a:srgbClr val="B86A18"/>
+          </a:solidFill>
+          <a:ln>
+            <a:solidFill>
+              <a:srgbClr val="B86A18"/>
+            </a:solidFill>
+          </a:ln>
+        </p:spPr>
+        <p:txBody>
+          <a:bodyPr wrap="square" lIns="0" tIns="0" rIns="0" bIns="0" rtlCol="0" anchor="ctr"/>
+          <a:lstStyle/>
+          <a:p>
+            <a:pPr algn="ctr" indent="0" marL="0">
+              <a:buNone/>
+            </a:pPr>
+            <a:r>
+              <a:rPr lang="en-US" sz="1800" b="1" dirty="0">
+                <a:solidFill>
+                  <a:srgbClr val="FFFFFF"/>
+                </a:solidFill>
+                <a:latin typeface="Calibri" pitchFamily="34" charset="0"/>
+                <a:ea typeface="Calibri" pitchFamily="34" charset="-122"/>
+                <a:cs typeface="Calibri" pitchFamily="34" charset="-120"/>
+              </a:rPr>
+              <a:t>4</a:t>
+            </a:r>
+            <a:endParaRPr lang="en-US" sz="1800" dirty="0"/>
+          </a:p>
+        </p:txBody>
+      </p:sp>
+      <p:sp>
+        <p:nvSpPr>
+          <p:cNvPr id="21" name="Text 18"/>
+          <p:cNvSpPr/>
+          <p:nvPr/>
+        </p:nvSpPr>
+        <p:spPr>
+          <a:xfrm>
+            <a:off x="9180576" y="2743200"/>
+            <a:ext cx="2231136" cy="365760"/>
+          </a:xfrm>
+          <a:prstGeom prst="rect">
+            <a:avLst/>
+          </a:prstGeom>
+          <a:noFill/>
+          <a:ln/>
+        </p:spPr>
+        <p:txBody>
+          <a:bodyPr wrap="square" lIns="0" tIns="0" rIns="0" bIns="0" rtlCol="0" anchor="ctr"/>
+          <a:lstStyle/>
+          <a:p>
+            <a:pPr indent="0" marL="0">
+              <a:buNone/>
+            </a:pPr>
+            <a:r>
+              <a:rPr lang="en-US" sz="1500" b="1" dirty="0">
+                <a:solidFill>
+                  <a:srgbClr val="0A2F40"/>
+                </a:solidFill>
+                <a:latin typeface="Cambria" pitchFamily="34" charset="0"/>
+                <a:ea typeface="Cambria" pitchFamily="34" charset="-122"/>
+                <a:cs typeface="Cambria" pitchFamily="34" charset="-120"/>
+              </a:rPr>
+              <a:t>Fix — in v1.1.6</a:t>
+            </a:r>
+            <a:endParaRPr lang="en-US" sz="1500" dirty="0"/>
+          </a:p>
+        </p:txBody>
+      </p:sp>
+      <p:sp>
+        <p:nvSpPr>
+          <p:cNvPr id="22" name="Text 19"/>
+          <p:cNvSpPr/>
+          <p:nvPr/>
+        </p:nvSpPr>
+        <p:spPr>
+          <a:xfrm>
+            <a:off x="9180576" y="3154680"/>
+            <a:ext cx="2231136" cy="1371600"/>
+          </a:xfrm>
+          <a:prstGeom prst="rect">
+            <a:avLst/>
+          </a:prstGeom>
+          <a:noFill/>
+          <a:ln/>
+        </p:spPr>
+        <p:txBody>
+          <a:bodyPr wrap="square" lIns="0" tIns="0" rIns="0" bIns="0" rtlCol="0" anchor="t"/>
+          <a:lstStyle/>
+          <a:p>
+            <a:pPr indent="0" marL="0">
+              <a:buNone/>
+            </a:pPr>
+            <a:r>
+              <a:rPr lang="en-US" sz="1150" dirty="0">
+                <a:solidFill>
+                  <a:srgbClr val="24343C"/>
+                </a:solidFill>
+                <a:latin typeface="Calibri" pitchFamily="34" charset="0"/>
+                <a:ea typeface="Calibri" pitchFamily="34" charset="-122"/>
+                <a:cs typeface="Calibri" pitchFamily="34" charset="-120"/>
+              </a:rPr>
+              <a:t>Launcher synthesizes a virtual monitor when none is connected; the app refuses to reposition windows against an empty screen</a:t>
+            </a:r>
+            <a:endParaRPr lang="en-US" sz="1150" dirty="0"/>
+          </a:p>
+        </p:txBody>
+      </p:sp>
+      <p:sp>
+        <p:nvSpPr>
+          <p:cNvPr id="23" name="Shape 20"/>
+          <p:cNvSpPr/>
+          <p:nvPr/>
+        </p:nvSpPr>
+        <p:spPr>
+          <a:xfrm>
+            <a:off x="566928" y="5074920"/>
+            <a:ext cx="11055096" cy="1005840"/>
+          </a:xfrm>
+          <a:prstGeom prst="roundRect">
+            <a:avLst>
+              <a:gd name="adj" fmla="val 7273"/>
+            </a:avLst>
+          </a:prstGeom>
+          <a:solidFill>
+            <a:srgbClr val="EFF4F7"/>
+          </a:solidFill>
+          <a:ln w="9525">
+            <a:solidFill>
+              <a:srgbClr val="D7E3EA"/>
+            </a:solidFill>
+            <a:prstDash val="solid"/>
+          </a:ln>
+        </p:spPr>
+      </p:sp>
+      <p:sp>
+        <p:nvSpPr>
+          <p:cNvPr id="24" name="Text 21"/>
+          <p:cNvSpPr/>
+          <p:nvPr/>
+        </p:nvSpPr>
+        <p:spPr>
+          <a:xfrm>
+            <a:off x="886968" y="5074920"/>
+            <a:ext cx="10424160" cy="1005840"/>
+          </a:xfrm>
+          <a:prstGeom prst="rect">
+            <a:avLst/>
+          </a:prstGeom>
+          <a:noFill/>
+          <a:ln/>
+        </p:spPr>
+        <p:txBody>
+          <a:bodyPr wrap="square" lIns="0" tIns="0" rIns="0" bIns="0" rtlCol="0" anchor="ctr"/>
+          <a:lstStyle/>
+          <a:p>
+            <a:pPr indent="0" marL="0">
+              <a:buNone/>
+            </a:pPr>
+            <a:r>
+              <a:rPr lang="en-US" sz="1450" b="1" dirty="0">
                 <a:solidFill>
                   <a:srgbClr val="B86A18"/>
                 </a:solidFill>
@@ -4617,23 +4637,23 @@
                 <a:ea typeface="Calibri" pitchFamily="34" charset="-122"/>
                 <a:cs typeface="Calibri" pitchFamily="34" charset="-120"/>
               </a:rPr>
-              <a:t>Epilogue: </a:t>
-            </a:r>
-            <a:pPr indent="0" marL="0">
-              <a:buNone/>
-            </a:pPr>
-            <a:r>
-              <a:rPr lang="en-US" sz="1250" dirty="0">
-                <a:solidFill>
-                  <a:srgbClr val="24343C"/>
-                </a:solidFill>
-                <a:latin typeface="Calibri" pitchFamily="34" charset="0"/>
-                <a:ea typeface="Calibri" pitchFamily="34" charset="-122"/>
-                <a:cs typeface="Calibri" pitchFamily="34" charset="-120"/>
-              </a:rPr>
-              <a:t>one day after release, the field box caught a packaging defect desktop testing had missed — Windows line endings in the Unix launcher script. Rebuilt and republished within hours, with two independent build-pipeline safeguards added. Real installations in the field earn their keep.</a:t>
-            </a:r>
-            <a:endParaRPr lang="en-US" sz="1250" dirty="0"/>
+              <a:t>Not an application bug.  </a:t>
+            </a:r>
+            <a:pPr indent="0" marL="0">
+              <a:buNone/>
+            </a:pPr>
+            <a:r>
+              <a:rPr lang="en-US" sz="1450" dirty="0">
+                <a:solidFill>
+                  <a:srgbClr val="0A2F40"/>
+                </a:solidFill>
+                <a:latin typeface="Calibri" pitchFamily="34" charset="0"/>
+                <a:ea typeface="Calibri" pitchFamily="34" charset="-122"/>
+                <a:cs typeface="Calibri" pitchFamily="34" charset="-120"/>
+              </a:rPr>
+              <a:t>A display-configuration condition that had silently affected every prior software version — found because real hardware was running at a real site.</a:t>
+            </a:r>
+            <a:endParaRPr lang="en-US" sz="1450" dirty="0"/>
           </a:p>
         </p:txBody>
       </p:sp>
@@ -4702,7 +4722,7 @@
                 <a:ea typeface="Calibri" pitchFamily="34" charset="-122"/>
                 <a:cs typeface="Calibri" pitchFamily="34" charset="-120"/>
               </a:rPr>
-              <a:t>THE ROAD AHEAD</a:t>
+              <a:t>SHIPPED</a:t>
             </a:r>
             <a:endParaRPr lang="en-US" sz="1100" dirty="0"/>
           </a:p>
@@ -4741,7 +4761,7 @@
                 <a:ea typeface="Cambria" pitchFamily="34" charset="-122"/>
                 <a:cs typeface="Cambria" pitchFamily="34" charset="-120"/>
               </a:rPr>
-              <a:t>The barrier is now a slope</a:t>
+              <a:t>Field wish-list → v1.1.6 in two days</a:t>
             </a:r>
             <a:endParaRPr lang="en-US" sz="2900" dirty="0"/>
           </a:p>
@@ -4857,83 +4877,129 @@
         </p:nvSpPr>
         <p:spPr>
           <a:xfrm>
-            <a:off x="566928" y="1691640"/>
-            <a:ext cx="457200" cy="457200"/>
-          </a:xfrm>
-          <a:prstGeom prst="ellipse">
-            <a:avLst/>
+            <a:off x="566928" y="1444752"/>
+            <a:ext cx="10515600" cy="365760"/>
+          </a:xfrm>
+          <a:prstGeom prst="rect">
+            <a:avLst/>
+          </a:prstGeom>
+          <a:noFill/>
+          <a:ln/>
+        </p:spPr>
+        <p:txBody>
+          <a:bodyPr wrap="square" lIns="0" tIns="0" rIns="0" bIns="0" rtlCol="0" anchor="ctr"/>
+          <a:lstStyle/>
+          <a:p>
+            <a:pPr indent="0" marL="0">
+              <a:buNone/>
+            </a:pPr>
+            <a:r>
+              <a:rPr lang="en-US" sz="1400" dirty="0">
+                <a:solidFill>
+                  <a:srgbClr val="24343C"/>
+                </a:solidFill>
+                <a:latin typeface="Calibri" pitchFamily="34" charset="0"/>
+                <a:ea typeface="Calibri" pitchFamily="34" charset="-122"/>
+                <a:cs typeface="Calibri" pitchFamily="34" charset="-120"/>
+              </a:rPr>
+              <a:t>Spectrum Analyzer v1.1.6 — cut and published July 12, one day after the observing session:</a:t>
+            </a:r>
+            <a:endParaRPr lang="en-US" sz="1400" dirty="0"/>
+          </a:p>
+        </p:txBody>
+      </p:sp>
+      <p:sp>
+        <p:nvSpPr>
+          <p:cNvPr id="8" name="Shape 5"/>
+          <p:cNvSpPr/>
+          <p:nvPr/>
+        </p:nvSpPr>
+        <p:spPr>
+          <a:xfrm>
+            <a:off x="566928" y="2011680"/>
+            <a:ext cx="3557016" cy="2651760"/>
+          </a:xfrm>
+          <a:prstGeom prst="roundRect">
+            <a:avLst>
+              <a:gd name="adj" fmla="val 2759"/>
+            </a:avLst>
           </a:prstGeom>
           <a:solidFill>
-            <a:srgbClr val="B86A18"/>
+            <a:srgbClr val="EFF4F7"/>
           </a:solidFill>
-          <a:ln>
+          <a:ln w="9525">
             <a:solidFill>
-              <a:srgbClr val="B86A18"/>
+              <a:srgbClr val="D7E3EA"/>
             </a:solidFill>
+            <a:prstDash val="solid"/>
           </a:ln>
         </p:spPr>
-        <p:txBody>
-          <a:bodyPr wrap="square" lIns="0" tIns="0" rIns="0" bIns="0" rtlCol="0" anchor="ctr"/>
-          <a:lstStyle/>
-          <a:p>
-            <a:pPr algn="ctr" indent="0" marL="0">
-              <a:buNone/>
-            </a:pPr>
-            <a:r>
-              <a:rPr lang="en-US" sz="1800" b="1" dirty="0">
-                <a:solidFill>
-                  <a:srgbClr val="FFFFFF"/>
-                </a:solidFill>
-                <a:latin typeface="Calibri" pitchFamily="34" charset="0"/>
-                <a:ea typeface="Calibri" pitchFamily="34" charset="-122"/>
-                <a:cs typeface="Calibri" pitchFamily="34" charset="-120"/>
-              </a:rPr>
-              <a:t>1</a:t>
-            </a:r>
-            <a:endParaRPr lang="en-US" sz="1800" dirty="0"/>
-          </a:p>
-        </p:txBody>
-      </p:sp>
-      <p:sp>
-        <p:nvSpPr>
-          <p:cNvPr id="8" name="Text 5"/>
-          <p:cNvSpPr/>
-          <p:nvPr/>
-        </p:nvSpPr>
-        <p:spPr>
-          <a:xfrm>
-            <a:off x="1225296" y="1618488"/>
-            <a:ext cx="10241280" cy="603504"/>
-          </a:xfrm>
-          <a:prstGeom prst="rect">
-            <a:avLst/>
-          </a:prstGeom>
-          <a:noFill/>
-          <a:ln/>
-        </p:spPr>
-        <p:txBody>
-          <a:bodyPr wrap="square" lIns="0" tIns="0" rIns="0" bIns="0" rtlCol="0" anchor="ctr"/>
-          <a:lstStyle/>
-          <a:p>
-            <a:pPr indent="0" marL="0">
-              <a:buNone/>
-            </a:pPr>
-            <a:r>
-              <a:rPr lang="en-US" sz="1450" b="1" dirty="0">
-                <a:solidFill>
-                  <a:srgbClr val="0A2F40"/>
-                </a:solidFill>
-                <a:latin typeface="Calibri" pitchFamily="34" charset="0"/>
-                <a:ea typeface="Calibri" pitchFamily="34" charset="-122"/>
-                <a:cs typeface="Calibri" pitchFamily="34" charset="-120"/>
-              </a:rPr>
-              <a:t>Train the interest group  —  </a:t>
-            </a:r>
-            <a:pPr indent="0" marL="0">
-              <a:buNone/>
-            </a:pPr>
-            <a:r>
-              <a:rPr lang="en-US" sz="1450" dirty="0">
+      </p:sp>
+      <p:sp>
+        <p:nvSpPr>
+          <p:cNvPr id="9" name="Text 6"/>
+          <p:cNvSpPr/>
+          <p:nvPr/>
+        </p:nvSpPr>
+        <p:spPr>
+          <a:xfrm>
+            <a:off x="804672" y="2212848"/>
+            <a:ext cx="3081528" cy="384048"/>
+          </a:xfrm>
+          <a:prstGeom prst="rect">
+            <a:avLst/>
+          </a:prstGeom>
+          <a:noFill/>
+          <a:ln/>
+        </p:spPr>
+        <p:txBody>
+          <a:bodyPr wrap="square" lIns="0" tIns="0" rIns="0" bIns="0" rtlCol="0" anchor="ctr"/>
+          <a:lstStyle/>
+          <a:p>
+            <a:pPr indent="0" marL="0">
+              <a:buNone/>
+            </a:pPr>
+            <a:r>
+              <a:rPr lang="en-US" sz="1650" b="1" dirty="0">
+                <a:solidFill>
+                  <a:srgbClr val="156082"/>
+                </a:solidFill>
+                <a:latin typeface="Cambria" pitchFamily="34" charset="0"/>
+                <a:ea typeface="Cambria" pitchFamily="34" charset="-122"/>
+                <a:cs typeface="Cambria" pitchFamily="34" charset="-120"/>
+              </a:rPr>
+              <a:t>Sweep mode</a:t>
+            </a:r>
+            <a:endParaRPr lang="en-US" sz="1650" dirty="0"/>
+          </a:p>
+        </p:txBody>
+      </p:sp>
+      <p:sp>
+        <p:nvSpPr>
+          <p:cNvPr id="10" name="Text 7"/>
+          <p:cNvSpPr/>
+          <p:nvPr/>
+        </p:nvSpPr>
+        <p:spPr>
+          <a:xfrm>
+            <a:off x="804672" y="2670048"/>
+            <a:ext cx="3081528" cy="1783080"/>
+          </a:xfrm>
+          <a:prstGeom prst="rect">
+            <a:avLst/>
+          </a:prstGeom>
+          <a:noFill/>
+          <a:ln/>
+        </p:spPr>
+        <p:txBody>
+          <a:bodyPr wrap="square" lIns="0" tIns="0" rIns="0" bIns="0" rtlCol="0" anchor="t"/>
+          <a:lstStyle/>
+          <a:p>
+            <a:pPr indent="0" marL="0">
+              <a:buNone/>
+            </a:pPr>
+            <a:r>
+              <a:rPr lang="en-US" sz="1200" dirty="0">
                 <a:solidFill>
                   <a:srgbClr val="24343C"/>
                 </a:solidFill>
@@ -4941,97 +5007,104 @@
                 <a:ea typeface="Calibri" pitchFamily="34" charset="-122"/>
                 <a:cs typeface="Calibri" pitchFamily="34" charset="-120"/>
               </a:rPr>
-              <a:t>A roster of DSES members is signed up for radio astronomy — first observing sessions on a far gentler learning curve.</a:t>
-            </a:r>
-            <a:endParaRPr lang="en-US" sz="1450" dirty="0"/>
-          </a:p>
-        </p:txBody>
-      </p:sp>
-      <p:sp>
-        <p:nvSpPr>
-          <p:cNvPr id="9" name="Text 6"/>
-          <p:cNvSpPr/>
-          <p:nvPr/>
-        </p:nvSpPr>
-        <p:spPr>
-          <a:xfrm>
-            <a:off x="566928" y="2587752"/>
-            <a:ext cx="457200" cy="457200"/>
-          </a:xfrm>
-          <a:prstGeom prst="ellipse">
-            <a:avLst/>
+              <a:t>Stepped wide-spectrum scan for RFI surveys beyond the radio’s instantaneous bandwidth — retunes across a range (e.g. 100–1000 MHz) and stitches one wide trace, with cross-pass max-hold.</a:t>
+            </a:r>
+            <a:endParaRPr lang="en-US" sz="1200" dirty="0"/>
+          </a:p>
+        </p:txBody>
+      </p:sp>
+      <p:sp>
+        <p:nvSpPr>
+          <p:cNvPr id="11" name="Shape 8"/>
+          <p:cNvSpPr/>
+          <p:nvPr/>
+        </p:nvSpPr>
+        <p:spPr>
+          <a:xfrm>
+            <a:off x="4315968" y="2011680"/>
+            <a:ext cx="3557016" cy="2651760"/>
+          </a:xfrm>
+          <a:prstGeom prst="roundRect">
+            <a:avLst>
+              <a:gd name="adj" fmla="val 2759"/>
+            </a:avLst>
           </a:prstGeom>
           <a:solidFill>
-            <a:srgbClr val="156082"/>
+            <a:srgbClr val="EFF4F7"/>
           </a:solidFill>
-          <a:ln>
+          <a:ln w="9525">
             <a:solidFill>
-              <a:srgbClr val="156082"/>
+              <a:srgbClr val="D7E3EA"/>
             </a:solidFill>
+            <a:prstDash val="solid"/>
           </a:ln>
         </p:spPr>
-        <p:txBody>
-          <a:bodyPr wrap="square" lIns="0" tIns="0" rIns="0" bIns="0" rtlCol="0" anchor="ctr"/>
-          <a:lstStyle/>
-          <a:p>
-            <a:pPr algn="ctr" indent="0" marL="0">
-              <a:buNone/>
-            </a:pPr>
-            <a:r>
-              <a:rPr lang="en-US" sz="1800" b="1" dirty="0">
-                <a:solidFill>
-                  <a:srgbClr val="FFFFFF"/>
-                </a:solidFill>
-                <a:latin typeface="Calibri" pitchFamily="34" charset="0"/>
-                <a:ea typeface="Calibri" pitchFamily="34" charset="-122"/>
-                <a:cs typeface="Calibri" pitchFamily="34" charset="-120"/>
-              </a:rPr>
-              <a:t>2</a:t>
-            </a:r>
-            <a:endParaRPr lang="en-US" sz="1800" dirty="0"/>
-          </a:p>
-        </p:txBody>
-      </p:sp>
-      <p:sp>
-        <p:nvSpPr>
-          <p:cNvPr id="10" name="Text 7"/>
-          <p:cNvSpPr/>
-          <p:nvPr/>
-        </p:nvSpPr>
-        <p:spPr>
-          <a:xfrm>
-            <a:off x="1225296" y="2514600"/>
-            <a:ext cx="10241280" cy="603504"/>
-          </a:xfrm>
-          <a:prstGeom prst="rect">
-            <a:avLst/>
-          </a:prstGeom>
-          <a:noFill/>
-          <a:ln/>
-        </p:spPr>
-        <p:txBody>
-          <a:bodyPr wrap="square" lIns="0" tIns="0" rIns="0" bIns="0" rtlCol="0" anchor="ctr"/>
-          <a:lstStyle/>
-          <a:p>
-            <a:pPr indent="0" marL="0">
-              <a:buNone/>
-            </a:pPr>
-            <a:r>
-              <a:rPr lang="en-US" sz="1450" b="1" dirty="0">
-                <a:solidFill>
-                  <a:srgbClr val="0A2F40"/>
-                </a:solidFill>
-                <a:latin typeface="Calibri" pitchFamily="34" charset="0"/>
-                <a:ea typeface="Calibri" pitchFamily="34" charset="-122"/>
-                <a:cs typeface="Calibri" pitchFamily="34" charset="-120"/>
-              </a:rPr>
-              <a:t>Re-observe B0950+08  —  </a:t>
-            </a:r>
-            <a:pPr indent="0" marL="0">
-              <a:buNone/>
-            </a:pPr>
-            <a:r>
-              <a:rPr lang="en-US" sz="1450" dirty="0">
+      </p:sp>
+      <p:sp>
+        <p:nvSpPr>
+          <p:cNvPr id="12" name="Text 9"/>
+          <p:cNvSpPr/>
+          <p:nvPr/>
+        </p:nvSpPr>
+        <p:spPr>
+          <a:xfrm>
+            <a:off x="4553712" y="2212848"/>
+            <a:ext cx="3081528" cy="384048"/>
+          </a:xfrm>
+          <a:prstGeom prst="rect">
+            <a:avLst/>
+          </a:prstGeom>
+          <a:noFill/>
+          <a:ln/>
+        </p:spPr>
+        <p:txBody>
+          <a:bodyPr wrap="square" lIns="0" tIns="0" rIns="0" bIns="0" rtlCol="0" anchor="ctr"/>
+          <a:lstStyle/>
+          <a:p>
+            <a:pPr indent="0" marL="0">
+              <a:buNone/>
+            </a:pPr>
+            <a:r>
+              <a:rPr lang="en-US" sz="1650" b="1" dirty="0">
+                <a:solidFill>
+                  <a:srgbClr val="156082"/>
+                </a:solidFill>
+                <a:latin typeface="Cambria" pitchFamily="34" charset="0"/>
+                <a:ea typeface="Cambria" pitchFamily="34" charset="-122"/>
+                <a:cs typeface="Cambria" pitchFamily="34" charset="-120"/>
+              </a:rPr>
+              <a:t>Recording, finished</a:t>
+            </a:r>
+            <a:endParaRPr lang="en-US" sz="1650" dirty="0"/>
+          </a:p>
+        </p:txBody>
+      </p:sp>
+      <p:sp>
+        <p:nvSpPr>
+          <p:cNvPr id="13" name="Text 10"/>
+          <p:cNvSpPr/>
+          <p:nvPr/>
+        </p:nvSpPr>
+        <p:spPr>
+          <a:xfrm>
+            <a:off x="4553712" y="2670048"/>
+            <a:ext cx="3081528" cy="1783080"/>
+          </a:xfrm>
+          <a:prstGeom prst="rect">
+            <a:avLst/>
+          </a:prstGeom>
+          <a:noFill/>
+          <a:ln/>
+        </p:spPr>
+        <p:txBody>
+          <a:bodyPr wrap="square" lIns="0" tIns="0" rIns="0" bIns="0" rtlCol="0" anchor="t"/>
+          <a:lstStyle/>
+          <a:p>
+            <a:pPr indent="0" marL="0">
+              <a:buNone/>
+            </a:pPr>
+            <a:r>
+              <a:rPr lang="en-US" sz="1200" dirty="0">
                 <a:solidFill>
                   <a:srgbClr val="24343C"/>
                 </a:solidFill>
@@ -5039,97 +5112,104 @@
                 <a:ea typeface="Calibri" pitchFamily="34" charset="-122"/>
                 <a:cs typeface="Calibri" pitchFamily="34" charset="-120"/>
               </a:rPr>
-              <a:t>Longer integration to ride through scintillation.</a:t>
-            </a:r>
-            <a:endParaRPr lang="en-US" sz="1450" dirty="0"/>
-          </a:p>
-        </p:txBody>
-      </p:sp>
-      <p:sp>
-        <p:nvSpPr>
-          <p:cNvPr id="11" name="Text 8"/>
-          <p:cNvSpPr/>
-          <p:nvPr/>
-        </p:nvSpPr>
-        <p:spPr>
-          <a:xfrm>
-            <a:off x="566928" y="3483864"/>
-            <a:ext cx="457200" cy="457200"/>
-          </a:xfrm>
-          <a:prstGeom prst="ellipse">
-            <a:avLst/>
+              <a:t>Source name stamped into the filename and the .fil header — with RA/Dec derived from the pulsar designation. Red REC indicator, elapsed time, timed auto-stop. July 11’s files had to be renamed and patched by hand; never again.</a:t>
+            </a:r>
+            <a:endParaRPr lang="en-US" sz="1200" dirty="0"/>
+          </a:p>
+        </p:txBody>
+      </p:sp>
+      <p:sp>
+        <p:nvSpPr>
+          <p:cNvPr id="14" name="Shape 11"/>
+          <p:cNvSpPr/>
+          <p:nvPr/>
+        </p:nvSpPr>
+        <p:spPr>
+          <a:xfrm>
+            <a:off x="8065008" y="2011680"/>
+            <a:ext cx="3557016" cy="2651760"/>
+          </a:xfrm>
+          <a:prstGeom prst="roundRect">
+            <a:avLst>
+              <a:gd name="adj" fmla="val 2759"/>
+            </a:avLst>
           </a:prstGeom>
           <a:solidFill>
-            <a:srgbClr val="156082"/>
+            <a:srgbClr val="EFF4F7"/>
           </a:solidFill>
-          <a:ln>
+          <a:ln w="9525">
             <a:solidFill>
-              <a:srgbClr val="156082"/>
+              <a:srgbClr val="D7E3EA"/>
             </a:solidFill>
+            <a:prstDash val="solid"/>
           </a:ln>
         </p:spPr>
-        <p:txBody>
-          <a:bodyPr wrap="square" lIns="0" tIns="0" rIns="0" bIns="0" rtlCol="0" anchor="ctr"/>
-          <a:lstStyle/>
-          <a:p>
-            <a:pPr algn="ctr" indent="0" marL="0">
-              <a:buNone/>
-            </a:pPr>
-            <a:r>
-              <a:rPr lang="en-US" sz="1800" b="1" dirty="0">
-                <a:solidFill>
-                  <a:srgbClr val="FFFFFF"/>
-                </a:solidFill>
-                <a:latin typeface="Calibri" pitchFamily="34" charset="0"/>
-                <a:ea typeface="Calibri" pitchFamily="34" charset="-122"/>
-                <a:cs typeface="Calibri" pitchFamily="34" charset="-120"/>
-              </a:rPr>
-              <a:t>3</a:t>
-            </a:r>
-            <a:endParaRPr lang="en-US" sz="1800" dirty="0"/>
-          </a:p>
-        </p:txBody>
-      </p:sp>
-      <p:sp>
-        <p:nvSpPr>
-          <p:cNvPr id="12" name="Text 9"/>
-          <p:cNvSpPr/>
-          <p:nvPr/>
-        </p:nvSpPr>
-        <p:spPr>
-          <a:xfrm>
-            <a:off x="1225296" y="3410712"/>
-            <a:ext cx="10241280" cy="603504"/>
-          </a:xfrm>
-          <a:prstGeom prst="rect">
-            <a:avLst/>
-          </a:prstGeom>
-          <a:noFill/>
-          <a:ln/>
-        </p:spPr>
-        <p:txBody>
-          <a:bodyPr wrap="square" lIns="0" tIns="0" rIns="0" bIns="0" rtlCol="0" anchor="ctr"/>
-          <a:lstStyle/>
-          <a:p>
-            <a:pPr indent="0" marL="0">
-              <a:buNone/>
-            </a:pPr>
-            <a:r>
-              <a:rPr lang="en-US" sz="1450" b="1" dirty="0">
-                <a:solidFill>
-                  <a:srgbClr val="0A2F40"/>
-                </a:solidFill>
-                <a:latin typeface="Calibri" pitchFamily="34" charset="0"/>
-                <a:ea typeface="Calibri" pitchFamily="34" charset="-122"/>
-                <a:cs typeface="Calibri" pitchFamily="34" charset="-120"/>
-              </a:rPr>
-              <a:t>Toward timing-grade data  —  </a:t>
-            </a:r>
-            <a:pPr indent="0" marL="0">
-              <a:buNone/>
-            </a:pPr>
-            <a:r>
-              <a:rPr lang="en-US" sz="1450" dirty="0">
+      </p:sp>
+      <p:sp>
+        <p:nvSpPr>
+          <p:cNvPr id="15" name="Text 12"/>
+          <p:cNvSpPr/>
+          <p:nvPr/>
+        </p:nvSpPr>
+        <p:spPr>
+          <a:xfrm>
+            <a:off x="8302752" y="2212848"/>
+            <a:ext cx="3081528" cy="384048"/>
+          </a:xfrm>
+          <a:prstGeom prst="rect">
+            <a:avLst/>
+          </a:prstGeom>
+          <a:noFill/>
+          <a:ln/>
+        </p:spPr>
+        <p:txBody>
+          <a:bodyPr wrap="square" lIns="0" tIns="0" rIns="0" bIns="0" rtlCol="0" anchor="ctr"/>
+          <a:lstStyle/>
+          <a:p>
+            <a:pPr indent="0" marL="0">
+              <a:buNone/>
+            </a:pPr>
+            <a:r>
+              <a:rPr lang="en-US" sz="1650" b="1" dirty="0">
+                <a:solidFill>
+                  <a:srgbClr val="156082"/>
+                </a:solidFill>
+                <a:latin typeface="Cambria" pitchFamily="34" charset="0"/>
+                <a:ea typeface="Cambria" pitchFamily="34" charset="-122"/>
+                <a:cs typeface="Cambria" pitchFamily="34" charset="-120"/>
+              </a:rPr>
+              <a:t>Headless fixes</a:t>
+            </a:r>
+            <a:endParaRPr lang="en-US" sz="1650" dirty="0"/>
+          </a:p>
+        </p:txBody>
+      </p:sp>
+      <p:sp>
+        <p:nvSpPr>
+          <p:cNvPr id="16" name="Text 13"/>
+          <p:cNvSpPr/>
+          <p:nvPr/>
+        </p:nvSpPr>
+        <p:spPr>
+          <a:xfrm>
+            <a:off x="8302752" y="2670048"/>
+            <a:ext cx="3081528" cy="1783080"/>
+          </a:xfrm>
+          <a:prstGeom prst="rect">
+            <a:avLst/>
+          </a:prstGeom>
+          <a:noFill/>
+          <a:ln/>
+        </p:spPr>
+        <p:txBody>
+          <a:bodyPr wrap="square" lIns="0" tIns="0" rIns="0" bIns="0" rtlCol="0" anchor="t"/>
+          <a:lstStyle/>
+          <a:p>
+            <a:pPr indent="0" marL="0">
+              <a:buNone/>
+            </a:pPr>
+            <a:r>
+              <a:rPr lang="en-US" sz="1200" dirty="0">
                 <a:solidFill>
                   <a:srgbClr val="24343C"/>
                 </a:solidFill>
@@ -5137,97 +5217,79 @@
                 <a:ea typeface="Calibri" pitchFamily="34" charset="-122"/>
                 <a:cs typeface="Calibri" pitchFamily="34" charset="-120"/>
               </a:rPr>
-              <a:t>Repeat B0329+54 observations — pulse arrival times over a long baseline.</a:t>
-            </a:r>
-            <a:endParaRPr lang="en-US" sz="1450" dirty="0"/>
-          </a:p>
-        </p:txBody>
-      </p:sp>
-      <p:sp>
-        <p:nvSpPr>
-          <p:cNvPr id="13" name="Text 10"/>
-          <p:cNvSpPr/>
-          <p:nvPr/>
-        </p:nvSpPr>
-        <p:spPr>
-          <a:xfrm>
-            <a:off x="566928" y="4379976"/>
-            <a:ext cx="457200" cy="457200"/>
-          </a:xfrm>
-          <a:prstGeom prst="ellipse">
-            <a:avLst/>
+              <a:t>The virtual-monitor launcher and empty-screen safeguards from the previous slide, plus updated documentation and operating guide.</a:t>
+            </a:r>
+            <a:endParaRPr lang="en-US" sz="1200" dirty="0"/>
+          </a:p>
+        </p:txBody>
+      </p:sp>
+      <p:sp>
+        <p:nvSpPr>
+          <p:cNvPr id="17" name="Shape 14"/>
+          <p:cNvSpPr/>
+          <p:nvPr/>
+        </p:nvSpPr>
+        <p:spPr>
+          <a:xfrm>
+            <a:off x="566928" y="4937760"/>
+            <a:ext cx="11055096" cy="1234440"/>
+          </a:xfrm>
+          <a:prstGeom prst="roundRect">
+            <a:avLst>
+              <a:gd name="adj" fmla="val 5926"/>
+            </a:avLst>
           </a:prstGeom>
           <a:solidFill>
-            <a:srgbClr val="156082"/>
+            <a:srgbClr val="FFFFFF"/>
           </a:solidFill>
-          <a:ln>
+          <a:ln w="9525">
             <a:solidFill>
-              <a:srgbClr val="156082"/>
+              <a:srgbClr val="D7E3EA"/>
             </a:solidFill>
+            <a:prstDash val="solid"/>
           </a:ln>
         </p:spPr>
-        <p:txBody>
-          <a:bodyPr wrap="square" lIns="0" tIns="0" rIns="0" bIns="0" rtlCol="0" anchor="ctr"/>
-          <a:lstStyle/>
-          <a:p>
-            <a:pPr algn="ctr" indent="0" marL="0">
-              <a:buNone/>
-            </a:pPr>
-            <a:r>
-              <a:rPr lang="en-US" sz="1800" b="1" dirty="0">
-                <a:solidFill>
-                  <a:srgbClr val="FFFFFF"/>
-                </a:solidFill>
-                <a:latin typeface="Calibri" pitchFamily="34" charset="0"/>
-                <a:ea typeface="Calibri" pitchFamily="34" charset="-122"/>
-                <a:cs typeface="Calibri" pitchFamily="34" charset="-120"/>
-              </a:rPr>
-              <a:t>4</a:t>
-            </a:r>
-            <a:endParaRPr lang="en-US" sz="1800" dirty="0"/>
-          </a:p>
-        </p:txBody>
-      </p:sp>
-      <p:sp>
-        <p:nvSpPr>
-          <p:cNvPr id="14" name="Text 11"/>
-          <p:cNvSpPr/>
-          <p:nvPr/>
-        </p:nvSpPr>
-        <p:spPr>
-          <a:xfrm>
-            <a:off x="1225296" y="4306824"/>
-            <a:ext cx="10241280" cy="603504"/>
-          </a:xfrm>
-          <a:prstGeom prst="rect">
-            <a:avLst/>
-          </a:prstGeom>
-          <a:noFill/>
-          <a:ln/>
-        </p:spPr>
-        <p:txBody>
-          <a:bodyPr wrap="square" lIns="0" tIns="0" rIns="0" bIns="0" rtlCol="0" anchor="ctr"/>
-          <a:lstStyle/>
-          <a:p>
-            <a:pPr indent="0" marL="0">
-              <a:buNone/>
-            </a:pPr>
-            <a:r>
-              <a:rPr lang="en-US" sz="1450" b="1" dirty="0">
-                <a:solidFill>
-                  <a:srgbClr val="0A2F40"/>
-                </a:solidFill>
-                <a:latin typeface="Calibri" pitchFamily="34" charset="0"/>
-                <a:ea typeface="Calibri" pitchFamily="34" charset="-122"/>
-                <a:cs typeface="Calibri" pitchFamily="34" charset="-120"/>
-              </a:rPr>
-              <a:t>Publish  —  </a:t>
-            </a:r>
-            <a:pPr indent="0" marL="0">
-              <a:buNone/>
-            </a:pPr>
-            <a:r>
-              <a:rPr lang="en-US" sz="1450" dirty="0">
+      </p:sp>
+      <p:sp>
+        <p:nvSpPr>
+          <p:cNvPr id="18" name="Text 15"/>
+          <p:cNvSpPr/>
+          <p:nvPr/>
+        </p:nvSpPr>
+        <p:spPr>
+          <a:xfrm>
+            <a:off x="841248" y="4937760"/>
+            <a:ext cx="10515600" cy="1234440"/>
+          </a:xfrm>
+          <a:prstGeom prst="rect">
+            <a:avLst/>
+          </a:prstGeom>
+          <a:noFill/>
+          <a:ln/>
+        </p:spPr>
+        <p:txBody>
+          <a:bodyPr wrap="square" lIns="0" tIns="0" rIns="0" bIns="0" rtlCol="0" anchor="ctr"/>
+          <a:lstStyle/>
+          <a:p>
+            <a:pPr indent="0" marL="0">
+              <a:buNone/>
+            </a:pPr>
+            <a:r>
+              <a:rPr lang="en-US" sz="1250" b="1" dirty="0">
+                <a:solidFill>
+                  <a:srgbClr val="B86A18"/>
+                </a:solidFill>
+                <a:latin typeface="Calibri" pitchFamily="34" charset="0"/>
+                <a:ea typeface="Calibri" pitchFamily="34" charset="-122"/>
+                <a:cs typeface="Calibri" pitchFamily="34" charset="-120"/>
+              </a:rPr>
+              <a:t>Epilogue: </a:t>
+            </a:r>
+            <a:pPr indent="0" marL="0">
+              <a:buNone/>
+            </a:pPr>
+            <a:r>
+              <a:rPr lang="en-US" sz="1250" dirty="0">
                 <a:solidFill>
                   <a:srgbClr val="24343C"/>
                 </a:solidFill>
@@ -5235,107 +5297,9 @@
                 <a:ea typeface="Calibri" pitchFamily="34" charset="-122"/>
                 <a:cs typeface="Calibri" pitchFamily="34" charset="-120"/>
               </a:rPr>
-              <a:t>Full trip report on the DSES web site; this talk for SARA.</a:t>
-            </a:r>
-            <a:endParaRPr lang="en-US" sz="1450" dirty="0"/>
-          </a:p>
-        </p:txBody>
-      </p:sp>
-      <p:sp>
-        <p:nvSpPr>
-          <p:cNvPr id="15" name="Text 12"/>
-          <p:cNvSpPr/>
-          <p:nvPr/>
-        </p:nvSpPr>
-        <p:spPr>
-          <a:xfrm>
-            <a:off x="566928" y="5276088"/>
-            <a:ext cx="457200" cy="457200"/>
-          </a:xfrm>
-          <a:prstGeom prst="ellipse">
-            <a:avLst/>
-          </a:prstGeom>
-          <a:solidFill>
-            <a:srgbClr val="156082"/>
-          </a:solidFill>
-          <a:ln>
-            <a:solidFill>
-              <a:srgbClr val="156082"/>
-            </a:solidFill>
-          </a:ln>
-        </p:spPr>
-        <p:txBody>
-          <a:bodyPr wrap="square" lIns="0" tIns="0" rIns="0" bIns="0" rtlCol="0" anchor="ctr"/>
-          <a:lstStyle/>
-          <a:p>
-            <a:pPr algn="ctr" indent="0" marL="0">
-              <a:buNone/>
-            </a:pPr>
-            <a:r>
-              <a:rPr lang="en-US" sz="1800" b="1" dirty="0">
-                <a:solidFill>
-                  <a:srgbClr val="FFFFFF"/>
-                </a:solidFill>
-                <a:latin typeface="Calibri" pitchFamily="34" charset="0"/>
-                <a:ea typeface="Calibri" pitchFamily="34" charset="-122"/>
-                <a:cs typeface="Calibri" pitchFamily="34" charset="-120"/>
-              </a:rPr>
-              <a:t>5</a:t>
-            </a:r>
-            <a:endParaRPr lang="en-US" sz="1800" dirty="0"/>
-          </a:p>
-        </p:txBody>
-      </p:sp>
-      <p:sp>
-        <p:nvSpPr>
-          <p:cNvPr id="16" name="Text 13"/>
-          <p:cNvSpPr/>
-          <p:nvPr/>
-        </p:nvSpPr>
-        <p:spPr>
-          <a:xfrm>
-            <a:off x="1225296" y="5202936"/>
-            <a:ext cx="10241280" cy="603504"/>
-          </a:xfrm>
-          <a:prstGeom prst="rect">
-            <a:avLst/>
-          </a:prstGeom>
-          <a:noFill/>
-          <a:ln/>
-        </p:spPr>
-        <p:txBody>
-          <a:bodyPr wrap="square" lIns="0" tIns="0" rIns="0" bIns="0" rtlCol="0" anchor="ctr"/>
-          <a:lstStyle/>
-          <a:p>
-            <a:pPr indent="0" marL="0">
-              <a:buNone/>
-            </a:pPr>
-            <a:r>
-              <a:rPr lang="en-US" sz="1450" b="1" dirty="0">
-                <a:solidFill>
-                  <a:srgbClr val="0A2F40"/>
-                </a:solidFill>
-                <a:latin typeface="Calibri" pitchFamily="34" charset="0"/>
-                <a:ea typeface="Calibri" pitchFamily="34" charset="-122"/>
-                <a:cs typeface="Calibri" pitchFamily="34" charset="-120"/>
-              </a:rPr>
-              <a:t>Keep building  —  </a:t>
-            </a:r>
-            <a:pPr indent="0" marL="0">
-              <a:buNone/>
-            </a:pPr>
-            <a:r>
-              <a:rPr lang="en-US" sz="1450" dirty="0">
-                <a:solidFill>
-                  <a:srgbClr val="24343C"/>
-                </a:solidFill>
-                <a:latin typeface="Calibri" pitchFamily="34" charset="0"/>
-                <a:ea typeface="Calibri" pitchFamily="34" charset="-122"/>
-                <a:cs typeface="Calibri" pitchFamily="34" charset="-120"/>
-              </a:rPr>
-              <a:t>More Spectrum Analyzer features are planned — the report and operating guide are the baseline future releases will update.</a:t>
-            </a:r>
-            <a:endParaRPr lang="en-US" sz="1450" dirty="0"/>
+              <a:t>one day after release, the field box caught a packaging defect desktop testing had missed — Windows line endings in the Unix launcher script. Rebuilt and republished within hours, with two independent build-pipeline safeguards added. Real installations in the field earn their keep.</a:t>
+            </a:r>
+            <a:endParaRPr lang="en-US" sz="1250" dirty="0"/>
           </a:p>
         </p:txBody>
       </p:sp>
@@ -5350,6 +5314,2238 @@
 <file path=ppt/slides/slide14.xml><?xml version="1.0" encoding="utf-8"?>
 <p:sld xmlns:a="http://schemas.openxmlformats.org/drawingml/2006/main" xmlns:r="http://schemas.openxmlformats.org/officeDocument/2006/relationships" xmlns:p="http://schemas.openxmlformats.org/presentationml/2006/main">
   <p:cSld name="Slide 14">
+    <p:bg>
+      <p:bgPr>
+        <a:solidFill>
+          <a:srgbClr val="FFFFFF"/>
+        </a:solidFill>
+      </p:bgPr>
+    </p:bg>
+    <p:spTree>
+      <p:nvGrpSpPr>
+        <p:cNvPr id="1" name=""/>
+        <p:cNvGrpSpPr/>
+        <p:nvPr/>
+      </p:nvGrpSpPr>
+      <p:grpSpPr>
+        <a:xfrm>
+          <a:off x="0" y="0"/>
+          <a:ext cx="0" cy="0"/>
+          <a:chOff x="0" y="0"/>
+          <a:chExt cx="0" cy="0"/>
+        </a:xfrm>
+      </p:grpSpPr>
+      <p:sp>
+        <p:nvSpPr>
+          <p:cNvPr id="2" name="Text 0"/>
+          <p:cNvSpPr/>
+          <p:nvPr/>
+        </p:nvSpPr>
+        <p:spPr>
+          <a:xfrm>
+            <a:off x="566928" y="347472"/>
+            <a:ext cx="8686800" cy="274320"/>
+          </a:xfrm>
+          <a:prstGeom prst="rect">
+            <a:avLst/>
+          </a:prstGeom>
+          <a:noFill/>
+          <a:ln/>
+        </p:spPr>
+        <p:txBody>
+          <a:bodyPr wrap="square" lIns="0" tIns="0" rIns="0" bIns="0" rtlCol="0" anchor="ctr"/>
+          <a:lstStyle/>
+          <a:p>
+            <a:pPr indent="0" marL="0">
+              <a:buNone/>
+            </a:pPr>
+            <a:r>
+              <a:rPr lang="en-US" sz="1100" b="1" spc="200" kern="0" dirty="0">
+                <a:solidFill>
+                  <a:srgbClr val="156082"/>
+                </a:solidFill>
+                <a:latin typeface="Calibri" pitchFamily="34" charset="0"/>
+                <a:ea typeface="Calibri" pitchFamily="34" charset="-122"/>
+                <a:cs typeface="Calibri" pitchFamily="34" charset="-120"/>
+              </a:rPr>
+              <a:t>SHIPPED, AGAIN</a:t>
+            </a:r>
+            <a:endParaRPr lang="en-US" sz="1100" dirty="0"/>
+          </a:p>
+        </p:txBody>
+      </p:sp>
+      <p:sp>
+        <p:nvSpPr>
+          <p:cNvPr id="3" name="Text 1"/>
+          <p:cNvSpPr/>
+          <p:nvPr/>
+        </p:nvSpPr>
+        <p:spPr>
+          <a:xfrm>
+            <a:off x="566928" y="603504"/>
+            <a:ext cx="9509760" cy="685800"/>
+          </a:xfrm>
+          <a:prstGeom prst="rect">
+            <a:avLst/>
+          </a:prstGeom>
+          <a:noFill/>
+          <a:ln/>
+        </p:spPr>
+        <p:txBody>
+          <a:bodyPr wrap="square" lIns="0" tIns="0" rIns="0" bIns="0" rtlCol="0" anchor="ctr"/>
+          <a:lstStyle/>
+          <a:p>
+            <a:pPr indent="0" marL="0">
+              <a:buNone/>
+            </a:pPr>
+            <a:r>
+              <a:rPr lang="en-US" sz="2900" b="1" dirty="0">
+                <a:solidFill>
+                  <a:srgbClr val="0A2F40"/>
+                </a:solidFill>
+                <a:latin typeface="Cambria" pitchFamily="34" charset="0"/>
+                <a:ea typeface="Cambria" pitchFamily="34" charset="-122"/>
+                <a:cs typeface="Cambria" pitchFamily="34" charset="-120"/>
+              </a:rPr>
+              <a:t>v1.1.7 six days later — the display was hiding signals</a:t>
+            </a:r>
+            <a:endParaRPr lang="en-US" sz="2900" dirty="0"/>
+          </a:p>
+        </p:txBody>
+      </p:sp>
+      <p:pic>
+        <p:nvPicPr>
+          <p:cNvPr id="4" name="Image 0" descr="C:\Users\rick\Documents\DSES\Science\Spectrum_Analyzer_PY\reports\assets\DSES_Logo_Compact_Teal.png">    </p:cNvPr>
+          <p:cNvPicPr>
+            <a:picLocks noChangeAspect="1"/>
+          </p:cNvPicPr>
+          <p:nvPr/>
+        </p:nvPicPr>
+        <p:blipFill>
+          <a:blip r:embed="rId1"/>
+          <a:stretch>
+            <a:fillRect/>
+          </a:stretch>
+        </p:blipFill>
+        <p:spPr>
+          <a:xfrm>
+            <a:off x="10533888" y="384048"/>
+            <a:ext cx="1097280" cy="406908"/>
+          </a:xfrm>
+          <a:prstGeom prst="rect">
+            <a:avLst/>
+          </a:prstGeom>
+        </p:spPr>
+      </p:pic>
+      <p:sp>
+        <p:nvSpPr>
+          <p:cNvPr id="5" name="Text 2"/>
+          <p:cNvSpPr/>
+          <p:nvPr/>
+        </p:nvSpPr>
+        <p:spPr>
+          <a:xfrm>
+            <a:off x="566928" y="6473952"/>
+            <a:ext cx="5943600" cy="228600"/>
+          </a:xfrm>
+          <a:prstGeom prst="rect">
+            <a:avLst/>
+          </a:prstGeom>
+          <a:noFill/>
+          <a:ln/>
+        </p:spPr>
+        <p:txBody>
+          <a:bodyPr wrap="square" lIns="0" tIns="0" rIns="0" bIns="0" rtlCol="0" anchor="ctr"/>
+          <a:lstStyle/>
+          <a:p>
+            <a:pPr indent="0" marL="0">
+              <a:buNone/>
+            </a:pPr>
+            <a:r>
+              <a:rPr lang="en-US" sz="850" dirty="0">
+                <a:solidFill>
+                  <a:srgbClr val="6B7A82"/>
+                </a:solidFill>
+                <a:latin typeface="Calibri" pitchFamily="34" charset="0"/>
+                <a:ea typeface="Calibri" pitchFamily="34" charset="-122"/>
+                <a:cs typeface="Calibri" pitchFamily="34" charset="-120"/>
+              </a:rPr>
+              <a:t>Lowering the Barrier to Radio Astronomy  •  DSES  •  SARA 2026</a:t>
+            </a:r>
+            <a:endParaRPr lang="en-US" sz="850" dirty="0"/>
+          </a:p>
+        </p:txBody>
+      </p:sp>
+      <p:sp>
+        <p:nvSpPr>
+          <p:cNvPr id="6" name="Text 3"/>
+          <p:cNvSpPr/>
+          <p:nvPr/>
+        </p:nvSpPr>
+        <p:spPr>
+          <a:xfrm>
+            <a:off x="11475720" y="6473952"/>
+            <a:ext cx="457200" cy="228600"/>
+          </a:xfrm>
+          <a:prstGeom prst="rect">
+            <a:avLst/>
+          </a:prstGeom>
+          <a:noFill/>
+          <a:ln/>
+        </p:spPr>
+        <p:txBody>
+          <a:bodyPr wrap="square" lIns="0" tIns="0" rIns="0" bIns="0" rtlCol="0" anchor="ctr"/>
+          <a:lstStyle/>
+          <a:p>
+            <a:pPr algn="r" indent="0" marL="0">
+              <a:buNone/>
+            </a:pPr>
+            <a:r>
+              <a:rPr lang="en-US" sz="850" dirty="0">
+                <a:solidFill>
+                  <a:srgbClr val="6B7A82"/>
+                </a:solidFill>
+                <a:latin typeface="Calibri" pitchFamily="34" charset="0"/>
+                <a:ea typeface="Calibri" pitchFamily="34" charset="-122"/>
+                <a:cs typeface="Calibri" pitchFamily="34" charset="-120"/>
+              </a:rPr>
+              <a:t>14</a:t>
+            </a:r>
+            <a:endParaRPr lang="en-US" sz="850" dirty="0"/>
+          </a:p>
+        </p:txBody>
+      </p:sp>
+      <p:sp>
+        <p:nvSpPr>
+          <p:cNvPr id="7" name="Shape 4"/>
+          <p:cNvSpPr/>
+          <p:nvPr/>
+        </p:nvSpPr>
+        <p:spPr>
+          <a:xfrm>
+            <a:off x="566928" y="1828800"/>
+            <a:ext cx="2670048" cy="3017520"/>
+          </a:xfrm>
+          <a:prstGeom prst="roundRect">
+            <a:avLst>
+              <a:gd name="adj" fmla="val 2740"/>
+            </a:avLst>
+          </a:prstGeom>
+          <a:solidFill>
+            <a:srgbClr val="EFF4F7"/>
+          </a:solidFill>
+          <a:ln w="9525">
+            <a:solidFill>
+              <a:srgbClr val="D7E3EA"/>
+            </a:solidFill>
+            <a:prstDash val="solid"/>
+          </a:ln>
+        </p:spPr>
+      </p:sp>
+      <p:sp>
+        <p:nvSpPr>
+          <p:cNvPr id="8" name="Text 5"/>
+          <p:cNvSpPr/>
+          <p:nvPr/>
+        </p:nvSpPr>
+        <p:spPr>
+          <a:xfrm>
+            <a:off x="786384" y="2084832"/>
+            <a:ext cx="475488" cy="475488"/>
+          </a:xfrm>
+          <a:prstGeom prst="ellipse">
+            <a:avLst/>
+          </a:prstGeom>
+          <a:solidFill>
+            <a:srgbClr val="156082"/>
+          </a:solidFill>
+          <a:ln>
+            <a:solidFill>
+              <a:srgbClr val="156082"/>
+            </a:solidFill>
+          </a:ln>
+        </p:spPr>
+        <p:txBody>
+          <a:bodyPr wrap="square" lIns="0" tIns="0" rIns="0" bIns="0" rtlCol="0" anchor="ctr"/>
+          <a:lstStyle/>
+          <a:p>
+            <a:pPr algn="ctr" indent="0" marL="0">
+              <a:buNone/>
+            </a:pPr>
+            <a:r>
+              <a:rPr lang="en-US" sz="1800" b="1" dirty="0">
+                <a:solidFill>
+                  <a:srgbClr val="FFFFFF"/>
+                </a:solidFill>
+                <a:latin typeface="Calibri" pitchFamily="34" charset="0"/>
+                <a:ea typeface="Calibri" pitchFamily="34" charset="-122"/>
+                <a:cs typeface="Calibri" pitchFamily="34" charset="-120"/>
+              </a:rPr>
+              <a:t>1</a:t>
+            </a:r>
+            <a:endParaRPr lang="en-US" sz="1800" dirty="0"/>
+          </a:p>
+        </p:txBody>
+      </p:sp>
+      <p:sp>
+        <p:nvSpPr>
+          <p:cNvPr id="9" name="Text 6"/>
+          <p:cNvSpPr/>
+          <p:nvPr/>
+        </p:nvSpPr>
+        <p:spPr>
+          <a:xfrm>
+            <a:off x="786384" y="2743200"/>
+            <a:ext cx="2231136" cy="365760"/>
+          </a:xfrm>
+          <a:prstGeom prst="rect">
+            <a:avLst/>
+          </a:prstGeom>
+          <a:noFill/>
+          <a:ln/>
+        </p:spPr>
+        <p:txBody>
+          <a:bodyPr wrap="square" lIns="0" tIns="0" rIns="0" bIns="0" rtlCol="0" anchor="ctr"/>
+          <a:lstStyle/>
+          <a:p>
+            <a:pPr indent="0" marL="0">
+              <a:buNone/>
+            </a:pPr>
+            <a:r>
+              <a:rPr lang="en-US" sz="1500" b="1" dirty="0">
+                <a:solidFill>
+                  <a:srgbClr val="0A2F40"/>
+                </a:solidFill>
+                <a:latin typeface="Cambria" pitchFamily="34" charset="0"/>
+                <a:ea typeface="Cambria" pitchFamily="34" charset="-122"/>
+                <a:cs typeface="Cambria" pitchFamily="34" charset="-120"/>
+              </a:rPr>
+              <a:t>The report</a:t>
+            </a:r>
+            <a:endParaRPr lang="en-US" sz="1500" dirty="0"/>
+          </a:p>
+        </p:txBody>
+      </p:sp>
+      <p:sp>
+        <p:nvSpPr>
+          <p:cNvPr id="10" name="Text 7"/>
+          <p:cNvSpPr/>
+          <p:nvPr/>
+        </p:nvSpPr>
+        <p:spPr>
+          <a:xfrm>
+            <a:off x="786384" y="3154680"/>
+            <a:ext cx="2231136" cy="1554480"/>
+          </a:xfrm>
+          <a:prstGeom prst="rect">
+            <a:avLst/>
+          </a:prstGeom>
+          <a:noFill/>
+          <a:ln/>
+        </p:spPr>
+        <p:txBody>
+          <a:bodyPr wrap="square" lIns="0" tIns="0" rIns="0" bIns="0" rtlCol="0" anchor="t"/>
+          <a:lstStyle/>
+          <a:p>
+            <a:pPr indent="0" marL="0">
+              <a:buNone/>
+            </a:pPr>
+            <a:r>
+              <a:rPr lang="en-US" sz="1150" dirty="0">
+                <a:solidFill>
+                  <a:srgbClr val="24343C"/>
+                </a:solidFill>
+                <a:latin typeface="Calibri" pitchFamily="34" charset="0"/>
+                <a:ea typeface="Calibri" pitchFamily="34" charset="-122"/>
+                <a:cs typeface="Calibri" pitchFamily="34" charset="-120"/>
+              </a:rPr>
+              <a:t>Ray (AA0L): on the same hardware, other SDR software shows weak signals ours doesn’t</a:t>
+            </a:r>
+            <a:endParaRPr lang="en-US" sz="1150" dirty="0"/>
+          </a:p>
+        </p:txBody>
+      </p:sp>
+      <p:sp>
+        <p:nvSpPr>
+          <p:cNvPr id="11" name="Shape 8"/>
+          <p:cNvSpPr/>
+          <p:nvPr/>
+        </p:nvSpPr>
+        <p:spPr>
+          <a:xfrm>
+            <a:off x="3364992" y="1828800"/>
+            <a:ext cx="2670048" cy="3017520"/>
+          </a:xfrm>
+          <a:prstGeom prst="roundRect">
+            <a:avLst>
+              <a:gd name="adj" fmla="val 2740"/>
+            </a:avLst>
+          </a:prstGeom>
+          <a:solidFill>
+            <a:srgbClr val="EFF4F7"/>
+          </a:solidFill>
+          <a:ln w="9525">
+            <a:solidFill>
+              <a:srgbClr val="D7E3EA"/>
+            </a:solidFill>
+            <a:prstDash val="solid"/>
+          </a:ln>
+        </p:spPr>
+      </p:sp>
+      <p:sp>
+        <p:nvSpPr>
+          <p:cNvPr id="12" name="Text 9"/>
+          <p:cNvSpPr/>
+          <p:nvPr/>
+        </p:nvSpPr>
+        <p:spPr>
+          <a:xfrm>
+            <a:off x="3584448" y="2084832"/>
+            <a:ext cx="475488" cy="475488"/>
+          </a:xfrm>
+          <a:prstGeom prst="ellipse">
+            <a:avLst/>
+          </a:prstGeom>
+          <a:solidFill>
+            <a:srgbClr val="156082"/>
+          </a:solidFill>
+          <a:ln>
+            <a:solidFill>
+              <a:srgbClr val="156082"/>
+            </a:solidFill>
+          </a:ln>
+        </p:spPr>
+        <p:txBody>
+          <a:bodyPr wrap="square" lIns="0" tIns="0" rIns="0" bIns="0" rtlCol="0" anchor="ctr"/>
+          <a:lstStyle/>
+          <a:p>
+            <a:pPr algn="ctr" indent="0" marL="0">
+              <a:buNone/>
+            </a:pPr>
+            <a:r>
+              <a:rPr lang="en-US" sz="1800" b="1" dirty="0">
+                <a:solidFill>
+                  <a:srgbClr val="FFFFFF"/>
+                </a:solidFill>
+                <a:latin typeface="Calibri" pitchFamily="34" charset="0"/>
+                <a:ea typeface="Calibri" pitchFamily="34" charset="-122"/>
+                <a:cs typeface="Calibri" pitchFamily="34" charset="-120"/>
+              </a:rPr>
+              <a:t>2</a:t>
+            </a:r>
+            <a:endParaRPr lang="en-US" sz="1800" dirty="0"/>
+          </a:p>
+        </p:txBody>
+      </p:sp>
+      <p:sp>
+        <p:nvSpPr>
+          <p:cNvPr id="13" name="Text 10"/>
+          <p:cNvSpPr/>
+          <p:nvPr/>
+        </p:nvSpPr>
+        <p:spPr>
+          <a:xfrm>
+            <a:off x="3584448" y="2743200"/>
+            <a:ext cx="2231136" cy="365760"/>
+          </a:xfrm>
+          <a:prstGeom prst="rect">
+            <a:avLst/>
+          </a:prstGeom>
+          <a:noFill/>
+          <a:ln/>
+        </p:spPr>
+        <p:txBody>
+          <a:bodyPr wrap="square" lIns="0" tIns="0" rIns="0" bIns="0" rtlCol="0" anchor="ctr"/>
+          <a:lstStyle/>
+          <a:p>
+            <a:pPr indent="0" marL="0">
+              <a:buNone/>
+            </a:pPr>
+            <a:r>
+              <a:rPr lang="en-US" sz="1500" b="1" dirty="0">
+                <a:solidFill>
+                  <a:srgbClr val="0A2F40"/>
+                </a:solidFill>
+                <a:latin typeface="Cambria" pitchFamily="34" charset="0"/>
+                <a:ea typeface="Cambria" pitchFamily="34" charset="-122"/>
+                <a:cs typeface="Cambria" pitchFamily="34" charset="-120"/>
+              </a:rPr>
+              <a:t>The root cause</a:t>
+            </a:r>
+            <a:endParaRPr lang="en-US" sz="1500" dirty="0"/>
+          </a:p>
+        </p:txBody>
+      </p:sp>
+      <p:sp>
+        <p:nvSpPr>
+          <p:cNvPr id="14" name="Text 11"/>
+          <p:cNvSpPr/>
+          <p:nvPr/>
+        </p:nvSpPr>
+        <p:spPr>
+          <a:xfrm>
+            <a:off x="3584448" y="3154680"/>
+            <a:ext cx="2231136" cy="1554480"/>
+          </a:xfrm>
+          <a:prstGeom prst="rect">
+            <a:avLst/>
+          </a:prstGeom>
+          <a:noFill/>
+          <a:ln/>
+        </p:spPr>
+        <p:txBody>
+          <a:bodyPr wrap="square" lIns="0" tIns="0" rIns="0" bIns="0" rtlCol="0" anchor="t"/>
+          <a:lstStyle/>
+          <a:p>
+            <a:pPr indent="0" marL="0">
+              <a:buNone/>
+            </a:pPr>
+            <a:r>
+              <a:rPr lang="en-US" sz="1150" dirty="0">
+                <a:solidFill>
+                  <a:srgbClr val="24343C"/>
+                </a:solidFill>
+                <a:latin typeface="Calibri" pitchFamily="34" charset="0"/>
+                <a:ea typeface="Calibri" pitchFamily="34" charset="-122"/>
+                <a:cs typeface="Calibri" pitchFamily="34" charset="-120"/>
+              </a:rPr>
+              <a:t>The display FFT examined only the newest FFT-length of samples each screen tick — about 0.3% of the stream at 20 MS/s. The other 99.7% never reached the screen</a:t>
+            </a:r>
+            <a:endParaRPr lang="en-US" sz="1150" dirty="0"/>
+          </a:p>
+        </p:txBody>
+      </p:sp>
+      <p:sp>
+        <p:nvSpPr>
+          <p:cNvPr id="15" name="Shape 12"/>
+          <p:cNvSpPr/>
+          <p:nvPr/>
+        </p:nvSpPr>
+        <p:spPr>
+          <a:xfrm>
+            <a:off x="6163056" y="1828800"/>
+            <a:ext cx="2670048" cy="3017520"/>
+          </a:xfrm>
+          <a:prstGeom prst="roundRect">
+            <a:avLst>
+              <a:gd name="adj" fmla="val 2740"/>
+            </a:avLst>
+          </a:prstGeom>
+          <a:solidFill>
+            <a:srgbClr val="EFF4F7"/>
+          </a:solidFill>
+          <a:ln w="9525">
+            <a:solidFill>
+              <a:srgbClr val="D7E3EA"/>
+            </a:solidFill>
+            <a:prstDash val="solid"/>
+          </a:ln>
+        </p:spPr>
+      </p:sp>
+      <p:sp>
+        <p:nvSpPr>
+          <p:cNvPr id="16" name="Text 13"/>
+          <p:cNvSpPr/>
+          <p:nvPr/>
+        </p:nvSpPr>
+        <p:spPr>
+          <a:xfrm>
+            <a:off x="6382512" y="2084832"/>
+            <a:ext cx="475488" cy="475488"/>
+          </a:xfrm>
+          <a:prstGeom prst="ellipse">
+            <a:avLst/>
+          </a:prstGeom>
+          <a:solidFill>
+            <a:srgbClr val="156082"/>
+          </a:solidFill>
+          <a:ln>
+            <a:solidFill>
+              <a:srgbClr val="156082"/>
+            </a:solidFill>
+          </a:ln>
+        </p:spPr>
+        <p:txBody>
+          <a:bodyPr wrap="square" lIns="0" tIns="0" rIns="0" bIns="0" rtlCol="0" anchor="ctr"/>
+          <a:lstStyle/>
+          <a:p>
+            <a:pPr algn="ctr" indent="0" marL="0">
+              <a:buNone/>
+            </a:pPr>
+            <a:r>
+              <a:rPr lang="en-US" sz="1800" b="1" dirty="0">
+                <a:solidFill>
+                  <a:srgbClr val="FFFFFF"/>
+                </a:solidFill>
+                <a:latin typeface="Calibri" pitchFamily="34" charset="0"/>
+                <a:ea typeface="Calibri" pitchFamily="34" charset="-122"/>
+                <a:cs typeface="Calibri" pitchFamily="34" charset="-120"/>
+              </a:rPr>
+              <a:t>3</a:t>
+            </a:r>
+            <a:endParaRPr lang="en-US" sz="1800" dirty="0"/>
+          </a:p>
+        </p:txBody>
+      </p:sp>
+      <p:sp>
+        <p:nvSpPr>
+          <p:cNvPr id="17" name="Text 14"/>
+          <p:cNvSpPr/>
+          <p:nvPr/>
+        </p:nvSpPr>
+        <p:spPr>
+          <a:xfrm>
+            <a:off x="6382512" y="2743200"/>
+            <a:ext cx="2231136" cy="365760"/>
+          </a:xfrm>
+          <a:prstGeom prst="rect">
+            <a:avLst/>
+          </a:prstGeom>
+          <a:noFill/>
+          <a:ln/>
+        </p:spPr>
+        <p:txBody>
+          <a:bodyPr wrap="square" lIns="0" tIns="0" rIns="0" bIns="0" rtlCol="0" anchor="ctr"/>
+          <a:lstStyle/>
+          <a:p>
+            <a:pPr indent="0" marL="0">
+              <a:buNone/>
+            </a:pPr>
+            <a:r>
+              <a:rPr lang="en-US" sz="1500" b="1" dirty="0">
+                <a:solidFill>
+                  <a:srgbClr val="0A2F40"/>
+                </a:solidFill>
+                <a:latin typeface="Cambria" pitchFamily="34" charset="0"/>
+                <a:ea typeface="Cambria" pitchFamily="34" charset="-122"/>
+                <a:cs typeface="Cambria" pitchFamily="34" charset="-120"/>
+              </a:rPr>
+              <a:t>The fix</a:t>
+            </a:r>
+            <a:endParaRPr lang="en-US" sz="1500" dirty="0"/>
+          </a:p>
+        </p:txBody>
+      </p:sp>
+      <p:sp>
+        <p:nvSpPr>
+          <p:cNvPr id="18" name="Text 15"/>
+          <p:cNvSpPr/>
+          <p:nvPr/>
+        </p:nvSpPr>
+        <p:spPr>
+          <a:xfrm>
+            <a:off x="6382512" y="3154680"/>
+            <a:ext cx="2231136" cy="1554480"/>
+          </a:xfrm>
+          <a:prstGeom prst="rect">
+            <a:avLst/>
+          </a:prstGeom>
+          <a:noFill/>
+          <a:ln/>
+        </p:spPr>
+        <p:txBody>
+          <a:bodyPr wrap="square" lIns="0" tIns="0" rIns="0" bIns="0" rtlCol="0" anchor="t"/>
+          <a:lstStyle/>
+          <a:p>
+            <a:pPr indent="0" marL="0">
+              <a:buNone/>
+            </a:pPr>
+            <a:r>
+              <a:rPr lang="en-US" sz="1150" dirty="0">
+                <a:solidFill>
+                  <a:srgbClr val="24343C"/>
+                </a:solidFill>
+                <a:latin typeface="Calibri" pitchFamily="34" charset="0"/>
+                <a:ea typeface="Calibri" pitchFamily="34" charset="-122"/>
+                <a:cs typeface="Calibri" pitchFamily="34" charset="-120"/>
+              </a:rPr>
+              <a:t>Welch-average every sample between screen updates; true per-block peak/min hold detectors; an adaptive CPU budget so slower machines shed coverage gracefully</a:t>
+            </a:r>
+            <a:endParaRPr lang="en-US" sz="1150" dirty="0"/>
+          </a:p>
+        </p:txBody>
+      </p:sp>
+      <p:sp>
+        <p:nvSpPr>
+          <p:cNvPr id="19" name="Shape 16"/>
+          <p:cNvSpPr/>
+          <p:nvPr/>
+        </p:nvSpPr>
+        <p:spPr>
+          <a:xfrm>
+            <a:off x="8961120" y="1828800"/>
+            <a:ext cx="2670048" cy="3017520"/>
+          </a:xfrm>
+          <a:prstGeom prst="roundRect">
+            <a:avLst>
+              <a:gd name="adj" fmla="val 2740"/>
+            </a:avLst>
+          </a:prstGeom>
+          <a:solidFill>
+            <a:srgbClr val="EFF4F7"/>
+          </a:solidFill>
+          <a:ln w="9525">
+            <a:solidFill>
+              <a:srgbClr val="D7E3EA"/>
+            </a:solidFill>
+            <a:prstDash val="solid"/>
+          </a:ln>
+        </p:spPr>
+      </p:sp>
+      <p:sp>
+        <p:nvSpPr>
+          <p:cNvPr id="20" name="Text 17"/>
+          <p:cNvSpPr/>
+          <p:nvPr/>
+        </p:nvSpPr>
+        <p:spPr>
+          <a:xfrm>
+            <a:off x="9180576" y="2084832"/>
+            <a:ext cx="475488" cy="475488"/>
+          </a:xfrm>
+          <a:prstGeom prst="ellipse">
+            <a:avLst/>
+          </a:prstGeom>
+          <a:solidFill>
+            <a:srgbClr val="B86A18"/>
+          </a:solidFill>
+          <a:ln>
+            <a:solidFill>
+              <a:srgbClr val="B86A18"/>
+            </a:solidFill>
+          </a:ln>
+        </p:spPr>
+        <p:txBody>
+          <a:bodyPr wrap="square" lIns="0" tIns="0" rIns="0" bIns="0" rtlCol="0" anchor="ctr"/>
+          <a:lstStyle/>
+          <a:p>
+            <a:pPr algn="ctr" indent="0" marL="0">
+              <a:buNone/>
+            </a:pPr>
+            <a:r>
+              <a:rPr lang="en-US" sz="1800" b="1" dirty="0">
+                <a:solidFill>
+                  <a:srgbClr val="FFFFFF"/>
+                </a:solidFill>
+                <a:latin typeface="Calibri" pitchFamily="34" charset="0"/>
+                <a:ea typeface="Calibri" pitchFamily="34" charset="-122"/>
+                <a:cs typeface="Calibri" pitchFamily="34" charset="-120"/>
+              </a:rPr>
+              <a:t>4</a:t>
+            </a:r>
+            <a:endParaRPr lang="en-US" sz="1800" dirty="0"/>
+          </a:p>
+        </p:txBody>
+      </p:sp>
+      <p:sp>
+        <p:nvSpPr>
+          <p:cNvPr id="21" name="Text 18"/>
+          <p:cNvSpPr/>
+          <p:nvPr/>
+        </p:nvSpPr>
+        <p:spPr>
+          <a:xfrm>
+            <a:off x="9180576" y="2743200"/>
+            <a:ext cx="2231136" cy="365760"/>
+          </a:xfrm>
+          <a:prstGeom prst="rect">
+            <a:avLst/>
+          </a:prstGeom>
+          <a:noFill/>
+          <a:ln/>
+        </p:spPr>
+        <p:txBody>
+          <a:bodyPr wrap="square" lIns="0" tIns="0" rIns="0" bIns="0" rtlCol="0" anchor="ctr"/>
+          <a:lstStyle/>
+          <a:p>
+            <a:pPr indent="0" marL="0">
+              <a:buNone/>
+            </a:pPr>
+            <a:r>
+              <a:rPr lang="en-US" sz="1500" b="1" dirty="0">
+                <a:solidFill>
+                  <a:srgbClr val="0A2F40"/>
+                </a:solidFill>
+                <a:latin typeface="Cambria" pitchFamily="34" charset="0"/>
+                <a:ea typeface="Cambria" pitchFamily="34" charset="-122"/>
+                <a:cs typeface="Cambria" pitchFamily="34" charset="-120"/>
+              </a:rPr>
+              <a:t>The result</a:t>
+            </a:r>
+            <a:endParaRPr lang="en-US" sz="1500" dirty="0"/>
+          </a:p>
+        </p:txBody>
+      </p:sp>
+      <p:sp>
+        <p:nvSpPr>
+          <p:cNvPr id="22" name="Text 19"/>
+          <p:cNvSpPr/>
+          <p:nvPr/>
+        </p:nvSpPr>
+        <p:spPr>
+          <a:xfrm>
+            <a:off x="9180576" y="3154680"/>
+            <a:ext cx="2231136" cy="1554480"/>
+          </a:xfrm>
+          <a:prstGeom prst="rect">
+            <a:avLst/>
+          </a:prstGeom>
+          <a:noFill/>
+          <a:ln/>
+        </p:spPr>
+        <p:txBody>
+          <a:bodyPr wrap="square" lIns="0" tIns="0" rIns="0" bIns="0" rtlCol="0" anchor="t"/>
+          <a:lstStyle/>
+          <a:p>
+            <a:pPr indent="0" marL="0">
+              <a:buNone/>
+            </a:pPr>
+            <a:r>
+              <a:rPr lang="en-US" sz="1150" dirty="0">
+                <a:solidFill>
+                  <a:srgbClr val="24343C"/>
+                </a:solidFill>
+                <a:latin typeface="Calibri" pitchFamily="34" charset="0"/>
+                <a:ea typeface="Calibri" pitchFamily="34" charset="-122"/>
+                <a:cs typeface="Calibri" pitchFamily="34" charset="-120"/>
+              </a:rPr>
+              <a:t>A razor-flat noise floor with sub-dB scatter — weak signals stand clear. Verified live on the B210; released July 18</a:t>
+            </a:r>
+            <a:endParaRPr lang="en-US" sz="1150" dirty="0"/>
+          </a:p>
+        </p:txBody>
+      </p:sp>
+      <p:sp>
+        <p:nvSpPr>
+          <p:cNvPr id="23" name="Shape 20"/>
+          <p:cNvSpPr/>
+          <p:nvPr/>
+        </p:nvSpPr>
+        <p:spPr>
+          <a:xfrm>
+            <a:off x="566928" y="5257800"/>
+            <a:ext cx="11055096" cy="914400"/>
+          </a:xfrm>
+          <a:prstGeom prst="roundRect">
+            <a:avLst>
+              <a:gd name="adj" fmla="val 8000"/>
+            </a:avLst>
+          </a:prstGeom>
+          <a:solidFill>
+            <a:srgbClr val="EFF4F7"/>
+          </a:solidFill>
+          <a:ln w="9525">
+            <a:solidFill>
+              <a:srgbClr val="D7E3EA"/>
+            </a:solidFill>
+            <a:prstDash val="solid"/>
+          </a:ln>
+        </p:spPr>
+      </p:sp>
+      <p:sp>
+        <p:nvSpPr>
+          <p:cNvPr id="24" name="Text 21"/>
+          <p:cNvSpPr/>
+          <p:nvPr/>
+        </p:nvSpPr>
+        <p:spPr>
+          <a:xfrm>
+            <a:off x="886968" y="5257800"/>
+            <a:ext cx="10424160" cy="914400"/>
+          </a:xfrm>
+          <a:prstGeom prst="rect">
+            <a:avLst/>
+          </a:prstGeom>
+          <a:noFill/>
+          <a:ln/>
+        </p:spPr>
+        <p:txBody>
+          <a:bodyPr wrap="square" lIns="0" tIns="0" rIns="0" bIns="0" rtlCol="0" anchor="ctr"/>
+          <a:lstStyle/>
+          <a:p>
+            <a:pPr indent="0" marL="0">
+              <a:buNone/>
+            </a:pPr>
+            <a:r>
+              <a:rPr lang="en-US" sz="1450" b="1" dirty="0">
+                <a:solidFill>
+                  <a:srgbClr val="B86A18"/>
+                </a:solidFill>
+                <a:latin typeface="Calibri" pitchFamily="34" charset="0"/>
+                <a:ea typeface="Calibri" pitchFamily="34" charset="-122"/>
+                <a:cs typeface="Calibri" pitchFamily="34" charset="-120"/>
+              </a:rPr>
+              <a:t>Recordings were never affected</a:t>
+            </a:r>
+            <a:pPr indent="0" marL="0">
+              <a:buNone/>
+            </a:pPr>
+            <a:r>
+              <a:rPr lang="en-US" sz="1450" dirty="0">
+                <a:solidFill>
+                  <a:srgbClr val="0A2F40"/>
+                </a:solidFill>
+                <a:latin typeface="Calibri" pitchFamily="34" charset="0"/>
+                <a:ea typeface="Calibri" pitchFamily="34" charset="-122"/>
+                <a:cs typeface="Calibri" pitchFamily="34" charset="-120"/>
+              </a:rPr>
+              <a:t> — the filterbank path always processed every sample; this was display-only. Two field reports, two releases, seven days.</a:t>
+            </a:r>
+            <a:endParaRPr lang="en-US" sz="1450" dirty="0"/>
+          </a:p>
+        </p:txBody>
+      </p:sp>
+    </p:spTree>
+  </p:cSld>
+  <p:clrMapOvr>
+    <a:masterClrMapping/>
+  </p:clrMapOvr>
+</p:sld>
+</file>
+
+<file path=ppt/slides/slide15.xml><?xml version="1.0" encoding="utf-8"?>
+<p:sld xmlns:a="http://schemas.openxmlformats.org/drawingml/2006/main" xmlns:r="http://schemas.openxmlformats.org/officeDocument/2006/relationships" xmlns:p="http://schemas.openxmlformats.org/presentationml/2006/main">
+  <p:cSld name="Slide 15">
+    <p:bg>
+      <p:bgPr>
+        <a:solidFill>
+          <a:srgbClr val="FFFFFF"/>
+        </a:solidFill>
+      </p:bgPr>
+    </p:bg>
+    <p:spTree>
+      <p:nvGrpSpPr>
+        <p:cNvPr id="1" name=""/>
+        <p:cNvGrpSpPr/>
+        <p:nvPr/>
+      </p:nvGrpSpPr>
+      <p:grpSpPr>
+        <a:xfrm>
+          <a:off x="0" y="0"/>
+          <a:ext cx="0" cy="0"/>
+          <a:chOff x="0" y="0"/>
+          <a:chExt cx="0" cy="0"/>
+        </a:xfrm>
+      </p:grpSpPr>
+      <p:sp>
+        <p:nvSpPr>
+          <p:cNvPr id="2" name="Text 0"/>
+          <p:cNvSpPr/>
+          <p:nvPr/>
+        </p:nvSpPr>
+        <p:spPr>
+          <a:xfrm>
+            <a:off x="566928" y="347472"/>
+            <a:ext cx="8686800" cy="274320"/>
+          </a:xfrm>
+          <a:prstGeom prst="rect">
+            <a:avLst/>
+          </a:prstGeom>
+          <a:noFill/>
+          <a:ln/>
+        </p:spPr>
+        <p:txBody>
+          <a:bodyPr wrap="square" lIns="0" tIns="0" rIns="0" bIns="0" rtlCol="0" anchor="ctr"/>
+          <a:lstStyle/>
+          <a:p>
+            <a:pPr indent="0" marL="0">
+              <a:buNone/>
+            </a:pPr>
+            <a:r>
+              <a:rPr lang="en-US" sz="1100" b="1" spc="200" kern="0" dirty="0">
+                <a:solidFill>
+                  <a:srgbClr val="156082"/>
+                </a:solidFill>
+                <a:latin typeface="Calibri" pitchFamily="34" charset="0"/>
+                <a:ea typeface="Calibri" pitchFamily="34" charset="-122"/>
+                <a:cs typeface="Calibri" pitchFamily="34" charset="-120"/>
+              </a:rPr>
+              <a:t>THE ROAD AHEAD</a:t>
+            </a:r>
+            <a:endParaRPr lang="en-US" sz="1100" dirty="0"/>
+          </a:p>
+        </p:txBody>
+      </p:sp>
+      <p:sp>
+        <p:nvSpPr>
+          <p:cNvPr id="3" name="Text 1"/>
+          <p:cNvSpPr/>
+          <p:nvPr/>
+        </p:nvSpPr>
+        <p:spPr>
+          <a:xfrm>
+            <a:off x="566928" y="603504"/>
+            <a:ext cx="9509760" cy="685800"/>
+          </a:xfrm>
+          <a:prstGeom prst="rect">
+            <a:avLst/>
+          </a:prstGeom>
+          <a:noFill/>
+          <a:ln/>
+        </p:spPr>
+        <p:txBody>
+          <a:bodyPr wrap="square" lIns="0" tIns="0" rIns="0" bIns="0" rtlCol="0" anchor="ctr"/>
+          <a:lstStyle/>
+          <a:p>
+            <a:pPr indent="0" marL="0">
+              <a:buNone/>
+            </a:pPr>
+            <a:r>
+              <a:rPr lang="en-US" sz="2900" b="1" dirty="0">
+                <a:solidFill>
+                  <a:srgbClr val="0A2F40"/>
+                </a:solidFill>
+                <a:latin typeface="Cambria" pitchFamily="34" charset="0"/>
+                <a:ea typeface="Cambria" pitchFamily="34" charset="-122"/>
+                <a:cs typeface="Cambria" pitchFamily="34" charset="-120"/>
+              </a:rPr>
+              <a:t>A documented upgrade queue</a:t>
+            </a:r>
+            <a:endParaRPr lang="en-US" sz="2900" dirty="0"/>
+          </a:p>
+        </p:txBody>
+      </p:sp>
+      <p:pic>
+        <p:nvPicPr>
+          <p:cNvPr id="4" name="Image 0" descr="C:\Users\rick\Documents\DSES\Science\Spectrum_Analyzer_PY\reports\assets\DSES_Logo_Compact_Teal.png">    </p:cNvPr>
+          <p:cNvPicPr>
+            <a:picLocks noChangeAspect="1"/>
+          </p:cNvPicPr>
+          <p:nvPr/>
+        </p:nvPicPr>
+        <p:blipFill>
+          <a:blip r:embed="rId1"/>
+          <a:stretch>
+            <a:fillRect/>
+          </a:stretch>
+        </p:blipFill>
+        <p:spPr>
+          <a:xfrm>
+            <a:off x="10533888" y="384048"/>
+            <a:ext cx="1097280" cy="406908"/>
+          </a:xfrm>
+          <a:prstGeom prst="rect">
+            <a:avLst/>
+          </a:prstGeom>
+        </p:spPr>
+      </p:pic>
+      <p:sp>
+        <p:nvSpPr>
+          <p:cNvPr id="5" name="Text 2"/>
+          <p:cNvSpPr/>
+          <p:nvPr/>
+        </p:nvSpPr>
+        <p:spPr>
+          <a:xfrm>
+            <a:off x="566928" y="6473952"/>
+            <a:ext cx="5943600" cy="228600"/>
+          </a:xfrm>
+          <a:prstGeom prst="rect">
+            <a:avLst/>
+          </a:prstGeom>
+          <a:noFill/>
+          <a:ln/>
+        </p:spPr>
+        <p:txBody>
+          <a:bodyPr wrap="square" lIns="0" tIns="0" rIns="0" bIns="0" rtlCol="0" anchor="ctr"/>
+          <a:lstStyle/>
+          <a:p>
+            <a:pPr indent="0" marL="0">
+              <a:buNone/>
+            </a:pPr>
+            <a:r>
+              <a:rPr lang="en-US" sz="850" dirty="0">
+                <a:solidFill>
+                  <a:srgbClr val="6B7A82"/>
+                </a:solidFill>
+                <a:latin typeface="Calibri" pitchFamily="34" charset="0"/>
+                <a:ea typeface="Calibri" pitchFamily="34" charset="-122"/>
+                <a:cs typeface="Calibri" pitchFamily="34" charset="-120"/>
+              </a:rPr>
+              <a:t>Lowering the Barrier to Radio Astronomy  •  DSES  •  SARA 2026</a:t>
+            </a:r>
+            <a:endParaRPr lang="en-US" sz="850" dirty="0"/>
+          </a:p>
+        </p:txBody>
+      </p:sp>
+      <p:sp>
+        <p:nvSpPr>
+          <p:cNvPr id="6" name="Text 3"/>
+          <p:cNvSpPr/>
+          <p:nvPr/>
+        </p:nvSpPr>
+        <p:spPr>
+          <a:xfrm>
+            <a:off x="11475720" y="6473952"/>
+            <a:ext cx="457200" cy="228600"/>
+          </a:xfrm>
+          <a:prstGeom prst="rect">
+            <a:avLst/>
+          </a:prstGeom>
+          <a:noFill/>
+          <a:ln/>
+        </p:spPr>
+        <p:txBody>
+          <a:bodyPr wrap="square" lIns="0" tIns="0" rIns="0" bIns="0" rtlCol="0" anchor="ctr"/>
+          <a:lstStyle/>
+          <a:p>
+            <a:pPr algn="r" indent="0" marL="0">
+              <a:buNone/>
+            </a:pPr>
+            <a:r>
+              <a:rPr lang="en-US" sz="850" dirty="0">
+                <a:solidFill>
+                  <a:srgbClr val="6B7A82"/>
+                </a:solidFill>
+                <a:latin typeface="Calibri" pitchFamily="34" charset="0"/>
+                <a:ea typeface="Calibri" pitchFamily="34" charset="-122"/>
+                <a:cs typeface="Calibri" pitchFamily="34" charset="-120"/>
+              </a:rPr>
+              <a:t>15</a:t>
+            </a:r>
+            <a:endParaRPr lang="en-US" sz="850" dirty="0"/>
+          </a:p>
+        </p:txBody>
+      </p:sp>
+      <p:sp>
+        <p:nvSpPr>
+          <p:cNvPr id="7" name="Shape 4"/>
+          <p:cNvSpPr/>
+          <p:nvPr/>
+        </p:nvSpPr>
+        <p:spPr>
+          <a:xfrm>
+            <a:off x="566928" y="1783080"/>
+            <a:ext cx="3886200" cy="960120"/>
+          </a:xfrm>
+          <a:prstGeom prst="roundRect">
+            <a:avLst>
+              <a:gd name="adj" fmla="val 7619"/>
+            </a:avLst>
+          </a:prstGeom>
+          <a:solidFill>
+            <a:srgbClr val="EFF4F7"/>
+          </a:solidFill>
+          <a:ln w="9525">
+            <a:solidFill>
+              <a:srgbClr val="D7E3EA"/>
+            </a:solidFill>
+            <a:prstDash val="solid"/>
+          </a:ln>
+        </p:spPr>
+      </p:sp>
+      <p:sp>
+        <p:nvSpPr>
+          <p:cNvPr id="8" name="Text 5"/>
+          <p:cNvSpPr/>
+          <p:nvPr/>
+        </p:nvSpPr>
+        <p:spPr>
+          <a:xfrm>
+            <a:off x="749808" y="1865376"/>
+            <a:ext cx="3520440" cy="256032"/>
+          </a:xfrm>
+          <a:prstGeom prst="rect">
+            <a:avLst/>
+          </a:prstGeom>
+          <a:noFill/>
+          <a:ln/>
+        </p:spPr>
+        <p:txBody>
+          <a:bodyPr wrap="square" lIns="0" tIns="0" rIns="0" bIns="0" rtlCol="0" anchor="ctr"/>
+          <a:lstStyle/>
+          <a:p>
+            <a:pPr indent="0" marL="0">
+              <a:buNone/>
+            </a:pPr>
+            <a:r>
+              <a:rPr lang="en-US" sz="1150" b="1" dirty="0">
+                <a:solidFill>
+                  <a:srgbClr val="0A2F40"/>
+                </a:solidFill>
+                <a:latin typeface="Calibri" pitchFamily="34" charset="0"/>
+                <a:ea typeface="Calibri" pitchFamily="34" charset="-122"/>
+                <a:cs typeface="Calibri" pitchFamily="34" charset="-120"/>
+              </a:rPr>
+              <a:t>Pulsar visibility planner</a:t>
+            </a:r>
+            <a:endParaRPr lang="en-US" sz="1150" dirty="0"/>
+          </a:p>
+        </p:txBody>
+      </p:sp>
+      <p:sp>
+        <p:nvSpPr>
+          <p:cNvPr id="9" name="Text 6"/>
+          <p:cNvSpPr/>
+          <p:nvPr/>
+        </p:nvSpPr>
+        <p:spPr>
+          <a:xfrm>
+            <a:off x="749808" y="2130552"/>
+            <a:ext cx="3520440" cy="566928"/>
+          </a:xfrm>
+          <a:prstGeom prst="rect">
+            <a:avLst/>
+          </a:prstGeom>
+          <a:noFill/>
+          <a:ln/>
+        </p:spPr>
+        <p:txBody>
+          <a:bodyPr wrap="square" lIns="0" tIns="0" rIns="0" bIns="0" rtlCol="0" anchor="t"/>
+          <a:lstStyle/>
+          <a:p>
+            <a:pPr indent="0" marL="0">
+              <a:buNone/>
+            </a:pPr>
+            <a:r>
+              <a:rPr lang="en-US" sz="950" dirty="0">
+                <a:solidFill>
+                  <a:srgbClr val="24343C"/>
+                </a:solidFill>
+                <a:latin typeface="Calibri" pitchFamily="34" charset="0"/>
+                <a:ea typeface="Calibri" pitchFamily="34" charset="-122"/>
+                <a:cs typeface="Calibri" pitchFamily="34" charset="-120"/>
+              </a:rPr>
+              <a:t>“what’s up now?” — pulsars above the horizon with az/el, flux, and time left; a pick fills the recording Source field</a:t>
+            </a:r>
+            <a:endParaRPr lang="en-US" sz="950" dirty="0"/>
+          </a:p>
+        </p:txBody>
+      </p:sp>
+      <p:sp>
+        <p:nvSpPr>
+          <p:cNvPr id="10" name="Shape 7"/>
+          <p:cNvSpPr/>
+          <p:nvPr/>
+        </p:nvSpPr>
+        <p:spPr>
+          <a:xfrm>
+            <a:off x="4654296" y="1783080"/>
+            <a:ext cx="3886200" cy="960120"/>
+          </a:xfrm>
+          <a:prstGeom prst="roundRect">
+            <a:avLst>
+              <a:gd name="adj" fmla="val 7619"/>
+            </a:avLst>
+          </a:prstGeom>
+          <a:solidFill>
+            <a:srgbClr val="EFF4F7"/>
+          </a:solidFill>
+          <a:ln w="9525">
+            <a:solidFill>
+              <a:srgbClr val="D7E3EA"/>
+            </a:solidFill>
+            <a:prstDash val="solid"/>
+          </a:ln>
+        </p:spPr>
+      </p:sp>
+      <p:sp>
+        <p:nvSpPr>
+          <p:cNvPr id="11" name="Text 8"/>
+          <p:cNvSpPr/>
+          <p:nvPr/>
+        </p:nvSpPr>
+        <p:spPr>
+          <a:xfrm>
+            <a:off x="4837176" y="1865376"/>
+            <a:ext cx="3520440" cy="256032"/>
+          </a:xfrm>
+          <a:prstGeom prst="rect">
+            <a:avLst/>
+          </a:prstGeom>
+          <a:noFill/>
+          <a:ln/>
+        </p:spPr>
+        <p:txBody>
+          <a:bodyPr wrap="square" lIns="0" tIns="0" rIns="0" bIns="0" rtlCol="0" anchor="ctr"/>
+          <a:lstStyle/>
+          <a:p>
+            <a:pPr indent="0" marL="0">
+              <a:buNone/>
+            </a:pPr>
+            <a:r>
+              <a:rPr lang="en-US" sz="1150" b="1" dirty="0">
+                <a:solidFill>
+                  <a:srgbClr val="0A2F40"/>
+                </a:solidFill>
+                <a:latin typeface="Calibri" pitchFamily="34" charset="0"/>
+                <a:ea typeface="Calibri" pitchFamily="34" charset="-122"/>
+                <a:cs typeface="Calibri" pitchFamily="34" charset="-120"/>
+              </a:rPr>
+              <a:t>One-click post-processing</a:t>
+            </a:r>
+            <a:endParaRPr lang="en-US" sz="1150" dirty="0"/>
+          </a:p>
+        </p:txBody>
+      </p:sp>
+      <p:sp>
+        <p:nvSpPr>
+          <p:cNvPr id="12" name="Text 9"/>
+          <p:cNvSpPr/>
+          <p:nvPr/>
+        </p:nvSpPr>
+        <p:spPr>
+          <a:xfrm>
+            <a:off x="4837176" y="2130552"/>
+            <a:ext cx="3520440" cy="566928"/>
+          </a:xfrm>
+          <a:prstGeom prst="rect">
+            <a:avLst/>
+          </a:prstGeom>
+          <a:noFill/>
+          <a:ln/>
+        </p:spPr>
+        <p:txBody>
+          <a:bodyPr wrap="square" lIns="0" tIns="0" rIns="0" bIns="0" rtlCol="0" anchor="t"/>
+          <a:lstStyle/>
+          <a:p>
+            <a:pPr indent="0" marL="0">
+              <a:buNone/>
+            </a:pPr>
+            <a:r>
+              <a:rPr lang="en-US" sz="950" dirty="0">
+                <a:solidFill>
+                  <a:srgbClr val="24343C"/>
+                </a:solidFill>
+                <a:latin typeface="Calibri" pitchFamily="34" charset="0"/>
+                <a:ea typeface="Calibri" pitchFamily="34" charset="-122"/>
+                <a:cs typeface="Calibri" pitchFamily="34" charset="-120"/>
+              </a:rPr>
+              <a:t>“is it good?” — automatic RFI mask + catalog fold when a recording ends; sigma/DM results card and a plain verdict</a:t>
+            </a:r>
+            <a:endParaRPr lang="en-US" sz="950" dirty="0"/>
+          </a:p>
+        </p:txBody>
+      </p:sp>
+      <p:sp>
+        <p:nvSpPr>
+          <p:cNvPr id="13" name="Shape 10"/>
+          <p:cNvSpPr/>
+          <p:nvPr/>
+        </p:nvSpPr>
+        <p:spPr>
+          <a:xfrm>
+            <a:off x="566928" y="2871216"/>
+            <a:ext cx="3886200" cy="960120"/>
+          </a:xfrm>
+          <a:prstGeom prst="roundRect">
+            <a:avLst>
+              <a:gd name="adj" fmla="val 7619"/>
+            </a:avLst>
+          </a:prstGeom>
+          <a:solidFill>
+            <a:srgbClr val="EFF4F7"/>
+          </a:solidFill>
+          <a:ln w="9525">
+            <a:solidFill>
+              <a:srgbClr val="D7E3EA"/>
+            </a:solidFill>
+            <a:prstDash val="solid"/>
+          </a:ln>
+        </p:spPr>
+      </p:sp>
+      <p:sp>
+        <p:nvSpPr>
+          <p:cNvPr id="14" name="Text 11"/>
+          <p:cNvSpPr/>
+          <p:nvPr/>
+        </p:nvSpPr>
+        <p:spPr>
+          <a:xfrm>
+            <a:off x="749808" y="2953512"/>
+            <a:ext cx="3520440" cy="256032"/>
+          </a:xfrm>
+          <a:prstGeom prst="rect">
+            <a:avLst/>
+          </a:prstGeom>
+          <a:noFill/>
+          <a:ln/>
+        </p:spPr>
+        <p:txBody>
+          <a:bodyPr wrap="square" lIns="0" tIns="0" rIns="0" bIns="0" rtlCol="0" anchor="ctr"/>
+          <a:lstStyle/>
+          <a:p>
+            <a:pPr indent="0" marL="0">
+              <a:buNone/>
+            </a:pPr>
+            <a:r>
+              <a:rPr lang="en-US" sz="1150" b="1" dirty="0">
+                <a:solidFill>
+                  <a:srgbClr val="0A2F40"/>
+                </a:solidFill>
+                <a:latin typeface="Calibri" pitchFamily="34" charset="0"/>
+                <a:ea typeface="Calibri" pitchFamily="34" charset="-122"/>
+                <a:cs typeface="Calibri" pitchFamily="34" charset="-120"/>
+              </a:rPr>
+              <a:t>Quick-look during recording</a:t>
+            </a:r>
+            <a:endParaRPr lang="en-US" sz="1150" dirty="0"/>
+          </a:p>
+        </p:txBody>
+      </p:sp>
+      <p:sp>
+        <p:nvSpPr>
+          <p:cNvPr id="15" name="Text 12"/>
+          <p:cNvSpPr/>
+          <p:nvPr/>
+        </p:nvSpPr>
+        <p:spPr>
+          <a:xfrm>
+            <a:off x="749808" y="3218688"/>
+            <a:ext cx="3520440" cy="566928"/>
+          </a:xfrm>
+          <a:prstGeom prst="rect">
+            <a:avLst/>
+          </a:prstGeom>
+          <a:noFill/>
+          <a:ln/>
+        </p:spPr>
+        <p:txBody>
+          <a:bodyPr wrap="square" lIns="0" tIns="0" rIns="0" bIns="0" rtlCol="0" anchor="t"/>
+          <a:lstStyle/>
+          <a:p>
+            <a:pPr indent="0" marL="0">
+              <a:buNone/>
+            </a:pPr>
+            <a:r>
+              <a:rPr lang="en-US" sz="950" dirty="0">
+                <a:solidFill>
+                  <a:srgbClr val="24343C"/>
+                </a:solidFill>
+                <a:latin typeface="Calibri" pitchFamily="34" charset="0"/>
+                <a:ea typeface="Calibri" pitchFamily="34" charset="-122"/>
+                <a:cs typeface="Calibri" pitchFamily="34" charset="-120"/>
+              </a:rPr>
+              <a:t>a draft fold on a snapshot of the data so far — without interrupting a multi-hour capture</a:t>
+            </a:r>
+            <a:endParaRPr lang="en-US" sz="950" dirty="0"/>
+          </a:p>
+        </p:txBody>
+      </p:sp>
+      <p:sp>
+        <p:nvSpPr>
+          <p:cNvPr id="16" name="Shape 13"/>
+          <p:cNvSpPr/>
+          <p:nvPr/>
+        </p:nvSpPr>
+        <p:spPr>
+          <a:xfrm>
+            <a:off x="4654296" y="2871216"/>
+            <a:ext cx="3886200" cy="960120"/>
+          </a:xfrm>
+          <a:prstGeom prst="roundRect">
+            <a:avLst>
+              <a:gd name="adj" fmla="val 7619"/>
+            </a:avLst>
+          </a:prstGeom>
+          <a:solidFill>
+            <a:srgbClr val="EFF4F7"/>
+          </a:solidFill>
+          <a:ln w="9525">
+            <a:solidFill>
+              <a:srgbClr val="D7E3EA"/>
+            </a:solidFill>
+            <a:prstDash val="solid"/>
+          </a:ln>
+        </p:spPr>
+      </p:sp>
+      <p:sp>
+        <p:nvSpPr>
+          <p:cNvPr id="17" name="Text 14"/>
+          <p:cNvSpPr/>
+          <p:nvPr/>
+        </p:nvSpPr>
+        <p:spPr>
+          <a:xfrm>
+            <a:off x="4837176" y="2953512"/>
+            <a:ext cx="3520440" cy="256032"/>
+          </a:xfrm>
+          <a:prstGeom prst="rect">
+            <a:avLst/>
+          </a:prstGeom>
+          <a:noFill/>
+          <a:ln/>
+        </p:spPr>
+        <p:txBody>
+          <a:bodyPr wrap="square" lIns="0" tIns="0" rIns="0" bIns="0" rtlCol="0" anchor="ctr"/>
+          <a:lstStyle/>
+          <a:p>
+            <a:pPr indent="0" marL="0">
+              <a:buNone/>
+            </a:pPr>
+            <a:r>
+              <a:rPr lang="en-US" sz="1150" b="1" dirty="0">
+                <a:solidFill>
+                  <a:srgbClr val="0A2F40"/>
+                </a:solidFill>
+                <a:latin typeface="Calibri" pitchFamily="34" charset="0"/>
+                <a:ea typeface="Calibri" pitchFamily="34" charset="-122"/>
+                <a:cs typeface="Calibri" pitchFamily="34" charset="-120"/>
+              </a:rPr>
+              <a:t>Timebase integrity</a:t>
+            </a:r>
+            <a:endParaRPr lang="en-US" sz="1150" dirty="0"/>
+          </a:p>
+        </p:txBody>
+      </p:sp>
+      <p:sp>
+        <p:nvSpPr>
+          <p:cNvPr id="18" name="Text 15"/>
+          <p:cNvSpPr/>
+          <p:nvPr/>
+        </p:nvSpPr>
+        <p:spPr>
+          <a:xfrm>
+            <a:off x="4837176" y="3218688"/>
+            <a:ext cx="3520440" cy="566928"/>
+          </a:xfrm>
+          <a:prstGeom prst="rect">
+            <a:avLst/>
+          </a:prstGeom>
+          <a:noFill/>
+          <a:ln/>
+        </p:spPr>
+        <p:txBody>
+          <a:bodyPr wrap="square" lIns="0" tIns="0" rIns="0" bIns="0" rtlCol="0" anchor="t"/>
+          <a:lstStyle/>
+          <a:p>
+            <a:pPr indent="0" marL="0">
+              <a:buNone/>
+            </a:pPr>
+            <a:r>
+              <a:rPr lang="en-US" sz="950" dirty="0">
+                <a:solidFill>
+                  <a:srgbClr val="24343C"/>
+                </a:solidFill>
+                <a:latin typeface="Calibri" pitchFamily="34" charset="0"/>
+                <a:ea typeface="Calibri" pitchFamily="34" charset="-122"/>
+                <a:cs typeface="Calibri" pitchFamily="34" charset="-120"/>
+              </a:rPr>
+              <a:t>count and log overflows; automatic gap-padding keeps the .fil clock honest — the peer-review finding, fixed at the source</a:t>
+            </a:r>
+            <a:endParaRPr lang="en-US" sz="950" dirty="0"/>
+          </a:p>
+        </p:txBody>
+      </p:sp>
+      <p:sp>
+        <p:nvSpPr>
+          <p:cNvPr id="19" name="Shape 16"/>
+          <p:cNvSpPr/>
+          <p:nvPr/>
+        </p:nvSpPr>
+        <p:spPr>
+          <a:xfrm>
+            <a:off x="566928" y="3959352"/>
+            <a:ext cx="3886200" cy="960120"/>
+          </a:xfrm>
+          <a:prstGeom prst="roundRect">
+            <a:avLst>
+              <a:gd name="adj" fmla="val 7619"/>
+            </a:avLst>
+          </a:prstGeom>
+          <a:solidFill>
+            <a:srgbClr val="EFF4F7"/>
+          </a:solidFill>
+          <a:ln w="9525">
+            <a:solidFill>
+              <a:srgbClr val="D7E3EA"/>
+            </a:solidFill>
+            <a:prstDash val="solid"/>
+          </a:ln>
+        </p:spPr>
+      </p:sp>
+      <p:sp>
+        <p:nvSpPr>
+          <p:cNvPr id="20" name="Text 17"/>
+          <p:cNvSpPr/>
+          <p:nvPr/>
+        </p:nvSpPr>
+        <p:spPr>
+          <a:xfrm>
+            <a:off x="749808" y="4041648"/>
+            <a:ext cx="3520440" cy="256032"/>
+          </a:xfrm>
+          <a:prstGeom prst="rect">
+            <a:avLst/>
+          </a:prstGeom>
+          <a:noFill/>
+          <a:ln/>
+        </p:spPr>
+        <p:txBody>
+          <a:bodyPr wrap="square" lIns="0" tIns="0" rIns="0" bIns="0" rtlCol="0" anchor="ctr"/>
+          <a:lstStyle/>
+          <a:p>
+            <a:pPr indent="0" marL="0">
+              <a:buNone/>
+            </a:pPr>
+            <a:r>
+              <a:rPr lang="en-US" sz="1150" b="1" dirty="0">
+                <a:solidFill>
+                  <a:srgbClr val="0A2F40"/>
+                </a:solidFill>
+                <a:latin typeface="Calibri" pitchFamily="34" charset="0"/>
+                <a:ea typeface="Calibri" pitchFamily="34" charset="-122"/>
+                <a:cs typeface="Calibri" pitchFamily="34" charset="-120"/>
+              </a:rPr>
+              <a:t>Self-contained fold PDFs</a:t>
+            </a:r>
+            <a:endParaRPr lang="en-US" sz="1150" dirty="0"/>
+          </a:p>
+        </p:txBody>
+      </p:sp>
+      <p:sp>
+        <p:nvSpPr>
+          <p:cNvPr id="21" name="Text 18"/>
+          <p:cNvSpPr/>
+          <p:nvPr/>
+        </p:nvSpPr>
+        <p:spPr>
+          <a:xfrm>
+            <a:off x="749808" y="4306824"/>
+            <a:ext cx="3520440" cy="566928"/>
+          </a:xfrm>
+          <a:prstGeom prst="rect">
+            <a:avLst/>
+          </a:prstGeom>
+          <a:noFill/>
+          <a:ln/>
+        </p:spPr>
+        <p:txBody>
+          <a:bodyPr wrap="square" lIns="0" tIns="0" rIns="0" bIns="0" rtlCol="0" anchor="t"/>
+          <a:lstStyle/>
+          <a:p>
+            <a:pPr indent="0" marL="0">
+              <a:buNone/>
+            </a:pPr>
+            <a:r>
+              <a:rPr lang="en-US" sz="950" dirty="0">
+                <a:solidFill>
+                  <a:srgbClr val="24343C"/>
+                </a:solidFill>
+                <a:latin typeface="Calibri" pitchFamily="34" charset="0"/>
+                <a:ea typeface="Calibri" pitchFamily="34" charset="-122"/>
+                <a:cs typeface="Calibri" pitchFamily="34" charset="-120"/>
+              </a:rPr>
+              <a:t>commands, results table, and plain-language verdict inside every chart PDF — nothing to chase down later</a:t>
+            </a:r>
+            <a:endParaRPr lang="en-US" sz="950" dirty="0"/>
+          </a:p>
+        </p:txBody>
+      </p:sp>
+      <p:sp>
+        <p:nvSpPr>
+          <p:cNvPr id="22" name="Shape 19"/>
+          <p:cNvSpPr/>
+          <p:nvPr/>
+        </p:nvSpPr>
+        <p:spPr>
+          <a:xfrm>
+            <a:off x="4654296" y="3959352"/>
+            <a:ext cx="3886200" cy="960120"/>
+          </a:xfrm>
+          <a:prstGeom prst="roundRect">
+            <a:avLst>
+              <a:gd name="adj" fmla="val 7619"/>
+            </a:avLst>
+          </a:prstGeom>
+          <a:solidFill>
+            <a:srgbClr val="EFF4F7"/>
+          </a:solidFill>
+          <a:ln w="9525">
+            <a:solidFill>
+              <a:srgbClr val="D7E3EA"/>
+            </a:solidFill>
+            <a:prstDash val="solid"/>
+          </a:ln>
+        </p:spPr>
+      </p:sp>
+      <p:sp>
+        <p:nvSpPr>
+          <p:cNvPr id="23" name="Text 20"/>
+          <p:cNvSpPr/>
+          <p:nvPr/>
+        </p:nvSpPr>
+        <p:spPr>
+          <a:xfrm>
+            <a:off x="4837176" y="4041648"/>
+            <a:ext cx="3520440" cy="256032"/>
+          </a:xfrm>
+          <a:prstGeom prst="rect">
+            <a:avLst/>
+          </a:prstGeom>
+          <a:noFill/>
+          <a:ln/>
+        </p:spPr>
+        <p:txBody>
+          <a:bodyPr wrap="square" lIns="0" tIns="0" rIns="0" bIns="0" rtlCol="0" anchor="ctr"/>
+          <a:lstStyle/>
+          <a:p>
+            <a:pPr indent="0" marL="0">
+              <a:buNone/>
+            </a:pPr>
+            <a:r>
+              <a:rPr lang="en-US" sz="1150" b="1" dirty="0">
+                <a:solidFill>
+                  <a:srgbClr val="0A2F40"/>
+                </a:solidFill>
+                <a:latin typeface="Calibri" pitchFamily="34" charset="0"/>
+                <a:ea typeface="Calibri" pitchFamily="34" charset="-122"/>
+                <a:cs typeface="Calibri" pitchFamily="34" charset="-120"/>
+              </a:rPr>
+              <a:t>Audio demodulators for RFI ID</a:t>
+            </a:r>
+            <a:endParaRPr lang="en-US" sz="1150" dirty="0"/>
+          </a:p>
+        </p:txBody>
+      </p:sp>
+      <p:sp>
+        <p:nvSpPr>
+          <p:cNvPr id="24" name="Text 21"/>
+          <p:cNvSpPr/>
+          <p:nvPr/>
+        </p:nvSpPr>
+        <p:spPr>
+          <a:xfrm>
+            <a:off x="4837176" y="4306824"/>
+            <a:ext cx="3520440" cy="566928"/>
+          </a:xfrm>
+          <a:prstGeom prst="rect">
+            <a:avLst/>
+          </a:prstGeom>
+          <a:noFill/>
+          <a:ln/>
+        </p:spPr>
+        <p:txBody>
+          <a:bodyPr wrap="square" lIns="0" tIns="0" rIns="0" bIns="0" rtlCol="0" anchor="t"/>
+          <a:lstStyle/>
+          <a:p>
+            <a:pPr indent="0" marL="0">
+              <a:buNone/>
+            </a:pPr>
+            <a:r>
+              <a:rPr lang="en-US" sz="950" dirty="0">
+                <a:solidFill>
+                  <a:srgbClr val="24343C"/>
+                </a:solidFill>
+                <a:latin typeface="Calibri" pitchFamily="34" charset="0"/>
+                <a:ea typeface="Calibri" pitchFamily="34" charset="-122"/>
+                <a:cs typeface="Calibri" pitchFamily="34" charset="-120"/>
+              </a:rPr>
+              <a:t>click a signal and listen — AM/NFM/WFM/SSB/CW; an AI mode-classifier to follow</a:t>
+            </a:r>
+            <a:endParaRPr lang="en-US" sz="950" dirty="0"/>
+          </a:p>
+        </p:txBody>
+      </p:sp>
+      <p:sp>
+        <p:nvSpPr>
+          <p:cNvPr id="25" name="Shape 22"/>
+          <p:cNvSpPr/>
+          <p:nvPr/>
+        </p:nvSpPr>
+        <p:spPr>
+          <a:xfrm>
+            <a:off x="566928" y="5047488"/>
+            <a:ext cx="3886200" cy="960120"/>
+          </a:xfrm>
+          <a:prstGeom prst="roundRect">
+            <a:avLst>
+              <a:gd name="adj" fmla="val 7619"/>
+            </a:avLst>
+          </a:prstGeom>
+          <a:solidFill>
+            <a:srgbClr val="EFF4F7"/>
+          </a:solidFill>
+          <a:ln w="9525">
+            <a:solidFill>
+              <a:srgbClr val="D7E3EA"/>
+            </a:solidFill>
+            <a:prstDash val="solid"/>
+          </a:ln>
+        </p:spPr>
+      </p:sp>
+      <p:sp>
+        <p:nvSpPr>
+          <p:cNvPr id="26" name="Text 23"/>
+          <p:cNvSpPr/>
+          <p:nvPr/>
+        </p:nvSpPr>
+        <p:spPr>
+          <a:xfrm>
+            <a:off x="749808" y="5129784"/>
+            <a:ext cx="3520440" cy="256032"/>
+          </a:xfrm>
+          <a:prstGeom prst="rect">
+            <a:avLst/>
+          </a:prstGeom>
+          <a:noFill/>
+          <a:ln/>
+        </p:spPr>
+        <p:txBody>
+          <a:bodyPr wrap="square" lIns="0" tIns="0" rIns="0" bIns="0" rtlCol="0" anchor="ctr"/>
+          <a:lstStyle/>
+          <a:p>
+            <a:pPr indent="0" marL="0">
+              <a:buNone/>
+            </a:pPr>
+            <a:r>
+              <a:rPr lang="en-US" sz="1150" b="1" dirty="0">
+                <a:solidFill>
+                  <a:srgbClr val="0A2F40"/>
+                </a:solidFill>
+                <a:latin typeface="Calibri" pitchFamily="34" charset="0"/>
+                <a:ea typeface="Calibri" pitchFamily="34" charset="-122"/>
+                <a:cs typeface="Calibri" pitchFamily="34" charset="-120"/>
+              </a:rPr>
+              <a:t>System-1 steering integration</a:t>
+            </a:r>
+            <a:endParaRPr lang="en-US" sz="1150" dirty="0"/>
+          </a:p>
+        </p:txBody>
+      </p:sp>
+      <p:sp>
+        <p:nvSpPr>
+          <p:cNvPr id="27" name="Text 24"/>
+          <p:cNvSpPr/>
+          <p:nvPr/>
+        </p:nvSpPr>
+        <p:spPr>
+          <a:xfrm>
+            <a:off x="749808" y="5394960"/>
+            <a:ext cx="3520440" cy="566928"/>
+          </a:xfrm>
+          <a:prstGeom prst="rect">
+            <a:avLst/>
+          </a:prstGeom>
+          <a:noFill/>
+          <a:ln/>
+        </p:spPr>
+        <p:txBody>
+          <a:bodyPr wrap="square" lIns="0" tIns="0" rIns="0" bIns="0" rtlCol="0" anchor="t"/>
+          <a:lstStyle/>
+          <a:p>
+            <a:pPr indent="0" marL="0">
+              <a:buNone/>
+            </a:pPr>
+            <a:r>
+              <a:rPr lang="en-US" sz="950" dirty="0">
+                <a:solidFill>
+                  <a:srgbClr val="24343C"/>
+                </a:solidFill>
+                <a:latin typeface="Calibri" pitchFamily="34" charset="0"/>
+                <a:ea typeface="Calibri" pitchFamily="34" charset="-122"/>
+                <a:cs typeface="Calibri" pitchFamily="34" charset="-120"/>
+              </a:rPr>
+              <a:t>pick a pulsar in the app and the dish knows where to point — awaiting the steering team’s API</a:t>
+            </a:r>
+            <a:endParaRPr lang="en-US" sz="950" dirty="0"/>
+          </a:p>
+        </p:txBody>
+      </p:sp>
+      <p:sp>
+        <p:nvSpPr>
+          <p:cNvPr id="28" name="Shape 25"/>
+          <p:cNvSpPr/>
+          <p:nvPr/>
+        </p:nvSpPr>
+        <p:spPr>
+          <a:xfrm>
+            <a:off x="4654296" y="5047488"/>
+            <a:ext cx="3886200" cy="960120"/>
+          </a:xfrm>
+          <a:prstGeom prst="roundRect">
+            <a:avLst>
+              <a:gd name="adj" fmla="val 7619"/>
+            </a:avLst>
+          </a:prstGeom>
+          <a:solidFill>
+            <a:srgbClr val="EFF4F7"/>
+          </a:solidFill>
+          <a:ln w="9525">
+            <a:solidFill>
+              <a:srgbClr val="D7E3EA"/>
+            </a:solidFill>
+            <a:prstDash val="solid"/>
+          </a:ln>
+        </p:spPr>
+      </p:sp>
+      <p:sp>
+        <p:nvSpPr>
+          <p:cNvPr id="29" name="Text 26"/>
+          <p:cNvSpPr/>
+          <p:nvPr/>
+        </p:nvSpPr>
+        <p:spPr>
+          <a:xfrm>
+            <a:off x="4837176" y="5129784"/>
+            <a:ext cx="3520440" cy="256032"/>
+          </a:xfrm>
+          <a:prstGeom prst="rect">
+            <a:avLst/>
+          </a:prstGeom>
+          <a:noFill/>
+          <a:ln/>
+        </p:spPr>
+        <p:txBody>
+          <a:bodyPr wrap="square" lIns="0" tIns="0" rIns="0" bIns="0" rtlCol="0" anchor="ctr"/>
+          <a:lstStyle/>
+          <a:p>
+            <a:pPr indent="0" marL="0">
+              <a:buNone/>
+            </a:pPr>
+            <a:r>
+              <a:rPr lang="en-US" sz="1150" b="1" dirty="0">
+                <a:solidFill>
+                  <a:srgbClr val="0A2F40"/>
+                </a:solidFill>
+                <a:latin typeface="Calibri" pitchFamily="34" charset="0"/>
+                <a:ea typeface="Calibri" pitchFamily="34" charset="-122"/>
+                <a:cs typeface="Calibri" pitchFamily="34" charset="-120"/>
+              </a:rPr>
+              <a:t>ezRA drift-scan format</a:t>
+            </a:r>
+            <a:endParaRPr lang="en-US" sz="1150" dirty="0"/>
+          </a:p>
+        </p:txBody>
+      </p:sp>
+      <p:sp>
+        <p:nvSpPr>
+          <p:cNvPr id="30" name="Text 27"/>
+          <p:cNvSpPr/>
+          <p:nvPr/>
+        </p:nvSpPr>
+        <p:spPr>
+          <a:xfrm>
+            <a:off x="4837176" y="5394960"/>
+            <a:ext cx="3520440" cy="566928"/>
+          </a:xfrm>
+          <a:prstGeom prst="rect">
+            <a:avLst/>
+          </a:prstGeom>
+          <a:noFill/>
+          <a:ln/>
+        </p:spPr>
+        <p:txBody>
+          <a:bodyPr wrap="square" lIns="0" tIns="0" rIns="0" bIns="0" rtlCol="0" anchor="t"/>
+          <a:lstStyle/>
+          <a:p>
+            <a:pPr indent="0" marL="0">
+              <a:buNone/>
+            </a:pPr>
+            <a:r>
+              <a:rPr lang="en-US" sz="950" dirty="0">
+                <a:solidFill>
+                  <a:srgbClr val="24343C"/>
+                </a:solidFill>
+                <a:latin typeface="Calibri" pitchFamily="34" charset="0"/>
+                <a:ea typeface="Calibri" pitchFamily="34" charset="-122"/>
+                <a:cs typeface="Calibri" pitchFamily="34" charset="-120"/>
+              </a:rPr>
+              <a:t>record ezCol-compatible files for the open-source hydrogen-line drift-scan suite</a:t>
+            </a:r>
+            <a:endParaRPr lang="en-US" sz="950" dirty="0"/>
+          </a:p>
+        </p:txBody>
+      </p:sp>
+      <p:sp>
+        <p:nvSpPr>
+          <p:cNvPr id="31" name="Shape 28"/>
+          <p:cNvSpPr/>
+          <p:nvPr/>
+        </p:nvSpPr>
+        <p:spPr>
+          <a:xfrm>
+            <a:off x="8778240" y="1783080"/>
+            <a:ext cx="2834640" cy="1481328"/>
+          </a:xfrm>
+          <a:prstGeom prst="roundRect">
+            <a:avLst>
+              <a:gd name="adj" fmla="val 4938"/>
+            </a:avLst>
+          </a:prstGeom>
+          <a:solidFill>
+            <a:srgbClr val="EFF4F7"/>
+          </a:solidFill>
+          <a:ln w="9525">
+            <a:solidFill>
+              <a:srgbClr val="D7E3EA"/>
+            </a:solidFill>
+            <a:prstDash val="solid"/>
+          </a:ln>
+        </p:spPr>
+      </p:sp>
+      <p:sp>
+        <p:nvSpPr>
+          <p:cNvPr id="32" name="Text 29"/>
+          <p:cNvSpPr/>
+          <p:nvPr/>
+        </p:nvSpPr>
+        <p:spPr>
+          <a:xfrm>
+            <a:off x="8915400" y="1892808"/>
+            <a:ext cx="2560320" cy="777240"/>
+          </a:xfrm>
+          <a:prstGeom prst="rect">
+            <a:avLst/>
+          </a:prstGeom>
+          <a:noFill/>
+          <a:ln/>
+        </p:spPr>
+        <p:txBody>
+          <a:bodyPr wrap="square" lIns="0" tIns="0" rIns="0" bIns="0" rtlCol="0" anchor="ctr"/>
+          <a:lstStyle/>
+          <a:p>
+            <a:pPr algn="ctr" indent="0" marL="0">
+              <a:buNone/>
+            </a:pPr>
+            <a:r>
+              <a:rPr lang="en-US" sz="3400" b="1" dirty="0">
+                <a:solidFill>
+                  <a:srgbClr val="156082"/>
+                </a:solidFill>
+                <a:latin typeface="Cambria" pitchFamily="34" charset="0"/>
+                <a:ea typeface="Cambria" pitchFamily="34" charset="-122"/>
+                <a:cs typeface="Cambria" pitchFamily="34" charset="-120"/>
+              </a:rPr>
+              <a:t>8</a:t>
+            </a:r>
+            <a:endParaRPr lang="en-US" sz="3400" dirty="0"/>
+          </a:p>
+        </p:txBody>
+      </p:sp>
+      <p:sp>
+        <p:nvSpPr>
+          <p:cNvPr id="33" name="Text 30"/>
+          <p:cNvSpPr/>
+          <p:nvPr/>
+        </p:nvSpPr>
+        <p:spPr>
+          <a:xfrm>
+            <a:off x="8915400" y="2651760"/>
+            <a:ext cx="2560320" cy="530352"/>
+          </a:xfrm>
+          <a:prstGeom prst="rect">
+            <a:avLst/>
+          </a:prstGeom>
+          <a:noFill/>
+          <a:ln/>
+        </p:spPr>
+        <p:txBody>
+          <a:bodyPr wrap="square" lIns="0" tIns="0" rIns="0" bIns="0" rtlCol="0" anchor="t"/>
+          <a:lstStyle/>
+          <a:p>
+            <a:pPr algn="ctr" indent="0" marL="0">
+              <a:buNone/>
+            </a:pPr>
+            <a:r>
+              <a:rPr lang="en-US" sz="1150" dirty="0">
+                <a:solidFill>
+                  <a:srgbClr val="24343C"/>
+                </a:solidFill>
+                <a:latin typeface="Calibri" pitchFamily="34" charset="0"/>
+                <a:ea typeface="Calibri" pitchFamily="34" charset="-122"/>
+                <a:cs typeface="Calibri" pitchFamily="34" charset="-120"/>
+              </a:rPr>
+              <a:t>features specified and committed to the Society’s shared roadmap</a:t>
+            </a:r>
+            <a:endParaRPr lang="en-US" sz="1150" dirty="0"/>
+          </a:p>
+        </p:txBody>
+      </p:sp>
+      <p:sp>
+        <p:nvSpPr>
+          <p:cNvPr id="34" name="Shape 31"/>
+          <p:cNvSpPr/>
+          <p:nvPr/>
+        </p:nvSpPr>
+        <p:spPr>
+          <a:xfrm>
+            <a:off x="8778240" y="3520440"/>
+            <a:ext cx="2834640" cy="1481328"/>
+          </a:xfrm>
+          <a:prstGeom prst="roundRect">
+            <a:avLst>
+              <a:gd name="adj" fmla="val 4938"/>
+            </a:avLst>
+          </a:prstGeom>
+          <a:solidFill>
+            <a:srgbClr val="EFF4F7"/>
+          </a:solidFill>
+          <a:ln w="9525">
+            <a:solidFill>
+              <a:srgbClr val="D7E3EA"/>
+            </a:solidFill>
+            <a:prstDash val="solid"/>
+          </a:ln>
+        </p:spPr>
+      </p:sp>
+      <p:sp>
+        <p:nvSpPr>
+          <p:cNvPr id="35" name="Text 32"/>
+          <p:cNvSpPr/>
+          <p:nvPr/>
+        </p:nvSpPr>
+        <p:spPr>
+          <a:xfrm>
+            <a:off x="8915400" y="3630168"/>
+            <a:ext cx="2560320" cy="777240"/>
+          </a:xfrm>
+          <a:prstGeom prst="rect">
+            <a:avLst/>
+          </a:prstGeom>
+          <a:noFill/>
+          <a:ln/>
+        </p:spPr>
+        <p:txBody>
+          <a:bodyPr wrap="square" lIns="0" tIns="0" rIns="0" bIns="0" rtlCol="0" anchor="ctr"/>
+          <a:lstStyle/>
+          <a:p>
+            <a:pPr algn="ctr" indent="0" marL="0">
+              <a:buNone/>
+            </a:pPr>
+            <a:r>
+              <a:rPr lang="en-US" sz="3400" b="1" dirty="0">
+                <a:solidFill>
+                  <a:srgbClr val="B86A18"/>
+                </a:solidFill>
+                <a:latin typeface="Cambria" pitchFamily="34" charset="0"/>
+                <a:ea typeface="Cambria" pitchFamily="34" charset="-122"/>
+                <a:cs typeface="Cambria" pitchFamily="34" charset="-120"/>
+              </a:rPr>
+              <a:t>≈20 σ</a:t>
+            </a:r>
+            <a:endParaRPr lang="en-US" sz="3400" dirty="0"/>
+          </a:p>
+        </p:txBody>
+      </p:sp>
+      <p:sp>
+        <p:nvSpPr>
+          <p:cNvPr id="36" name="Text 33"/>
+          <p:cNvSpPr/>
+          <p:nvPr/>
+        </p:nvSpPr>
+        <p:spPr>
+          <a:xfrm>
+            <a:off x="8915400" y="4389120"/>
+            <a:ext cx="2560320" cy="530352"/>
+          </a:xfrm>
+          <a:prstGeom prst="rect">
+            <a:avLst/>
+          </a:prstGeom>
+          <a:noFill/>
+          <a:ln/>
+        </p:spPr>
+        <p:txBody>
+          <a:bodyPr wrap="square" lIns="0" tIns="0" rIns="0" bIns="0" rtlCol="0" anchor="t"/>
+          <a:lstStyle/>
+          <a:p>
+            <a:pPr algn="ctr" indent="0" marL="0">
+              <a:buNone/>
+            </a:pPr>
+            <a:r>
+              <a:rPr lang="en-US" sz="1150" dirty="0">
+                <a:solidFill>
+                  <a:srgbClr val="24343C"/>
+                </a:solidFill>
+                <a:latin typeface="Calibri" pitchFamily="34" charset="0"/>
+                <a:ea typeface="Calibri" pitchFamily="34" charset="-122"/>
+                <a:cs typeface="Calibri" pitchFamily="34" charset="-120"/>
+              </a:rPr>
+              <a:t>expected from a 90-minute B0950+08 re-observation once the timebase fix ships</a:t>
+            </a:r>
+            <a:endParaRPr lang="en-US" sz="1150" dirty="0"/>
+          </a:p>
+        </p:txBody>
+      </p:sp>
+      <p:sp>
+        <p:nvSpPr>
+          <p:cNvPr id="37" name="Text 34"/>
+          <p:cNvSpPr/>
+          <p:nvPr/>
+        </p:nvSpPr>
+        <p:spPr>
+          <a:xfrm>
+            <a:off x="8778240" y="5166360"/>
+            <a:ext cx="2834640" cy="1005840"/>
+          </a:xfrm>
+          <a:prstGeom prst="rect">
+            <a:avLst/>
+          </a:prstGeom>
+          <a:noFill/>
+          <a:ln/>
+        </p:spPr>
+        <p:txBody>
+          <a:bodyPr wrap="square" lIns="0" tIns="0" rIns="0" bIns="0" rtlCol="0" anchor="t"/>
+          <a:lstStyle/>
+          <a:p>
+            <a:pPr indent="0" marL="0">
+              <a:buNone/>
+            </a:pPr>
+            <a:r>
+              <a:rPr lang="en-US" sz="1150" i="1" dirty="0">
+                <a:solidFill>
+                  <a:srgbClr val="6B7A82"/>
+                </a:solidFill>
+                <a:latin typeface="Calibri" pitchFamily="34" charset="0"/>
+                <a:ea typeface="Calibri" pitchFamily="34" charset="-122"/>
+                <a:cs typeface="Calibri" pitchFamily="34" charset="-120"/>
+              </a:rPr>
+              <a:t>Plus a site-computer upgrade to multi-core x86-64 — enabling PRESTO post-processing right at the dish.</a:t>
+            </a:r>
+            <a:endParaRPr lang="en-US" sz="1150" dirty="0"/>
+          </a:p>
+        </p:txBody>
+      </p:sp>
+      <p:sp>
+        <p:nvSpPr>
+          <p:cNvPr id="38" name="Text 35"/>
+          <p:cNvSpPr/>
+          <p:nvPr/>
+        </p:nvSpPr>
+        <p:spPr>
+          <a:xfrm>
+            <a:off x="566928" y="6263640"/>
+            <a:ext cx="7973568" cy="320040"/>
+          </a:xfrm>
+          <a:prstGeom prst="rect">
+            <a:avLst/>
+          </a:prstGeom>
+          <a:noFill/>
+          <a:ln/>
+        </p:spPr>
+        <p:txBody>
+          <a:bodyPr wrap="square" lIns="0" tIns="0" rIns="0" bIns="0" rtlCol="0" anchor="t"/>
+          <a:lstStyle/>
+          <a:p>
+            <a:pPr indent="0" marL="0">
+              <a:buNone/>
+            </a:pPr>
+            <a:r>
+              <a:rPr lang="en-US" sz="1150" i="1" dirty="0">
+                <a:solidFill>
+                  <a:srgbClr val="6B7A82"/>
+                </a:solidFill>
+                <a:latin typeface="Calibri" pitchFamily="34" charset="0"/>
+                <a:ea typeface="Calibri" pitchFamily="34" charset="-122"/>
+                <a:cs typeface="Calibri" pitchFamily="34" charset="-120"/>
+              </a:rPr>
+              <a:t>Training the radio-astronomy interest group starts on this baseline — a roster of members is signed up.</a:t>
+            </a:r>
+            <a:endParaRPr lang="en-US" sz="1150" dirty="0"/>
+          </a:p>
+        </p:txBody>
+      </p:sp>
+    </p:spTree>
+  </p:cSld>
+  <p:clrMapOvr>
+    <a:masterClrMapping/>
+  </p:clrMapOvr>
+</p:sld>
+</file>
+
+<file path=ppt/slides/slide16.xml><?xml version="1.0" encoding="utf-8"?>
+<p:sld xmlns:a="http://schemas.openxmlformats.org/drawingml/2006/main" xmlns:r="http://schemas.openxmlformats.org/officeDocument/2006/relationships" xmlns:p="http://schemas.openxmlformats.org/presentationml/2006/main">
+  <p:cSld name="Slide 16">
     <p:bg>
       <p:bgPr>
         <a:solidFill>
@@ -5623,7 +7819,7 @@
                 <a:ea typeface="Cambria" pitchFamily="34" charset="-122"/>
                 <a:cs typeface="Cambria" pitchFamily="34" charset="-120"/>
               </a:rPr>
-              <a:t>Non-experts detected two pulsars — with software the Society wrote, controls, and can teach.</a:t>
+              <a:t>Non-experts detected B0329+54 at 28 σ — plus a strong second candidate — with software the Society wrote, controls, and can teach.</a:t>
             </a:r>
             <a:endParaRPr lang="en-US" sz="1900" dirty="0"/>
           </a:p>
@@ -5707,7 +7903,7 @@
                 <a:ea typeface="Cambria" pitchFamily="34" charset="-122"/>
                 <a:cs typeface="Cambria" pitchFamily="34" charset="-120"/>
               </a:rPr>
-              <a:t>The whole data path — antenna → SDR → filterbank → PRESTO — is validated end to end and reproduced across platforms.</a:t>
+              <a:t>The whole data path — antenna → SDR → filterbank → PRESTO — is validated end to end, reproduced across platforms, and hardened by peer review.</a:t>
             </a:r>
             <a:endParaRPr lang="en-US" sz="1900" dirty="0"/>
           </a:p>
@@ -5791,7 +7987,7 @@
                 <a:ea typeface="Cambria" pitchFamily="34" charset="-122"/>
                 <a:cs typeface="Cambria" pitchFamily="34" charset="-120"/>
               </a:rPr>
-              <a:t>The barrier is now a slope: training the next generation of DSES observers starts immediately.</a:t>
+              <a:t>The barrier is now a slope: two releases shipped from field feedback in a week, and the upgrade queue is written down.</a:t>
             </a:r>
             <a:endParaRPr lang="en-US" sz="1900" dirty="0"/>
           </a:p>
@@ -5856,7 +8052,7 @@
                 <a:ea typeface="Calibri" pitchFamily="34" charset="-122"/>
                 <a:cs typeface="Calibri" pitchFamily="34" charset="-120"/>
               </a:rPr>
-              <a:t>Standing on the work of Dr. Richard Russel (AC0UB) and Dan Layne (AD0CY).
+              <a:t>Standing on the work of Dr. Richard Russel (AC0UB) and Dan Layne (AD0CY) — whose review of the report made the headline number stronger.
 </a:t>
             </a:r>
             <a:pPr indent="0" marL="0">
@@ -6250,7 +8446,7 @@
                 <a:ea typeface="Calibri" pitchFamily="34" charset="-122"/>
                 <a:cs typeface="Calibri" pitchFamily="34" charset="-120"/>
               </a:rPr>
-              <a:t>For years, pulsar observing at the Deep Space Exploration Society has rested on a professional toolchain — PRESTO and TEMPO built from source, custom GNU Radio flowgraphs, SIGPROC utilities, and companion analysis tools — with a learning curve steep enough that only two members could take an observation from dish to detection. This talk describes a deliberate experiment in lowering that barrier. DSES developed the Spectrum Analyzer, a cross-platform application that consolidates the on-site workflow — planning the observation, choosing clean frequencies, verifying the RF path, and recording analysis-ready SIGPROC filterbank data — into a single, easy-to-use package driving an Ettus USRP B210 software-defined radio. On July 11, 2026, a three-member team, none of them pulsar-processing experts, put the premise to the test at the Society’s 60-foot dish in Haswell, Colorado. Both target pulsars were detected with high confidence — B0329+54 at ~20 sigma and B0950+08 at ~10 sigma — and the detections were reproduced independently on two operating systems, agreeing to three significant figures. The talk walks through the software, the observing session, the PRESTO analysis (including how dispersion separates a real pulsar from interference), some instructive field-engineering surprises, and the road ahead: training a new generation of DSES observers on a far gentler learning curve.</a:t>
+              <a:t>For years, pulsar observing at the Deep Space Exploration Society has rested on a professional toolchain — PRESTO and TEMPO built from source, custom GNU Radio flowgraphs, SIGPROC utilities, and companion analysis tools — with a learning curve steep enough that only two members could take an observation from dish to detection. This talk describes a deliberate experiment in lowering that barrier. DSES developed the Spectrum Analyzer, a cross-platform application that consolidates the on-site workflow — planning the observation, choosing clean frequencies, verifying the RF path, and recording analysis-ready SIGPROC filterbank data — into a single, easy-to-use package driving an Ettus USRP B210 software-defined radio. On July 11, 2026, a three-member team, none of them pulsar-processing experts, put the premise to the test at the Society’s 60-foot dish in Haswell, Colorado. B0329+54 was ultimately detected at 28 sigma — a figure that grew from 20 when peer review of the trip report exposed, and repaired, a subtle recording-timebase defect — and B0950+08 produced a strong ~9-sigma candidate whose best-fit period and dispersion land on the catalog values. Field feedback drove two software releases within a week, and a documented upgrade queue — from a built-in pulsar visibility planner to one-click post-recording analysis — now charts the path to training a new generation of DSES observers on a far gentler learning curve.</a:t>
             </a:r>
             <a:endParaRPr lang="en-US" sz="1350" dirty="0"/>
           </a:p>
@@ -10080,7 +12276,7 @@
                 <a:ea typeface="Calibri" pitchFamily="34" charset="-122"/>
                 <a:cs typeface="Calibri" pitchFamily="34" charset="-120"/>
               </a:rPr>
-              <a:t>v1.1.6 — released July 12, 2026</a:t>
+              <a:t>v1.1.7 — released July 18, 2026</a:t>
             </a:r>
             <a:endParaRPr lang="en-US" sz="1050" dirty="0"/>
           </a:p>
@@ -13133,7 +15329,7 @@
         <p:spPr>
           <a:xfrm>
             <a:off x="5568696" y="1572768"/>
-            <a:ext cx="6163056" cy="4389772"/>
+            <a:ext cx="6163056" cy="4376892"/>
           </a:xfrm>
           <a:prstGeom prst="rect">
             <a:avLst/>
@@ -13158,7 +15354,7 @@
       </p:sp>
       <p:pic>
         <p:nvPicPr>
-          <p:cNvPr id="8" name="Image 1" descr="C:\Users\rick\Documents\DSES\Science\Spectrum_Analyzer_PY\reports\haswell-2026-07\figures\B0329+54_prepfold.png">    </p:cNvPr>
+          <p:cNvPr id="8" name="Image 1" descr="C:\Users\rick\Documents\DSES\Science\Spectrum_Analyzer_PY\reports\sara-2026\figures\B0329+54_prepfold_gapbridged.png">    </p:cNvPr>
           <p:cNvPicPr>
             <a:picLocks noChangeAspect="1"/>
           </p:cNvPicPr>
@@ -13173,7 +15369,7 @@
         <p:spPr>
           <a:xfrm>
             <a:off x="5623560" y="1627632"/>
-            <a:ext cx="6053328" cy="4280044"/>
+            <a:ext cx="6053328" cy="4267164"/>
           </a:xfrm>
           <a:prstGeom prst="rect">
             <a:avLst/>
@@ -13213,7 +15409,7 @@
                 <a:ea typeface="Calibri" pitchFamily="34" charset="-122"/>
                 <a:cs typeface="Calibri" pitchFamily="34" charset="-120"/>
               </a:rPr>
-              <a:t>PRESTO prepfold diagnostic — 36.6-minute observation</a:t>
+              <a:t>Gap-bridged, RFI-cleaned ephemeris fold — the full 36.6-minute integration (2026-07-17 re-analysis)</a:t>
             </a:r>
             <a:endParaRPr lang="en-US" sz="1050" dirty="0"/>
           </a:p>
@@ -13252,7 +15448,7 @@
                 <a:ea typeface="Cambria" pitchFamily="34" charset="-122"/>
                 <a:cs typeface="Cambria" pitchFamily="34" charset="-120"/>
               </a:rPr>
-              <a:t>20.6 σ</a:t>
+              <a:t>28.0 σ</a:t>
             </a:r>
             <a:endParaRPr lang="en-US" sz="6000" dirty="0"/>
           </a:p>
@@ -13291,7 +15487,7 @@
                 <a:ea typeface="Calibri" pitchFamily="34" charset="-122"/>
                 <a:cs typeface="Calibri" pitchFamily="34" charset="-120"/>
               </a:rPr>
-              <a:t>probability the signal is noise: &lt; 5×10⁻⁹⁰</a:t>
+              <a:t>probability the signal is noise: &lt; 8×10⁻¹⁷³</a:t>
             </a:r>
             <a:endParaRPr lang="en-US" sz="1300" dirty="0"/>
           </a:p>
@@ -13334,7 +15530,7 @@
                 <a:ea typeface="Calibri" pitchFamily="34" charset="-122"/>
                 <a:cs typeface="Calibri" pitchFamily="34" charset="-120"/>
               </a:rPr>
-              <a:t>The characteristic double-peaked pulse profile, at the catalog period of 714.5 ms</a:t>
+              <a:t>Textbook single-peaked profile at the catalog period of 714.5 ms, coherent across the full 36.6 minutes</a:t>
             </a:r>
             <a:endParaRPr lang="en-US" sz="1350" dirty="0"/>
           </a:p>
@@ -13355,27 +15551,6 @@
                 <a:ea typeface="Calibri" pitchFamily="34" charset="-122"/>
                 <a:cs typeface="Calibri" pitchFamily="34" charset="-120"/>
               </a:rPr>
-              <a:t>Signal persists across the entire 36-minute observation</a:t>
-            </a:r>
-            <a:endParaRPr lang="en-US" sz="1350" dirty="0"/>
-          </a:p>
-          <a:p>
-            <a:pPr marL="342900" indent="-342900">
-              <a:spcAft>
-                <a:spcPts val="1000"/>
-              </a:spcAft>
-              <a:buSzPct val="100000"/>
-              <a:buChar char="•"/>
-            </a:pPr>
-            <a:r>
-              <a:rPr lang="en-US" sz="1350" dirty="0">
-                <a:solidFill>
-                  <a:srgbClr val="24343C"/>
-                </a:solidFill>
-                <a:latin typeface="Calibri" pitchFamily="34" charset="0"/>
-                <a:ea typeface="Calibri" pitchFamily="34" charset="-122"/>
-                <a:cs typeface="Calibri" pitchFamily="34" charset="-120"/>
-              </a:rPr>
               <a:t>Detection peaks at dispersion measure ≈ 25 — catalog value 26.8 — and falls off toward zero</a:t>
             </a:r>
             <a:endParaRPr lang="en-US" sz="1350" dirty="0"/>
@@ -13394,7 +15569,7 @@
                 <a:ea typeface="Calibri" pitchFamily="34" charset="-122"/>
                 <a:cs typeface="Calibri" pitchFamily="34" charset="-120"/>
               </a:rPr>
-              <a:t>Blind search (period, period-derivative, and DM all searched) converges on the same answer</a:t>
+              <a:t>In the field it stood at ~20 σ; RFI cleanup and one timebase repair recovered the rest — that story is the next slide</a:t>
             </a:r>
             <a:endParaRPr lang="en-US" sz="1350" dirty="0"/>
           </a:p>
@@ -13465,7 +15640,7 @@
                 <a:ea typeface="Calibri" pitchFamily="34" charset="-122"/>
                 <a:cs typeface="Calibri" pitchFamily="34" charset="-120"/>
               </a:rPr>
-              <a:t>RESULTS</a:t>
+              <a:t>PEER REVIEW</a:t>
             </a:r>
             <a:endParaRPr lang="en-US" sz="1100" dirty="0"/>
           </a:p>
@@ -13504,7 +15679,7 @@
                 <a:ea typeface="Cambria" pitchFamily="34" charset="-122"/>
                 <a:cs typeface="Cambria" pitchFamily="34" charset="-120"/>
               </a:rPr>
-              <a:t>B0950+08 — detected, with a lesson inside</a:t>
+              <a:t>One review comment was worth 5.6 σ</a:t>
             </a:r>
             <a:endParaRPr lang="en-US" sz="2900" dirty="0"/>
           </a:p>
@@ -13620,70 +15795,47 @@
         </p:nvSpPr>
         <p:spPr>
           <a:xfrm>
-            <a:off x="5568696" y="1572768"/>
-            <a:ext cx="6163056" cy="4388103"/>
-          </a:xfrm>
-          <a:prstGeom prst="rect">
-            <a:avLst/>
+            <a:off x="566928" y="1828800"/>
+            <a:ext cx="2670048" cy="3017520"/>
+          </a:xfrm>
+          <a:prstGeom prst="roundRect">
+            <a:avLst>
+              <a:gd name="adj" fmla="val 2740"/>
+            </a:avLst>
           </a:prstGeom>
           <a:solidFill>
-            <a:srgbClr val="FFFFFF"/>
+            <a:srgbClr val="EFF4F7"/>
           </a:solidFill>
-          <a:ln w="12700">
+          <a:ln w="9525">
             <a:solidFill>
               <a:srgbClr val="D7E3EA"/>
             </a:solidFill>
             <a:prstDash val="solid"/>
           </a:ln>
-          <a:effectLst>
-            <a:outerShdw sx="100000" sy="100000" kx="0" ky="0" algn="bl" rotWithShape="0" blurRad="76200" dist="25400" dir="5400000">
-              <a:srgbClr val="9AACB5">
-                <a:alpha val="35000"/>
-              </a:srgbClr>
-            </a:outerShdw>
-          </a:effectLst>
-        </p:spPr>
-      </p:sp>
-      <p:pic>
-        <p:nvPicPr>
-          <p:cNvPr id="8" name="Image 1" descr="C:\Users\rick\Documents\DSES\Science\Spectrum_Analyzer_PY\reports\haswell-2026-07\figures\B0950+08_prepfold.png">    </p:cNvPr>
-          <p:cNvPicPr>
-            <a:picLocks noChangeAspect="1"/>
-          </p:cNvPicPr>
-          <p:nvPr/>
-        </p:nvPicPr>
-        <p:blipFill>
-          <a:blip r:embed="rId2"/>
-          <a:stretch>
-            <a:fillRect/>
-          </a:stretch>
-        </p:blipFill>
-        <p:spPr>
-          <a:xfrm>
-            <a:off x="5623560" y="1627632"/>
-            <a:ext cx="6053328" cy="4278375"/>
-          </a:xfrm>
-          <a:prstGeom prst="rect">
-            <a:avLst/>
-          </a:prstGeom>
-        </p:spPr>
-      </p:pic>
-      <p:sp>
-        <p:nvSpPr>
-          <p:cNvPr id="9" name="Text 5"/>
-          <p:cNvSpPr/>
-          <p:nvPr/>
-        </p:nvSpPr>
-        <p:spPr>
-          <a:xfrm>
-            <a:off x="5623560" y="5989320"/>
-            <a:ext cx="6053328" cy="274320"/>
-          </a:xfrm>
-          <a:prstGeom prst="rect">
-            <a:avLst/>
-          </a:prstGeom>
-          <a:noFill/>
-          <a:ln/>
+        </p:spPr>
+      </p:sp>
+      <p:sp>
+        <p:nvSpPr>
+          <p:cNvPr id="8" name="Text 5"/>
+          <p:cNvSpPr/>
+          <p:nvPr/>
+        </p:nvSpPr>
+        <p:spPr>
+          <a:xfrm>
+            <a:off x="786384" y="2084832"/>
+            <a:ext cx="475488" cy="475488"/>
+          </a:xfrm>
+          <a:prstGeom prst="ellipse">
+            <a:avLst/>
+          </a:prstGeom>
+          <a:solidFill>
+            <a:srgbClr val="156082"/>
+          </a:solidFill>
+          <a:ln>
+            <a:solidFill>
+              <a:srgbClr val="156082"/>
+            </a:solidFill>
+          </a:ln>
         </p:spPr>
         <p:txBody>
           <a:bodyPr wrap="square" lIns="0" tIns="0" rIns="0" bIns="0" rtlCol="0" anchor="ctr"/>
@@ -13693,85 +15845,601 @@
               <a:buNone/>
             </a:pPr>
             <a:r>
-              <a:rPr lang="en-US" sz="1050" i="1" dirty="0">
-                <a:solidFill>
-                  <a:srgbClr val="6B7A82"/>
-                </a:solidFill>
-                <a:latin typeface="Calibri" pitchFamily="34" charset="0"/>
-                <a:ea typeface="Calibri" pitchFamily="34" charset="-122"/>
-                <a:cs typeface="Calibri" pitchFamily="34" charset="-120"/>
-              </a:rPr>
-              <a:t>Fold at the known 253 ms period — 22.2-minute observation</a:t>
-            </a:r>
-            <a:endParaRPr lang="en-US" sz="1050" dirty="0"/>
-          </a:p>
-        </p:txBody>
-      </p:sp>
-      <p:sp>
-        <p:nvSpPr>
-          <p:cNvPr id="10" name="Text 6"/>
-          <p:cNvSpPr/>
-          <p:nvPr/>
-        </p:nvSpPr>
-        <p:spPr>
-          <a:xfrm>
-            <a:off x="566928" y="1691640"/>
-            <a:ext cx="4480560" cy="914400"/>
-          </a:xfrm>
-          <a:prstGeom prst="rect">
-            <a:avLst/>
-          </a:prstGeom>
-          <a:noFill/>
-          <a:ln/>
-        </p:spPr>
-        <p:txBody>
-          <a:bodyPr wrap="square" lIns="0" tIns="0" rIns="0" bIns="0" rtlCol="0" anchor="ctr"/>
-          <a:lstStyle/>
-          <a:p>
-            <a:pPr indent="0" marL="0">
-              <a:buNone/>
-            </a:pPr>
-            <a:r>
-              <a:rPr lang="en-US" sz="6000" b="1" dirty="0">
-                <a:solidFill>
-                  <a:srgbClr val="156082"/>
+              <a:rPr lang="en-US" sz="1800" b="1" dirty="0">
+                <a:solidFill>
+                  <a:srgbClr val="FFFFFF"/>
+                </a:solidFill>
+                <a:latin typeface="Calibri" pitchFamily="34" charset="0"/>
+                <a:ea typeface="Calibri" pitchFamily="34" charset="-122"/>
+                <a:cs typeface="Calibri" pitchFamily="34" charset="-120"/>
+              </a:rPr>
+              <a:t>1</a:t>
+            </a:r>
+            <a:endParaRPr lang="en-US" sz="1800" dirty="0"/>
+          </a:p>
+        </p:txBody>
+      </p:sp>
+      <p:sp>
+        <p:nvSpPr>
+          <p:cNvPr id="9" name="Text 6"/>
+          <p:cNvSpPr/>
+          <p:nvPr/>
+        </p:nvSpPr>
+        <p:spPr>
+          <a:xfrm>
+            <a:off x="786384" y="2743200"/>
+            <a:ext cx="2231136" cy="365760"/>
+          </a:xfrm>
+          <a:prstGeom prst="rect">
+            <a:avLst/>
+          </a:prstGeom>
+          <a:noFill/>
+          <a:ln/>
+        </p:spPr>
+        <p:txBody>
+          <a:bodyPr wrap="square" lIns="0" tIns="0" rIns="0" bIns="0" rtlCol="0" anchor="ctr"/>
+          <a:lstStyle/>
+          <a:p>
+            <a:pPr indent="0" marL="0">
+              <a:buNone/>
+            </a:pPr>
+            <a:r>
+              <a:rPr lang="en-US" sz="1500" b="1" dirty="0">
+                <a:solidFill>
+                  <a:srgbClr val="0A2F40"/>
                 </a:solidFill>
                 <a:latin typeface="Cambria" pitchFamily="34" charset="0"/>
                 <a:ea typeface="Cambria" pitchFamily="34" charset="-122"/>
                 <a:cs typeface="Cambria" pitchFamily="34" charset="-120"/>
               </a:rPr>
-              <a:t>~9.7 σ</a:t>
-            </a:r>
-            <a:endParaRPr lang="en-US" sz="6000" dirty="0"/>
-          </a:p>
-        </p:txBody>
-      </p:sp>
-      <p:sp>
-        <p:nvSpPr>
-          <p:cNvPr id="11" name="Text 7"/>
-          <p:cNvSpPr/>
-          <p:nvPr/>
-        </p:nvSpPr>
-        <p:spPr>
-          <a:xfrm>
-            <a:off x="566928" y="2697480"/>
-            <a:ext cx="4480560" cy="320040"/>
-          </a:xfrm>
-          <a:prstGeom prst="rect">
-            <a:avLst/>
-          </a:prstGeom>
-          <a:noFill/>
-          <a:ln/>
-        </p:spPr>
-        <p:txBody>
-          <a:bodyPr wrap="square" lIns="0" tIns="0" rIns="0" bIns="0" rtlCol="0" anchor="ctr"/>
-          <a:lstStyle/>
-          <a:p>
-            <a:pPr indent="0" marL="0">
-              <a:buNone/>
-            </a:pPr>
-            <a:r>
-              <a:rPr lang="en-US" sz="1300" b="1" dirty="0">
+              <a:t>The comment</a:t>
+            </a:r>
+            <a:endParaRPr lang="en-US" sz="1500" dirty="0"/>
+          </a:p>
+        </p:txBody>
+      </p:sp>
+      <p:sp>
+        <p:nvSpPr>
+          <p:cNvPr id="10" name="Text 7"/>
+          <p:cNvSpPr/>
+          <p:nvPr/>
+        </p:nvSpPr>
+        <p:spPr>
+          <a:xfrm>
+            <a:off x="786384" y="3154680"/>
+            <a:ext cx="2231136" cy="1554480"/>
+          </a:xfrm>
+          <a:prstGeom prst="rect">
+            <a:avLst/>
+          </a:prstGeom>
+          <a:noFill/>
+          <a:ln/>
+        </p:spPr>
+        <p:txBody>
+          <a:bodyPr wrap="square" lIns="0" tIns="0" rIns="0" bIns="0" rtlCol="0" anchor="t"/>
+          <a:lstStyle/>
+          <a:p>
+            <a:pPr indent="0" marL="0">
+              <a:buNone/>
+            </a:pPr>
+            <a:r>
+              <a:rPr lang="en-US" sz="1150" dirty="0">
+                <a:solidFill>
+                  <a:srgbClr val="24343C"/>
+                </a:solidFill>
+                <a:latin typeface="Calibri" pitchFamily="34" charset="0"/>
+                <a:ea typeface="Calibri" pitchFamily="34" charset="-122"/>
+                <a:cs typeface="Calibri" pitchFamily="34" charset="-120"/>
+              </a:rPr>
+              <a:t>Dan Layne (AD0CY), reviewing the trip report: the fold shows a phase drift it shouldn’t have</a:t>
+            </a:r>
+            <a:endParaRPr lang="en-US" sz="1150" dirty="0"/>
+          </a:p>
+        </p:txBody>
+      </p:sp>
+      <p:sp>
+        <p:nvSpPr>
+          <p:cNvPr id="11" name="Shape 8"/>
+          <p:cNvSpPr/>
+          <p:nvPr/>
+        </p:nvSpPr>
+        <p:spPr>
+          <a:xfrm>
+            <a:off x="3364992" y="1828800"/>
+            <a:ext cx="2670048" cy="3017520"/>
+          </a:xfrm>
+          <a:prstGeom prst="roundRect">
+            <a:avLst>
+              <a:gd name="adj" fmla="val 2740"/>
+            </a:avLst>
+          </a:prstGeom>
+          <a:solidFill>
+            <a:srgbClr val="EFF4F7"/>
+          </a:solidFill>
+          <a:ln w="9525">
+            <a:solidFill>
+              <a:srgbClr val="D7E3EA"/>
+            </a:solidFill>
+            <a:prstDash val="solid"/>
+          </a:ln>
+        </p:spPr>
+      </p:sp>
+      <p:sp>
+        <p:nvSpPr>
+          <p:cNvPr id="12" name="Text 9"/>
+          <p:cNvSpPr/>
+          <p:nvPr/>
+        </p:nvSpPr>
+        <p:spPr>
+          <a:xfrm>
+            <a:off x="3584448" y="2084832"/>
+            <a:ext cx="475488" cy="475488"/>
+          </a:xfrm>
+          <a:prstGeom prst="ellipse">
+            <a:avLst/>
+          </a:prstGeom>
+          <a:solidFill>
+            <a:srgbClr val="156082"/>
+          </a:solidFill>
+          <a:ln>
+            <a:solidFill>
+              <a:srgbClr val="156082"/>
+            </a:solidFill>
+          </a:ln>
+        </p:spPr>
+        <p:txBody>
+          <a:bodyPr wrap="square" lIns="0" tIns="0" rIns="0" bIns="0" rtlCol="0" anchor="ctr"/>
+          <a:lstStyle/>
+          <a:p>
+            <a:pPr algn="ctr" indent="0" marL="0">
+              <a:buNone/>
+            </a:pPr>
+            <a:r>
+              <a:rPr lang="en-US" sz="1800" b="1" dirty="0">
+                <a:solidFill>
+                  <a:srgbClr val="FFFFFF"/>
+                </a:solidFill>
+                <a:latin typeface="Calibri" pitchFamily="34" charset="0"/>
+                <a:ea typeface="Calibri" pitchFamily="34" charset="-122"/>
+                <a:cs typeface="Calibri" pitchFamily="34" charset="-120"/>
+              </a:rPr>
+              <a:t>2</a:t>
+            </a:r>
+            <a:endParaRPr lang="en-US" sz="1800" dirty="0"/>
+          </a:p>
+        </p:txBody>
+      </p:sp>
+      <p:sp>
+        <p:nvSpPr>
+          <p:cNvPr id="13" name="Text 10"/>
+          <p:cNvSpPr/>
+          <p:nvPr/>
+        </p:nvSpPr>
+        <p:spPr>
+          <a:xfrm>
+            <a:off x="3584448" y="2743200"/>
+            <a:ext cx="2231136" cy="365760"/>
+          </a:xfrm>
+          <a:prstGeom prst="rect">
+            <a:avLst/>
+          </a:prstGeom>
+          <a:noFill/>
+          <a:ln/>
+        </p:spPr>
+        <p:txBody>
+          <a:bodyPr wrap="square" lIns="0" tIns="0" rIns="0" bIns="0" rtlCol="0" anchor="ctr"/>
+          <a:lstStyle/>
+          <a:p>
+            <a:pPr indent="0" marL="0">
+              <a:buNone/>
+            </a:pPr>
+            <a:r>
+              <a:rPr lang="en-US" sz="1500" b="1" dirty="0">
+                <a:solidFill>
+                  <a:srgbClr val="0A2F40"/>
+                </a:solidFill>
+                <a:latin typeface="Cambria" pitchFamily="34" charset="0"/>
+                <a:ea typeface="Cambria" pitchFamily="34" charset="-122"/>
+                <a:cs typeface="Cambria" pitchFamily="34" charset="-120"/>
+              </a:rPr>
+              <a:t>The forensics</a:t>
+            </a:r>
+            <a:endParaRPr lang="en-US" sz="1500" dirty="0"/>
+          </a:p>
+        </p:txBody>
+      </p:sp>
+      <p:sp>
+        <p:nvSpPr>
+          <p:cNvPr id="14" name="Text 11"/>
+          <p:cNvSpPr/>
+          <p:nvPr/>
+        </p:nvSpPr>
+        <p:spPr>
+          <a:xfrm>
+            <a:off x="3584448" y="3154680"/>
+            <a:ext cx="2231136" cy="1554480"/>
+          </a:xfrm>
+          <a:prstGeom prst="rect">
+            <a:avLst/>
+          </a:prstGeom>
+          <a:noFill/>
+          <a:ln/>
+        </p:spPr>
+        <p:txBody>
+          <a:bodyPr wrap="square" lIns="0" tIns="0" rIns="0" bIns="0" rtlCol="0" anchor="t"/>
+          <a:lstStyle/>
+          <a:p>
+            <a:pPr indent="0" marL="0">
+              <a:buNone/>
+            </a:pPr>
+            <a:r>
+              <a:rPr lang="en-US" sz="1150" dirty="0">
+                <a:solidFill>
+                  <a:srgbClr val="24343C"/>
+                </a:solidFill>
+                <a:latin typeface="Calibri" pitchFamily="34" charset="0"/>
+                <a:ea typeface="Calibri" pitchFamily="34" charset="-122"/>
+                <a:cs typeface="Calibri" pitchFamily="34" charset="-120"/>
+              </a:rPr>
+              <a:t>A rigid no-search ephemeris fold: smooth 1.2-rotation drift plus one +0.22-rotation step — parts in 10⁴, five orders beyond any physics. Our clock, not the sky</a:t>
+            </a:r>
+            <a:endParaRPr lang="en-US" sz="1150" dirty="0"/>
+          </a:p>
+        </p:txBody>
+      </p:sp>
+      <p:sp>
+        <p:nvSpPr>
+          <p:cNvPr id="15" name="Shape 12"/>
+          <p:cNvSpPr/>
+          <p:nvPr/>
+        </p:nvSpPr>
+        <p:spPr>
+          <a:xfrm>
+            <a:off x="6163056" y="1828800"/>
+            <a:ext cx="2670048" cy="3017520"/>
+          </a:xfrm>
+          <a:prstGeom prst="roundRect">
+            <a:avLst>
+              <a:gd name="adj" fmla="val 2740"/>
+            </a:avLst>
+          </a:prstGeom>
+          <a:solidFill>
+            <a:srgbClr val="EFF4F7"/>
+          </a:solidFill>
+          <a:ln w="9525">
+            <a:solidFill>
+              <a:srgbClr val="D7E3EA"/>
+            </a:solidFill>
+            <a:prstDash val="solid"/>
+          </a:ln>
+        </p:spPr>
+      </p:sp>
+      <p:sp>
+        <p:nvSpPr>
+          <p:cNvPr id="16" name="Text 13"/>
+          <p:cNvSpPr/>
+          <p:nvPr/>
+        </p:nvSpPr>
+        <p:spPr>
+          <a:xfrm>
+            <a:off x="6382512" y="2084832"/>
+            <a:ext cx="475488" cy="475488"/>
+          </a:xfrm>
+          <a:prstGeom prst="ellipse">
+            <a:avLst/>
+          </a:prstGeom>
+          <a:solidFill>
+            <a:srgbClr val="156082"/>
+          </a:solidFill>
+          <a:ln>
+            <a:solidFill>
+              <a:srgbClr val="156082"/>
+            </a:solidFill>
+          </a:ln>
+        </p:spPr>
+        <p:txBody>
+          <a:bodyPr wrap="square" lIns="0" tIns="0" rIns="0" bIns="0" rtlCol="0" anchor="ctr"/>
+          <a:lstStyle/>
+          <a:p>
+            <a:pPr algn="ctr" indent="0" marL="0">
+              <a:buNone/>
+            </a:pPr>
+            <a:r>
+              <a:rPr lang="en-US" sz="1800" b="1" dirty="0">
+                <a:solidFill>
+                  <a:srgbClr val="FFFFFF"/>
+                </a:solidFill>
+                <a:latin typeface="Calibri" pitchFamily="34" charset="0"/>
+                <a:ea typeface="Calibri" pitchFamily="34" charset="-122"/>
+                <a:cs typeface="Calibri" pitchFamily="34" charset="-120"/>
+              </a:rPr>
+              <a:t>3</a:t>
+            </a:r>
+            <a:endParaRPr lang="en-US" sz="1800" dirty="0"/>
+          </a:p>
+        </p:txBody>
+      </p:sp>
+      <p:sp>
+        <p:nvSpPr>
+          <p:cNvPr id="17" name="Text 14"/>
+          <p:cNvSpPr/>
+          <p:nvPr/>
+        </p:nvSpPr>
+        <p:spPr>
+          <a:xfrm>
+            <a:off x="6382512" y="2743200"/>
+            <a:ext cx="2231136" cy="365760"/>
+          </a:xfrm>
+          <a:prstGeom prst="rect">
+            <a:avLst/>
+          </a:prstGeom>
+          <a:noFill/>
+          <a:ln/>
+        </p:spPr>
+        <p:txBody>
+          <a:bodyPr wrap="square" lIns="0" tIns="0" rIns="0" bIns="0" rtlCol="0" anchor="ctr"/>
+          <a:lstStyle/>
+          <a:p>
+            <a:pPr indent="0" marL="0">
+              <a:buNone/>
+            </a:pPr>
+            <a:r>
+              <a:rPr lang="en-US" sz="1500" b="1" dirty="0">
+                <a:solidFill>
+                  <a:srgbClr val="0A2F40"/>
+                </a:solidFill>
+                <a:latin typeface="Cambria" pitchFamily="34" charset="0"/>
+                <a:ea typeface="Cambria" pitchFamily="34" charset="-122"/>
+                <a:cs typeface="Cambria" pitchFamily="34" charset="-120"/>
+              </a:rPr>
+              <a:t>The culprit</a:t>
+            </a:r>
+            <a:endParaRPr lang="en-US" sz="1500" dirty="0"/>
+          </a:p>
+        </p:txBody>
+      </p:sp>
+      <p:sp>
+        <p:nvSpPr>
+          <p:cNvPr id="18" name="Text 15"/>
+          <p:cNvSpPr/>
+          <p:nvPr/>
+        </p:nvSpPr>
+        <p:spPr>
+          <a:xfrm>
+            <a:off x="6382512" y="3154680"/>
+            <a:ext cx="2231136" cy="1554480"/>
+          </a:xfrm>
+          <a:prstGeom prst="rect">
+            <a:avLst/>
+          </a:prstGeom>
+          <a:noFill/>
+          <a:ln/>
+        </p:spPr>
+        <p:txBody>
+          <a:bodyPr wrap="square" lIns="0" tIns="0" rIns="0" bIns="0" rtlCol="0" anchor="t"/>
+          <a:lstStyle/>
+          <a:p>
+            <a:pPr indent="0" marL="0">
+              <a:buNone/>
+            </a:pPr>
+            <a:r>
+              <a:rPr lang="en-US" sz="1150" dirty="0">
+                <a:solidFill>
+                  <a:srgbClr val="24343C"/>
+                </a:solidFill>
+                <a:latin typeface="Calibri" pitchFamily="34" charset="0"/>
+                <a:ea typeface="Calibri" pitchFamily="34" charset="-122"/>
+                <a:cs typeface="Calibri" pitchFamily="34" charset="-120"/>
+              </a:rPr>
+              <a:t>USB sample drops during recording silently shorten the .fil’s sample-count clock — the app showed overflows live but didn’t count or log them</a:t>
+            </a:r>
+            <a:endParaRPr lang="en-US" sz="1150" dirty="0"/>
+          </a:p>
+        </p:txBody>
+      </p:sp>
+      <p:sp>
+        <p:nvSpPr>
+          <p:cNvPr id="19" name="Shape 16"/>
+          <p:cNvSpPr/>
+          <p:nvPr/>
+        </p:nvSpPr>
+        <p:spPr>
+          <a:xfrm>
+            <a:off x="8961120" y="1828800"/>
+            <a:ext cx="2670048" cy="3017520"/>
+          </a:xfrm>
+          <a:prstGeom prst="roundRect">
+            <a:avLst>
+              <a:gd name="adj" fmla="val 2740"/>
+            </a:avLst>
+          </a:prstGeom>
+          <a:solidFill>
+            <a:srgbClr val="EFF4F7"/>
+          </a:solidFill>
+          <a:ln w="9525">
+            <a:solidFill>
+              <a:srgbClr val="D7E3EA"/>
+            </a:solidFill>
+            <a:prstDash val="solid"/>
+          </a:ln>
+        </p:spPr>
+      </p:sp>
+      <p:sp>
+        <p:nvSpPr>
+          <p:cNvPr id="20" name="Text 17"/>
+          <p:cNvSpPr/>
+          <p:nvPr/>
+        </p:nvSpPr>
+        <p:spPr>
+          <a:xfrm>
+            <a:off x="9180576" y="2084832"/>
+            <a:ext cx="475488" cy="475488"/>
+          </a:xfrm>
+          <a:prstGeom prst="ellipse">
+            <a:avLst/>
+          </a:prstGeom>
+          <a:solidFill>
+            <a:srgbClr val="B86A18"/>
+          </a:solidFill>
+          <a:ln>
+            <a:solidFill>
+              <a:srgbClr val="B86A18"/>
+            </a:solidFill>
+          </a:ln>
+        </p:spPr>
+        <p:txBody>
+          <a:bodyPr wrap="square" lIns="0" tIns="0" rIns="0" bIns="0" rtlCol="0" anchor="ctr"/>
+          <a:lstStyle/>
+          <a:p>
+            <a:pPr algn="ctr" indent="0" marL="0">
+              <a:buNone/>
+            </a:pPr>
+            <a:r>
+              <a:rPr lang="en-US" sz="1800" b="1" dirty="0">
+                <a:solidFill>
+                  <a:srgbClr val="FFFFFF"/>
+                </a:solidFill>
+                <a:latin typeface="Calibri" pitchFamily="34" charset="0"/>
+                <a:ea typeface="Calibri" pitchFamily="34" charset="-122"/>
+                <a:cs typeface="Calibri" pitchFamily="34" charset="-120"/>
+              </a:rPr>
+              <a:t>4</a:t>
+            </a:r>
+            <a:endParaRPr lang="en-US" sz="1800" dirty="0"/>
+          </a:p>
+        </p:txBody>
+      </p:sp>
+      <p:sp>
+        <p:nvSpPr>
+          <p:cNvPr id="21" name="Text 18"/>
+          <p:cNvSpPr/>
+          <p:nvPr/>
+        </p:nvSpPr>
+        <p:spPr>
+          <a:xfrm>
+            <a:off x="9180576" y="2743200"/>
+            <a:ext cx="2231136" cy="365760"/>
+          </a:xfrm>
+          <a:prstGeom prst="rect">
+            <a:avLst/>
+          </a:prstGeom>
+          <a:noFill/>
+          <a:ln/>
+        </p:spPr>
+        <p:txBody>
+          <a:bodyPr wrap="square" lIns="0" tIns="0" rIns="0" bIns="0" rtlCol="0" anchor="ctr"/>
+          <a:lstStyle/>
+          <a:p>
+            <a:pPr indent="0" marL="0">
+              <a:buNone/>
+            </a:pPr>
+            <a:r>
+              <a:rPr lang="en-US" sz="1500" b="1" dirty="0">
+                <a:solidFill>
+                  <a:srgbClr val="0A2F40"/>
+                </a:solidFill>
+                <a:latin typeface="Cambria" pitchFamily="34" charset="0"/>
+                <a:ea typeface="Cambria" pitchFamily="34" charset="-122"/>
+                <a:cs typeface="Cambria" pitchFamily="34" charset="-120"/>
+              </a:rPr>
+              <a:t>The repair</a:t>
+            </a:r>
+            <a:endParaRPr lang="en-US" sz="1500" dirty="0"/>
+          </a:p>
+        </p:txBody>
+      </p:sp>
+      <p:sp>
+        <p:nvSpPr>
+          <p:cNvPr id="22" name="Text 19"/>
+          <p:cNvSpPr/>
+          <p:nvPr/>
+        </p:nvSpPr>
+        <p:spPr>
+          <a:xfrm>
+            <a:off x="9180576" y="3154680"/>
+            <a:ext cx="2231136" cy="1554480"/>
+          </a:xfrm>
+          <a:prstGeom prst="rect">
+            <a:avLst/>
+          </a:prstGeom>
+          <a:noFill/>
+          <a:ln/>
+        </p:spPr>
+        <p:txBody>
+          <a:bodyPr wrap="square" lIns="0" tIns="0" rIns="0" bIns="0" rtlCol="0" anchor="t"/>
+          <a:lstStyle/>
+          <a:p>
+            <a:pPr indent="0" marL="0">
+              <a:buNone/>
+            </a:pPr>
+            <a:r>
+              <a:rPr lang="en-US" sz="1150" dirty="0">
+                <a:solidFill>
+                  <a:srgbClr val="24343C"/>
+                </a:solidFill>
+                <a:latin typeface="Calibri" pitchFamily="34" charset="0"/>
+                <a:ea typeface="Calibri" pitchFamily="34" charset="-122"/>
+                <a:cs typeface="Calibri" pitchFamily="34" charset="-120"/>
+              </a:rPr>
+              <a:t>0.558 s of noise padded at the step: 22.4 σ → 28.0 σ, single textbook profile, DM back at 25.3 — diagnosis confirmed by repair</a:t>
+            </a:r>
+            <a:endParaRPr lang="en-US" sz="1150" dirty="0"/>
+          </a:p>
+        </p:txBody>
+      </p:sp>
+      <p:sp>
+        <p:nvSpPr>
+          <p:cNvPr id="23" name="Shape 20"/>
+          <p:cNvSpPr/>
+          <p:nvPr/>
+        </p:nvSpPr>
+        <p:spPr>
+          <a:xfrm>
+            <a:off x="566928" y="5257800"/>
+            <a:ext cx="11055096" cy="914400"/>
+          </a:xfrm>
+          <a:prstGeom prst="roundRect">
+            <a:avLst>
+              <a:gd name="adj" fmla="val 8000"/>
+            </a:avLst>
+          </a:prstGeom>
+          <a:solidFill>
+            <a:srgbClr val="EFF4F7"/>
+          </a:solidFill>
+          <a:ln w="9525">
+            <a:solidFill>
+              <a:srgbClr val="D7E3EA"/>
+            </a:solidFill>
+            <a:prstDash val="solid"/>
+          </a:ln>
+        </p:spPr>
+      </p:sp>
+      <p:sp>
+        <p:nvSpPr>
+          <p:cNvPr id="24" name="Text 21"/>
+          <p:cNvSpPr/>
+          <p:nvPr/>
+        </p:nvSpPr>
+        <p:spPr>
+          <a:xfrm>
+            <a:off x="886968" y="5257800"/>
+            <a:ext cx="10424160" cy="914400"/>
+          </a:xfrm>
+          <a:prstGeom prst="rect">
+            <a:avLst/>
+          </a:prstGeom>
+          <a:noFill/>
+          <a:ln/>
+        </p:spPr>
+        <p:txBody>
+          <a:bodyPr wrap="square" lIns="0" tIns="0" rIns="0" bIns="0" rtlCol="0" anchor="ctr"/>
+          <a:lstStyle/>
+          <a:p>
+            <a:pPr indent="0" marL="0">
+              <a:buNone/>
+            </a:pPr>
+            <a:r>
+              <a:rPr lang="en-US" sz="1450" b="1" dirty="0">
                 <a:solidFill>
                   <a:srgbClr val="B86A18"/>
                 </a:solidFill>
@@ -13779,112 +16447,23 @@
                 <a:ea typeface="Calibri" pitchFamily="34" charset="-122"/>
                 <a:cs typeface="Calibri" pitchFamily="34" charset="-120"/>
               </a:rPr>
-              <a:t>probability the signal is noise: &lt; 2×10⁻²²</a:t>
-            </a:r>
-            <a:endParaRPr lang="en-US" sz="1300" dirty="0"/>
-          </a:p>
-        </p:txBody>
-      </p:sp>
-      <p:sp>
-        <p:nvSpPr>
-          <p:cNvPr id="12" name="Text 8"/>
-          <p:cNvSpPr/>
-          <p:nvPr/>
-        </p:nvSpPr>
-        <p:spPr>
-          <a:xfrm>
-            <a:off x="566928" y="3246120"/>
-            <a:ext cx="4663440" cy="2926080"/>
-          </a:xfrm>
-          <a:prstGeom prst="rect">
-            <a:avLst/>
-          </a:prstGeom>
-          <a:noFill/>
-          <a:ln/>
-        </p:spPr>
-        <p:txBody>
-          <a:bodyPr wrap="square" lIns="0" tIns="0" rIns="0" bIns="0" rtlCol="0" anchor="t"/>
-          <a:lstStyle/>
-          <a:p>
-            <a:pPr marL="342900" indent="-342900">
-              <a:spcAft>
-                <a:spcPts val="1000"/>
-              </a:spcAft>
-              <a:buSzPct val="100000"/>
-              <a:buChar char="•"/>
-            </a:pPr>
-            <a:r>
-              <a:rPr lang="en-US" sz="1300" dirty="0">
-                <a:solidFill>
-                  <a:srgbClr val="24343C"/>
-                </a:solidFill>
-                <a:latin typeface="Calibri" pitchFamily="34" charset="0"/>
-                <a:ea typeface="Calibri" pitchFamily="34" charset="-122"/>
-                <a:cs typeface="Calibri" pitchFamily="34" charset="-120"/>
-              </a:rPr>
-              <a:t>Clear peak at the pulsar’s 253 ms period when folded at the known ephemeris</a:t>
-            </a:r>
-            <a:endParaRPr lang="en-US" sz="1300" dirty="0"/>
-          </a:p>
-          <a:p>
-            <a:pPr marL="342900" indent="-342900">
-              <a:spcAft>
-                <a:spcPts val="1000"/>
-              </a:spcAft>
-              <a:buSzPct val="100000"/>
-              <a:buChar char="•"/>
-            </a:pPr>
-            <a:r>
-              <a:rPr lang="en-US" sz="1300" dirty="0">
-                <a:solidFill>
-                  <a:srgbClr val="24343C"/>
-                </a:solidFill>
-                <a:latin typeface="Calibri" pitchFamily="34" charset="0"/>
-                <a:ea typeface="Calibri" pitchFamily="34" charset="-122"/>
-                <a:cs typeface="Calibri" pitchFamily="34" charset="-120"/>
-              </a:rPr>
-              <a:t>The lesson: with only 20 MHz at 420 MHz, its tiny dispersion measure (2.97) is indistinguishable from zero — a blind search “slides” to DM 0 and superficially resembles interference</a:t>
-            </a:r>
-            <a:endParaRPr lang="en-US" sz="1300" dirty="0"/>
-          </a:p>
-          <a:p>
-            <a:pPr marL="342900" indent="-342900">
-              <a:spcAft>
-                <a:spcPts val="1000"/>
-              </a:spcAft>
-              <a:buSzPct val="100000"/>
-              <a:buChar char="•"/>
-            </a:pPr>
-            <a:r>
-              <a:rPr lang="en-US" sz="1300" dirty="0">
-                <a:solidFill>
-                  <a:srgbClr val="24343C"/>
-                </a:solidFill>
-                <a:latin typeface="Calibri" pitchFamily="34" charset="0"/>
-                <a:ea typeface="Calibri" pitchFamily="34" charset="-122"/>
-                <a:cs typeface="Calibri" pitchFamily="34" charset="-120"/>
-              </a:rPr>
-              <a:t>Folding at the known period settles it: the periodicity is unmistakably the pulsar</a:t>
-            </a:r>
-            <a:endParaRPr lang="en-US" sz="1300" dirty="0"/>
-          </a:p>
-          <a:p>
-            <a:pPr marL="342900" indent="-342900">
-              <a:buSzPct val="100000"/>
-              <a:buChar char="•"/>
-            </a:pPr>
-            <a:r>
-              <a:rPr lang="en-US" sz="1300" dirty="0">
-                <a:solidFill>
-                  <a:srgbClr val="24343C"/>
-                </a:solidFill>
-                <a:latin typeface="Calibri" pitchFamily="34" charset="0"/>
-                <a:ea typeface="Calibri" pitchFamily="34" charset="-122"/>
-                <a:cs typeface="Calibri" pitchFamily="34" charset="-120"/>
-              </a:rPr>
-              <a:t>A strong scintillator — a longer follow-up observation is planned</a:t>
-            </a:r>
-            <a:endParaRPr lang="en-US" sz="1300" dirty="0"/>
+              <a:t>Return on criticism.  </a:t>
+            </a:r>
+            <a:pPr indent="0" marL="0">
+              <a:buNone/>
+            </a:pPr>
+            <a:r>
+              <a:rPr lang="en-US" sz="1450" dirty="0">
+                <a:solidFill>
+                  <a:srgbClr val="0A2F40"/>
+                </a:solidFill>
+                <a:latin typeface="Calibri" pitchFamily="34" charset="0"/>
+                <a:ea typeface="Calibri" pitchFamily="34" charset="-122"/>
+                <a:cs typeface="Calibri" pitchFamily="34" charset="-120"/>
+              </a:rPr>
+              <a:t>Overflow logging and automatic gap-padding are now queued on the roadmap — future recordings keep an honest clock.</a:t>
+            </a:r>
+            <a:endParaRPr lang="en-US" sz="1450" dirty="0"/>
           </a:p>
         </p:txBody>
       </p:sp>

--- a/reports/sara-2026/Lowering_the_Barrier_to_Radio_Astronomy_SARA_2026.pptx
+++ b/reports/sara-2026/Lowering_the_Barrier_to_Radio_Astronomy_SARA_2026.pptx
@@ -1778,6 +1778,52 @@
           <a:chExt cx="0" cy="0"/>
         </a:xfrm>
       </p:grpSpPr>
+      <p:sp>
+        <p:nvSpPr>
+          <p:cNvPr id="2" name="Slide Number Placeholder 2"/>
+          <p:cNvSpPr>
+            <a:spLocks noGrp="1"/>
+          </p:cNvSpPr>
+          <p:nvPr>
+            <p:ph type="sldNum" sz="quarter" idx="4"/>
+          </p:nvPr>
+        </p:nvSpPr>
+        <p:spPr>
+          <a:xfrm>
+            <a:off x="11477880" y="6473952"/>
+            <a:ext cx="457200" cy="228600"/>
+          </a:xfrm>
+          <a:prstGeom prst="rect">
+            <a:avLst/>
+          </a:prstGeom>
+        </p:spPr>
+        <p:txBody>
+          <a:bodyPr vert="horz" lIns="0" tIns="0" rIns="0" bIns="0" rtlCol="0" anchor="ctr"/>
+          <a:lstStyle>
+            <a:lvl1pPr algn="r">
+              <a:defRPr sz="850">
+                <a:solidFill>
+                  <a:srgbClr val="6B7A82"/>
+                </a:solidFill>
+                <a:latin typeface="Calibri"/>
+              </a:defRPr>
+            </a:lvl1pPr>
+          </a:lstStyle>
+          <a:p>
+            <a:pPr algn="r"/>
+            <a:fld id="{51DC1C96-102D-4764-8BE2-750FA6264AFB}" type="slidenum">
+              <a:rPr lang="en-US" sz="850" dirty="0">
+                <a:solidFill>
+                  <a:srgbClr val="6B7A82"/>
+                </a:solidFill>
+                <a:latin typeface="Calibri"/>
+              </a:rPr>
+              <a:t>‹#›</a:t>
+            </a:fld>
+            <a:endParaRPr lang="en-US" sz="850" dirty="0"/>
+          </a:p>
+        </p:txBody>
+      </p:sp>
     </p:spTree>
   </p:cSld>
   <p:clrMapOvr>
@@ -1808,6 +1854,52 @@
           <a:chExt cx="0" cy="0"/>
         </a:xfrm>
       </p:grpSpPr>
+      <p:sp>
+        <p:nvSpPr>
+          <p:cNvPr id="2" name="Slide Number Placeholder 2"/>
+          <p:cNvSpPr>
+            <a:spLocks noGrp="1"/>
+          </p:cNvSpPr>
+          <p:nvPr>
+            <p:ph type="sldNum" sz="quarter" idx="4"/>
+          </p:nvPr>
+        </p:nvSpPr>
+        <p:spPr>
+          <a:xfrm>
+            <a:off x="11477880" y="6473952"/>
+            <a:ext cx="457200" cy="228600"/>
+          </a:xfrm>
+          <a:prstGeom prst="rect">
+            <a:avLst/>
+          </a:prstGeom>
+        </p:spPr>
+        <p:txBody>
+          <a:bodyPr vert="horz" lIns="0" tIns="0" rIns="0" bIns="0" rtlCol="0" anchor="ctr"/>
+          <a:lstStyle>
+            <a:lvl1pPr algn="r">
+              <a:defRPr sz="850">
+                <a:solidFill>
+                  <a:srgbClr val="6B7A82"/>
+                </a:solidFill>
+                <a:latin typeface="Calibri"/>
+              </a:defRPr>
+            </a:lvl1pPr>
+          </a:lstStyle>
+          <a:p>
+            <a:pPr algn="r"/>
+            <a:fld id="{832BFFA8-5D8A-4288-B069-7225ED41CEB7}" type="slidenum">
+              <a:rPr lang="en-US" sz="850" dirty="0">
+                <a:solidFill>
+                  <a:srgbClr val="6B7A82"/>
+                </a:solidFill>
+                <a:latin typeface="Calibri"/>
+              </a:rPr>
+              <a:t>‹#›</a:t>
+            </a:fld>
+            <a:endParaRPr lang="en-US" sz="850" dirty="0"/>
+          </a:p>
+        </p:txBody>
+      </p:sp>
     </p:spTree>
   </p:cSld>
   <p:clrMap bg1="lt1" tx1="dk1" bg2="lt2" tx2="dk2" accent1="accent1" accent2="accent2" accent3="accent3" accent4="accent4" accent5="accent5" accent6="accent6" hlink="hlink" folHlink="folHlink"/>
@@ -3408,6 +3500,43 @@
           </a:p>
         </p:txBody>
       </p:sp>
+      <p:sp>
+        <p:nvSpPr>
+          <p:cNvPr id="25" name="Slide Number Placeholder 25"/>
+          <p:cNvSpPr>
+            <a:spLocks noGrp="1"/>
+          </p:cNvSpPr>
+          <p:nvPr>
+            <p:ph type="sldNum" sz="quarter" idx="4"/>
+          </p:nvPr>
+        </p:nvSpPr>
+        <p:spPr>
+          <a:xfrm>
+            <a:off x="11477880" y="6473952"/>
+            <a:ext cx="457200" cy="228600"/>
+          </a:xfrm>
+          <a:prstGeom prst="rect">
+            <a:avLst/>
+          </a:prstGeom>
+        </p:spPr>
+        <p:txBody>
+          <a:bodyPr vert="horz" lIns="0" tIns="0" rIns="0" bIns="0" rtlCol="0" anchor="ctr"/>
+          <a:lstStyle/>
+          <a:p>
+            <a:pPr algn="r"/>
+            <a:fld id="{E2B9DDDE-79CF-4241-9624-E2211BEBF904}" type="slidenum">
+              <a:rPr lang="en-US" sz="850" dirty="0">
+                <a:solidFill>
+                  <a:srgbClr val="6B7A82"/>
+                </a:solidFill>
+                <a:latin typeface="Calibri"/>
+              </a:rPr>
+              <a:t>10</a:t>
+            </a:fld>
+            <a:endParaRPr lang="en-US" sz="850" dirty="0"/>
+          </a:p>
+        </p:txBody>
+      </p:sp>
     </p:spTree>
   </p:cSld>
   <p:clrMapOvr>
@@ -3865,6 +3994,43 @@
           </a:p>
         </p:txBody>
       </p:sp>
+      <p:sp>
+        <p:nvSpPr>
+          <p:cNvPr id="13" name="Slide Number Placeholder 13"/>
+          <p:cNvSpPr>
+            <a:spLocks noGrp="1"/>
+          </p:cNvSpPr>
+          <p:nvPr>
+            <p:ph type="sldNum" sz="quarter" idx="4"/>
+          </p:nvPr>
+        </p:nvSpPr>
+        <p:spPr>
+          <a:xfrm>
+            <a:off x="11477880" y="6473952"/>
+            <a:ext cx="457200" cy="228600"/>
+          </a:xfrm>
+          <a:prstGeom prst="rect">
+            <a:avLst/>
+          </a:prstGeom>
+        </p:spPr>
+        <p:txBody>
+          <a:bodyPr vert="horz" lIns="0" tIns="0" rIns="0" bIns="0" rtlCol="0" anchor="ctr"/>
+          <a:lstStyle/>
+          <a:p>
+            <a:pPr algn="r"/>
+            <a:fld id="{07BE9F51-F659-475D-A05E-196EAEBF0E08}" type="slidenum">
+              <a:rPr lang="en-US" sz="850" dirty="0">
+                <a:solidFill>
+                  <a:srgbClr val="6B7A82"/>
+                </a:solidFill>
+                <a:latin typeface="Calibri"/>
+              </a:rPr>
+              <a:t>11</a:t>
+            </a:fld>
+            <a:endParaRPr lang="en-US" sz="850" dirty="0"/>
+          </a:p>
+        </p:txBody>
+      </p:sp>
     </p:spTree>
   </p:cSld>
   <p:clrMapOvr>
@@ -4527,6 +4693,43 @@
           </a:p>
         </p:txBody>
       </p:sp>
+      <p:sp>
+        <p:nvSpPr>
+          <p:cNvPr id="16" name="Slide Number Placeholder 16"/>
+          <p:cNvSpPr>
+            <a:spLocks noGrp="1"/>
+          </p:cNvSpPr>
+          <p:nvPr>
+            <p:ph type="sldNum" sz="quarter" idx="4"/>
+          </p:nvPr>
+        </p:nvSpPr>
+        <p:spPr>
+          <a:xfrm>
+            <a:off x="11477880" y="6473952"/>
+            <a:ext cx="457200" cy="228600"/>
+          </a:xfrm>
+          <a:prstGeom prst="rect">
+            <a:avLst/>
+          </a:prstGeom>
+        </p:spPr>
+        <p:txBody>
+          <a:bodyPr vert="horz" lIns="0" tIns="0" rIns="0" bIns="0" rtlCol="0" anchor="ctr"/>
+          <a:lstStyle/>
+          <a:p>
+            <a:pPr algn="r"/>
+            <a:fld id="{9DFEBCD2-01C1-4724-BFCD-6F0870E15985}" type="slidenum">
+              <a:rPr lang="en-US" sz="850" dirty="0">
+                <a:solidFill>
+                  <a:srgbClr val="6B7A82"/>
+                </a:solidFill>
+                <a:latin typeface="Calibri"/>
+              </a:rPr>
+              <a:t>12</a:t>
+            </a:fld>
+            <a:endParaRPr lang="en-US" sz="850" dirty="0"/>
+          </a:p>
+        </p:txBody>
+      </p:sp>
     </p:spTree>
   </p:cSld>
   <p:clrMapOvr>
@@ -5413,6 +5616,43 @@
           </a:p>
         </p:txBody>
       </p:sp>
+      <p:sp>
+        <p:nvSpPr>
+          <p:cNvPr id="25" name="Slide Number Placeholder 25"/>
+          <p:cNvSpPr>
+            <a:spLocks noGrp="1"/>
+          </p:cNvSpPr>
+          <p:nvPr>
+            <p:ph type="sldNum" sz="quarter" idx="4"/>
+          </p:nvPr>
+        </p:nvSpPr>
+        <p:spPr>
+          <a:xfrm>
+            <a:off x="11477880" y="6473952"/>
+            <a:ext cx="457200" cy="228600"/>
+          </a:xfrm>
+          <a:prstGeom prst="rect">
+            <a:avLst/>
+          </a:prstGeom>
+        </p:spPr>
+        <p:txBody>
+          <a:bodyPr vert="horz" lIns="0" tIns="0" rIns="0" bIns="0" rtlCol="0" anchor="ctr"/>
+          <a:lstStyle/>
+          <a:p>
+            <a:pPr algn="r"/>
+            <a:fld id="{F829D80C-5120-4B1B-95F4-809401D7E479}" type="slidenum">
+              <a:rPr lang="en-US" sz="850" dirty="0">
+                <a:solidFill>
+                  <a:srgbClr val="6B7A82"/>
+                </a:solidFill>
+                <a:latin typeface="Calibri"/>
+              </a:rPr>
+              <a:t>13</a:t>
+            </a:fld>
+            <a:endParaRPr lang="en-US" sz="850" dirty="0"/>
+          </a:p>
+        </p:txBody>
+      </p:sp>
     </p:spTree>
   </p:cSld>
   <p:clrMapOvr>
@@ -6046,6 +6286,43 @@
           </a:p>
         </p:txBody>
       </p:sp>
+      <p:sp>
+        <p:nvSpPr>
+          <p:cNvPr id="19" name="Slide Number Placeholder 19"/>
+          <p:cNvSpPr>
+            <a:spLocks noGrp="1"/>
+          </p:cNvSpPr>
+          <p:nvPr>
+            <p:ph type="sldNum" sz="quarter" idx="4"/>
+          </p:nvPr>
+        </p:nvSpPr>
+        <p:spPr>
+          <a:xfrm>
+            <a:off x="11477880" y="6473952"/>
+            <a:ext cx="457200" cy="228600"/>
+          </a:xfrm>
+          <a:prstGeom prst="rect">
+            <a:avLst/>
+          </a:prstGeom>
+        </p:spPr>
+        <p:txBody>
+          <a:bodyPr vert="horz" lIns="0" tIns="0" rIns="0" bIns="0" rtlCol="0" anchor="ctr"/>
+          <a:lstStyle/>
+          <a:p>
+            <a:pPr algn="r"/>
+            <a:fld id="{25AAE0E2-DB59-414F-9852-A06193896751}" type="slidenum">
+              <a:rPr lang="en-US" sz="850" dirty="0">
+                <a:solidFill>
+                  <a:srgbClr val="6B7A82"/>
+                </a:solidFill>
+                <a:latin typeface="Calibri"/>
+              </a:rPr>
+              <a:t>14</a:t>
+            </a:fld>
+            <a:endParaRPr lang="en-US" sz="850" dirty="0"/>
+          </a:p>
+        </p:txBody>
+      </p:sp>
     </p:spTree>
   </p:cSld>
   <p:clrMapOvr>
@@ -6932,6 +7209,43 @@
           </a:p>
         </p:txBody>
       </p:sp>
+      <p:sp>
+        <p:nvSpPr>
+          <p:cNvPr id="25" name="Slide Number Placeholder 25"/>
+          <p:cNvSpPr>
+            <a:spLocks noGrp="1"/>
+          </p:cNvSpPr>
+          <p:nvPr>
+            <p:ph type="sldNum" sz="quarter" idx="4"/>
+          </p:nvPr>
+        </p:nvSpPr>
+        <p:spPr>
+          <a:xfrm>
+            <a:off x="11477880" y="6473952"/>
+            <a:ext cx="457200" cy="228600"/>
+          </a:xfrm>
+          <a:prstGeom prst="rect">
+            <a:avLst/>
+          </a:prstGeom>
+        </p:spPr>
+        <p:txBody>
+          <a:bodyPr vert="horz" lIns="0" tIns="0" rIns="0" bIns="0" rtlCol="0" anchor="ctr"/>
+          <a:lstStyle/>
+          <a:p>
+            <a:pPr algn="r"/>
+            <a:fld id="{3918EC9C-F6D4-40A6-B9F7-803C1782EAEA}" type="slidenum">
+              <a:rPr lang="en-US" sz="850" dirty="0">
+                <a:solidFill>
+                  <a:srgbClr val="6B7A82"/>
+                </a:solidFill>
+                <a:latin typeface="Calibri"/>
+              </a:rPr>
+              <a:t>15</a:t>
+            </a:fld>
+            <a:endParaRPr lang="en-US" sz="850" dirty="0"/>
+          </a:p>
+        </p:txBody>
+      </p:sp>
     </p:spTree>
   </p:cSld>
   <p:clrMapOvr>
@@ -8301,6 +8615,43 @@
               <a:t>Training the radio-astronomy interest group starts on this baseline — a roster of members is signed up.</a:t>
             </a:r>
             <a:endParaRPr lang="en-US" dirty="0"/>
+          </a:p>
+        </p:txBody>
+      </p:sp>
+      <p:sp>
+        <p:nvSpPr>
+          <p:cNvPr id="39" name="Slide Number Placeholder 39"/>
+          <p:cNvSpPr>
+            <a:spLocks noGrp="1"/>
+          </p:cNvSpPr>
+          <p:nvPr>
+            <p:ph type="sldNum" sz="quarter" idx="4"/>
+          </p:nvPr>
+        </p:nvSpPr>
+        <p:spPr>
+          <a:xfrm>
+            <a:off x="11477880" y="6473952"/>
+            <a:ext cx="457200" cy="228600"/>
+          </a:xfrm>
+          <a:prstGeom prst="rect">
+            <a:avLst/>
+          </a:prstGeom>
+        </p:spPr>
+        <p:txBody>
+          <a:bodyPr vert="horz" lIns="0" tIns="0" rIns="0" bIns="0" rtlCol="0" anchor="ctr"/>
+          <a:lstStyle/>
+          <a:p>
+            <a:pPr algn="r"/>
+            <a:fld id="{87F59D88-6D56-4DAF-97E6-F5488F2333B3}" type="slidenum">
+              <a:rPr lang="en-US" sz="850" dirty="0">
+                <a:solidFill>
+                  <a:srgbClr val="6B7A82"/>
+                </a:solidFill>
+                <a:latin typeface="Calibri"/>
+              </a:rPr>
+              <a:t>16</a:t>
+            </a:fld>
+            <a:endParaRPr lang="en-US" sz="850" dirty="0"/>
           </a:p>
         </p:txBody>
       </p:sp>
@@ -9689,6 +10040,43 @@
           </a:p>
         </p:txBody>
       </p:sp>
+      <p:sp>
+        <p:nvSpPr>
+          <p:cNvPr id="20" name="Slide Number Placeholder 20"/>
+          <p:cNvSpPr>
+            <a:spLocks noGrp="1"/>
+          </p:cNvSpPr>
+          <p:nvPr>
+            <p:ph type="sldNum" sz="quarter" idx="4"/>
+          </p:nvPr>
+        </p:nvSpPr>
+        <p:spPr>
+          <a:xfrm>
+            <a:off x="11477880" y="6473952"/>
+            <a:ext cx="457200" cy="228600"/>
+          </a:xfrm>
+          <a:prstGeom prst="rect">
+            <a:avLst/>
+          </a:prstGeom>
+        </p:spPr>
+        <p:txBody>
+          <a:bodyPr vert="horz" lIns="0" tIns="0" rIns="0" bIns="0" rtlCol="0" anchor="ctr"/>
+          <a:lstStyle/>
+          <a:p>
+            <a:pPr algn="r"/>
+            <a:fld id="{BD446756-E39E-4725-93FB-13FA05BADBB0}" type="slidenum">
+              <a:rPr lang="en-US" sz="850" dirty="0">
+                <a:solidFill>
+                  <a:srgbClr val="6B7A82"/>
+                </a:solidFill>
+                <a:latin typeface="Calibri"/>
+              </a:rPr>
+              <a:t>2</a:t>
+            </a:fld>
+            <a:endParaRPr lang="en-US" sz="850" dirty="0"/>
+          </a:p>
+        </p:txBody>
+      </p:sp>
     </p:spTree>
   </p:cSld>
   <p:clrMapOvr>
@@ -11301,6 +11689,43 @@
           </a:p>
         </p:txBody>
       </p:sp>
+      <p:sp>
+        <p:nvSpPr>
+          <p:cNvPr id="44" name="Slide Number Placeholder 44"/>
+          <p:cNvSpPr>
+            <a:spLocks noGrp="1"/>
+          </p:cNvSpPr>
+          <p:nvPr>
+            <p:ph type="sldNum" sz="quarter" idx="4"/>
+          </p:nvPr>
+        </p:nvSpPr>
+        <p:spPr>
+          <a:xfrm>
+            <a:off x="11477880" y="6473952"/>
+            <a:ext cx="457200" cy="228600"/>
+          </a:xfrm>
+          <a:prstGeom prst="rect">
+            <a:avLst/>
+          </a:prstGeom>
+        </p:spPr>
+        <p:txBody>
+          <a:bodyPr vert="horz" lIns="0" tIns="0" rIns="0" bIns="0" rtlCol="0" anchor="ctr"/>
+          <a:lstStyle/>
+          <a:p>
+            <a:pPr algn="r"/>
+            <a:fld id="{5D902D0F-5B8C-4D3A-A24A-FF2B7FD4C56C}" type="slidenum">
+              <a:rPr lang="en-US" sz="850" dirty="0">
+                <a:solidFill>
+                  <a:srgbClr val="6B7A82"/>
+                </a:solidFill>
+                <a:latin typeface="Calibri"/>
+              </a:rPr>
+              <a:t>3</a:t>
+            </a:fld>
+            <a:endParaRPr lang="en-US" sz="850" dirty="0"/>
+          </a:p>
+        </p:txBody>
+      </p:sp>
     </p:spTree>
   </p:cSld>
   <p:clrMapOvr>
@@ -12194,6 +12619,43 @@
           </a:p>
         </p:txBody>
       </p:sp>
+      <p:sp>
+        <p:nvSpPr>
+          <p:cNvPr id="26" name="Slide Number Placeholder 26"/>
+          <p:cNvSpPr>
+            <a:spLocks noGrp="1"/>
+          </p:cNvSpPr>
+          <p:nvPr>
+            <p:ph type="sldNum" sz="quarter" idx="4"/>
+          </p:nvPr>
+        </p:nvSpPr>
+        <p:spPr>
+          <a:xfrm>
+            <a:off x="11477880" y="6473952"/>
+            <a:ext cx="457200" cy="228600"/>
+          </a:xfrm>
+          <a:prstGeom prst="rect">
+            <a:avLst/>
+          </a:prstGeom>
+        </p:spPr>
+        <p:txBody>
+          <a:bodyPr vert="horz" lIns="0" tIns="0" rIns="0" bIns="0" rtlCol="0" anchor="ctr"/>
+          <a:lstStyle/>
+          <a:p>
+            <a:pPr algn="r"/>
+            <a:fld id="{28FBE091-B4BE-475C-8E05-00078E6FE657}" type="slidenum">
+              <a:rPr lang="en-US" sz="850" dirty="0">
+                <a:solidFill>
+                  <a:srgbClr val="6B7A82"/>
+                </a:solidFill>
+                <a:latin typeface="Calibri"/>
+              </a:rPr>
+              <a:t>4</a:t>
+            </a:fld>
+            <a:endParaRPr lang="en-US" sz="850" dirty="0"/>
+          </a:p>
+        </p:txBody>
+      </p:sp>
     </p:spTree>
   </p:cSld>
   <p:clrMapOvr>
@@ -12419,6 +12881,43 @@
           </a:prstGeom>
         </p:spPr>
       </p:pic>
+      <p:sp>
+        <p:nvSpPr>
+          <p:cNvPr id="9" name="Slide Number Placeholder 9"/>
+          <p:cNvSpPr>
+            <a:spLocks noGrp="1"/>
+          </p:cNvSpPr>
+          <p:nvPr>
+            <p:ph type="sldNum" sz="quarter" idx="4"/>
+          </p:nvPr>
+        </p:nvSpPr>
+        <p:spPr>
+          <a:xfrm>
+            <a:off x="11477880" y="6473952"/>
+            <a:ext cx="457200" cy="228600"/>
+          </a:xfrm>
+          <a:prstGeom prst="rect">
+            <a:avLst/>
+          </a:prstGeom>
+        </p:spPr>
+        <p:txBody>
+          <a:bodyPr vert="horz" lIns="0" tIns="0" rIns="0" bIns="0" rtlCol="0" anchor="ctr"/>
+          <a:lstStyle/>
+          <a:p>
+            <a:pPr algn="r"/>
+            <a:fld id="{0EE33691-5852-40E0-8221-5FA2C0BA7807}" type="slidenum">
+              <a:rPr lang="en-US" sz="850" dirty="0">
+                <a:solidFill>
+                  <a:srgbClr val="6B7A82"/>
+                </a:solidFill>
+                <a:latin typeface="Calibri"/>
+              </a:rPr>
+              <a:t>5</a:t>
+            </a:fld>
+            <a:endParaRPr lang="en-US" sz="850" dirty="0"/>
+          </a:p>
+        </p:txBody>
+      </p:sp>
     </p:spTree>
     <p:extLst>
       <p:ext uri="{BB962C8B-B14F-4D97-AF65-F5344CB8AC3E}">
@@ -13383,6 +13882,43 @@
           </a:prstGeom>
         </p:spPr>
       </p:pic>
+      <p:sp>
+        <p:nvSpPr>
+          <p:cNvPr id="25" name="Slide Number Placeholder 25"/>
+          <p:cNvSpPr>
+            <a:spLocks noGrp="1"/>
+          </p:cNvSpPr>
+          <p:nvPr>
+            <p:ph type="sldNum" sz="quarter" idx="4"/>
+          </p:nvPr>
+        </p:nvSpPr>
+        <p:spPr>
+          <a:xfrm>
+            <a:off x="11477880" y="6473952"/>
+            <a:ext cx="457200" cy="228600"/>
+          </a:xfrm>
+          <a:prstGeom prst="rect">
+            <a:avLst/>
+          </a:prstGeom>
+        </p:spPr>
+        <p:txBody>
+          <a:bodyPr vert="horz" lIns="0" tIns="0" rIns="0" bIns="0" rtlCol="0" anchor="ctr"/>
+          <a:lstStyle/>
+          <a:p>
+            <a:pPr algn="r"/>
+            <a:fld id="{8E22918F-97EC-4791-BD0B-F90039D36CC5}" type="slidenum">
+              <a:rPr lang="en-US" sz="850" dirty="0">
+                <a:solidFill>
+                  <a:srgbClr val="6B7A82"/>
+                </a:solidFill>
+                <a:latin typeface="Calibri"/>
+              </a:rPr>
+              <a:t>6</a:t>
+            </a:fld>
+            <a:endParaRPr lang="en-US" sz="850" dirty="0"/>
+          </a:p>
+        </p:txBody>
+      </p:sp>
     </p:spTree>
   </p:cSld>
   <p:clrMapOvr>
@@ -14445,6 +14981,43 @@
               <a:t>one laptop — planning, RF checks, recording</a:t>
             </a:r>
             <a:endParaRPr lang="en-US" sz="1150" dirty="0"/>
+          </a:p>
+        </p:txBody>
+      </p:sp>
+      <p:sp>
+        <p:nvSpPr>
+          <p:cNvPr id="30" name="Slide Number Placeholder 30"/>
+          <p:cNvSpPr>
+            <a:spLocks noGrp="1"/>
+          </p:cNvSpPr>
+          <p:nvPr>
+            <p:ph type="sldNum" sz="quarter" idx="4"/>
+          </p:nvPr>
+        </p:nvSpPr>
+        <p:spPr>
+          <a:xfrm>
+            <a:off x="11477880" y="6473952"/>
+            <a:ext cx="457200" cy="228600"/>
+          </a:xfrm>
+          <a:prstGeom prst="rect">
+            <a:avLst/>
+          </a:prstGeom>
+        </p:spPr>
+        <p:txBody>
+          <a:bodyPr vert="horz" lIns="0" tIns="0" rIns="0" bIns="0" rtlCol="0" anchor="ctr"/>
+          <a:lstStyle/>
+          <a:p>
+            <a:pPr algn="r"/>
+            <a:fld id="{A1078162-12D1-486C-B275-7DA9A06905FA}" type="slidenum">
+              <a:rPr lang="en-US" sz="850" dirty="0">
+                <a:solidFill>
+                  <a:srgbClr val="6B7A82"/>
+                </a:solidFill>
+                <a:latin typeface="Calibri"/>
+              </a:rPr>
+              <a:t>7</a:t>
+            </a:fld>
+            <a:endParaRPr lang="en-US" sz="850" dirty="0"/>
           </a:p>
         </p:txBody>
       </p:sp>
@@ -16213,6 +16786,43 @@
           </a:p>
         </p:txBody>
       </p:sp>
+      <p:sp>
+        <p:nvSpPr>
+          <p:cNvPr id="21" name="Slide Number Placeholder 21"/>
+          <p:cNvSpPr>
+            <a:spLocks noGrp="1"/>
+          </p:cNvSpPr>
+          <p:nvPr>
+            <p:ph type="sldNum" sz="quarter" idx="4"/>
+          </p:nvPr>
+        </p:nvSpPr>
+        <p:spPr>
+          <a:xfrm>
+            <a:off x="11477880" y="6473952"/>
+            <a:ext cx="457200" cy="228600"/>
+          </a:xfrm>
+          <a:prstGeom prst="rect">
+            <a:avLst/>
+          </a:prstGeom>
+        </p:spPr>
+        <p:txBody>
+          <a:bodyPr vert="horz" lIns="0" tIns="0" rIns="0" bIns="0" rtlCol="0" anchor="ctr"/>
+          <a:lstStyle/>
+          <a:p>
+            <a:pPr algn="r"/>
+            <a:fld id="{C8F48EB4-ED29-4720-B413-AD296126C228}" type="slidenum">
+              <a:rPr lang="en-US" sz="850" dirty="0">
+                <a:solidFill>
+                  <a:srgbClr val="6B7A82"/>
+                </a:solidFill>
+                <a:latin typeface="Calibri"/>
+              </a:rPr>
+              <a:t>8</a:t>
+            </a:fld>
+            <a:endParaRPr lang="en-US" sz="850" dirty="0"/>
+          </a:p>
+        </p:txBody>
+      </p:sp>
     </p:spTree>
   </p:cSld>
   <p:clrMapOvr>
@@ -16646,6 +17256,43 @@
               <a:t>In the field it stood at ~20 σ; RFI cleanup and one timebase repair recovered the rest — that story is the next slide</a:t>
             </a:r>
             <a:endParaRPr lang="en-US" sz="2000" dirty="0"/>
+          </a:p>
+        </p:txBody>
+      </p:sp>
+      <p:sp>
+        <p:nvSpPr>
+          <p:cNvPr id="13" name="Slide Number Placeholder 13"/>
+          <p:cNvSpPr>
+            <a:spLocks noGrp="1"/>
+          </p:cNvSpPr>
+          <p:nvPr>
+            <p:ph type="sldNum" sz="quarter" idx="4"/>
+          </p:nvPr>
+        </p:nvSpPr>
+        <p:spPr>
+          <a:xfrm>
+            <a:off x="11477880" y="6473952"/>
+            <a:ext cx="457200" cy="228600"/>
+          </a:xfrm>
+          <a:prstGeom prst="rect">
+            <a:avLst/>
+          </a:prstGeom>
+        </p:spPr>
+        <p:txBody>
+          <a:bodyPr vert="horz" lIns="0" tIns="0" rIns="0" bIns="0" rtlCol="0" anchor="ctr"/>
+          <a:lstStyle/>
+          <a:p>
+            <a:pPr algn="r"/>
+            <a:fld id="{251994EA-03D3-4FD5-8B48-B20D63795AC1}" type="slidenum">
+              <a:rPr lang="en-US" sz="850" dirty="0">
+                <a:solidFill>
+                  <a:srgbClr val="6B7A82"/>
+                </a:solidFill>
+                <a:latin typeface="Calibri"/>
+              </a:rPr>
+              <a:t>9</a:t>
+            </a:fld>
+            <a:endParaRPr lang="en-US" sz="850" dirty="0"/>
           </a:p>
         </p:txBody>
       </p:sp>

--- a/reports/sara-2026/Lowering_the_Barrier_to_Radio_Astronomy_SARA_2026.pptx
+++ b/reports/sara-2026/Lowering_the_Barrier_to_Radio_Astronomy_SARA_2026.pptx
@@ -8173,8 +8173,8 @@
         </p:nvSpPr>
         <p:spPr>
           <a:xfrm>
-            <a:off x="749808" y="5394960"/>
-            <a:ext cx="3520440" cy="612648"/>
+            <a:off x="688427" y="5394960"/>
+            <a:ext cx="3636579" cy="531876"/>
           </a:xfrm>
           <a:prstGeom prst="rect">
             <a:avLst/>
@@ -12726,7 +12726,7 @@
                 <a:ea typeface="Calibri" pitchFamily="34" charset="-122"/>
                 <a:cs typeface="Calibri" pitchFamily="34" charset="-120"/>
               </a:rPr>
-              <a:t>THE ANSWER</a:t>
+              <a:t>THE INSTRUMENT, LIVE</a:t>
             </a:r>
             <a:endParaRPr lang="en-US" sz="1100" dirty="0"/>
           </a:p>
@@ -12873,8 +12873,8 @@
         </p:blipFill>
         <p:spPr>
           <a:xfrm>
-            <a:off x="1295400" y="1200404"/>
-            <a:ext cx="9602251" cy="5221224"/>
+            <a:off x="1628184" y="1615202"/>
+            <a:ext cx="8935632" cy="4858750"/>
           </a:xfrm>
           <a:prstGeom prst="rect">
             <a:avLst/>
@@ -12915,6 +12915,50 @@
               <a:t>5</a:t>
             </a:fld>
             <a:endParaRPr lang="en-US" sz="850" dirty="0"/>
+          </a:p>
+        </p:txBody>
+      </p:sp>
+      <p:sp>
+        <p:nvSpPr>
+          <p:cNvPr id="6" name="Text 4">
+            <a:extLst>
+              <a:ext uri="{FF2B5EF4-FFF2-40B4-BE49-F238E27FC236}">
+                <a16:creationId xmlns:a16="http://schemas.microsoft.com/office/drawing/2014/main" id="{0D3B02C3-889A-6651-BFB4-46C9255456CB}"/>
+              </a:ext>
+            </a:extLst>
+          </p:cNvPr>
+          <p:cNvSpPr/>
+          <p:nvPr/>
+        </p:nvSpPr>
+        <p:spPr>
+          <a:xfrm>
+            <a:off x="566928" y="1261872"/>
+            <a:ext cx="7772400" cy="365760"/>
+          </a:xfrm>
+          <a:prstGeom prst="rect">
+            <a:avLst/>
+          </a:prstGeom>
+          <a:noFill/>
+          <a:ln/>
+        </p:spPr>
+        <p:txBody>
+          <a:bodyPr wrap="square" lIns="0" tIns="0" rIns="0" bIns="0" rtlCol="0" anchor="ctr"/>
+          <a:lstStyle/>
+          <a:p>
+            <a:pPr marL="0" indent="0">
+              <a:buNone/>
+            </a:pPr>
+            <a:r>
+              <a:rPr lang="en-US" sz="1600" b="0" i="0" dirty="0">
+                <a:solidFill>
+                  <a:srgbClr val="0A0A0A"/>
+                </a:solidFill>
+                <a:effectLst/>
+                <a:latin typeface="Anthropic Sans"/>
+              </a:rPr>
+              <a:t>Live B210 at 1420 MHz: three weak test signals above a sub-dB noise floor</a:t>
+            </a:r>
+            <a:endParaRPr lang="en-US" sz="1600" dirty="0"/>
           </a:p>
         </p:txBody>
       </p:sp>

--- a/reports/sara-2026/Lowering_the_Barrier_to_Radio_Astronomy_SARA_2026.pptx
+++ b/reports/sara-2026/Lowering_the_Barrier_to_Radio_Astronomy_SARA_2026.pptx
@@ -3,28 +3,30 @@
 <p:presentation xmlns:a="http://schemas.openxmlformats.org/drawingml/2006/main" xmlns:r="http://schemas.openxmlformats.org/officeDocument/2006/relationships" xmlns:p="http://schemas.openxmlformats.org/presentationml/2006/main" showSpecialPlsOnTitleSld="0" saveSubsetFonts="1" autoCompressPictures="0">
   <p:sldMasterIdLst>
     <p:sldMasterId id="2147483648" r:id="rId1"/>
+    <p:sldMasterId id="2147483650" r:id="rId2"/>
   </p:sldMasterIdLst>
   <p:notesMasterIdLst>
-    <p:notesMasterId r:id="rId19"/>
+    <p:notesMasterId r:id="rId21"/>
   </p:notesMasterIdLst>
   <p:sldIdLst>
-    <p:sldId id="256" r:id="rId2"/>
-    <p:sldId id="257" r:id="rId3"/>
-    <p:sldId id="258" r:id="rId4"/>
-    <p:sldId id="259" r:id="rId5"/>
-    <p:sldId id="273" r:id="rId6"/>
-    <p:sldId id="260" r:id="rId7"/>
-    <p:sldId id="261" r:id="rId8"/>
-    <p:sldId id="262" r:id="rId9"/>
-    <p:sldId id="263" r:id="rId10"/>
-    <p:sldId id="264" r:id="rId11"/>
-    <p:sldId id="265" r:id="rId12"/>
-    <p:sldId id="266" r:id="rId13"/>
-    <p:sldId id="267" r:id="rId14"/>
-    <p:sldId id="268" r:id="rId15"/>
-    <p:sldId id="269" r:id="rId16"/>
-    <p:sldId id="270" r:id="rId17"/>
-    <p:sldId id="271" r:id="rId18"/>
+    <p:sldId id="256" r:id="rId3"/>
+    <p:sldId id="257" r:id="rId4"/>
+    <p:sldId id="258" r:id="rId5"/>
+    <p:sldId id="259" r:id="rId6"/>
+    <p:sldId id="273" r:id="rId7"/>
+    <p:sldId id="260" r:id="rId8"/>
+    <p:sldId id="261" r:id="rId9"/>
+    <p:sldId id="262" r:id="rId10"/>
+    <p:sldId id="263" r:id="rId11"/>
+    <p:sldId id="264" r:id="rId12"/>
+    <p:sldId id="265" r:id="rId13"/>
+    <p:sldId id="266" r:id="rId14"/>
+    <p:sldId id="267" r:id="rId15"/>
+    <p:sldId id="268" r:id="rId16"/>
+    <p:sldId id="269" r:id="rId17"/>
+    <p:sldId id="270" r:id="rId18"/>
+    <p:sldId id="274" r:id="rId19"/>
+    <p:sldId id="271" r:id="rId20"/>
   </p:sldIdLst>
   <p:sldSz cx="12192000" cy="6858000"/>
   <p:notesSz cx="6858000" cy="12192000"/>
@@ -1017,7 +1019,7 @@
           <a:p>
             <a:fld id="{F7021451-1387-4CA6-816F-3879F97B5CBC}" type="slidenum">
               <a:rPr lang="en-US"/>
-              <a:t>17</a:t>
+              <a:t>18</a:t>
             </a:fld>
             <a:endParaRPr lang="en-US"/>
           </a:p>
@@ -1825,6 +1827,1606 @@
         </p:txBody>
       </p:sp>
     </p:spTree>
+  </p:cSld>
+  <p:clrMapOvr>
+    <a:masterClrMapping/>
+  </p:clrMapOvr>
+</p:sldLayout>
+</file>
+
+<file path=ppt/slideLayouts/slideLayout2.xml><?xml version="1.0" encoding="utf-8"?>
+<p:sldLayout xmlns:a="http://schemas.openxmlformats.org/drawingml/2006/main" xmlns:r="http://schemas.openxmlformats.org/officeDocument/2006/relationships" xmlns:p="http://schemas.openxmlformats.org/presentationml/2006/main" type="obj" preserve="1">
+  <p:cSld name="Title Slide">
+    <p:spTree>
+      <p:nvGrpSpPr>
+        <p:cNvPr id="1" name=""/>
+        <p:cNvGrpSpPr/>
+        <p:nvPr/>
+      </p:nvGrpSpPr>
+      <p:grpSpPr>
+        <a:xfrm>
+          <a:off x="0" y="0"/>
+          <a:ext cx="0" cy="0"/>
+          <a:chOff x="0" y="0"/>
+          <a:chExt cx="0" cy="0"/>
+        </a:xfrm>
+      </p:grpSpPr>
+      <p:sp>
+        <p:nvSpPr>
+          <p:cNvPr id="2" name="Holder 2"/>
+          <p:cNvSpPr>
+            <a:spLocks noGrp="1"/>
+          </p:cNvSpPr>
+          <p:nvPr>
+            <p:ph type="ctrTitle"/>
+          </p:nvPr>
+        </p:nvSpPr>
+        <p:spPr>
+          <a:xfrm>
+            <a:off x="914400" y="2125980"/>
+            <a:ext cx="10363200" cy="1440180"/>
+          </a:xfrm>
+          <a:prstGeom prst="rect">
+            <a:avLst/>
+          </a:prstGeom>
+        </p:spPr>
+        <p:txBody>
+          <a:bodyPr wrap="square" lIns="0" tIns="0" rIns="0" bIns="0">
+            <a:spAutoFit/>
+          </a:bodyPr>
+          <a:lstStyle>
+            <a:lvl1pPr>
+              <a:defRPr sz="2600" b="1" i="0">
+                <a:solidFill>
+                  <a:srgbClr val="0A2F40"/>
+                </a:solidFill>
+                <a:latin typeface="Cambria"/>
+                <a:cs typeface="Cambria"/>
+              </a:defRPr>
+            </a:lvl1pPr>
+          </a:lstStyle>
+          <a:p>
+            <a:endParaRPr/>
+          </a:p>
+        </p:txBody>
+      </p:sp>
+      <p:sp>
+        <p:nvSpPr>
+          <p:cNvPr id="3" name="Holder 3"/>
+          <p:cNvSpPr>
+            <a:spLocks noGrp="1"/>
+          </p:cNvSpPr>
+          <p:nvPr>
+            <p:ph type="subTitle" idx="4"/>
+          </p:nvPr>
+        </p:nvSpPr>
+        <p:spPr>
+          <a:xfrm>
+            <a:off x="1828800" y="3840480"/>
+            <a:ext cx="8534400" cy="1714500"/>
+          </a:xfrm>
+          <a:prstGeom prst="rect">
+            <a:avLst/>
+          </a:prstGeom>
+        </p:spPr>
+        <p:txBody>
+          <a:bodyPr wrap="square" lIns="0" tIns="0" rIns="0" bIns="0">
+            <a:spAutoFit/>
+          </a:bodyPr>
+          <a:lstStyle>
+            <a:lvl1pPr>
+              <a:defRPr sz="1250" b="0" i="0">
+                <a:solidFill>
+                  <a:srgbClr val="24333B"/>
+                </a:solidFill>
+                <a:latin typeface="Calibri"/>
+                <a:cs typeface="Calibri"/>
+              </a:defRPr>
+            </a:lvl1pPr>
+          </a:lstStyle>
+          <a:p>
+            <a:endParaRPr/>
+          </a:p>
+        </p:txBody>
+      </p:sp>
+      <p:sp>
+        <p:nvSpPr>
+          <p:cNvPr id="4" name="Holder 4"/>
+          <p:cNvSpPr>
+            <a:spLocks noGrp="1"/>
+          </p:cNvSpPr>
+          <p:nvPr>
+            <p:ph type="ftr" sz="quarter" idx="5"/>
+          </p:nvPr>
+        </p:nvSpPr>
+        <p:spPr/>
+        <p:txBody>
+          <a:bodyPr lIns="0" tIns="0" rIns="0" bIns="0"/>
+          <a:lstStyle>
+            <a:lvl1pPr>
+              <a:defRPr sz="900" b="0" i="0">
+                <a:solidFill>
+                  <a:srgbClr val="6A7982"/>
+                </a:solidFill>
+                <a:latin typeface="Calibri"/>
+                <a:cs typeface="Calibri"/>
+              </a:defRPr>
+            </a:lvl1pPr>
+          </a:lstStyle>
+          <a:p>
+            <a:pPr marL="12700">
+              <a:lnSpc>
+                <a:spcPts val="955"/>
+              </a:lnSpc>
+            </a:pPr>
+            <a:r>
+              <a:rPr dirty="0"/>
+              <a:t>DSES</a:t>
+            </a:r>
+            <a:r>
+              <a:rPr spc="-15" dirty="0"/>
+              <a:t> </a:t>
+            </a:r>
+            <a:r>
+              <a:rPr dirty="0"/>
+              <a:t>Spectrum</a:t>
+            </a:r>
+            <a:r>
+              <a:rPr spc="-5" dirty="0"/>
+              <a:t> </a:t>
+            </a:r>
+            <a:r>
+              <a:rPr dirty="0"/>
+              <a:t>Analyzer</a:t>
+            </a:r>
+            <a:r>
+              <a:rPr spc="-5" dirty="0"/>
+              <a:t> </a:t>
+            </a:r>
+            <a:r>
+              <a:rPr dirty="0"/>
+              <a:t>—</a:t>
+            </a:r>
+            <a:r>
+              <a:rPr spc="-10" dirty="0"/>
+              <a:t> gpstime.com/sw_distribution/b210_sa </a:t>
+            </a:r>
+            <a:r>
+              <a:rPr dirty="0"/>
+              <a:t>(free,</a:t>
+            </a:r>
+            <a:r>
+              <a:rPr spc="-5" dirty="0"/>
+              <a:t> </a:t>
+            </a:r>
+            <a:r>
+              <a:rPr dirty="0"/>
+              <a:t>GPL)</a:t>
+            </a:r>
+            <a:r>
+              <a:rPr spc="-15" dirty="0"/>
+              <a:t> </a:t>
+            </a:r>
+            <a:r>
+              <a:rPr dirty="0"/>
+              <a:t>—</a:t>
+            </a:r>
+            <a:r>
+              <a:rPr spc="-10" dirty="0"/>
+              <a:t> </a:t>
+            </a:r>
+            <a:r>
+              <a:rPr dirty="0"/>
+              <a:t>Richard</a:t>
+            </a:r>
+            <a:r>
+              <a:rPr spc="-10" dirty="0"/>
+              <a:t> </a:t>
+            </a:r>
+            <a:r>
+              <a:rPr dirty="0"/>
+              <a:t>Hambly</a:t>
+            </a:r>
+            <a:r>
+              <a:rPr spc="-5" dirty="0"/>
+              <a:t> </a:t>
+            </a:r>
+            <a:r>
+              <a:rPr dirty="0"/>
+              <a:t>K0GD</a:t>
+            </a:r>
+            <a:r>
+              <a:rPr spc="-10" dirty="0"/>
+              <a:t> </a:t>
+            </a:r>
+            <a:r>
+              <a:rPr dirty="0"/>
+              <a:t>—</a:t>
+            </a:r>
+            <a:r>
+              <a:rPr spc="-10" dirty="0"/>
+              <a:t> </a:t>
+            </a:r>
+            <a:r>
+              <a:rPr dirty="0"/>
+              <a:t>SARA</a:t>
+            </a:r>
+            <a:r>
+              <a:rPr spc="-5" dirty="0"/>
+              <a:t> </a:t>
+            </a:r>
+            <a:r>
+              <a:rPr dirty="0"/>
+              <a:t>&amp;</a:t>
+            </a:r>
+            <a:r>
+              <a:rPr spc="-15" dirty="0"/>
+              <a:t> </a:t>
+            </a:r>
+            <a:r>
+              <a:rPr dirty="0"/>
+              <a:t>Radio</a:t>
+            </a:r>
+            <a:r>
+              <a:rPr spc="-10" dirty="0"/>
+              <a:t> </a:t>
+            </a:r>
+            <a:r>
+              <a:rPr dirty="0"/>
+              <a:t>Jove</a:t>
+            </a:r>
+            <a:r>
+              <a:rPr spc="-5" dirty="0"/>
+              <a:t> </a:t>
+            </a:r>
+            <a:r>
+              <a:rPr dirty="0"/>
+              <a:t>Eastern</a:t>
+            </a:r>
+            <a:r>
+              <a:rPr spc="-10" dirty="0"/>
+              <a:t> </a:t>
+            </a:r>
+            <a:r>
+              <a:rPr dirty="0"/>
+              <a:t>Conference</a:t>
+            </a:r>
+            <a:r>
+              <a:rPr spc="-5" dirty="0"/>
+              <a:t> </a:t>
+            </a:r>
+            <a:r>
+              <a:rPr spc="-20" dirty="0"/>
+              <a:t>2026</a:t>
+            </a:r>
+          </a:p>
+        </p:txBody>
+      </p:sp>
+      <p:sp>
+        <p:nvSpPr>
+          <p:cNvPr id="5" name="Holder 5"/>
+          <p:cNvSpPr>
+            <a:spLocks noGrp="1"/>
+          </p:cNvSpPr>
+          <p:nvPr>
+            <p:ph type="dt" sz="half" idx="6"/>
+          </p:nvPr>
+        </p:nvSpPr>
+        <p:spPr/>
+        <p:txBody>
+          <a:bodyPr lIns="0" tIns="0" rIns="0" bIns="0"/>
+          <a:lstStyle>
+            <a:lvl1pPr algn="l">
+              <a:defRPr>
+                <a:solidFill>
+                  <a:schemeClr val="tx1">
+                    <a:tint val="75000"/>
+                  </a:schemeClr>
+                </a:solidFill>
+              </a:defRPr>
+            </a:lvl1pPr>
+          </a:lstStyle>
+          <a:p>
+            <a:fld id="{1D8BD707-D9CF-40AE-B4C6-C98DA3205C09}" type="datetimeFigureOut">
+              <a:rPr lang="en-US"/>
+              <a:t>8/4/2026</a:t>
+            </a:fld>
+            <a:endParaRPr lang="en-US"/>
+          </a:p>
+        </p:txBody>
+      </p:sp>
+      <p:sp>
+        <p:nvSpPr>
+          <p:cNvPr id="6" name="Holder 6"/>
+          <p:cNvSpPr>
+            <a:spLocks noGrp="1"/>
+          </p:cNvSpPr>
+          <p:nvPr>
+            <p:ph type="sldNum" sz="quarter" idx="7"/>
+          </p:nvPr>
+        </p:nvSpPr>
+        <p:spPr/>
+        <p:txBody>
+          <a:bodyPr lIns="0" tIns="0" rIns="0" bIns="0"/>
+          <a:lstStyle>
+            <a:lvl1pPr algn="r">
+              <a:defRPr>
+                <a:solidFill>
+                  <a:schemeClr val="tx1">
+                    <a:tint val="75000"/>
+                  </a:schemeClr>
+                </a:solidFill>
+              </a:defRPr>
+            </a:lvl1pPr>
+          </a:lstStyle>
+          <a:p>
+            <a:fld id="{B6F15528-21DE-4FAA-801E-634DDDAF4B2B}" type="slidenum">
+              <a:t>‹#›</a:t>
+            </a:fld>
+            <a:endParaRPr/>
+          </a:p>
+        </p:txBody>
+      </p:sp>
+    </p:spTree>
+    <p:extLst>
+      <p:ext uri="{BB962C8B-B14F-4D97-AF65-F5344CB8AC3E}">
+        <p14:creationId xmlns:p14="http://schemas.microsoft.com/office/powerpoint/2010/main" val="2122219586"/>
+      </p:ext>
+    </p:extLst>
+  </p:cSld>
+  <p:clrMapOvr>
+    <a:masterClrMapping/>
+  </p:clrMapOvr>
+</p:sldLayout>
+</file>
+
+<file path=ppt/slideLayouts/slideLayout3.xml><?xml version="1.0" encoding="utf-8"?>
+<p:sldLayout xmlns:a="http://schemas.openxmlformats.org/drawingml/2006/main" xmlns:r="http://schemas.openxmlformats.org/officeDocument/2006/relationships" xmlns:p="http://schemas.openxmlformats.org/presentationml/2006/main" type="obj" preserve="1">
+  <p:cSld name="Title and Content">
+    <p:spTree>
+      <p:nvGrpSpPr>
+        <p:cNvPr id="1" name=""/>
+        <p:cNvGrpSpPr/>
+        <p:nvPr/>
+      </p:nvGrpSpPr>
+      <p:grpSpPr>
+        <a:xfrm>
+          <a:off x="0" y="0"/>
+          <a:ext cx="0" cy="0"/>
+          <a:chOff x="0" y="0"/>
+          <a:chExt cx="0" cy="0"/>
+        </a:xfrm>
+      </p:grpSpPr>
+      <p:sp>
+        <p:nvSpPr>
+          <p:cNvPr id="2" name="Holder 2"/>
+          <p:cNvSpPr>
+            <a:spLocks noGrp="1"/>
+          </p:cNvSpPr>
+          <p:nvPr>
+            <p:ph type="title"/>
+          </p:nvPr>
+        </p:nvSpPr>
+        <p:spPr/>
+        <p:txBody>
+          <a:bodyPr lIns="0" tIns="0" rIns="0" bIns="0"/>
+          <a:lstStyle>
+            <a:lvl1pPr>
+              <a:defRPr sz="2600" b="1" i="0">
+                <a:solidFill>
+                  <a:srgbClr val="0A2F40"/>
+                </a:solidFill>
+                <a:latin typeface="Cambria"/>
+                <a:cs typeface="Cambria"/>
+              </a:defRPr>
+            </a:lvl1pPr>
+          </a:lstStyle>
+          <a:p>
+            <a:endParaRPr/>
+          </a:p>
+        </p:txBody>
+      </p:sp>
+      <p:sp>
+        <p:nvSpPr>
+          <p:cNvPr id="3" name="Holder 3"/>
+          <p:cNvSpPr>
+            <a:spLocks noGrp="1"/>
+          </p:cNvSpPr>
+          <p:nvPr>
+            <p:ph type="body" idx="1"/>
+          </p:nvPr>
+        </p:nvSpPr>
+        <p:spPr/>
+        <p:txBody>
+          <a:bodyPr lIns="0" tIns="0" rIns="0" bIns="0"/>
+          <a:lstStyle>
+            <a:lvl1pPr>
+              <a:defRPr sz="1250" b="0" i="0">
+                <a:solidFill>
+                  <a:srgbClr val="24333B"/>
+                </a:solidFill>
+                <a:latin typeface="Calibri"/>
+                <a:cs typeface="Calibri"/>
+              </a:defRPr>
+            </a:lvl1pPr>
+          </a:lstStyle>
+          <a:p>
+            <a:endParaRPr/>
+          </a:p>
+        </p:txBody>
+      </p:sp>
+      <p:sp>
+        <p:nvSpPr>
+          <p:cNvPr id="4" name="Holder 4"/>
+          <p:cNvSpPr>
+            <a:spLocks noGrp="1"/>
+          </p:cNvSpPr>
+          <p:nvPr>
+            <p:ph type="ftr" sz="quarter" idx="5"/>
+          </p:nvPr>
+        </p:nvSpPr>
+        <p:spPr/>
+        <p:txBody>
+          <a:bodyPr lIns="0" tIns="0" rIns="0" bIns="0"/>
+          <a:lstStyle>
+            <a:lvl1pPr>
+              <a:defRPr sz="900" b="0" i="0">
+                <a:solidFill>
+                  <a:srgbClr val="6A7982"/>
+                </a:solidFill>
+                <a:latin typeface="Calibri"/>
+                <a:cs typeface="Calibri"/>
+              </a:defRPr>
+            </a:lvl1pPr>
+          </a:lstStyle>
+          <a:p>
+            <a:pPr marL="12700">
+              <a:lnSpc>
+                <a:spcPts val="955"/>
+              </a:lnSpc>
+            </a:pPr>
+            <a:r>
+              <a:rPr dirty="0"/>
+              <a:t>DSES</a:t>
+            </a:r>
+            <a:r>
+              <a:rPr spc="-15" dirty="0"/>
+              <a:t> </a:t>
+            </a:r>
+            <a:r>
+              <a:rPr dirty="0"/>
+              <a:t>Spectrum</a:t>
+            </a:r>
+            <a:r>
+              <a:rPr spc="-5" dirty="0"/>
+              <a:t> </a:t>
+            </a:r>
+            <a:r>
+              <a:rPr dirty="0"/>
+              <a:t>Analyzer</a:t>
+            </a:r>
+            <a:r>
+              <a:rPr spc="-5" dirty="0"/>
+              <a:t> </a:t>
+            </a:r>
+            <a:r>
+              <a:rPr dirty="0"/>
+              <a:t>—</a:t>
+            </a:r>
+            <a:r>
+              <a:rPr spc="-10" dirty="0"/>
+              <a:t> gpstime.com/sw_distribution/b210_sa </a:t>
+            </a:r>
+            <a:r>
+              <a:rPr dirty="0"/>
+              <a:t>(free,</a:t>
+            </a:r>
+            <a:r>
+              <a:rPr spc="-5" dirty="0"/>
+              <a:t> </a:t>
+            </a:r>
+            <a:r>
+              <a:rPr dirty="0"/>
+              <a:t>GPL)</a:t>
+            </a:r>
+            <a:r>
+              <a:rPr spc="-15" dirty="0"/>
+              <a:t> </a:t>
+            </a:r>
+            <a:r>
+              <a:rPr dirty="0"/>
+              <a:t>—</a:t>
+            </a:r>
+            <a:r>
+              <a:rPr spc="-10" dirty="0"/>
+              <a:t> </a:t>
+            </a:r>
+            <a:r>
+              <a:rPr dirty="0"/>
+              <a:t>Richard</a:t>
+            </a:r>
+            <a:r>
+              <a:rPr spc="-10" dirty="0"/>
+              <a:t> </a:t>
+            </a:r>
+            <a:r>
+              <a:rPr dirty="0"/>
+              <a:t>Hambly</a:t>
+            </a:r>
+            <a:r>
+              <a:rPr spc="-5" dirty="0"/>
+              <a:t> </a:t>
+            </a:r>
+            <a:r>
+              <a:rPr dirty="0"/>
+              <a:t>K0GD</a:t>
+            </a:r>
+            <a:r>
+              <a:rPr spc="-10" dirty="0"/>
+              <a:t> </a:t>
+            </a:r>
+            <a:r>
+              <a:rPr dirty="0"/>
+              <a:t>—</a:t>
+            </a:r>
+            <a:r>
+              <a:rPr spc="-10" dirty="0"/>
+              <a:t> </a:t>
+            </a:r>
+            <a:r>
+              <a:rPr dirty="0"/>
+              <a:t>SARA</a:t>
+            </a:r>
+            <a:r>
+              <a:rPr spc="-5" dirty="0"/>
+              <a:t> </a:t>
+            </a:r>
+            <a:r>
+              <a:rPr dirty="0"/>
+              <a:t>&amp;</a:t>
+            </a:r>
+            <a:r>
+              <a:rPr spc="-15" dirty="0"/>
+              <a:t> </a:t>
+            </a:r>
+            <a:r>
+              <a:rPr dirty="0"/>
+              <a:t>Radio</a:t>
+            </a:r>
+            <a:r>
+              <a:rPr spc="-10" dirty="0"/>
+              <a:t> </a:t>
+            </a:r>
+            <a:r>
+              <a:rPr dirty="0"/>
+              <a:t>Jove</a:t>
+            </a:r>
+            <a:r>
+              <a:rPr spc="-5" dirty="0"/>
+              <a:t> </a:t>
+            </a:r>
+            <a:r>
+              <a:rPr dirty="0"/>
+              <a:t>Eastern</a:t>
+            </a:r>
+            <a:r>
+              <a:rPr spc="-10" dirty="0"/>
+              <a:t> </a:t>
+            </a:r>
+            <a:r>
+              <a:rPr dirty="0"/>
+              <a:t>Conference</a:t>
+            </a:r>
+            <a:r>
+              <a:rPr spc="-5" dirty="0"/>
+              <a:t> </a:t>
+            </a:r>
+            <a:r>
+              <a:rPr spc="-20" dirty="0"/>
+              <a:t>2026</a:t>
+            </a:r>
+          </a:p>
+        </p:txBody>
+      </p:sp>
+      <p:sp>
+        <p:nvSpPr>
+          <p:cNvPr id="5" name="Holder 5"/>
+          <p:cNvSpPr>
+            <a:spLocks noGrp="1"/>
+          </p:cNvSpPr>
+          <p:nvPr>
+            <p:ph type="dt" sz="half" idx="6"/>
+          </p:nvPr>
+        </p:nvSpPr>
+        <p:spPr/>
+        <p:txBody>
+          <a:bodyPr lIns="0" tIns="0" rIns="0" bIns="0"/>
+          <a:lstStyle>
+            <a:lvl1pPr algn="l">
+              <a:defRPr>
+                <a:solidFill>
+                  <a:schemeClr val="tx1">
+                    <a:tint val="75000"/>
+                  </a:schemeClr>
+                </a:solidFill>
+              </a:defRPr>
+            </a:lvl1pPr>
+          </a:lstStyle>
+          <a:p>
+            <a:fld id="{1D8BD707-D9CF-40AE-B4C6-C98DA3205C09}" type="datetimeFigureOut">
+              <a:rPr lang="en-US"/>
+              <a:t>8/4/2026</a:t>
+            </a:fld>
+            <a:endParaRPr lang="en-US"/>
+          </a:p>
+        </p:txBody>
+      </p:sp>
+      <p:sp>
+        <p:nvSpPr>
+          <p:cNvPr id="6" name="Holder 6"/>
+          <p:cNvSpPr>
+            <a:spLocks noGrp="1"/>
+          </p:cNvSpPr>
+          <p:nvPr>
+            <p:ph type="sldNum" sz="quarter" idx="7"/>
+          </p:nvPr>
+        </p:nvSpPr>
+        <p:spPr/>
+        <p:txBody>
+          <a:bodyPr lIns="0" tIns="0" rIns="0" bIns="0"/>
+          <a:lstStyle>
+            <a:lvl1pPr algn="r">
+              <a:defRPr>
+                <a:solidFill>
+                  <a:schemeClr val="tx1">
+                    <a:tint val="75000"/>
+                  </a:schemeClr>
+                </a:solidFill>
+              </a:defRPr>
+            </a:lvl1pPr>
+          </a:lstStyle>
+          <a:p>
+            <a:fld id="{B6F15528-21DE-4FAA-801E-634DDDAF4B2B}" type="slidenum">
+              <a:t>‹#›</a:t>
+            </a:fld>
+            <a:endParaRPr/>
+          </a:p>
+        </p:txBody>
+      </p:sp>
+    </p:spTree>
+    <p:extLst>
+      <p:ext uri="{BB962C8B-B14F-4D97-AF65-F5344CB8AC3E}">
+        <p14:creationId xmlns:p14="http://schemas.microsoft.com/office/powerpoint/2010/main" val="816494"/>
+      </p:ext>
+    </p:extLst>
+  </p:cSld>
+  <p:clrMapOvr>
+    <a:masterClrMapping/>
+  </p:clrMapOvr>
+</p:sldLayout>
+</file>
+
+<file path=ppt/slideLayouts/slideLayout4.xml><?xml version="1.0" encoding="utf-8"?>
+<p:sldLayout xmlns:a="http://schemas.openxmlformats.org/drawingml/2006/main" xmlns:r="http://schemas.openxmlformats.org/officeDocument/2006/relationships" xmlns:p="http://schemas.openxmlformats.org/presentationml/2006/main" type="obj" preserve="1">
+  <p:cSld name="Two Content">
+    <p:spTree>
+      <p:nvGrpSpPr>
+        <p:cNvPr id="1" name=""/>
+        <p:cNvGrpSpPr/>
+        <p:nvPr/>
+      </p:nvGrpSpPr>
+      <p:grpSpPr>
+        <a:xfrm>
+          <a:off x="0" y="0"/>
+          <a:ext cx="0" cy="0"/>
+          <a:chOff x="0" y="0"/>
+          <a:chExt cx="0" cy="0"/>
+        </a:xfrm>
+      </p:grpSpPr>
+      <p:sp>
+        <p:nvSpPr>
+          <p:cNvPr id="2" name="Holder 2"/>
+          <p:cNvSpPr>
+            <a:spLocks noGrp="1"/>
+          </p:cNvSpPr>
+          <p:nvPr>
+            <p:ph type="title"/>
+          </p:nvPr>
+        </p:nvSpPr>
+        <p:spPr/>
+        <p:txBody>
+          <a:bodyPr lIns="0" tIns="0" rIns="0" bIns="0"/>
+          <a:lstStyle>
+            <a:lvl1pPr>
+              <a:defRPr sz="2600" b="1" i="0">
+                <a:solidFill>
+                  <a:srgbClr val="0A2F40"/>
+                </a:solidFill>
+                <a:latin typeface="Cambria"/>
+                <a:cs typeface="Cambria"/>
+              </a:defRPr>
+            </a:lvl1pPr>
+          </a:lstStyle>
+          <a:p>
+            <a:endParaRPr/>
+          </a:p>
+        </p:txBody>
+      </p:sp>
+      <p:sp>
+        <p:nvSpPr>
+          <p:cNvPr id="3" name="Holder 3"/>
+          <p:cNvSpPr>
+            <a:spLocks noGrp="1"/>
+          </p:cNvSpPr>
+          <p:nvPr>
+            <p:ph sz="half" idx="2"/>
+          </p:nvPr>
+        </p:nvSpPr>
+        <p:spPr>
+          <a:xfrm>
+            <a:off x="609600" y="1577340"/>
+            <a:ext cx="5303520" cy="4526280"/>
+          </a:xfrm>
+          <a:prstGeom prst="rect">
+            <a:avLst/>
+          </a:prstGeom>
+        </p:spPr>
+        <p:txBody>
+          <a:bodyPr wrap="square" lIns="0" tIns="0" rIns="0" bIns="0">
+            <a:spAutoFit/>
+          </a:bodyPr>
+          <a:lstStyle>
+            <a:lvl1pPr>
+              <a:defRPr/>
+            </a:lvl1pPr>
+          </a:lstStyle>
+          <a:p>
+            <a:endParaRPr/>
+          </a:p>
+        </p:txBody>
+      </p:sp>
+      <p:sp>
+        <p:nvSpPr>
+          <p:cNvPr id="4" name="Holder 4"/>
+          <p:cNvSpPr>
+            <a:spLocks noGrp="1"/>
+          </p:cNvSpPr>
+          <p:nvPr>
+            <p:ph sz="half" idx="3"/>
+          </p:nvPr>
+        </p:nvSpPr>
+        <p:spPr>
+          <a:xfrm>
+            <a:off x="6278880" y="1577340"/>
+            <a:ext cx="5303520" cy="4526280"/>
+          </a:xfrm>
+          <a:prstGeom prst="rect">
+            <a:avLst/>
+          </a:prstGeom>
+        </p:spPr>
+        <p:txBody>
+          <a:bodyPr wrap="square" lIns="0" tIns="0" rIns="0" bIns="0">
+            <a:spAutoFit/>
+          </a:bodyPr>
+          <a:lstStyle>
+            <a:lvl1pPr>
+              <a:defRPr/>
+            </a:lvl1pPr>
+          </a:lstStyle>
+          <a:p>
+            <a:endParaRPr/>
+          </a:p>
+        </p:txBody>
+      </p:sp>
+      <p:sp>
+        <p:nvSpPr>
+          <p:cNvPr id="5" name="Holder 5"/>
+          <p:cNvSpPr>
+            <a:spLocks noGrp="1"/>
+          </p:cNvSpPr>
+          <p:nvPr>
+            <p:ph type="ftr" sz="quarter" idx="5"/>
+          </p:nvPr>
+        </p:nvSpPr>
+        <p:spPr/>
+        <p:txBody>
+          <a:bodyPr lIns="0" tIns="0" rIns="0" bIns="0"/>
+          <a:lstStyle>
+            <a:lvl1pPr>
+              <a:defRPr sz="900" b="0" i="0">
+                <a:solidFill>
+                  <a:srgbClr val="6A7982"/>
+                </a:solidFill>
+                <a:latin typeface="Calibri"/>
+                <a:cs typeface="Calibri"/>
+              </a:defRPr>
+            </a:lvl1pPr>
+          </a:lstStyle>
+          <a:p>
+            <a:pPr marL="12700">
+              <a:lnSpc>
+                <a:spcPts val="955"/>
+              </a:lnSpc>
+            </a:pPr>
+            <a:r>
+              <a:rPr dirty="0"/>
+              <a:t>DSES</a:t>
+            </a:r>
+            <a:r>
+              <a:rPr spc="-15" dirty="0"/>
+              <a:t> </a:t>
+            </a:r>
+            <a:r>
+              <a:rPr dirty="0"/>
+              <a:t>Spectrum</a:t>
+            </a:r>
+            <a:r>
+              <a:rPr spc="-5" dirty="0"/>
+              <a:t> </a:t>
+            </a:r>
+            <a:r>
+              <a:rPr dirty="0"/>
+              <a:t>Analyzer</a:t>
+            </a:r>
+            <a:r>
+              <a:rPr spc="-5" dirty="0"/>
+              <a:t> </a:t>
+            </a:r>
+            <a:r>
+              <a:rPr dirty="0"/>
+              <a:t>—</a:t>
+            </a:r>
+            <a:r>
+              <a:rPr spc="-10" dirty="0"/>
+              <a:t> gpstime.com/sw_distribution/b210_sa </a:t>
+            </a:r>
+            <a:r>
+              <a:rPr dirty="0"/>
+              <a:t>(free,</a:t>
+            </a:r>
+            <a:r>
+              <a:rPr spc="-5" dirty="0"/>
+              <a:t> </a:t>
+            </a:r>
+            <a:r>
+              <a:rPr dirty="0"/>
+              <a:t>GPL)</a:t>
+            </a:r>
+            <a:r>
+              <a:rPr spc="-15" dirty="0"/>
+              <a:t> </a:t>
+            </a:r>
+            <a:r>
+              <a:rPr dirty="0"/>
+              <a:t>—</a:t>
+            </a:r>
+            <a:r>
+              <a:rPr spc="-10" dirty="0"/>
+              <a:t> </a:t>
+            </a:r>
+            <a:r>
+              <a:rPr dirty="0"/>
+              <a:t>Richard</a:t>
+            </a:r>
+            <a:r>
+              <a:rPr spc="-10" dirty="0"/>
+              <a:t> </a:t>
+            </a:r>
+            <a:r>
+              <a:rPr dirty="0"/>
+              <a:t>Hambly</a:t>
+            </a:r>
+            <a:r>
+              <a:rPr spc="-5" dirty="0"/>
+              <a:t> </a:t>
+            </a:r>
+            <a:r>
+              <a:rPr dirty="0"/>
+              <a:t>K0GD</a:t>
+            </a:r>
+            <a:r>
+              <a:rPr spc="-10" dirty="0"/>
+              <a:t> </a:t>
+            </a:r>
+            <a:r>
+              <a:rPr dirty="0"/>
+              <a:t>—</a:t>
+            </a:r>
+            <a:r>
+              <a:rPr spc="-10" dirty="0"/>
+              <a:t> </a:t>
+            </a:r>
+            <a:r>
+              <a:rPr dirty="0"/>
+              <a:t>SARA</a:t>
+            </a:r>
+            <a:r>
+              <a:rPr spc="-5" dirty="0"/>
+              <a:t> </a:t>
+            </a:r>
+            <a:r>
+              <a:rPr dirty="0"/>
+              <a:t>&amp;</a:t>
+            </a:r>
+            <a:r>
+              <a:rPr spc="-15" dirty="0"/>
+              <a:t> </a:t>
+            </a:r>
+            <a:r>
+              <a:rPr dirty="0"/>
+              <a:t>Radio</a:t>
+            </a:r>
+            <a:r>
+              <a:rPr spc="-10" dirty="0"/>
+              <a:t> </a:t>
+            </a:r>
+            <a:r>
+              <a:rPr dirty="0"/>
+              <a:t>Jove</a:t>
+            </a:r>
+            <a:r>
+              <a:rPr spc="-5" dirty="0"/>
+              <a:t> </a:t>
+            </a:r>
+            <a:r>
+              <a:rPr dirty="0"/>
+              <a:t>Eastern</a:t>
+            </a:r>
+            <a:r>
+              <a:rPr spc="-10" dirty="0"/>
+              <a:t> </a:t>
+            </a:r>
+            <a:r>
+              <a:rPr dirty="0"/>
+              <a:t>Conference</a:t>
+            </a:r>
+            <a:r>
+              <a:rPr spc="-5" dirty="0"/>
+              <a:t> </a:t>
+            </a:r>
+            <a:r>
+              <a:rPr spc="-20" dirty="0"/>
+              <a:t>2026</a:t>
+            </a:r>
+          </a:p>
+        </p:txBody>
+      </p:sp>
+      <p:sp>
+        <p:nvSpPr>
+          <p:cNvPr id="6" name="Holder 6"/>
+          <p:cNvSpPr>
+            <a:spLocks noGrp="1"/>
+          </p:cNvSpPr>
+          <p:nvPr>
+            <p:ph type="dt" sz="half" idx="6"/>
+          </p:nvPr>
+        </p:nvSpPr>
+        <p:spPr/>
+        <p:txBody>
+          <a:bodyPr lIns="0" tIns="0" rIns="0" bIns="0"/>
+          <a:lstStyle>
+            <a:lvl1pPr algn="l">
+              <a:defRPr>
+                <a:solidFill>
+                  <a:schemeClr val="tx1">
+                    <a:tint val="75000"/>
+                  </a:schemeClr>
+                </a:solidFill>
+              </a:defRPr>
+            </a:lvl1pPr>
+          </a:lstStyle>
+          <a:p>
+            <a:fld id="{1D8BD707-D9CF-40AE-B4C6-C98DA3205C09}" type="datetimeFigureOut">
+              <a:rPr lang="en-US"/>
+              <a:t>8/4/2026</a:t>
+            </a:fld>
+            <a:endParaRPr lang="en-US"/>
+          </a:p>
+        </p:txBody>
+      </p:sp>
+      <p:sp>
+        <p:nvSpPr>
+          <p:cNvPr id="7" name="Holder 7"/>
+          <p:cNvSpPr>
+            <a:spLocks noGrp="1"/>
+          </p:cNvSpPr>
+          <p:nvPr>
+            <p:ph type="sldNum" sz="quarter" idx="7"/>
+          </p:nvPr>
+        </p:nvSpPr>
+        <p:spPr/>
+        <p:txBody>
+          <a:bodyPr lIns="0" tIns="0" rIns="0" bIns="0"/>
+          <a:lstStyle>
+            <a:lvl1pPr algn="r">
+              <a:defRPr>
+                <a:solidFill>
+                  <a:schemeClr val="tx1">
+                    <a:tint val="75000"/>
+                  </a:schemeClr>
+                </a:solidFill>
+              </a:defRPr>
+            </a:lvl1pPr>
+          </a:lstStyle>
+          <a:p>
+            <a:fld id="{B6F15528-21DE-4FAA-801E-634DDDAF4B2B}" type="slidenum">
+              <a:t>‹#›</a:t>
+            </a:fld>
+            <a:endParaRPr/>
+          </a:p>
+        </p:txBody>
+      </p:sp>
+    </p:spTree>
+    <p:extLst>
+      <p:ext uri="{BB962C8B-B14F-4D97-AF65-F5344CB8AC3E}">
+        <p14:creationId xmlns:p14="http://schemas.microsoft.com/office/powerpoint/2010/main" val="1494827954"/>
+      </p:ext>
+    </p:extLst>
+  </p:cSld>
+  <p:clrMapOvr>
+    <a:masterClrMapping/>
+  </p:clrMapOvr>
+</p:sldLayout>
+</file>
+
+<file path=ppt/slideLayouts/slideLayout5.xml><?xml version="1.0" encoding="utf-8"?>
+<p:sldLayout xmlns:a="http://schemas.openxmlformats.org/drawingml/2006/main" xmlns:r="http://schemas.openxmlformats.org/officeDocument/2006/relationships" xmlns:p="http://schemas.openxmlformats.org/presentationml/2006/main" type="obj" preserve="1">
+  <p:cSld name="Title Only">
+    <p:spTree>
+      <p:nvGrpSpPr>
+        <p:cNvPr id="1" name=""/>
+        <p:cNvGrpSpPr/>
+        <p:nvPr/>
+      </p:nvGrpSpPr>
+      <p:grpSpPr>
+        <a:xfrm>
+          <a:off x="0" y="0"/>
+          <a:ext cx="0" cy="0"/>
+          <a:chOff x="0" y="0"/>
+          <a:chExt cx="0" cy="0"/>
+        </a:xfrm>
+      </p:grpSpPr>
+      <p:sp>
+        <p:nvSpPr>
+          <p:cNvPr id="2" name="Holder 2"/>
+          <p:cNvSpPr>
+            <a:spLocks noGrp="1"/>
+          </p:cNvSpPr>
+          <p:nvPr>
+            <p:ph type="title"/>
+          </p:nvPr>
+        </p:nvSpPr>
+        <p:spPr/>
+        <p:txBody>
+          <a:bodyPr lIns="0" tIns="0" rIns="0" bIns="0"/>
+          <a:lstStyle>
+            <a:lvl1pPr>
+              <a:defRPr sz="2600" b="1" i="0">
+                <a:solidFill>
+                  <a:srgbClr val="0A2F40"/>
+                </a:solidFill>
+                <a:latin typeface="Cambria"/>
+                <a:cs typeface="Cambria"/>
+              </a:defRPr>
+            </a:lvl1pPr>
+          </a:lstStyle>
+          <a:p>
+            <a:endParaRPr/>
+          </a:p>
+        </p:txBody>
+      </p:sp>
+      <p:sp>
+        <p:nvSpPr>
+          <p:cNvPr id="3" name="Holder 3"/>
+          <p:cNvSpPr>
+            <a:spLocks noGrp="1"/>
+          </p:cNvSpPr>
+          <p:nvPr>
+            <p:ph type="ftr" sz="quarter" idx="5"/>
+          </p:nvPr>
+        </p:nvSpPr>
+        <p:spPr/>
+        <p:txBody>
+          <a:bodyPr lIns="0" tIns="0" rIns="0" bIns="0"/>
+          <a:lstStyle>
+            <a:lvl1pPr>
+              <a:defRPr sz="900" b="0" i="0">
+                <a:solidFill>
+                  <a:srgbClr val="6A7982"/>
+                </a:solidFill>
+                <a:latin typeface="Calibri"/>
+                <a:cs typeface="Calibri"/>
+              </a:defRPr>
+            </a:lvl1pPr>
+          </a:lstStyle>
+          <a:p>
+            <a:pPr marL="12700">
+              <a:lnSpc>
+                <a:spcPts val="955"/>
+              </a:lnSpc>
+            </a:pPr>
+            <a:r>
+              <a:rPr dirty="0"/>
+              <a:t>DSES</a:t>
+            </a:r>
+            <a:r>
+              <a:rPr spc="-15" dirty="0"/>
+              <a:t> </a:t>
+            </a:r>
+            <a:r>
+              <a:rPr dirty="0"/>
+              <a:t>Spectrum</a:t>
+            </a:r>
+            <a:r>
+              <a:rPr spc="-5" dirty="0"/>
+              <a:t> </a:t>
+            </a:r>
+            <a:r>
+              <a:rPr dirty="0"/>
+              <a:t>Analyzer</a:t>
+            </a:r>
+            <a:r>
+              <a:rPr spc="-5" dirty="0"/>
+              <a:t> </a:t>
+            </a:r>
+            <a:r>
+              <a:rPr dirty="0"/>
+              <a:t>—</a:t>
+            </a:r>
+            <a:r>
+              <a:rPr spc="-10" dirty="0"/>
+              <a:t> gpstime.com/sw_distribution/b210_sa </a:t>
+            </a:r>
+            <a:r>
+              <a:rPr dirty="0"/>
+              <a:t>(free,</a:t>
+            </a:r>
+            <a:r>
+              <a:rPr spc="-5" dirty="0"/>
+              <a:t> </a:t>
+            </a:r>
+            <a:r>
+              <a:rPr dirty="0"/>
+              <a:t>GPL)</a:t>
+            </a:r>
+            <a:r>
+              <a:rPr spc="-15" dirty="0"/>
+              <a:t> </a:t>
+            </a:r>
+            <a:r>
+              <a:rPr dirty="0"/>
+              <a:t>—</a:t>
+            </a:r>
+            <a:r>
+              <a:rPr spc="-10" dirty="0"/>
+              <a:t> </a:t>
+            </a:r>
+            <a:r>
+              <a:rPr dirty="0"/>
+              <a:t>Richard</a:t>
+            </a:r>
+            <a:r>
+              <a:rPr spc="-10" dirty="0"/>
+              <a:t> </a:t>
+            </a:r>
+            <a:r>
+              <a:rPr dirty="0"/>
+              <a:t>Hambly</a:t>
+            </a:r>
+            <a:r>
+              <a:rPr spc="-5" dirty="0"/>
+              <a:t> </a:t>
+            </a:r>
+            <a:r>
+              <a:rPr dirty="0"/>
+              <a:t>K0GD</a:t>
+            </a:r>
+            <a:r>
+              <a:rPr spc="-10" dirty="0"/>
+              <a:t> </a:t>
+            </a:r>
+            <a:r>
+              <a:rPr dirty="0"/>
+              <a:t>—</a:t>
+            </a:r>
+            <a:r>
+              <a:rPr spc="-10" dirty="0"/>
+              <a:t> </a:t>
+            </a:r>
+            <a:r>
+              <a:rPr dirty="0"/>
+              <a:t>SARA</a:t>
+            </a:r>
+            <a:r>
+              <a:rPr spc="-5" dirty="0"/>
+              <a:t> </a:t>
+            </a:r>
+            <a:r>
+              <a:rPr dirty="0"/>
+              <a:t>&amp;</a:t>
+            </a:r>
+            <a:r>
+              <a:rPr spc="-15" dirty="0"/>
+              <a:t> </a:t>
+            </a:r>
+            <a:r>
+              <a:rPr dirty="0"/>
+              <a:t>Radio</a:t>
+            </a:r>
+            <a:r>
+              <a:rPr spc="-10" dirty="0"/>
+              <a:t> </a:t>
+            </a:r>
+            <a:r>
+              <a:rPr dirty="0"/>
+              <a:t>Jove</a:t>
+            </a:r>
+            <a:r>
+              <a:rPr spc="-5" dirty="0"/>
+              <a:t> </a:t>
+            </a:r>
+            <a:r>
+              <a:rPr dirty="0"/>
+              <a:t>Eastern</a:t>
+            </a:r>
+            <a:r>
+              <a:rPr spc="-10" dirty="0"/>
+              <a:t> </a:t>
+            </a:r>
+            <a:r>
+              <a:rPr dirty="0"/>
+              <a:t>Conference</a:t>
+            </a:r>
+            <a:r>
+              <a:rPr spc="-5" dirty="0"/>
+              <a:t> </a:t>
+            </a:r>
+            <a:r>
+              <a:rPr spc="-20" dirty="0"/>
+              <a:t>2026</a:t>
+            </a:r>
+          </a:p>
+        </p:txBody>
+      </p:sp>
+      <p:sp>
+        <p:nvSpPr>
+          <p:cNvPr id="4" name="Holder 4"/>
+          <p:cNvSpPr>
+            <a:spLocks noGrp="1"/>
+          </p:cNvSpPr>
+          <p:nvPr>
+            <p:ph type="dt" sz="half" idx="6"/>
+          </p:nvPr>
+        </p:nvSpPr>
+        <p:spPr/>
+        <p:txBody>
+          <a:bodyPr lIns="0" tIns="0" rIns="0" bIns="0"/>
+          <a:lstStyle>
+            <a:lvl1pPr algn="l">
+              <a:defRPr>
+                <a:solidFill>
+                  <a:schemeClr val="tx1">
+                    <a:tint val="75000"/>
+                  </a:schemeClr>
+                </a:solidFill>
+              </a:defRPr>
+            </a:lvl1pPr>
+          </a:lstStyle>
+          <a:p>
+            <a:fld id="{1D8BD707-D9CF-40AE-B4C6-C98DA3205C09}" type="datetimeFigureOut">
+              <a:rPr lang="en-US"/>
+              <a:t>8/4/2026</a:t>
+            </a:fld>
+            <a:endParaRPr lang="en-US"/>
+          </a:p>
+        </p:txBody>
+      </p:sp>
+      <p:sp>
+        <p:nvSpPr>
+          <p:cNvPr id="5" name="Holder 5"/>
+          <p:cNvSpPr>
+            <a:spLocks noGrp="1"/>
+          </p:cNvSpPr>
+          <p:nvPr>
+            <p:ph type="sldNum" sz="quarter" idx="7"/>
+          </p:nvPr>
+        </p:nvSpPr>
+        <p:spPr/>
+        <p:txBody>
+          <a:bodyPr lIns="0" tIns="0" rIns="0" bIns="0"/>
+          <a:lstStyle>
+            <a:lvl1pPr algn="r">
+              <a:defRPr>
+                <a:solidFill>
+                  <a:schemeClr val="tx1">
+                    <a:tint val="75000"/>
+                  </a:schemeClr>
+                </a:solidFill>
+              </a:defRPr>
+            </a:lvl1pPr>
+          </a:lstStyle>
+          <a:p>
+            <a:fld id="{B6F15528-21DE-4FAA-801E-634DDDAF4B2B}" type="slidenum">
+              <a:t>‹#›</a:t>
+            </a:fld>
+            <a:endParaRPr/>
+          </a:p>
+        </p:txBody>
+      </p:sp>
+    </p:spTree>
+    <p:extLst>
+      <p:ext uri="{BB962C8B-B14F-4D97-AF65-F5344CB8AC3E}">
+        <p14:creationId xmlns:p14="http://schemas.microsoft.com/office/powerpoint/2010/main" val="84988672"/>
+      </p:ext>
+    </p:extLst>
+  </p:cSld>
+  <p:clrMapOvr>
+    <a:masterClrMapping/>
+  </p:clrMapOvr>
+</p:sldLayout>
+</file>
+
+<file path=ppt/slideLayouts/slideLayout6.xml><?xml version="1.0" encoding="utf-8"?>
+<p:sldLayout xmlns:a="http://schemas.openxmlformats.org/drawingml/2006/main" xmlns:r="http://schemas.openxmlformats.org/officeDocument/2006/relationships" xmlns:p="http://schemas.openxmlformats.org/presentationml/2006/main" type="obj" preserve="1">
+  <p:cSld name="Blank">
+    <p:spTree>
+      <p:nvGrpSpPr>
+        <p:cNvPr id="1" name=""/>
+        <p:cNvGrpSpPr/>
+        <p:nvPr/>
+      </p:nvGrpSpPr>
+      <p:grpSpPr>
+        <a:xfrm>
+          <a:off x="0" y="0"/>
+          <a:ext cx="0" cy="0"/>
+          <a:chOff x="0" y="0"/>
+          <a:chExt cx="0" cy="0"/>
+        </a:xfrm>
+      </p:grpSpPr>
+      <p:sp>
+        <p:nvSpPr>
+          <p:cNvPr id="2" name="Holder 2"/>
+          <p:cNvSpPr>
+            <a:spLocks noGrp="1"/>
+          </p:cNvSpPr>
+          <p:nvPr>
+            <p:ph type="ftr" sz="quarter" idx="5"/>
+          </p:nvPr>
+        </p:nvSpPr>
+        <p:spPr/>
+        <p:txBody>
+          <a:bodyPr lIns="0" tIns="0" rIns="0" bIns="0"/>
+          <a:lstStyle>
+            <a:lvl1pPr>
+              <a:defRPr sz="900" b="0" i="0">
+                <a:solidFill>
+                  <a:srgbClr val="6A7982"/>
+                </a:solidFill>
+                <a:latin typeface="Calibri"/>
+                <a:cs typeface="Calibri"/>
+              </a:defRPr>
+            </a:lvl1pPr>
+          </a:lstStyle>
+          <a:p>
+            <a:pPr marL="12700">
+              <a:lnSpc>
+                <a:spcPts val="955"/>
+              </a:lnSpc>
+            </a:pPr>
+            <a:r>
+              <a:rPr dirty="0"/>
+              <a:t>DSES</a:t>
+            </a:r>
+            <a:r>
+              <a:rPr spc="-15" dirty="0"/>
+              <a:t> </a:t>
+            </a:r>
+            <a:r>
+              <a:rPr dirty="0"/>
+              <a:t>Spectrum</a:t>
+            </a:r>
+            <a:r>
+              <a:rPr spc="-5" dirty="0"/>
+              <a:t> </a:t>
+            </a:r>
+            <a:r>
+              <a:rPr dirty="0"/>
+              <a:t>Analyzer</a:t>
+            </a:r>
+            <a:r>
+              <a:rPr spc="-5" dirty="0"/>
+              <a:t> </a:t>
+            </a:r>
+            <a:r>
+              <a:rPr dirty="0"/>
+              <a:t>—</a:t>
+            </a:r>
+            <a:r>
+              <a:rPr spc="-10" dirty="0"/>
+              <a:t> gpstime.com/sw_distribution/b210_sa </a:t>
+            </a:r>
+            <a:r>
+              <a:rPr dirty="0"/>
+              <a:t>(free,</a:t>
+            </a:r>
+            <a:r>
+              <a:rPr spc="-5" dirty="0"/>
+              <a:t> </a:t>
+            </a:r>
+            <a:r>
+              <a:rPr dirty="0"/>
+              <a:t>GPL)</a:t>
+            </a:r>
+            <a:r>
+              <a:rPr spc="-15" dirty="0"/>
+              <a:t> </a:t>
+            </a:r>
+            <a:r>
+              <a:rPr dirty="0"/>
+              <a:t>—</a:t>
+            </a:r>
+            <a:r>
+              <a:rPr spc="-10" dirty="0"/>
+              <a:t> </a:t>
+            </a:r>
+            <a:r>
+              <a:rPr dirty="0"/>
+              <a:t>Richard</a:t>
+            </a:r>
+            <a:r>
+              <a:rPr spc="-10" dirty="0"/>
+              <a:t> </a:t>
+            </a:r>
+            <a:r>
+              <a:rPr dirty="0"/>
+              <a:t>Hambly</a:t>
+            </a:r>
+            <a:r>
+              <a:rPr spc="-5" dirty="0"/>
+              <a:t> </a:t>
+            </a:r>
+            <a:r>
+              <a:rPr dirty="0"/>
+              <a:t>K0GD</a:t>
+            </a:r>
+            <a:r>
+              <a:rPr spc="-10" dirty="0"/>
+              <a:t> </a:t>
+            </a:r>
+            <a:r>
+              <a:rPr dirty="0"/>
+              <a:t>—</a:t>
+            </a:r>
+            <a:r>
+              <a:rPr spc="-10" dirty="0"/>
+              <a:t> </a:t>
+            </a:r>
+            <a:r>
+              <a:rPr dirty="0"/>
+              <a:t>SARA</a:t>
+            </a:r>
+            <a:r>
+              <a:rPr spc="-5" dirty="0"/>
+              <a:t> </a:t>
+            </a:r>
+            <a:r>
+              <a:rPr dirty="0"/>
+              <a:t>&amp;</a:t>
+            </a:r>
+            <a:r>
+              <a:rPr spc="-15" dirty="0"/>
+              <a:t> </a:t>
+            </a:r>
+            <a:r>
+              <a:rPr dirty="0"/>
+              <a:t>Radio</a:t>
+            </a:r>
+            <a:r>
+              <a:rPr spc="-10" dirty="0"/>
+              <a:t> </a:t>
+            </a:r>
+            <a:r>
+              <a:rPr dirty="0"/>
+              <a:t>Jove</a:t>
+            </a:r>
+            <a:r>
+              <a:rPr spc="-5" dirty="0"/>
+              <a:t> </a:t>
+            </a:r>
+            <a:r>
+              <a:rPr dirty="0"/>
+              <a:t>Eastern</a:t>
+            </a:r>
+            <a:r>
+              <a:rPr spc="-10" dirty="0"/>
+              <a:t> </a:t>
+            </a:r>
+            <a:r>
+              <a:rPr dirty="0"/>
+              <a:t>Conference</a:t>
+            </a:r>
+            <a:r>
+              <a:rPr spc="-5" dirty="0"/>
+              <a:t> </a:t>
+            </a:r>
+            <a:r>
+              <a:rPr spc="-20" dirty="0"/>
+              <a:t>2026</a:t>
+            </a:r>
+          </a:p>
+        </p:txBody>
+      </p:sp>
+      <p:sp>
+        <p:nvSpPr>
+          <p:cNvPr id="3" name="Holder 3"/>
+          <p:cNvSpPr>
+            <a:spLocks noGrp="1"/>
+          </p:cNvSpPr>
+          <p:nvPr>
+            <p:ph type="dt" sz="half" idx="6"/>
+          </p:nvPr>
+        </p:nvSpPr>
+        <p:spPr/>
+        <p:txBody>
+          <a:bodyPr lIns="0" tIns="0" rIns="0" bIns="0"/>
+          <a:lstStyle>
+            <a:lvl1pPr algn="l">
+              <a:defRPr>
+                <a:solidFill>
+                  <a:schemeClr val="tx1">
+                    <a:tint val="75000"/>
+                  </a:schemeClr>
+                </a:solidFill>
+              </a:defRPr>
+            </a:lvl1pPr>
+          </a:lstStyle>
+          <a:p>
+            <a:fld id="{1D8BD707-D9CF-40AE-B4C6-C98DA3205C09}" type="datetimeFigureOut">
+              <a:rPr lang="en-US"/>
+              <a:t>8/4/2026</a:t>
+            </a:fld>
+            <a:endParaRPr lang="en-US"/>
+          </a:p>
+        </p:txBody>
+      </p:sp>
+      <p:sp>
+        <p:nvSpPr>
+          <p:cNvPr id="4" name="Holder 4"/>
+          <p:cNvSpPr>
+            <a:spLocks noGrp="1"/>
+          </p:cNvSpPr>
+          <p:nvPr>
+            <p:ph type="sldNum" sz="quarter" idx="7"/>
+          </p:nvPr>
+        </p:nvSpPr>
+        <p:spPr/>
+        <p:txBody>
+          <a:bodyPr lIns="0" tIns="0" rIns="0" bIns="0"/>
+          <a:lstStyle>
+            <a:lvl1pPr algn="r">
+              <a:defRPr>
+                <a:solidFill>
+                  <a:schemeClr val="tx1">
+                    <a:tint val="75000"/>
+                  </a:schemeClr>
+                </a:solidFill>
+              </a:defRPr>
+            </a:lvl1pPr>
+          </a:lstStyle>
+          <a:p>
+            <a:fld id="{B6F15528-21DE-4FAA-801E-634DDDAF4B2B}" type="slidenum">
+              <a:t>‹#›</a:t>
+            </a:fld>
+            <a:endParaRPr/>
+          </a:p>
+        </p:txBody>
+      </p:sp>
+    </p:spTree>
+    <p:extLst>
+      <p:ext uri="{BB962C8B-B14F-4D97-AF65-F5344CB8AC3E}">
+        <p14:creationId xmlns:p14="http://schemas.microsoft.com/office/powerpoint/2010/main" val="1316368877"/>
+      </p:ext>
+    </p:extLst>
   </p:cSld>
   <p:clrMapOvr>
     <a:masterClrMapping/>
@@ -2160,6 +3762,578 @@
 </p:sldMaster>
 </file>
 
+<file path=ppt/slideMasters/slideMaster2.xml><?xml version="1.0" encoding="utf-8"?>
+<p:sldMaster xmlns:a="http://schemas.openxmlformats.org/drawingml/2006/main" xmlns:r="http://schemas.openxmlformats.org/officeDocument/2006/relationships" xmlns:p="http://schemas.openxmlformats.org/presentationml/2006/main">
+  <p:cSld>
+    <p:bg>
+      <p:bgPr>
+        <a:solidFill>
+          <a:schemeClr val="bg1"/>
+        </a:solidFill>
+        <a:effectLst/>
+      </p:bgPr>
+    </p:bg>
+    <p:spTree>
+      <p:nvGrpSpPr>
+        <p:cNvPr id="1" name=""/>
+        <p:cNvGrpSpPr/>
+        <p:nvPr/>
+      </p:nvGrpSpPr>
+      <p:grpSpPr>
+        <a:xfrm>
+          <a:off x="0" y="0"/>
+          <a:ext cx="0" cy="0"/>
+          <a:chOff x="0" y="0"/>
+          <a:chExt cx="0" cy="0"/>
+        </a:xfrm>
+      </p:grpSpPr>
+      <p:sp>
+        <p:nvSpPr>
+          <p:cNvPr id="16" name="bg object 16"/>
+          <p:cNvSpPr/>
+          <p:nvPr/>
+        </p:nvSpPr>
+        <p:spPr>
+          <a:xfrm>
+            <a:off x="502919" y="1261872"/>
+            <a:ext cx="11183620" cy="0"/>
+          </a:xfrm>
+          <a:custGeom>
+            <a:avLst/>
+            <a:gdLst/>
+            <a:ahLst/>
+            <a:cxnLst/>
+            <a:rect l="l" t="t" r="r" b="b"/>
+            <a:pathLst>
+              <a:path w="11183620">
+                <a:moveTo>
+                  <a:pt x="0" y="0"/>
+                </a:moveTo>
+                <a:lnTo>
+                  <a:pt x="11183112" y="0"/>
+                </a:lnTo>
+              </a:path>
+            </a:pathLst>
+          </a:custGeom>
+          <a:ln w="15240">
+            <a:solidFill>
+              <a:srgbClr val="155F82"/>
+            </a:solidFill>
+          </a:ln>
+        </p:spPr>
+        <p:txBody>
+          <a:bodyPr wrap="square" lIns="0" tIns="0" rIns="0" bIns="0" rtlCol="0"/>
+          <a:lstStyle/>
+          <a:p>
+            <a:endParaRPr/>
+          </a:p>
+        </p:txBody>
+      </p:sp>
+      <p:sp>
+        <p:nvSpPr>
+          <p:cNvPr id="2" name="Holder 2"/>
+          <p:cNvSpPr>
+            <a:spLocks noGrp="1"/>
+          </p:cNvSpPr>
+          <p:nvPr>
+            <p:ph type="title"/>
+          </p:nvPr>
+        </p:nvSpPr>
+        <p:spPr>
+          <a:xfrm>
+            <a:off x="490219" y="637889"/>
+            <a:ext cx="8474075" cy="421640"/>
+          </a:xfrm>
+          <a:prstGeom prst="rect">
+            <a:avLst/>
+          </a:prstGeom>
+        </p:spPr>
+        <p:txBody>
+          <a:bodyPr wrap="square" lIns="0" tIns="0" rIns="0" bIns="0">
+            <a:spAutoFit/>
+          </a:bodyPr>
+          <a:lstStyle>
+            <a:lvl1pPr>
+              <a:defRPr sz="2600" b="1" i="0">
+                <a:solidFill>
+                  <a:srgbClr val="0A2F40"/>
+                </a:solidFill>
+                <a:latin typeface="Cambria"/>
+                <a:cs typeface="Cambria"/>
+              </a:defRPr>
+            </a:lvl1pPr>
+          </a:lstStyle>
+          <a:p>
+            <a:endParaRPr/>
+          </a:p>
+        </p:txBody>
+      </p:sp>
+      <p:sp>
+        <p:nvSpPr>
+          <p:cNvPr id="3" name="Holder 3"/>
+          <p:cNvSpPr>
+            <a:spLocks noGrp="1"/>
+          </p:cNvSpPr>
+          <p:nvPr>
+            <p:ph type="body" idx="1"/>
+          </p:nvPr>
+        </p:nvSpPr>
+        <p:spPr>
+          <a:xfrm>
+            <a:off x="764540" y="2531681"/>
+            <a:ext cx="8293734" cy="1868804"/>
+          </a:xfrm>
+          <a:prstGeom prst="rect">
+            <a:avLst/>
+          </a:prstGeom>
+        </p:spPr>
+        <p:txBody>
+          <a:bodyPr wrap="square" lIns="0" tIns="0" rIns="0" bIns="0">
+            <a:spAutoFit/>
+          </a:bodyPr>
+          <a:lstStyle>
+            <a:lvl1pPr>
+              <a:defRPr sz="1250" b="0" i="0">
+                <a:solidFill>
+                  <a:srgbClr val="24333B"/>
+                </a:solidFill>
+                <a:latin typeface="Calibri"/>
+                <a:cs typeface="Calibri"/>
+              </a:defRPr>
+            </a:lvl1pPr>
+          </a:lstStyle>
+          <a:p>
+            <a:endParaRPr/>
+          </a:p>
+        </p:txBody>
+      </p:sp>
+      <p:sp>
+        <p:nvSpPr>
+          <p:cNvPr id="4" name="Holder 4"/>
+          <p:cNvSpPr>
+            <a:spLocks noGrp="1"/>
+          </p:cNvSpPr>
+          <p:nvPr>
+            <p:ph type="ftr" sz="quarter" idx="5"/>
+          </p:nvPr>
+        </p:nvSpPr>
+        <p:spPr>
+          <a:xfrm>
+            <a:off x="490219" y="6419095"/>
+            <a:ext cx="7022465" cy="139700"/>
+          </a:xfrm>
+          <a:prstGeom prst="rect">
+            <a:avLst/>
+          </a:prstGeom>
+        </p:spPr>
+        <p:txBody>
+          <a:bodyPr wrap="square" lIns="0" tIns="0" rIns="0" bIns="0">
+            <a:spAutoFit/>
+          </a:bodyPr>
+          <a:lstStyle>
+            <a:lvl1pPr>
+              <a:defRPr sz="900" b="0" i="0">
+                <a:solidFill>
+                  <a:srgbClr val="6A7982"/>
+                </a:solidFill>
+                <a:latin typeface="Calibri"/>
+                <a:cs typeface="Calibri"/>
+              </a:defRPr>
+            </a:lvl1pPr>
+          </a:lstStyle>
+          <a:p>
+            <a:pPr marL="12700">
+              <a:lnSpc>
+                <a:spcPts val="955"/>
+              </a:lnSpc>
+            </a:pPr>
+            <a:r>
+              <a:rPr dirty="0"/>
+              <a:t>DSES</a:t>
+            </a:r>
+            <a:r>
+              <a:rPr spc="-15" dirty="0"/>
+              <a:t> </a:t>
+            </a:r>
+            <a:r>
+              <a:rPr dirty="0"/>
+              <a:t>Spectrum</a:t>
+            </a:r>
+            <a:r>
+              <a:rPr spc="-5" dirty="0"/>
+              <a:t> </a:t>
+            </a:r>
+            <a:r>
+              <a:rPr dirty="0"/>
+              <a:t>Analyzer</a:t>
+            </a:r>
+            <a:r>
+              <a:rPr spc="-5" dirty="0"/>
+              <a:t> </a:t>
+            </a:r>
+            <a:r>
+              <a:rPr dirty="0"/>
+              <a:t>—</a:t>
+            </a:r>
+            <a:r>
+              <a:rPr spc="-10" dirty="0"/>
+              <a:t> gpstime.com/sw_distribution/b210_sa </a:t>
+            </a:r>
+            <a:r>
+              <a:rPr dirty="0"/>
+              <a:t>(free,</a:t>
+            </a:r>
+            <a:r>
+              <a:rPr spc="-5" dirty="0"/>
+              <a:t> </a:t>
+            </a:r>
+            <a:r>
+              <a:rPr dirty="0"/>
+              <a:t>GPL)</a:t>
+            </a:r>
+            <a:r>
+              <a:rPr spc="-15" dirty="0"/>
+              <a:t> </a:t>
+            </a:r>
+            <a:r>
+              <a:rPr dirty="0"/>
+              <a:t>—</a:t>
+            </a:r>
+            <a:r>
+              <a:rPr spc="-10" dirty="0"/>
+              <a:t> </a:t>
+            </a:r>
+            <a:r>
+              <a:rPr dirty="0"/>
+              <a:t>Richard</a:t>
+            </a:r>
+            <a:r>
+              <a:rPr spc="-10" dirty="0"/>
+              <a:t> </a:t>
+            </a:r>
+            <a:r>
+              <a:rPr dirty="0"/>
+              <a:t>Hambly</a:t>
+            </a:r>
+            <a:r>
+              <a:rPr spc="-5" dirty="0"/>
+              <a:t> </a:t>
+            </a:r>
+            <a:r>
+              <a:rPr dirty="0"/>
+              <a:t>K0GD</a:t>
+            </a:r>
+            <a:r>
+              <a:rPr spc="-10" dirty="0"/>
+              <a:t> </a:t>
+            </a:r>
+            <a:r>
+              <a:rPr dirty="0"/>
+              <a:t>—</a:t>
+            </a:r>
+            <a:r>
+              <a:rPr spc="-10" dirty="0"/>
+              <a:t> </a:t>
+            </a:r>
+            <a:r>
+              <a:rPr dirty="0"/>
+              <a:t>SARA</a:t>
+            </a:r>
+            <a:r>
+              <a:rPr spc="-5" dirty="0"/>
+              <a:t> </a:t>
+            </a:r>
+            <a:r>
+              <a:rPr dirty="0"/>
+              <a:t>&amp;</a:t>
+            </a:r>
+            <a:r>
+              <a:rPr spc="-15" dirty="0"/>
+              <a:t> </a:t>
+            </a:r>
+            <a:r>
+              <a:rPr dirty="0"/>
+              <a:t>Radio</a:t>
+            </a:r>
+            <a:r>
+              <a:rPr spc="-10" dirty="0"/>
+              <a:t> </a:t>
+            </a:r>
+            <a:r>
+              <a:rPr dirty="0"/>
+              <a:t>Jove</a:t>
+            </a:r>
+            <a:r>
+              <a:rPr spc="-5" dirty="0"/>
+              <a:t> </a:t>
+            </a:r>
+            <a:r>
+              <a:rPr dirty="0"/>
+              <a:t>Eastern</a:t>
+            </a:r>
+            <a:r>
+              <a:rPr spc="-10" dirty="0"/>
+              <a:t> </a:t>
+            </a:r>
+            <a:r>
+              <a:rPr dirty="0"/>
+              <a:t>Conference</a:t>
+            </a:r>
+            <a:r>
+              <a:rPr spc="-5" dirty="0"/>
+              <a:t> </a:t>
+            </a:r>
+            <a:r>
+              <a:rPr spc="-20" dirty="0"/>
+              <a:t>2026</a:t>
+            </a:r>
+          </a:p>
+        </p:txBody>
+      </p:sp>
+      <p:sp>
+        <p:nvSpPr>
+          <p:cNvPr id="5" name="Holder 5"/>
+          <p:cNvSpPr>
+            <a:spLocks noGrp="1"/>
+          </p:cNvSpPr>
+          <p:nvPr>
+            <p:ph type="dt" sz="half" idx="6"/>
+          </p:nvPr>
+        </p:nvSpPr>
+        <p:spPr>
+          <a:xfrm>
+            <a:off x="609600" y="6377940"/>
+            <a:ext cx="2804160" cy="342900"/>
+          </a:xfrm>
+          <a:prstGeom prst="rect">
+            <a:avLst/>
+          </a:prstGeom>
+        </p:spPr>
+        <p:txBody>
+          <a:bodyPr wrap="square" lIns="0" tIns="0" rIns="0" bIns="0">
+            <a:spAutoFit/>
+          </a:bodyPr>
+          <a:lstStyle>
+            <a:lvl1pPr algn="l">
+              <a:defRPr>
+                <a:solidFill>
+                  <a:schemeClr val="tx1">
+                    <a:tint val="75000"/>
+                  </a:schemeClr>
+                </a:solidFill>
+              </a:defRPr>
+            </a:lvl1pPr>
+          </a:lstStyle>
+          <a:p>
+            <a:fld id="{1D8BD707-D9CF-40AE-B4C6-C98DA3205C09}" type="datetimeFigureOut">
+              <a:rPr lang="en-US"/>
+              <a:t>8/4/2026</a:t>
+            </a:fld>
+            <a:endParaRPr lang="en-US"/>
+          </a:p>
+        </p:txBody>
+      </p:sp>
+      <p:sp>
+        <p:nvSpPr>
+          <p:cNvPr id="6" name="Holder 6"/>
+          <p:cNvSpPr>
+            <a:spLocks noGrp="1"/>
+          </p:cNvSpPr>
+          <p:nvPr>
+            <p:ph type="sldNum" sz="quarter" idx="7"/>
+          </p:nvPr>
+        </p:nvSpPr>
+        <p:spPr>
+          <a:xfrm>
+            <a:off x="8778240" y="6377940"/>
+            <a:ext cx="2804160" cy="342900"/>
+          </a:xfrm>
+          <a:prstGeom prst="rect">
+            <a:avLst/>
+          </a:prstGeom>
+        </p:spPr>
+        <p:txBody>
+          <a:bodyPr wrap="square" lIns="0" tIns="0" rIns="0" bIns="0">
+            <a:spAutoFit/>
+          </a:bodyPr>
+          <a:lstStyle>
+            <a:lvl1pPr algn="r">
+              <a:defRPr>
+                <a:solidFill>
+                  <a:schemeClr val="tx1">
+                    <a:tint val="75000"/>
+                  </a:schemeClr>
+                </a:solidFill>
+              </a:defRPr>
+            </a:lvl1pPr>
+          </a:lstStyle>
+          <a:p>
+            <a:fld id="{B6F15528-21DE-4FAA-801E-634DDDAF4B2B}" type="slidenum">
+              <a:t>‹#›</a:t>
+            </a:fld>
+            <a:endParaRPr/>
+          </a:p>
+        </p:txBody>
+      </p:sp>
+    </p:spTree>
+    <p:extLst>
+      <p:ext uri="{BB962C8B-B14F-4D97-AF65-F5344CB8AC3E}">
+        <p14:creationId xmlns:p14="http://schemas.microsoft.com/office/powerpoint/2010/main" val="3873142244"/>
+      </p:ext>
+    </p:extLst>
+  </p:cSld>
+  <p:clrMap bg1="lt1" tx1="dk1" bg2="lt2" tx2="dk2" accent1="accent1" accent2="accent2" accent3="accent3" accent4="accent4" accent5="accent5" accent6="accent6" hlink="hlink" folHlink="folHlink"/>
+  <p:sldLayoutIdLst>
+    <p:sldLayoutId id="2147483651" r:id="rId1"/>
+    <p:sldLayoutId id="2147483652" r:id="rId2"/>
+    <p:sldLayoutId id="2147483653" r:id="rId3"/>
+    <p:sldLayoutId id="2147483654" r:id="rId4"/>
+    <p:sldLayoutId id="2147483655" r:id="rId5"/>
+  </p:sldLayoutIdLst>
+  <p:txStyles>
+    <p:titleStyle>
+      <a:lvl1pPr>
+        <a:defRPr>
+          <a:latin typeface="+mj-lt"/>
+          <a:ea typeface="+mj-ea"/>
+          <a:cs typeface="+mj-cs"/>
+        </a:defRPr>
+      </a:lvl1pPr>
+    </p:titleStyle>
+    <p:bodyStyle>
+      <a:lvl1pPr marL="0">
+        <a:defRPr>
+          <a:latin typeface="+mn-lt"/>
+          <a:ea typeface="+mn-ea"/>
+          <a:cs typeface="+mn-cs"/>
+        </a:defRPr>
+      </a:lvl1pPr>
+      <a:lvl2pPr marL="457200">
+        <a:defRPr>
+          <a:latin typeface="+mn-lt"/>
+          <a:ea typeface="+mn-ea"/>
+          <a:cs typeface="+mn-cs"/>
+        </a:defRPr>
+      </a:lvl2pPr>
+      <a:lvl3pPr marL="914400">
+        <a:defRPr>
+          <a:latin typeface="+mn-lt"/>
+          <a:ea typeface="+mn-ea"/>
+          <a:cs typeface="+mn-cs"/>
+        </a:defRPr>
+      </a:lvl3pPr>
+      <a:lvl4pPr marL="1371600">
+        <a:defRPr>
+          <a:latin typeface="+mn-lt"/>
+          <a:ea typeface="+mn-ea"/>
+          <a:cs typeface="+mn-cs"/>
+        </a:defRPr>
+      </a:lvl4pPr>
+      <a:lvl5pPr marL="1828800">
+        <a:defRPr>
+          <a:latin typeface="+mn-lt"/>
+          <a:ea typeface="+mn-ea"/>
+          <a:cs typeface="+mn-cs"/>
+        </a:defRPr>
+      </a:lvl5pPr>
+      <a:lvl6pPr marL="2286000">
+        <a:defRPr>
+          <a:latin typeface="+mn-lt"/>
+          <a:ea typeface="+mn-ea"/>
+          <a:cs typeface="+mn-cs"/>
+        </a:defRPr>
+      </a:lvl6pPr>
+      <a:lvl7pPr marL="2743200">
+        <a:defRPr>
+          <a:latin typeface="+mn-lt"/>
+          <a:ea typeface="+mn-ea"/>
+          <a:cs typeface="+mn-cs"/>
+        </a:defRPr>
+      </a:lvl7pPr>
+      <a:lvl8pPr marL="3200400">
+        <a:defRPr>
+          <a:latin typeface="+mn-lt"/>
+          <a:ea typeface="+mn-ea"/>
+          <a:cs typeface="+mn-cs"/>
+        </a:defRPr>
+      </a:lvl8pPr>
+      <a:lvl9pPr marL="3657600">
+        <a:defRPr>
+          <a:latin typeface="+mn-lt"/>
+          <a:ea typeface="+mn-ea"/>
+          <a:cs typeface="+mn-cs"/>
+        </a:defRPr>
+      </a:lvl9pPr>
+    </p:bodyStyle>
+    <p:otherStyle>
+      <a:lvl1pPr marL="0">
+        <a:defRPr>
+          <a:latin typeface="+mn-lt"/>
+          <a:ea typeface="+mn-ea"/>
+          <a:cs typeface="+mn-cs"/>
+        </a:defRPr>
+      </a:lvl1pPr>
+      <a:lvl2pPr marL="457200">
+        <a:defRPr>
+          <a:latin typeface="+mn-lt"/>
+          <a:ea typeface="+mn-ea"/>
+          <a:cs typeface="+mn-cs"/>
+        </a:defRPr>
+      </a:lvl2pPr>
+      <a:lvl3pPr marL="914400">
+        <a:defRPr>
+          <a:latin typeface="+mn-lt"/>
+          <a:ea typeface="+mn-ea"/>
+          <a:cs typeface="+mn-cs"/>
+        </a:defRPr>
+      </a:lvl3pPr>
+      <a:lvl4pPr marL="1371600">
+        <a:defRPr>
+          <a:latin typeface="+mn-lt"/>
+          <a:ea typeface="+mn-ea"/>
+          <a:cs typeface="+mn-cs"/>
+        </a:defRPr>
+      </a:lvl4pPr>
+      <a:lvl5pPr marL="1828800">
+        <a:defRPr>
+          <a:latin typeface="+mn-lt"/>
+          <a:ea typeface="+mn-ea"/>
+          <a:cs typeface="+mn-cs"/>
+        </a:defRPr>
+      </a:lvl5pPr>
+      <a:lvl6pPr marL="2286000">
+        <a:defRPr>
+          <a:latin typeface="+mn-lt"/>
+          <a:ea typeface="+mn-ea"/>
+          <a:cs typeface="+mn-cs"/>
+        </a:defRPr>
+      </a:lvl6pPr>
+      <a:lvl7pPr marL="2743200">
+        <a:defRPr>
+          <a:latin typeface="+mn-lt"/>
+          <a:ea typeface="+mn-ea"/>
+          <a:cs typeface="+mn-cs"/>
+        </a:defRPr>
+      </a:lvl7pPr>
+      <a:lvl8pPr marL="3200400">
+        <a:defRPr>
+          <a:latin typeface="+mn-lt"/>
+          <a:ea typeface="+mn-ea"/>
+          <a:cs typeface="+mn-cs"/>
+        </a:defRPr>
+      </a:lvl8pPr>
+      <a:lvl9pPr marL="3657600">
+        <a:defRPr>
+          <a:latin typeface="+mn-lt"/>
+          <a:ea typeface="+mn-ea"/>
+          <a:cs typeface="+mn-cs"/>
+        </a:defRPr>
+      </a:lvl9pPr>
+    </p:otherStyle>
+  </p:txStyles>
+</p:sldMaster>
+</file>
+
 <file path=ppt/slides/slide1.xml><?xml version="1.0" encoding="utf-8"?>
 <p:sld xmlns:a="http://schemas.openxmlformats.org/drawingml/2006/main" xmlns:r="http://schemas.openxmlformats.org/officeDocument/2006/relationships" xmlns:p="http://schemas.openxmlformats.org/presentationml/2006/main">
   <p:cSld name="Slide 1">
@@ -8664,6 +10838,3934 @@
 </file>
 
 <file path=ppt/slides/slide17.xml><?xml version="1.0" encoding="utf-8"?>
+<p:sld xmlns:a="http://schemas.openxmlformats.org/drawingml/2006/main" xmlns:r="http://schemas.openxmlformats.org/officeDocument/2006/relationships" xmlns:p="http://schemas.openxmlformats.org/presentationml/2006/main">
+  <p:cSld>
+    <p:spTree>
+      <p:nvGrpSpPr>
+        <p:cNvPr id="1" name=""/>
+        <p:cNvGrpSpPr/>
+        <p:nvPr/>
+      </p:nvGrpSpPr>
+      <p:grpSpPr>
+        <a:xfrm>
+          <a:off x="0" y="0"/>
+          <a:ext cx="0" cy="0"/>
+          <a:chOff x="0" y="0"/>
+          <a:chExt cx="0" cy="0"/>
+        </a:xfrm>
+      </p:grpSpPr>
+      <p:sp>
+        <p:nvSpPr>
+          <p:cNvPr id="2" name="object 2"/>
+          <p:cNvSpPr txBox="1"/>
+          <p:nvPr/>
+        </p:nvSpPr>
+        <p:spPr>
+          <a:xfrm>
+            <a:off x="490219" y="328088"/>
+            <a:ext cx="4250690" cy="193040"/>
+          </a:xfrm>
+          <a:prstGeom prst="rect">
+            <a:avLst/>
+          </a:prstGeom>
+        </p:spPr>
+        <p:txBody>
+          <a:bodyPr vert="horz" wrap="square" lIns="0" tIns="12700" rIns="0" bIns="0" rtlCol="0">
+            <a:spAutoFit/>
+          </a:bodyPr>
+          <a:lstStyle/>
+          <a:p>
+            <a:pPr marL="12700" marR="0" lvl="0" indent="0" defTabSz="914400" eaLnBrk="1" fontAlgn="auto" latinLnBrk="0" hangingPunct="1">
+              <a:lnSpc>
+                <a:spcPct val="100000"/>
+              </a:lnSpc>
+              <a:spcBef>
+                <a:spcPts val="100"/>
+              </a:spcBef>
+              <a:spcAft>
+                <a:spcPts val="0"/>
+              </a:spcAft>
+              <a:buClrTx/>
+              <a:buSzTx/>
+              <a:buFontTx/>
+              <a:buNone/>
+              <a:tabLst/>
+              <a:defRPr/>
+            </a:pPr>
+            <a:r>
+              <a:rPr kumimoji="0" sz="1100" b="1" i="0" u="none" strike="noStrike" kern="0" cap="none" spc="0" normalizeH="0" baseline="0" noProof="0" dirty="0">
+                <a:ln>
+                  <a:noFill/>
+                </a:ln>
+                <a:solidFill>
+                  <a:srgbClr val="155F82"/>
+                </a:solidFill>
+                <a:effectLst/>
+                <a:uLnTx/>
+                <a:uFillTx/>
+                <a:latin typeface="Calibri"/>
+                <a:cs typeface="Calibri"/>
+              </a:rPr>
+              <a:t>ADDENDUM</a:t>
+            </a:r>
+            <a:r>
+              <a:rPr kumimoji="0" sz="1100" b="1" i="0" u="none" strike="noStrike" kern="0" cap="none" spc="-25" normalizeH="0" baseline="0" noProof="0" dirty="0">
+                <a:ln>
+                  <a:noFill/>
+                </a:ln>
+                <a:solidFill>
+                  <a:srgbClr val="155F82"/>
+                </a:solidFill>
+                <a:effectLst/>
+                <a:uLnTx/>
+                <a:uFillTx/>
+                <a:latin typeface="Calibri"/>
+                <a:cs typeface="Calibri"/>
+              </a:rPr>
+              <a:t> </a:t>
+            </a:r>
+            <a:r>
+              <a:rPr kumimoji="0" sz="1100" b="1" i="0" u="none" strike="noStrike" kern="0" cap="none" spc="0" normalizeH="0" baseline="0" noProof="0" dirty="0">
+                <a:ln>
+                  <a:noFill/>
+                </a:ln>
+                <a:solidFill>
+                  <a:srgbClr val="155F82"/>
+                </a:solidFill>
+                <a:effectLst/>
+                <a:uLnTx/>
+                <a:uFillTx/>
+                <a:latin typeface="Calibri"/>
+                <a:cs typeface="Calibri"/>
+              </a:rPr>
+              <a:t>—</a:t>
+            </a:r>
+            <a:r>
+              <a:rPr kumimoji="0" sz="1100" b="1" i="0" u="none" strike="noStrike" kern="0" cap="none" spc="-25" normalizeH="0" baseline="0" noProof="0" dirty="0">
+                <a:ln>
+                  <a:noFill/>
+                </a:ln>
+                <a:solidFill>
+                  <a:srgbClr val="155F82"/>
+                </a:solidFill>
+                <a:effectLst/>
+                <a:uLnTx/>
+                <a:uFillTx/>
+                <a:latin typeface="Calibri"/>
+                <a:cs typeface="Calibri"/>
+              </a:rPr>
+              <a:t> </a:t>
+            </a:r>
+            <a:r>
+              <a:rPr kumimoji="0" sz="1100" b="1" i="0" u="none" strike="noStrike" kern="0" cap="none" spc="-10" normalizeH="0" baseline="0" noProof="0" dirty="0">
+                <a:ln>
+                  <a:noFill/>
+                </a:ln>
+                <a:solidFill>
+                  <a:srgbClr val="155F82"/>
+                </a:solidFill>
+                <a:effectLst/>
+                <a:uLnTx/>
+                <a:uFillTx/>
+                <a:latin typeface="Calibri"/>
+                <a:cs typeface="Calibri"/>
+              </a:rPr>
+              <a:t>SHIPPED</a:t>
+            </a:r>
+            <a:r>
+              <a:rPr kumimoji="0" sz="1100" b="1" i="0" u="none" strike="noStrike" kern="0" cap="none" spc="-20" normalizeH="0" baseline="0" noProof="0" dirty="0">
+                <a:ln>
+                  <a:noFill/>
+                </a:ln>
+                <a:solidFill>
+                  <a:srgbClr val="155F82"/>
+                </a:solidFill>
+                <a:effectLst/>
+                <a:uLnTx/>
+                <a:uFillTx/>
+                <a:latin typeface="Calibri"/>
+                <a:cs typeface="Calibri"/>
+              </a:rPr>
+              <a:t> </a:t>
+            </a:r>
+            <a:r>
+              <a:rPr kumimoji="0" sz="1100" b="1" i="0" u="none" strike="noStrike" kern="0" cap="none" spc="0" normalizeH="0" baseline="0" noProof="0" dirty="0">
+                <a:ln>
+                  <a:noFill/>
+                </a:ln>
+                <a:solidFill>
+                  <a:srgbClr val="155F82"/>
+                </a:solidFill>
+                <a:effectLst/>
+                <a:uLnTx/>
+                <a:uFillTx/>
+                <a:latin typeface="Calibri"/>
+                <a:cs typeface="Calibri"/>
+              </a:rPr>
+              <a:t>SINCE</a:t>
+            </a:r>
+            <a:r>
+              <a:rPr kumimoji="0" sz="1100" b="1" i="0" u="none" strike="noStrike" kern="0" cap="none" spc="-20" normalizeH="0" baseline="0" noProof="0" dirty="0">
+                <a:ln>
+                  <a:noFill/>
+                </a:ln>
+                <a:solidFill>
+                  <a:srgbClr val="155F82"/>
+                </a:solidFill>
+                <a:effectLst/>
+                <a:uLnTx/>
+                <a:uFillTx/>
+                <a:latin typeface="Calibri"/>
+                <a:cs typeface="Calibri"/>
+              </a:rPr>
+              <a:t> </a:t>
+            </a:r>
+            <a:r>
+              <a:rPr kumimoji="0" sz="1100" b="1" i="0" u="none" strike="noStrike" kern="0" cap="none" spc="0" normalizeH="0" baseline="0" noProof="0" dirty="0">
+                <a:ln>
+                  <a:noFill/>
+                </a:ln>
+                <a:solidFill>
+                  <a:srgbClr val="155F82"/>
+                </a:solidFill>
+                <a:effectLst/>
+                <a:uLnTx/>
+                <a:uFillTx/>
+                <a:latin typeface="Calibri"/>
+                <a:cs typeface="Calibri"/>
+              </a:rPr>
+              <a:t>THESE</a:t>
+            </a:r>
+            <a:r>
+              <a:rPr kumimoji="0" sz="1100" b="1" i="0" u="none" strike="noStrike" kern="0" cap="none" spc="-15" normalizeH="0" baseline="0" noProof="0" dirty="0">
+                <a:ln>
+                  <a:noFill/>
+                </a:ln>
+                <a:solidFill>
+                  <a:srgbClr val="155F82"/>
+                </a:solidFill>
+                <a:effectLst/>
+                <a:uLnTx/>
+                <a:uFillTx/>
+                <a:latin typeface="Calibri"/>
+                <a:cs typeface="Calibri"/>
+              </a:rPr>
+              <a:t> </a:t>
+            </a:r>
+            <a:r>
+              <a:rPr kumimoji="0" sz="1100" b="1" i="0" u="none" strike="noStrike" kern="0" cap="none" spc="0" normalizeH="0" baseline="0" noProof="0" dirty="0">
+                <a:ln>
+                  <a:noFill/>
+                </a:ln>
+                <a:solidFill>
+                  <a:srgbClr val="155F82"/>
+                </a:solidFill>
+                <a:effectLst/>
+                <a:uLnTx/>
+                <a:uFillTx/>
+                <a:latin typeface="Calibri"/>
+                <a:cs typeface="Calibri"/>
+              </a:rPr>
+              <a:t>SLIDES</a:t>
+            </a:r>
+            <a:r>
+              <a:rPr kumimoji="0" sz="1100" b="1" i="0" u="none" strike="noStrike" kern="0" cap="none" spc="-20" normalizeH="0" baseline="0" noProof="0" dirty="0">
+                <a:ln>
+                  <a:noFill/>
+                </a:ln>
+                <a:solidFill>
+                  <a:srgbClr val="155F82"/>
+                </a:solidFill>
+                <a:effectLst/>
+                <a:uLnTx/>
+                <a:uFillTx/>
+                <a:latin typeface="Calibri"/>
+                <a:cs typeface="Calibri"/>
+              </a:rPr>
+              <a:t> </a:t>
+            </a:r>
+            <a:r>
+              <a:rPr kumimoji="0" sz="1100" b="1" i="0" u="none" strike="noStrike" kern="0" cap="none" spc="0" normalizeH="0" baseline="0" noProof="0" dirty="0">
+                <a:ln>
+                  <a:noFill/>
+                </a:ln>
+                <a:solidFill>
+                  <a:srgbClr val="155F82"/>
+                </a:solidFill>
+                <a:effectLst/>
+                <a:uLnTx/>
+                <a:uFillTx/>
+                <a:latin typeface="Calibri"/>
+                <a:cs typeface="Calibri"/>
+              </a:rPr>
+              <a:t>WERE</a:t>
+            </a:r>
+            <a:r>
+              <a:rPr kumimoji="0" sz="1100" b="1" i="0" u="none" strike="noStrike" kern="0" cap="none" spc="-20" normalizeH="0" baseline="0" noProof="0" dirty="0">
+                <a:ln>
+                  <a:noFill/>
+                </a:ln>
+                <a:solidFill>
+                  <a:srgbClr val="155F82"/>
+                </a:solidFill>
+                <a:effectLst/>
+                <a:uLnTx/>
+                <a:uFillTx/>
+                <a:latin typeface="Calibri"/>
+                <a:cs typeface="Calibri"/>
+              </a:rPr>
+              <a:t> </a:t>
+            </a:r>
+            <a:r>
+              <a:rPr kumimoji="0" sz="1100" b="1" i="0" u="none" strike="noStrike" kern="0" cap="none" spc="0" normalizeH="0" baseline="0" noProof="0" dirty="0">
+                <a:ln>
+                  <a:noFill/>
+                </a:ln>
+                <a:solidFill>
+                  <a:srgbClr val="155F82"/>
+                </a:solidFill>
+                <a:effectLst/>
+                <a:uLnTx/>
+                <a:uFillTx/>
+                <a:latin typeface="Calibri"/>
+                <a:cs typeface="Calibri"/>
+              </a:rPr>
+              <a:t>SUBMITTED</a:t>
+            </a:r>
+            <a:r>
+              <a:rPr kumimoji="0" sz="1100" b="1" i="0" u="none" strike="noStrike" kern="0" cap="none" spc="-20" normalizeH="0" baseline="0" noProof="0" dirty="0">
+                <a:ln>
+                  <a:noFill/>
+                </a:ln>
+                <a:solidFill>
+                  <a:srgbClr val="155F82"/>
+                </a:solidFill>
+                <a:effectLst/>
+                <a:uLnTx/>
+                <a:uFillTx/>
+                <a:latin typeface="Calibri"/>
+                <a:cs typeface="Calibri"/>
+              </a:rPr>
+              <a:t> (JULY </a:t>
+            </a:r>
+            <a:r>
+              <a:rPr kumimoji="0" sz="1100" b="1" i="0" u="none" strike="noStrike" kern="0" cap="none" spc="-25" normalizeH="0" baseline="0" noProof="0" dirty="0">
+                <a:ln>
+                  <a:noFill/>
+                </a:ln>
+                <a:solidFill>
+                  <a:srgbClr val="155F82"/>
+                </a:solidFill>
+                <a:effectLst/>
+                <a:uLnTx/>
+                <a:uFillTx/>
+                <a:latin typeface="Calibri"/>
+                <a:cs typeface="Calibri"/>
+              </a:rPr>
+              <a:t>19)</a:t>
+            </a:r>
+            <a:endParaRPr kumimoji="0" sz="1100" b="0" i="0" u="none" strike="noStrike" kern="0" cap="none" spc="0" normalizeH="0" baseline="0" noProof="0">
+              <a:ln>
+                <a:noFill/>
+              </a:ln>
+              <a:solidFill>
+                <a:sysClr val="windowText" lastClr="000000"/>
+              </a:solidFill>
+              <a:effectLst/>
+              <a:uLnTx/>
+              <a:uFillTx/>
+              <a:latin typeface="Calibri"/>
+              <a:cs typeface="Calibri"/>
+            </a:endParaRPr>
+          </a:p>
+        </p:txBody>
+      </p:sp>
+      <p:sp>
+        <p:nvSpPr>
+          <p:cNvPr id="3" name="object 3" descr="$PPTXTitle"/>
+          <p:cNvSpPr txBox="1">
+            <a:spLocks noGrp="1"/>
+          </p:cNvSpPr>
+          <p:nvPr>
+            <p:ph type="title"/>
+          </p:nvPr>
+        </p:nvSpPr>
+        <p:spPr>
+          <a:prstGeom prst="rect">
+            <a:avLst/>
+          </a:prstGeom>
+        </p:spPr>
+        <p:txBody>
+          <a:bodyPr vert="horz" wrap="square" lIns="0" tIns="12700" rIns="0" bIns="0" rtlCol="0">
+            <a:spAutoFit/>
+          </a:bodyPr>
+          <a:lstStyle/>
+          <a:p>
+            <a:pPr marL="12700">
+              <a:lnSpc>
+                <a:spcPct val="100000"/>
+              </a:lnSpc>
+              <a:spcBef>
+                <a:spcPts val="100"/>
+              </a:spcBef>
+            </a:pPr>
+            <a:r>
+              <a:rPr dirty="0"/>
+              <a:t>Three</a:t>
+            </a:r>
+            <a:r>
+              <a:rPr spc="-5" dirty="0"/>
+              <a:t> </a:t>
+            </a:r>
+            <a:r>
+              <a:rPr dirty="0"/>
+              <a:t>weeks</a:t>
+            </a:r>
+            <a:r>
+              <a:rPr spc="-5" dirty="0"/>
+              <a:t> </a:t>
+            </a:r>
+            <a:r>
+              <a:rPr dirty="0"/>
+              <a:t>later: the </a:t>
+            </a:r>
+            <a:r>
+              <a:rPr spc="-10" dirty="0"/>
+              <a:t>road-</a:t>
+            </a:r>
+            <a:r>
+              <a:rPr dirty="0"/>
+              <a:t>ahead</a:t>
+            </a:r>
+            <a:r>
+              <a:rPr spc="-10" dirty="0"/>
+              <a:t> </a:t>
+            </a:r>
+            <a:r>
+              <a:rPr dirty="0"/>
+              <a:t>list</a:t>
+            </a:r>
+            <a:r>
+              <a:rPr spc="-5" dirty="0"/>
+              <a:t> </a:t>
+            </a:r>
+            <a:r>
+              <a:rPr dirty="0"/>
+              <a:t>became a</a:t>
+            </a:r>
+            <a:r>
+              <a:rPr spc="-5" dirty="0"/>
+              <a:t> </a:t>
+            </a:r>
+            <a:r>
+              <a:rPr spc="-10" dirty="0"/>
+              <a:t>release</a:t>
+            </a:r>
+          </a:p>
+        </p:txBody>
+      </p:sp>
+      <p:sp>
+        <p:nvSpPr>
+          <p:cNvPr id="4" name="object 4"/>
+          <p:cNvSpPr txBox="1"/>
+          <p:nvPr/>
+        </p:nvSpPr>
+        <p:spPr>
+          <a:xfrm>
+            <a:off x="490219" y="1555797"/>
+            <a:ext cx="11259820" cy="382156"/>
+          </a:xfrm>
+          <a:prstGeom prst="rect">
+            <a:avLst/>
+          </a:prstGeom>
+        </p:spPr>
+        <p:txBody>
+          <a:bodyPr vert="horz" wrap="square" lIns="0" tIns="12700" rIns="0" bIns="0" rtlCol="0">
+            <a:spAutoFit/>
+          </a:bodyPr>
+          <a:lstStyle/>
+          <a:p>
+            <a:pPr marL="12700" marR="0" lvl="0" indent="0" defTabSz="914400" eaLnBrk="1" fontAlgn="auto" latinLnBrk="0" hangingPunct="1">
+              <a:lnSpc>
+                <a:spcPct val="100000"/>
+              </a:lnSpc>
+              <a:spcBef>
+                <a:spcPts val="100"/>
+              </a:spcBef>
+              <a:spcAft>
+                <a:spcPts val="0"/>
+              </a:spcAft>
+              <a:buClrTx/>
+              <a:buSzTx/>
+              <a:buFontTx/>
+              <a:buNone/>
+              <a:tabLst/>
+              <a:defRPr/>
+            </a:pPr>
+            <a:r>
+              <a:rPr kumimoji="0" sz="2400" b="1" i="0" u="none" strike="noStrike" kern="0" cap="none" spc="0" normalizeH="0" baseline="0" noProof="0" dirty="0">
+                <a:ln>
+                  <a:noFill/>
+                </a:ln>
+                <a:solidFill>
+                  <a:srgbClr val="155F82"/>
+                </a:solidFill>
+                <a:effectLst/>
+                <a:uLnTx/>
+                <a:uFillTx/>
+                <a:latin typeface="Cambria"/>
+                <a:cs typeface="Cambria"/>
+              </a:rPr>
+              <a:t>v1.1.8</a:t>
+            </a:r>
+            <a:r>
+              <a:rPr kumimoji="0" sz="2400" b="1" i="0" u="none" strike="noStrike" kern="0" cap="none" spc="-40" normalizeH="0" baseline="0" noProof="0" dirty="0">
+                <a:ln>
+                  <a:noFill/>
+                </a:ln>
+                <a:solidFill>
+                  <a:srgbClr val="155F82"/>
+                </a:solidFill>
+                <a:effectLst/>
+                <a:uLnTx/>
+                <a:uFillTx/>
+                <a:latin typeface="Cambria"/>
+                <a:cs typeface="Cambria"/>
+              </a:rPr>
+              <a:t> </a:t>
+            </a:r>
+            <a:r>
+              <a:rPr kumimoji="0" sz="2400" b="1" i="0" u="none" strike="noStrike" kern="0" cap="none" spc="0" normalizeH="0" baseline="0" noProof="0" dirty="0">
+                <a:ln>
+                  <a:noFill/>
+                </a:ln>
+                <a:solidFill>
+                  <a:srgbClr val="155F82"/>
+                </a:solidFill>
+                <a:effectLst/>
+                <a:uLnTx/>
+                <a:uFillTx/>
+                <a:latin typeface="Cambria"/>
+                <a:cs typeface="Cambria"/>
+              </a:rPr>
+              <a:t>—</a:t>
+            </a:r>
+            <a:r>
+              <a:rPr kumimoji="0" sz="2400" b="1" i="0" u="none" strike="noStrike" kern="0" cap="none" spc="-35" normalizeH="0" baseline="0" noProof="0" dirty="0">
+                <a:ln>
+                  <a:noFill/>
+                </a:ln>
+                <a:solidFill>
+                  <a:srgbClr val="155F82"/>
+                </a:solidFill>
+                <a:effectLst/>
+                <a:uLnTx/>
+                <a:uFillTx/>
+                <a:latin typeface="Cambria"/>
+                <a:cs typeface="Cambria"/>
+              </a:rPr>
+              <a:t> </a:t>
+            </a:r>
+            <a:r>
+              <a:rPr kumimoji="0" sz="2400" b="1" i="0" u="none" strike="noStrike" kern="0" cap="none" spc="0" normalizeH="0" baseline="0" noProof="0" dirty="0">
+                <a:ln>
+                  <a:noFill/>
+                </a:ln>
+                <a:solidFill>
+                  <a:srgbClr val="155F82"/>
+                </a:solidFill>
+                <a:effectLst/>
+                <a:uLnTx/>
+                <a:uFillTx/>
+                <a:latin typeface="Cambria"/>
+                <a:cs typeface="Cambria"/>
+              </a:rPr>
+              <a:t>released</a:t>
+            </a:r>
+            <a:r>
+              <a:rPr kumimoji="0" sz="2400" b="1" i="0" u="none" strike="noStrike" kern="0" cap="none" spc="-35" normalizeH="0" baseline="0" noProof="0" dirty="0">
+                <a:ln>
+                  <a:noFill/>
+                </a:ln>
+                <a:solidFill>
+                  <a:srgbClr val="155F82"/>
+                </a:solidFill>
+                <a:effectLst/>
+                <a:uLnTx/>
+                <a:uFillTx/>
+                <a:latin typeface="Cambria"/>
+                <a:cs typeface="Cambria"/>
+              </a:rPr>
+              <a:t> </a:t>
+            </a:r>
+            <a:r>
+              <a:rPr kumimoji="0" sz="2400" b="1" i="0" u="none" strike="noStrike" kern="0" cap="none" spc="0" normalizeH="0" baseline="0" noProof="0" dirty="0">
+                <a:ln>
+                  <a:noFill/>
+                </a:ln>
+                <a:solidFill>
+                  <a:srgbClr val="155F82"/>
+                </a:solidFill>
+                <a:effectLst/>
+                <a:uLnTx/>
+                <a:uFillTx/>
+                <a:latin typeface="Cambria"/>
+                <a:cs typeface="Cambria"/>
+              </a:rPr>
+              <a:t>August</a:t>
+            </a:r>
+            <a:r>
+              <a:rPr kumimoji="0" sz="2400" b="1" i="0" u="none" strike="noStrike" kern="0" cap="none" spc="-40" normalizeH="0" baseline="0" noProof="0" dirty="0">
+                <a:ln>
+                  <a:noFill/>
+                </a:ln>
+                <a:solidFill>
+                  <a:srgbClr val="155F82"/>
+                </a:solidFill>
+                <a:effectLst/>
+                <a:uLnTx/>
+                <a:uFillTx/>
+                <a:latin typeface="Cambria"/>
+                <a:cs typeface="Cambria"/>
+              </a:rPr>
+              <a:t> </a:t>
+            </a:r>
+            <a:r>
+              <a:rPr kumimoji="0" sz="2400" b="1" i="0" u="none" strike="noStrike" kern="0" cap="none" spc="-50" normalizeH="0" baseline="0" noProof="0" dirty="0">
+                <a:ln>
+                  <a:noFill/>
+                </a:ln>
+                <a:solidFill>
+                  <a:srgbClr val="155F82"/>
+                </a:solidFill>
+                <a:effectLst/>
+                <a:uLnTx/>
+                <a:uFillTx/>
+                <a:latin typeface="Cambria"/>
+                <a:cs typeface="Cambria"/>
+              </a:rPr>
+              <a:t>3</a:t>
+            </a:r>
+            <a:endParaRPr kumimoji="0" sz="2400" b="0" i="0" u="none" strike="noStrike" kern="0" cap="none" spc="0" normalizeH="0" baseline="0" noProof="0" dirty="0">
+              <a:ln>
+                <a:noFill/>
+              </a:ln>
+              <a:solidFill>
+                <a:sysClr val="windowText" lastClr="000000"/>
+              </a:solidFill>
+              <a:effectLst/>
+              <a:uLnTx/>
+              <a:uFillTx/>
+              <a:latin typeface="Cambria"/>
+              <a:cs typeface="Cambria"/>
+            </a:endParaRPr>
+          </a:p>
+        </p:txBody>
+      </p:sp>
+      <p:sp>
+        <p:nvSpPr>
+          <p:cNvPr id="7" name="object 7"/>
+          <p:cNvSpPr txBox="1">
+            <a:spLocks noGrp="1"/>
+          </p:cNvSpPr>
+          <p:nvPr>
+            <p:ph type="body" idx="1"/>
+          </p:nvPr>
+        </p:nvSpPr>
+        <p:spPr>
+          <a:xfrm>
+            <a:off x="804227" y="1935905"/>
+            <a:ext cx="10985499" cy="3103414"/>
+          </a:xfrm>
+          <a:prstGeom prst="rect">
+            <a:avLst/>
+          </a:prstGeom>
+        </p:spPr>
+        <p:txBody>
+          <a:bodyPr vert="horz" wrap="square" lIns="0" tIns="12700" rIns="0" bIns="0" rtlCol="0">
+            <a:spAutoFit/>
+          </a:bodyPr>
+          <a:lstStyle/>
+          <a:p>
+            <a:pPr marL="284163" marR="421005" indent="-273050">
+              <a:spcBef>
+                <a:spcPts val="100"/>
+              </a:spcBef>
+              <a:buClr>
+                <a:srgbClr val="155F82"/>
+              </a:buClr>
+              <a:buSzPct val="100000"/>
+              <a:buFont typeface="Arial" panose="020B0604020202020204" pitchFamily="34" charset="0"/>
+              <a:buChar char="•"/>
+              <a:tabLst>
+                <a:tab pos="259079" algn="l"/>
+              </a:tabLst>
+            </a:pPr>
+            <a:r>
+              <a:rPr kumimoji="0" lang="en-US" sz="2000" b="1" i="0" u="none" strike="noStrike" kern="0" cap="none" spc="0" normalizeH="0" baseline="0" noProof="0" dirty="0">
+                <a:ln>
+                  <a:noFill/>
+                </a:ln>
+                <a:solidFill>
+                  <a:srgbClr val="24333B"/>
+                </a:solidFill>
+                <a:effectLst/>
+                <a:uLnTx/>
+                <a:uFillTx/>
+                <a:latin typeface="Calibri"/>
+                <a:cs typeface="Calibri"/>
+              </a:rPr>
+              <a:t>Observation</a:t>
+            </a:r>
+            <a:r>
+              <a:rPr kumimoji="0" lang="en-US" sz="2000" b="1" i="0" u="none" strike="noStrike" kern="0" cap="none" spc="-25" normalizeH="0" baseline="0" noProof="0" dirty="0">
+                <a:ln>
+                  <a:noFill/>
+                </a:ln>
+                <a:solidFill>
+                  <a:srgbClr val="24333B"/>
+                </a:solidFill>
+                <a:effectLst/>
+                <a:uLnTx/>
+                <a:uFillTx/>
+                <a:latin typeface="Calibri"/>
+                <a:cs typeface="Calibri"/>
+              </a:rPr>
+              <a:t> </a:t>
+            </a:r>
+            <a:r>
+              <a:rPr kumimoji="0" lang="en-US" sz="2000" b="1" i="0" u="none" strike="noStrike" kern="0" cap="none" spc="0" normalizeH="0" baseline="0" noProof="0" dirty="0">
+                <a:ln>
+                  <a:noFill/>
+                </a:ln>
+                <a:solidFill>
+                  <a:srgbClr val="24333B"/>
+                </a:solidFill>
+                <a:effectLst/>
+                <a:uLnTx/>
+                <a:uFillTx/>
+                <a:latin typeface="Calibri"/>
+                <a:cs typeface="Calibri"/>
+              </a:rPr>
+              <a:t>presets:</a:t>
+            </a:r>
+            <a:r>
+              <a:rPr kumimoji="0" lang="en-US" sz="2000" b="1" i="0" u="none" strike="noStrike" kern="0" cap="none" spc="254" normalizeH="0" baseline="0" noProof="0" dirty="0">
+                <a:ln>
+                  <a:noFill/>
+                </a:ln>
+                <a:solidFill>
+                  <a:srgbClr val="24333B"/>
+                </a:solidFill>
+                <a:effectLst/>
+                <a:uLnTx/>
+                <a:uFillTx/>
+                <a:latin typeface="Calibri"/>
+                <a:cs typeface="Calibri"/>
+              </a:rPr>
+              <a:t> </a:t>
+            </a:r>
+            <a:r>
+              <a:rPr kumimoji="0" lang="en-US" sz="2000" b="0" i="0" u="none" strike="noStrike" kern="0" cap="none" spc="0" normalizeH="0" baseline="0" noProof="0" dirty="0">
+                <a:ln>
+                  <a:noFill/>
+                </a:ln>
+                <a:solidFill>
+                  <a:srgbClr val="24333B"/>
+                </a:solidFill>
+                <a:effectLst/>
+                <a:uLnTx/>
+                <a:uFillTx/>
+                <a:latin typeface="Calibri"/>
+                <a:cs typeface="Calibri"/>
+              </a:rPr>
+              <a:t>one</a:t>
+            </a:r>
+            <a:r>
+              <a:rPr kumimoji="0" lang="en-US" sz="2000" b="0" i="0" u="none" strike="noStrike" kern="0" cap="none" spc="-20" normalizeH="0" baseline="0" noProof="0" dirty="0">
+                <a:ln>
+                  <a:noFill/>
+                </a:ln>
+                <a:solidFill>
+                  <a:srgbClr val="24333B"/>
+                </a:solidFill>
+                <a:effectLst/>
+                <a:uLnTx/>
+                <a:uFillTx/>
+                <a:latin typeface="Calibri"/>
+                <a:cs typeface="Calibri"/>
+              </a:rPr>
+              <a:t> </a:t>
+            </a:r>
+            <a:r>
+              <a:rPr kumimoji="0" lang="en-US" sz="2000" b="0" i="0" u="none" strike="noStrike" kern="0" cap="none" spc="0" normalizeH="0" baseline="0" noProof="0" dirty="0">
+                <a:ln>
+                  <a:noFill/>
+                </a:ln>
+                <a:solidFill>
+                  <a:srgbClr val="24333B"/>
+                </a:solidFill>
+                <a:effectLst/>
+                <a:uLnTx/>
+                <a:uFillTx/>
+                <a:latin typeface="Calibri"/>
+                <a:cs typeface="Calibri"/>
+              </a:rPr>
+              <a:t>pick</a:t>
+            </a:r>
+            <a:r>
+              <a:rPr kumimoji="0" lang="en-US" sz="2000" b="0" i="0" u="none" strike="noStrike" kern="0" cap="none" spc="-25" normalizeH="0" baseline="0" noProof="0" dirty="0">
+                <a:ln>
+                  <a:noFill/>
+                </a:ln>
+                <a:solidFill>
+                  <a:srgbClr val="24333B"/>
+                </a:solidFill>
+                <a:effectLst/>
+                <a:uLnTx/>
+                <a:uFillTx/>
+                <a:latin typeface="Calibri"/>
+                <a:cs typeface="Calibri"/>
+              </a:rPr>
+              <a:t> </a:t>
+            </a:r>
+            <a:r>
+              <a:rPr kumimoji="0" lang="en-US" sz="2000" b="0" i="0" u="none" strike="noStrike" kern="0" cap="none" spc="0" normalizeH="0" baseline="0" noProof="0" dirty="0">
+                <a:ln>
+                  <a:noFill/>
+                </a:ln>
+                <a:solidFill>
+                  <a:srgbClr val="24333B"/>
+                </a:solidFill>
+                <a:effectLst/>
+                <a:uLnTx/>
+                <a:uFillTx/>
+                <a:latin typeface="Calibri"/>
+                <a:cs typeface="Calibri"/>
+              </a:rPr>
+              <a:t>—</a:t>
+            </a:r>
+            <a:r>
+              <a:rPr kumimoji="0" lang="en-US" sz="2000" b="0" i="0" u="none" strike="noStrike" kern="0" cap="none" spc="-25" normalizeH="0" baseline="0" noProof="0" dirty="0">
+                <a:ln>
+                  <a:noFill/>
+                </a:ln>
+                <a:solidFill>
+                  <a:srgbClr val="24333B"/>
+                </a:solidFill>
+                <a:effectLst/>
+                <a:uLnTx/>
+                <a:uFillTx/>
+                <a:latin typeface="Calibri"/>
+                <a:cs typeface="Calibri"/>
+              </a:rPr>
+              <a:t> </a:t>
+            </a:r>
+            <a:r>
+              <a:rPr kumimoji="0" lang="en-US" sz="2000" b="0" i="0" u="none" strike="noStrike" kern="0" cap="none" spc="0" normalizeH="0" baseline="0" noProof="0" dirty="0">
+                <a:ln>
+                  <a:noFill/>
+                </a:ln>
+                <a:solidFill>
+                  <a:srgbClr val="24333B"/>
+                </a:solidFill>
+                <a:effectLst/>
+                <a:uLnTx/>
+                <a:uFillTx/>
+                <a:latin typeface="Calibri"/>
+                <a:cs typeface="Calibri"/>
+              </a:rPr>
+              <a:t>“Pulsar:</a:t>
+            </a:r>
+            <a:r>
+              <a:rPr kumimoji="0" lang="en-US" sz="2000" b="0" i="0" u="none" strike="noStrike" kern="0" cap="none" spc="-20" normalizeH="0" baseline="0" noProof="0" dirty="0">
+                <a:ln>
+                  <a:noFill/>
+                </a:ln>
+                <a:solidFill>
+                  <a:srgbClr val="24333B"/>
+                </a:solidFill>
+                <a:effectLst/>
+                <a:uLnTx/>
+                <a:uFillTx/>
+                <a:latin typeface="Calibri"/>
+                <a:cs typeface="Calibri"/>
+              </a:rPr>
+              <a:t> </a:t>
+            </a:r>
+            <a:r>
+              <a:rPr kumimoji="0" lang="en-US" sz="2000" b="0" i="0" u="none" strike="noStrike" kern="0" cap="none" spc="-10" normalizeH="0" baseline="0" noProof="0" dirty="0">
+                <a:ln>
+                  <a:noFill/>
+                </a:ln>
+                <a:solidFill>
+                  <a:srgbClr val="24333B"/>
+                </a:solidFill>
+                <a:effectLst/>
+                <a:uLnTx/>
+                <a:uFillTx/>
+                <a:latin typeface="Calibri"/>
+                <a:cs typeface="Calibri"/>
+              </a:rPr>
+              <a:t>L-</a:t>
+            </a:r>
+            <a:r>
+              <a:rPr kumimoji="0" lang="en-US" sz="2000" b="0" i="0" u="none" strike="noStrike" kern="0" cap="none" spc="0" normalizeH="0" baseline="0" noProof="0" dirty="0">
+                <a:ln>
+                  <a:noFill/>
+                </a:ln>
+                <a:solidFill>
+                  <a:srgbClr val="24333B"/>
+                </a:solidFill>
+                <a:effectLst/>
+                <a:uLnTx/>
+                <a:uFillTx/>
+                <a:latin typeface="Calibri"/>
+                <a:cs typeface="Calibri"/>
+              </a:rPr>
+              <a:t>band”</a:t>
+            </a:r>
+            <a:r>
+              <a:rPr kumimoji="0" lang="en-US" sz="2000" b="0" i="0" u="none" strike="noStrike" kern="0" cap="none" spc="-30" normalizeH="0" baseline="0" noProof="0" dirty="0">
+                <a:ln>
+                  <a:noFill/>
+                </a:ln>
+                <a:solidFill>
+                  <a:srgbClr val="24333B"/>
+                </a:solidFill>
+                <a:effectLst/>
+                <a:uLnTx/>
+                <a:uFillTx/>
+                <a:latin typeface="Calibri"/>
+                <a:cs typeface="Calibri"/>
+              </a:rPr>
+              <a:t> </a:t>
+            </a:r>
+            <a:r>
+              <a:rPr kumimoji="0" lang="en-US" sz="2000" b="0" i="0" u="none" strike="noStrike" kern="0" cap="none" spc="0" normalizeH="0" baseline="0" noProof="0" dirty="0">
+                <a:ln>
+                  <a:noFill/>
+                </a:ln>
+                <a:solidFill>
+                  <a:srgbClr val="24333B"/>
+                </a:solidFill>
+                <a:effectLst/>
+                <a:uLnTx/>
+                <a:uFillTx/>
+                <a:latin typeface="Calibri"/>
+                <a:cs typeface="Calibri"/>
+              </a:rPr>
+              <a:t>—</a:t>
+            </a:r>
+            <a:r>
+              <a:rPr kumimoji="0" lang="en-US" sz="2000" b="0" i="0" u="none" strike="noStrike" kern="0" cap="none" spc="-25" normalizeH="0" baseline="0" noProof="0" dirty="0">
+                <a:ln>
+                  <a:noFill/>
+                </a:ln>
+                <a:solidFill>
+                  <a:srgbClr val="24333B"/>
+                </a:solidFill>
+                <a:effectLst/>
+                <a:uLnTx/>
+                <a:uFillTx/>
+                <a:latin typeface="Calibri"/>
+                <a:cs typeface="Calibri"/>
+              </a:rPr>
+              <a:t> </a:t>
+            </a:r>
+            <a:r>
+              <a:rPr kumimoji="0" lang="en-US" sz="2000" b="0" i="0" u="none" strike="noStrike" kern="0" cap="none" spc="0" normalizeH="0" baseline="0" noProof="0" dirty="0">
+                <a:ln>
+                  <a:noFill/>
+                </a:ln>
+                <a:solidFill>
+                  <a:srgbClr val="24333B"/>
+                </a:solidFill>
+                <a:effectLst/>
+                <a:uLnTx/>
+                <a:uFillTx/>
+                <a:latin typeface="Calibri"/>
+                <a:cs typeface="Calibri"/>
+              </a:rPr>
+              <a:t>sets</a:t>
+            </a:r>
+            <a:r>
+              <a:rPr kumimoji="0" lang="en-US" sz="2000" b="0" i="0" u="none" strike="noStrike" kern="0" cap="none" spc="-25" normalizeH="0" baseline="0" noProof="0" dirty="0">
+                <a:ln>
+                  <a:noFill/>
+                </a:ln>
+                <a:solidFill>
+                  <a:srgbClr val="24333B"/>
+                </a:solidFill>
+                <a:effectLst/>
+                <a:uLnTx/>
+                <a:uFillTx/>
+                <a:latin typeface="Calibri"/>
+                <a:cs typeface="Calibri"/>
+              </a:rPr>
+              <a:t> </a:t>
+            </a:r>
+            <a:r>
+              <a:rPr kumimoji="0" lang="en-US" sz="2000" b="0" i="0" u="none" strike="noStrike" kern="0" cap="none" spc="0" normalizeH="0" baseline="0" noProof="0" dirty="0">
+                <a:ln>
+                  <a:noFill/>
+                </a:ln>
+                <a:solidFill>
+                  <a:srgbClr val="24333B"/>
+                </a:solidFill>
+                <a:effectLst/>
+                <a:uLnTx/>
+                <a:uFillTx/>
+                <a:latin typeface="Calibri"/>
+                <a:cs typeface="Calibri"/>
+              </a:rPr>
+              <a:t>every</a:t>
+            </a:r>
+            <a:r>
+              <a:rPr kumimoji="0" lang="en-US" sz="2000" b="0" i="0" u="none" strike="noStrike" kern="0" cap="none" spc="-25" normalizeH="0" baseline="0" noProof="0" dirty="0">
+                <a:ln>
+                  <a:noFill/>
+                </a:ln>
+                <a:solidFill>
+                  <a:srgbClr val="24333B"/>
+                </a:solidFill>
+                <a:effectLst/>
+                <a:uLnTx/>
+                <a:uFillTx/>
+                <a:latin typeface="Calibri"/>
+                <a:cs typeface="Calibri"/>
+              </a:rPr>
+              <a:t> </a:t>
+            </a:r>
+            <a:r>
+              <a:rPr kumimoji="0" lang="en-US" sz="2000" b="0" i="0" u="none" strike="noStrike" kern="0" cap="none" spc="-10" normalizeH="0" baseline="0" noProof="0" dirty="0">
+                <a:ln>
+                  <a:noFill/>
+                </a:ln>
+                <a:solidFill>
+                  <a:srgbClr val="24333B"/>
+                </a:solidFill>
+                <a:effectLst/>
+                <a:uLnTx/>
+                <a:uFillTx/>
+                <a:latin typeface="Calibri"/>
+                <a:cs typeface="Calibri"/>
+              </a:rPr>
+              <a:t>science-</a:t>
+            </a:r>
+            <a:r>
+              <a:rPr kumimoji="0" lang="en-US" sz="2000" b="0" i="0" u="none" strike="noStrike" kern="0" cap="none" spc="0" normalizeH="0" baseline="0" noProof="0" dirty="0">
+                <a:ln>
+                  <a:noFill/>
+                </a:ln>
+                <a:solidFill>
+                  <a:srgbClr val="24333B"/>
+                </a:solidFill>
+                <a:effectLst/>
+                <a:uLnTx/>
+                <a:uFillTx/>
+                <a:latin typeface="Calibri"/>
+                <a:cs typeface="Calibri"/>
+              </a:rPr>
+              <a:t>critical</a:t>
+            </a:r>
+            <a:r>
+              <a:rPr kumimoji="0" lang="en-US" sz="2000" b="0" i="0" u="none" strike="noStrike" kern="0" cap="none" spc="-25" normalizeH="0" baseline="0" noProof="0" dirty="0">
+                <a:ln>
+                  <a:noFill/>
+                </a:ln>
+                <a:solidFill>
+                  <a:srgbClr val="24333B"/>
+                </a:solidFill>
+                <a:effectLst/>
+                <a:uLnTx/>
+                <a:uFillTx/>
+                <a:latin typeface="Calibri"/>
+                <a:cs typeface="Calibri"/>
+              </a:rPr>
+              <a:t> </a:t>
+            </a:r>
+            <a:r>
+              <a:rPr kumimoji="0" lang="en-US" sz="2000" b="0" i="0" u="none" strike="noStrike" kern="0" cap="none" spc="0" normalizeH="0" baseline="0" noProof="0" dirty="0">
+                <a:ln>
+                  <a:noFill/>
+                </a:ln>
+                <a:solidFill>
+                  <a:srgbClr val="24333B"/>
+                </a:solidFill>
+                <a:effectLst/>
+                <a:uLnTx/>
+                <a:uFillTx/>
+                <a:latin typeface="Calibri"/>
+                <a:cs typeface="Calibri"/>
+              </a:rPr>
+              <a:t>parameter</a:t>
+            </a:r>
+            <a:r>
+              <a:rPr kumimoji="0" lang="en-US" sz="2000" b="0" i="0" u="none" strike="noStrike" kern="0" cap="none" spc="-20" normalizeH="0" baseline="0" noProof="0" dirty="0">
+                <a:ln>
+                  <a:noFill/>
+                </a:ln>
+                <a:solidFill>
+                  <a:srgbClr val="24333B"/>
+                </a:solidFill>
+                <a:effectLst/>
+                <a:uLnTx/>
+                <a:uFillTx/>
+                <a:latin typeface="Calibri"/>
+                <a:cs typeface="Calibri"/>
+              </a:rPr>
+              <a:t> </a:t>
+            </a:r>
+            <a:r>
+              <a:rPr kumimoji="0" lang="en-US" sz="2000" b="0" i="0" u="none" strike="noStrike" kern="0" cap="none" spc="0" normalizeH="0" baseline="0" noProof="0" dirty="0">
+                <a:ln>
+                  <a:noFill/>
+                </a:ln>
+                <a:solidFill>
+                  <a:srgbClr val="24333B"/>
+                </a:solidFill>
+                <a:effectLst/>
+                <a:uLnTx/>
+                <a:uFillTx/>
+                <a:latin typeface="Calibri"/>
+                <a:cs typeface="Calibri"/>
+              </a:rPr>
+              <a:t>to</a:t>
+            </a:r>
+            <a:r>
+              <a:rPr kumimoji="0" lang="en-US" sz="2000" b="0" i="0" u="none" strike="noStrike" kern="0" cap="none" spc="-30" normalizeH="0" baseline="0" noProof="0" dirty="0">
+                <a:ln>
+                  <a:noFill/>
+                </a:ln>
+                <a:solidFill>
+                  <a:srgbClr val="24333B"/>
+                </a:solidFill>
+                <a:effectLst/>
+                <a:uLnTx/>
+                <a:uFillTx/>
+                <a:latin typeface="Calibri"/>
+                <a:cs typeface="Calibri"/>
+              </a:rPr>
+              <a:t> </a:t>
+            </a:r>
+            <a:r>
+              <a:rPr kumimoji="0" lang="en-US" sz="2000" b="0" i="0" u="none" strike="noStrike" kern="0" cap="none" spc="0" normalizeH="0" baseline="0" noProof="0" dirty="0">
+                <a:ln>
+                  <a:noFill/>
+                </a:ln>
+                <a:solidFill>
+                  <a:srgbClr val="24333B"/>
+                </a:solidFill>
+                <a:effectLst/>
+                <a:uLnTx/>
+                <a:uFillTx/>
+                <a:latin typeface="Calibri"/>
+                <a:cs typeface="Calibri"/>
+              </a:rPr>
+              <a:t>the</a:t>
+            </a:r>
+            <a:r>
+              <a:rPr kumimoji="0" lang="en-US" sz="2000" b="0" i="0" u="none" strike="noStrike" kern="0" cap="none" spc="-20" normalizeH="0" baseline="0" noProof="0" dirty="0">
+                <a:ln>
+                  <a:noFill/>
+                </a:ln>
+                <a:solidFill>
+                  <a:srgbClr val="24333B"/>
+                </a:solidFill>
+                <a:effectLst/>
+                <a:uLnTx/>
+                <a:uFillTx/>
+                <a:latin typeface="Calibri"/>
+                <a:cs typeface="Calibri"/>
+              </a:rPr>
+              <a:t> </a:t>
+            </a:r>
+            <a:r>
+              <a:rPr kumimoji="0" lang="en-US" sz="2000" b="0" i="0" u="none" strike="noStrike" kern="0" cap="none" spc="-10" normalizeH="0" baseline="0" noProof="0" dirty="0">
+                <a:ln>
+                  <a:noFill/>
+                </a:ln>
+                <a:solidFill>
+                  <a:srgbClr val="24333B"/>
+                </a:solidFill>
+                <a:effectLst/>
+                <a:uLnTx/>
+                <a:uFillTx/>
+                <a:latin typeface="Calibri"/>
+                <a:cs typeface="Calibri"/>
+              </a:rPr>
+              <a:t>validated</a:t>
+            </a:r>
+            <a:r>
+              <a:rPr kumimoji="0" lang="en-US" sz="2000" b="0" i="0" u="none" strike="noStrike" kern="0" cap="none" spc="-25" normalizeH="0" baseline="0" noProof="0" dirty="0">
+                <a:ln>
+                  <a:noFill/>
+                </a:ln>
+                <a:solidFill>
+                  <a:srgbClr val="24333B"/>
+                </a:solidFill>
+                <a:effectLst/>
+                <a:uLnTx/>
+                <a:uFillTx/>
+                <a:latin typeface="Calibri"/>
+                <a:cs typeface="Calibri"/>
+              </a:rPr>
+              <a:t> </a:t>
+            </a:r>
+            <a:r>
+              <a:rPr kumimoji="0" lang="en-US" sz="2000" b="0" i="0" u="none" strike="noStrike" kern="0" cap="none" spc="-10" normalizeH="0" baseline="0" noProof="0" dirty="0">
+                <a:ln>
+                  <a:noFill/>
+                </a:ln>
+                <a:solidFill>
+                  <a:srgbClr val="24333B"/>
+                </a:solidFill>
+                <a:effectLst/>
+                <a:uLnTx/>
+                <a:uFillTx/>
+                <a:latin typeface="Calibri"/>
+                <a:cs typeface="Calibri"/>
+              </a:rPr>
+              <a:t>geometry; </a:t>
+            </a:r>
+            <a:r>
+              <a:rPr kumimoji="0" lang="en-US" sz="2000" b="0" i="0" u="none" strike="noStrike" kern="0" cap="none" spc="0" normalizeH="0" baseline="0" noProof="0" dirty="0">
+                <a:ln>
+                  <a:noFill/>
+                </a:ln>
+                <a:solidFill>
+                  <a:srgbClr val="24333B"/>
+                </a:solidFill>
+                <a:effectLst/>
+                <a:uLnTx/>
+                <a:uFillTx/>
+                <a:latin typeface="Calibri"/>
+                <a:cs typeface="Calibri"/>
+              </a:rPr>
+              <a:t>a</a:t>
+            </a:r>
+            <a:r>
+              <a:rPr kumimoji="0" lang="en-US" sz="2000" b="0" i="0" u="none" strike="noStrike" kern="0" cap="none" spc="-30" normalizeH="0" baseline="0" noProof="0" dirty="0">
+                <a:ln>
+                  <a:noFill/>
+                </a:ln>
+                <a:solidFill>
+                  <a:srgbClr val="24333B"/>
+                </a:solidFill>
+                <a:effectLst/>
+                <a:uLnTx/>
+                <a:uFillTx/>
+                <a:latin typeface="Calibri"/>
+                <a:cs typeface="Calibri"/>
+              </a:rPr>
+              <a:t> </a:t>
+            </a:r>
+            <a:r>
+              <a:rPr kumimoji="0" lang="en-US" sz="2000" b="0" i="0" u="none" strike="noStrike" kern="0" cap="none" spc="0" normalizeH="0" baseline="0" noProof="0" dirty="0">
+                <a:ln>
+                  <a:noFill/>
+                </a:ln>
+                <a:solidFill>
+                  <a:srgbClr val="24333B"/>
+                </a:solidFill>
+                <a:effectLst/>
+                <a:uLnTx/>
+                <a:uFillTx/>
+                <a:latin typeface="Calibri"/>
+                <a:cs typeface="Calibri"/>
+              </a:rPr>
+              <a:t>live</a:t>
+            </a:r>
+            <a:r>
+              <a:rPr kumimoji="0" lang="en-US" sz="2000" b="0" i="0" u="none" strike="noStrike" kern="0" cap="none" spc="-20" normalizeH="0" baseline="0" noProof="0" dirty="0">
+                <a:ln>
+                  <a:noFill/>
+                </a:ln>
+                <a:solidFill>
+                  <a:srgbClr val="24333B"/>
+                </a:solidFill>
+                <a:effectLst/>
+                <a:uLnTx/>
+                <a:uFillTx/>
+                <a:latin typeface="Calibri"/>
+                <a:cs typeface="Calibri"/>
+              </a:rPr>
+              <a:t> </a:t>
+            </a:r>
+            <a:r>
+              <a:rPr kumimoji="0" lang="en-US" sz="2000" b="0" i="0" u="none" strike="noStrike" kern="0" cap="none" spc="0" normalizeH="0" baseline="0" noProof="0" dirty="0">
+                <a:ln>
+                  <a:noFill/>
+                </a:ln>
+                <a:solidFill>
+                  <a:srgbClr val="24333B"/>
+                </a:solidFill>
+                <a:effectLst/>
+                <a:uLnTx/>
+                <a:uFillTx/>
+                <a:latin typeface="Calibri"/>
+                <a:cs typeface="Calibri"/>
+              </a:rPr>
+              <a:t>readout</a:t>
+            </a:r>
+            <a:r>
+              <a:rPr kumimoji="0" lang="en-US" sz="2000" b="0" i="0" u="none" strike="noStrike" kern="0" cap="none" spc="-20" normalizeH="0" baseline="0" noProof="0" dirty="0">
+                <a:ln>
+                  <a:noFill/>
+                </a:ln>
+                <a:solidFill>
+                  <a:srgbClr val="24333B"/>
+                </a:solidFill>
+                <a:effectLst/>
+                <a:uLnTx/>
+                <a:uFillTx/>
+                <a:latin typeface="Calibri"/>
+                <a:cs typeface="Calibri"/>
+              </a:rPr>
+              <a:t> </a:t>
+            </a:r>
+            <a:r>
+              <a:rPr kumimoji="0" lang="en-US" sz="2000" b="0" i="0" u="none" strike="noStrike" kern="0" cap="none" spc="0" normalizeH="0" baseline="0" noProof="0" dirty="0">
+                <a:ln>
+                  <a:noFill/>
+                </a:ln>
+                <a:solidFill>
+                  <a:srgbClr val="24333B"/>
+                </a:solidFill>
+                <a:effectLst/>
+                <a:uLnTx/>
+                <a:uFillTx/>
+                <a:latin typeface="Calibri"/>
+                <a:cs typeface="Calibri"/>
+              </a:rPr>
+              <a:t>shows</a:t>
+            </a:r>
+            <a:r>
+              <a:rPr kumimoji="0" lang="en-US" sz="2000" b="0" i="0" u="none" strike="noStrike" kern="0" cap="none" spc="-25" normalizeH="0" baseline="0" noProof="0" dirty="0">
+                <a:ln>
+                  <a:noFill/>
+                </a:ln>
+                <a:solidFill>
+                  <a:srgbClr val="24333B"/>
+                </a:solidFill>
+                <a:effectLst/>
+                <a:uLnTx/>
+                <a:uFillTx/>
+                <a:latin typeface="Calibri"/>
+                <a:cs typeface="Calibri"/>
+              </a:rPr>
+              <a:t> </a:t>
+            </a:r>
+            <a:r>
+              <a:rPr kumimoji="0" lang="en-US" sz="2000" b="0" i="0" u="none" strike="noStrike" kern="0" cap="none" spc="0" normalizeH="0" baseline="0" noProof="0" dirty="0">
+                <a:ln>
+                  <a:noFill/>
+                </a:ln>
+                <a:solidFill>
+                  <a:srgbClr val="24333B"/>
+                </a:solidFill>
+                <a:effectLst/>
+                <a:uLnTx/>
+                <a:uFillTx/>
+                <a:latin typeface="Calibri"/>
+                <a:cs typeface="Calibri"/>
+              </a:rPr>
+              <a:t>time</a:t>
+            </a:r>
+            <a:r>
+              <a:rPr kumimoji="0" lang="en-US" sz="2000" b="0" i="0" u="none" strike="noStrike" kern="0" cap="none" spc="-20" normalizeH="0" baseline="0" noProof="0" dirty="0">
+                <a:ln>
+                  <a:noFill/>
+                </a:ln>
+                <a:solidFill>
+                  <a:srgbClr val="24333B"/>
+                </a:solidFill>
+                <a:effectLst/>
+                <a:uLnTx/>
+                <a:uFillTx/>
+                <a:latin typeface="Calibri"/>
+                <a:cs typeface="Calibri"/>
+              </a:rPr>
+              <a:t> </a:t>
+            </a:r>
+            <a:r>
+              <a:rPr kumimoji="0" lang="en-US" sz="2000" b="0" i="0" u="none" strike="noStrike" kern="0" cap="none" spc="0" normalizeH="0" baseline="0" noProof="0" dirty="0">
+                <a:ln>
+                  <a:noFill/>
+                </a:ln>
+                <a:solidFill>
+                  <a:srgbClr val="24333B"/>
+                </a:solidFill>
+                <a:effectLst/>
+                <a:uLnTx/>
+                <a:uFillTx/>
+                <a:latin typeface="Calibri"/>
+                <a:cs typeface="Calibri"/>
+              </a:rPr>
+              <a:t>resolution,</a:t>
+            </a:r>
+            <a:r>
+              <a:rPr kumimoji="0" lang="en-US" sz="2000" b="0" i="0" u="none" strike="noStrike" kern="0" cap="none" spc="-25" normalizeH="0" baseline="0" noProof="0" dirty="0">
+                <a:ln>
+                  <a:noFill/>
+                </a:ln>
+                <a:solidFill>
+                  <a:srgbClr val="24333B"/>
+                </a:solidFill>
+                <a:effectLst/>
+                <a:uLnTx/>
+                <a:uFillTx/>
+                <a:latin typeface="Calibri"/>
+                <a:cs typeface="Calibri"/>
+              </a:rPr>
+              <a:t> </a:t>
+            </a:r>
+            <a:r>
+              <a:rPr kumimoji="0" lang="en-US" sz="2000" b="0" i="0" u="none" strike="noStrike" kern="0" cap="none" spc="0" normalizeH="0" baseline="0" noProof="0" dirty="0">
+                <a:ln>
+                  <a:noFill/>
+                </a:ln>
+                <a:solidFill>
+                  <a:srgbClr val="24333B"/>
+                </a:solidFill>
+                <a:effectLst/>
+                <a:uLnTx/>
+                <a:uFillTx/>
+                <a:latin typeface="Calibri"/>
+                <a:cs typeface="Calibri"/>
+              </a:rPr>
+              <a:t>DM</a:t>
+            </a:r>
+            <a:r>
+              <a:rPr kumimoji="0" lang="en-US" sz="2000" b="0" i="0" u="none" strike="noStrike" kern="0" cap="none" spc="-25" normalizeH="0" baseline="0" noProof="0" dirty="0">
+                <a:ln>
+                  <a:noFill/>
+                </a:ln>
+                <a:solidFill>
+                  <a:srgbClr val="24333B"/>
+                </a:solidFill>
+                <a:effectLst/>
+                <a:uLnTx/>
+                <a:uFillTx/>
+                <a:latin typeface="Calibri"/>
+                <a:cs typeface="Calibri"/>
+              </a:rPr>
+              <a:t> </a:t>
+            </a:r>
+            <a:r>
+              <a:rPr kumimoji="0" lang="en-US" sz="2000" b="0" i="0" u="none" strike="noStrike" kern="0" cap="none" spc="0" normalizeH="0" baseline="0" noProof="0" dirty="0">
+                <a:ln>
+                  <a:noFill/>
+                </a:ln>
+                <a:solidFill>
+                  <a:srgbClr val="24333B"/>
+                </a:solidFill>
+                <a:effectLst/>
+                <a:uLnTx/>
+                <a:uFillTx/>
+                <a:latin typeface="Calibri"/>
+                <a:cs typeface="Calibri"/>
+              </a:rPr>
+              <a:t>smearing,</a:t>
+            </a:r>
+            <a:r>
+              <a:rPr kumimoji="0" lang="en-US" sz="2000" b="0" i="0" u="none" strike="noStrike" kern="0" cap="none" spc="-20" normalizeH="0" baseline="0" noProof="0" dirty="0">
+                <a:ln>
+                  <a:noFill/>
+                </a:ln>
+                <a:solidFill>
+                  <a:srgbClr val="24333B"/>
+                </a:solidFill>
+                <a:effectLst/>
+                <a:uLnTx/>
+                <a:uFillTx/>
+                <a:latin typeface="Calibri"/>
+                <a:cs typeface="Calibri"/>
+              </a:rPr>
+              <a:t> </a:t>
+            </a:r>
+            <a:r>
+              <a:rPr kumimoji="0" lang="en-US" sz="2000" b="0" i="0" u="none" strike="noStrike" kern="0" cap="none" spc="0" normalizeH="0" baseline="0" noProof="0" dirty="0">
+                <a:ln>
+                  <a:noFill/>
+                </a:ln>
+                <a:solidFill>
+                  <a:srgbClr val="24333B"/>
+                </a:solidFill>
+                <a:effectLst/>
+                <a:uLnTx/>
+                <a:uFillTx/>
+                <a:latin typeface="Calibri"/>
+                <a:cs typeface="Calibri"/>
+              </a:rPr>
+              <a:t>disk</a:t>
+            </a:r>
+            <a:r>
+              <a:rPr kumimoji="0" lang="en-US" sz="2000" b="0" i="0" u="none" strike="noStrike" kern="0" cap="none" spc="-20" normalizeH="0" baseline="0" noProof="0" dirty="0">
+                <a:ln>
+                  <a:noFill/>
+                </a:ln>
+                <a:solidFill>
+                  <a:srgbClr val="24333B"/>
+                </a:solidFill>
+                <a:effectLst/>
+                <a:uLnTx/>
+                <a:uFillTx/>
+                <a:latin typeface="Calibri"/>
+                <a:cs typeface="Calibri"/>
+              </a:rPr>
+              <a:t> </a:t>
+            </a:r>
+            <a:r>
+              <a:rPr kumimoji="0" lang="en-US" sz="2000" b="0" i="0" u="none" strike="noStrike" kern="0" cap="none" spc="-10" normalizeH="0" baseline="0" noProof="0" dirty="0">
+                <a:ln>
+                  <a:noFill/>
+                </a:ln>
+                <a:solidFill>
+                  <a:srgbClr val="24333B"/>
+                </a:solidFill>
+                <a:effectLst/>
+                <a:uLnTx/>
+                <a:uFillTx/>
+                <a:latin typeface="Calibri"/>
+                <a:cs typeface="Calibri"/>
+              </a:rPr>
+              <a:t>rate.</a:t>
+            </a:r>
+            <a:endParaRPr kumimoji="0" lang="en-US" sz="2000" b="0" i="0" u="none" strike="noStrike" kern="0" cap="none" spc="0" normalizeH="0" baseline="0" noProof="0" dirty="0">
+              <a:ln>
+                <a:noFill/>
+              </a:ln>
+              <a:solidFill>
+                <a:sysClr val="windowText" lastClr="000000"/>
+              </a:solidFill>
+              <a:effectLst/>
+              <a:uLnTx/>
+              <a:uFillTx/>
+              <a:latin typeface="Calibri"/>
+              <a:cs typeface="Calibri"/>
+            </a:endParaRPr>
+          </a:p>
+          <a:p>
+            <a:pPr marL="284163" marR="421005" indent="-273050">
+              <a:spcBef>
+                <a:spcPts val="100"/>
+              </a:spcBef>
+              <a:buClr>
+                <a:srgbClr val="155F82"/>
+              </a:buClr>
+              <a:buSzPct val="100000"/>
+              <a:buFont typeface="Arial" panose="020B0604020202020204" pitchFamily="34" charset="0"/>
+              <a:buChar char="•"/>
+              <a:tabLst>
+                <a:tab pos="259079" algn="l"/>
+              </a:tabLst>
+            </a:pPr>
+            <a:r>
+              <a:rPr sz="2000" b="1" spc="-10" dirty="0">
+                <a:latin typeface="Calibri"/>
+                <a:cs typeface="Calibri"/>
+              </a:rPr>
+              <a:t>Recording</a:t>
+            </a:r>
+            <a:r>
+              <a:rPr sz="2000" b="1" spc="-25" dirty="0">
+                <a:latin typeface="Calibri"/>
+                <a:cs typeface="Calibri"/>
+              </a:rPr>
+              <a:t> </a:t>
+            </a:r>
+            <a:r>
+              <a:rPr sz="2000" b="1" dirty="0">
+                <a:latin typeface="Calibri"/>
+                <a:cs typeface="Calibri"/>
+              </a:rPr>
+              <a:t>integrity:</a:t>
+            </a:r>
+            <a:r>
+              <a:rPr sz="2000" b="1" spc="285" dirty="0">
+                <a:latin typeface="Calibri"/>
+                <a:cs typeface="Calibri"/>
+              </a:rPr>
+              <a:t> </a:t>
+            </a:r>
+            <a:r>
+              <a:rPr sz="2000" spc="-10" dirty="0"/>
+              <a:t>dropped-</a:t>
+            </a:r>
+            <a:r>
+              <a:rPr sz="2000" dirty="0"/>
+              <a:t>sample</a:t>
+            </a:r>
+            <a:r>
+              <a:rPr sz="2000" spc="-20" dirty="0"/>
+              <a:t> </a:t>
+            </a:r>
+            <a:r>
+              <a:rPr sz="2000" dirty="0"/>
+              <a:t>gaps</a:t>
+            </a:r>
+            <a:r>
+              <a:rPr sz="2000" spc="-25" dirty="0"/>
+              <a:t> </a:t>
+            </a:r>
+            <a:r>
+              <a:rPr sz="2000" spc="-10" dirty="0"/>
+              <a:t>measured</a:t>
+            </a:r>
+            <a:r>
+              <a:rPr sz="2000" spc="-25" dirty="0"/>
+              <a:t> </a:t>
+            </a:r>
+            <a:r>
+              <a:rPr sz="2000" dirty="0"/>
+              <a:t>from</a:t>
+            </a:r>
+            <a:r>
+              <a:rPr sz="2000" spc="-20" dirty="0"/>
+              <a:t> </a:t>
+            </a:r>
+            <a:r>
+              <a:rPr sz="2000" dirty="0"/>
+              <a:t>radio</a:t>
+            </a:r>
+            <a:r>
+              <a:rPr sz="2000" spc="-25" dirty="0"/>
+              <a:t> </a:t>
+            </a:r>
+            <a:r>
+              <a:rPr sz="2000" dirty="0"/>
+              <a:t>timestamps</a:t>
+            </a:r>
+            <a:r>
+              <a:rPr sz="2000" spc="-25" dirty="0"/>
+              <a:t> </a:t>
+            </a:r>
+            <a:r>
+              <a:rPr sz="2000" dirty="0"/>
+              <a:t>and</a:t>
+            </a:r>
+            <a:r>
+              <a:rPr sz="2000" spc="-25" dirty="0"/>
+              <a:t> </a:t>
+            </a:r>
+            <a:r>
+              <a:rPr sz="2000" spc="-20" dirty="0"/>
+              <a:t>zero-</a:t>
+            </a:r>
+            <a:r>
+              <a:rPr sz="2000" dirty="0"/>
+              <a:t>padded</a:t>
+            </a:r>
+            <a:r>
+              <a:rPr sz="2000" spc="-25" dirty="0"/>
+              <a:t> </a:t>
+            </a:r>
+            <a:r>
+              <a:rPr sz="2000" dirty="0"/>
+              <a:t>exactly,</a:t>
+            </a:r>
+            <a:r>
+              <a:rPr sz="2000" spc="-20" dirty="0"/>
+              <a:t> </a:t>
+            </a:r>
+            <a:r>
+              <a:rPr sz="2000" dirty="0"/>
+              <a:t>live</a:t>
+            </a:r>
+            <a:r>
+              <a:rPr sz="2000" spc="-20" dirty="0"/>
+              <a:t> </a:t>
+            </a:r>
+            <a:r>
+              <a:rPr sz="2000" dirty="0"/>
+              <a:t>—</a:t>
+            </a:r>
+            <a:r>
+              <a:rPr sz="2000" spc="-25" dirty="0"/>
+              <a:t> </a:t>
+            </a:r>
+            <a:r>
+              <a:rPr sz="2000" dirty="0"/>
+              <a:t>the</a:t>
+            </a:r>
+            <a:r>
+              <a:rPr sz="2000" spc="-25" dirty="0"/>
+              <a:t> 28σ </a:t>
+            </a:r>
+            <a:r>
+              <a:rPr sz="2000" spc="-10" dirty="0"/>
+              <a:t>gap-</a:t>
+            </a:r>
+            <a:r>
+              <a:rPr sz="2000" dirty="0"/>
+              <a:t>repair</a:t>
+            </a:r>
+            <a:r>
+              <a:rPr sz="2000" spc="-15" dirty="0"/>
+              <a:t> </a:t>
+            </a:r>
+            <a:r>
+              <a:rPr sz="2000" dirty="0"/>
+              <a:t>lesson,</a:t>
+            </a:r>
+            <a:r>
+              <a:rPr sz="2000" spc="-15" dirty="0"/>
+              <a:t> </a:t>
+            </a:r>
+            <a:r>
+              <a:rPr sz="2000" dirty="0"/>
+              <a:t>now</a:t>
+            </a:r>
+            <a:r>
+              <a:rPr sz="2000" spc="-15" dirty="0"/>
+              <a:t> </a:t>
+            </a:r>
+            <a:r>
+              <a:rPr sz="2000" dirty="0"/>
+              <a:t>automatic</a:t>
+            </a:r>
+            <a:r>
+              <a:rPr sz="2000" spc="-10" dirty="0"/>
+              <a:t> </a:t>
+            </a:r>
+            <a:r>
+              <a:rPr sz="2000" dirty="0"/>
+              <a:t>(verified:</a:t>
+            </a:r>
+            <a:r>
+              <a:rPr sz="2000" spc="-15" dirty="0"/>
+              <a:t> </a:t>
+            </a:r>
+            <a:r>
+              <a:rPr sz="2000" dirty="0"/>
+              <a:t>0</a:t>
+            </a:r>
+            <a:r>
+              <a:rPr sz="2000" spc="-15" dirty="0"/>
+              <a:t> </a:t>
+            </a:r>
+            <a:r>
+              <a:rPr sz="2000" spc="-10" dirty="0"/>
+              <a:t>samples</a:t>
+            </a:r>
+            <a:r>
+              <a:rPr sz="2000" spc="-20" dirty="0"/>
+              <a:t> </a:t>
+            </a:r>
+            <a:r>
+              <a:rPr sz="2000" dirty="0"/>
+              <a:t>lost</a:t>
+            </a:r>
+            <a:r>
+              <a:rPr sz="2000" spc="-10" dirty="0"/>
+              <a:t> </a:t>
+            </a:r>
+            <a:r>
+              <a:rPr sz="2000" dirty="0"/>
+              <a:t>at</a:t>
+            </a:r>
+            <a:r>
+              <a:rPr sz="2000" spc="-15" dirty="0"/>
+              <a:t> </a:t>
+            </a:r>
+            <a:r>
+              <a:rPr sz="2000" dirty="0"/>
+              <a:t>16</a:t>
+            </a:r>
+            <a:r>
+              <a:rPr sz="2000" spc="-15" dirty="0"/>
+              <a:t> </a:t>
+            </a:r>
+            <a:r>
+              <a:rPr sz="2000" spc="-10" dirty="0"/>
+              <a:t>MS/s).</a:t>
+            </a:r>
+            <a:endParaRPr sz="2000" dirty="0">
+              <a:latin typeface="Calibri"/>
+              <a:cs typeface="Calibri"/>
+            </a:endParaRPr>
+          </a:p>
+          <a:p>
+            <a:pPr marL="284163" marR="5080" indent="-273050">
+              <a:spcBef>
+                <a:spcPts val="810"/>
+              </a:spcBef>
+              <a:buClr>
+                <a:srgbClr val="155F82"/>
+              </a:buClr>
+              <a:buSzPct val="100000"/>
+              <a:buFont typeface="Arial" panose="020B0604020202020204" pitchFamily="34" charset="0"/>
+              <a:buChar char="•"/>
+              <a:tabLst>
+                <a:tab pos="259079" algn="l"/>
+              </a:tabLst>
+            </a:pPr>
+            <a:r>
+              <a:rPr sz="2000" b="1" spc="-10" dirty="0">
+                <a:latin typeface="Calibri"/>
+                <a:cs typeface="Calibri"/>
+              </a:rPr>
+              <a:t>Automatic</a:t>
+            </a:r>
+            <a:r>
+              <a:rPr sz="2000" b="1" spc="-30" dirty="0">
+                <a:latin typeface="Calibri"/>
+                <a:cs typeface="Calibri"/>
+              </a:rPr>
+              <a:t> </a:t>
+            </a:r>
+            <a:r>
+              <a:rPr sz="2000" b="1" spc="-10" dirty="0">
+                <a:latin typeface="Calibri"/>
+                <a:cs typeface="Calibri"/>
+              </a:rPr>
+              <a:t>post-</a:t>
+            </a:r>
+            <a:r>
+              <a:rPr sz="2000" b="1" dirty="0">
+                <a:latin typeface="Calibri"/>
+                <a:cs typeface="Calibri"/>
+              </a:rPr>
+              <a:t>processing:</a:t>
+            </a:r>
+            <a:r>
+              <a:rPr sz="2000" b="1" spc="290" dirty="0">
+                <a:latin typeface="Calibri"/>
+                <a:cs typeface="Calibri"/>
+              </a:rPr>
+              <a:t> </a:t>
+            </a:r>
+            <a:r>
+              <a:rPr sz="2000" dirty="0"/>
+              <a:t>recording</a:t>
+            </a:r>
+            <a:r>
+              <a:rPr sz="2000" spc="-20" dirty="0"/>
+              <a:t> </a:t>
+            </a:r>
+            <a:r>
+              <a:rPr sz="2000" dirty="0"/>
+              <a:t>stops</a:t>
+            </a:r>
+            <a:r>
+              <a:rPr sz="2000" spc="-30" dirty="0"/>
+              <a:t> </a:t>
+            </a:r>
+            <a:r>
+              <a:rPr sz="2000" dirty="0"/>
+              <a:t>→</a:t>
+            </a:r>
+            <a:r>
+              <a:rPr sz="2000" spc="-25" dirty="0"/>
+              <a:t> </a:t>
+            </a:r>
+            <a:r>
+              <a:rPr sz="2000" spc="-10" dirty="0"/>
+              <a:t>PRESTO</a:t>
+            </a:r>
+            <a:r>
+              <a:rPr sz="2000" spc="-25" dirty="0"/>
+              <a:t> </a:t>
+            </a:r>
+            <a:r>
+              <a:rPr sz="2000" dirty="0"/>
+              <a:t>runs</a:t>
+            </a:r>
+            <a:r>
+              <a:rPr sz="2000" spc="-30" dirty="0"/>
+              <a:t> </a:t>
+            </a:r>
+            <a:r>
+              <a:rPr sz="2000" dirty="0"/>
+              <a:t>→</a:t>
+            </a:r>
+            <a:r>
+              <a:rPr sz="2000" spc="-25" dirty="0"/>
+              <a:t> </a:t>
+            </a:r>
+            <a:r>
+              <a:rPr sz="2000" dirty="0"/>
+              <a:t>a</a:t>
+            </a:r>
+            <a:r>
+              <a:rPr sz="2000" spc="-30" dirty="0"/>
+              <a:t> </a:t>
+            </a:r>
+            <a:r>
+              <a:rPr sz="2000" spc="-10" dirty="0"/>
+              <a:t>self-contained</a:t>
+            </a:r>
+            <a:r>
+              <a:rPr sz="2000" spc="-25" dirty="0"/>
+              <a:t> </a:t>
+            </a:r>
+            <a:r>
+              <a:rPr sz="2000" dirty="0"/>
+              <a:t>PDF:</a:t>
+            </a:r>
+            <a:r>
+              <a:rPr sz="2000" spc="-25" dirty="0"/>
+              <a:t> </a:t>
+            </a:r>
+            <a:r>
+              <a:rPr sz="2000" dirty="0"/>
+              <a:t>fold</a:t>
+            </a:r>
+            <a:r>
+              <a:rPr sz="2000" spc="-25" dirty="0"/>
+              <a:t> </a:t>
+            </a:r>
+            <a:r>
+              <a:rPr sz="2000" dirty="0"/>
+              <a:t>chart,</a:t>
+            </a:r>
+            <a:r>
+              <a:rPr sz="2000" spc="-25" dirty="0"/>
+              <a:t> </a:t>
+            </a:r>
+            <a:r>
+              <a:rPr sz="2000" dirty="0"/>
+              <a:t>commands,</a:t>
+            </a:r>
+            <a:r>
+              <a:rPr sz="2000" spc="-20" dirty="0"/>
+              <a:t> </a:t>
+            </a:r>
+            <a:r>
+              <a:rPr sz="2000" dirty="0"/>
+              <a:t>numbers,</a:t>
+            </a:r>
+            <a:r>
+              <a:rPr sz="2000" spc="-25" dirty="0"/>
+              <a:t> </a:t>
+            </a:r>
+            <a:r>
+              <a:rPr sz="2000" dirty="0"/>
+              <a:t>and</a:t>
+            </a:r>
+            <a:r>
+              <a:rPr sz="2000" spc="-25" dirty="0"/>
+              <a:t> </a:t>
+            </a:r>
+            <a:r>
+              <a:rPr sz="2000" spc="-50" dirty="0"/>
+              <a:t>a </a:t>
+            </a:r>
+            <a:r>
+              <a:rPr sz="2000" spc="-10" dirty="0"/>
+              <a:t>plain-</a:t>
+            </a:r>
+            <a:r>
+              <a:rPr sz="2000" dirty="0"/>
+              <a:t>language</a:t>
+            </a:r>
+            <a:r>
+              <a:rPr sz="2000" spc="-25" dirty="0"/>
+              <a:t> </a:t>
+            </a:r>
+            <a:r>
+              <a:rPr sz="2000" dirty="0"/>
+              <a:t>verdict</a:t>
+            </a:r>
+            <a:r>
+              <a:rPr sz="2000" spc="-20" dirty="0"/>
+              <a:t> </a:t>
+            </a:r>
+            <a:r>
+              <a:rPr sz="2000" dirty="0"/>
+              <a:t>(incl.</a:t>
+            </a:r>
+            <a:r>
+              <a:rPr sz="2000" spc="-25" dirty="0"/>
+              <a:t> </a:t>
+            </a:r>
+            <a:r>
+              <a:rPr sz="2000" dirty="0"/>
+              <a:t>“that’s</a:t>
+            </a:r>
+            <a:r>
+              <a:rPr sz="2000" spc="-25" dirty="0"/>
+              <a:t> </a:t>
+            </a:r>
+            <a:r>
+              <a:rPr sz="2000" dirty="0"/>
+              <a:t>terrestrial,</a:t>
+            </a:r>
+            <a:r>
+              <a:rPr sz="2000" spc="-25" dirty="0"/>
+              <a:t> </a:t>
+            </a:r>
+            <a:r>
+              <a:rPr sz="2000" dirty="0"/>
+              <a:t>not</a:t>
+            </a:r>
+            <a:r>
+              <a:rPr sz="2000" spc="-20" dirty="0"/>
+              <a:t> </a:t>
+            </a:r>
+            <a:r>
+              <a:rPr sz="2000" dirty="0"/>
+              <a:t>a</a:t>
+            </a:r>
+            <a:r>
+              <a:rPr sz="2000" spc="-25" dirty="0"/>
+              <a:t> </a:t>
+            </a:r>
+            <a:r>
+              <a:rPr sz="2000" spc="-10" dirty="0"/>
+              <a:t>pulsar”).</a:t>
+            </a:r>
+            <a:endParaRPr lang="en-US" sz="2000" spc="-10" dirty="0"/>
+          </a:p>
+          <a:p>
+            <a:pPr marL="284163" marR="5080" indent="-273050">
+              <a:spcBef>
+                <a:spcPts val="810"/>
+              </a:spcBef>
+              <a:buClr>
+                <a:srgbClr val="155F82"/>
+              </a:buClr>
+              <a:buSzPct val="100000"/>
+              <a:buFont typeface="Arial" panose="020B0604020202020204" pitchFamily="34" charset="0"/>
+              <a:buChar char="•"/>
+              <a:tabLst>
+                <a:tab pos="259079" algn="l"/>
+              </a:tabLst>
+            </a:pPr>
+            <a:r>
+              <a:rPr sz="2000" b="1" dirty="0" err="1">
+                <a:latin typeface="Calibri"/>
+                <a:cs typeface="Calibri"/>
+              </a:rPr>
+              <a:t>ezRA</a:t>
+            </a:r>
+            <a:r>
+              <a:rPr sz="2000" b="1" spc="-25" dirty="0">
+                <a:latin typeface="Calibri"/>
+                <a:cs typeface="Calibri"/>
+              </a:rPr>
+              <a:t> </a:t>
+            </a:r>
+            <a:r>
+              <a:rPr sz="2000" b="1" spc="-10" dirty="0">
+                <a:latin typeface="Calibri"/>
+                <a:cs typeface="Calibri"/>
+              </a:rPr>
+              <a:t>drift-</a:t>
+            </a:r>
+            <a:r>
+              <a:rPr sz="2000" b="1" dirty="0">
+                <a:latin typeface="Calibri"/>
+                <a:cs typeface="Calibri"/>
+              </a:rPr>
+              <a:t>scan</a:t>
+            </a:r>
+            <a:r>
+              <a:rPr sz="2000" b="1" spc="-20" dirty="0">
+                <a:latin typeface="Calibri"/>
+                <a:cs typeface="Calibri"/>
+              </a:rPr>
+              <a:t> </a:t>
+            </a:r>
+            <a:r>
+              <a:rPr sz="2000" b="1" dirty="0">
+                <a:latin typeface="Calibri"/>
+                <a:cs typeface="Calibri"/>
+              </a:rPr>
+              <a:t>format:</a:t>
+            </a:r>
+            <a:r>
+              <a:rPr sz="2000" b="1" spc="270" dirty="0">
+                <a:latin typeface="Calibri"/>
+                <a:cs typeface="Calibri"/>
+              </a:rPr>
+              <a:t> </a:t>
+            </a:r>
+            <a:r>
+              <a:rPr sz="2000" dirty="0"/>
+              <a:t>the</a:t>
+            </a:r>
+            <a:r>
+              <a:rPr sz="2000" spc="-20" dirty="0"/>
+              <a:t> </a:t>
+            </a:r>
+            <a:r>
+              <a:rPr sz="2000" dirty="0"/>
+              <a:t>same</a:t>
+            </a:r>
+            <a:r>
+              <a:rPr sz="2000" spc="-25" dirty="0"/>
+              <a:t> </a:t>
+            </a:r>
+            <a:r>
+              <a:rPr sz="2000" dirty="0"/>
+              <a:t>app</a:t>
+            </a:r>
+            <a:r>
+              <a:rPr sz="2000" spc="-25" dirty="0"/>
+              <a:t> </a:t>
+            </a:r>
+            <a:r>
+              <a:rPr sz="2000" dirty="0"/>
+              <a:t>writes</a:t>
+            </a:r>
+            <a:r>
+              <a:rPr sz="2000" spc="-30" dirty="0"/>
+              <a:t> </a:t>
+            </a:r>
+            <a:r>
+              <a:rPr sz="2000" spc="-10" dirty="0"/>
+              <a:t>ezCol-</a:t>
+            </a:r>
+            <a:r>
+              <a:rPr sz="2000" dirty="0"/>
+              <a:t>compatible</a:t>
+            </a:r>
+            <a:r>
+              <a:rPr sz="2000" spc="-20" dirty="0"/>
+              <a:t> </a:t>
+            </a:r>
+            <a:r>
+              <a:rPr sz="2000" dirty="0"/>
+              <a:t>files</a:t>
+            </a:r>
+            <a:r>
+              <a:rPr sz="2000" spc="-30" dirty="0"/>
+              <a:t> </a:t>
+            </a:r>
+            <a:r>
+              <a:rPr sz="2000" dirty="0"/>
+              <a:t>for</a:t>
+            </a:r>
+            <a:r>
+              <a:rPr sz="2000" spc="-20" dirty="0"/>
+              <a:t> </a:t>
+            </a:r>
+            <a:r>
+              <a:rPr sz="2000" dirty="0"/>
+              <a:t>Ted</a:t>
+            </a:r>
+            <a:r>
+              <a:rPr sz="2000" spc="-30" dirty="0"/>
+              <a:t> </a:t>
+            </a:r>
+            <a:r>
+              <a:rPr sz="2000" dirty="0"/>
+              <a:t>Cline’s</a:t>
+            </a:r>
+            <a:r>
+              <a:rPr sz="2000" spc="-25" dirty="0"/>
+              <a:t> </a:t>
+            </a:r>
+            <a:r>
+              <a:rPr sz="2000" dirty="0"/>
+              <a:t>ezRA</a:t>
+            </a:r>
+            <a:r>
+              <a:rPr sz="2000" spc="-25" dirty="0"/>
+              <a:t> </a:t>
+            </a:r>
+            <a:r>
+              <a:rPr sz="2000" dirty="0"/>
+              <a:t>suite</a:t>
+            </a:r>
+            <a:r>
+              <a:rPr sz="2000" spc="-20" dirty="0"/>
+              <a:t> </a:t>
+            </a:r>
+            <a:r>
+              <a:rPr sz="2000" dirty="0"/>
+              <a:t>—</a:t>
+            </a:r>
+            <a:r>
+              <a:rPr sz="2000" spc="-30" dirty="0"/>
+              <a:t> </a:t>
+            </a:r>
+            <a:r>
+              <a:rPr sz="2000" dirty="0"/>
+              <a:t>the</a:t>
+            </a:r>
+            <a:r>
+              <a:rPr sz="2000" spc="-20" dirty="0"/>
+              <a:t> </a:t>
+            </a:r>
+            <a:r>
+              <a:rPr sz="2000" dirty="0"/>
+              <a:t>DSES</a:t>
+            </a:r>
+            <a:r>
+              <a:rPr sz="2000" spc="-25" dirty="0"/>
+              <a:t> </a:t>
+            </a:r>
+            <a:r>
+              <a:rPr sz="2000" spc="-10" dirty="0"/>
+              <a:t>60-</a:t>
+            </a:r>
+            <a:r>
+              <a:rPr sz="2000" dirty="0"/>
+              <a:t>ft</a:t>
+            </a:r>
+            <a:r>
+              <a:rPr sz="2000" spc="-25" dirty="0"/>
+              <a:t> </a:t>
+            </a:r>
+            <a:r>
+              <a:rPr sz="2000" spc="-20" dirty="0"/>
+              <a:t>dish </a:t>
+            </a:r>
+            <a:r>
+              <a:rPr sz="2000" dirty="0"/>
+              <a:t>is</a:t>
+            </a:r>
+            <a:r>
+              <a:rPr sz="2000" spc="-20" dirty="0"/>
+              <a:t> </a:t>
+            </a:r>
+            <a:r>
+              <a:rPr sz="2000" dirty="0"/>
+              <a:t>doing</a:t>
+            </a:r>
+            <a:r>
+              <a:rPr sz="2000" spc="-15" dirty="0"/>
+              <a:t> </a:t>
+            </a:r>
+            <a:r>
+              <a:rPr sz="2000" spc="-10" dirty="0"/>
+              <a:t>hydrogen-</a:t>
+            </a:r>
+            <a:r>
+              <a:rPr sz="2000" dirty="0"/>
+              <a:t>line</a:t>
+            </a:r>
+            <a:r>
+              <a:rPr sz="2000" spc="-15" dirty="0"/>
+              <a:t> </a:t>
+            </a:r>
+            <a:r>
+              <a:rPr sz="2000" dirty="0"/>
+              <a:t>drift</a:t>
+            </a:r>
+            <a:r>
+              <a:rPr sz="2000" spc="-15" dirty="0"/>
+              <a:t> </a:t>
+            </a:r>
+            <a:r>
+              <a:rPr sz="2000" dirty="0"/>
+              <a:t>scans</a:t>
+            </a:r>
+            <a:r>
+              <a:rPr sz="2000" spc="-20" dirty="0"/>
+              <a:t> </a:t>
+            </a:r>
+            <a:r>
+              <a:rPr sz="2000" dirty="0"/>
+              <a:t>with</a:t>
+            </a:r>
+            <a:r>
+              <a:rPr sz="2000" spc="-15" dirty="0"/>
+              <a:t> </a:t>
+            </a:r>
+            <a:r>
+              <a:rPr sz="2000" dirty="0"/>
+              <a:t>it</a:t>
+            </a:r>
+            <a:r>
+              <a:rPr sz="2000" spc="-15" dirty="0"/>
+              <a:t> </a:t>
+            </a:r>
+            <a:r>
+              <a:rPr sz="2000" spc="-10" dirty="0"/>
+              <a:t>today.</a:t>
+            </a:r>
+            <a:r>
+              <a:rPr kumimoji="0" lang="en-US" sz="2000" b="1" i="0" u="none" strike="noStrike" kern="0" cap="none" spc="0" normalizeH="0" baseline="2222" noProof="0" dirty="0">
+                <a:ln>
+                  <a:noFill/>
+                </a:ln>
+                <a:solidFill>
+                  <a:srgbClr val="24333B"/>
+                </a:solidFill>
+                <a:effectLst/>
+                <a:uLnTx/>
+                <a:uFillTx/>
+                <a:latin typeface="Calibri"/>
+                <a:cs typeface="Calibri"/>
+              </a:rPr>
+              <a:t> </a:t>
+            </a:r>
+          </a:p>
+          <a:p>
+            <a:pPr marL="284163" marR="5080" indent="-273050">
+              <a:spcBef>
+                <a:spcPts val="810"/>
+              </a:spcBef>
+              <a:buClr>
+                <a:srgbClr val="155F82"/>
+              </a:buClr>
+              <a:buSzPct val="100000"/>
+              <a:buFont typeface="Arial" panose="020B0604020202020204" pitchFamily="34" charset="0"/>
+              <a:buChar char="•"/>
+              <a:tabLst>
+                <a:tab pos="259079" algn="l"/>
+              </a:tabLst>
+            </a:pPr>
+            <a:r>
+              <a:rPr kumimoji="0" lang="en-US" sz="2000" b="1" i="0" u="none" strike="noStrike" kern="0" cap="none" spc="0" normalizeH="0" baseline="0" noProof="0" dirty="0">
+                <a:ln>
+                  <a:noFill/>
+                </a:ln>
+                <a:solidFill>
+                  <a:srgbClr val="24333B"/>
+                </a:solidFill>
+                <a:effectLst/>
+                <a:uLnTx/>
+                <a:uFillTx/>
+                <a:latin typeface="Calibri"/>
+                <a:cs typeface="Calibri"/>
+              </a:rPr>
+              <a:t>True hardware sample rates: </a:t>
+            </a:r>
+            <a:r>
+              <a:rPr kumimoji="0" lang="en-US" sz="2000" b="0" i="0" u="none" strike="noStrike" kern="0" cap="none" spc="0" normalizeH="0" baseline="0" noProof="0" dirty="0">
+                <a:ln>
+                  <a:noFill/>
+                </a:ln>
+                <a:solidFill>
+                  <a:srgbClr val="24333B"/>
+                </a:solidFill>
+                <a:effectLst/>
+                <a:uLnTx/>
+                <a:uFillTx/>
+                <a:latin typeface="Calibri"/>
+                <a:cs typeface="Calibri"/>
+              </a:rPr>
+              <a:t>B210</a:t>
+            </a:r>
+            <a:r>
+              <a:rPr kumimoji="0" lang="en-US" sz="2000" b="0" i="0" u="none" strike="noStrike" kern="0" cap="none" spc="-15" normalizeH="0" baseline="0" noProof="0" dirty="0">
+                <a:ln>
+                  <a:noFill/>
+                </a:ln>
+                <a:solidFill>
+                  <a:srgbClr val="24333B"/>
+                </a:solidFill>
+                <a:effectLst/>
+                <a:uLnTx/>
+                <a:uFillTx/>
+                <a:latin typeface="Calibri"/>
+                <a:cs typeface="Calibri"/>
+              </a:rPr>
+              <a:t> </a:t>
+            </a:r>
+            <a:r>
+              <a:rPr kumimoji="0" lang="en-US" sz="2000" b="0" i="0" u="none" strike="noStrike" kern="0" cap="none" spc="0" normalizeH="0" baseline="0" noProof="0" dirty="0">
+                <a:ln>
+                  <a:noFill/>
+                </a:ln>
+                <a:solidFill>
+                  <a:srgbClr val="24333B"/>
+                </a:solidFill>
+                <a:effectLst/>
+                <a:uLnTx/>
+                <a:uFillTx/>
+                <a:latin typeface="Calibri"/>
+                <a:cs typeface="Calibri"/>
+              </a:rPr>
+              <a:t>to</a:t>
+            </a:r>
+            <a:r>
+              <a:rPr kumimoji="0" lang="en-US" sz="2000" b="0" i="0" u="none" strike="noStrike" kern="0" cap="none" spc="-25" normalizeH="0" baseline="0" noProof="0" dirty="0">
+                <a:ln>
+                  <a:noFill/>
+                </a:ln>
+                <a:solidFill>
+                  <a:srgbClr val="24333B"/>
+                </a:solidFill>
+                <a:effectLst/>
+                <a:uLnTx/>
+                <a:uFillTx/>
+                <a:latin typeface="Calibri"/>
+                <a:cs typeface="Calibri"/>
+              </a:rPr>
+              <a:t> </a:t>
+            </a:r>
+            <a:r>
+              <a:rPr kumimoji="0" lang="en-US" sz="2000" b="0" i="0" u="none" strike="noStrike" kern="0" cap="none" spc="0" normalizeH="0" baseline="0" noProof="0" dirty="0">
+                <a:ln>
+                  <a:noFill/>
+                </a:ln>
+                <a:solidFill>
+                  <a:srgbClr val="24333B"/>
+                </a:solidFill>
+                <a:effectLst/>
+                <a:uLnTx/>
+                <a:uFillTx/>
+                <a:latin typeface="Calibri"/>
+                <a:cs typeface="Calibri"/>
+              </a:rPr>
+              <a:t>its</a:t>
+            </a:r>
+            <a:r>
+              <a:rPr kumimoji="0" lang="en-US" sz="2000" b="0" i="0" u="none" strike="noStrike" kern="0" cap="none" spc="-20" normalizeH="0" baseline="0" noProof="0" dirty="0">
+                <a:ln>
+                  <a:noFill/>
+                </a:ln>
+                <a:solidFill>
+                  <a:srgbClr val="24333B"/>
+                </a:solidFill>
+                <a:effectLst/>
+                <a:uLnTx/>
+                <a:uFillTx/>
+                <a:latin typeface="Calibri"/>
+                <a:cs typeface="Calibri"/>
+              </a:rPr>
+              <a:t> </a:t>
+            </a:r>
+            <a:r>
+              <a:rPr kumimoji="0" lang="en-US" sz="2000" b="0" i="0" u="none" strike="noStrike" kern="0" cap="none" spc="0" normalizeH="0" baseline="0" noProof="0" dirty="0">
+                <a:ln>
+                  <a:noFill/>
+                </a:ln>
+                <a:solidFill>
+                  <a:srgbClr val="24333B"/>
+                </a:solidFill>
+                <a:effectLst/>
+                <a:uLnTx/>
+                <a:uFillTx/>
+                <a:latin typeface="Calibri"/>
+                <a:cs typeface="Calibri"/>
+              </a:rPr>
+              <a:t>real</a:t>
+            </a:r>
+            <a:r>
+              <a:rPr kumimoji="0" lang="en-US" sz="2000" b="0" i="0" u="none" strike="noStrike" kern="0" cap="none" spc="-25" normalizeH="0" baseline="0" noProof="0" dirty="0">
+                <a:ln>
+                  <a:noFill/>
+                </a:ln>
+                <a:solidFill>
+                  <a:srgbClr val="24333B"/>
+                </a:solidFill>
+                <a:effectLst/>
+                <a:uLnTx/>
+                <a:uFillTx/>
+                <a:latin typeface="Calibri"/>
+                <a:cs typeface="Calibri"/>
+              </a:rPr>
+              <a:t> </a:t>
+            </a:r>
+            <a:r>
+              <a:rPr kumimoji="0" lang="en-US" sz="2000" b="0" i="0" u="none" strike="noStrike" kern="0" cap="none" spc="0" normalizeH="0" baseline="0" noProof="0" dirty="0">
+                <a:ln>
+                  <a:noFill/>
+                </a:ln>
+                <a:solidFill>
+                  <a:srgbClr val="24333B"/>
+                </a:solidFill>
+                <a:effectLst/>
+                <a:uLnTx/>
+                <a:uFillTx/>
+                <a:latin typeface="Calibri"/>
+                <a:cs typeface="Calibri"/>
+              </a:rPr>
+              <a:t>61.44</a:t>
+            </a:r>
+            <a:r>
+              <a:rPr kumimoji="0" lang="en-US" sz="2000" b="0" i="0" u="none" strike="noStrike" kern="0" cap="none" spc="-20" normalizeH="0" baseline="0" noProof="0" dirty="0">
+                <a:ln>
+                  <a:noFill/>
+                </a:ln>
+                <a:solidFill>
+                  <a:srgbClr val="24333B"/>
+                </a:solidFill>
+                <a:effectLst/>
+                <a:uLnTx/>
+                <a:uFillTx/>
+                <a:latin typeface="Calibri"/>
+                <a:cs typeface="Calibri"/>
+              </a:rPr>
+              <a:t> </a:t>
+            </a:r>
+            <a:r>
+              <a:rPr kumimoji="0" lang="en-US" sz="2000" b="0" i="0" u="none" strike="noStrike" kern="0" cap="none" spc="0" normalizeH="0" baseline="0" noProof="0" dirty="0">
+                <a:ln>
+                  <a:noFill/>
+                </a:ln>
+                <a:solidFill>
+                  <a:srgbClr val="24333B"/>
+                </a:solidFill>
+                <a:effectLst/>
+                <a:uLnTx/>
+                <a:uFillTx/>
+                <a:latin typeface="Calibri"/>
+                <a:cs typeface="Calibri"/>
+              </a:rPr>
+              <a:t>MS/s</a:t>
+            </a:r>
+            <a:r>
+              <a:rPr kumimoji="0" lang="en-US" sz="2000" b="0" i="0" u="none" strike="noStrike" kern="0" cap="none" spc="-20" normalizeH="0" baseline="0" noProof="0" dirty="0">
+                <a:ln>
+                  <a:noFill/>
+                </a:ln>
+                <a:solidFill>
+                  <a:srgbClr val="24333B"/>
+                </a:solidFill>
+                <a:effectLst/>
+                <a:uLnTx/>
+                <a:uFillTx/>
+                <a:latin typeface="Calibri"/>
+                <a:cs typeface="Calibri"/>
+              </a:rPr>
+              <a:t> </a:t>
+            </a:r>
+            <a:r>
+              <a:rPr kumimoji="0" lang="en-US" sz="2000" b="0" i="0" u="none" strike="noStrike" kern="0" cap="none" spc="0" normalizeH="0" baseline="0" noProof="0" dirty="0">
+                <a:ln>
+                  <a:noFill/>
+                </a:ln>
+                <a:solidFill>
+                  <a:srgbClr val="24333B"/>
+                </a:solidFill>
+                <a:effectLst/>
+                <a:uLnTx/>
+                <a:uFillTx/>
+                <a:latin typeface="Calibri"/>
+                <a:cs typeface="Calibri"/>
+              </a:rPr>
+              <a:t>ceiling,</a:t>
+            </a:r>
+            <a:r>
+              <a:rPr kumimoji="0" lang="en-US" sz="2000" b="0" i="0" u="none" strike="noStrike" kern="0" cap="none" spc="-20" normalizeH="0" baseline="0" noProof="0" dirty="0">
+                <a:ln>
+                  <a:noFill/>
+                </a:ln>
+                <a:solidFill>
+                  <a:srgbClr val="24333B"/>
+                </a:solidFill>
+                <a:effectLst/>
+                <a:uLnTx/>
+                <a:uFillTx/>
+                <a:latin typeface="Calibri"/>
+                <a:cs typeface="Calibri"/>
+              </a:rPr>
+              <a:t> master-</a:t>
+            </a:r>
+            <a:r>
+              <a:rPr kumimoji="0" lang="en-US" sz="2000" b="0" i="0" u="none" strike="noStrike" kern="0" cap="none" spc="-10" normalizeH="0" baseline="0" noProof="0" dirty="0">
+                <a:ln>
+                  <a:noFill/>
+                </a:ln>
+                <a:solidFill>
+                  <a:srgbClr val="24333B"/>
+                </a:solidFill>
+                <a:effectLst/>
+                <a:uLnTx/>
+                <a:uFillTx/>
+                <a:latin typeface="Calibri"/>
+                <a:cs typeface="Calibri"/>
+              </a:rPr>
+              <a:t>clock-</a:t>
+            </a:r>
+            <a:r>
+              <a:rPr kumimoji="0" lang="en-US" sz="2000" b="0" i="0" u="none" strike="noStrike" kern="0" cap="none" spc="0" normalizeH="0" baseline="0" noProof="0" dirty="0">
+                <a:ln>
+                  <a:noFill/>
+                </a:ln>
+                <a:solidFill>
+                  <a:srgbClr val="24333B"/>
+                </a:solidFill>
+                <a:effectLst/>
+                <a:uLnTx/>
+                <a:uFillTx/>
+                <a:latin typeface="Calibri"/>
+                <a:cs typeface="Calibri"/>
+              </a:rPr>
+              <a:t>clean</a:t>
+            </a:r>
+            <a:r>
+              <a:rPr kumimoji="0" lang="en-US" sz="2000" b="0" i="0" u="none" strike="noStrike" kern="0" cap="none" spc="-20" normalizeH="0" baseline="0" noProof="0" dirty="0">
+                <a:ln>
+                  <a:noFill/>
+                </a:ln>
+                <a:solidFill>
+                  <a:srgbClr val="24333B"/>
+                </a:solidFill>
+                <a:effectLst/>
+                <a:uLnTx/>
+                <a:uFillTx/>
+                <a:latin typeface="Calibri"/>
+                <a:cs typeface="Calibri"/>
+              </a:rPr>
+              <a:t> </a:t>
+            </a:r>
+            <a:r>
+              <a:rPr kumimoji="0" lang="en-US" sz="2000" b="0" i="0" u="none" strike="noStrike" kern="0" cap="none" spc="-10" normalizeH="0" baseline="0" noProof="0" dirty="0">
+                <a:ln>
+                  <a:noFill/>
+                </a:ln>
+                <a:solidFill>
+                  <a:srgbClr val="24333B"/>
+                </a:solidFill>
+                <a:effectLst/>
+                <a:uLnTx/>
+                <a:uFillTx/>
+                <a:latin typeface="Calibri"/>
+                <a:cs typeface="Calibri"/>
+              </a:rPr>
+              <a:t>presets.</a:t>
+            </a:r>
+            <a:endParaRPr kumimoji="0" lang="en-US" sz="2000" b="0" i="0" u="none" strike="noStrike" kern="0" cap="none" spc="0" normalizeH="0" baseline="0" noProof="0" dirty="0">
+              <a:ln>
+                <a:noFill/>
+              </a:ln>
+              <a:solidFill>
+                <a:sysClr val="windowText" lastClr="000000"/>
+              </a:solidFill>
+              <a:effectLst/>
+              <a:uLnTx/>
+              <a:uFillTx/>
+              <a:latin typeface="Calibri"/>
+              <a:cs typeface="Calibri"/>
+            </a:endParaRPr>
+          </a:p>
+        </p:txBody>
+      </p:sp>
+      <p:sp>
+        <p:nvSpPr>
+          <p:cNvPr id="10" name="object 10"/>
+          <p:cNvSpPr txBox="1"/>
+          <p:nvPr/>
+        </p:nvSpPr>
+        <p:spPr>
+          <a:xfrm>
+            <a:off x="490219" y="5117385"/>
+            <a:ext cx="11259820" cy="869469"/>
+          </a:xfrm>
+          <a:prstGeom prst="rect">
+            <a:avLst/>
+          </a:prstGeom>
+        </p:spPr>
+        <p:txBody>
+          <a:bodyPr vert="horz" wrap="square" lIns="0" tIns="12700" rIns="0" bIns="0" rtlCol="0">
+            <a:spAutoFit/>
+          </a:bodyPr>
+          <a:lstStyle/>
+          <a:p>
+            <a:pPr marL="12700" marR="0" lvl="0" indent="0" defTabSz="914400" eaLnBrk="1" fontAlgn="auto" latinLnBrk="0" hangingPunct="1">
+              <a:lnSpc>
+                <a:spcPct val="100000"/>
+              </a:lnSpc>
+              <a:spcBef>
+                <a:spcPts val="100"/>
+              </a:spcBef>
+              <a:spcAft>
+                <a:spcPts val="0"/>
+              </a:spcAft>
+              <a:buClrTx/>
+              <a:buSzTx/>
+              <a:buFontTx/>
+              <a:buNone/>
+              <a:tabLst/>
+              <a:defRPr/>
+            </a:pPr>
+            <a:r>
+              <a:rPr kumimoji="0" sz="2400" b="1" i="0" u="none" strike="noStrike" kern="0" cap="none" spc="0" normalizeH="0" baseline="0" noProof="0" dirty="0">
+                <a:ln>
+                  <a:noFill/>
+                </a:ln>
+                <a:solidFill>
+                  <a:srgbClr val="B86918"/>
+                </a:solidFill>
+                <a:effectLst/>
+                <a:uLnTx/>
+                <a:uFillTx/>
+                <a:latin typeface="Cambria"/>
+                <a:cs typeface="Cambria"/>
+              </a:rPr>
+              <a:t>v1.2.0</a:t>
+            </a:r>
+            <a:r>
+              <a:rPr kumimoji="0" sz="2400" b="1" i="0" u="none" strike="noStrike" kern="0" cap="none" spc="-20" normalizeH="0" baseline="0" noProof="0" dirty="0">
+                <a:ln>
+                  <a:noFill/>
+                </a:ln>
+                <a:solidFill>
+                  <a:srgbClr val="B86918"/>
+                </a:solidFill>
+                <a:effectLst/>
+                <a:uLnTx/>
+                <a:uFillTx/>
+                <a:latin typeface="Cambria"/>
+                <a:cs typeface="Cambria"/>
+              </a:rPr>
+              <a:t> </a:t>
+            </a:r>
+            <a:r>
+              <a:rPr kumimoji="0" sz="2400" b="1" i="0" u="none" strike="noStrike" kern="0" cap="none" spc="0" normalizeH="0" baseline="0" noProof="0" dirty="0">
+                <a:ln>
+                  <a:noFill/>
+                </a:ln>
+                <a:solidFill>
+                  <a:srgbClr val="B86918"/>
+                </a:solidFill>
+                <a:effectLst/>
+                <a:uLnTx/>
+                <a:uFillTx/>
+                <a:latin typeface="Cambria"/>
+                <a:cs typeface="Cambria"/>
+              </a:rPr>
+              <a:t>—</a:t>
+            </a:r>
+            <a:r>
+              <a:rPr kumimoji="0" sz="2400" b="1" i="0" u="none" strike="noStrike" kern="0" cap="none" spc="-15" normalizeH="0" baseline="0" noProof="0" dirty="0">
+                <a:ln>
+                  <a:noFill/>
+                </a:ln>
+                <a:solidFill>
+                  <a:srgbClr val="B86918"/>
+                </a:solidFill>
+                <a:effectLst/>
+                <a:uLnTx/>
+                <a:uFillTx/>
+                <a:latin typeface="Cambria"/>
+                <a:cs typeface="Cambria"/>
+              </a:rPr>
+              <a:t> </a:t>
+            </a:r>
+            <a:r>
+              <a:rPr kumimoji="0" sz="2400" b="1" i="0" u="none" strike="noStrike" kern="0" cap="none" spc="0" normalizeH="0" baseline="0" noProof="0" dirty="0">
+                <a:ln>
+                  <a:noFill/>
+                </a:ln>
+                <a:solidFill>
+                  <a:srgbClr val="B86918"/>
+                </a:solidFill>
+                <a:effectLst/>
+                <a:uLnTx/>
+                <a:uFillTx/>
+                <a:latin typeface="Cambria"/>
+                <a:cs typeface="Cambria"/>
+              </a:rPr>
+              <a:t>landed</a:t>
+            </a:r>
+            <a:r>
+              <a:rPr kumimoji="0" sz="2400" b="1" i="0" u="none" strike="noStrike" kern="0" cap="none" spc="-20" normalizeH="0" baseline="0" noProof="0" dirty="0">
+                <a:ln>
+                  <a:noFill/>
+                </a:ln>
+                <a:solidFill>
+                  <a:srgbClr val="B86918"/>
+                </a:solidFill>
+                <a:effectLst/>
+                <a:uLnTx/>
+                <a:uFillTx/>
+                <a:latin typeface="Cambria"/>
+                <a:cs typeface="Cambria"/>
+              </a:rPr>
+              <a:t> </a:t>
+            </a:r>
+            <a:r>
+              <a:rPr kumimoji="0" sz="2400" b="1" i="0" u="none" strike="noStrike" kern="0" cap="none" spc="0" normalizeH="0" baseline="0" noProof="0" dirty="0">
+                <a:ln>
+                  <a:noFill/>
+                </a:ln>
+                <a:solidFill>
+                  <a:srgbClr val="B86918"/>
+                </a:solidFill>
+                <a:effectLst/>
+                <a:uLnTx/>
+                <a:uFillTx/>
+                <a:latin typeface="Cambria"/>
+                <a:cs typeface="Cambria"/>
+              </a:rPr>
+              <a:t>this</a:t>
+            </a:r>
+            <a:r>
+              <a:rPr kumimoji="0" sz="2400" b="1" i="0" u="none" strike="noStrike" kern="0" cap="none" spc="-15" normalizeH="0" baseline="0" noProof="0" dirty="0">
+                <a:ln>
+                  <a:noFill/>
+                </a:ln>
+                <a:solidFill>
+                  <a:srgbClr val="B86918"/>
+                </a:solidFill>
+                <a:effectLst/>
+                <a:uLnTx/>
+                <a:uFillTx/>
+                <a:latin typeface="Cambria"/>
+                <a:cs typeface="Cambria"/>
+              </a:rPr>
+              <a:t> </a:t>
+            </a:r>
+            <a:r>
+              <a:rPr kumimoji="0" sz="2400" b="1" i="0" u="none" strike="noStrike" kern="0" cap="none" spc="-10" normalizeH="0" baseline="0" noProof="0" dirty="0">
+                <a:ln>
+                  <a:noFill/>
+                </a:ln>
+                <a:solidFill>
+                  <a:srgbClr val="B86918"/>
+                </a:solidFill>
+                <a:effectLst/>
+                <a:uLnTx/>
+                <a:uFillTx/>
+                <a:latin typeface="Cambria"/>
+                <a:cs typeface="Cambria"/>
+              </a:rPr>
+              <a:t>morning</a:t>
+            </a:r>
+            <a:endParaRPr kumimoji="0" sz="2400" b="0" i="0" u="none" strike="noStrike" kern="0" cap="none" spc="0" normalizeH="0" baseline="0" noProof="0" dirty="0">
+              <a:ln>
+                <a:noFill/>
+              </a:ln>
+              <a:solidFill>
+                <a:sysClr val="windowText" lastClr="000000"/>
+              </a:solidFill>
+              <a:effectLst/>
+              <a:uLnTx/>
+              <a:uFillTx/>
+              <a:latin typeface="Cambria"/>
+              <a:cs typeface="Cambria"/>
+            </a:endParaRPr>
+          </a:p>
+          <a:p>
+            <a:pPr marL="533400" marR="0" lvl="0" indent="-246379" defTabSz="914400" eaLnBrk="1" fontAlgn="auto" latinLnBrk="0" hangingPunct="1">
+              <a:lnSpc>
+                <a:spcPct val="100000"/>
+              </a:lnSpc>
+              <a:spcBef>
+                <a:spcPts val="1375"/>
+              </a:spcBef>
+              <a:spcAft>
+                <a:spcPts val="0"/>
+              </a:spcAft>
+              <a:buClr>
+                <a:srgbClr val="B86918"/>
+              </a:buClr>
+              <a:buSzPct val="96000"/>
+              <a:buFont typeface="Calibri"/>
+              <a:buChar char="▪"/>
+              <a:tabLst>
+                <a:tab pos="533400" algn="l"/>
+              </a:tabLst>
+              <a:defRPr/>
+            </a:pPr>
+            <a:r>
+              <a:rPr kumimoji="0" sz="2000" b="1" i="0" u="none" strike="noStrike" kern="0" cap="none" spc="0" normalizeH="0" baseline="0" noProof="0" dirty="0">
+                <a:ln>
+                  <a:noFill/>
+                </a:ln>
+                <a:solidFill>
+                  <a:srgbClr val="24333B"/>
+                </a:solidFill>
+                <a:effectLst/>
+                <a:uLnTx/>
+                <a:uFillTx/>
+                <a:latin typeface="Calibri"/>
+                <a:cs typeface="Calibri"/>
+              </a:rPr>
+              <a:t>Full</a:t>
+            </a:r>
+            <a:r>
+              <a:rPr kumimoji="0" sz="2000" b="1" i="0" u="none" strike="noStrike" kern="0" cap="none" spc="-20" normalizeH="0" baseline="0" noProof="0" dirty="0">
+                <a:ln>
+                  <a:noFill/>
+                </a:ln>
+                <a:solidFill>
+                  <a:srgbClr val="24333B"/>
+                </a:solidFill>
+                <a:effectLst/>
+                <a:uLnTx/>
+                <a:uFillTx/>
+                <a:latin typeface="Calibri"/>
+                <a:cs typeface="Calibri"/>
+              </a:rPr>
+              <a:t> </a:t>
+            </a:r>
+            <a:r>
+              <a:rPr kumimoji="0" sz="2000" b="1" i="0" u="none" strike="noStrike" kern="0" cap="none" spc="0" normalizeH="0" baseline="0" noProof="0" dirty="0">
+                <a:ln>
+                  <a:noFill/>
+                </a:ln>
+                <a:solidFill>
+                  <a:srgbClr val="24333B"/>
+                </a:solidFill>
+                <a:effectLst/>
+                <a:uLnTx/>
+                <a:uFillTx/>
+                <a:latin typeface="Calibri"/>
+                <a:cs typeface="Calibri"/>
+              </a:rPr>
+              <a:t>UI</a:t>
+            </a:r>
+            <a:r>
+              <a:rPr kumimoji="0" sz="2000" b="1" i="0" u="none" strike="noStrike" kern="0" cap="none" spc="-20" normalizeH="0" baseline="0" noProof="0" dirty="0">
+                <a:ln>
+                  <a:noFill/>
+                </a:ln>
+                <a:solidFill>
+                  <a:srgbClr val="24333B"/>
+                </a:solidFill>
+                <a:effectLst/>
+                <a:uLnTx/>
+                <a:uFillTx/>
+                <a:latin typeface="Calibri"/>
+                <a:cs typeface="Calibri"/>
+              </a:rPr>
+              <a:t> </a:t>
+            </a:r>
+            <a:r>
+              <a:rPr kumimoji="0" sz="2000" b="1" i="0" u="none" strike="noStrike" kern="0" cap="none" spc="0" normalizeH="0" baseline="0" noProof="0" dirty="0">
+                <a:ln>
+                  <a:noFill/>
+                </a:ln>
+                <a:solidFill>
+                  <a:srgbClr val="24333B"/>
+                </a:solidFill>
+                <a:effectLst/>
+                <a:uLnTx/>
+                <a:uFillTx/>
+                <a:latin typeface="Calibri"/>
+                <a:cs typeface="Calibri"/>
+              </a:rPr>
+              <a:t>redesign:</a:t>
+            </a:r>
+            <a:r>
+              <a:rPr kumimoji="0" sz="2000" b="1" i="0" u="none" strike="noStrike" kern="0" cap="none" spc="265" normalizeH="0" baseline="0" noProof="0" dirty="0">
+                <a:ln>
+                  <a:noFill/>
+                </a:ln>
+                <a:solidFill>
+                  <a:srgbClr val="24333B"/>
+                </a:solidFill>
+                <a:effectLst/>
+                <a:uLnTx/>
+                <a:uFillTx/>
+                <a:latin typeface="Calibri"/>
+                <a:cs typeface="Calibri"/>
+              </a:rPr>
+              <a:t> </a:t>
+            </a:r>
+            <a:r>
+              <a:rPr kumimoji="0" sz="2000" b="0" i="0" u="none" strike="noStrike" kern="0" cap="none" spc="0" normalizeH="0" baseline="0" noProof="0" dirty="0">
+                <a:ln>
+                  <a:noFill/>
+                </a:ln>
+                <a:solidFill>
+                  <a:srgbClr val="24333B"/>
+                </a:solidFill>
+                <a:effectLst/>
+                <a:uLnTx/>
+                <a:uFillTx/>
+                <a:latin typeface="Calibri"/>
+                <a:cs typeface="Calibri"/>
+              </a:rPr>
+              <a:t>menus,</a:t>
+            </a:r>
+            <a:r>
+              <a:rPr kumimoji="0" sz="2000" b="0" i="0" u="none" strike="noStrike" kern="0" cap="none" spc="-20" normalizeH="0" baseline="0" noProof="0" dirty="0">
+                <a:ln>
+                  <a:noFill/>
+                </a:ln>
+                <a:solidFill>
+                  <a:srgbClr val="24333B"/>
+                </a:solidFill>
+                <a:effectLst/>
+                <a:uLnTx/>
+                <a:uFillTx/>
+                <a:latin typeface="Calibri"/>
+                <a:cs typeface="Calibri"/>
+              </a:rPr>
+              <a:t> </a:t>
+            </a:r>
+            <a:r>
+              <a:rPr kumimoji="0" sz="2000" b="0" i="0" u="none" strike="noStrike" kern="0" cap="none" spc="0" normalizeH="0" baseline="0" noProof="0" dirty="0">
+                <a:ln>
+                  <a:noFill/>
+                </a:ln>
+                <a:solidFill>
+                  <a:srgbClr val="24333B"/>
+                </a:solidFill>
+                <a:effectLst/>
+                <a:uLnTx/>
+                <a:uFillTx/>
+                <a:latin typeface="Calibri"/>
+                <a:cs typeface="Calibri"/>
+              </a:rPr>
+              <a:t>six</a:t>
+            </a:r>
+            <a:r>
+              <a:rPr kumimoji="0" sz="2000" b="0" i="0" u="none" strike="noStrike" kern="0" cap="none" spc="-25" normalizeH="0" baseline="0" noProof="0" dirty="0">
+                <a:ln>
+                  <a:noFill/>
+                </a:ln>
+                <a:solidFill>
+                  <a:srgbClr val="24333B"/>
+                </a:solidFill>
+                <a:effectLst/>
+                <a:uLnTx/>
+                <a:uFillTx/>
+                <a:latin typeface="Calibri"/>
+                <a:cs typeface="Calibri"/>
+              </a:rPr>
+              <a:t> </a:t>
+            </a:r>
+            <a:r>
+              <a:rPr kumimoji="0" sz="2000" b="0" i="0" u="none" strike="noStrike" kern="0" cap="none" spc="0" normalizeH="0" baseline="0" noProof="0" dirty="0">
+                <a:ln>
+                  <a:noFill/>
+                </a:ln>
+                <a:solidFill>
+                  <a:srgbClr val="24333B"/>
+                </a:solidFill>
+                <a:effectLst/>
+                <a:uLnTx/>
+                <a:uFillTx/>
+                <a:latin typeface="Calibri"/>
+                <a:cs typeface="Calibri"/>
+              </a:rPr>
+              <a:t>dockable</a:t>
+            </a:r>
+            <a:r>
+              <a:rPr kumimoji="0" sz="2000" b="0" i="0" u="none" strike="noStrike" kern="0" cap="none" spc="-20" normalizeH="0" baseline="0" noProof="0" dirty="0">
+                <a:ln>
+                  <a:noFill/>
+                </a:ln>
+                <a:solidFill>
+                  <a:srgbClr val="24333B"/>
+                </a:solidFill>
+                <a:effectLst/>
+                <a:uLnTx/>
+                <a:uFillTx/>
+                <a:latin typeface="Calibri"/>
+                <a:cs typeface="Calibri"/>
+              </a:rPr>
+              <a:t> </a:t>
+            </a:r>
+            <a:r>
+              <a:rPr kumimoji="0" sz="2000" b="0" i="0" u="none" strike="noStrike" kern="0" cap="none" spc="0" normalizeH="0" baseline="0" noProof="0" dirty="0">
+                <a:ln>
+                  <a:noFill/>
+                </a:ln>
+                <a:solidFill>
+                  <a:srgbClr val="24333B"/>
+                </a:solidFill>
+                <a:effectLst/>
+                <a:uLnTx/>
+                <a:uFillTx/>
+                <a:latin typeface="Calibri"/>
+                <a:cs typeface="Calibri"/>
+              </a:rPr>
+              <a:t>panels,</a:t>
+            </a:r>
+            <a:r>
+              <a:rPr kumimoji="0" sz="2000" b="0" i="0" u="none" strike="noStrike" kern="0" cap="none" spc="-20" normalizeH="0" baseline="0" noProof="0" dirty="0">
+                <a:ln>
+                  <a:noFill/>
+                </a:ln>
+                <a:solidFill>
+                  <a:srgbClr val="24333B"/>
+                </a:solidFill>
+                <a:effectLst/>
+                <a:uLnTx/>
+                <a:uFillTx/>
+                <a:latin typeface="Calibri"/>
+                <a:cs typeface="Calibri"/>
+              </a:rPr>
+              <a:t> </a:t>
+            </a:r>
+            <a:r>
+              <a:rPr kumimoji="0" sz="2000" b="0" i="0" u="none" strike="noStrike" kern="0" cap="none" spc="-10" normalizeH="0" baseline="0" noProof="0" dirty="0">
+                <a:ln>
+                  <a:noFill/>
+                </a:ln>
+                <a:solidFill>
+                  <a:srgbClr val="24333B"/>
+                </a:solidFill>
+                <a:effectLst/>
+                <a:uLnTx/>
+                <a:uFillTx/>
+                <a:latin typeface="Calibri"/>
+                <a:cs typeface="Calibri"/>
+              </a:rPr>
+              <a:t>one-</a:t>
+            </a:r>
+            <a:r>
+              <a:rPr kumimoji="0" sz="2000" b="0" i="0" u="none" strike="noStrike" kern="0" cap="none" spc="0" normalizeH="0" baseline="0" noProof="0" dirty="0">
+                <a:ln>
+                  <a:noFill/>
+                </a:ln>
+                <a:solidFill>
+                  <a:srgbClr val="24333B"/>
+                </a:solidFill>
+                <a:effectLst/>
+                <a:uLnTx/>
+                <a:uFillTx/>
+                <a:latin typeface="Calibri"/>
+                <a:cs typeface="Calibri"/>
+              </a:rPr>
+              <a:t>click</a:t>
+            </a:r>
+            <a:r>
+              <a:rPr kumimoji="0" sz="2000" b="0" i="0" u="none" strike="noStrike" kern="0" cap="none" spc="-20" normalizeH="0" baseline="0" noProof="0" dirty="0">
+                <a:ln>
+                  <a:noFill/>
+                </a:ln>
+                <a:solidFill>
+                  <a:srgbClr val="24333B"/>
+                </a:solidFill>
+                <a:effectLst/>
+                <a:uLnTx/>
+                <a:uFillTx/>
+                <a:latin typeface="Calibri"/>
+                <a:cs typeface="Calibri"/>
+              </a:rPr>
+              <a:t> </a:t>
+            </a:r>
+            <a:r>
+              <a:rPr kumimoji="0" sz="2000" b="0" i="0" u="none" strike="noStrike" kern="0" cap="none" spc="-10" normalizeH="0" baseline="0" noProof="0" dirty="0">
+                <a:ln>
+                  <a:noFill/>
+                </a:ln>
+                <a:solidFill>
+                  <a:srgbClr val="24333B"/>
+                </a:solidFill>
+                <a:effectLst/>
+                <a:uLnTx/>
+                <a:uFillTx/>
+                <a:latin typeface="Calibri"/>
+                <a:cs typeface="Calibri"/>
+              </a:rPr>
+              <a:t>observation</a:t>
+            </a:r>
+            <a:r>
+              <a:rPr kumimoji="0" sz="2000" b="0" i="0" u="none" strike="noStrike" kern="0" cap="none" spc="-25" normalizeH="0" baseline="0" noProof="0" dirty="0">
+                <a:ln>
+                  <a:noFill/>
+                </a:ln>
+                <a:solidFill>
+                  <a:srgbClr val="24333B"/>
+                </a:solidFill>
+                <a:effectLst/>
+                <a:uLnTx/>
+                <a:uFillTx/>
+                <a:latin typeface="Calibri"/>
+                <a:cs typeface="Calibri"/>
+              </a:rPr>
+              <a:t> </a:t>
+            </a:r>
+            <a:r>
+              <a:rPr kumimoji="0" sz="2000" b="0" i="0" u="none" strike="noStrike" kern="0" cap="none" spc="0" normalizeH="0" baseline="0" noProof="0" dirty="0">
+                <a:ln>
+                  <a:noFill/>
+                </a:ln>
+                <a:solidFill>
+                  <a:srgbClr val="24333B"/>
+                </a:solidFill>
+                <a:effectLst/>
+                <a:uLnTx/>
+                <a:uFillTx/>
+                <a:latin typeface="Calibri"/>
+                <a:cs typeface="Calibri"/>
+              </a:rPr>
+              <a:t>setup</a:t>
+            </a:r>
+            <a:r>
+              <a:rPr kumimoji="0" lang="en-US" sz="2000" b="0" i="0" u="none" strike="noStrike" kern="0" cap="none" spc="0" normalizeH="0" baseline="0" noProof="0" dirty="0">
+                <a:ln>
+                  <a:noFill/>
+                </a:ln>
+                <a:solidFill>
+                  <a:srgbClr val="24333B"/>
+                </a:solidFill>
+                <a:effectLst/>
+                <a:uLnTx/>
+                <a:uFillTx/>
+                <a:latin typeface="Calibri"/>
+                <a:cs typeface="Calibri"/>
+              </a:rPr>
+              <a:t>.</a:t>
+            </a:r>
+            <a:endParaRPr kumimoji="0" sz="2000" b="0" i="0" u="none" strike="noStrike" kern="0" cap="none" spc="0" normalizeH="0" baseline="0" noProof="0" dirty="0">
+              <a:ln>
+                <a:noFill/>
+              </a:ln>
+              <a:solidFill>
+                <a:sysClr val="windowText" lastClr="000000"/>
+              </a:solidFill>
+              <a:effectLst/>
+              <a:uLnTx/>
+              <a:uFillTx/>
+              <a:latin typeface="Calibri"/>
+              <a:cs typeface="Calibri"/>
+            </a:endParaRPr>
+          </a:p>
+        </p:txBody>
+      </p:sp>
+      <p:pic>
+        <p:nvPicPr>
+          <p:cNvPr id="11" name="object 11"/>
+          <p:cNvPicPr/>
+          <p:nvPr/>
+        </p:nvPicPr>
+        <p:blipFill>
+          <a:blip r:embed="rId2" cstate="print"/>
+          <a:stretch>
+            <a:fillRect/>
+          </a:stretch>
+        </p:blipFill>
+        <p:spPr>
+          <a:xfrm>
+            <a:off x="10561319" y="310895"/>
+            <a:ext cx="1188720" cy="438912"/>
+          </a:xfrm>
+          <a:prstGeom prst="rect">
+            <a:avLst/>
+          </a:prstGeom>
+        </p:spPr>
+      </p:pic>
+      <p:sp>
+        <p:nvSpPr>
+          <p:cNvPr id="12" name="object 12"/>
+          <p:cNvSpPr txBox="1">
+            <a:spLocks noGrp="1"/>
+          </p:cNvSpPr>
+          <p:nvPr>
+            <p:ph type="ftr" sz="quarter" idx="5"/>
+          </p:nvPr>
+        </p:nvSpPr>
+        <p:spPr>
+          <a:prstGeom prst="rect">
+            <a:avLst/>
+          </a:prstGeom>
+        </p:spPr>
+        <p:txBody>
+          <a:bodyPr vert="horz" wrap="square" lIns="0" tIns="0" rIns="0" bIns="0" rtlCol="0">
+            <a:spAutoFit/>
+          </a:bodyPr>
+          <a:lstStyle/>
+          <a:p>
+            <a:pPr marL="12700" marR="0" lvl="0" indent="0" defTabSz="914400" eaLnBrk="1" fontAlgn="auto" latinLnBrk="0" hangingPunct="1">
+              <a:lnSpc>
+                <a:spcPts val="955"/>
+              </a:lnSpc>
+              <a:spcBef>
+                <a:spcPts val="0"/>
+              </a:spcBef>
+              <a:spcAft>
+                <a:spcPts val="0"/>
+              </a:spcAft>
+              <a:buClrTx/>
+              <a:buSzTx/>
+              <a:buFontTx/>
+              <a:buNone/>
+              <a:tabLst/>
+              <a:defRPr/>
+            </a:pPr>
+            <a:r>
+              <a:rPr kumimoji="0" sz="900" b="0" i="0" u="none" strike="noStrike" kern="0" cap="none" spc="0" normalizeH="0" baseline="0" noProof="0" dirty="0">
+                <a:ln>
+                  <a:noFill/>
+                </a:ln>
+                <a:solidFill>
+                  <a:srgbClr val="6A7982"/>
+                </a:solidFill>
+                <a:effectLst/>
+                <a:uLnTx/>
+                <a:uFillTx/>
+                <a:latin typeface="Calibri"/>
+                <a:cs typeface="Calibri"/>
+              </a:rPr>
+              <a:t>DSES</a:t>
+            </a:r>
+            <a:r>
+              <a:rPr kumimoji="0" sz="900" b="0" i="0" u="none" strike="noStrike" kern="0" cap="none" spc="-15" normalizeH="0" baseline="0" noProof="0" dirty="0">
+                <a:ln>
+                  <a:noFill/>
+                </a:ln>
+                <a:solidFill>
+                  <a:srgbClr val="6A7982"/>
+                </a:solidFill>
+                <a:effectLst/>
+                <a:uLnTx/>
+                <a:uFillTx/>
+                <a:latin typeface="Calibri"/>
+                <a:cs typeface="Calibri"/>
+              </a:rPr>
+              <a:t> </a:t>
+            </a:r>
+            <a:r>
+              <a:rPr kumimoji="0" sz="900" b="0" i="0" u="none" strike="noStrike" kern="0" cap="none" spc="0" normalizeH="0" baseline="0" noProof="0" dirty="0">
+                <a:ln>
+                  <a:noFill/>
+                </a:ln>
+                <a:solidFill>
+                  <a:srgbClr val="6A7982"/>
+                </a:solidFill>
+                <a:effectLst/>
+                <a:uLnTx/>
+                <a:uFillTx/>
+                <a:latin typeface="Calibri"/>
+                <a:cs typeface="Calibri"/>
+              </a:rPr>
+              <a:t>Spectrum</a:t>
+            </a:r>
+            <a:r>
+              <a:rPr kumimoji="0" sz="900" b="0" i="0" u="none" strike="noStrike" kern="0" cap="none" spc="-5" normalizeH="0" baseline="0" noProof="0" dirty="0">
+                <a:ln>
+                  <a:noFill/>
+                </a:ln>
+                <a:solidFill>
+                  <a:srgbClr val="6A7982"/>
+                </a:solidFill>
+                <a:effectLst/>
+                <a:uLnTx/>
+                <a:uFillTx/>
+                <a:latin typeface="Calibri"/>
+                <a:cs typeface="Calibri"/>
+              </a:rPr>
+              <a:t> </a:t>
+            </a:r>
+            <a:r>
+              <a:rPr kumimoji="0" sz="900" b="0" i="0" u="none" strike="noStrike" kern="0" cap="none" spc="0" normalizeH="0" baseline="0" noProof="0" dirty="0">
+                <a:ln>
+                  <a:noFill/>
+                </a:ln>
+                <a:solidFill>
+                  <a:srgbClr val="6A7982"/>
+                </a:solidFill>
+                <a:effectLst/>
+                <a:uLnTx/>
+                <a:uFillTx/>
+                <a:latin typeface="Calibri"/>
+                <a:cs typeface="Calibri"/>
+              </a:rPr>
+              <a:t>Analyzer</a:t>
+            </a:r>
+            <a:r>
+              <a:rPr kumimoji="0" sz="900" b="0" i="0" u="none" strike="noStrike" kern="0" cap="none" spc="-5" normalizeH="0" baseline="0" noProof="0" dirty="0">
+                <a:ln>
+                  <a:noFill/>
+                </a:ln>
+                <a:solidFill>
+                  <a:srgbClr val="6A7982"/>
+                </a:solidFill>
+                <a:effectLst/>
+                <a:uLnTx/>
+                <a:uFillTx/>
+                <a:latin typeface="Calibri"/>
+                <a:cs typeface="Calibri"/>
+              </a:rPr>
+              <a:t> </a:t>
+            </a:r>
+            <a:r>
+              <a:rPr kumimoji="0" sz="900" b="0" i="0" u="none" strike="noStrike" kern="0" cap="none" spc="0" normalizeH="0" baseline="0" noProof="0" dirty="0">
+                <a:ln>
+                  <a:noFill/>
+                </a:ln>
+                <a:solidFill>
+                  <a:srgbClr val="6A7982"/>
+                </a:solidFill>
+                <a:effectLst/>
+                <a:uLnTx/>
+                <a:uFillTx/>
+                <a:latin typeface="Calibri"/>
+                <a:cs typeface="Calibri"/>
+              </a:rPr>
+              <a:t>—</a:t>
+            </a:r>
+            <a:r>
+              <a:rPr kumimoji="0" sz="900" b="0" i="0" u="none" strike="noStrike" kern="0" cap="none" spc="-10" normalizeH="0" baseline="0" noProof="0" dirty="0">
+                <a:ln>
+                  <a:noFill/>
+                </a:ln>
+                <a:solidFill>
+                  <a:srgbClr val="6A7982"/>
+                </a:solidFill>
+                <a:effectLst/>
+                <a:uLnTx/>
+                <a:uFillTx/>
+                <a:latin typeface="Calibri"/>
+                <a:cs typeface="Calibri"/>
+              </a:rPr>
+              <a:t> gpstime.com/sw_distribution/b210_sa </a:t>
+            </a:r>
+            <a:r>
+              <a:rPr kumimoji="0" sz="900" b="0" i="0" u="none" strike="noStrike" kern="0" cap="none" spc="0" normalizeH="0" baseline="0" noProof="0" dirty="0">
+                <a:ln>
+                  <a:noFill/>
+                </a:ln>
+                <a:solidFill>
+                  <a:srgbClr val="6A7982"/>
+                </a:solidFill>
+                <a:effectLst/>
+                <a:uLnTx/>
+                <a:uFillTx/>
+                <a:latin typeface="Calibri"/>
+                <a:cs typeface="Calibri"/>
+              </a:rPr>
+              <a:t>(free,</a:t>
+            </a:r>
+            <a:r>
+              <a:rPr kumimoji="0" sz="900" b="0" i="0" u="none" strike="noStrike" kern="0" cap="none" spc="-5" normalizeH="0" baseline="0" noProof="0" dirty="0">
+                <a:ln>
+                  <a:noFill/>
+                </a:ln>
+                <a:solidFill>
+                  <a:srgbClr val="6A7982"/>
+                </a:solidFill>
+                <a:effectLst/>
+                <a:uLnTx/>
+                <a:uFillTx/>
+                <a:latin typeface="Calibri"/>
+                <a:cs typeface="Calibri"/>
+              </a:rPr>
+              <a:t> </a:t>
+            </a:r>
+            <a:r>
+              <a:rPr kumimoji="0" sz="900" b="0" i="0" u="none" strike="noStrike" kern="0" cap="none" spc="0" normalizeH="0" baseline="0" noProof="0" dirty="0">
+                <a:ln>
+                  <a:noFill/>
+                </a:ln>
+                <a:solidFill>
+                  <a:srgbClr val="6A7982"/>
+                </a:solidFill>
+                <a:effectLst/>
+                <a:uLnTx/>
+                <a:uFillTx/>
+                <a:latin typeface="Calibri"/>
+                <a:cs typeface="Calibri"/>
+              </a:rPr>
+              <a:t>GPL)</a:t>
+            </a:r>
+            <a:r>
+              <a:rPr kumimoji="0" sz="900" b="0" i="0" u="none" strike="noStrike" kern="0" cap="none" spc="-15" normalizeH="0" baseline="0" noProof="0" dirty="0">
+                <a:ln>
+                  <a:noFill/>
+                </a:ln>
+                <a:solidFill>
+                  <a:srgbClr val="6A7982"/>
+                </a:solidFill>
+                <a:effectLst/>
+                <a:uLnTx/>
+                <a:uFillTx/>
+                <a:latin typeface="Calibri"/>
+                <a:cs typeface="Calibri"/>
+              </a:rPr>
+              <a:t> </a:t>
+            </a:r>
+            <a:r>
+              <a:rPr kumimoji="0" sz="900" b="0" i="0" u="none" strike="noStrike" kern="0" cap="none" spc="0" normalizeH="0" baseline="0" noProof="0" dirty="0">
+                <a:ln>
+                  <a:noFill/>
+                </a:ln>
+                <a:solidFill>
+                  <a:srgbClr val="6A7982"/>
+                </a:solidFill>
+                <a:effectLst/>
+                <a:uLnTx/>
+                <a:uFillTx/>
+                <a:latin typeface="Calibri"/>
+                <a:cs typeface="Calibri"/>
+              </a:rPr>
+              <a:t>—</a:t>
+            </a:r>
+            <a:r>
+              <a:rPr kumimoji="0" sz="900" b="0" i="0" u="none" strike="noStrike" kern="0" cap="none" spc="-10" normalizeH="0" baseline="0" noProof="0" dirty="0">
+                <a:ln>
+                  <a:noFill/>
+                </a:ln>
+                <a:solidFill>
+                  <a:srgbClr val="6A7982"/>
+                </a:solidFill>
+                <a:effectLst/>
+                <a:uLnTx/>
+                <a:uFillTx/>
+                <a:latin typeface="Calibri"/>
+                <a:cs typeface="Calibri"/>
+              </a:rPr>
+              <a:t> </a:t>
+            </a:r>
+            <a:r>
+              <a:rPr kumimoji="0" sz="900" b="0" i="0" u="none" strike="noStrike" kern="0" cap="none" spc="0" normalizeH="0" baseline="0" noProof="0" dirty="0">
+                <a:ln>
+                  <a:noFill/>
+                </a:ln>
+                <a:solidFill>
+                  <a:srgbClr val="6A7982"/>
+                </a:solidFill>
+                <a:effectLst/>
+                <a:uLnTx/>
+                <a:uFillTx/>
+                <a:latin typeface="Calibri"/>
+                <a:cs typeface="Calibri"/>
+              </a:rPr>
+              <a:t>Richard</a:t>
+            </a:r>
+            <a:r>
+              <a:rPr kumimoji="0" sz="900" b="0" i="0" u="none" strike="noStrike" kern="0" cap="none" spc="-10" normalizeH="0" baseline="0" noProof="0" dirty="0">
+                <a:ln>
+                  <a:noFill/>
+                </a:ln>
+                <a:solidFill>
+                  <a:srgbClr val="6A7982"/>
+                </a:solidFill>
+                <a:effectLst/>
+                <a:uLnTx/>
+                <a:uFillTx/>
+                <a:latin typeface="Calibri"/>
+                <a:cs typeface="Calibri"/>
+              </a:rPr>
+              <a:t> </a:t>
+            </a:r>
+            <a:r>
+              <a:rPr kumimoji="0" sz="900" b="0" i="0" u="none" strike="noStrike" kern="0" cap="none" spc="0" normalizeH="0" baseline="0" noProof="0" dirty="0">
+                <a:ln>
+                  <a:noFill/>
+                </a:ln>
+                <a:solidFill>
+                  <a:srgbClr val="6A7982"/>
+                </a:solidFill>
+                <a:effectLst/>
+                <a:uLnTx/>
+                <a:uFillTx/>
+                <a:latin typeface="Calibri"/>
+                <a:cs typeface="Calibri"/>
+              </a:rPr>
+              <a:t>Hambly</a:t>
+            </a:r>
+            <a:r>
+              <a:rPr kumimoji="0" sz="900" b="0" i="0" u="none" strike="noStrike" kern="0" cap="none" spc="-5" normalizeH="0" baseline="0" noProof="0" dirty="0">
+                <a:ln>
+                  <a:noFill/>
+                </a:ln>
+                <a:solidFill>
+                  <a:srgbClr val="6A7982"/>
+                </a:solidFill>
+                <a:effectLst/>
+                <a:uLnTx/>
+                <a:uFillTx/>
+                <a:latin typeface="Calibri"/>
+                <a:cs typeface="Calibri"/>
+              </a:rPr>
+              <a:t> </a:t>
+            </a:r>
+            <a:r>
+              <a:rPr kumimoji="0" sz="900" b="0" i="0" u="none" strike="noStrike" kern="0" cap="none" spc="0" normalizeH="0" baseline="0" noProof="0" dirty="0">
+                <a:ln>
+                  <a:noFill/>
+                </a:ln>
+                <a:solidFill>
+                  <a:srgbClr val="6A7982"/>
+                </a:solidFill>
+                <a:effectLst/>
+                <a:uLnTx/>
+                <a:uFillTx/>
+                <a:latin typeface="Calibri"/>
+                <a:cs typeface="Calibri"/>
+              </a:rPr>
+              <a:t>K0GD</a:t>
+            </a:r>
+            <a:r>
+              <a:rPr kumimoji="0" sz="900" b="0" i="0" u="none" strike="noStrike" kern="0" cap="none" spc="-10" normalizeH="0" baseline="0" noProof="0" dirty="0">
+                <a:ln>
+                  <a:noFill/>
+                </a:ln>
+                <a:solidFill>
+                  <a:srgbClr val="6A7982"/>
+                </a:solidFill>
+                <a:effectLst/>
+                <a:uLnTx/>
+                <a:uFillTx/>
+                <a:latin typeface="Calibri"/>
+                <a:cs typeface="Calibri"/>
+              </a:rPr>
+              <a:t> </a:t>
+            </a:r>
+            <a:r>
+              <a:rPr kumimoji="0" sz="900" b="0" i="0" u="none" strike="noStrike" kern="0" cap="none" spc="0" normalizeH="0" baseline="0" noProof="0" dirty="0">
+                <a:ln>
+                  <a:noFill/>
+                </a:ln>
+                <a:solidFill>
+                  <a:srgbClr val="6A7982"/>
+                </a:solidFill>
+                <a:effectLst/>
+                <a:uLnTx/>
+                <a:uFillTx/>
+                <a:latin typeface="Calibri"/>
+                <a:cs typeface="Calibri"/>
+              </a:rPr>
+              <a:t>—</a:t>
+            </a:r>
+            <a:r>
+              <a:rPr kumimoji="0" sz="900" b="0" i="0" u="none" strike="noStrike" kern="0" cap="none" spc="-10" normalizeH="0" baseline="0" noProof="0" dirty="0">
+                <a:ln>
+                  <a:noFill/>
+                </a:ln>
+                <a:solidFill>
+                  <a:srgbClr val="6A7982"/>
+                </a:solidFill>
+                <a:effectLst/>
+                <a:uLnTx/>
+                <a:uFillTx/>
+                <a:latin typeface="Calibri"/>
+                <a:cs typeface="Calibri"/>
+              </a:rPr>
+              <a:t> </a:t>
+            </a:r>
+            <a:r>
+              <a:rPr kumimoji="0" sz="900" b="0" i="0" u="none" strike="noStrike" kern="0" cap="none" spc="0" normalizeH="0" baseline="0" noProof="0" dirty="0">
+                <a:ln>
+                  <a:noFill/>
+                </a:ln>
+                <a:solidFill>
+                  <a:srgbClr val="6A7982"/>
+                </a:solidFill>
+                <a:effectLst/>
+                <a:uLnTx/>
+                <a:uFillTx/>
+                <a:latin typeface="Calibri"/>
+                <a:cs typeface="Calibri"/>
+              </a:rPr>
+              <a:t>SARA</a:t>
+            </a:r>
+            <a:r>
+              <a:rPr kumimoji="0" sz="900" b="0" i="0" u="none" strike="noStrike" kern="0" cap="none" spc="-5" normalizeH="0" baseline="0" noProof="0" dirty="0">
+                <a:ln>
+                  <a:noFill/>
+                </a:ln>
+                <a:solidFill>
+                  <a:srgbClr val="6A7982"/>
+                </a:solidFill>
+                <a:effectLst/>
+                <a:uLnTx/>
+                <a:uFillTx/>
+                <a:latin typeface="Calibri"/>
+                <a:cs typeface="Calibri"/>
+              </a:rPr>
+              <a:t> </a:t>
+            </a:r>
+            <a:r>
+              <a:rPr kumimoji="0" sz="900" b="0" i="0" u="none" strike="noStrike" kern="0" cap="none" spc="0" normalizeH="0" baseline="0" noProof="0" dirty="0">
+                <a:ln>
+                  <a:noFill/>
+                </a:ln>
+                <a:solidFill>
+                  <a:srgbClr val="6A7982"/>
+                </a:solidFill>
+                <a:effectLst/>
+                <a:uLnTx/>
+                <a:uFillTx/>
+                <a:latin typeface="Calibri"/>
+                <a:cs typeface="Calibri"/>
+              </a:rPr>
+              <a:t>&amp;</a:t>
+            </a:r>
+            <a:r>
+              <a:rPr kumimoji="0" sz="900" b="0" i="0" u="none" strike="noStrike" kern="0" cap="none" spc="-15" normalizeH="0" baseline="0" noProof="0" dirty="0">
+                <a:ln>
+                  <a:noFill/>
+                </a:ln>
+                <a:solidFill>
+                  <a:srgbClr val="6A7982"/>
+                </a:solidFill>
+                <a:effectLst/>
+                <a:uLnTx/>
+                <a:uFillTx/>
+                <a:latin typeface="Calibri"/>
+                <a:cs typeface="Calibri"/>
+              </a:rPr>
+              <a:t> </a:t>
+            </a:r>
+            <a:r>
+              <a:rPr kumimoji="0" sz="900" b="0" i="0" u="none" strike="noStrike" kern="0" cap="none" spc="0" normalizeH="0" baseline="0" noProof="0" dirty="0">
+                <a:ln>
+                  <a:noFill/>
+                </a:ln>
+                <a:solidFill>
+                  <a:srgbClr val="6A7982"/>
+                </a:solidFill>
+                <a:effectLst/>
+                <a:uLnTx/>
+                <a:uFillTx/>
+                <a:latin typeface="Calibri"/>
+                <a:cs typeface="Calibri"/>
+              </a:rPr>
+              <a:t>Radio</a:t>
+            </a:r>
+            <a:r>
+              <a:rPr kumimoji="0" sz="900" b="0" i="0" u="none" strike="noStrike" kern="0" cap="none" spc="-10" normalizeH="0" baseline="0" noProof="0" dirty="0">
+                <a:ln>
+                  <a:noFill/>
+                </a:ln>
+                <a:solidFill>
+                  <a:srgbClr val="6A7982"/>
+                </a:solidFill>
+                <a:effectLst/>
+                <a:uLnTx/>
+                <a:uFillTx/>
+                <a:latin typeface="Calibri"/>
+                <a:cs typeface="Calibri"/>
+              </a:rPr>
+              <a:t> </a:t>
+            </a:r>
+            <a:r>
+              <a:rPr kumimoji="0" sz="900" b="0" i="0" u="none" strike="noStrike" kern="0" cap="none" spc="0" normalizeH="0" baseline="0" noProof="0" dirty="0">
+                <a:ln>
+                  <a:noFill/>
+                </a:ln>
+                <a:solidFill>
+                  <a:srgbClr val="6A7982"/>
+                </a:solidFill>
+                <a:effectLst/>
+                <a:uLnTx/>
+                <a:uFillTx/>
+                <a:latin typeface="Calibri"/>
+                <a:cs typeface="Calibri"/>
+              </a:rPr>
+              <a:t>Jove</a:t>
+            </a:r>
+            <a:r>
+              <a:rPr kumimoji="0" sz="900" b="0" i="0" u="none" strike="noStrike" kern="0" cap="none" spc="-5" normalizeH="0" baseline="0" noProof="0" dirty="0">
+                <a:ln>
+                  <a:noFill/>
+                </a:ln>
+                <a:solidFill>
+                  <a:srgbClr val="6A7982"/>
+                </a:solidFill>
+                <a:effectLst/>
+                <a:uLnTx/>
+                <a:uFillTx/>
+                <a:latin typeface="Calibri"/>
+                <a:cs typeface="Calibri"/>
+              </a:rPr>
+              <a:t> </a:t>
+            </a:r>
+            <a:r>
+              <a:rPr kumimoji="0" sz="900" b="0" i="0" u="none" strike="noStrike" kern="0" cap="none" spc="0" normalizeH="0" baseline="0" noProof="0" dirty="0">
+                <a:ln>
+                  <a:noFill/>
+                </a:ln>
+                <a:solidFill>
+                  <a:srgbClr val="6A7982"/>
+                </a:solidFill>
+                <a:effectLst/>
+                <a:uLnTx/>
+                <a:uFillTx/>
+                <a:latin typeface="Calibri"/>
+                <a:cs typeface="Calibri"/>
+              </a:rPr>
+              <a:t>Eastern</a:t>
+            </a:r>
+            <a:r>
+              <a:rPr kumimoji="0" sz="900" b="0" i="0" u="none" strike="noStrike" kern="0" cap="none" spc="-10" normalizeH="0" baseline="0" noProof="0" dirty="0">
+                <a:ln>
+                  <a:noFill/>
+                </a:ln>
+                <a:solidFill>
+                  <a:srgbClr val="6A7982"/>
+                </a:solidFill>
+                <a:effectLst/>
+                <a:uLnTx/>
+                <a:uFillTx/>
+                <a:latin typeface="Calibri"/>
+                <a:cs typeface="Calibri"/>
+              </a:rPr>
+              <a:t> </a:t>
+            </a:r>
+            <a:r>
+              <a:rPr kumimoji="0" sz="900" b="0" i="0" u="none" strike="noStrike" kern="0" cap="none" spc="0" normalizeH="0" baseline="0" noProof="0" dirty="0">
+                <a:ln>
+                  <a:noFill/>
+                </a:ln>
+                <a:solidFill>
+                  <a:srgbClr val="6A7982"/>
+                </a:solidFill>
+                <a:effectLst/>
+                <a:uLnTx/>
+                <a:uFillTx/>
+                <a:latin typeface="Calibri"/>
+                <a:cs typeface="Calibri"/>
+              </a:rPr>
+              <a:t>Conference</a:t>
+            </a:r>
+            <a:r>
+              <a:rPr kumimoji="0" sz="900" b="0" i="0" u="none" strike="noStrike" kern="0" cap="none" spc="-5" normalizeH="0" baseline="0" noProof="0" dirty="0">
+                <a:ln>
+                  <a:noFill/>
+                </a:ln>
+                <a:solidFill>
+                  <a:srgbClr val="6A7982"/>
+                </a:solidFill>
+                <a:effectLst/>
+                <a:uLnTx/>
+                <a:uFillTx/>
+                <a:latin typeface="Calibri"/>
+                <a:cs typeface="Calibri"/>
+              </a:rPr>
+              <a:t> </a:t>
+            </a:r>
+            <a:r>
+              <a:rPr kumimoji="0" sz="900" b="0" i="0" u="none" strike="noStrike" kern="0" cap="none" spc="-20" normalizeH="0" baseline="0" noProof="0" dirty="0">
+                <a:ln>
+                  <a:noFill/>
+                </a:ln>
+                <a:solidFill>
+                  <a:srgbClr val="6A7982"/>
+                </a:solidFill>
+                <a:effectLst/>
+                <a:uLnTx/>
+                <a:uFillTx/>
+                <a:latin typeface="Calibri"/>
+                <a:cs typeface="Calibri"/>
+              </a:rPr>
+              <a:t>2026</a:t>
+            </a:r>
+          </a:p>
+        </p:txBody>
+      </p:sp>
+      <p:sp>
+        <p:nvSpPr>
+          <p:cNvPr id="13" name="Slide Number Placeholder 39">
+            <a:extLst>
+              <a:ext uri="{FF2B5EF4-FFF2-40B4-BE49-F238E27FC236}">
+                <a16:creationId xmlns:a16="http://schemas.microsoft.com/office/drawing/2014/main" id="{31875153-FBAD-0E32-E697-66CB951A25AB}"/>
+              </a:ext>
+            </a:extLst>
+          </p:cNvPr>
+          <p:cNvSpPr txBox="1">
+            <a:spLocks/>
+          </p:cNvSpPr>
+          <p:nvPr/>
+        </p:nvSpPr>
+        <p:spPr>
+          <a:xfrm>
+            <a:off x="11477880" y="6473952"/>
+            <a:ext cx="457200" cy="228600"/>
+          </a:xfrm>
+          <a:prstGeom prst="rect">
+            <a:avLst/>
+          </a:prstGeom>
+        </p:spPr>
+        <p:txBody>
+          <a:bodyPr vert="horz" lIns="0" tIns="0" rIns="0" bIns="0" rtlCol="0" anchor="ctr"/>
+          <a:lstStyle>
+            <a:lvl1pPr marL="0" algn="l" defTabSz="914400" rtl="0" eaLnBrk="1" latinLnBrk="0" hangingPunct="1">
+              <a:defRPr sz="1800" kern="1200">
+                <a:solidFill>
+                  <a:schemeClr val="tx1"/>
+                </a:solidFill>
+                <a:latin typeface="+mn-lt"/>
+                <a:ea typeface="+mn-ea"/>
+                <a:cs typeface="+mn-cs"/>
+              </a:defRPr>
+            </a:lvl1pPr>
+            <a:lvl2pPr marL="457200" algn="l" defTabSz="914400" rtl="0" eaLnBrk="1" latinLnBrk="0" hangingPunct="1">
+              <a:defRPr sz="1800" kern="1200">
+                <a:solidFill>
+                  <a:schemeClr val="tx1"/>
+                </a:solidFill>
+                <a:latin typeface="+mn-lt"/>
+                <a:ea typeface="+mn-ea"/>
+                <a:cs typeface="+mn-cs"/>
+              </a:defRPr>
+            </a:lvl2pPr>
+            <a:lvl3pPr marL="914400" algn="l" defTabSz="914400" rtl="0" eaLnBrk="1" latinLnBrk="0" hangingPunct="1">
+              <a:defRPr sz="1800" kern="1200">
+                <a:solidFill>
+                  <a:schemeClr val="tx1"/>
+                </a:solidFill>
+                <a:latin typeface="+mn-lt"/>
+                <a:ea typeface="+mn-ea"/>
+                <a:cs typeface="+mn-cs"/>
+              </a:defRPr>
+            </a:lvl3pPr>
+            <a:lvl4pPr marL="1371600" algn="l" defTabSz="914400" rtl="0" eaLnBrk="1" latinLnBrk="0" hangingPunct="1">
+              <a:defRPr sz="1800" kern="1200">
+                <a:solidFill>
+                  <a:schemeClr val="tx1"/>
+                </a:solidFill>
+                <a:latin typeface="+mn-lt"/>
+                <a:ea typeface="+mn-ea"/>
+                <a:cs typeface="+mn-cs"/>
+              </a:defRPr>
+            </a:lvl4pPr>
+            <a:lvl5pPr marL="1828800" algn="l" defTabSz="914400" rtl="0" eaLnBrk="1" latinLnBrk="0" hangingPunct="1">
+              <a:defRPr sz="1800" kern="1200">
+                <a:solidFill>
+                  <a:schemeClr val="tx1"/>
+                </a:solidFill>
+                <a:latin typeface="+mn-lt"/>
+                <a:ea typeface="+mn-ea"/>
+                <a:cs typeface="+mn-cs"/>
+              </a:defRPr>
+            </a:lvl5pPr>
+            <a:lvl6pPr marL="2286000" algn="l" defTabSz="914400" rtl="0" eaLnBrk="1" latinLnBrk="0" hangingPunct="1">
+              <a:defRPr sz="1800" kern="1200">
+                <a:solidFill>
+                  <a:schemeClr val="tx1"/>
+                </a:solidFill>
+                <a:latin typeface="+mn-lt"/>
+                <a:ea typeface="+mn-ea"/>
+                <a:cs typeface="+mn-cs"/>
+              </a:defRPr>
+            </a:lvl6pPr>
+            <a:lvl7pPr marL="2743200" algn="l" defTabSz="914400" rtl="0" eaLnBrk="1" latinLnBrk="0" hangingPunct="1">
+              <a:defRPr sz="1800" kern="1200">
+                <a:solidFill>
+                  <a:schemeClr val="tx1"/>
+                </a:solidFill>
+                <a:latin typeface="+mn-lt"/>
+                <a:ea typeface="+mn-ea"/>
+                <a:cs typeface="+mn-cs"/>
+              </a:defRPr>
+            </a:lvl7pPr>
+            <a:lvl8pPr marL="3200400" algn="l" defTabSz="914400" rtl="0" eaLnBrk="1" latinLnBrk="0" hangingPunct="1">
+              <a:defRPr sz="1800" kern="1200">
+                <a:solidFill>
+                  <a:schemeClr val="tx1"/>
+                </a:solidFill>
+                <a:latin typeface="+mn-lt"/>
+                <a:ea typeface="+mn-ea"/>
+                <a:cs typeface="+mn-cs"/>
+              </a:defRPr>
+            </a:lvl8pPr>
+            <a:lvl9pPr marL="3657600" algn="l" defTabSz="914400" rtl="0" eaLnBrk="1" latinLnBrk="0" hangingPunct="1">
+              <a:defRPr sz="1800" kern="1200">
+                <a:solidFill>
+                  <a:schemeClr val="tx1"/>
+                </a:solidFill>
+                <a:latin typeface="+mn-lt"/>
+                <a:ea typeface="+mn-ea"/>
+                <a:cs typeface="+mn-cs"/>
+              </a:defRPr>
+            </a:lvl9pPr>
+          </a:lstStyle>
+          <a:p>
+            <a:pPr algn="r"/>
+            <a:fld id="{87F59D88-6D56-4DAF-97E6-F5488F2333B3}" type="slidenum">
+              <a:rPr lang="en-US" sz="850" smtClean="0">
+                <a:solidFill>
+                  <a:srgbClr val="6B7A82"/>
+                </a:solidFill>
+                <a:latin typeface="Calibri"/>
+              </a:rPr>
+              <a:pPr algn="r"/>
+              <a:t>17</a:t>
+            </a:fld>
+            <a:endParaRPr lang="en-US" sz="850" dirty="0"/>
+          </a:p>
+        </p:txBody>
+      </p:sp>
+    </p:spTree>
+  </p:cSld>
+  <p:clrMapOvr>
+    <a:masterClrMapping/>
+  </p:clrMapOvr>
+</p:sld>
+</file>
+
+<file path=ppt/slides/slide18.xml><?xml version="1.0" encoding="utf-8"?>
 <p:sld xmlns:a="http://schemas.openxmlformats.org/drawingml/2006/main" xmlns:r="http://schemas.openxmlformats.org/officeDocument/2006/relationships" xmlns:p="http://schemas.openxmlformats.org/presentationml/2006/main">
   <p:cSld name="Slide 16">
     <p:bg>
@@ -17644,6 +23746,289 @@
 </file>
 
 <file path=ppt/theme/theme2.xml><?xml version="1.0" encoding="utf-8"?>
+<a:theme xmlns:a="http://schemas.openxmlformats.org/drawingml/2006/main" name="1_Office Theme">
+  <a:themeElements>
+    <a:clrScheme name="Office">
+      <a:dk1>
+        <a:sysClr val="windowText" lastClr="000000"/>
+      </a:dk1>
+      <a:lt1>
+        <a:sysClr val="window" lastClr="FFFFFF"/>
+      </a:lt1>
+      <a:dk2>
+        <a:srgbClr val="1F497D"/>
+      </a:dk2>
+      <a:lt2>
+        <a:srgbClr val="EEECE1"/>
+      </a:lt2>
+      <a:accent1>
+        <a:srgbClr val="4F81BD"/>
+      </a:accent1>
+      <a:accent2>
+        <a:srgbClr val="C0504D"/>
+      </a:accent2>
+      <a:accent3>
+        <a:srgbClr val="9BBB59"/>
+      </a:accent3>
+      <a:accent4>
+        <a:srgbClr val="8064A2"/>
+      </a:accent4>
+      <a:accent5>
+        <a:srgbClr val="4BACC6"/>
+      </a:accent5>
+      <a:accent6>
+        <a:srgbClr val="F79646"/>
+      </a:accent6>
+      <a:hlink>
+        <a:srgbClr val="0000FF"/>
+      </a:hlink>
+      <a:folHlink>
+        <a:srgbClr val="800080"/>
+      </a:folHlink>
+    </a:clrScheme>
+    <a:fontScheme name="Office">
+      <a:majorFont>
+        <a:latin typeface="Calibri"/>
+        <a:ea typeface=""/>
+        <a:cs typeface=""/>
+        <a:font script="Jpan" typeface="ＭＳ Ｐゴシック"/>
+        <a:font script="Hang" typeface="맑은 고딕"/>
+        <a:font script="Hans" typeface="宋体"/>
+        <a:font script="Hant" typeface="新細明體"/>
+        <a:font script="Arab" typeface="Times New Roman"/>
+        <a:font script="Hebr" typeface="Times New Roman"/>
+        <a:font script="Thai" typeface="Angsana New"/>
+        <a:font script="Ethi" typeface="Nyala"/>
+        <a:font script="Beng" typeface="Vrinda"/>
+        <a:font script="Gujr" typeface="Shruti"/>
+        <a:font script="Khmr" typeface="MoolBoran"/>
+        <a:font script="Knda" typeface="Tunga"/>
+        <a:font script="Guru" typeface="Raavi"/>
+        <a:font script="Cans" typeface="Euphemia"/>
+        <a:font script="Cher" typeface="Plantagenet Cherokee"/>
+        <a:font script="Yiii" typeface="Microsoft Yi Baiti"/>
+        <a:font script="Tibt" typeface="Microsoft Himalaya"/>
+        <a:font script="Thaa" typeface="MV Boli"/>
+        <a:font script="Deva" typeface="Mangal"/>
+        <a:font script="Telu" typeface="Gautami"/>
+        <a:font script="Taml" typeface="Latha"/>
+        <a:font script="Syrc" typeface="Estrangelo Edessa"/>
+        <a:font script="Orya" typeface="Kalinga"/>
+        <a:font script="Mlym" typeface="Kartika"/>
+        <a:font script="Laoo" typeface="DokChampa"/>
+        <a:font script="Sinh" typeface="Iskoola Pota"/>
+        <a:font script="Mong" typeface="Mongolian Baiti"/>
+        <a:font script="Viet" typeface="Times New Roman"/>
+        <a:font script="Uigh" typeface="Microsoft Uighur"/>
+      </a:majorFont>
+      <a:minorFont>
+        <a:latin typeface="Calibri"/>
+        <a:ea typeface=""/>
+        <a:cs typeface=""/>
+        <a:font script="Jpan" typeface="ＭＳ Ｐゴシック"/>
+        <a:font script="Hang" typeface="맑은 고딕"/>
+        <a:font script="Hans" typeface="宋体"/>
+        <a:font script="Hant" typeface="新細明體"/>
+        <a:font script="Arab" typeface="Arial"/>
+        <a:font script="Hebr" typeface="Arial"/>
+        <a:font script="Thai" typeface="Cordia New"/>
+        <a:font script="Ethi" typeface="Nyala"/>
+        <a:font script="Beng" typeface="Vrinda"/>
+        <a:font script="Gujr" typeface="Shruti"/>
+        <a:font script="Khmr" typeface="DaunPenh"/>
+        <a:font script="Knda" typeface="Tunga"/>
+        <a:font script="Guru" typeface="Raavi"/>
+        <a:font script="Cans" typeface="Euphemia"/>
+        <a:font script="Cher" typeface="Plantagenet Cherokee"/>
+        <a:font script="Yiii" typeface="Microsoft Yi Baiti"/>
+        <a:font script="Tibt" typeface="Microsoft Himalaya"/>
+        <a:font script="Thaa" typeface="MV Boli"/>
+        <a:font script="Deva" typeface="Mangal"/>
+        <a:font script="Telu" typeface="Gautami"/>
+        <a:font script="Taml" typeface="Latha"/>
+        <a:font script="Syrc" typeface="Estrangelo Edessa"/>
+        <a:font script="Orya" typeface="Kalinga"/>
+        <a:font script="Mlym" typeface="Kartika"/>
+        <a:font script="Laoo" typeface="DokChampa"/>
+        <a:font script="Sinh" typeface="Iskoola Pota"/>
+        <a:font script="Mong" typeface="Mongolian Baiti"/>
+        <a:font script="Viet" typeface="Arial"/>
+        <a:font script="Uigh" typeface="Microsoft Uighur"/>
+      </a:minorFont>
+    </a:fontScheme>
+    <a:fmtScheme name="Office">
+      <a:fillStyleLst>
+        <a:solidFill>
+          <a:schemeClr val="phClr"/>
+        </a:solidFill>
+        <a:gradFill rotWithShape="1">
+          <a:gsLst>
+            <a:gs pos="0">
+              <a:schemeClr val="phClr">
+                <a:tint val="50000"/>
+                <a:satMod val="300000"/>
+              </a:schemeClr>
+            </a:gs>
+            <a:gs pos="35000">
+              <a:schemeClr val="phClr">
+                <a:tint val="37000"/>
+                <a:satMod val="300000"/>
+              </a:schemeClr>
+            </a:gs>
+            <a:gs pos="100000">
+              <a:schemeClr val="phClr">
+                <a:tint val="15000"/>
+                <a:satMod val="350000"/>
+              </a:schemeClr>
+            </a:gs>
+          </a:gsLst>
+          <a:lin ang="16200000" scaled="1"/>
+        </a:gradFill>
+        <a:gradFill rotWithShape="1">
+          <a:gsLst>
+            <a:gs pos="0">
+              <a:schemeClr val="phClr">
+                <a:shade val="51000"/>
+                <a:satMod val="130000"/>
+              </a:schemeClr>
+            </a:gs>
+            <a:gs pos="80000">
+              <a:schemeClr val="phClr">
+                <a:shade val="93000"/>
+                <a:satMod val="130000"/>
+              </a:schemeClr>
+            </a:gs>
+            <a:gs pos="100000">
+              <a:schemeClr val="phClr">
+                <a:shade val="94000"/>
+                <a:satMod val="135000"/>
+              </a:schemeClr>
+            </a:gs>
+          </a:gsLst>
+          <a:lin ang="16200000" scaled="0"/>
+        </a:gradFill>
+      </a:fillStyleLst>
+      <a:lnStyleLst>
+        <a:ln w="9525" cap="flat" cmpd="sng" algn="ctr">
+          <a:solidFill>
+            <a:schemeClr val="phClr">
+              <a:shade val="95000"/>
+              <a:satMod val="105000"/>
+            </a:schemeClr>
+          </a:solidFill>
+          <a:prstDash val="solid"/>
+        </a:ln>
+        <a:ln w="25400" cap="flat" cmpd="sng" algn="ctr">
+          <a:solidFill>
+            <a:schemeClr val="phClr"/>
+          </a:solidFill>
+          <a:prstDash val="solid"/>
+        </a:ln>
+        <a:ln w="38100" cap="flat" cmpd="sng" algn="ctr">
+          <a:solidFill>
+            <a:schemeClr val="phClr"/>
+          </a:solidFill>
+          <a:prstDash val="solid"/>
+        </a:ln>
+      </a:lnStyleLst>
+      <a:effectStyleLst>
+        <a:effectStyle>
+          <a:effectLst>
+            <a:outerShdw blurRad="40000" dist="20000" dir="5400000" rotWithShape="0">
+              <a:srgbClr val="000000">
+                <a:alpha val="38000"/>
+              </a:srgbClr>
+            </a:outerShdw>
+          </a:effectLst>
+        </a:effectStyle>
+        <a:effectStyle>
+          <a:effectLst>
+            <a:outerShdw blurRad="40000" dist="23000" dir="5400000" rotWithShape="0">
+              <a:srgbClr val="000000">
+                <a:alpha val="35000"/>
+              </a:srgbClr>
+            </a:outerShdw>
+          </a:effectLst>
+        </a:effectStyle>
+        <a:effectStyle>
+          <a:effectLst>
+            <a:outerShdw blurRad="40000" dist="23000" dir="5400000" rotWithShape="0">
+              <a:srgbClr val="000000">
+                <a:alpha val="35000"/>
+              </a:srgbClr>
+            </a:outerShdw>
+          </a:effectLst>
+          <a:scene3d>
+            <a:camera prst="orthographicFront">
+              <a:rot lat="0" lon="0" rev="0"/>
+            </a:camera>
+            <a:lightRig rig="threePt" dir="t">
+              <a:rot lat="0" lon="0" rev="1200000"/>
+            </a:lightRig>
+          </a:scene3d>
+          <a:sp3d>
+            <a:bevelT w="63500" h="25400"/>
+          </a:sp3d>
+        </a:effectStyle>
+      </a:effectStyleLst>
+      <a:bgFillStyleLst>
+        <a:solidFill>
+          <a:schemeClr val="phClr"/>
+        </a:solidFill>
+        <a:gradFill rotWithShape="1">
+          <a:gsLst>
+            <a:gs pos="0">
+              <a:schemeClr val="phClr">
+                <a:tint val="40000"/>
+                <a:satMod val="350000"/>
+              </a:schemeClr>
+            </a:gs>
+            <a:gs pos="40000">
+              <a:schemeClr val="phClr">
+                <a:tint val="45000"/>
+                <a:shade val="99000"/>
+                <a:satMod val="350000"/>
+              </a:schemeClr>
+            </a:gs>
+            <a:gs pos="100000">
+              <a:schemeClr val="phClr">
+                <a:shade val="20000"/>
+                <a:satMod val="255000"/>
+              </a:schemeClr>
+            </a:gs>
+          </a:gsLst>
+          <a:path path="circle">
+            <a:fillToRect l="50000" t="-80000" r="50000" b="180000"/>
+          </a:path>
+        </a:gradFill>
+        <a:gradFill rotWithShape="1">
+          <a:gsLst>
+            <a:gs pos="0">
+              <a:schemeClr val="phClr">
+                <a:tint val="80000"/>
+                <a:satMod val="300000"/>
+              </a:schemeClr>
+            </a:gs>
+            <a:gs pos="100000">
+              <a:schemeClr val="phClr">
+                <a:shade val="30000"/>
+                <a:satMod val="200000"/>
+              </a:schemeClr>
+            </a:gs>
+          </a:gsLst>
+          <a:path path="circle">
+            <a:fillToRect l="50000" t="50000" r="50000" b="50000"/>
+          </a:path>
+        </a:gradFill>
+      </a:bgFillStyleLst>
+    </a:fmtScheme>
+  </a:themeElements>
+  <a:objectDefaults/>
+  <a:extraClrSchemeLst/>
+</a:theme>
+</file>
+
+<file path=ppt/theme/theme3.xml><?xml version="1.0" encoding="utf-8"?>
 <a:theme xmlns:a="http://schemas.openxmlformats.org/drawingml/2006/main" name="Office Theme">
   <a:themeElements>
     <a:clrScheme name="Office">

--- a/reports/sara-2026/Lowering_the_Barrier_to_Radio_Astronomy_SARA_2026.pptx
+++ b/reports/sara-2026/Lowering_the_Barrier_to_Radio_Astronomy_SARA_2026.pptx
@@ -15369,7 +15369,7 @@
                 <a:ea typeface="Calibri" pitchFamily="34" charset="-122"/>
                 <a:cs typeface="Calibri" pitchFamily="34" charset="-120"/>
               </a:rPr>
-              <a:t>   •   rick@cnssys.com   •   https://dses.science</a:t>
+              <a:t>   •   k0gd@cnssys.com   •   https://dses.science</a:t>
             </a:r>
             <a:endParaRPr lang="en-US" sz="1400" dirty="0"/>
           </a:p>
